--- a/uganda-p7-mvp/p7_t1_integrated_science_1205/p7_t1_integrated_science_1205.pptx
+++ b/uganda-p7-mvp/p7_t1_integrated_science_1205/p7_t1_integrated_science_1205.pptx
@@ -11,6 +11,8 @@
     <p:sldId id="259" r:id="rId10"/>
     <p:sldId id="260" r:id="rId11"/>
     <p:sldId id="261" r:id="rId12"/>
+    <p:sldId id="262" r:id="rId13"/>
+    <p:sldId id="263" r:id="rId14"/>
   </p:sldIdLst>
   <p:sldSz cx="12191695" cy="6858000" type="screen4x3"/>
   <p:notesSz cx="6858000" cy="9144000"/>
@@ -3202,7 +3204,7 @@
           <a:p>
             <a:r>
               <a:rPr sz="3000" b="1"/>
-              <a:t>Looking Back at Our Experiments</a:t>
+              <a:t>Learning goal</a:t>
             </a:r>
           </a:p>
         </p:txBody>
@@ -3236,7 +3238,7 @@
               <a:defRPr sz="2200"/>
             </a:pPr>
             <a:r>
-              <a:t>Reviewing the Muscular-Skeletal model.</a:t>
+              <a:t>Recalls and identifies key experiments conducted during Term 1.</a:t>
             </a:r>
           </a:p>
           <a:p>
@@ -3247,29 +3249,7 @@
               <a:defRPr sz="2200"/>
             </a:pPr>
             <a:r>
-              <a:t>Recalling the Electricity and Magnetism circuit.</a:t>
-            </a:r>
-          </a:p>
-          <a:p>
-            <a:pPr>
-              <a:spcAft>
-                <a:spcPts val="800"/>
-              </a:spcAft>
-              <a:defRPr sz="2200"/>
-            </a:pPr>
-            <a:r>
-              <a:t>Remembering the Energy Resources (biogas/solar) project.</a:t>
-            </a:r>
-          </a:p>
-          <a:p>
-            <a:pPr>
-              <a:spcAft>
-                <a:spcPts val="800"/>
-              </a:spcAft>
-              <a:defRPr sz="2200"/>
-            </a:pPr>
-            <a:r>
-              <a:t>Identifying materials used.</a:t>
+              <a:t>Lesson focus: 3.4 Energy Resources in the Environment / Final Review</a:t>
             </a:r>
           </a:p>
         </p:txBody>
@@ -3316,7 +3296,7 @@
           <a:p>
             <a:r>
               <a:rPr sz="3000" b="1"/>
-              <a:t>How to Write a Science Report</a:t>
+              <a:t>Looking Back at Our Experiments</a:t>
             </a:r>
           </a:p>
         </p:txBody>
@@ -3350,7 +3330,7 @@
               <a:defRPr sz="2200"/>
             </a:pPr>
             <a:r>
-              <a:t>Title and Aim (What and Why).</a:t>
+              <a:t>Reviewing the Muscular-Skeletal model.</a:t>
             </a:r>
           </a:p>
           <a:p>
@@ -3361,7 +3341,7 @@
               <a:defRPr sz="2200"/>
             </a:pPr>
             <a:r>
-              <a:t>Apparatus/Materials (The tools).</a:t>
+              <a:t>Recalling the Electricity and Magnetism circuit.</a:t>
             </a:r>
           </a:p>
           <a:p>
@@ -3372,7 +3352,7 @@
               <a:defRPr sz="2200"/>
             </a:pPr>
             <a:r>
-              <a:t>Procedure (The steps).</a:t>
+              <a:t>Remembering the Energy Resources (biogas/solar) project.</a:t>
             </a:r>
           </a:p>
           <a:p>
@@ -3383,7 +3363,7 @@
               <a:defRPr sz="2200"/>
             </a:pPr>
             <a:r>
-              <a:t>Results and Conclusion (What happened and What it means).</a:t>
+              <a:t>Identifying materials used.</a:t>
             </a:r>
           </a:p>
         </p:txBody>
@@ -3430,7 +3410,7 @@
           <a:p>
             <a:r>
               <a:rPr sz="3000" b="1"/>
-              <a:t>Writing the Summary: A Demonstration</a:t>
+              <a:t>How to Write a Science Report</a:t>
             </a:r>
           </a:p>
         </p:txBody>
@@ -3464,7 +3444,7 @@
               <a:defRPr sz="2200"/>
             </a:pPr>
             <a:r>
-              <a:t>Selecting key details.</a:t>
+              <a:t>Title and Aim (What and Why).</a:t>
             </a:r>
           </a:p>
           <a:p>
@@ -3475,7 +3455,7 @@
               <a:defRPr sz="2200"/>
             </a:pPr>
             <a:r>
-              <a:t>Using scientific vocabulary (conductor, insulator, circuit).</a:t>
+              <a:t>Apparatus/Materials (The tools).</a:t>
             </a:r>
           </a:p>
           <a:p>
@@ -3486,7 +3466,18 @@
               <a:defRPr sz="2200"/>
             </a:pPr>
             <a:r>
-              <a:t>Summarizing the observation.</a:t>
+              <a:t>Procedure (The steps).</a:t>
+            </a:r>
+          </a:p>
+          <a:p>
+            <a:pPr>
+              <a:spcAft>
+                <a:spcPts val="800"/>
+              </a:spcAft>
+              <a:defRPr sz="2200"/>
+            </a:pPr>
+            <a:r>
+              <a:t>Results and Conclusion (What happened and What it means).</a:t>
             </a:r>
           </a:p>
         </p:txBody>
@@ -3533,7 +3524,7 @@
           <a:p>
             <a:r>
               <a:rPr sz="3000" b="1"/>
-              <a:t>Group Work: Compiling the Term 1 Report</a:t>
+              <a:t>Writing the Summary: A Demonstration</a:t>
             </a:r>
           </a:p>
         </p:txBody>
@@ -3567,7 +3558,7 @@
               <a:defRPr sz="2200"/>
             </a:pPr>
             <a:r>
-              <a:t>Collaborative writing.</a:t>
+              <a:t>Selecting key details.</a:t>
             </a:r>
           </a:p>
           <a:p>
@@ -3578,7 +3569,7 @@
               <a:defRPr sz="2200"/>
             </a:pPr>
             <a:r>
-              <a:t>Focusing on accuracy of facts.</a:t>
+              <a:t>Using scientific vocabulary (conductor, insulator, circuit).</a:t>
             </a:r>
           </a:p>
           <a:p>
@@ -3589,18 +3580,7 @@
               <a:defRPr sz="2200"/>
             </a:pPr>
             <a:r>
-              <a:t>Including diagrams where necessary.</a:t>
-            </a:r>
-          </a:p>
-          <a:p>
-            <a:pPr>
-              <a:spcAft>
-                <a:spcPts val="800"/>
-              </a:spcAft>
-              <a:defRPr sz="2200"/>
-            </a:pPr>
-            <a:r>
-              <a:t>Neat presentation.</a:t>
+              <a:t>Summarizing the observation.</a:t>
             </a:r>
           </a:p>
         </p:txBody>
@@ -3647,7 +3627,7 @@
           <a:p>
             <a:r>
               <a:rPr sz="3000" b="1"/>
-              <a:t>Sharing Our Scientific Findings</a:t>
+              <a:t>Group Work: Compiling the Term 1 Report</a:t>
             </a:r>
           </a:p>
         </p:txBody>
@@ -3681,7 +3661,7 @@
               <a:defRPr sz="2200"/>
             </a:pPr>
             <a:r>
-              <a:t>Presenting the summary to the class.</a:t>
+              <a:t>Collaborative writing.</a:t>
             </a:r>
           </a:p>
           <a:p>
@@ -3692,7 +3672,7 @@
               <a:defRPr sz="2200"/>
             </a:pPr>
             <a:r>
-              <a:t>Peer feedback on report structure.</a:t>
+              <a:t>Focusing on accuracy of facts.</a:t>
             </a:r>
           </a:p>
           <a:p>
@@ -3703,7 +3683,246 @@
               <a:defRPr sz="2200"/>
             </a:pPr>
             <a:r>
+              <a:t>Including diagrams where necessary.</a:t>
+            </a:r>
+          </a:p>
+          <a:p>
+            <a:pPr>
+              <a:spcAft>
+                <a:spcPts val="800"/>
+              </a:spcAft>
+              <a:defRPr sz="2200"/>
+            </a:pPr>
+            <a:r>
+              <a:t>Neat presentation.</a:t>
+            </a:r>
+          </a:p>
+        </p:txBody>
+      </p:sp>
+    </p:spTree>
+  </p:cSld>
+  <p:clrMapOvr>
+    <a:masterClrMapping/>
+  </p:clrMapOvr>
+</p:sld>
+</file>
+
+<file path=ppt/slides/slide7.xml><?xml version="1.0" encoding="utf-8"?>
+<p:sld xmlns:a="http://schemas.openxmlformats.org/drawingml/2006/main" xmlns:p="http://schemas.openxmlformats.org/presentationml/2006/main" xmlns:r="http://schemas.openxmlformats.org/officeDocument/2006/relationships">
+  <p:cSld>
+    <p:spTree>
+      <p:nvGrpSpPr>
+        <p:cNvPr id="1" name=""/>
+        <p:cNvGrpSpPr/>
+        <p:nvPr/>
+      </p:nvGrpSpPr>
+      <p:grpSpPr/>
+      <p:sp>
+        <p:nvSpPr>
+          <p:cNvPr id="2" name="TextBox 1"/>
+          <p:cNvSpPr txBox="1"/>
+          <p:nvPr/>
+        </p:nvSpPr>
+        <p:spPr>
+          <a:xfrm>
+            <a:off x="548640" y="320040"/>
+            <a:ext cx="11064240" cy="777240"/>
+          </a:xfrm>
+          <a:prstGeom prst="rect">
+            <a:avLst/>
+          </a:prstGeom>
+          <a:noFill/>
+        </p:spPr>
+        <p:txBody>
+          <a:bodyPr wrap="none">
+            <a:spAutoFit/>
+          </a:bodyPr>
+          <a:lstStyle/>
+          <a:p>
+            <a:r>
+              <a:rPr sz="3000" b="1"/>
+              <a:t>Sharing Our Scientific Findings</a:t>
+            </a:r>
+          </a:p>
+        </p:txBody>
+      </p:sp>
+      <p:sp>
+        <p:nvSpPr>
+          <p:cNvPr id="3" name="TextBox 2"/>
+          <p:cNvSpPr txBox="1"/>
+          <p:nvPr/>
+        </p:nvSpPr>
+        <p:spPr>
+          <a:xfrm>
+            <a:off x="868680" y="1417320"/>
+            <a:ext cx="10424160" cy="4892040"/>
+          </a:xfrm>
+          <a:prstGeom prst="rect">
+            <a:avLst/>
+          </a:prstGeom>
+          <a:noFill/>
+        </p:spPr>
+        <p:txBody>
+          <a:bodyPr wrap="square">
+            <a:spAutoFit/>
+          </a:bodyPr>
+          <a:lstStyle/>
+          <a:p>
+            <a:pPr>
+              <a:spcAft>
+                <a:spcPts val="800"/>
+              </a:spcAft>
+              <a:defRPr sz="2200"/>
+            </a:pPr>
+            <a:r>
+              <a:t>Presenting the summary to the class.</a:t>
+            </a:r>
+          </a:p>
+          <a:p>
+            <a:pPr>
+              <a:spcAft>
+                <a:spcPts val="800"/>
+              </a:spcAft>
+              <a:defRPr sz="2200"/>
+            </a:pPr>
+            <a:r>
+              <a:t>Peer feedback on report structure.</a:t>
+            </a:r>
+          </a:p>
+          <a:p>
+            <a:pPr>
+              <a:spcAft>
+                <a:spcPts val="800"/>
+              </a:spcAft>
+              <a:defRPr sz="2200"/>
+            </a:pPr>
+            <a:r>
               <a:t>Final reflections on Term 1 Science.</a:t>
+            </a:r>
+          </a:p>
+        </p:txBody>
+      </p:sp>
+    </p:spTree>
+  </p:cSld>
+  <p:clrMapOvr>
+    <a:masterClrMapping/>
+  </p:clrMapOvr>
+</p:sld>
+</file>
+
+<file path=ppt/slides/slide8.xml><?xml version="1.0" encoding="utf-8"?>
+<p:sld xmlns:a="http://schemas.openxmlformats.org/drawingml/2006/main" xmlns:p="http://schemas.openxmlformats.org/presentationml/2006/main" xmlns:r="http://schemas.openxmlformats.org/officeDocument/2006/relationships">
+  <p:cSld>
+    <p:spTree>
+      <p:nvGrpSpPr>
+        <p:cNvPr id="1" name=""/>
+        <p:cNvGrpSpPr/>
+        <p:nvPr/>
+      </p:nvGrpSpPr>
+      <p:grpSpPr/>
+      <p:sp>
+        <p:nvSpPr>
+          <p:cNvPr id="2" name="TextBox 1"/>
+          <p:cNvSpPr txBox="1"/>
+          <p:nvPr/>
+        </p:nvSpPr>
+        <p:spPr>
+          <a:xfrm>
+            <a:off x="548640" y="320040"/>
+            <a:ext cx="11064240" cy="777240"/>
+          </a:xfrm>
+          <a:prstGeom prst="rect">
+            <a:avLst/>
+          </a:prstGeom>
+          <a:noFill/>
+        </p:spPr>
+        <p:txBody>
+          <a:bodyPr wrap="none">
+            <a:spAutoFit/>
+          </a:bodyPr>
+          <a:lstStyle/>
+          <a:p>
+            <a:r>
+              <a:rPr sz="3000" b="1"/>
+              <a:t>Check your understanding</a:t>
+            </a:r>
+          </a:p>
+        </p:txBody>
+      </p:sp>
+      <p:sp>
+        <p:nvSpPr>
+          <p:cNvPr id="3" name="TextBox 2"/>
+          <p:cNvSpPr txBox="1"/>
+          <p:nvPr/>
+        </p:nvSpPr>
+        <p:spPr>
+          <a:xfrm>
+            <a:off x="868680" y="1417320"/>
+            <a:ext cx="10424160" cy="4892040"/>
+          </a:xfrm>
+          <a:prstGeom prst="rect">
+            <a:avLst/>
+          </a:prstGeom>
+          <a:noFill/>
+        </p:spPr>
+        <p:txBody>
+          <a:bodyPr wrap="square">
+            <a:spAutoFit/>
+          </a:bodyPr>
+          <a:lstStyle/>
+          <a:p>
+            <a:pPr>
+              <a:spcAft>
+                <a:spcPts val="800"/>
+              </a:spcAft>
+              <a:defRPr sz="2200"/>
+            </a:pPr>
+            <a:r>
+              <a:t>What materials did we use to represent the backbone in our model?</a:t>
+            </a:r>
+          </a:p>
+          <a:p>
+            <a:pPr>
+              <a:spcAft>
+                <a:spcPts val="800"/>
+              </a:spcAft>
+              <a:defRPr sz="2200"/>
+            </a:pPr>
+            <a:r>
+              <a:t>What is the difference between apparatus and procedure?</a:t>
+            </a:r>
+          </a:p>
+          <a:p>
+            <a:pPr>
+              <a:spcAft>
+                <a:spcPts val="800"/>
+              </a:spcAft>
+              <a:defRPr sz="2200"/>
+            </a:pPr>
+            <a:r>
+              <a:t>Why do we need an 'Aim' in our report?</a:t>
+            </a:r>
+          </a:p>
+          <a:p>
+            <a:pPr>
+              <a:spcAft>
+                <a:spcPts val="800"/>
+              </a:spcAft>
+              <a:defRPr sz="2200"/>
+            </a:pPr>
+            <a:r>
+              <a:t>Why do we use words like 'attracted' instead of 'picked up'?</a:t>
+            </a:r>
+          </a:p>
+          <a:p>
+            <a:pPr>
+              <a:spcAft>
+                <a:spcPts val="800"/>
+              </a:spcAft>
+              <a:defRPr sz="2200"/>
+            </a:pPr>
+            <a:r>
+              <a:t>Write one answer clearly in your notebook.</a:t>
             </a:r>
           </a:p>
         </p:txBody>

--- a/uganda-p7-mvp/p7_t1_integrated_science_1205/p7_t1_integrated_science_1205.pptx
+++ b/uganda-p7-mvp/p7_t1_integrated_science_1205/p7_t1_integrated_science_1205.pptx
@@ -3097,14 +3097,100 @@
       <p:grpSpPr/>
       <p:sp>
         <p:nvSpPr>
-          <p:cNvPr id="2" name="TextBox 1"/>
+          <p:cNvPr id="2" name="Rectangle 1"/>
+          <p:cNvSpPr/>
+          <p:nvPr/>
+        </p:nvSpPr>
+        <p:spPr>
+          <a:xfrm>
+            <a:off x="0" y="0"/>
+            <a:ext cx="12191695" cy="914400"/>
+          </a:xfrm>
+          <a:prstGeom prst="rect">
+            <a:avLst/>
+          </a:prstGeom>
+          <a:solidFill>
+            <a:srgbClr val="2563EB"/>
+          </a:solidFill>
+          <a:ln>
+            <a:noFill/>
+          </a:ln>
+        </p:spPr>
+        <p:style>
+          <a:lnRef idx="1">
+            <a:schemeClr val="accent1"/>
+          </a:lnRef>
+          <a:fillRef idx="3">
+            <a:schemeClr val="accent1"/>
+          </a:fillRef>
+          <a:effectRef idx="2">
+            <a:schemeClr val="accent1"/>
+          </a:effectRef>
+          <a:fontRef idx="minor">
+            <a:schemeClr val="lt1"/>
+          </a:fontRef>
+        </p:style>
+        <p:txBody>
+          <a:bodyPr rtlCol="0" anchor="ctr"/>
+          <a:lstStyle/>
+          <a:p>
+            <a:pPr algn="ctr"/>
+          </a:p>
+        </p:txBody>
+      </p:sp>
+      <p:sp>
+        <p:nvSpPr>
+          <p:cNvPr id="3" name="Rectangle 2"/>
+          <p:cNvSpPr/>
+          <p:nvPr/>
+        </p:nvSpPr>
+        <p:spPr>
+          <a:xfrm>
+            <a:off x="0" y="914400"/>
+            <a:ext cx="164592" cy="5943600"/>
+          </a:xfrm>
+          <a:prstGeom prst="rect">
+            <a:avLst/>
+          </a:prstGeom>
+          <a:solidFill>
+            <a:srgbClr val="2563EB"/>
+          </a:solidFill>
+          <a:ln>
+            <a:noFill/>
+          </a:ln>
+        </p:spPr>
+        <p:style>
+          <a:lnRef idx="1">
+            <a:schemeClr val="accent1"/>
+          </a:lnRef>
+          <a:fillRef idx="3">
+            <a:schemeClr val="accent1"/>
+          </a:fillRef>
+          <a:effectRef idx="2">
+            <a:schemeClr val="accent1"/>
+          </a:effectRef>
+          <a:fontRef idx="minor">
+            <a:schemeClr val="lt1"/>
+          </a:fontRef>
+        </p:style>
+        <p:txBody>
+          <a:bodyPr rtlCol="0" anchor="ctr"/>
+          <a:lstStyle/>
+          <a:p>
+            <a:pPr algn="ctr"/>
+          </a:p>
+        </p:txBody>
+      </p:sp>
+      <p:sp>
+        <p:nvSpPr>
+          <p:cNvPr id="4" name="TextBox 3"/>
           <p:cNvSpPr txBox="1"/>
           <p:nvPr/>
         </p:nvSpPr>
         <p:spPr>
           <a:xfrm>
-            <a:off x="731520" y="1097280"/>
-            <a:ext cx="10698480" cy="1280160"/>
+            <a:off x="594360" y="246888"/>
+            <a:ext cx="2743200" cy="320040"/>
           </a:xfrm>
           <a:prstGeom prst="rect">
             <a:avLst/>
@@ -3112,29 +3198,32 @@
           <a:noFill/>
         </p:spPr>
         <p:txBody>
-          <a:bodyPr wrap="none">
+          <a:bodyPr wrap="square">
             <a:spAutoFit/>
           </a:bodyPr>
           <a:lstStyle/>
           <a:p>
-            <a:pPr algn="ctr"/>
-            <a:r>
-              <a:rPr sz="3400" b="1"/>
-              <a:t>3.4 Energy Resources in the Environment / Final Review</a:t>
-            </a:r>
-          </a:p>
-        </p:txBody>
-      </p:sp>
-      <p:sp>
-        <p:nvSpPr>
-          <p:cNvPr id="3" name="TextBox 2"/>
+            <a:r>
+              <a:rPr sz="1300" b="1">
+                <a:solidFill>
+                  <a:srgbClr val="FFFFFF"/>
+                </a:solidFill>
+              </a:rPr>
+              <a:t>LESSON START</a:t>
+            </a:r>
+          </a:p>
+        </p:txBody>
+      </p:sp>
+      <p:sp>
+        <p:nvSpPr>
+          <p:cNvPr id="5" name="TextBox 4"/>
           <p:cNvSpPr txBox="1"/>
           <p:nvPr/>
         </p:nvSpPr>
         <p:spPr>
           <a:xfrm>
-            <a:off x="1463040" y="2743200"/>
-            <a:ext cx="9326880" cy="1828800"/>
+            <a:off x="8412480" y="246888"/>
+            <a:ext cx="3200400" cy="320040"/>
           </a:xfrm>
           <a:prstGeom prst="rect">
             <a:avLst/>
@@ -3142,22 +3231,200 @@
           <a:noFill/>
         </p:spPr>
         <p:txBody>
-          <a:bodyPr wrap="none">
+          <a:bodyPr wrap="square">
             <a:spAutoFit/>
           </a:bodyPr>
           <a:lstStyle/>
           <a:p>
+            <a:pPr algn="r"/>
+            <a:r>
+              <a:rPr sz="1100" b="0">
+                <a:solidFill>
+                  <a:srgbClr val="FFFFFF"/>
+                </a:solidFill>
+              </a:rPr>
+              <a:t>p7_t1_integrated_science_1205</a:t>
+            </a:r>
+          </a:p>
+        </p:txBody>
+      </p:sp>
+      <p:sp>
+        <p:nvSpPr>
+          <p:cNvPr id="6" name="TextBox 5"/>
+          <p:cNvSpPr txBox="1"/>
+          <p:nvPr/>
+        </p:nvSpPr>
+        <p:spPr>
+          <a:xfrm>
+            <a:off x="822960" y="1325880"/>
+            <a:ext cx="10698480" cy="1005840"/>
+          </a:xfrm>
+          <a:prstGeom prst="rect">
+            <a:avLst/>
+          </a:prstGeom>
+          <a:noFill/>
+        </p:spPr>
+        <p:txBody>
+          <a:bodyPr wrap="square">
+            <a:spAutoFit/>
+          </a:bodyPr>
+          <a:lstStyle/>
+          <a:p>
             <a:pPr algn="ctr"/>
             <a:r>
-              <a:rPr sz="2200"/>
+              <a:rPr sz="3400" b="1">
+                <a:solidFill>
+                  <a:srgbClr val="1A202C"/>
+                </a:solidFill>
+              </a:rPr>
+              <a:t>3.4 Energy Resources in the Environment</a:t>
+            </a:r>
+          </a:p>
+        </p:txBody>
+      </p:sp>
+      <p:sp>
+        <p:nvSpPr>
+          <p:cNvPr id="7" name="Rounded Rectangle 6"/>
+          <p:cNvSpPr/>
+          <p:nvPr/>
+        </p:nvSpPr>
+        <p:spPr>
+          <a:xfrm>
+            <a:off x="1143000" y="2743200"/>
+            <a:ext cx="9921240" cy="2194560"/>
+          </a:xfrm>
+          <a:prstGeom prst="roundRect">
+            <a:avLst/>
+          </a:prstGeom>
+          <a:solidFill>
+            <a:srgbClr val="EFF6FF"/>
+          </a:solidFill>
+          <a:ln w="15240">
+            <a:solidFill>
+              <a:srgbClr val="2563EB"/>
+            </a:solidFill>
+          </a:ln>
+        </p:spPr>
+        <p:style>
+          <a:lnRef idx="1">
+            <a:schemeClr val="accent1"/>
+          </a:lnRef>
+          <a:fillRef idx="3">
+            <a:schemeClr val="accent1"/>
+          </a:fillRef>
+          <a:effectRef idx="2">
+            <a:schemeClr val="accent1"/>
+          </a:effectRef>
+          <a:fontRef idx="minor">
+            <a:schemeClr val="lt1"/>
+          </a:fontRef>
+        </p:style>
+        <p:txBody>
+          <a:bodyPr rtlCol="0" anchor="ctr"/>
+          <a:lstStyle/>
+          <a:p>
+            <a:pPr algn="ctr"/>
+          </a:p>
+        </p:txBody>
+      </p:sp>
+      <p:sp>
+        <p:nvSpPr>
+          <p:cNvPr id="8" name="TextBox 7"/>
+          <p:cNvSpPr txBox="1"/>
+          <p:nvPr/>
+        </p:nvSpPr>
+        <p:spPr>
+          <a:xfrm>
+            <a:off x="1508760" y="2999232"/>
+            <a:ext cx="9189720" cy="411480"/>
+          </a:xfrm>
+          <a:prstGeom prst="rect">
+            <a:avLst/>
+          </a:prstGeom>
+          <a:noFill/>
+        </p:spPr>
+        <p:txBody>
+          <a:bodyPr wrap="square">
+            <a:spAutoFit/>
+          </a:bodyPr>
+          <a:lstStyle/>
+          <a:p>
+            <a:pPr algn="ctr"/>
+            <a:r>
+              <a:rPr sz="1800" b="1">
+                <a:solidFill>
+                  <a:srgbClr val="2563EB"/>
+                </a:solidFill>
+              </a:rPr>
               <a:t>Integrated Science</a:t>
             </a:r>
           </a:p>
+        </p:txBody>
+      </p:sp>
+      <p:sp>
+        <p:nvSpPr>
+          <p:cNvPr id="9" name="TextBox 8"/>
+          <p:cNvSpPr txBox="1"/>
+          <p:nvPr/>
+        </p:nvSpPr>
+        <p:spPr>
+          <a:xfrm>
+            <a:off x="1508760" y="3611880"/>
+            <a:ext cx="9189720" cy="914400"/>
+          </a:xfrm>
+          <a:prstGeom prst="rect">
+            <a:avLst/>
+          </a:prstGeom>
+          <a:noFill/>
+        </p:spPr>
+        <p:txBody>
+          <a:bodyPr wrap="square">
+            <a:spAutoFit/>
+          </a:bodyPr>
+          <a:lstStyle/>
           <a:p>
             <a:pPr algn="ctr"/>
             <a:r>
-              <a:rPr sz="2200"/>
-              <a:t>Recalls and identifies key experiments conducted during Term 1.</a:t>
+              <a:rPr sz="2500" b="1">
+                <a:solidFill>
+                  <a:srgbClr val="1A202C"/>
+                </a:solidFill>
+              </a:rPr>
+              <a:t>Big question: Which experiment did you find most challenging?</a:t>
+            </a:r>
+          </a:p>
+        </p:txBody>
+      </p:sp>
+      <p:sp>
+        <p:nvSpPr>
+          <p:cNvPr id="10" name="TextBox 9"/>
+          <p:cNvSpPr txBox="1"/>
+          <p:nvPr/>
+        </p:nvSpPr>
+        <p:spPr>
+          <a:xfrm>
+            <a:off x="1508760" y="4617720"/>
+            <a:ext cx="9189720" cy="320040"/>
+          </a:xfrm>
+          <a:prstGeom prst="rect">
+            <a:avLst/>
+          </a:prstGeom>
+          <a:noFill/>
+        </p:spPr>
+        <p:txBody>
+          <a:bodyPr wrap="square">
+            <a:spAutoFit/>
+          </a:bodyPr>
+          <a:lstStyle/>
+          <a:p>
+            <a:pPr algn="ctr"/>
+            <a:r>
+              <a:rPr sz="1500" b="0">
+                <a:solidFill>
+                  <a:srgbClr val="5B677D"/>
+                </a:solidFill>
+              </a:rPr>
+              <a:t>Think silently first. Then be ready to explain one idea.</a:t>
             </a:r>
           </a:p>
         </p:txBody>
@@ -3182,43 +3449,100 @@
       <p:grpSpPr/>
       <p:sp>
         <p:nvSpPr>
-          <p:cNvPr id="2" name="TextBox 1"/>
+          <p:cNvPr id="2" name="Rectangle 1"/>
+          <p:cNvSpPr/>
+          <p:nvPr/>
+        </p:nvSpPr>
+        <p:spPr>
+          <a:xfrm>
+            <a:off x="0" y="0"/>
+            <a:ext cx="12191695" cy="914400"/>
+          </a:xfrm>
+          <a:prstGeom prst="rect">
+            <a:avLst/>
+          </a:prstGeom>
+          <a:solidFill>
+            <a:srgbClr val="059669"/>
+          </a:solidFill>
+          <a:ln>
+            <a:noFill/>
+          </a:ln>
+        </p:spPr>
+        <p:style>
+          <a:lnRef idx="1">
+            <a:schemeClr val="accent1"/>
+          </a:lnRef>
+          <a:fillRef idx="3">
+            <a:schemeClr val="accent1"/>
+          </a:fillRef>
+          <a:effectRef idx="2">
+            <a:schemeClr val="accent1"/>
+          </a:effectRef>
+          <a:fontRef idx="minor">
+            <a:schemeClr val="lt1"/>
+          </a:fontRef>
+        </p:style>
+        <p:txBody>
+          <a:bodyPr rtlCol="0" anchor="ctr"/>
+          <a:lstStyle/>
+          <a:p>
+            <a:pPr algn="ctr"/>
+          </a:p>
+        </p:txBody>
+      </p:sp>
+      <p:sp>
+        <p:nvSpPr>
+          <p:cNvPr id="3" name="Rectangle 2"/>
+          <p:cNvSpPr/>
+          <p:nvPr/>
+        </p:nvSpPr>
+        <p:spPr>
+          <a:xfrm>
+            <a:off x="0" y="914400"/>
+            <a:ext cx="164592" cy="5943600"/>
+          </a:xfrm>
+          <a:prstGeom prst="rect">
+            <a:avLst/>
+          </a:prstGeom>
+          <a:solidFill>
+            <a:srgbClr val="059669"/>
+          </a:solidFill>
+          <a:ln>
+            <a:noFill/>
+          </a:ln>
+        </p:spPr>
+        <p:style>
+          <a:lnRef idx="1">
+            <a:schemeClr val="accent1"/>
+          </a:lnRef>
+          <a:fillRef idx="3">
+            <a:schemeClr val="accent1"/>
+          </a:fillRef>
+          <a:effectRef idx="2">
+            <a:schemeClr val="accent1"/>
+          </a:effectRef>
+          <a:fontRef idx="minor">
+            <a:schemeClr val="lt1"/>
+          </a:fontRef>
+        </p:style>
+        <p:txBody>
+          <a:bodyPr rtlCol="0" anchor="ctr"/>
+          <a:lstStyle/>
+          <a:p>
+            <a:pPr algn="ctr"/>
+          </a:p>
+        </p:txBody>
+      </p:sp>
+      <p:sp>
+        <p:nvSpPr>
+          <p:cNvPr id="4" name="TextBox 3"/>
           <p:cNvSpPr txBox="1"/>
           <p:nvPr/>
         </p:nvSpPr>
         <p:spPr>
           <a:xfrm>
-            <a:off x="548640" y="320040"/>
-            <a:ext cx="11064240" cy="777240"/>
-          </a:xfrm>
-          <a:prstGeom prst="rect">
-            <a:avLst/>
-          </a:prstGeom>
-          <a:noFill/>
-        </p:spPr>
-        <p:txBody>
-          <a:bodyPr wrap="none">
-            <a:spAutoFit/>
-          </a:bodyPr>
-          <a:lstStyle/>
-          <a:p>
-            <a:r>
-              <a:rPr sz="3000" b="1"/>
-              <a:t>Learning goal</a:t>
-            </a:r>
-          </a:p>
-        </p:txBody>
-      </p:sp>
-      <p:sp>
-        <p:nvSpPr>
-          <p:cNvPr id="3" name="TextBox 2"/>
-          <p:cNvSpPr txBox="1"/>
-          <p:nvPr/>
-        </p:nvSpPr>
-        <p:spPr>
-          <a:xfrm>
-            <a:off x="868680" y="1417320"/>
-            <a:ext cx="10424160" cy="4892040"/>
+            <a:off x="594360" y="246888"/>
+            <a:ext cx="2926080" cy="320040"/>
           </a:xfrm>
           <a:prstGeom prst="rect">
             <a:avLst/>
@@ -3231,25 +3555,502 @@
           </a:bodyPr>
           <a:lstStyle/>
           <a:p>
-            <a:pPr>
-              <a:spcAft>
-                <a:spcPts val="800"/>
-              </a:spcAft>
-              <a:defRPr sz="2200"/>
-            </a:pPr>
-            <a:r>
-              <a:t>Recalls and identifies key experiments conducted during Term 1.</a:t>
-            </a:r>
-          </a:p>
-          <a:p>
-            <a:pPr>
-              <a:spcAft>
-                <a:spcPts val="800"/>
-              </a:spcAft>
-              <a:defRPr sz="2200"/>
-            </a:pPr>
-            <a:r>
-              <a:t>Lesson focus: 3.4 Energy Resources in the Environment / Final Review</a:t>
+            <a:r>
+              <a:rPr sz="1300" b="1">
+                <a:solidFill>
+                  <a:srgbClr val="FFFFFF"/>
+                </a:solidFill>
+              </a:rPr>
+              <a:t>2. MISSION</a:t>
+            </a:r>
+          </a:p>
+        </p:txBody>
+      </p:sp>
+      <p:sp>
+        <p:nvSpPr>
+          <p:cNvPr id="5" name="TextBox 4"/>
+          <p:cNvSpPr txBox="1"/>
+          <p:nvPr/>
+        </p:nvSpPr>
+        <p:spPr>
+          <a:xfrm>
+            <a:off x="7772400" y="246888"/>
+            <a:ext cx="3840480" cy="320040"/>
+          </a:xfrm>
+          <a:prstGeom prst="rect">
+            <a:avLst/>
+          </a:prstGeom>
+          <a:noFill/>
+        </p:spPr>
+        <p:txBody>
+          <a:bodyPr wrap="square">
+            <a:spAutoFit/>
+          </a:bodyPr>
+          <a:lstStyle/>
+          <a:p>
+            <a:pPr algn="r"/>
+            <a:r>
+              <a:rPr sz="1100" b="0">
+                <a:solidFill>
+                  <a:srgbClr val="FFFFFF"/>
+                </a:solidFill>
+              </a:rPr>
+              <a:t>p7_t1_integrated_science_1205</a:t>
+            </a:r>
+          </a:p>
+        </p:txBody>
+      </p:sp>
+      <p:sp>
+        <p:nvSpPr>
+          <p:cNvPr id="6" name="TextBox 5"/>
+          <p:cNvSpPr txBox="1"/>
+          <p:nvPr/>
+        </p:nvSpPr>
+        <p:spPr>
+          <a:xfrm>
+            <a:off x="640080" y="1143000"/>
+            <a:ext cx="10972800" cy="685800"/>
+          </a:xfrm>
+          <a:prstGeom prst="rect">
+            <a:avLst/>
+          </a:prstGeom>
+          <a:noFill/>
+        </p:spPr>
+        <p:txBody>
+          <a:bodyPr wrap="square">
+            <a:spAutoFit/>
+          </a:bodyPr>
+          <a:lstStyle/>
+          <a:p>
+            <a:r>
+              <a:rPr sz="2800" b="1">
+                <a:solidFill>
+                  <a:srgbClr val="1A202C"/>
+                </a:solidFill>
+              </a:rPr>
+              <a:t>Today's mission</a:t>
+            </a:r>
+          </a:p>
+        </p:txBody>
+      </p:sp>
+      <p:sp>
+        <p:nvSpPr>
+          <p:cNvPr id="7" name="Rounded Rectangle 6"/>
+          <p:cNvSpPr/>
+          <p:nvPr/>
+        </p:nvSpPr>
+        <p:spPr>
+          <a:xfrm>
+            <a:off x="777240" y="1993392"/>
+            <a:ext cx="10835640" cy="1005840"/>
+          </a:xfrm>
+          <a:prstGeom prst="roundRect">
+            <a:avLst/>
+          </a:prstGeom>
+          <a:solidFill>
+            <a:srgbClr val="FFFBEB"/>
+          </a:solidFill>
+          <a:ln w="15240">
+            <a:solidFill>
+              <a:srgbClr val="059669"/>
+            </a:solidFill>
+          </a:ln>
+        </p:spPr>
+        <p:style>
+          <a:lnRef idx="1">
+            <a:schemeClr val="accent1"/>
+          </a:lnRef>
+          <a:fillRef idx="3">
+            <a:schemeClr val="accent1"/>
+          </a:fillRef>
+          <a:effectRef idx="2">
+            <a:schemeClr val="accent1"/>
+          </a:effectRef>
+          <a:fontRef idx="minor">
+            <a:schemeClr val="lt1"/>
+          </a:fontRef>
+        </p:style>
+        <p:txBody>
+          <a:bodyPr rtlCol="0" anchor="ctr"/>
+          <a:lstStyle/>
+          <a:p>
+            <a:pPr algn="ctr"/>
+          </a:p>
+        </p:txBody>
+      </p:sp>
+      <p:sp>
+        <p:nvSpPr>
+          <p:cNvPr id="8" name="TextBox 7"/>
+          <p:cNvSpPr txBox="1"/>
+          <p:nvPr/>
+        </p:nvSpPr>
+        <p:spPr>
+          <a:xfrm>
+            <a:off x="1051560" y="2212848"/>
+            <a:ext cx="10287000" cy="502920"/>
+          </a:xfrm>
+          <a:prstGeom prst="rect">
+            <a:avLst/>
+          </a:prstGeom>
+          <a:noFill/>
+        </p:spPr>
+        <p:txBody>
+          <a:bodyPr wrap="square">
+            <a:spAutoFit/>
+          </a:bodyPr>
+          <a:lstStyle/>
+          <a:p>
+            <a:r>
+              <a:rPr sz="2100" b="1">
+                <a:solidFill>
+                  <a:srgbClr val="1A202C"/>
+                </a:solidFill>
+              </a:rPr>
+              <a:t>Goal: Recalls and identifies key experiments conducted during Term 1.</a:t>
+            </a:r>
+          </a:p>
+        </p:txBody>
+      </p:sp>
+      <p:sp>
+        <p:nvSpPr>
+          <p:cNvPr id="9" name="Rounded Rectangle 8"/>
+          <p:cNvSpPr/>
+          <p:nvPr/>
+        </p:nvSpPr>
+        <p:spPr>
+          <a:xfrm>
+            <a:off x="1005840" y="3246120"/>
+            <a:ext cx="10149840" cy="731520"/>
+          </a:xfrm>
+          <a:prstGeom prst="roundRect">
+            <a:avLst/>
+          </a:prstGeom>
+          <a:solidFill>
+            <a:srgbClr val="F8FAFC"/>
+          </a:solidFill>
+          <a:ln w="15240">
+            <a:solidFill>
+              <a:srgbClr val="CBD5E1"/>
+            </a:solidFill>
+          </a:ln>
+        </p:spPr>
+        <p:style>
+          <a:lnRef idx="1">
+            <a:schemeClr val="accent1"/>
+          </a:lnRef>
+          <a:fillRef idx="3">
+            <a:schemeClr val="accent1"/>
+          </a:fillRef>
+          <a:effectRef idx="2">
+            <a:schemeClr val="accent1"/>
+          </a:effectRef>
+          <a:fontRef idx="minor">
+            <a:schemeClr val="lt1"/>
+          </a:fontRef>
+        </p:style>
+        <p:txBody>
+          <a:bodyPr rtlCol="0" anchor="ctr"/>
+          <a:lstStyle/>
+          <a:p>
+            <a:pPr algn="ctr"/>
+          </a:p>
+        </p:txBody>
+      </p:sp>
+      <p:sp>
+        <p:nvSpPr>
+          <p:cNvPr id="10" name="Oval 9"/>
+          <p:cNvSpPr/>
+          <p:nvPr/>
+        </p:nvSpPr>
+        <p:spPr>
+          <a:xfrm>
+            <a:off x="1234440" y="3364991"/>
+            <a:ext cx="347472" cy="347472"/>
+          </a:xfrm>
+          <a:prstGeom prst="ellipse">
+            <a:avLst/>
+          </a:prstGeom>
+          <a:solidFill>
+            <a:srgbClr val="059669"/>
+          </a:solidFill>
+          <a:ln>
+            <a:noFill/>
+          </a:ln>
+        </p:spPr>
+        <p:style>
+          <a:lnRef idx="1">
+            <a:schemeClr val="accent1"/>
+          </a:lnRef>
+          <a:fillRef idx="3">
+            <a:schemeClr val="accent1"/>
+          </a:fillRef>
+          <a:effectRef idx="2">
+            <a:schemeClr val="accent1"/>
+          </a:effectRef>
+          <a:fontRef idx="minor">
+            <a:schemeClr val="lt1"/>
+          </a:fontRef>
+        </p:style>
+        <p:txBody>
+          <a:bodyPr rtlCol="0" anchor="ctr"/>
+          <a:lstStyle/>
+          <a:p>
+            <a:pPr algn="ctr"/>
+          </a:p>
+        </p:txBody>
+      </p:sp>
+      <p:sp>
+        <p:nvSpPr>
+          <p:cNvPr id="11" name="TextBox 10"/>
+          <p:cNvSpPr txBox="1"/>
+          <p:nvPr/>
+        </p:nvSpPr>
+        <p:spPr>
+          <a:xfrm>
+            <a:off x="1234440" y="3410712"/>
+            <a:ext cx="347472" cy="182880"/>
+          </a:xfrm>
+          <a:prstGeom prst="rect">
+            <a:avLst/>
+          </a:prstGeom>
+          <a:noFill/>
+        </p:spPr>
+        <p:txBody>
+          <a:bodyPr wrap="square">
+            <a:spAutoFit/>
+          </a:bodyPr>
+          <a:lstStyle/>
+          <a:p>
+            <a:pPr algn="ctr"/>
+            <a:r>
+              <a:rPr sz="1000" b="1">
+                <a:solidFill>
+                  <a:srgbClr val="FFFFFF"/>
+                </a:solidFill>
+              </a:rPr>
+              <a:t>1</a:t>
+            </a:r>
+          </a:p>
+        </p:txBody>
+      </p:sp>
+      <p:sp>
+        <p:nvSpPr>
+          <p:cNvPr id="12" name="TextBox 11"/>
+          <p:cNvSpPr txBox="1"/>
+          <p:nvPr/>
+        </p:nvSpPr>
+        <p:spPr>
+          <a:xfrm>
+            <a:off x="1783080" y="3364991"/>
+            <a:ext cx="9006840" cy="347472"/>
+          </a:xfrm>
+          <a:prstGeom prst="rect">
+            <a:avLst/>
+          </a:prstGeom>
+          <a:noFill/>
+        </p:spPr>
+        <p:txBody>
+          <a:bodyPr wrap="square">
+            <a:spAutoFit/>
+          </a:bodyPr>
+          <a:lstStyle/>
+          <a:p>
+            <a:r>
+              <a:rPr sz="1700" b="0">
+                <a:solidFill>
+                  <a:srgbClr val="1A202C"/>
+                </a:solidFill>
+              </a:rPr>
+              <a:t>You will use: Looking Back at Our Experiments, How to Write a Science Report</a:t>
+            </a:r>
+          </a:p>
+        </p:txBody>
+      </p:sp>
+      <p:sp>
+        <p:nvSpPr>
+          <p:cNvPr id="13" name="Rounded Rectangle 12"/>
+          <p:cNvSpPr/>
+          <p:nvPr/>
+        </p:nvSpPr>
+        <p:spPr>
+          <a:xfrm>
+            <a:off x="1005840" y="4178808"/>
+            <a:ext cx="10149840" cy="731520"/>
+          </a:xfrm>
+          <a:prstGeom prst="roundRect">
+            <a:avLst/>
+          </a:prstGeom>
+          <a:solidFill>
+            <a:srgbClr val="F8FAFC"/>
+          </a:solidFill>
+          <a:ln w="15240">
+            <a:solidFill>
+              <a:srgbClr val="CBD5E1"/>
+            </a:solidFill>
+          </a:ln>
+        </p:spPr>
+        <p:style>
+          <a:lnRef idx="1">
+            <a:schemeClr val="accent1"/>
+          </a:lnRef>
+          <a:fillRef idx="3">
+            <a:schemeClr val="accent1"/>
+          </a:fillRef>
+          <a:effectRef idx="2">
+            <a:schemeClr val="accent1"/>
+          </a:effectRef>
+          <a:fontRef idx="minor">
+            <a:schemeClr val="lt1"/>
+          </a:fontRef>
+        </p:style>
+        <p:txBody>
+          <a:bodyPr rtlCol="0" anchor="ctr"/>
+          <a:lstStyle/>
+          <a:p>
+            <a:pPr algn="ctr"/>
+          </a:p>
+        </p:txBody>
+      </p:sp>
+      <p:sp>
+        <p:nvSpPr>
+          <p:cNvPr id="14" name="Oval 13"/>
+          <p:cNvSpPr/>
+          <p:nvPr/>
+        </p:nvSpPr>
+        <p:spPr>
+          <a:xfrm>
+            <a:off x="1234440" y="4297680"/>
+            <a:ext cx="347472" cy="347472"/>
+          </a:xfrm>
+          <a:prstGeom prst="ellipse">
+            <a:avLst/>
+          </a:prstGeom>
+          <a:solidFill>
+            <a:srgbClr val="059669"/>
+          </a:solidFill>
+          <a:ln>
+            <a:noFill/>
+          </a:ln>
+        </p:spPr>
+        <p:style>
+          <a:lnRef idx="1">
+            <a:schemeClr val="accent1"/>
+          </a:lnRef>
+          <a:fillRef idx="3">
+            <a:schemeClr val="accent1"/>
+          </a:fillRef>
+          <a:effectRef idx="2">
+            <a:schemeClr val="accent1"/>
+          </a:effectRef>
+          <a:fontRef idx="minor">
+            <a:schemeClr val="lt1"/>
+          </a:fontRef>
+        </p:style>
+        <p:txBody>
+          <a:bodyPr rtlCol="0" anchor="ctr"/>
+          <a:lstStyle/>
+          <a:p>
+            <a:pPr algn="ctr"/>
+          </a:p>
+        </p:txBody>
+      </p:sp>
+      <p:sp>
+        <p:nvSpPr>
+          <p:cNvPr id="15" name="TextBox 14"/>
+          <p:cNvSpPr txBox="1"/>
+          <p:nvPr/>
+        </p:nvSpPr>
+        <p:spPr>
+          <a:xfrm>
+            <a:off x="1234440" y="4343400"/>
+            <a:ext cx="347472" cy="182880"/>
+          </a:xfrm>
+          <a:prstGeom prst="rect">
+            <a:avLst/>
+          </a:prstGeom>
+          <a:noFill/>
+        </p:spPr>
+        <p:txBody>
+          <a:bodyPr wrap="square">
+            <a:spAutoFit/>
+          </a:bodyPr>
+          <a:lstStyle/>
+          <a:p>
+            <a:pPr algn="ctr"/>
+            <a:r>
+              <a:rPr sz="1000" b="1">
+                <a:solidFill>
+                  <a:srgbClr val="FFFFFF"/>
+                </a:solidFill>
+              </a:rPr>
+              <a:t>2</a:t>
+            </a:r>
+          </a:p>
+        </p:txBody>
+      </p:sp>
+      <p:sp>
+        <p:nvSpPr>
+          <p:cNvPr id="16" name="TextBox 15"/>
+          <p:cNvSpPr txBox="1"/>
+          <p:nvPr/>
+        </p:nvSpPr>
+        <p:spPr>
+          <a:xfrm>
+            <a:off x="1783080" y="4297680"/>
+            <a:ext cx="9006840" cy="347472"/>
+          </a:xfrm>
+          <a:prstGeom prst="rect">
+            <a:avLst/>
+          </a:prstGeom>
+          <a:noFill/>
+        </p:spPr>
+        <p:txBody>
+          <a:bodyPr wrap="square">
+            <a:spAutoFit/>
+          </a:bodyPr>
+          <a:lstStyle/>
+          <a:p>
+            <a:r>
+              <a:rPr sz="1700" b="0">
+                <a:solidFill>
+                  <a:srgbClr val="1A202C"/>
+                </a:solidFill>
+              </a:rPr>
+              <a:t>Success: explain, try, and answer in your own words.</a:t>
+            </a:r>
+          </a:p>
+        </p:txBody>
+      </p:sp>
+      <p:sp>
+        <p:nvSpPr>
+          <p:cNvPr id="17" name="TextBox 16"/>
+          <p:cNvSpPr txBox="1"/>
+          <p:nvPr/>
+        </p:nvSpPr>
+        <p:spPr>
+          <a:xfrm>
+            <a:off x="777240" y="6419088"/>
+            <a:ext cx="10835640" cy="228600"/>
+          </a:xfrm>
+          <a:prstGeom prst="rect">
+            <a:avLst/>
+          </a:prstGeom>
+          <a:noFill/>
+        </p:spPr>
+        <p:txBody>
+          <a:bodyPr wrap="square">
+            <a:spAutoFit/>
+          </a:bodyPr>
+          <a:lstStyle/>
+          <a:p>
+            <a:pPr algn="r"/>
+            <a:r>
+              <a:rPr sz="1000" b="0">
+                <a:solidFill>
+                  <a:srgbClr val="5B677D"/>
+                </a:solidFill>
+              </a:rPr>
+              <a:t>Listen • Talk • Try • Explain</a:t>
             </a:r>
           </a:p>
         </p:txBody>
@@ -3274,43 +4075,100 @@
       <p:grpSpPr/>
       <p:sp>
         <p:nvSpPr>
-          <p:cNvPr id="2" name="TextBox 1"/>
+          <p:cNvPr id="2" name="Rectangle 1"/>
+          <p:cNvSpPr/>
+          <p:nvPr/>
+        </p:nvSpPr>
+        <p:spPr>
+          <a:xfrm>
+            <a:off x="0" y="0"/>
+            <a:ext cx="12191695" cy="914400"/>
+          </a:xfrm>
+          <a:prstGeom prst="rect">
+            <a:avLst/>
+          </a:prstGeom>
+          <a:solidFill>
+            <a:srgbClr val="7C3AED"/>
+          </a:solidFill>
+          <a:ln>
+            <a:noFill/>
+          </a:ln>
+        </p:spPr>
+        <p:style>
+          <a:lnRef idx="1">
+            <a:schemeClr val="accent1"/>
+          </a:lnRef>
+          <a:fillRef idx="3">
+            <a:schemeClr val="accent1"/>
+          </a:fillRef>
+          <a:effectRef idx="2">
+            <a:schemeClr val="accent1"/>
+          </a:effectRef>
+          <a:fontRef idx="minor">
+            <a:schemeClr val="lt1"/>
+          </a:fontRef>
+        </p:style>
+        <p:txBody>
+          <a:bodyPr rtlCol="0" anchor="ctr"/>
+          <a:lstStyle/>
+          <a:p>
+            <a:pPr algn="ctr"/>
+          </a:p>
+        </p:txBody>
+      </p:sp>
+      <p:sp>
+        <p:nvSpPr>
+          <p:cNvPr id="3" name="Rectangle 2"/>
+          <p:cNvSpPr/>
+          <p:nvPr/>
+        </p:nvSpPr>
+        <p:spPr>
+          <a:xfrm>
+            <a:off x="0" y="914400"/>
+            <a:ext cx="164592" cy="5943600"/>
+          </a:xfrm>
+          <a:prstGeom prst="rect">
+            <a:avLst/>
+          </a:prstGeom>
+          <a:solidFill>
+            <a:srgbClr val="7C3AED"/>
+          </a:solidFill>
+          <a:ln>
+            <a:noFill/>
+          </a:ln>
+        </p:spPr>
+        <p:style>
+          <a:lnRef idx="1">
+            <a:schemeClr val="accent1"/>
+          </a:lnRef>
+          <a:fillRef idx="3">
+            <a:schemeClr val="accent1"/>
+          </a:fillRef>
+          <a:effectRef idx="2">
+            <a:schemeClr val="accent1"/>
+          </a:effectRef>
+          <a:fontRef idx="minor">
+            <a:schemeClr val="lt1"/>
+          </a:fontRef>
+        </p:style>
+        <p:txBody>
+          <a:bodyPr rtlCol="0" anchor="ctr"/>
+          <a:lstStyle/>
+          <a:p>
+            <a:pPr algn="ctr"/>
+          </a:p>
+        </p:txBody>
+      </p:sp>
+      <p:sp>
+        <p:nvSpPr>
+          <p:cNvPr id="4" name="TextBox 3"/>
           <p:cNvSpPr txBox="1"/>
           <p:nvPr/>
         </p:nvSpPr>
         <p:spPr>
           <a:xfrm>
-            <a:off x="548640" y="320040"/>
-            <a:ext cx="11064240" cy="777240"/>
-          </a:xfrm>
-          <a:prstGeom prst="rect">
-            <a:avLst/>
-          </a:prstGeom>
-          <a:noFill/>
-        </p:spPr>
-        <p:txBody>
-          <a:bodyPr wrap="none">
-            <a:spAutoFit/>
-          </a:bodyPr>
-          <a:lstStyle/>
-          <a:p>
-            <a:r>
-              <a:rPr sz="3000" b="1"/>
-              <a:t>Looking Back at Our Experiments</a:t>
-            </a:r>
-          </a:p>
-        </p:txBody>
-      </p:sp>
-      <p:sp>
-        <p:nvSpPr>
-          <p:cNvPr id="3" name="TextBox 2"/>
-          <p:cNvSpPr txBox="1"/>
-          <p:nvPr/>
-        </p:nvSpPr>
-        <p:spPr>
-          <a:xfrm>
-            <a:off x="868680" y="1417320"/>
-            <a:ext cx="10424160" cy="4892040"/>
+            <a:off x="594360" y="246888"/>
+            <a:ext cx="2926080" cy="320040"/>
           </a:xfrm>
           <a:prstGeom prst="rect">
             <a:avLst/>
@@ -3323,47 +4181,502 @@
           </a:bodyPr>
           <a:lstStyle/>
           <a:p>
-            <a:pPr>
-              <a:spcAft>
-                <a:spcPts val="800"/>
-              </a:spcAft>
-              <a:defRPr sz="2200"/>
-            </a:pPr>
-            <a:r>
-              <a:t>Reviewing the Muscular-Skeletal model.</a:t>
-            </a:r>
-          </a:p>
-          <a:p>
-            <a:pPr>
-              <a:spcAft>
-                <a:spcPts val="800"/>
-              </a:spcAft>
-              <a:defRPr sz="2200"/>
-            </a:pPr>
-            <a:r>
-              <a:t>Recalling the Electricity and Magnetism circuit.</a:t>
-            </a:r>
-          </a:p>
-          <a:p>
-            <a:pPr>
-              <a:spcAft>
-                <a:spcPts val="800"/>
-              </a:spcAft>
-              <a:defRPr sz="2200"/>
-            </a:pPr>
-            <a:r>
-              <a:t>Remembering the Energy Resources (biogas/solar) project.</a:t>
-            </a:r>
-          </a:p>
-          <a:p>
-            <a:pPr>
-              <a:spcAft>
-                <a:spcPts val="800"/>
-              </a:spcAft>
-              <a:defRPr sz="2200"/>
-            </a:pPr>
-            <a:r>
-              <a:t>Identifying materials used.</a:t>
+            <a:r>
+              <a:rPr sz="1300" b="1">
+                <a:solidFill>
+                  <a:srgbClr val="FFFFFF"/>
+                </a:solidFill>
+              </a:rPr>
+              <a:t>3. STARTER</a:t>
+            </a:r>
+          </a:p>
+        </p:txBody>
+      </p:sp>
+      <p:sp>
+        <p:nvSpPr>
+          <p:cNvPr id="5" name="TextBox 4"/>
+          <p:cNvSpPr txBox="1"/>
+          <p:nvPr/>
+        </p:nvSpPr>
+        <p:spPr>
+          <a:xfrm>
+            <a:off x="7772400" y="246888"/>
+            <a:ext cx="3840480" cy="320040"/>
+          </a:xfrm>
+          <a:prstGeom prst="rect">
+            <a:avLst/>
+          </a:prstGeom>
+          <a:noFill/>
+        </p:spPr>
+        <p:txBody>
+          <a:bodyPr wrap="square">
+            <a:spAutoFit/>
+          </a:bodyPr>
+          <a:lstStyle/>
+          <a:p>
+            <a:pPr algn="r"/>
+            <a:r>
+              <a:rPr sz="1100" b="0">
+                <a:solidFill>
+                  <a:srgbClr val="FFFFFF"/>
+                </a:solidFill>
+              </a:rPr>
+              <a:t>p7_t1_integrated_science_1205</a:t>
+            </a:r>
+          </a:p>
+        </p:txBody>
+      </p:sp>
+      <p:sp>
+        <p:nvSpPr>
+          <p:cNvPr id="6" name="TextBox 5"/>
+          <p:cNvSpPr txBox="1"/>
+          <p:nvPr/>
+        </p:nvSpPr>
+        <p:spPr>
+          <a:xfrm>
+            <a:off x="640080" y="1143000"/>
+            <a:ext cx="10972800" cy="685800"/>
+          </a:xfrm>
+          <a:prstGeom prst="rect">
+            <a:avLst/>
+          </a:prstGeom>
+          <a:noFill/>
+        </p:spPr>
+        <p:txBody>
+          <a:bodyPr wrap="square">
+            <a:spAutoFit/>
+          </a:bodyPr>
+          <a:lstStyle/>
+          <a:p>
+            <a:r>
+              <a:rPr sz="2800" b="1">
+                <a:solidFill>
+                  <a:srgbClr val="1A202C"/>
+                </a:solidFill>
+              </a:rPr>
+              <a:t>Starter: think first</a:t>
+            </a:r>
+          </a:p>
+        </p:txBody>
+      </p:sp>
+      <p:sp>
+        <p:nvSpPr>
+          <p:cNvPr id="7" name="Rounded Rectangle 6"/>
+          <p:cNvSpPr/>
+          <p:nvPr/>
+        </p:nvSpPr>
+        <p:spPr>
+          <a:xfrm>
+            <a:off x="777240" y="1993392"/>
+            <a:ext cx="10835640" cy="1005840"/>
+          </a:xfrm>
+          <a:prstGeom prst="roundRect">
+            <a:avLst/>
+          </a:prstGeom>
+          <a:solidFill>
+            <a:srgbClr val="FFFBEB"/>
+          </a:solidFill>
+          <a:ln w="15240">
+            <a:solidFill>
+              <a:srgbClr val="7C3AED"/>
+            </a:solidFill>
+          </a:ln>
+        </p:spPr>
+        <p:style>
+          <a:lnRef idx="1">
+            <a:schemeClr val="accent1"/>
+          </a:lnRef>
+          <a:fillRef idx="3">
+            <a:schemeClr val="accent1"/>
+          </a:fillRef>
+          <a:effectRef idx="2">
+            <a:schemeClr val="accent1"/>
+          </a:effectRef>
+          <a:fontRef idx="minor">
+            <a:schemeClr val="lt1"/>
+          </a:fontRef>
+        </p:style>
+        <p:txBody>
+          <a:bodyPr rtlCol="0" anchor="ctr"/>
+          <a:lstStyle/>
+          <a:p>
+            <a:pPr algn="ctr"/>
+          </a:p>
+        </p:txBody>
+      </p:sp>
+      <p:sp>
+        <p:nvSpPr>
+          <p:cNvPr id="8" name="TextBox 7"/>
+          <p:cNvSpPr txBox="1"/>
+          <p:nvPr/>
+        </p:nvSpPr>
+        <p:spPr>
+          <a:xfrm>
+            <a:off x="1051560" y="2212848"/>
+            <a:ext cx="10287000" cy="502920"/>
+          </a:xfrm>
+          <a:prstGeom prst="rect">
+            <a:avLst/>
+          </a:prstGeom>
+          <a:noFill/>
+        </p:spPr>
+        <p:txBody>
+          <a:bodyPr wrap="square">
+            <a:spAutoFit/>
+          </a:bodyPr>
+          <a:lstStyle/>
+          <a:p>
+            <a:r>
+              <a:rPr sz="2100" b="1">
+                <a:solidFill>
+                  <a:srgbClr val="1A202C"/>
+                </a:solidFill>
+              </a:rPr>
+              <a:t>Think: Which experiment did you find most challenging?</a:t>
+            </a:r>
+          </a:p>
+        </p:txBody>
+      </p:sp>
+      <p:sp>
+        <p:nvSpPr>
+          <p:cNvPr id="9" name="Rounded Rectangle 8"/>
+          <p:cNvSpPr/>
+          <p:nvPr/>
+        </p:nvSpPr>
+        <p:spPr>
+          <a:xfrm>
+            <a:off x="1005840" y="3246120"/>
+            <a:ext cx="10149840" cy="731520"/>
+          </a:xfrm>
+          <a:prstGeom prst="roundRect">
+            <a:avLst/>
+          </a:prstGeom>
+          <a:solidFill>
+            <a:srgbClr val="F8FAFC"/>
+          </a:solidFill>
+          <a:ln w="15240">
+            <a:solidFill>
+              <a:srgbClr val="CBD5E1"/>
+            </a:solidFill>
+          </a:ln>
+        </p:spPr>
+        <p:style>
+          <a:lnRef idx="1">
+            <a:schemeClr val="accent1"/>
+          </a:lnRef>
+          <a:fillRef idx="3">
+            <a:schemeClr val="accent1"/>
+          </a:fillRef>
+          <a:effectRef idx="2">
+            <a:schemeClr val="accent1"/>
+          </a:effectRef>
+          <a:fontRef idx="minor">
+            <a:schemeClr val="lt1"/>
+          </a:fontRef>
+        </p:style>
+        <p:txBody>
+          <a:bodyPr rtlCol="0" anchor="ctr"/>
+          <a:lstStyle/>
+          <a:p>
+            <a:pPr algn="ctr"/>
+          </a:p>
+        </p:txBody>
+      </p:sp>
+      <p:sp>
+        <p:nvSpPr>
+          <p:cNvPr id="10" name="Oval 9"/>
+          <p:cNvSpPr/>
+          <p:nvPr/>
+        </p:nvSpPr>
+        <p:spPr>
+          <a:xfrm>
+            <a:off x="1234440" y="3364991"/>
+            <a:ext cx="347472" cy="347472"/>
+          </a:xfrm>
+          <a:prstGeom prst="ellipse">
+            <a:avLst/>
+          </a:prstGeom>
+          <a:solidFill>
+            <a:srgbClr val="7C3AED"/>
+          </a:solidFill>
+          <a:ln>
+            <a:noFill/>
+          </a:ln>
+        </p:spPr>
+        <p:style>
+          <a:lnRef idx="1">
+            <a:schemeClr val="accent1"/>
+          </a:lnRef>
+          <a:fillRef idx="3">
+            <a:schemeClr val="accent1"/>
+          </a:fillRef>
+          <a:effectRef idx="2">
+            <a:schemeClr val="accent1"/>
+          </a:effectRef>
+          <a:fontRef idx="minor">
+            <a:schemeClr val="lt1"/>
+          </a:fontRef>
+        </p:style>
+        <p:txBody>
+          <a:bodyPr rtlCol="0" anchor="ctr"/>
+          <a:lstStyle/>
+          <a:p>
+            <a:pPr algn="ctr"/>
+          </a:p>
+        </p:txBody>
+      </p:sp>
+      <p:sp>
+        <p:nvSpPr>
+          <p:cNvPr id="11" name="TextBox 10"/>
+          <p:cNvSpPr txBox="1"/>
+          <p:nvPr/>
+        </p:nvSpPr>
+        <p:spPr>
+          <a:xfrm>
+            <a:off x="1234440" y="3410712"/>
+            <a:ext cx="347472" cy="182880"/>
+          </a:xfrm>
+          <a:prstGeom prst="rect">
+            <a:avLst/>
+          </a:prstGeom>
+          <a:noFill/>
+        </p:spPr>
+        <p:txBody>
+          <a:bodyPr wrap="square">
+            <a:spAutoFit/>
+          </a:bodyPr>
+          <a:lstStyle/>
+          <a:p>
+            <a:pPr algn="ctr"/>
+            <a:r>
+              <a:rPr sz="1000" b="1">
+                <a:solidFill>
+                  <a:srgbClr val="FFFFFF"/>
+                </a:solidFill>
+              </a:rPr>
+              <a:t>1</a:t>
+            </a:r>
+          </a:p>
+        </p:txBody>
+      </p:sp>
+      <p:sp>
+        <p:nvSpPr>
+          <p:cNvPr id="12" name="TextBox 11"/>
+          <p:cNvSpPr txBox="1"/>
+          <p:nvPr/>
+        </p:nvSpPr>
+        <p:spPr>
+          <a:xfrm>
+            <a:off x="1783080" y="3364991"/>
+            <a:ext cx="9006840" cy="347472"/>
+          </a:xfrm>
+          <a:prstGeom prst="rect">
+            <a:avLst/>
+          </a:prstGeom>
+          <a:noFill/>
+        </p:spPr>
+        <p:txBody>
+          <a:bodyPr wrap="square">
+            <a:spAutoFit/>
+          </a:bodyPr>
+          <a:lstStyle/>
+          <a:p>
+            <a:r>
+              <a:rPr sz="1700" b="0">
+                <a:solidFill>
+                  <a:srgbClr val="1A202C"/>
+                </a:solidFill>
+              </a:rPr>
+              <a:t>Pair: compare your first answer with a partner.</a:t>
+            </a:r>
+          </a:p>
+        </p:txBody>
+      </p:sp>
+      <p:sp>
+        <p:nvSpPr>
+          <p:cNvPr id="13" name="Rounded Rectangle 12"/>
+          <p:cNvSpPr/>
+          <p:nvPr/>
+        </p:nvSpPr>
+        <p:spPr>
+          <a:xfrm>
+            <a:off x="1005840" y="4178808"/>
+            <a:ext cx="10149840" cy="731520"/>
+          </a:xfrm>
+          <a:prstGeom prst="roundRect">
+            <a:avLst/>
+          </a:prstGeom>
+          <a:solidFill>
+            <a:srgbClr val="F8FAFC"/>
+          </a:solidFill>
+          <a:ln w="15240">
+            <a:solidFill>
+              <a:srgbClr val="CBD5E1"/>
+            </a:solidFill>
+          </a:ln>
+        </p:spPr>
+        <p:style>
+          <a:lnRef idx="1">
+            <a:schemeClr val="accent1"/>
+          </a:lnRef>
+          <a:fillRef idx="3">
+            <a:schemeClr val="accent1"/>
+          </a:fillRef>
+          <a:effectRef idx="2">
+            <a:schemeClr val="accent1"/>
+          </a:effectRef>
+          <a:fontRef idx="minor">
+            <a:schemeClr val="lt1"/>
+          </a:fontRef>
+        </p:style>
+        <p:txBody>
+          <a:bodyPr rtlCol="0" anchor="ctr"/>
+          <a:lstStyle/>
+          <a:p>
+            <a:pPr algn="ctr"/>
+          </a:p>
+        </p:txBody>
+      </p:sp>
+      <p:sp>
+        <p:nvSpPr>
+          <p:cNvPr id="14" name="Oval 13"/>
+          <p:cNvSpPr/>
+          <p:nvPr/>
+        </p:nvSpPr>
+        <p:spPr>
+          <a:xfrm>
+            <a:off x="1234440" y="4297680"/>
+            <a:ext cx="347472" cy="347472"/>
+          </a:xfrm>
+          <a:prstGeom prst="ellipse">
+            <a:avLst/>
+          </a:prstGeom>
+          <a:solidFill>
+            <a:srgbClr val="7C3AED"/>
+          </a:solidFill>
+          <a:ln>
+            <a:noFill/>
+          </a:ln>
+        </p:spPr>
+        <p:style>
+          <a:lnRef idx="1">
+            <a:schemeClr val="accent1"/>
+          </a:lnRef>
+          <a:fillRef idx="3">
+            <a:schemeClr val="accent1"/>
+          </a:fillRef>
+          <a:effectRef idx="2">
+            <a:schemeClr val="accent1"/>
+          </a:effectRef>
+          <a:fontRef idx="minor">
+            <a:schemeClr val="lt1"/>
+          </a:fontRef>
+        </p:style>
+        <p:txBody>
+          <a:bodyPr rtlCol="0" anchor="ctr"/>
+          <a:lstStyle/>
+          <a:p>
+            <a:pPr algn="ctr"/>
+          </a:p>
+        </p:txBody>
+      </p:sp>
+      <p:sp>
+        <p:nvSpPr>
+          <p:cNvPr id="15" name="TextBox 14"/>
+          <p:cNvSpPr txBox="1"/>
+          <p:nvPr/>
+        </p:nvSpPr>
+        <p:spPr>
+          <a:xfrm>
+            <a:off x="1234440" y="4343400"/>
+            <a:ext cx="347472" cy="182880"/>
+          </a:xfrm>
+          <a:prstGeom prst="rect">
+            <a:avLst/>
+          </a:prstGeom>
+          <a:noFill/>
+        </p:spPr>
+        <p:txBody>
+          <a:bodyPr wrap="square">
+            <a:spAutoFit/>
+          </a:bodyPr>
+          <a:lstStyle/>
+          <a:p>
+            <a:pPr algn="ctr"/>
+            <a:r>
+              <a:rPr sz="1000" b="1">
+                <a:solidFill>
+                  <a:srgbClr val="FFFFFF"/>
+                </a:solidFill>
+              </a:rPr>
+              <a:t>2</a:t>
+            </a:r>
+          </a:p>
+        </p:txBody>
+      </p:sp>
+      <p:sp>
+        <p:nvSpPr>
+          <p:cNvPr id="16" name="TextBox 15"/>
+          <p:cNvSpPr txBox="1"/>
+          <p:nvPr/>
+        </p:nvSpPr>
+        <p:spPr>
+          <a:xfrm>
+            <a:off x="1783080" y="4297680"/>
+            <a:ext cx="9006840" cy="347472"/>
+          </a:xfrm>
+          <a:prstGeom prst="rect">
+            <a:avLst/>
+          </a:prstGeom>
+          <a:noFill/>
+        </p:spPr>
+        <p:txBody>
+          <a:bodyPr wrap="square">
+            <a:spAutoFit/>
+          </a:bodyPr>
+          <a:lstStyle/>
+          <a:p>
+            <a:r>
+              <a:rPr sz="1700" b="0">
+                <a:solidFill>
+                  <a:srgbClr val="1A202C"/>
+                </a:solidFill>
+              </a:rPr>
+              <a:t>Share: connect your answer to Looking Back at Our Experiments.</a:t>
+            </a:r>
+          </a:p>
+        </p:txBody>
+      </p:sp>
+      <p:sp>
+        <p:nvSpPr>
+          <p:cNvPr id="17" name="TextBox 16"/>
+          <p:cNvSpPr txBox="1"/>
+          <p:nvPr/>
+        </p:nvSpPr>
+        <p:spPr>
+          <a:xfrm>
+            <a:off x="777240" y="6419088"/>
+            <a:ext cx="10835640" cy="228600"/>
+          </a:xfrm>
+          <a:prstGeom prst="rect">
+            <a:avLst/>
+          </a:prstGeom>
+          <a:noFill/>
+        </p:spPr>
+        <p:txBody>
+          <a:bodyPr wrap="square">
+            <a:spAutoFit/>
+          </a:bodyPr>
+          <a:lstStyle/>
+          <a:p>
+            <a:pPr algn="r"/>
+            <a:r>
+              <a:rPr sz="1000" b="0">
+                <a:solidFill>
+                  <a:srgbClr val="5B677D"/>
+                </a:solidFill>
+              </a:rPr>
+              <a:t>Listen • Talk • Try • Explain</a:t>
             </a:r>
           </a:p>
         </p:txBody>
@@ -3388,43 +4701,100 @@
       <p:grpSpPr/>
       <p:sp>
         <p:nvSpPr>
-          <p:cNvPr id="2" name="TextBox 1"/>
+          <p:cNvPr id="2" name="Rectangle 1"/>
+          <p:cNvSpPr/>
+          <p:nvPr/>
+        </p:nvSpPr>
+        <p:spPr>
+          <a:xfrm>
+            <a:off x="0" y="0"/>
+            <a:ext cx="12191695" cy="914400"/>
+          </a:xfrm>
+          <a:prstGeom prst="rect">
+            <a:avLst/>
+          </a:prstGeom>
+          <a:solidFill>
+            <a:srgbClr val="0E7490"/>
+          </a:solidFill>
+          <a:ln>
+            <a:noFill/>
+          </a:ln>
+        </p:spPr>
+        <p:style>
+          <a:lnRef idx="1">
+            <a:schemeClr val="accent1"/>
+          </a:lnRef>
+          <a:fillRef idx="3">
+            <a:schemeClr val="accent1"/>
+          </a:fillRef>
+          <a:effectRef idx="2">
+            <a:schemeClr val="accent1"/>
+          </a:effectRef>
+          <a:fontRef idx="minor">
+            <a:schemeClr val="lt1"/>
+          </a:fontRef>
+        </p:style>
+        <p:txBody>
+          <a:bodyPr rtlCol="0" anchor="ctr"/>
+          <a:lstStyle/>
+          <a:p>
+            <a:pPr algn="ctr"/>
+          </a:p>
+        </p:txBody>
+      </p:sp>
+      <p:sp>
+        <p:nvSpPr>
+          <p:cNvPr id="3" name="Rectangle 2"/>
+          <p:cNvSpPr/>
+          <p:nvPr/>
+        </p:nvSpPr>
+        <p:spPr>
+          <a:xfrm>
+            <a:off x="0" y="914400"/>
+            <a:ext cx="164592" cy="5943600"/>
+          </a:xfrm>
+          <a:prstGeom prst="rect">
+            <a:avLst/>
+          </a:prstGeom>
+          <a:solidFill>
+            <a:srgbClr val="0E7490"/>
+          </a:solidFill>
+          <a:ln>
+            <a:noFill/>
+          </a:ln>
+        </p:spPr>
+        <p:style>
+          <a:lnRef idx="1">
+            <a:schemeClr val="accent1"/>
+          </a:lnRef>
+          <a:fillRef idx="3">
+            <a:schemeClr val="accent1"/>
+          </a:fillRef>
+          <a:effectRef idx="2">
+            <a:schemeClr val="accent1"/>
+          </a:effectRef>
+          <a:fontRef idx="minor">
+            <a:schemeClr val="lt1"/>
+          </a:fontRef>
+        </p:style>
+        <p:txBody>
+          <a:bodyPr rtlCol="0" anchor="ctr"/>
+          <a:lstStyle/>
+          <a:p>
+            <a:pPr algn="ctr"/>
+          </a:p>
+        </p:txBody>
+      </p:sp>
+      <p:sp>
+        <p:nvSpPr>
+          <p:cNvPr id="4" name="TextBox 3"/>
           <p:cNvSpPr txBox="1"/>
           <p:nvPr/>
         </p:nvSpPr>
         <p:spPr>
           <a:xfrm>
-            <a:off x="548640" y="320040"/>
-            <a:ext cx="11064240" cy="777240"/>
-          </a:xfrm>
-          <a:prstGeom prst="rect">
-            <a:avLst/>
-          </a:prstGeom>
-          <a:noFill/>
-        </p:spPr>
-        <p:txBody>
-          <a:bodyPr wrap="none">
-            <a:spAutoFit/>
-          </a:bodyPr>
-          <a:lstStyle/>
-          <a:p>
-            <a:r>
-              <a:rPr sz="3000" b="1"/>
-              <a:t>How to Write a Science Report</a:t>
-            </a:r>
-          </a:p>
-        </p:txBody>
-      </p:sp>
-      <p:sp>
-        <p:nvSpPr>
-          <p:cNvPr id="3" name="TextBox 2"/>
-          <p:cNvSpPr txBox="1"/>
-          <p:nvPr/>
-        </p:nvSpPr>
-        <p:spPr>
-          <a:xfrm>
-            <a:off x="868680" y="1417320"/>
-            <a:ext cx="10424160" cy="4892040"/>
+            <a:off x="594360" y="246888"/>
+            <a:ext cx="2926080" cy="320040"/>
           </a:xfrm>
           <a:prstGeom prst="rect">
             <a:avLst/>
@@ -3437,47 +4807,812 @@
           </a:bodyPr>
           <a:lstStyle/>
           <a:p>
-            <a:pPr>
-              <a:spcAft>
-                <a:spcPts val="800"/>
-              </a:spcAft>
-              <a:defRPr sz="2200"/>
-            </a:pPr>
-            <a:r>
-              <a:t>Title and Aim (What and Why).</a:t>
-            </a:r>
-          </a:p>
-          <a:p>
-            <a:pPr>
-              <a:spcAft>
-                <a:spcPts val="800"/>
-              </a:spcAft>
-              <a:defRPr sz="2200"/>
-            </a:pPr>
-            <a:r>
-              <a:t>Apparatus/Materials (The tools).</a:t>
-            </a:r>
-          </a:p>
-          <a:p>
-            <a:pPr>
-              <a:spcAft>
-                <a:spcPts val="800"/>
-              </a:spcAft>
-              <a:defRPr sz="2200"/>
-            </a:pPr>
-            <a:r>
-              <a:t>Procedure (The steps).</a:t>
-            </a:r>
-          </a:p>
-          <a:p>
-            <a:pPr>
-              <a:spcAft>
-                <a:spcPts val="800"/>
-              </a:spcAft>
-              <a:defRPr sz="2200"/>
-            </a:pPr>
-            <a:r>
-              <a:t>Results and Conclusion (What happened and What it means).</a:t>
+            <a:r>
+              <a:rPr sz="1300" b="1">
+                <a:solidFill>
+                  <a:srgbClr val="FFFFFF"/>
+                </a:solidFill>
+              </a:rPr>
+              <a:t>4. CONCEPT</a:t>
+            </a:r>
+          </a:p>
+        </p:txBody>
+      </p:sp>
+      <p:sp>
+        <p:nvSpPr>
+          <p:cNvPr id="5" name="TextBox 4"/>
+          <p:cNvSpPr txBox="1"/>
+          <p:nvPr/>
+        </p:nvSpPr>
+        <p:spPr>
+          <a:xfrm>
+            <a:off x="7772400" y="246888"/>
+            <a:ext cx="3840480" cy="320040"/>
+          </a:xfrm>
+          <a:prstGeom prst="rect">
+            <a:avLst/>
+          </a:prstGeom>
+          <a:noFill/>
+        </p:spPr>
+        <p:txBody>
+          <a:bodyPr wrap="square">
+            <a:spAutoFit/>
+          </a:bodyPr>
+          <a:lstStyle/>
+          <a:p>
+            <a:pPr algn="r"/>
+            <a:r>
+              <a:rPr sz="1100" b="0">
+                <a:solidFill>
+                  <a:srgbClr val="FFFFFF"/>
+                </a:solidFill>
+              </a:rPr>
+              <a:t>p7_t1_integrated_science_1205</a:t>
+            </a:r>
+          </a:p>
+        </p:txBody>
+      </p:sp>
+      <p:sp>
+        <p:nvSpPr>
+          <p:cNvPr id="6" name="TextBox 5"/>
+          <p:cNvSpPr txBox="1"/>
+          <p:nvPr/>
+        </p:nvSpPr>
+        <p:spPr>
+          <a:xfrm>
+            <a:off x="640080" y="1143000"/>
+            <a:ext cx="10972800" cy="685800"/>
+          </a:xfrm>
+          <a:prstGeom prst="rect">
+            <a:avLst/>
+          </a:prstGeom>
+          <a:noFill/>
+        </p:spPr>
+        <p:txBody>
+          <a:bodyPr wrap="square">
+            <a:spAutoFit/>
+          </a:bodyPr>
+          <a:lstStyle/>
+          <a:p>
+            <a:r>
+              <a:rPr sz="2800" b="1">
+                <a:solidFill>
+                  <a:srgbClr val="1A202C"/>
+                </a:solidFill>
+              </a:rPr>
+              <a:t>Looking Back at Our Experiments</a:t>
+            </a:r>
+          </a:p>
+        </p:txBody>
+      </p:sp>
+      <p:sp>
+        <p:nvSpPr>
+          <p:cNvPr id="7" name="Rounded Rectangle 6"/>
+          <p:cNvSpPr/>
+          <p:nvPr/>
+        </p:nvSpPr>
+        <p:spPr>
+          <a:xfrm>
+            <a:off x="777240" y="1993392"/>
+            <a:ext cx="10835640" cy="1005840"/>
+          </a:xfrm>
+          <a:prstGeom prst="roundRect">
+            <a:avLst/>
+          </a:prstGeom>
+          <a:solidFill>
+            <a:srgbClr val="FFFBEB"/>
+          </a:solidFill>
+          <a:ln w="15240">
+            <a:solidFill>
+              <a:srgbClr val="0E7490"/>
+            </a:solidFill>
+          </a:ln>
+        </p:spPr>
+        <p:style>
+          <a:lnRef idx="1">
+            <a:schemeClr val="accent1"/>
+          </a:lnRef>
+          <a:fillRef idx="3">
+            <a:schemeClr val="accent1"/>
+          </a:fillRef>
+          <a:effectRef idx="2">
+            <a:schemeClr val="accent1"/>
+          </a:effectRef>
+          <a:fontRef idx="minor">
+            <a:schemeClr val="lt1"/>
+          </a:fontRef>
+        </p:style>
+        <p:txBody>
+          <a:bodyPr rtlCol="0" anchor="ctr"/>
+          <a:lstStyle/>
+          <a:p>
+            <a:pPr algn="ctr"/>
+          </a:p>
+        </p:txBody>
+      </p:sp>
+      <p:sp>
+        <p:nvSpPr>
+          <p:cNvPr id="8" name="TextBox 7"/>
+          <p:cNvSpPr txBox="1"/>
+          <p:nvPr/>
+        </p:nvSpPr>
+        <p:spPr>
+          <a:xfrm>
+            <a:off x="1051560" y="2212848"/>
+            <a:ext cx="10287000" cy="502920"/>
+          </a:xfrm>
+          <a:prstGeom prst="rect">
+            <a:avLst/>
+          </a:prstGeom>
+          <a:noFill/>
+        </p:spPr>
+        <p:txBody>
+          <a:bodyPr wrap="square">
+            <a:spAutoFit/>
+          </a:bodyPr>
+          <a:lstStyle/>
+          <a:p>
+            <a:r>
+              <a:rPr sz="2100" b="1">
+                <a:solidFill>
+                  <a:srgbClr val="1A202C"/>
+                </a:solidFill>
+              </a:rPr>
+              <a:t>Key idea: Prior knowledge activation regarding Term 1 Science practicals (Skeleton</a:t>
+            </a:r>
+          </a:p>
+        </p:txBody>
+      </p:sp>
+      <p:sp>
+        <p:nvSpPr>
+          <p:cNvPr id="9" name="Rounded Rectangle 8"/>
+          <p:cNvSpPr/>
+          <p:nvPr/>
+        </p:nvSpPr>
+        <p:spPr>
+          <a:xfrm>
+            <a:off x="1005840" y="3246120"/>
+            <a:ext cx="10149840" cy="621792"/>
+          </a:xfrm>
+          <a:prstGeom prst="roundRect">
+            <a:avLst/>
+          </a:prstGeom>
+          <a:solidFill>
+            <a:srgbClr val="F8FAFC"/>
+          </a:solidFill>
+          <a:ln w="15240">
+            <a:solidFill>
+              <a:srgbClr val="CBD5E1"/>
+            </a:solidFill>
+          </a:ln>
+        </p:spPr>
+        <p:style>
+          <a:lnRef idx="1">
+            <a:schemeClr val="accent1"/>
+          </a:lnRef>
+          <a:fillRef idx="3">
+            <a:schemeClr val="accent1"/>
+          </a:fillRef>
+          <a:effectRef idx="2">
+            <a:schemeClr val="accent1"/>
+          </a:effectRef>
+          <a:fontRef idx="minor">
+            <a:schemeClr val="lt1"/>
+          </a:fontRef>
+        </p:style>
+        <p:txBody>
+          <a:bodyPr rtlCol="0" anchor="ctr"/>
+          <a:lstStyle/>
+          <a:p>
+            <a:pPr algn="ctr"/>
+          </a:p>
+        </p:txBody>
+      </p:sp>
+      <p:sp>
+        <p:nvSpPr>
+          <p:cNvPr id="10" name="Oval 9"/>
+          <p:cNvSpPr/>
+          <p:nvPr/>
+        </p:nvSpPr>
+        <p:spPr>
+          <a:xfrm>
+            <a:off x="1234440" y="3364991"/>
+            <a:ext cx="347472" cy="347472"/>
+          </a:xfrm>
+          <a:prstGeom prst="ellipse">
+            <a:avLst/>
+          </a:prstGeom>
+          <a:solidFill>
+            <a:srgbClr val="0E7490"/>
+          </a:solidFill>
+          <a:ln>
+            <a:noFill/>
+          </a:ln>
+        </p:spPr>
+        <p:style>
+          <a:lnRef idx="1">
+            <a:schemeClr val="accent1"/>
+          </a:lnRef>
+          <a:fillRef idx="3">
+            <a:schemeClr val="accent1"/>
+          </a:fillRef>
+          <a:effectRef idx="2">
+            <a:schemeClr val="accent1"/>
+          </a:effectRef>
+          <a:fontRef idx="minor">
+            <a:schemeClr val="lt1"/>
+          </a:fontRef>
+        </p:style>
+        <p:txBody>
+          <a:bodyPr rtlCol="0" anchor="ctr"/>
+          <a:lstStyle/>
+          <a:p>
+            <a:pPr algn="ctr"/>
+          </a:p>
+        </p:txBody>
+      </p:sp>
+      <p:sp>
+        <p:nvSpPr>
+          <p:cNvPr id="11" name="TextBox 10"/>
+          <p:cNvSpPr txBox="1"/>
+          <p:nvPr/>
+        </p:nvSpPr>
+        <p:spPr>
+          <a:xfrm>
+            <a:off x="1234440" y="3410712"/>
+            <a:ext cx="347472" cy="182880"/>
+          </a:xfrm>
+          <a:prstGeom prst="rect">
+            <a:avLst/>
+          </a:prstGeom>
+          <a:noFill/>
+        </p:spPr>
+        <p:txBody>
+          <a:bodyPr wrap="square">
+            <a:spAutoFit/>
+          </a:bodyPr>
+          <a:lstStyle/>
+          <a:p>
+            <a:pPr algn="ctr"/>
+            <a:r>
+              <a:rPr sz="1000" b="1">
+                <a:solidFill>
+                  <a:srgbClr val="FFFFFF"/>
+                </a:solidFill>
+              </a:rPr>
+              <a:t>1</a:t>
+            </a:r>
+          </a:p>
+        </p:txBody>
+      </p:sp>
+      <p:sp>
+        <p:nvSpPr>
+          <p:cNvPr id="12" name="TextBox 11"/>
+          <p:cNvSpPr txBox="1"/>
+          <p:nvPr/>
+        </p:nvSpPr>
+        <p:spPr>
+          <a:xfrm>
+            <a:off x="1783080" y="3364991"/>
+            <a:ext cx="9006840" cy="347472"/>
+          </a:xfrm>
+          <a:prstGeom prst="rect">
+            <a:avLst/>
+          </a:prstGeom>
+          <a:noFill/>
+        </p:spPr>
+        <p:txBody>
+          <a:bodyPr wrap="square">
+            <a:spAutoFit/>
+          </a:bodyPr>
+          <a:lstStyle/>
+          <a:p>
+            <a:r>
+              <a:rPr sz="1700" b="0">
+                <a:solidFill>
+                  <a:srgbClr val="1A202C"/>
+                </a:solidFill>
+              </a:rPr>
+              <a:t>models, electricity circuits, and energy resources).</a:t>
+            </a:r>
+          </a:p>
+        </p:txBody>
+      </p:sp>
+      <p:sp>
+        <p:nvSpPr>
+          <p:cNvPr id="13" name="Rounded Rectangle 12"/>
+          <p:cNvSpPr/>
+          <p:nvPr/>
+        </p:nvSpPr>
+        <p:spPr>
+          <a:xfrm>
+            <a:off x="1005840" y="4069080"/>
+            <a:ext cx="10149840" cy="621792"/>
+          </a:xfrm>
+          <a:prstGeom prst="roundRect">
+            <a:avLst/>
+          </a:prstGeom>
+          <a:solidFill>
+            <a:srgbClr val="F8FAFC"/>
+          </a:solidFill>
+          <a:ln w="15240">
+            <a:solidFill>
+              <a:srgbClr val="CBD5E1"/>
+            </a:solidFill>
+          </a:ln>
+        </p:spPr>
+        <p:style>
+          <a:lnRef idx="1">
+            <a:schemeClr val="accent1"/>
+          </a:lnRef>
+          <a:fillRef idx="3">
+            <a:schemeClr val="accent1"/>
+          </a:fillRef>
+          <a:effectRef idx="2">
+            <a:schemeClr val="accent1"/>
+          </a:effectRef>
+          <a:fontRef idx="minor">
+            <a:schemeClr val="lt1"/>
+          </a:fontRef>
+        </p:style>
+        <p:txBody>
+          <a:bodyPr rtlCol="0" anchor="ctr"/>
+          <a:lstStyle/>
+          <a:p>
+            <a:pPr algn="ctr"/>
+          </a:p>
+        </p:txBody>
+      </p:sp>
+      <p:sp>
+        <p:nvSpPr>
+          <p:cNvPr id="14" name="Oval 13"/>
+          <p:cNvSpPr/>
+          <p:nvPr/>
+        </p:nvSpPr>
+        <p:spPr>
+          <a:xfrm>
+            <a:off x="1234440" y="4187952"/>
+            <a:ext cx="347472" cy="347472"/>
+          </a:xfrm>
+          <a:prstGeom prst="ellipse">
+            <a:avLst/>
+          </a:prstGeom>
+          <a:solidFill>
+            <a:srgbClr val="0E7490"/>
+          </a:solidFill>
+          <a:ln>
+            <a:noFill/>
+          </a:ln>
+        </p:spPr>
+        <p:style>
+          <a:lnRef idx="1">
+            <a:schemeClr val="accent1"/>
+          </a:lnRef>
+          <a:fillRef idx="3">
+            <a:schemeClr val="accent1"/>
+          </a:fillRef>
+          <a:effectRef idx="2">
+            <a:schemeClr val="accent1"/>
+          </a:effectRef>
+          <a:fontRef idx="minor">
+            <a:schemeClr val="lt1"/>
+          </a:fontRef>
+        </p:style>
+        <p:txBody>
+          <a:bodyPr rtlCol="0" anchor="ctr"/>
+          <a:lstStyle/>
+          <a:p>
+            <a:pPr algn="ctr"/>
+          </a:p>
+        </p:txBody>
+      </p:sp>
+      <p:sp>
+        <p:nvSpPr>
+          <p:cNvPr id="15" name="TextBox 14"/>
+          <p:cNvSpPr txBox="1"/>
+          <p:nvPr/>
+        </p:nvSpPr>
+        <p:spPr>
+          <a:xfrm>
+            <a:off x="1234440" y="4233672"/>
+            <a:ext cx="347472" cy="182880"/>
+          </a:xfrm>
+          <a:prstGeom prst="rect">
+            <a:avLst/>
+          </a:prstGeom>
+          <a:noFill/>
+        </p:spPr>
+        <p:txBody>
+          <a:bodyPr wrap="square">
+            <a:spAutoFit/>
+          </a:bodyPr>
+          <a:lstStyle/>
+          <a:p>
+            <a:pPr algn="ctr"/>
+            <a:r>
+              <a:rPr sz="1000" b="1">
+                <a:solidFill>
+                  <a:srgbClr val="FFFFFF"/>
+                </a:solidFill>
+              </a:rPr>
+              <a:t>2</a:t>
+            </a:r>
+          </a:p>
+        </p:txBody>
+      </p:sp>
+      <p:sp>
+        <p:nvSpPr>
+          <p:cNvPr id="16" name="TextBox 15"/>
+          <p:cNvSpPr txBox="1"/>
+          <p:nvPr/>
+        </p:nvSpPr>
+        <p:spPr>
+          <a:xfrm>
+            <a:off x="1783080" y="4187952"/>
+            <a:ext cx="9006840" cy="347472"/>
+          </a:xfrm>
+          <a:prstGeom prst="rect">
+            <a:avLst/>
+          </a:prstGeom>
+          <a:noFill/>
+        </p:spPr>
+        <p:txBody>
+          <a:bodyPr wrap="square">
+            <a:spAutoFit/>
+          </a:bodyPr>
+          <a:lstStyle/>
+          <a:p>
+            <a:r>
+              <a:rPr sz="1700" b="0">
+                <a:solidFill>
+                  <a:srgbClr val="1A202C"/>
+                </a:solidFill>
+              </a:rPr>
+              <a:t>Reviewing the Muscular-Skeletal model.</a:t>
+            </a:r>
+          </a:p>
+        </p:txBody>
+      </p:sp>
+      <p:sp>
+        <p:nvSpPr>
+          <p:cNvPr id="17" name="Rounded Rectangle 16"/>
+          <p:cNvSpPr/>
+          <p:nvPr/>
+        </p:nvSpPr>
+        <p:spPr>
+          <a:xfrm>
+            <a:off x="1005840" y="4892040"/>
+            <a:ext cx="10149840" cy="621792"/>
+          </a:xfrm>
+          <a:prstGeom prst="roundRect">
+            <a:avLst/>
+          </a:prstGeom>
+          <a:solidFill>
+            <a:srgbClr val="F8FAFC"/>
+          </a:solidFill>
+          <a:ln w="15240">
+            <a:solidFill>
+              <a:srgbClr val="CBD5E1"/>
+            </a:solidFill>
+          </a:ln>
+        </p:spPr>
+        <p:style>
+          <a:lnRef idx="1">
+            <a:schemeClr val="accent1"/>
+          </a:lnRef>
+          <a:fillRef idx="3">
+            <a:schemeClr val="accent1"/>
+          </a:fillRef>
+          <a:effectRef idx="2">
+            <a:schemeClr val="accent1"/>
+          </a:effectRef>
+          <a:fontRef idx="minor">
+            <a:schemeClr val="lt1"/>
+          </a:fontRef>
+        </p:style>
+        <p:txBody>
+          <a:bodyPr rtlCol="0" anchor="ctr"/>
+          <a:lstStyle/>
+          <a:p>
+            <a:pPr algn="ctr"/>
+          </a:p>
+        </p:txBody>
+      </p:sp>
+      <p:sp>
+        <p:nvSpPr>
+          <p:cNvPr id="18" name="Oval 17"/>
+          <p:cNvSpPr/>
+          <p:nvPr/>
+        </p:nvSpPr>
+        <p:spPr>
+          <a:xfrm>
+            <a:off x="1234440" y="5010912"/>
+            <a:ext cx="347472" cy="347472"/>
+          </a:xfrm>
+          <a:prstGeom prst="ellipse">
+            <a:avLst/>
+          </a:prstGeom>
+          <a:solidFill>
+            <a:srgbClr val="0E7490"/>
+          </a:solidFill>
+          <a:ln>
+            <a:noFill/>
+          </a:ln>
+        </p:spPr>
+        <p:style>
+          <a:lnRef idx="1">
+            <a:schemeClr val="accent1"/>
+          </a:lnRef>
+          <a:fillRef idx="3">
+            <a:schemeClr val="accent1"/>
+          </a:fillRef>
+          <a:effectRef idx="2">
+            <a:schemeClr val="accent1"/>
+          </a:effectRef>
+          <a:fontRef idx="minor">
+            <a:schemeClr val="lt1"/>
+          </a:fontRef>
+        </p:style>
+        <p:txBody>
+          <a:bodyPr rtlCol="0" anchor="ctr"/>
+          <a:lstStyle/>
+          <a:p>
+            <a:pPr algn="ctr"/>
+          </a:p>
+        </p:txBody>
+      </p:sp>
+      <p:sp>
+        <p:nvSpPr>
+          <p:cNvPr id="19" name="TextBox 18"/>
+          <p:cNvSpPr txBox="1"/>
+          <p:nvPr/>
+        </p:nvSpPr>
+        <p:spPr>
+          <a:xfrm>
+            <a:off x="1234440" y="5056632"/>
+            <a:ext cx="347472" cy="182880"/>
+          </a:xfrm>
+          <a:prstGeom prst="rect">
+            <a:avLst/>
+          </a:prstGeom>
+          <a:noFill/>
+        </p:spPr>
+        <p:txBody>
+          <a:bodyPr wrap="square">
+            <a:spAutoFit/>
+          </a:bodyPr>
+          <a:lstStyle/>
+          <a:p>
+            <a:pPr algn="ctr"/>
+            <a:r>
+              <a:rPr sz="1000" b="1">
+                <a:solidFill>
+                  <a:srgbClr val="FFFFFF"/>
+                </a:solidFill>
+              </a:rPr>
+              <a:t>3</a:t>
+            </a:r>
+          </a:p>
+        </p:txBody>
+      </p:sp>
+      <p:sp>
+        <p:nvSpPr>
+          <p:cNvPr id="20" name="TextBox 19"/>
+          <p:cNvSpPr txBox="1"/>
+          <p:nvPr/>
+        </p:nvSpPr>
+        <p:spPr>
+          <a:xfrm>
+            <a:off x="1783080" y="5010912"/>
+            <a:ext cx="9006840" cy="347472"/>
+          </a:xfrm>
+          <a:prstGeom prst="rect">
+            <a:avLst/>
+          </a:prstGeom>
+          <a:noFill/>
+        </p:spPr>
+        <p:txBody>
+          <a:bodyPr wrap="square">
+            <a:spAutoFit/>
+          </a:bodyPr>
+          <a:lstStyle/>
+          <a:p>
+            <a:r>
+              <a:rPr sz="1700" b="0">
+                <a:solidFill>
+                  <a:srgbClr val="1A202C"/>
+                </a:solidFill>
+              </a:rPr>
+              <a:t>Recalling the Electricity and Magnetism circuit.</a:t>
+            </a:r>
+          </a:p>
+        </p:txBody>
+      </p:sp>
+      <p:sp>
+        <p:nvSpPr>
+          <p:cNvPr id="21" name="Rounded Rectangle 20"/>
+          <p:cNvSpPr/>
+          <p:nvPr/>
+        </p:nvSpPr>
+        <p:spPr>
+          <a:xfrm>
+            <a:off x="1005840" y="5715000"/>
+            <a:ext cx="10149840" cy="621792"/>
+          </a:xfrm>
+          <a:prstGeom prst="roundRect">
+            <a:avLst/>
+          </a:prstGeom>
+          <a:solidFill>
+            <a:srgbClr val="F8FAFC"/>
+          </a:solidFill>
+          <a:ln w="15240">
+            <a:solidFill>
+              <a:srgbClr val="CBD5E1"/>
+            </a:solidFill>
+          </a:ln>
+        </p:spPr>
+        <p:style>
+          <a:lnRef idx="1">
+            <a:schemeClr val="accent1"/>
+          </a:lnRef>
+          <a:fillRef idx="3">
+            <a:schemeClr val="accent1"/>
+          </a:fillRef>
+          <a:effectRef idx="2">
+            <a:schemeClr val="accent1"/>
+          </a:effectRef>
+          <a:fontRef idx="minor">
+            <a:schemeClr val="lt1"/>
+          </a:fontRef>
+        </p:style>
+        <p:txBody>
+          <a:bodyPr rtlCol="0" anchor="ctr"/>
+          <a:lstStyle/>
+          <a:p>
+            <a:pPr algn="ctr"/>
+          </a:p>
+        </p:txBody>
+      </p:sp>
+      <p:sp>
+        <p:nvSpPr>
+          <p:cNvPr id="22" name="Oval 21"/>
+          <p:cNvSpPr/>
+          <p:nvPr/>
+        </p:nvSpPr>
+        <p:spPr>
+          <a:xfrm>
+            <a:off x="1234440" y="5833872"/>
+            <a:ext cx="347472" cy="347472"/>
+          </a:xfrm>
+          <a:prstGeom prst="ellipse">
+            <a:avLst/>
+          </a:prstGeom>
+          <a:solidFill>
+            <a:srgbClr val="0E7490"/>
+          </a:solidFill>
+          <a:ln>
+            <a:noFill/>
+          </a:ln>
+        </p:spPr>
+        <p:style>
+          <a:lnRef idx="1">
+            <a:schemeClr val="accent1"/>
+          </a:lnRef>
+          <a:fillRef idx="3">
+            <a:schemeClr val="accent1"/>
+          </a:fillRef>
+          <a:effectRef idx="2">
+            <a:schemeClr val="accent1"/>
+          </a:effectRef>
+          <a:fontRef idx="minor">
+            <a:schemeClr val="lt1"/>
+          </a:fontRef>
+        </p:style>
+        <p:txBody>
+          <a:bodyPr rtlCol="0" anchor="ctr"/>
+          <a:lstStyle/>
+          <a:p>
+            <a:pPr algn="ctr"/>
+          </a:p>
+        </p:txBody>
+      </p:sp>
+      <p:sp>
+        <p:nvSpPr>
+          <p:cNvPr id="23" name="TextBox 22"/>
+          <p:cNvSpPr txBox="1"/>
+          <p:nvPr/>
+        </p:nvSpPr>
+        <p:spPr>
+          <a:xfrm>
+            <a:off x="1234440" y="5879592"/>
+            <a:ext cx="347472" cy="182880"/>
+          </a:xfrm>
+          <a:prstGeom prst="rect">
+            <a:avLst/>
+          </a:prstGeom>
+          <a:noFill/>
+        </p:spPr>
+        <p:txBody>
+          <a:bodyPr wrap="square">
+            <a:spAutoFit/>
+          </a:bodyPr>
+          <a:lstStyle/>
+          <a:p>
+            <a:pPr algn="ctr"/>
+            <a:r>
+              <a:rPr sz="1000" b="1">
+                <a:solidFill>
+                  <a:srgbClr val="FFFFFF"/>
+                </a:solidFill>
+              </a:rPr>
+              <a:t>4</a:t>
+            </a:r>
+          </a:p>
+        </p:txBody>
+      </p:sp>
+      <p:sp>
+        <p:nvSpPr>
+          <p:cNvPr id="24" name="TextBox 23"/>
+          <p:cNvSpPr txBox="1"/>
+          <p:nvPr/>
+        </p:nvSpPr>
+        <p:spPr>
+          <a:xfrm>
+            <a:off x="1783080" y="5833872"/>
+            <a:ext cx="9006840" cy="347472"/>
+          </a:xfrm>
+          <a:prstGeom prst="rect">
+            <a:avLst/>
+          </a:prstGeom>
+          <a:noFill/>
+        </p:spPr>
+        <p:txBody>
+          <a:bodyPr wrap="square">
+            <a:spAutoFit/>
+          </a:bodyPr>
+          <a:lstStyle/>
+          <a:p>
+            <a:r>
+              <a:rPr sz="1700" b="0">
+                <a:solidFill>
+                  <a:srgbClr val="1A202C"/>
+                </a:solidFill>
+              </a:rPr>
+              <a:t>Remembering the Energy Resources (biogas/solar) project.</a:t>
+            </a:r>
+          </a:p>
+        </p:txBody>
+      </p:sp>
+      <p:sp>
+        <p:nvSpPr>
+          <p:cNvPr id="25" name="TextBox 24"/>
+          <p:cNvSpPr txBox="1"/>
+          <p:nvPr/>
+        </p:nvSpPr>
+        <p:spPr>
+          <a:xfrm>
+            <a:off x="777240" y="6419088"/>
+            <a:ext cx="10835640" cy="228600"/>
+          </a:xfrm>
+          <a:prstGeom prst="rect">
+            <a:avLst/>
+          </a:prstGeom>
+          <a:noFill/>
+        </p:spPr>
+        <p:txBody>
+          <a:bodyPr wrap="square">
+            <a:spAutoFit/>
+          </a:bodyPr>
+          <a:lstStyle/>
+          <a:p>
+            <a:pPr algn="r"/>
+            <a:r>
+              <a:rPr sz="1000" b="0">
+                <a:solidFill>
+                  <a:srgbClr val="5B677D"/>
+                </a:solidFill>
+              </a:rPr>
+              <a:t>Listen • Talk • Try • Explain</a:t>
             </a:r>
           </a:p>
         </p:txBody>
@@ -3502,43 +5637,100 @@
       <p:grpSpPr/>
       <p:sp>
         <p:nvSpPr>
-          <p:cNvPr id="2" name="TextBox 1"/>
+          <p:cNvPr id="2" name="Rectangle 1"/>
+          <p:cNvSpPr/>
+          <p:nvPr/>
+        </p:nvSpPr>
+        <p:spPr>
+          <a:xfrm>
+            <a:off x="0" y="0"/>
+            <a:ext cx="12191695" cy="914400"/>
+          </a:xfrm>
+          <a:prstGeom prst="rect">
+            <a:avLst/>
+          </a:prstGeom>
+          <a:solidFill>
+            <a:srgbClr val="D97706"/>
+          </a:solidFill>
+          <a:ln>
+            <a:noFill/>
+          </a:ln>
+        </p:spPr>
+        <p:style>
+          <a:lnRef idx="1">
+            <a:schemeClr val="accent1"/>
+          </a:lnRef>
+          <a:fillRef idx="3">
+            <a:schemeClr val="accent1"/>
+          </a:fillRef>
+          <a:effectRef idx="2">
+            <a:schemeClr val="accent1"/>
+          </a:effectRef>
+          <a:fontRef idx="minor">
+            <a:schemeClr val="lt1"/>
+          </a:fontRef>
+        </p:style>
+        <p:txBody>
+          <a:bodyPr rtlCol="0" anchor="ctr"/>
+          <a:lstStyle/>
+          <a:p>
+            <a:pPr algn="ctr"/>
+          </a:p>
+        </p:txBody>
+      </p:sp>
+      <p:sp>
+        <p:nvSpPr>
+          <p:cNvPr id="3" name="Rectangle 2"/>
+          <p:cNvSpPr/>
+          <p:nvPr/>
+        </p:nvSpPr>
+        <p:spPr>
+          <a:xfrm>
+            <a:off x="0" y="914400"/>
+            <a:ext cx="164592" cy="5943600"/>
+          </a:xfrm>
+          <a:prstGeom prst="rect">
+            <a:avLst/>
+          </a:prstGeom>
+          <a:solidFill>
+            <a:srgbClr val="D97706"/>
+          </a:solidFill>
+          <a:ln>
+            <a:noFill/>
+          </a:ln>
+        </p:spPr>
+        <p:style>
+          <a:lnRef idx="1">
+            <a:schemeClr val="accent1"/>
+          </a:lnRef>
+          <a:fillRef idx="3">
+            <a:schemeClr val="accent1"/>
+          </a:fillRef>
+          <a:effectRef idx="2">
+            <a:schemeClr val="accent1"/>
+          </a:effectRef>
+          <a:fontRef idx="minor">
+            <a:schemeClr val="lt1"/>
+          </a:fontRef>
+        </p:style>
+        <p:txBody>
+          <a:bodyPr rtlCol="0" anchor="ctr"/>
+          <a:lstStyle/>
+          <a:p>
+            <a:pPr algn="ctr"/>
+          </a:p>
+        </p:txBody>
+      </p:sp>
+      <p:sp>
+        <p:nvSpPr>
+          <p:cNvPr id="4" name="TextBox 3"/>
           <p:cNvSpPr txBox="1"/>
           <p:nvPr/>
         </p:nvSpPr>
         <p:spPr>
           <a:xfrm>
-            <a:off x="548640" y="320040"/>
-            <a:ext cx="11064240" cy="777240"/>
-          </a:xfrm>
-          <a:prstGeom prst="rect">
-            <a:avLst/>
-          </a:prstGeom>
-          <a:noFill/>
-        </p:spPr>
-        <p:txBody>
-          <a:bodyPr wrap="none">
-            <a:spAutoFit/>
-          </a:bodyPr>
-          <a:lstStyle/>
-          <a:p>
-            <a:r>
-              <a:rPr sz="3000" b="1"/>
-              <a:t>Writing the Summary: A Demonstration</a:t>
-            </a:r>
-          </a:p>
-        </p:txBody>
-      </p:sp>
-      <p:sp>
-        <p:nvSpPr>
-          <p:cNvPr id="3" name="TextBox 2"/>
-          <p:cNvSpPr txBox="1"/>
-          <p:nvPr/>
-        </p:nvSpPr>
-        <p:spPr>
-          <a:xfrm>
-            <a:off x="868680" y="1417320"/>
-            <a:ext cx="10424160" cy="4892040"/>
+            <a:off x="594360" y="246888"/>
+            <a:ext cx="2926080" cy="320040"/>
           </a:xfrm>
           <a:prstGeom prst="rect">
             <a:avLst/>
@@ -3551,36 +5743,812 @@
           </a:bodyPr>
           <a:lstStyle/>
           <a:p>
-            <a:pPr>
-              <a:spcAft>
-                <a:spcPts val="800"/>
-              </a:spcAft>
-              <a:defRPr sz="2200"/>
-            </a:pPr>
-            <a:r>
-              <a:t>Selecting key details.</a:t>
-            </a:r>
-          </a:p>
-          <a:p>
-            <a:pPr>
-              <a:spcAft>
-                <a:spcPts val="800"/>
-              </a:spcAft>
-              <a:defRPr sz="2200"/>
-            </a:pPr>
-            <a:r>
-              <a:t>Using scientific vocabulary (conductor, insulator, circuit).</a:t>
-            </a:r>
-          </a:p>
-          <a:p>
-            <a:pPr>
-              <a:spcAft>
-                <a:spcPts val="800"/>
-              </a:spcAft>
-              <a:defRPr sz="2200"/>
-            </a:pPr>
-            <a:r>
-              <a:t>Summarizing the observation.</a:t>
+            <a:r>
+              <a:rPr sz="1300" b="1">
+                <a:solidFill>
+                  <a:srgbClr val="FFFFFF"/>
+                </a:solidFill>
+              </a:rPr>
+              <a:t>5. MODEL</a:t>
+            </a:r>
+          </a:p>
+        </p:txBody>
+      </p:sp>
+      <p:sp>
+        <p:nvSpPr>
+          <p:cNvPr id="5" name="TextBox 4"/>
+          <p:cNvSpPr txBox="1"/>
+          <p:nvPr/>
+        </p:nvSpPr>
+        <p:spPr>
+          <a:xfrm>
+            <a:off x="7772400" y="246888"/>
+            <a:ext cx="3840480" cy="320040"/>
+          </a:xfrm>
+          <a:prstGeom prst="rect">
+            <a:avLst/>
+          </a:prstGeom>
+          <a:noFill/>
+        </p:spPr>
+        <p:txBody>
+          <a:bodyPr wrap="square">
+            <a:spAutoFit/>
+          </a:bodyPr>
+          <a:lstStyle/>
+          <a:p>
+            <a:pPr algn="r"/>
+            <a:r>
+              <a:rPr sz="1100" b="0">
+                <a:solidFill>
+                  <a:srgbClr val="FFFFFF"/>
+                </a:solidFill>
+              </a:rPr>
+              <a:t>p7_t1_integrated_science_1205</a:t>
+            </a:r>
+          </a:p>
+        </p:txBody>
+      </p:sp>
+      <p:sp>
+        <p:nvSpPr>
+          <p:cNvPr id="6" name="TextBox 5"/>
+          <p:cNvSpPr txBox="1"/>
+          <p:nvPr/>
+        </p:nvSpPr>
+        <p:spPr>
+          <a:xfrm>
+            <a:off x="640080" y="1143000"/>
+            <a:ext cx="10972800" cy="685800"/>
+          </a:xfrm>
+          <a:prstGeom prst="rect">
+            <a:avLst/>
+          </a:prstGeom>
+          <a:noFill/>
+        </p:spPr>
+        <p:txBody>
+          <a:bodyPr wrap="square">
+            <a:spAutoFit/>
+          </a:bodyPr>
+          <a:lstStyle/>
+          <a:p>
+            <a:r>
+              <a:rPr sz="2800" b="1">
+                <a:solidFill>
+                  <a:srgbClr val="1A202C"/>
+                </a:solidFill>
+              </a:rPr>
+              <a:t>How to Write a Science Report</a:t>
+            </a:r>
+          </a:p>
+        </p:txBody>
+      </p:sp>
+      <p:sp>
+        <p:nvSpPr>
+          <p:cNvPr id="7" name="Rounded Rectangle 6"/>
+          <p:cNvSpPr/>
+          <p:nvPr/>
+        </p:nvSpPr>
+        <p:spPr>
+          <a:xfrm>
+            <a:off x="777240" y="1993392"/>
+            <a:ext cx="10835640" cy="1005840"/>
+          </a:xfrm>
+          <a:prstGeom prst="roundRect">
+            <a:avLst/>
+          </a:prstGeom>
+          <a:solidFill>
+            <a:srgbClr val="FFFBEB"/>
+          </a:solidFill>
+          <a:ln w="15240">
+            <a:solidFill>
+              <a:srgbClr val="D97706"/>
+            </a:solidFill>
+          </a:ln>
+        </p:spPr>
+        <p:style>
+          <a:lnRef idx="1">
+            <a:schemeClr val="accent1"/>
+          </a:lnRef>
+          <a:fillRef idx="3">
+            <a:schemeClr val="accent1"/>
+          </a:fillRef>
+          <a:effectRef idx="2">
+            <a:schemeClr val="accent1"/>
+          </a:effectRef>
+          <a:fontRef idx="minor">
+            <a:schemeClr val="lt1"/>
+          </a:fontRef>
+        </p:style>
+        <p:txBody>
+          <a:bodyPr rtlCol="0" anchor="ctr"/>
+          <a:lstStyle/>
+          <a:p>
+            <a:pPr algn="ctr"/>
+          </a:p>
+        </p:txBody>
+      </p:sp>
+      <p:sp>
+        <p:nvSpPr>
+          <p:cNvPr id="8" name="TextBox 7"/>
+          <p:cNvSpPr txBox="1"/>
+          <p:nvPr/>
+        </p:nvSpPr>
+        <p:spPr>
+          <a:xfrm>
+            <a:off x="1051560" y="2212848"/>
+            <a:ext cx="10287000" cy="502920"/>
+          </a:xfrm>
+          <a:prstGeom prst="rect">
+            <a:avLst/>
+          </a:prstGeom>
+          <a:noFill/>
+        </p:spPr>
+        <p:txBody>
+          <a:bodyPr wrap="square">
+            <a:spAutoFit/>
+          </a:bodyPr>
+          <a:lstStyle/>
+          <a:p>
+            <a:r>
+              <a:rPr sz="2100" b="1">
+                <a:solidFill>
+                  <a:srgbClr val="1A202C"/>
+                </a:solidFill>
+              </a:rPr>
+              <a:t>Watch the example.</a:t>
+            </a:r>
+          </a:p>
+        </p:txBody>
+      </p:sp>
+      <p:sp>
+        <p:nvSpPr>
+          <p:cNvPr id="9" name="Rounded Rectangle 8"/>
+          <p:cNvSpPr/>
+          <p:nvPr/>
+        </p:nvSpPr>
+        <p:spPr>
+          <a:xfrm>
+            <a:off x="1005840" y="3246120"/>
+            <a:ext cx="10149840" cy="621792"/>
+          </a:xfrm>
+          <a:prstGeom prst="roundRect">
+            <a:avLst/>
+          </a:prstGeom>
+          <a:solidFill>
+            <a:srgbClr val="F8FAFC"/>
+          </a:solidFill>
+          <a:ln w="15240">
+            <a:solidFill>
+              <a:srgbClr val="CBD5E1"/>
+            </a:solidFill>
+          </a:ln>
+        </p:spPr>
+        <p:style>
+          <a:lnRef idx="1">
+            <a:schemeClr val="accent1"/>
+          </a:lnRef>
+          <a:fillRef idx="3">
+            <a:schemeClr val="accent1"/>
+          </a:fillRef>
+          <a:effectRef idx="2">
+            <a:schemeClr val="accent1"/>
+          </a:effectRef>
+          <a:fontRef idx="minor">
+            <a:schemeClr val="lt1"/>
+          </a:fontRef>
+        </p:style>
+        <p:txBody>
+          <a:bodyPr rtlCol="0" anchor="ctr"/>
+          <a:lstStyle/>
+          <a:p>
+            <a:pPr algn="ctr"/>
+          </a:p>
+        </p:txBody>
+      </p:sp>
+      <p:sp>
+        <p:nvSpPr>
+          <p:cNvPr id="10" name="Oval 9"/>
+          <p:cNvSpPr/>
+          <p:nvPr/>
+        </p:nvSpPr>
+        <p:spPr>
+          <a:xfrm>
+            <a:off x="1234440" y="3364991"/>
+            <a:ext cx="347472" cy="347472"/>
+          </a:xfrm>
+          <a:prstGeom prst="ellipse">
+            <a:avLst/>
+          </a:prstGeom>
+          <a:solidFill>
+            <a:srgbClr val="D97706"/>
+          </a:solidFill>
+          <a:ln>
+            <a:noFill/>
+          </a:ln>
+        </p:spPr>
+        <p:style>
+          <a:lnRef idx="1">
+            <a:schemeClr val="accent1"/>
+          </a:lnRef>
+          <a:fillRef idx="3">
+            <a:schemeClr val="accent1"/>
+          </a:fillRef>
+          <a:effectRef idx="2">
+            <a:schemeClr val="accent1"/>
+          </a:effectRef>
+          <a:fontRef idx="minor">
+            <a:schemeClr val="lt1"/>
+          </a:fontRef>
+        </p:style>
+        <p:txBody>
+          <a:bodyPr rtlCol="0" anchor="ctr"/>
+          <a:lstStyle/>
+          <a:p>
+            <a:pPr algn="ctr"/>
+          </a:p>
+        </p:txBody>
+      </p:sp>
+      <p:sp>
+        <p:nvSpPr>
+          <p:cNvPr id="11" name="TextBox 10"/>
+          <p:cNvSpPr txBox="1"/>
+          <p:nvPr/>
+        </p:nvSpPr>
+        <p:spPr>
+          <a:xfrm>
+            <a:off x="1234440" y="3410712"/>
+            <a:ext cx="347472" cy="182880"/>
+          </a:xfrm>
+          <a:prstGeom prst="rect">
+            <a:avLst/>
+          </a:prstGeom>
+          <a:noFill/>
+        </p:spPr>
+        <p:txBody>
+          <a:bodyPr wrap="square">
+            <a:spAutoFit/>
+          </a:bodyPr>
+          <a:lstStyle/>
+          <a:p>
+            <a:pPr algn="ctr"/>
+            <a:r>
+              <a:rPr sz="1000" b="1">
+                <a:solidFill>
+                  <a:srgbClr val="FFFFFF"/>
+                </a:solidFill>
+              </a:rPr>
+              <a:t>1</a:t>
+            </a:r>
+          </a:p>
+        </p:txBody>
+      </p:sp>
+      <p:sp>
+        <p:nvSpPr>
+          <p:cNvPr id="12" name="TextBox 11"/>
+          <p:cNvSpPr txBox="1"/>
+          <p:nvPr/>
+        </p:nvSpPr>
+        <p:spPr>
+          <a:xfrm>
+            <a:off x="1783080" y="3364991"/>
+            <a:ext cx="9006840" cy="347472"/>
+          </a:xfrm>
+          <a:prstGeom prst="rect">
+            <a:avLst/>
+          </a:prstGeom>
+          <a:noFill/>
+        </p:spPr>
+        <p:txBody>
+          <a:bodyPr wrap="square">
+            <a:spAutoFit/>
+          </a:bodyPr>
+          <a:lstStyle/>
+          <a:p>
+            <a:r>
+              <a:rPr sz="1700" b="0">
+                <a:solidFill>
+                  <a:srgbClr val="1A202C"/>
+                </a:solidFill>
+              </a:rPr>
+              <a:t>Title and Aim (What and Why).</a:t>
+            </a:r>
+          </a:p>
+        </p:txBody>
+      </p:sp>
+      <p:sp>
+        <p:nvSpPr>
+          <p:cNvPr id="13" name="Rounded Rectangle 12"/>
+          <p:cNvSpPr/>
+          <p:nvPr/>
+        </p:nvSpPr>
+        <p:spPr>
+          <a:xfrm>
+            <a:off x="1005840" y="4069080"/>
+            <a:ext cx="10149840" cy="621792"/>
+          </a:xfrm>
+          <a:prstGeom prst="roundRect">
+            <a:avLst/>
+          </a:prstGeom>
+          <a:solidFill>
+            <a:srgbClr val="F8FAFC"/>
+          </a:solidFill>
+          <a:ln w="15240">
+            <a:solidFill>
+              <a:srgbClr val="CBD5E1"/>
+            </a:solidFill>
+          </a:ln>
+        </p:spPr>
+        <p:style>
+          <a:lnRef idx="1">
+            <a:schemeClr val="accent1"/>
+          </a:lnRef>
+          <a:fillRef idx="3">
+            <a:schemeClr val="accent1"/>
+          </a:fillRef>
+          <a:effectRef idx="2">
+            <a:schemeClr val="accent1"/>
+          </a:effectRef>
+          <a:fontRef idx="minor">
+            <a:schemeClr val="lt1"/>
+          </a:fontRef>
+        </p:style>
+        <p:txBody>
+          <a:bodyPr rtlCol="0" anchor="ctr"/>
+          <a:lstStyle/>
+          <a:p>
+            <a:pPr algn="ctr"/>
+          </a:p>
+        </p:txBody>
+      </p:sp>
+      <p:sp>
+        <p:nvSpPr>
+          <p:cNvPr id="14" name="Oval 13"/>
+          <p:cNvSpPr/>
+          <p:nvPr/>
+        </p:nvSpPr>
+        <p:spPr>
+          <a:xfrm>
+            <a:off x="1234440" y="4187952"/>
+            <a:ext cx="347472" cy="347472"/>
+          </a:xfrm>
+          <a:prstGeom prst="ellipse">
+            <a:avLst/>
+          </a:prstGeom>
+          <a:solidFill>
+            <a:srgbClr val="D97706"/>
+          </a:solidFill>
+          <a:ln>
+            <a:noFill/>
+          </a:ln>
+        </p:spPr>
+        <p:style>
+          <a:lnRef idx="1">
+            <a:schemeClr val="accent1"/>
+          </a:lnRef>
+          <a:fillRef idx="3">
+            <a:schemeClr val="accent1"/>
+          </a:fillRef>
+          <a:effectRef idx="2">
+            <a:schemeClr val="accent1"/>
+          </a:effectRef>
+          <a:fontRef idx="minor">
+            <a:schemeClr val="lt1"/>
+          </a:fontRef>
+        </p:style>
+        <p:txBody>
+          <a:bodyPr rtlCol="0" anchor="ctr"/>
+          <a:lstStyle/>
+          <a:p>
+            <a:pPr algn="ctr"/>
+          </a:p>
+        </p:txBody>
+      </p:sp>
+      <p:sp>
+        <p:nvSpPr>
+          <p:cNvPr id="15" name="TextBox 14"/>
+          <p:cNvSpPr txBox="1"/>
+          <p:nvPr/>
+        </p:nvSpPr>
+        <p:spPr>
+          <a:xfrm>
+            <a:off x="1234440" y="4233672"/>
+            <a:ext cx="347472" cy="182880"/>
+          </a:xfrm>
+          <a:prstGeom prst="rect">
+            <a:avLst/>
+          </a:prstGeom>
+          <a:noFill/>
+        </p:spPr>
+        <p:txBody>
+          <a:bodyPr wrap="square">
+            <a:spAutoFit/>
+          </a:bodyPr>
+          <a:lstStyle/>
+          <a:p>
+            <a:pPr algn="ctr"/>
+            <a:r>
+              <a:rPr sz="1000" b="1">
+                <a:solidFill>
+                  <a:srgbClr val="FFFFFF"/>
+                </a:solidFill>
+              </a:rPr>
+              <a:t>2</a:t>
+            </a:r>
+          </a:p>
+        </p:txBody>
+      </p:sp>
+      <p:sp>
+        <p:nvSpPr>
+          <p:cNvPr id="16" name="TextBox 15"/>
+          <p:cNvSpPr txBox="1"/>
+          <p:nvPr/>
+        </p:nvSpPr>
+        <p:spPr>
+          <a:xfrm>
+            <a:off x="1783080" y="4187952"/>
+            <a:ext cx="9006840" cy="347472"/>
+          </a:xfrm>
+          <a:prstGeom prst="rect">
+            <a:avLst/>
+          </a:prstGeom>
+          <a:noFill/>
+        </p:spPr>
+        <p:txBody>
+          <a:bodyPr wrap="square">
+            <a:spAutoFit/>
+          </a:bodyPr>
+          <a:lstStyle/>
+          <a:p>
+            <a:r>
+              <a:rPr sz="1700" b="0">
+                <a:solidFill>
+                  <a:srgbClr val="1A202C"/>
+                </a:solidFill>
+              </a:rPr>
+              <a:t>Apparatus/Materials (The tools).</a:t>
+            </a:r>
+          </a:p>
+        </p:txBody>
+      </p:sp>
+      <p:sp>
+        <p:nvSpPr>
+          <p:cNvPr id="17" name="Rounded Rectangle 16"/>
+          <p:cNvSpPr/>
+          <p:nvPr/>
+        </p:nvSpPr>
+        <p:spPr>
+          <a:xfrm>
+            <a:off x="1005840" y="4892040"/>
+            <a:ext cx="10149840" cy="621792"/>
+          </a:xfrm>
+          <a:prstGeom prst="roundRect">
+            <a:avLst/>
+          </a:prstGeom>
+          <a:solidFill>
+            <a:srgbClr val="F8FAFC"/>
+          </a:solidFill>
+          <a:ln w="15240">
+            <a:solidFill>
+              <a:srgbClr val="CBD5E1"/>
+            </a:solidFill>
+          </a:ln>
+        </p:spPr>
+        <p:style>
+          <a:lnRef idx="1">
+            <a:schemeClr val="accent1"/>
+          </a:lnRef>
+          <a:fillRef idx="3">
+            <a:schemeClr val="accent1"/>
+          </a:fillRef>
+          <a:effectRef idx="2">
+            <a:schemeClr val="accent1"/>
+          </a:effectRef>
+          <a:fontRef idx="minor">
+            <a:schemeClr val="lt1"/>
+          </a:fontRef>
+        </p:style>
+        <p:txBody>
+          <a:bodyPr rtlCol="0" anchor="ctr"/>
+          <a:lstStyle/>
+          <a:p>
+            <a:pPr algn="ctr"/>
+          </a:p>
+        </p:txBody>
+      </p:sp>
+      <p:sp>
+        <p:nvSpPr>
+          <p:cNvPr id="18" name="Oval 17"/>
+          <p:cNvSpPr/>
+          <p:nvPr/>
+        </p:nvSpPr>
+        <p:spPr>
+          <a:xfrm>
+            <a:off x="1234440" y="5010912"/>
+            <a:ext cx="347472" cy="347472"/>
+          </a:xfrm>
+          <a:prstGeom prst="ellipse">
+            <a:avLst/>
+          </a:prstGeom>
+          <a:solidFill>
+            <a:srgbClr val="D97706"/>
+          </a:solidFill>
+          <a:ln>
+            <a:noFill/>
+          </a:ln>
+        </p:spPr>
+        <p:style>
+          <a:lnRef idx="1">
+            <a:schemeClr val="accent1"/>
+          </a:lnRef>
+          <a:fillRef idx="3">
+            <a:schemeClr val="accent1"/>
+          </a:fillRef>
+          <a:effectRef idx="2">
+            <a:schemeClr val="accent1"/>
+          </a:effectRef>
+          <a:fontRef idx="minor">
+            <a:schemeClr val="lt1"/>
+          </a:fontRef>
+        </p:style>
+        <p:txBody>
+          <a:bodyPr rtlCol="0" anchor="ctr"/>
+          <a:lstStyle/>
+          <a:p>
+            <a:pPr algn="ctr"/>
+          </a:p>
+        </p:txBody>
+      </p:sp>
+      <p:sp>
+        <p:nvSpPr>
+          <p:cNvPr id="19" name="TextBox 18"/>
+          <p:cNvSpPr txBox="1"/>
+          <p:nvPr/>
+        </p:nvSpPr>
+        <p:spPr>
+          <a:xfrm>
+            <a:off x="1234440" y="5056632"/>
+            <a:ext cx="347472" cy="182880"/>
+          </a:xfrm>
+          <a:prstGeom prst="rect">
+            <a:avLst/>
+          </a:prstGeom>
+          <a:noFill/>
+        </p:spPr>
+        <p:txBody>
+          <a:bodyPr wrap="square">
+            <a:spAutoFit/>
+          </a:bodyPr>
+          <a:lstStyle/>
+          <a:p>
+            <a:pPr algn="ctr"/>
+            <a:r>
+              <a:rPr sz="1000" b="1">
+                <a:solidFill>
+                  <a:srgbClr val="FFFFFF"/>
+                </a:solidFill>
+              </a:rPr>
+              <a:t>3</a:t>
+            </a:r>
+          </a:p>
+        </p:txBody>
+      </p:sp>
+      <p:sp>
+        <p:nvSpPr>
+          <p:cNvPr id="20" name="TextBox 19"/>
+          <p:cNvSpPr txBox="1"/>
+          <p:nvPr/>
+        </p:nvSpPr>
+        <p:spPr>
+          <a:xfrm>
+            <a:off x="1783080" y="5010912"/>
+            <a:ext cx="9006840" cy="347472"/>
+          </a:xfrm>
+          <a:prstGeom prst="rect">
+            <a:avLst/>
+          </a:prstGeom>
+          <a:noFill/>
+        </p:spPr>
+        <p:txBody>
+          <a:bodyPr wrap="square">
+            <a:spAutoFit/>
+          </a:bodyPr>
+          <a:lstStyle/>
+          <a:p>
+            <a:r>
+              <a:rPr sz="1700" b="0">
+                <a:solidFill>
+                  <a:srgbClr val="1A202C"/>
+                </a:solidFill>
+              </a:rPr>
+              <a:t>Procedure (The steps).</a:t>
+            </a:r>
+          </a:p>
+        </p:txBody>
+      </p:sp>
+      <p:sp>
+        <p:nvSpPr>
+          <p:cNvPr id="21" name="Rounded Rectangle 20"/>
+          <p:cNvSpPr/>
+          <p:nvPr/>
+        </p:nvSpPr>
+        <p:spPr>
+          <a:xfrm>
+            <a:off x="1005840" y="5715000"/>
+            <a:ext cx="10149840" cy="621792"/>
+          </a:xfrm>
+          <a:prstGeom prst="roundRect">
+            <a:avLst/>
+          </a:prstGeom>
+          <a:solidFill>
+            <a:srgbClr val="F8FAFC"/>
+          </a:solidFill>
+          <a:ln w="15240">
+            <a:solidFill>
+              <a:srgbClr val="CBD5E1"/>
+            </a:solidFill>
+          </a:ln>
+        </p:spPr>
+        <p:style>
+          <a:lnRef idx="1">
+            <a:schemeClr val="accent1"/>
+          </a:lnRef>
+          <a:fillRef idx="3">
+            <a:schemeClr val="accent1"/>
+          </a:fillRef>
+          <a:effectRef idx="2">
+            <a:schemeClr val="accent1"/>
+          </a:effectRef>
+          <a:fontRef idx="minor">
+            <a:schemeClr val="lt1"/>
+          </a:fontRef>
+        </p:style>
+        <p:txBody>
+          <a:bodyPr rtlCol="0" anchor="ctr"/>
+          <a:lstStyle/>
+          <a:p>
+            <a:pPr algn="ctr"/>
+          </a:p>
+        </p:txBody>
+      </p:sp>
+      <p:sp>
+        <p:nvSpPr>
+          <p:cNvPr id="22" name="Oval 21"/>
+          <p:cNvSpPr/>
+          <p:nvPr/>
+        </p:nvSpPr>
+        <p:spPr>
+          <a:xfrm>
+            <a:off x="1234440" y="5833872"/>
+            <a:ext cx="347472" cy="347472"/>
+          </a:xfrm>
+          <a:prstGeom prst="ellipse">
+            <a:avLst/>
+          </a:prstGeom>
+          <a:solidFill>
+            <a:srgbClr val="D97706"/>
+          </a:solidFill>
+          <a:ln>
+            <a:noFill/>
+          </a:ln>
+        </p:spPr>
+        <p:style>
+          <a:lnRef idx="1">
+            <a:schemeClr val="accent1"/>
+          </a:lnRef>
+          <a:fillRef idx="3">
+            <a:schemeClr val="accent1"/>
+          </a:fillRef>
+          <a:effectRef idx="2">
+            <a:schemeClr val="accent1"/>
+          </a:effectRef>
+          <a:fontRef idx="minor">
+            <a:schemeClr val="lt1"/>
+          </a:fontRef>
+        </p:style>
+        <p:txBody>
+          <a:bodyPr rtlCol="0" anchor="ctr"/>
+          <a:lstStyle/>
+          <a:p>
+            <a:pPr algn="ctr"/>
+          </a:p>
+        </p:txBody>
+      </p:sp>
+      <p:sp>
+        <p:nvSpPr>
+          <p:cNvPr id="23" name="TextBox 22"/>
+          <p:cNvSpPr txBox="1"/>
+          <p:nvPr/>
+        </p:nvSpPr>
+        <p:spPr>
+          <a:xfrm>
+            <a:off x="1234440" y="5879592"/>
+            <a:ext cx="347472" cy="182880"/>
+          </a:xfrm>
+          <a:prstGeom prst="rect">
+            <a:avLst/>
+          </a:prstGeom>
+          <a:noFill/>
+        </p:spPr>
+        <p:txBody>
+          <a:bodyPr wrap="square">
+            <a:spAutoFit/>
+          </a:bodyPr>
+          <a:lstStyle/>
+          <a:p>
+            <a:pPr algn="ctr"/>
+            <a:r>
+              <a:rPr sz="1000" b="1">
+                <a:solidFill>
+                  <a:srgbClr val="FFFFFF"/>
+                </a:solidFill>
+              </a:rPr>
+              <a:t>4</a:t>
+            </a:r>
+          </a:p>
+        </p:txBody>
+      </p:sp>
+      <p:sp>
+        <p:nvSpPr>
+          <p:cNvPr id="24" name="TextBox 23"/>
+          <p:cNvSpPr txBox="1"/>
+          <p:nvPr/>
+        </p:nvSpPr>
+        <p:spPr>
+          <a:xfrm>
+            <a:off x="1783080" y="5833872"/>
+            <a:ext cx="9006840" cy="347472"/>
+          </a:xfrm>
+          <a:prstGeom prst="rect">
+            <a:avLst/>
+          </a:prstGeom>
+          <a:noFill/>
+        </p:spPr>
+        <p:txBody>
+          <a:bodyPr wrap="square">
+            <a:spAutoFit/>
+          </a:bodyPr>
+          <a:lstStyle/>
+          <a:p>
+            <a:r>
+              <a:rPr sz="1700" b="0">
+                <a:solidFill>
+                  <a:srgbClr val="1A202C"/>
+                </a:solidFill>
+              </a:rPr>
+              <a:t>Name the step that helped you most.</a:t>
+            </a:r>
+          </a:p>
+        </p:txBody>
+      </p:sp>
+      <p:sp>
+        <p:nvSpPr>
+          <p:cNvPr id="25" name="TextBox 24"/>
+          <p:cNvSpPr txBox="1"/>
+          <p:nvPr/>
+        </p:nvSpPr>
+        <p:spPr>
+          <a:xfrm>
+            <a:off x="777240" y="6419088"/>
+            <a:ext cx="10835640" cy="228600"/>
+          </a:xfrm>
+          <a:prstGeom prst="rect">
+            <a:avLst/>
+          </a:prstGeom>
+          <a:noFill/>
+        </p:spPr>
+        <p:txBody>
+          <a:bodyPr wrap="square">
+            <a:spAutoFit/>
+          </a:bodyPr>
+          <a:lstStyle/>
+          <a:p>
+            <a:pPr algn="r"/>
+            <a:r>
+              <a:rPr sz="1000" b="0">
+                <a:solidFill>
+                  <a:srgbClr val="5B677D"/>
+                </a:solidFill>
+              </a:rPr>
+              <a:t>Listen • Talk • Try • Explain</a:t>
             </a:r>
           </a:p>
         </p:txBody>
@@ -3605,43 +6573,100 @@
       <p:grpSpPr/>
       <p:sp>
         <p:nvSpPr>
-          <p:cNvPr id="2" name="TextBox 1"/>
+          <p:cNvPr id="2" name="Rectangle 1"/>
+          <p:cNvSpPr/>
+          <p:nvPr/>
+        </p:nvSpPr>
+        <p:spPr>
+          <a:xfrm>
+            <a:off x="0" y="0"/>
+            <a:ext cx="12191695" cy="914400"/>
+          </a:xfrm>
+          <a:prstGeom prst="rect">
+            <a:avLst/>
+          </a:prstGeom>
+          <a:solidFill>
+            <a:srgbClr val="BE123C"/>
+          </a:solidFill>
+          <a:ln>
+            <a:noFill/>
+          </a:ln>
+        </p:spPr>
+        <p:style>
+          <a:lnRef idx="1">
+            <a:schemeClr val="accent1"/>
+          </a:lnRef>
+          <a:fillRef idx="3">
+            <a:schemeClr val="accent1"/>
+          </a:fillRef>
+          <a:effectRef idx="2">
+            <a:schemeClr val="accent1"/>
+          </a:effectRef>
+          <a:fontRef idx="minor">
+            <a:schemeClr val="lt1"/>
+          </a:fontRef>
+        </p:style>
+        <p:txBody>
+          <a:bodyPr rtlCol="0" anchor="ctr"/>
+          <a:lstStyle/>
+          <a:p>
+            <a:pPr algn="ctr"/>
+          </a:p>
+        </p:txBody>
+      </p:sp>
+      <p:sp>
+        <p:nvSpPr>
+          <p:cNvPr id="3" name="Rectangle 2"/>
+          <p:cNvSpPr/>
+          <p:nvPr/>
+        </p:nvSpPr>
+        <p:spPr>
+          <a:xfrm>
+            <a:off x="0" y="914400"/>
+            <a:ext cx="164592" cy="5943600"/>
+          </a:xfrm>
+          <a:prstGeom prst="rect">
+            <a:avLst/>
+          </a:prstGeom>
+          <a:solidFill>
+            <a:srgbClr val="BE123C"/>
+          </a:solidFill>
+          <a:ln>
+            <a:noFill/>
+          </a:ln>
+        </p:spPr>
+        <p:style>
+          <a:lnRef idx="1">
+            <a:schemeClr val="accent1"/>
+          </a:lnRef>
+          <a:fillRef idx="3">
+            <a:schemeClr val="accent1"/>
+          </a:fillRef>
+          <a:effectRef idx="2">
+            <a:schemeClr val="accent1"/>
+          </a:effectRef>
+          <a:fontRef idx="minor">
+            <a:schemeClr val="lt1"/>
+          </a:fontRef>
+        </p:style>
+        <p:txBody>
+          <a:bodyPr rtlCol="0" anchor="ctr"/>
+          <a:lstStyle/>
+          <a:p>
+            <a:pPr algn="ctr"/>
+          </a:p>
+        </p:txBody>
+      </p:sp>
+      <p:sp>
+        <p:nvSpPr>
+          <p:cNvPr id="4" name="TextBox 3"/>
           <p:cNvSpPr txBox="1"/>
           <p:nvPr/>
         </p:nvSpPr>
         <p:spPr>
           <a:xfrm>
-            <a:off x="548640" y="320040"/>
-            <a:ext cx="11064240" cy="777240"/>
-          </a:xfrm>
-          <a:prstGeom prst="rect">
-            <a:avLst/>
-          </a:prstGeom>
-          <a:noFill/>
-        </p:spPr>
-        <p:txBody>
-          <a:bodyPr wrap="none">
-            <a:spAutoFit/>
-          </a:bodyPr>
-          <a:lstStyle/>
-          <a:p>
-            <a:r>
-              <a:rPr sz="3000" b="1"/>
-              <a:t>Group Work: Compiling the Term 1 Report</a:t>
-            </a:r>
-          </a:p>
-        </p:txBody>
-      </p:sp>
-      <p:sp>
-        <p:nvSpPr>
-          <p:cNvPr id="3" name="TextBox 2"/>
-          <p:cNvSpPr txBox="1"/>
-          <p:nvPr/>
-        </p:nvSpPr>
-        <p:spPr>
-          <a:xfrm>
-            <a:off x="868680" y="1417320"/>
-            <a:ext cx="10424160" cy="4892040"/>
+            <a:off x="594360" y="246888"/>
+            <a:ext cx="2926080" cy="320040"/>
           </a:xfrm>
           <a:prstGeom prst="rect">
             <a:avLst/>
@@ -3654,47 +6679,657 @@
           </a:bodyPr>
           <a:lstStyle/>
           <a:p>
-            <a:pPr>
-              <a:spcAft>
-                <a:spcPts val="800"/>
-              </a:spcAft>
-              <a:defRPr sz="2200"/>
-            </a:pPr>
-            <a:r>
-              <a:t>Collaborative writing.</a:t>
-            </a:r>
-          </a:p>
-          <a:p>
-            <a:pPr>
-              <a:spcAft>
-                <a:spcPts val="800"/>
-              </a:spcAft>
-              <a:defRPr sz="2200"/>
-            </a:pPr>
-            <a:r>
-              <a:t>Focusing on accuracy of facts.</a:t>
-            </a:r>
-          </a:p>
-          <a:p>
-            <a:pPr>
-              <a:spcAft>
-                <a:spcPts val="800"/>
-              </a:spcAft>
-              <a:defRPr sz="2200"/>
-            </a:pPr>
-            <a:r>
-              <a:t>Including diagrams where necessary.</a:t>
-            </a:r>
-          </a:p>
-          <a:p>
-            <a:pPr>
-              <a:spcAft>
-                <a:spcPts val="800"/>
-              </a:spcAft>
-              <a:defRPr sz="2200"/>
-            </a:pPr>
-            <a:r>
-              <a:t>Neat presentation.</a:t>
+            <a:r>
+              <a:rPr sz="1300" b="1">
+                <a:solidFill>
+                  <a:srgbClr val="FFFFFF"/>
+                </a:solidFill>
+              </a:rPr>
+              <a:t>6. PRACTICE</a:t>
+            </a:r>
+          </a:p>
+        </p:txBody>
+      </p:sp>
+      <p:sp>
+        <p:nvSpPr>
+          <p:cNvPr id="5" name="TextBox 4"/>
+          <p:cNvSpPr txBox="1"/>
+          <p:nvPr/>
+        </p:nvSpPr>
+        <p:spPr>
+          <a:xfrm>
+            <a:off x="7772400" y="246888"/>
+            <a:ext cx="3840480" cy="320040"/>
+          </a:xfrm>
+          <a:prstGeom prst="rect">
+            <a:avLst/>
+          </a:prstGeom>
+          <a:noFill/>
+        </p:spPr>
+        <p:txBody>
+          <a:bodyPr wrap="square">
+            <a:spAutoFit/>
+          </a:bodyPr>
+          <a:lstStyle/>
+          <a:p>
+            <a:pPr algn="r"/>
+            <a:r>
+              <a:rPr sz="1100" b="0">
+                <a:solidFill>
+                  <a:srgbClr val="FFFFFF"/>
+                </a:solidFill>
+              </a:rPr>
+              <a:t>p7_t1_integrated_science_1205</a:t>
+            </a:r>
+          </a:p>
+        </p:txBody>
+      </p:sp>
+      <p:sp>
+        <p:nvSpPr>
+          <p:cNvPr id="6" name="TextBox 5"/>
+          <p:cNvSpPr txBox="1"/>
+          <p:nvPr/>
+        </p:nvSpPr>
+        <p:spPr>
+          <a:xfrm>
+            <a:off x="640080" y="1143000"/>
+            <a:ext cx="10972800" cy="685800"/>
+          </a:xfrm>
+          <a:prstGeom prst="rect">
+            <a:avLst/>
+          </a:prstGeom>
+          <a:noFill/>
+        </p:spPr>
+        <p:txBody>
+          <a:bodyPr wrap="square">
+            <a:spAutoFit/>
+          </a:bodyPr>
+          <a:lstStyle/>
+          <a:p>
+            <a:r>
+              <a:rPr sz="2800" b="1">
+                <a:solidFill>
+                  <a:srgbClr val="1A202C"/>
+                </a:solidFill>
+              </a:rPr>
+              <a:t>Try it together</a:t>
+            </a:r>
+          </a:p>
+        </p:txBody>
+      </p:sp>
+      <p:sp>
+        <p:nvSpPr>
+          <p:cNvPr id="7" name="Rounded Rectangle 6"/>
+          <p:cNvSpPr/>
+          <p:nvPr/>
+        </p:nvSpPr>
+        <p:spPr>
+          <a:xfrm>
+            <a:off x="777240" y="1993392"/>
+            <a:ext cx="10835640" cy="1005840"/>
+          </a:xfrm>
+          <a:prstGeom prst="roundRect">
+            <a:avLst/>
+          </a:prstGeom>
+          <a:solidFill>
+            <a:srgbClr val="FFFBEB"/>
+          </a:solidFill>
+          <a:ln w="15240">
+            <a:solidFill>
+              <a:srgbClr val="BE123C"/>
+            </a:solidFill>
+          </a:ln>
+        </p:spPr>
+        <p:style>
+          <a:lnRef idx="1">
+            <a:schemeClr val="accent1"/>
+          </a:lnRef>
+          <a:fillRef idx="3">
+            <a:schemeClr val="accent1"/>
+          </a:fillRef>
+          <a:effectRef idx="2">
+            <a:schemeClr val="accent1"/>
+          </a:effectRef>
+          <a:fontRef idx="minor">
+            <a:schemeClr val="lt1"/>
+          </a:fontRef>
+        </p:style>
+        <p:txBody>
+          <a:bodyPr rtlCol="0" anchor="ctr"/>
+          <a:lstStyle/>
+          <a:p>
+            <a:pPr algn="ctr"/>
+          </a:p>
+        </p:txBody>
+      </p:sp>
+      <p:sp>
+        <p:nvSpPr>
+          <p:cNvPr id="8" name="TextBox 7"/>
+          <p:cNvSpPr txBox="1"/>
+          <p:nvPr/>
+        </p:nvSpPr>
+        <p:spPr>
+          <a:xfrm>
+            <a:off x="1051560" y="2212848"/>
+            <a:ext cx="10287000" cy="502920"/>
+          </a:xfrm>
+          <a:prstGeom prst="rect">
+            <a:avLst/>
+          </a:prstGeom>
+          <a:noFill/>
+        </p:spPr>
+        <p:txBody>
+          <a:bodyPr wrap="square">
+            <a:spAutoFit/>
+          </a:bodyPr>
+          <a:lstStyle/>
+          <a:p>
+            <a:r>
+              <a:rPr sz="2100" b="1">
+                <a:solidFill>
+                  <a:srgbClr val="1A202C"/>
+                </a:solidFill>
+              </a:rPr>
+              <a:t>What materials did we use to represent the backbone in our model?</a:t>
+            </a:r>
+          </a:p>
+        </p:txBody>
+      </p:sp>
+      <p:sp>
+        <p:nvSpPr>
+          <p:cNvPr id="9" name="Rounded Rectangle 8"/>
+          <p:cNvSpPr/>
+          <p:nvPr/>
+        </p:nvSpPr>
+        <p:spPr>
+          <a:xfrm>
+            <a:off x="1005840" y="3246120"/>
+            <a:ext cx="10149840" cy="731520"/>
+          </a:xfrm>
+          <a:prstGeom prst="roundRect">
+            <a:avLst/>
+          </a:prstGeom>
+          <a:solidFill>
+            <a:srgbClr val="F8FAFC"/>
+          </a:solidFill>
+          <a:ln w="15240">
+            <a:solidFill>
+              <a:srgbClr val="CBD5E1"/>
+            </a:solidFill>
+          </a:ln>
+        </p:spPr>
+        <p:style>
+          <a:lnRef idx="1">
+            <a:schemeClr val="accent1"/>
+          </a:lnRef>
+          <a:fillRef idx="3">
+            <a:schemeClr val="accent1"/>
+          </a:fillRef>
+          <a:effectRef idx="2">
+            <a:schemeClr val="accent1"/>
+          </a:effectRef>
+          <a:fontRef idx="minor">
+            <a:schemeClr val="lt1"/>
+          </a:fontRef>
+        </p:style>
+        <p:txBody>
+          <a:bodyPr rtlCol="0" anchor="ctr"/>
+          <a:lstStyle/>
+          <a:p>
+            <a:pPr algn="ctr"/>
+          </a:p>
+        </p:txBody>
+      </p:sp>
+      <p:sp>
+        <p:nvSpPr>
+          <p:cNvPr id="10" name="Oval 9"/>
+          <p:cNvSpPr/>
+          <p:nvPr/>
+        </p:nvSpPr>
+        <p:spPr>
+          <a:xfrm>
+            <a:off x="1234440" y="3364991"/>
+            <a:ext cx="347472" cy="347472"/>
+          </a:xfrm>
+          <a:prstGeom prst="ellipse">
+            <a:avLst/>
+          </a:prstGeom>
+          <a:solidFill>
+            <a:srgbClr val="BE123C"/>
+          </a:solidFill>
+          <a:ln>
+            <a:noFill/>
+          </a:ln>
+        </p:spPr>
+        <p:style>
+          <a:lnRef idx="1">
+            <a:schemeClr val="accent1"/>
+          </a:lnRef>
+          <a:fillRef idx="3">
+            <a:schemeClr val="accent1"/>
+          </a:fillRef>
+          <a:effectRef idx="2">
+            <a:schemeClr val="accent1"/>
+          </a:effectRef>
+          <a:fontRef idx="minor">
+            <a:schemeClr val="lt1"/>
+          </a:fontRef>
+        </p:style>
+        <p:txBody>
+          <a:bodyPr rtlCol="0" anchor="ctr"/>
+          <a:lstStyle/>
+          <a:p>
+            <a:pPr algn="ctr"/>
+          </a:p>
+        </p:txBody>
+      </p:sp>
+      <p:sp>
+        <p:nvSpPr>
+          <p:cNvPr id="11" name="TextBox 10"/>
+          <p:cNvSpPr txBox="1"/>
+          <p:nvPr/>
+        </p:nvSpPr>
+        <p:spPr>
+          <a:xfrm>
+            <a:off x="1234440" y="3410712"/>
+            <a:ext cx="347472" cy="182880"/>
+          </a:xfrm>
+          <a:prstGeom prst="rect">
+            <a:avLst/>
+          </a:prstGeom>
+          <a:noFill/>
+        </p:spPr>
+        <p:txBody>
+          <a:bodyPr wrap="square">
+            <a:spAutoFit/>
+          </a:bodyPr>
+          <a:lstStyle/>
+          <a:p>
+            <a:pPr algn="ctr"/>
+            <a:r>
+              <a:rPr sz="1000" b="1">
+                <a:solidFill>
+                  <a:srgbClr val="FFFFFF"/>
+                </a:solidFill>
+              </a:rPr>
+              <a:t>1</a:t>
+            </a:r>
+          </a:p>
+        </p:txBody>
+      </p:sp>
+      <p:sp>
+        <p:nvSpPr>
+          <p:cNvPr id="12" name="TextBox 11"/>
+          <p:cNvSpPr txBox="1"/>
+          <p:nvPr/>
+        </p:nvSpPr>
+        <p:spPr>
+          <a:xfrm>
+            <a:off x="1783080" y="3364991"/>
+            <a:ext cx="9006840" cy="347472"/>
+          </a:xfrm>
+          <a:prstGeom prst="rect">
+            <a:avLst/>
+          </a:prstGeom>
+          <a:noFill/>
+        </p:spPr>
+        <p:txBody>
+          <a:bodyPr wrap="square">
+            <a:spAutoFit/>
+          </a:bodyPr>
+          <a:lstStyle/>
+          <a:p>
+            <a:r>
+              <a:rPr sz="1700" b="0">
+                <a:solidFill>
+                  <a:srgbClr val="1A202C"/>
+                </a:solidFill>
+              </a:rPr>
+              <a:t>What is the difference between apparatus and procedure?</a:t>
+            </a:r>
+          </a:p>
+        </p:txBody>
+      </p:sp>
+      <p:sp>
+        <p:nvSpPr>
+          <p:cNvPr id="13" name="Rounded Rectangle 12"/>
+          <p:cNvSpPr/>
+          <p:nvPr/>
+        </p:nvSpPr>
+        <p:spPr>
+          <a:xfrm>
+            <a:off x="1005840" y="4178808"/>
+            <a:ext cx="10149840" cy="731520"/>
+          </a:xfrm>
+          <a:prstGeom prst="roundRect">
+            <a:avLst/>
+          </a:prstGeom>
+          <a:solidFill>
+            <a:srgbClr val="F8FAFC"/>
+          </a:solidFill>
+          <a:ln w="15240">
+            <a:solidFill>
+              <a:srgbClr val="CBD5E1"/>
+            </a:solidFill>
+          </a:ln>
+        </p:spPr>
+        <p:style>
+          <a:lnRef idx="1">
+            <a:schemeClr val="accent1"/>
+          </a:lnRef>
+          <a:fillRef idx="3">
+            <a:schemeClr val="accent1"/>
+          </a:fillRef>
+          <a:effectRef idx="2">
+            <a:schemeClr val="accent1"/>
+          </a:effectRef>
+          <a:fontRef idx="minor">
+            <a:schemeClr val="lt1"/>
+          </a:fontRef>
+        </p:style>
+        <p:txBody>
+          <a:bodyPr rtlCol="0" anchor="ctr"/>
+          <a:lstStyle/>
+          <a:p>
+            <a:pPr algn="ctr"/>
+          </a:p>
+        </p:txBody>
+      </p:sp>
+      <p:sp>
+        <p:nvSpPr>
+          <p:cNvPr id="14" name="Oval 13"/>
+          <p:cNvSpPr/>
+          <p:nvPr/>
+        </p:nvSpPr>
+        <p:spPr>
+          <a:xfrm>
+            <a:off x="1234440" y="4297680"/>
+            <a:ext cx="347472" cy="347472"/>
+          </a:xfrm>
+          <a:prstGeom prst="ellipse">
+            <a:avLst/>
+          </a:prstGeom>
+          <a:solidFill>
+            <a:srgbClr val="BE123C"/>
+          </a:solidFill>
+          <a:ln>
+            <a:noFill/>
+          </a:ln>
+        </p:spPr>
+        <p:style>
+          <a:lnRef idx="1">
+            <a:schemeClr val="accent1"/>
+          </a:lnRef>
+          <a:fillRef idx="3">
+            <a:schemeClr val="accent1"/>
+          </a:fillRef>
+          <a:effectRef idx="2">
+            <a:schemeClr val="accent1"/>
+          </a:effectRef>
+          <a:fontRef idx="minor">
+            <a:schemeClr val="lt1"/>
+          </a:fontRef>
+        </p:style>
+        <p:txBody>
+          <a:bodyPr rtlCol="0" anchor="ctr"/>
+          <a:lstStyle/>
+          <a:p>
+            <a:pPr algn="ctr"/>
+          </a:p>
+        </p:txBody>
+      </p:sp>
+      <p:sp>
+        <p:nvSpPr>
+          <p:cNvPr id="15" name="TextBox 14"/>
+          <p:cNvSpPr txBox="1"/>
+          <p:nvPr/>
+        </p:nvSpPr>
+        <p:spPr>
+          <a:xfrm>
+            <a:off x="1234440" y="4343400"/>
+            <a:ext cx="347472" cy="182880"/>
+          </a:xfrm>
+          <a:prstGeom prst="rect">
+            <a:avLst/>
+          </a:prstGeom>
+          <a:noFill/>
+        </p:spPr>
+        <p:txBody>
+          <a:bodyPr wrap="square">
+            <a:spAutoFit/>
+          </a:bodyPr>
+          <a:lstStyle/>
+          <a:p>
+            <a:pPr algn="ctr"/>
+            <a:r>
+              <a:rPr sz="1000" b="1">
+                <a:solidFill>
+                  <a:srgbClr val="FFFFFF"/>
+                </a:solidFill>
+              </a:rPr>
+              <a:t>2</a:t>
+            </a:r>
+          </a:p>
+        </p:txBody>
+      </p:sp>
+      <p:sp>
+        <p:nvSpPr>
+          <p:cNvPr id="16" name="TextBox 15"/>
+          <p:cNvSpPr txBox="1"/>
+          <p:nvPr/>
+        </p:nvSpPr>
+        <p:spPr>
+          <a:xfrm>
+            <a:off x="1783080" y="4297680"/>
+            <a:ext cx="9006840" cy="347472"/>
+          </a:xfrm>
+          <a:prstGeom prst="rect">
+            <a:avLst/>
+          </a:prstGeom>
+          <a:noFill/>
+        </p:spPr>
+        <p:txBody>
+          <a:bodyPr wrap="square">
+            <a:spAutoFit/>
+          </a:bodyPr>
+          <a:lstStyle/>
+          <a:p>
+            <a:r>
+              <a:rPr sz="1700" b="0">
+                <a:solidFill>
+                  <a:srgbClr val="1A202C"/>
+                </a:solidFill>
+              </a:rPr>
+              <a:t>Why do we need an 'Aim' in our report?</a:t>
+            </a:r>
+          </a:p>
+        </p:txBody>
+      </p:sp>
+      <p:sp>
+        <p:nvSpPr>
+          <p:cNvPr id="17" name="Rounded Rectangle 16"/>
+          <p:cNvSpPr/>
+          <p:nvPr/>
+        </p:nvSpPr>
+        <p:spPr>
+          <a:xfrm>
+            <a:off x="1005840" y="5111496"/>
+            <a:ext cx="10149840" cy="731520"/>
+          </a:xfrm>
+          <a:prstGeom prst="roundRect">
+            <a:avLst/>
+          </a:prstGeom>
+          <a:solidFill>
+            <a:srgbClr val="F8FAFC"/>
+          </a:solidFill>
+          <a:ln w="15240">
+            <a:solidFill>
+              <a:srgbClr val="CBD5E1"/>
+            </a:solidFill>
+          </a:ln>
+        </p:spPr>
+        <p:style>
+          <a:lnRef idx="1">
+            <a:schemeClr val="accent1"/>
+          </a:lnRef>
+          <a:fillRef idx="3">
+            <a:schemeClr val="accent1"/>
+          </a:fillRef>
+          <a:effectRef idx="2">
+            <a:schemeClr val="accent1"/>
+          </a:effectRef>
+          <a:fontRef idx="minor">
+            <a:schemeClr val="lt1"/>
+          </a:fontRef>
+        </p:style>
+        <p:txBody>
+          <a:bodyPr rtlCol="0" anchor="ctr"/>
+          <a:lstStyle/>
+          <a:p>
+            <a:pPr algn="ctr"/>
+          </a:p>
+        </p:txBody>
+      </p:sp>
+      <p:sp>
+        <p:nvSpPr>
+          <p:cNvPr id="18" name="Oval 17"/>
+          <p:cNvSpPr/>
+          <p:nvPr/>
+        </p:nvSpPr>
+        <p:spPr>
+          <a:xfrm>
+            <a:off x="1234440" y="5230368"/>
+            <a:ext cx="347472" cy="347472"/>
+          </a:xfrm>
+          <a:prstGeom prst="ellipse">
+            <a:avLst/>
+          </a:prstGeom>
+          <a:solidFill>
+            <a:srgbClr val="BE123C"/>
+          </a:solidFill>
+          <a:ln>
+            <a:noFill/>
+          </a:ln>
+        </p:spPr>
+        <p:style>
+          <a:lnRef idx="1">
+            <a:schemeClr val="accent1"/>
+          </a:lnRef>
+          <a:fillRef idx="3">
+            <a:schemeClr val="accent1"/>
+          </a:fillRef>
+          <a:effectRef idx="2">
+            <a:schemeClr val="accent1"/>
+          </a:effectRef>
+          <a:fontRef idx="minor">
+            <a:schemeClr val="lt1"/>
+          </a:fontRef>
+        </p:style>
+        <p:txBody>
+          <a:bodyPr rtlCol="0" anchor="ctr"/>
+          <a:lstStyle/>
+          <a:p>
+            <a:pPr algn="ctr"/>
+          </a:p>
+        </p:txBody>
+      </p:sp>
+      <p:sp>
+        <p:nvSpPr>
+          <p:cNvPr id="19" name="TextBox 18"/>
+          <p:cNvSpPr txBox="1"/>
+          <p:nvPr/>
+        </p:nvSpPr>
+        <p:spPr>
+          <a:xfrm>
+            <a:off x="1234440" y="5276088"/>
+            <a:ext cx="347472" cy="182880"/>
+          </a:xfrm>
+          <a:prstGeom prst="rect">
+            <a:avLst/>
+          </a:prstGeom>
+          <a:noFill/>
+        </p:spPr>
+        <p:txBody>
+          <a:bodyPr wrap="square">
+            <a:spAutoFit/>
+          </a:bodyPr>
+          <a:lstStyle/>
+          <a:p>
+            <a:pPr algn="ctr"/>
+            <a:r>
+              <a:rPr sz="1000" b="1">
+                <a:solidFill>
+                  <a:srgbClr val="FFFFFF"/>
+                </a:solidFill>
+              </a:rPr>
+              <a:t>3</a:t>
+            </a:r>
+          </a:p>
+        </p:txBody>
+      </p:sp>
+      <p:sp>
+        <p:nvSpPr>
+          <p:cNvPr id="20" name="TextBox 19"/>
+          <p:cNvSpPr txBox="1"/>
+          <p:nvPr/>
+        </p:nvSpPr>
+        <p:spPr>
+          <a:xfrm>
+            <a:off x="1783080" y="5230368"/>
+            <a:ext cx="9006840" cy="347472"/>
+          </a:xfrm>
+          <a:prstGeom prst="rect">
+            <a:avLst/>
+          </a:prstGeom>
+          <a:noFill/>
+        </p:spPr>
+        <p:txBody>
+          <a:bodyPr wrap="square">
+            <a:spAutoFit/>
+          </a:bodyPr>
+          <a:lstStyle/>
+          <a:p>
+            <a:r>
+              <a:rPr sz="1700" b="0">
+                <a:solidFill>
+                  <a:srgbClr val="1A202C"/>
+                </a:solidFill>
+              </a:rPr>
+              <a:t>Agree on one answer before writing.</a:t>
+            </a:r>
+          </a:p>
+        </p:txBody>
+      </p:sp>
+      <p:sp>
+        <p:nvSpPr>
+          <p:cNvPr id="21" name="TextBox 20"/>
+          <p:cNvSpPr txBox="1"/>
+          <p:nvPr/>
+        </p:nvSpPr>
+        <p:spPr>
+          <a:xfrm>
+            <a:off x="777240" y="6419088"/>
+            <a:ext cx="10835640" cy="228600"/>
+          </a:xfrm>
+          <a:prstGeom prst="rect">
+            <a:avLst/>
+          </a:prstGeom>
+          <a:noFill/>
+        </p:spPr>
+        <p:txBody>
+          <a:bodyPr wrap="square">
+            <a:spAutoFit/>
+          </a:bodyPr>
+          <a:lstStyle/>
+          <a:p>
+            <a:pPr algn="r"/>
+            <a:r>
+              <a:rPr sz="1000" b="0">
+                <a:solidFill>
+                  <a:srgbClr val="5B677D"/>
+                </a:solidFill>
+              </a:rPr>
+              <a:t>Listen • Talk • Try • Explain</a:t>
             </a:r>
           </a:p>
         </p:txBody>
@@ -3719,43 +7354,100 @@
       <p:grpSpPr/>
       <p:sp>
         <p:nvSpPr>
-          <p:cNvPr id="2" name="TextBox 1"/>
+          <p:cNvPr id="2" name="Rectangle 1"/>
+          <p:cNvSpPr/>
+          <p:nvPr/>
+        </p:nvSpPr>
+        <p:spPr>
+          <a:xfrm>
+            <a:off x="0" y="0"/>
+            <a:ext cx="12191695" cy="914400"/>
+          </a:xfrm>
+          <a:prstGeom prst="rect">
+            <a:avLst/>
+          </a:prstGeom>
+          <a:solidFill>
+            <a:srgbClr val="166534"/>
+          </a:solidFill>
+          <a:ln>
+            <a:noFill/>
+          </a:ln>
+        </p:spPr>
+        <p:style>
+          <a:lnRef idx="1">
+            <a:schemeClr val="accent1"/>
+          </a:lnRef>
+          <a:fillRef idx="3">
+            <a:schemeClr val="accent1"/>
+          </a:fillRef>
+          <a:effectRef idx="2">
+            <a:schemeClr val="accent1"/>
+          </a:effectRef>
+          <a:fontRef idx="minor">
+            <a:schemeClr val="lt1"/>
+          </a:fontRef>
+        </p:style>
+        <p:txBody>
+          <a:bodyPr rtlCol="0" anchor="ctr"/>
+          <a:lstStyle/>
+          <a:p>
+            <a:pPr algn="ctr"/>
+          </a:p>
+        </p:txBody>
+      </p:sp>
+      <p:sp>
+        <p:nvSpPr>
+          <p:cNvPr id="3" name="Rectangle 2"/>
+          <p:cNvSpPr/>
+          <p:nvPr/>
+        </p:nvSpPr>
+        <p:spPr>
+          <a:xfrm>
+            <a:off x="0" y="914400"/>
+            <a:ext cx="164592" cy="5943600"/>
+          </a:xfrm>
+          <a:prstGeom prst="rect">
+            <a:avLst/>
+          </a:prstGeom>
+          <a:solidFill>
+            <a:srgbClr val="166534"/>
+          </a:solidFill>
+          <a:ln>
+            <a:noFill/>
+          </a:ln>
+        </p:spPr>
+        <p:style>
+          <a:lnRef idx="1">
+            <a:schemeClr val="accent1"/>
+          </a:lnRef>
+          <a:fillRef idx="3">
+            <a:schemeClr val="accent1"/>
+          </a:fillRef>
+          <a:effectRef idx="2">
+            <a:schemeClr val="accent1"/>
+          </a:effectRef>
+          <a:fontRef idx="minor">
+            <a:schemeClr val="lt1"/>
+          </a:fontRef>
+        </p:style>
+        <p:txBody>
+          <a:bodyPr rtlCol="0" anchor="ctr"/>
+          <a:lstStyle/>
+          <a:p>
+            <a:pPr algn="ctr"/>
+          </a:p>
+        </p:txBody>
+      </p:sp>
+      <p:sp>
+        <p:nvSpPr>
+          <p:cNvPr id="4" name="TextBox 3"/>
           <p:cNvSpPr txBox="1"/>
           <p:nvPr/>
         </p:nvSpPr>
         <p:spPr>
           <a:xfrm>
-            <a:off x="548640" y="320040"/>
-            <a:ext cx="11064240" cy="777240"/>
-          </a:xfrm>
-          <a:prstGeom prst="rect">
-            <a:avLst/>
-          </a:prstGeom>
-          <a:noFill/>
-        </p:spPr>
-        <p:txBody>
-          <a:bodyPr wrap="none">
-            <a:spAutoFit/>
-          </a:bodyPr>
-          <a:lstStyle/>
-          <a:p>
-            <a:r>
-              <a:rPr sz="3000" b="1"/>
-              <a:t>Sharing Our Scientific Findings</a:t>
-            </a:r>
-          </a:p>
-        </p:txBody>
-      </p:sp>
-      <p:sp>
-        <p:nvSpPr>
-          <p:cNvPr id="3" name="TextBox 2"/>
-          <p:cNvSpPr txBox="1"/>
-          <p:nvPr/>
-        </p:nvSpPr>
-        <p:spPr>
-          <a:xfrm>
-            <a:off x="868680" y="1417320"/>
-            <a:ext cx="10424160" cy="4892040"/>
+            <a:off x="594360" y="246888"/>
+            <a:ext cx="2926080" cy="320040"/>
           </a:xfrm>
           <a:prstGeom prst="rect">
             <a:avLst/>
@@ -3768,36 +7460,967 @@
           </a:bodyPr>
           <a:lstStyle/>
           <a:p>
-            <a:pPr>
-              <a:spcAft>
-                <a:spcPts val="800"/>
-              </a:spcAft>
-              <a:defRPr sz="2200"/>
-            </a:pPr>
-            <a:r>
-              <a:t>Presenting the summary to the class.</a:t>
-            </a:r>
-          </a:p>
-          <a:p>
-            <a:pPr>
-              <a:spcAft>
-                <a:spcPts val="800"/>
-              </a:spcAft>
-              <a:defRPr sz="2200"/>
-            </a:pPr>
-            <a:r>
-              <a:t>Peer feedback on report structure.</a:t>
-            </a:r>
-          </a:p>
-          <a:p>
-            <a:pPr>
-              <a:spcAft>
-                <a:spcPts val="800"/>
-              </a:spcAft>
-              <a:defRPr sz="2200"/>
-            </a:pPr>
-            <a:r>
-              <a:t>Final reflections on Term 1 Science.</a:t>
+            <a:r>
+              <a:rPr sz="1300" b="1">
+                <a:solidFill>
+                  <a:srgbClr val="FFFFFF"/>
+                </a:solidFill>
+              </a:rPr>
+              <a:t>7. ACTIVITY</a:t>
+            </a:r>
+          </a:p>
+        </p:txBody>
+      </p:sp>
+      <p:sp>
+        <p:nvSpPr>
+          <p:cNvPr id="5" name="TextBox 4"/>
+          <p:cNvSpPr txBox="1"/>
+          <p:nvPr/>
+        </p:nvSpPr>
+        <p:spPr>
+          <a:xfrm>
+            <a:off x="7772400" y="246888"/>
+            <a:ext cx="3840480" cy="320040"/>
+          </a:xfrm>
+          <a:prstGeom prst="rect">
+            <a:avLst/>
+          </a:prstGeom>
+          <a:noFill/>
+        </p:spPr>
+        <p:txBody>
+          <a:bodyPr wrap="square">
+            <a:spAutoFit/>
+          </a:bodyPr>
+          <a:lstStyle/>
+          <a:p>
+            <a:pPr algn="r"/>
+            <a:r>
+              <a:rPr sz="1100" b="0">
+                <a:solidFill>
+                  <a:srgbClr val="FFFFFF"/>
+                </a:solidFill>
+              </a:rPr>
+              <a:t>p7_t1_integrated_science_1205</a:t>
+            </a:r>
+          </a:p>
+        </p:txBody>
+      </p:sp>
+      <p:sp>
+        <p:nvSpPr>
+          <p:cNvPr id="6" name="TextBox 5"/>
+          <p:cNvSpPr txBox="1"/>
+          <p:nvPr/>
+        </p:nvSpPr>
+        <p:spPr>
+          <a:xfrm>
+            <a:off x="640080" y="1143000"/>
+            <a:ext cx="10972800" cy="685800"/>
+          </a:xfrm>
+          <a:prstGeom prst="rect">
+            <a:avLst/>
+          </a:prstGeom>
+          <a:noFill/>
+        </p:spPr>
+        <p:txBody>
+          <a:bodyPr wrap="square">
+            <a:spAutoFit/>
+          </a:bodyPr>
+          <a:lstStyle/>
+          <a:p>
+            <a:r>
+              <a:rPr sz="2800" b="1">
+                <a:solidFill>
+                  <a:srgbClr val="1A202C"/>
+                </a:solidFill>
+              </a:rPr>
+              <a:t>Activity challenge</a:t>
+            </a:r>
+          </a:p>
+        </p:txBody>
+      </p:sp>
+      <p:sp>
+        <p:nvSpPr>
+          <p:cNvPr id="7" name="Rounded Rectangle 6"/>
+          <p:cNvSpPr/>
+          <p:nvPr/>
+        </p:nvSpPr>
+        <p:spPr>
+          <a:xfrm>
+            <a:off x="777240" y="1993392"/>
+            <a:ext cx="10835640" cy="1005840"/>
+          </a:xfrm>
+          <a:prstGeom prst="roundRect">
+            <a:avLst/>
+          </a:prstGeom>
+          <a:solidFill>
+            <a:srgbClr val="FFFBEB"/>
+          </a:solidFill>
+          <a:ln w="15240">
+            <a:solidFill>
+              <a:srgbClr val="166534"/>
+            </a:solidFill>
+          </a:ln>
+        </p:spPr>
+        <p:style>
+          <a:lnRef idx="1">
+            <a:schemeClr val="accent1"/>
+          </a:lnRef>
+          <a:fillRef idx="3">
+            <a:schemeClr val="accent1"/>
+          </a:fillRef>
+          <a:effectRef idx="2">
+            <a:schemeClr val="accent1"/>
+          </a:effectRef>
+          <a:fontRef idx="minor">
+            <a:schemeClr val="lt1"/>
+          </a:fontRef>
+        </p:style>
+        <p:txBody>
+          <a:bodyPr rtlCol="0" anchor="ctr"/>
+          <a:lstStyle/>
+          <a:p>
+            <a:pPr algn="ctr"/>
+          </a:p>
+        </p:txBody>
+      </p:sp>
+      <p:sp>
+        <p:nvSpPr>
+          <p:cNvPr id="8" name="TextBox 7"/>
+          <p:cNvSpPr txBox="1"/>
+          <p:nvPr/>
+        </p:nvSpPr>
+        <p:spPr>
+          <a:xfrm>
+            <a:off x="1051560" y="2212848"/>
+            <a:ext cx="10287000" cy="502920"/>
+          </a:xfrm>
+          <a:prstGeom prst="rect">
+            <a:avLst/>
+          </a:prstGeom>
+          <a:noFill/>
+        </p:spPr>
+        <p:txBody>
+          <a:bodyPr wrap="square">
+            <a:spAutoFit/>
+          </a:bodyPr>
+          <a:lstStyle/>
+          <a:p>
+            <a:r>
+              <a:rPr sz="2100" b="1">
+                <a:solidFill>
+                  <a:srgbClr val="1A202C"/>
+                </a:solidFill>
+              </a:rPr>
+              <a:t>Group task:</a:t>
+            </a:r>
+          </a:p>
+        </p:txBody>
+      </p:sp>
+      <p:sp>
+        <p:nvSpPr>
+          <p:cNvPr id="9" name="Rounded Rectangle 8"/>
+          <p:cNvSpPr/>
+          <p:nvPr/>
+        </p:nvSpPr>
+        <p:spPr>
+          <a:xfrm>
+            <a:off x="1005840" y="3246120"/>
+            <a:ext cx="10149840" cy="621792"/>
+          </a:xfrm>
+          <a:prstGeom prst="roundRect">
+            <a:avLst/>
+          </a:prstGeom>
+          <a:solidFill>
+            <a:srgbClr val="F8FAFC"/>
+          </a:solidFill>
+          <a:ln w="15240">
+            <a:solidFill>
+              <a:srgbClr val="CBD5E1"/>
+            </a:solidFill>
+          </a:ln>
+        </p:spPr>
+        <p:style>
+          <a:lnRef idx="1">
+            <a:schemeClr val="accent1"/>
+          </a:lnRef>
+          <a:fillRef idx="3">
+            <a:schemeClr val="accent1"/>
+          </a:fillRef>
+          <a:effectRef idx="2">
+            <a:schemeClr val="accent1"/>
+          </a:effectRef>
+          <a:fontRef idx="minor">
+            <a:schemeClr val="lt1"/>
+          </a:fontRef>
+        </p:style>
+        <p:txBody>
+          <a:bodyPr rtlCol="0" anchor="ctr"/>
+          <a:lstStyle/>
+          <a:p>
+            <a:pPr algn="ctr"/>
+          </a:p>
+        </p:txBody>
+      </p:sp>
+      <p:sp>
+        <p:nvSpPr>
+          <p:cNvPr id="10" name="Oval 9"/>
+          <p:cNvSpPr/>
+          <p:nvPr/>
+        </p:nvSpPr>
+        <p:spPr>
+          <a:xfrm>
+            <a:off x="1234440" y="3364991"/>
+            <a:ext cx="347472" cy="347472"/>
+          </a:xfrm>
+          <a:prstGeom prst="ellipse">
+            <a:avLst/>
+          </a:prstGeom>
+          <a:solidFill>
+            <a:srgbClr val="166534"/>
+          </a:solidFill>
+          <a:ln>
+            <a:noFill/>
+          </a:ln>
+        </p:spPr>
+        <p:style>
+          <a:lnRef idx="1">
+            <a:schemeClr val="accent1"/>
+          </a:lnRef>
+          <a:fillRef idx="3">
+            <a:schemeClr val="accent1"/>
+          </a:fillRef>
+          <a:effectRef idx="2">
+            <a:schemeClr val="accent1"/>
+          </a:effectRef>
+          <a:fontRef idx="minor">
+            <a:schemeClr val="lt1"/>
+          </a:fontRef>
+        </p:style>
+        <p:txBody>
+          <a:bodyPr rtlCol="0" anchor="ctr"/>
+          <a:lstStyle/>
+          <a:p>
+            <a:pPr algn="ctr"/>
+          </a:p>
+        </p:txBody>
+      </p:sp>
+      <p:sp>
+        <p:nvSpPr>
+          <p:cNvPr id="11" name="TextBox 10"/>
+          <p:cNvSpPr txBox="1"/>
+          <p:nvPr/>
+        </p:nvSpPr>
+        <p:spPr>
+          <a:xfrm>
+            <a:off x="1234440" y="3410712"/>
+            <a:ext cx="347472" cy="182880"/>
+          </a:xfrm>
+          <a:prstGeom prst="rect">
+            <a:avLst/>
+          </a:prstGeom>
+          <a:noFill/>
+        </p:spPr>
+        <p:txBody>
+          <a:bodyPr wrap="square">
+            <a:spAutoFit/>
+          </a:bodyPr>
+          <a:lstStyle/>
+          <a:p>
+            <a:pPr algn="ctr"/>
+            <a:r>
+              <a:rPr sz="1000" b="1">
+                <a:solidFill>
+                  <a:srgbClr val="FFFFFF"/>
+                </a:solidFill>
+              </a:rPr>
+              <a:t>1</a:t>
+            </a:r>
+          </a:p>
+        </p:txBody>
+      </p:sp>
+      <p:sp>
+        <p:nvSpPr>
+          <p:cNvPr id="12" name="TextBox 11"/>
+          <p:cNvSpPr txBox="1"/>
+          <p:nvPr/>
+        </p:nvSpPr>
+        <p:spPr>
+          <a:xfrm>
+            <a:off x="1783080" y="3364991"/>
+            <a:ext cx="9006840" cy="347472"/>
+          </a:xfrm>
+          <a:prstGeom prst="rect">
+            <a:avLst/>
+          </a:prstGeom>
+          <a:noFill/>
+        </p:spPr>
+        <p:txBody>
+          <a:bodyPr wrap="square">
+            <a:spAutoFit/>
+          </a:bodyPr>
+          <a:lstStyle/>
+          <a:p>
+            <a:r>
+              <a:rPr sz="1700" b="0">
+                <a:solidFill>
+                  <a:srgbClr val="1A202C"/>
+                </a:solidFill>
+              </a:rPr>
+              <a:t>Students brainstorm in pairs and list all the scientific experiments and models</a:t>
+            </a:r>
+          </a:p>
+        </p:txBody>
+      </p:sp>
+      <p:sp>
+        <p:nvSpPr>
+          <p:cNvPr id="13" name="Rounded Rectangle 12"/>
+          <p:cNvSpPr/>
+          <p:nvPr/>
+        </p:nvSpPr>
+        <p:spPr>
+          <a:xfrm>
+            <a:off x="1005840" y="4069080"/>
+            <a:ext cx="10149840" cy="621792"/>
+          </a:xfrm>
+          <a:prstGeom prst="roundRect">
+            <a:avLst/>
+          </a:prstGeom>
+          <a:solidFill>
+            <a:srgbClr val="F8FAFC"/>
+          </a:solidFill>
+          <a:ln w="15240">
+            <a:solidFill>
+              <a:srgbClr val="CBD5E1"/>
+            </a:solidFill>
+          </a:ln>
+        </p:spPr>
+        <p:style>
+          <a:lnRef idx="1">
+            <a:schemeClr val="accent1"/>
+          </a:lnRef>
+          <a:fillRef idx="3">
+            <a:schemeClr val="accent1"/>
+          </a:fillRef>
+          <a:effectRef idx="2">
+            <a:schemeClr val="accent1"/>
+          </a:effectRef>
+          <a:fontRef idx="minor">
+            <a:schemeClr val="lt1"/>
+          </a:fontRef>
+        </p:style>
+        <p:txBody>
+          <a:bodyPr rtlCol="0" anchor="ctr"/>
+          <a:lstStyle/>
+          <a:p>
+            <a:pPr algn="ctr"/>
+          </a:p>
+        </p:txBody>
+      </p:sp>
+      <p:sp>
+        <p:nvSpPr>
+          <p:cNvPr id="14" name="Oval 13"/>
+          <p:cNvSpPr/>
+          <p:nvPr/>
+        </p:nvSpPr>
+        <p:spPr>
+          <a:xfrm>
+            <a:off x="1234440" y="4187952"/>
+            <a:ext cx="347472" cy="347472"/>
+          </a:xfrm>
+          <a:prstGeom prst="ellipse">
+            <a:avLst/>
+          </a:prstGeom>
+          <a:solidFill>
+            <a:srgbClr val="166534"/>
+          </a:solidFill>
+          <a:ln>
+            <a:noFill/>
+          </a:ln>
+        </p:spPr>
+        <p:style>
+          <a:lnRef idx="1">
+            <a:schemeClr val="accent1"/>
+          </a:lnRef>
+          <a:fillRef idx="3">
+            <a:schemeClr val="accent1"/>
+          </a:fillRef>
+          <a:effectRef idx="2">
+            <a:schemeClr val="accent1"/>
+          </a:effectRef>
+          <a:fontRef idx="minor">
+            <a:schemeClr val="lt1"/>
+          </a:fontRef>
+        </p:style>
+        <p:txBody>
+          <a:bodyPr rtlCol="0" anchor="ctr"/>
+          <a:lstStyle/>
+          <a:p>
+            <a:pPr algn="ctr"/>
+          </a:p>
+        </p:txBody>
+      </p:sp>
+      <p:sp>
+        <p:nvSpPr>
+          <p:cNvPr id="15" name="TextBox 14"/>
+          <p:cNvSpPr txBox="1"/>
+          <p:nvPr/>
+        </p:nvSpPr>
+        <p:spPr>
+          <a:xfrm>
+            <a:off x="1234440" y="4233672"/>
+            <a:ext cx="347472" cy="182880"/>
+          </a:xfrm>
+          <a:prstGeom prst="rect">
+            <a:avLst/>
+          </a:prstGeom>
+          <a:noFill/>
+        </p:spPr>
+        <p:txBody>
+          <a:bodyPr wrap="square">
+            <a:spAutoFit/>
+          </a:bodyPr>
+          <a:lstStyle/>
+          <a:p>
+            <a:pPr algn="ctr"/>
+            <a:r>
+              <a:rPr sz="1000" b="1">
+                <a:solidFill>
+                  <a:srgbClr val="FFFFFF"/>
+                </a:solidFill>
+              </a:rPr>
+              <a:t>2</a:t>
+            </a:r>
+          </a:p>
+        </p:txBody>
+      </p:sp>
+      <p:sp>
+        <p:nvSpPr>
+          <p:cNvPr id="16" name="TextBox 15"/>
+          <p:cNvSpPr txBox="1"/>
+          <p:nvPr/>
+        </p:nvSpPr>
+        <p:spPr>
+          <a:xfrm>
+            <a:off x="1783080" y="4187952"/>
+            <a:ext cx="9006840" cy="347472"/>
+          </a:xfrm>
+          <a:prstGeom prst="rect">
+            <a:avLst/>
+          </a:prstGeom>
+          <a:noFill/>
+        </p:spPr>
+        <p:txBody>
+          <a:bodyPr wrap="square">
+            <a:spAutoFit/>
+          </a:bodyPr>
+          <a:lstStyle/>
+          <a:p>
+            <a:r>
+              <a:rPr sz="1700" b="0">
+                <a:solidFill>
+                  <a:srgbClr val="1A202C"/>
+                </a:solidFill>
+              </a:rPr>
+              <a:t>created during Term 1 in their notebooks.</a:t>
+            </a:r>
+          </a:p>
+        </p:txBody>
+      </p:sp>
+      <p:sp>
+        <p:nvSpPr>
+          <p:cNvPr id="17" name="Rounded Rectangle 16"/>
+          <p:cNvSpPr/>
+          <p:nvPr/>
+        </p:nvSpPr>
+        <p:spPr>
+          <a:xfrm>
+            <a:off x="1005840" y="4892040"/>
+            <a:ext cx="10149840" cy="621792"/>
+          </a:xfrm>
+          <a:prstGeom prst="roundRect">
+            <a:avLst/>
+          </a:prstGeom>
+          <a:solidFill>
+            <a:srgbClr val="F8FAFC"/>
+          </a:solidFill>
+          <a:ln w="15240">
+            <a:solidFill>
+              <a:srgbClr val="CBD5E1"/>
+            </a:solidFill>
+          </a:ln>
+        </p:spPr>
+        <p:style>
+          <a:lnRef idx="1">
+            <a:schemeClr val="accent1"/>
+          </a:lnRef>
+          <a:fillRef idx="3">
+            <a:schemeClr val="accent1"/>
+          </a:fillRef>
+          <a:effectRef idx="2">
+            <a:schemeClr val="accent1"/>
+          </a:effectRef>
+          <a:fontRef idx="minor">
+            <a:schemeClr val="lt1"/>
+          </a:fontRef>
+        </p:style>
+        <p:txBody>
+          <a:bodyPr rtlCol="0" anchor="ctr"/>
+          <a:lstStyle/>
+          <a:p>
+            <a:pPr algn="ctr"/>
+          </a:p>
+        </p:txBody>
+      </p:sp>
+      <p:sp>
+        <p:nvSpPr>
+          <p:cNvPr id="18" name="Oval 17"/>
+          <p:cNvSpPr/>
+          <p:nvPr/>
+        </p:nvSpPr>
+        <p:spPr>
+          <a:xfrm>
+            <a:off x="1234440" y="5010912"/>
+            <a:ext cx="347472" cy="347472"/>
+          </a:xfrm>
+          <a:prstGeom prst="ellipse">
+            <a:avLst/>
+          </a:prstGeom>
+          <a:solidFill>
+            <a:srgbClr val="166534"/>
+          </a:solidFill>
+          <a:ln>
+            <a:noFill/>
+          </a:ln>
+        </p:spPr>
+        <p:style>
+          <a:lnRef idx="1">
+            <a:schemeClr val="accent1"/>
+          </a:lnRef>
+          <a:fillRef idx="3">
+            <a:schemeClr val="accent1"/>
+          </a:fillRef>
+          <a:effectRef idx="2">
+            <a:schemeClr val="accent1"/>
+          </a:effectRef>
+          <a:fontRef idx="minor">
+            <a:schemeClr val="lt1"/>
+          </a:fontRef>
+        </p:style>
+        <p:txBody>
+          <a:bodyPr rtlCol="0" anchor="ctr"/>
+          <a:lstStyle/>
+          <a:p>
+            <a:pPr algn="ctr"/>
+          </a:p>
+        </p:txBody>
+      </p:sp>
+      <p:sp>
+        <p:nvSpPr>
+          <p:cNvPr id="19" name="TextBox 18"/>
+          <p:cNvSpPr txBox="1"/>
+          <p:nvPr/>
+        </p:nvSpPr>
+        <p:spPr>
+          <a:xfrm>
+            <a:off x="1234440" y="5056632"/>
+            <a:ext cx="347472" cy="182880"/>
+          </a:xfrm>
+          <a:prstGeom prst="rect">
+            <a:avLst/>
+          </a:prstGeom>
+          <a:noFill/>
+        </p:spPr>
+        <p:txBody>
+          <a:bodyPr wrap="square">
+            <a:spAutoFit/>
+          </a:bodyPr>
+          <a:lstStyle/>
+          <a:p>
+            <a:pPr algn="ctr"/>
+            <a:r>
+              <a:rPr sz="1000" b="1">
+                <a:solidFill>
+                  <a:srgbClr val="FFFFFF"/>
+                </a:solidFill>
+              </a:rPr>
+              <a:t>3</a:t>
+            </a:r>
+          </a:p>
+        </p:txBody>
+      </p:sp>
+      <p:sp>
+        <p:nvSpPr>
+          <p:cNvPr id="20" name="TextBox 19"/>
+          <p:cNvSpPr txBox="1"/>
+          <p:nvPr/>
+        </p:nvSpPr>
+        <p:spPr>
+          <a:xfrm>
+            <a:off x="1783080" y="5010912"/>
+            <a:ext cx="9006840" cy="347472"/>
+          </a:xfrm>
+          <a:prstGeom prst="rect">
+            <a:avLst/>
+          </a:prstGeom>
+          <a:noFill/>
+        </p:spPr>
+        <p:txBody>
+          <a:bodyPr wrap="square">
+            <a:spAutoFit/>
+          </a:bodyPr>
+          <a:lstStyle/>
+          <a:p>
+            <a:r>
+              <a:rPr sz="1700" b="0">
+                <a:solidFill>
+                  <a:srgbClr val="1A202C"/>
+                </a:solidFill>
+              </a:rPr>
+              <a:t>Students copy the report structure into their notebooks and label each part based on</a:t>
+            </a:r>
+          </a:p>
+        </p:txBody>
+      </p:sp>
+      <p:sp>
+        <p:nvSpPr>
+          <p:cNvPr id="21" name="Rounded Rectangle 20"/>
+          <p:cNvSpPr/>
+          <p:nvPr/>
+        </p:nvSpPr>
+        <p:spPr>
+          <a:xfrm>
+            <a:off x="1005840" y="5715000"/>
+            <a:ext cx="10149840" cy="621792"/>
+          </a:xfrm>
+          <a:prstGeom prst="roundRect">
+            <a:avLst/>
+          </a:prstGeom>
+          <a:solidFill>
+            <a:srgbClr val="F8FAFC"/>
+          </a:solidFill>
+          <a:ln w="15240">
+            <a:solidFill>
+              <a:srgbClr val="CBD5E1"/>
+            </a:solidFill>
+          </a:ln>
+        </p:spPr>
+        <p:style>
+          <a:lnRef idx="1">
+            <a:schemeClr val="accent1"/>
+          </a:lnRef>
+          <a:fillRef idx="3">
+            <a:schemeClr val="accent1"/>
+          </a:fillRef>
+          <a:effectRef idx="2">
+            <a:schemeClr val="accent1"/>
+          </a:effectRef>
+          <a:fontRef idx="minor">
+            <a:schemeClr val="lt1"/>
+          </a:fontRef>
+        </p:style>
+        <p:txBody>
+          <a:bodyPr rtlCol="0" anchor="ctr"/>
+          <a:lstStyle/>
+          <a:p>
+            <a:pPr algn="ctr"/>
+          </a:p>
+        </p:txBody>
+      </p:sp>
+      <p:sp>
+        <p:nvSpPr>
+          <p:cNvPr id="22" name="Oval 21"/>
+          <p:cNvSpPr/>
+          <p:nvPr/>
+        </p:nvSpPr>
+        <p:spPr>
+          <a:xfrm>
+            <a:off x="1234440" y="5833872"/>
+            <a:ext cx="347472" cy="347472"/>
+          </a:xfrm>
+          <a:prstGeom prst="ellipse">
+            <a:avLst/>
+          </a:prstGeom>
+          <a:solidFill>
+            <a:srgbClr val="166534"/>
+          </a:solidFill>
+          <a:ln>
+            <a:noFill/>
+          </a:ln>
+        </p:spPr>
+        <p:style>
+          <a:lnRef idx="1">
+            <a:schemeClr val="accent1"/>
+          </a:lnRef>
+          <a:fillRef idx="3">
+            <a:schemeClr val="accent1"/>
+          </a:fillRef>
+          <a:effectRef idx="2">
+            <a:schemeClr val="accent1"/>
+          </a:effectRef>
+          <a:fontRef idx="minor">
+            <a:schemeClr val="lt1"/>
+          </a:fontRef>
+        </p:style>
+        <p:txBody>
+          <a:bodyPr rtlCol="0" anchor="ctr"/>
+          <a:lstStyle/>
+          <a:p>
+            <a:pPr algn="ctr"/>
+          </a:p>
+        </p:txBody>
+      </p:sp>
+      <p:sp>
+        <p:nvSpPr>
+          <p:cNvPr id="23" name="TextBox 22"/>
+          <p:cNvSpPr txBox="1"/>
+          <p:nvPr/>
+        </p:nvSpPr>
+        <p:spPr>
+          <a:xfrm>
+            <a:off x="1234440" y="5879592"/>
+            <a:ext cx="347472" cy="182880"/>
+          </a:xfrm>
+          <a:prstGeom prst="rect">
+            <a:avLst/>
+          </a:prstGeom>
+          <a:noFill/>
+        </p:spPr>
+        <p:txBody>
+          <a:bodyPr wrap="square">
+            <a:spAutoFit/>
+          </a:bodyPr>
+          <a:lstStyle/>
+          <a:p>
+            <a:pPr algn="ctr"/>
+            <a:r>
+              <a:rPr sz="1000" b="1">
+                <a:solidFill>
+                  <a:srgbClr val="FFFFFF"/>
+                </a:solidFill>
+              </a:rPr>
+              <a:t>4</a:t>
+            </a:r>
+          </a:p>
+        </p:txBody>
+      </p:sp>
+      <p:sp>
+        <p:nvSpPr>
+          <p:cNvPr id="24" name="TextBox 23"/>
+          <p:cNvSpPr txBox="1"/>
+          <p:nvPr/>
+        </p:nvSpPr>
+        <p:spPr>
+          <a:xfrm>
+            <a:off x="1783080" y="5833872"/>
+            <a:ext cx="9006840" cy="347472"/>
+          </a:xfrm>
+          <a:prstGeom prst="rect">
+            <a:avLst/>
+          </a:prstGeom>
+          <a:noFill/>
+        </p:spPr>
+        <p:txBody>
+          <a:bodyPr wrap="square">
+            <a:spAutoFit/>
+          </a:bodyPr>
+          <a:lstStyle/>
+          <a:p>
+            <a:r>
+              <a:rPr sz="1700" b="0">
+                <a:solidFill>
+                  <a:srgbClr val="1A202C"/>
+                </a:solidFill>
+              </a:rPr>
+              <a:t>a verbal example given by the teacher.</a:t>
+            </a:r>
+          </a:p>
+        </p:txBody>
+      </p:sp>
+      <p:sp>
+        <p:nvSpPr>
+          <p:cNvPr id="25" name="Rounded Rectangle 24"/>
+          <p:cNvSpPr/>
+          <p:nvPr/>
+        </p:nvSpPr>
+        <p:spPr>
+          <a:xfrm>
+            <a:off x="1005840" y="6537960"/>
+            <a:ext cx="10149840" cy="621792"/>
+          </a:xfrm>
+          <a:prstGeom prst="roundRect">
+            <a:avLst/>
+          </a:prstGeom>
+          <a:solidFill>
+            <a:srgbClr val="F8FAFC"/>
+          </a:solidFill>
+          <a:ln w="15240">
+            <a:solidFill>
+              <a:srgbClr val="CBD5E1"/>
+            </a:solidFill>
+          </a:ln>
+        </p:spPr>
+        <p:style>
+          <a:lnRef idx="1">
+            <a:schemeClr val="accent1"/>
+          </a:lnRef>
+          <a:fillRef idx="3">
+            <a:schemeClr val="accent1"/>
+          </a:fillRef>
+          <a:effectRef idx="2">
+            <a:schemeClr val="accent1"/>
+          </a:effectRef>
+          <a:fontRef idx="minor">
+            <a:schemeClr val="lt1"/>
+          </a:fontRef>
+        </p:style>
+        <p:txBody>
+          <a:bodyPr rtlCol="0" anchor="ctr"/>
+          <a:lstStyle/>
+          <a:p>
+            <a:pPr algn="ctr"/>
+          </a:p>
+        </p:txBody>
+      </p:sp>
+      <p:sp>
+        <p:nvSpPr>
+          <p:cNvPr id="26" name="Oval 25"/>
+          <p:cNvSpPr/>
+          <p:nvPr/>
+        </p:nvSpPr>
+        <p:spPr>
+          <a:xfrm>
+            <a:off x="1234440" y="6656832"/>
+            <a:ext cx="347472" cy="347472"/>
+          </a:xfrm>
+          <a:prstGeom prst="ellipse">
+            <a:avLst/>
+          </a:prstGeom>
+          <a:solidFill>
+            <a:srgbClr val="166534"/>
+          </a:solidFill>
+          <a:ln>
+            <a:noFill/>
+          </a:ln>
+        </p:spPr>
+        <p:style>
+          <a:lnRef idx="1">
+            <a:schemeClr val="accent1"/>
+          </a:lnRef>
+          <a:fillRef idx="3">
+            <a:schemeClr val="accent1"/>
+          </a:fillRef>
+          <a:effectRef idx="2">
+            <a:schemeClr val="accent1"/>
+          </a:effectRef>
+          <a:fontRef idx="minor">
+            <a:schemeClr val="lt1"/>
+          </a:fontRef>
+        </p:style>
+        <p:txBody>
+          <a:bodyPr rtlCol="0" anchor="ctr"/>
+          <a:lstStyle/>
+          <a:p>
+            <a:pPr algn="ctr"/>
+          </a:p>
+        </p:txBody>
+      </p:sp>
+      <p:sp>
+        <p:nvSpPr>
+          <p:cNvPr id="27" name="TextBox 26"/>
+          <p:cNvSpPr txBox="1"/>
+          <p:nvPr/>
+        </p:nvSpPr>
+        <p:spPr>
+          <a:xfrm>
+            <a:off x="1234440" y="6702552"/>
+            <a:ext cx="347472" cy="182880"/>
+          </a:xfrm>
+          <a:prstGeom prst="rect">
+            <a:avLst/>
+          </a:prstGeom>
+          <a:noFill/>
+        </p:spPr>
+        <p:txBody>
+          <a:bodyPr wrap="square">
+            <a:spAutoFit/>
+          </a:bodyPr>
+          <a:lstStyle/>
+          <a:p>
+            <a:pPr algn="ctr"/>
+            <a:r>
+              <a:rPr sz="1000" b="1">
+                <a:solidFill>
+                  <a:srgbClr val="FFFFFF"/>
+                </a:solidFill>
+              </a:rPr>
+              <a:t>5</a:t>
+            </a:r>
+          </a:p>
+        </p:txBody>
+      </p:sp>
+      <p:sp>
+        <p:nvSpPr>
+          <p:cNvPr id="28" name="TextBox 27"/>
+          <p:cNvSpPr txBox="1"/>
+          <p:nvPr/>
+        </p:nvSpPr>
+        <p:spPr>
+          <a:xfrm>
+            <a:off x="1783080" y="6656832"/>
+            <a:ext cx="9006840" cy="347472"/>
+          </a:xfrm>
+          <a:prstGeom prst="rect">
+            <a:avLst/>
+          </a:prstGeom>
+          <a:noFill/>
+        </p:spPr>
+        <p:txBody>
+          <a:bodyPr wrap="square">
+            <a:spAutoFit/>
+          </a:bodyPr>
+          <a:lstStyle/>
+          <a:p>
+            <a:r>
+              <a:rPr sz="1700" b="0">
+                <a:solidFill>
+                  <a:srgbClr val="1A202C"/>
+                </a:solidFill>
+              </a:rPr>
+              <a:t>Students participate in a whole-class exercise to verbally summarize the...</a:t>
+            </a:r>
+          </a:p>
+        </p:txBody>
+      </p:sp>
+      <p:sp>
+        <p:nvSpPr>
+          <p:cNvPr id="29" name="TextBox 28"/>
+          <p:cNvSpPr txBox="1"/>
+          <p:nvPr/>
+        </p:nvSpPr>
+        <p:spPr>
+          <a:xfrm>
+            <a:off x="777240" y="6419088"/>
+            <a:ext cx="10835640" cy="228600"/>
+          </a:xfrm>
+          <a:prstGeom prst="rect">
+            <a:avLst/>
+          </a:prstGeom>
+          <a:noFill/>
+        </p:spPr>
+        <p:txBody>
+          <a:bodyPr wrap="square">
+            <a:spAutoFit/>
+          </a:bodyPr>
+          <a:lstStyle/>
+          <a:p>
+            <a:pPr algn="r"/>
+            <a:r>
+              <a:rPr sz="1000" b="0">
+                <a:solidFill>
+                  <a:srgbClr val="5B677D"/>
+                </a:solidFill>
+              </a:rPr>
+              <a:t>Listen • Talk • Try • Explain</a:t>
             </a:r>
           </a:p>
         </p:txBody>
@@ -3822,43 +8445,100 @@
       <p:grpSpPr/>
       <p:sp>
         <p:nvSpPr>
-          <p:cNvPr id="2" name="TextBox 1"/>
+          <p:cNvPr id="2" name="Rectangle 1"/>
+          <p:cNvSpPr/>
+          <p:nvPr/>
+        </p:nvSpPr>
+        <p:spPr>
+          <a:xfrm>
+            <a:off x="0" y="0"/>
+            <a:ext cx="12191695" cy="914400"/>
+          </a:xfrm>
+          <a:prstGeom prst="rect">
+            <a:avLst/>
+          </a:prstGeom>
+          <a:solidFill>
+            <a:srgbClr val="4338CA"/>
+          </a:solidFill>
+          <a:ln>
+            <a:noFill/>
+          </a:ln>
+        </p:spPr>
+        <p:style>
+          <a:lnRef idx="1">
+            <a:schemeClr val="accent1"/>
+          </a:lnRef>
+          <a:fillRef idx="3">
+            <a:schemeClr val="accent1"/>
+          </a:fillRef>
+          <a:effectRef idx="2">
+            <a:schemeClr val="accent1"/>
+          </a:effectRef>
+          <a:fontRef idx="minor">
+            <a:schemeClr val="lt1"/>
+          </a:fontRef>
+        </p:style>
+        <p:txBody>
+          <a:bodyPr rtlCol="0" anchor="ctr"/>
+          <a:lstStyle/>
+          <a:p>
+            <a:pPr algn="ctr"/>
+          </a:p>
+        </p:txBody>
+      </p:sp>
+      <p:sp>
+        <p:nvSpPr>
+          <p:cNvPr id="3" name="Rectangle 2"/>
+          <p:cNvSpPr/>
+          <p:nvPr/>
+        </p:nvSpPr>
+        <p:spPr>
+          <a:xfrm>
+            <a:off x="0" y="914400"/>
+            <a:ext cx="164592" cy="5943600"/>
+          </a:xfrm>
+          <a:prstGeom prst="rect">
+            <a:avLst/>
+          </a:prstGeom>
+          <a:solidFill>
+            <a:srgbClr val="4338CA"/>
+          </a:solidFill>
+          <a:ln>
+            <a:noFill/>
+          </a:ln>
+        </p:spPr>
+        <p:style>
+          <a:lnRef idx="1">
+            <a:schemeClr val="accent1"/>
+          </a:lnRef>
+          <a:fillRef idx="3">
+            <a:schemeClr val="accent1"/>
+          </a:fillRef>
+          <a:effectRef idx="2">
+            <a:schemeClr val="accent1"/>
+          </a:effectRef>
+          <a:fontRef idx="minor">
+            <a:schemeClr val="lt1"/>
+          </a:fontRef>
+        </p:style>
+        <p:txBody>
+          <a:bodyPr rtlCol="0" anchor="ctr"/>
+          <a:lstStyle/>
+          <a:p>
+            <a:pPr algn="ctr"/>
+          </a:p>
+        </p:txBody>
+      </p:sp>
+      <p:sp>
+        <p:nvSpPr>
+          <p:cNvPr id="4" name="TextBox 3"/>
           <p:cNvSpPr txBox="1"/>
           <p:nvPr/>
         </p:nvSpPr>
         <p:spPr>
           <a:xfrm>
-            <a:off x="548640" y="320040"/>
-            <a:ext cx="11064240" cy="777240"/>
-          </a:xfrm>
-          <a:prstGeom prst="rect">
-            <a:avLst/>
-          </a:prstGeom>
-          <a:noFill/>
-        </p:spPr>
-        <p:txBody>
-          <a:bodyPr wrap="none">
-            <a:spAutoFit/>
-          </a:bodyPr>
-          <a:lstStyle/>
-          <a:p>
-            <a:r>
-              <a:rPr sz="3000" b="1"/>
-              <a:t>Check your understanding</a:t>
-            </a:r>
-          </a:p>
-        </p:txBody>
-      </p:sp>
-      <p:sp>
-        <p:nvSpPr>
-          <p:cNvPr id="3" name="TextBox 2"/>
-          <p:cNvSpPr txBox="1"/>
-          <p:nvPr/>
-        </p:nvSpPr>
-        <p:spPr>
-          <a:xfrm>
-            <a:off x="868680" y="1417320"/>
-            <a:ext cx="10424160" cy="4892040"/>
+            <a:off x="594360" y="246888"/>
+            <a:ext cx="2926080" cy="320040"/>
           </a:xfrm>
           <a:prstGeom prst="rect">
             <a:avLst/>
@@ -3871,58 +8551,502 @@
           </a:bodyPr>
           <a:lstStyle/>
           <a:p>
-            <a:pPr>
-              <a:spcAft>
-                <a:spcPts val="800"/>
-              </a:spcAft>
-              <a:defRPr sz="2200"/>
-            </a:pPr>
-            <a:r>
-              <a:t>What materials did we use to represent the backbone in our model?</a:t>
-            </a:r>
-          </a:p>
-          <a:p>
-            <a:pPr>
-              <a:spcAft>
-                <a:spcPts val="800"/>
-              </a:spcAft>
-              <a:defRPr sz="2200"/>
-            </a:pPr>
-            <a:r>
-              <a:t>What is the difference between apparatus and procedure?</a:t>
-            </a:r>
-          </a:p>
-          <a:p>
-            <a:pPr>
-              <a:spcAft>
-                <a:spcPts val="800"/>
-              </a:spcAft>
-              <a:defRPr sz="2200"/>
-            </a:pPr>
-            <a:r>
-              <a:t>Why do we need an 'Aim' in our report?</a:t>
-            </a:r>
-          </a:p>
-          <a:p>
-            <a:pPr>
-              <a:spcAft>
-                <a:spcPts val="800"/>
-              </a:spcAft>
-              <a:defRPr sz="2200"/>
-            </a:pPr>
-            <a:r>
-              <a:t>Why do we use words like 'attracted' instead of 'picked up'?</a:t>
-            </a:r>
-          </a:p>
-          <a:p>
-            <a:pPr>
-              <a:spcAft>
-                <a:spcPts val="800"/>
-              </a:spcAft>
-              <a:defRPr sz="2200"/>
-            </a:pPr>
-            <a:r>
-              <a:t>Write one answer clearly in your notebook.</a:t>
+            <a:r>
+              <a:rPr sz="1300" b="1">
+                <a:solidFill>
+                  <a:srgbClr val="FFFFFF"/>
+                </a:solidFill>
+              </a:rPr>
+              <a:t>8. EXIT</a:t>
+            </a:r>
+          </a:p>
+        </p:txBody>
+      </p:sp>
+      <p:sp>
+        <p:nvSpPr>
+          <p:cNvPr id="5" name="TextBox 4"/>
+          <p:cNvSpPr txBox="1"/>
+          <p:nvPr/>
+        </p:nvSpPr>
+        <p:spPr>
+          <a:xfrm>
+            <a:off x="7772400" y="246888"/>
+            <a:ext cx="3840480" cy="320040"/>
+          </a:xfrm>
+          <a:prstGeom prst="rect">
+            <a:avLst/>
+          </a:prstGeom>
+          <a:noFill/>
+        </p:spPr>
+        <p:txBody>
+          <a:bodyPr wrap="square">
+            <a:spAutoFit/>
+          </a:bodyPr>
+          <a:lstStyle/>
+          <a:p>
+            <a:pPr algn="r"/>
+            <a:r>
+              <a:rPr sz="1100" b="0">
+                <a:solidFill>
+                  <a:srgbClr val="FFFFFF"/>
+                </a:solidFill>
+              </a:rPr>
+              <a:t>p7_t1_integrated_science_1205</a:t>
+            </a:r>
+          </a:p>
+        </p:txBody>
+      </p:sp>
+      <p:sp>
+        <p:nvSpPr>
+          <p:cNvPr id="6" name="TextBox 5"/>
+          <p:cNvSpPr txBox="1"/>
+          <p:nvPr/>
+        </p:nvSpPr>
+        <p:spPr>
+          <a:xfrm>
+            <a:off x="640080" y="1143000"/>
+            <a:ext cx="10972800" cy="685800"/>
+          </a:xfrm>
+          <a:prstGeom prst="rect">
+            <a:avLst/>
+          </a:prstGeom>
+          <a:noFill/>
+        </p:spPr>
+        <p:txBody>
+          <a:bodyPr wrap="square">
+            <a:spAutoFit/>
+          </a:bodyPr>
+          <a:lstStyle/>
+          <a:p>
+            <a:r>
+              <a:rPr sz="2800" b="1">
+                <a:solidFill>
+                  <a:srgbClr val="1A202C"/>
+                </a:solidFill>
+              </a:rPr>
+              <a:t>Exit ticket</a:t>
+            </a:r>
+          </a:p>
+        </p:txBody>
+      </p:sp>
+      <p:sp>
+        <p:nvSpPr>
+          <p:cNvPr id="7" name="Rounded Rectangle 6"/>
+          <p:cNvSpPr/>
+          <p:nvPr/>
+        </p:nvSpPr>
+        <p:spPr>
+          <a:xfrm>
+            <a:off x="777240" y="1993392"/>
+            <a:ext cx="10835640" cy="1005840"/>
+          </a:xfrm>
+          <a:prstGeom prst="roundRect">
+            <a:avLst/>
+          </a:prstGeom>
+          <a:solidFill>
+            <a:srgbClr val="FFFBEB"/>
+          </a:solidFill>
+          <a:ln w="15240">
+            <a:solidFill>
+              <a:srgbClr val="4338CA"/>
+            </a:solidFill>
+          </a:ln>
+        </p:spPr>
+        <p:style>
+          <a:lnRef idx="1">
+            <a:schemeClr val="accent1"/>
+          </a:lnRef>
+          <a:fillRef idx="3">
+            <a:schemeClr val="accent1"/>
+          </a:fillRef>
+          <a:effectRef idx="2">
+            <a:schemeClr val="accent1"/>
+          </a:effectRef>
+          <a:fontRef idx="minor">
+            <a:schemeClr val="lt1"/>
+          </a:fontRef>
+        </p:style>
+        <p:txBody>
+          <a:bodyPr rtlCol="0" anchor="ctr"/>
+          <a:lstStyle/>
+          <a:p>
+            <a:pPr algn="ctr"/>
+          </a:p>
+        </p:txBody>
+      </p:sp>
+      <p:sp>
+        <p:nvSpPr>
+          <p:cNvPr id="8" name="TextBox 7"/>
+          <p:cNvSpPr txBox="1"/>
+          <p:nvPr/>
+        </p:nvSpPr>
+        <p:spPr>
+          <a:xfrm>
+            <a:off x="1051560" y="2212848"/>
+            <a:ext cx="10287000" cy="502920"/>
+          </a:xfrm>
+          <a:prstGeom prst="rect">
+            <a:avLst/>
+          </a:prstGeom>
+          <a:noFill/>
+        </p:spPr>
+        <p:txBody>
+          <a:bodyPr wrap="square">
+            <a:spAutoFit/>
+          </a:bodyPr>
+          <a:lstStyle/>
+          <a:p>
+            <a:r>
+              <a:rPr sz="2100" b="1">
+                <a:solidFill>
+                  <a:srgbClr val="1A202C"/>
+                </a:solidFill>
+              </a:rPr>
+              <a:t>Answer: How does writing a report help you remember the experiment?</a:t>
+            </a:r>
+          </a:p>
+        </p:txBody>
+      </p:sp>
+      <p:sp>
+        <p:nvSpPr>
+          <p:cNvPr id="9" name="Rounded Rectangle 8"/>
+          <p:cNvSpPr/>
+          <p:nvPr/>
+        </p:nvSpPr>
+        <p:spPr>
+          <a:xfrm>
+            <a:off x="1005840" y="3246120"/>
+            <a:ext cx="10149840" cy="731520"/>
+          </a:xfrm>
+          <a:prstGeom prst="roundRect">
+            <a:avLst/>
+          </a:prstGeom>
+          <a:solidFill>
+            <a:srgbClr val="F8FAFC"/>
+          </a:solidFill>
+          <a:ln w="15240">
+            <a:solidFill>
+              <a:srgbClr val="CBD5E1"/>
+            </a:solidFill>
+          </a:ln>
+        </p:spPr>
+        <p:style>
+          <a:lnRef idx="1">
+            <a:schemeClr val="accent1"/>
+          </a:lnRef>
+          <a:fillRef idx="3">
+            <a:schemeClr val="accent1"/>
+          </a:fillRef>
+          <a:effectRef idx="2">
+            <a:schemeClr val="accent1"/>
+          </a:effectRef>
+          <a:fontRef idx="minor">
+            <a:schemeClr val="lt1"/>
+          </a:fontRef>
+        </p:style>
+        <p:txBody>
+          <a:bodyPr rtlCol="0" anchor="ctr"/>
+          <a:lstStyle/>
+          <a:p>
+            <a:pPr algn="ctr"/>
+          </a:p>
+        </p:txBody>
+      </p:sp>
+      <p:sp>
+        <p:nvSpPr>
+          <p:cNvPr id="10" name="Oval 9"/>
+          <p:cNvSpPr/>
+          <p:nvPr/>
+        </p:nvSpPr>
+        <p:spPr>
+          <a:xfrm>
+            <a:off x="1234440" y="3364991"/>
+            <a:ext cx="347472" cy="347472"/>
+          </a:xfrm>
+          <a:prstGeom prst="ellipse">
+            <a:avLst/>
+          </a:prstGeom>
+          <a:solidFill>
+            <a:srgbClr val="4338CA"/>
+          </a:solidFill>
+          <a:ln>
+            <a:noFill/>
+          </a:ln>
+        </p:spPr>
+        <p:style>
+          <a:lnRef idx="1">
+            <a:schemeClr val="accent1"/>
+          </a:lnRef>
+          <a:fillRef idx="3">
+            <a:schemeClr val="accent1"/>
+          </a:fillRef>
+          <a:effectRef idx="2">
+            <a:schemeClr val="accent1"/>
+          </a:effectRef>
+          <a:fontRef idx="minor">
+            <a:schemeClr val="lt1"/>
+          </a:fontRef>
+        </p:style>
+        <p:txBody>
+          <a:bodyPr rtlCol="0" anchor="ctr"/>
+          <a:lstStyle/>
+          <a:p>
+            <a:pPr algn="ctr"/>
+          </a:p>
+        </p:txBody>
+      </p:sp>
+      <p:sp>
+        <p:nvSpPr>
+          <p:cNvPr id="11" name="TextBox 10"/>
+          <p:cNvSpPr txBox="1"/>
+          <p:nvPr/>
+        </p:nvSpPr>
+        <p:spPr>
+          <a:xfrm>
+            <a:off x="1234440" y="3410712"/>
+            <a:ext cx="347472" cy="182880"/>
+          </a:xfrm>
+          <a:prstGeom prst="rect">
+            <a:avLst/>
+          </a:prstGeom>
+          <a:noFill/>
+        </p:spPr>
+        <p:txBody>
+          <a:bodyPr wrap="square">
+            <a:spAutoFit/>
+          </a:bodyPr>
+          <a:lstStyle/>
+          <a:p>
+            <a:pPr algn="ctr"/>
+            <a:r>
+              <a:rPr sz="1000" b="1">
+                <a:solidFill>
+                  <a:srgbClr val="FFFFFF"/>
+                </a:solidFill>
+              </a:rPr>
+              <a:t>1</a:t>
+            </a:r>
+          </a:p>
+        </p:txBody>
+      </p:sp>
+      <p:sp>
+        <p:nvSpPr>
+          <p:cNvPr id="12" name="TextBox 11"/>
+          <p:cNvSpPr txBox="1"/>
+          <p:nvPr/>
+        </p:nvSpPr>
+        <p:spPr>
+          <a:xfrm>
+            <a:off x="1783080" y="3364991"/>
+            <a:ext cx="9006840" cy="347472"/>
+          </a:xfrm>
+          <a:prstGeom prst="rect">
+            <a:avLst/>
+          </a:prstGeom>
+          <a:noFill/>
+        </p:spPr>
+        <p:txBody>
+          <a:bodyPr wrap="square">
+            <a:spAutoFit/>
+          </a:bodyPr>
+          <a:lstStyle/>
+          <a:p>
+            <a:r>
+              <a:rPr sz="1700" b="0">
+                <a:solidFill>
+                  <a:srgbClr val="1A202C"/>
+                </a:solidFill>
+              </a:rPr>
+              <a:t>Use one complete sentence.</a:t>
+            </a:r>
+          </a:p>
+        </p:txBody>
+      </p:sp>
+      <p:sp>
+        <p:nvSpPr>
+          <p:cNvPr id="13" name="Rounded Rectangle 12"/>
+          <p:cNvSpPr/>
+          <p:nvPr/>
+        </p:nvSpPr>
+        <p:spPr>
+          <a:xfrm>
+            <a:off x="1005840" y="4178808"/>
+            <a:ext cx="10149840" cy="731520"/>
+          </a:xfrm>
+          <a:prstGeom prst="roundRect">
+            <a:avLst/>
+          </a:prstGeom>
+          <a:solidFill>
+            <a:srgbClr val="F8FAFC"/>
+          </a:solidFill>
+          <a:ln w="15240">
+            <a:solidFill>
+              <a:srgbClr val="CBD5E1"/>
+            </a:solidFill>
+          </a:ln>
+        </p:spPr>
+        <p:style>
+          <a:lnRef idx="1">
+            <a:schemeClr val="accent1"/>
+          </a:lnRef>
+          <a:fillRef idx="3">
+            <a:schemeClr val="accent1"/>
+          </a:fillRef>
+          <a:effectRef idx="2">
+            <a:schemeClr val="accent1"/>
+          </a:effectRef>
+          <a:fontRef idx="minor">
+            <a:schemeClr val="lt1"/>
+          </a:fontRef>
+        </p:style>
+        <p:txBody>
+          <a:bodyPr rtlCol="0" anchor="ctr"/>
+          <a:lstStyle/>
+          <a:p>
+            <a:pPr algn="ctr"/>
+          </a:p>
+        </p:txBody>
+      </p:sp>
+      <p:sp>
+        <p:nvSpPr>
+          <p:cNvPr id="14" name="Oval 13"/>
+          <p:cNvSpPr/>
+          <p:nvPr/>
+        </p:nvSpPr>
+        <p:spPr>
+          <a:xfrm>
+            <a:off x="1234440" y="4297680"/>
+            <a:ext cx="347472" cy="347472"/>
+          </a:xfrm>
+          <a:prstGeom prst="ellipse">
+            <a:avLst/>
+          </a:prstGeom>
+          <a:solidFill>
+            <a:srgbClr val="4338CA"/>
+          </a:solidFill>
+          <a:ln>
+            <a:noFill/>
+          </a:ln>
+        </p:spPr>
+        <p:style>
+          <a:lnRef idx="1">
+            <a:schemeClr val="accent1"/>
+          </a:lnRef>
+          <a:fillRef idx="3">
+            <a:schemeClr val="accent1"/>
+          </a:fillRef>
+          <a:effectRef idx="2">
+            <a:schemeClr val="accent1"/>
+          </a:effectRef>
+          <a:fontRef idx="minor">
+            <a:schemeClr val="lt1"/>
+          </a:fontRef>
+        </p:style>
+        <p:txBody>
+          <a:bodyPr rtlCol="0" anchor="ctr"/>
+          <a:lstStyle/>
+          <a:p>
+            <a:pPr algn="ctr"/>
+          </a:p>
+        </p:txBody>
+      </p:sp>
+      <p:sp>
+        <p:nvSpPr>
+          <p:cNvPr id="15" name="TextBox 14"/>
+          <p:cNvSpPr txBox="1"/>
+          <p:nvPr/>
+        </p:nvSpPr>
+        <p:spPr>
+          <a:xfrm>
+            <a:off x="1234440" y="4343400"/>
+            <a:ext cx="347472" cy="182880"/>
+          </a:xfrm>
+          <a:prstGeom prst="rect">
+            <a:avLst/>
+          </a:prstGeom>
+          <a:noFill/>
+        </p:spPr>
+        <p:txBody>
+          <a:bodyPr wrap="square">
+            <a:spAutoFit/>
+          </a:bodyPr>
+          <a:lstStyle/>
+          <a:p>
+            <a:pPr algn="ctr"/>
+            <a:r>
+              <a:rPr sz="1000" b="1">
+                <a:solidFill>
+                  <a:srgbClr val="FFFFFF"/>
+                </a:solidFill>
+              </a:rPr>
+              <a:t>2</a:t>
+            </a:r>
+          </a:p>
+        </p:txBody>
+      </p:sp>
+      <p:sp>
+        <p:nvSpPr>
+          <p:cNvPr id="16" name="TextBox 15"/>
+          <p:cNvSpPr txBox="1"/>
+          <p:nvPr/>
+        </p:nvSpPr>
+        <p:spPr>
+          <a:xfrm>
+            <a:off x="1783080" y="4297680"/>
+            <a:ext cx="9006840" cy="347472"/>
+          </a:xfrm>
+          <a:prstGeom prst="rect">
+            <a:avLst/>
+          </a:prstGeom>
+          <a:noFill/>
+        </p:spPr>
+        <p:txBody>
+          <a:bodyPr wrap="square">
+            <a:spAutoFit/>
+          </a:bodyPr>
+          <a:lstStyle/>
+          <a:p>
+            <a:r>
+              <a:rPr sz="1700" b="0">
+                <a:solidFill>
+                  <a:srgbClr val="1A202C"/>
+                </a:solidFill>
+              </a:rPr>
+              <a:t>Hand in or read your answer aloud.</a:t>
+            </a:r>
+          </a:p>
+        </p:txBody>
+      </p:sp>
+      <p:sp>
+        <p:nvSpPr>
+          <p:cNvPr id="17" name="TextBox 16"/>
+          <p:cNvSpPr txBox="1"/>
+          <p:nvPr/>
+        </p:nvSpPr>
+        <p:spPr>
+          <a:xfrm>
+            <a:off x="777240" y="6419088"/>
+            <a:ext cx="10835640" cy="228600"/>
+          </a:xfrm>
+          <a:prstGeom prst="rect">
+            <a:avLst/>
+          </a:prstGeom>
+          <a:noFill/>
+        </p:spPr>
+        <p:txBody>
+          <a:bodyPr wrap="square">
+            <a:spAutoFit/>
+          </a:bodyPr>
+          <a:lstStyle/>
+          <a:p>
+            <a:pPr algn="r"/>
+            <a:r>
+              <a:rPr sz="1000" b="0">
+                <a:solidFill>
+                  <a:srgbClr val="5B677D"/>
+                </a:solidFill>
+              </a:rPr>
+              <a:t>Listen • Talk • Try • Explain</a:t>
             </a:r>
           </a:p>
         </p:txBody>

--- a/uganda-p7-mvp/p7_t1_integrated_science_1205/p7_t1_integrated_science_1205.pptx
+++ b/uganda-p7-mvp/p7_t1_integrated_science_1205/p7_t1_integrated_science_1205.pptx
@@ -3088,6 +3088,14 @@
 <file path=ppt/slides/slide1.xml><?xml version="1.0" encoding="utf-8"?>
 <p:sld xmlns:a="http://schemas.openxmlformats.org/drawingml/2006/main" xmlns:p="http://schemas.openxmlformats.org/presentationml/2006/main" xmlns:r="http://schemas.openxmlformats.org/officeDocument/2006/relationships">
   <p:cSld>
+    <p:bg>
+      <p:bgPr>
+        <a:solidFill>
+          <a:srgbClr val="F8FAFC"/>
+        </a:solidFill>
+        <a:effectLst/>
+      </p:bgPr>
+    </p:bg>
     <p:spTree>
       <p:nvGrpSpPr>
         <p:cNvPr id="1" name=""/>
@@ -3104,13 +3112,13 @@
         <p:spPr>
           <a:xfrm>
             <a:off x="0" y="0"/>
-            <a:ext cx="12191695" cy="914400"/>
-          </a:xfrm>
-          <a:prstGeom prst="rect">
-            <a:avLst/>
-          </a:prstGeom>
-          <a:solidFill>
-            <a:srgbClr val="2563EB"/>
+            <a:ext cx="12191695" cy="713232"/>
+          </a:xfrm>
+          <a:prstGeom prst="rect">
+            <a:avLst/>
+          </a:prstGeom>
+          <a:solidFill>
+            <a:srgbClr val="111827"/>
           </a:solidFill>
           <a:ln>
             <a:noFill/>
@@ -3146,14 +3154,14 @@
         </p:nvSpPr>
         <p:spPr>
           <a:xfrm>
-            <a:off x="0" y="914400"/>
-            <a:ext cx="164592" cy="5943600"/>
-          </a:xfrm>
-          <a:prstGeom prst="rect">
-            <a:avLst/>
-          </a:prstGeom>
-          <a:solidFill>
-            <a:srgbClr val="2563EB"/>
+            <a:off x="0" y="713232"/>
+            <a:ext cx="12191695" cy="82296"/>
+          </a:xfrm>
+          <a:prstGeom prst="rect">
+            <a:avLst/>
+          </a:prstGeom>
+          <a:solidFill>
+            <a:srgbClr val="FCD116"/>
           </a:solidFill>
           <a:ln>
             <a:noFill/>
@@ -3183,126 +3191,23 @@
       </p:sp>
       <p:sp>
         <p:nvSpPr>
-          <p:cNvPr id="4" name="TextBox 3"/>
-          <p:cNvSpPr txBox="1"/>
-          <p:nvPr/>
-        </p:nvSpPr>
-        <p:spPr>
-          <a:xfrm>
-            <a:off x="594360" y="246888"/>
-            <a:ext cx="2743200" cy="320040"/>
-          </a:xfrm>
-          <a:prstGeom prst="rect">
-            <a:avLst/>
-          </a:prstGeom>
-          <a:noFill/>
-        </p:spPr>
-        <p:txBody>
-          <a:bodyPr wrap="square">
-            <a:spAutoFit/>
-          </a:bodyPr>
-          <a:lstStyle/>
-          <a:p>
-            <a:r>
-              <a:rPr sz="1300" b="1">
-                <a:solidFill>
-                  <a:srgbClr val="FFFFFF"/>
-                </a:solidFill>
-              </a:rPr>
-              <a:t>LESSON START</a:t>
-            </a:r>
-          </a:p>
-        </p:txBody>
-      </p:sp>
-      <p:sp>
-        <p:nvSpPr>
-          <p:cNvPr id="5" name="TextBox 4"/>
-          <p:cNvSpPr txBox="1"/>
-          <p:nvPr/>
-        </p:nvSpPr>
-        <p:spPr>
-          <a:xfrm>
-            <a:off x="8412480" y="246888"/>
-            <a:ext cx="3200400" cy="320040"/>
-          </a:xfrm>
-          <a:prstGeom prst="rect">
-            <a:avLst/>
-          </a:prstGeom>
-          <a:noFill/>
-        </p:spPr>
-        <p:txBody>
-          <a:bodyPr wrap="square">
-            <a:spAutoFit/>
-          </a:bodyPr>
-          <a:lstStyle/>
-          <a:p>
-            <a:pPr algn="r"/>
-            <a:r>
-              <a:rPr sz="1100" b="0">
-                <a:solidFill>
-                  <a:srgbClr val="FFFFFF"/>
-                </a:solidFill>
-              </a:rPr>
-              <a:t>p7_t1_integrated_science_1205</a:t>
-            </a:r>
-          </a:p>
-        </p:txBody>
-      </p:sp>
-      <p:sp>
-        <p:nvSpPr>
-          <p:cNvPr id="6" name="TextBox 5"/>
-          <p:cNvSpPr txBox="1"/>
-          <p:nvPr/>
-        </p:nvSpPr>
-        <p:spPr>
-          <a:xfrm>
-            <a:off x="822960" y="1325880"/>
-            <a:ext cx="10698480" cy="1005840"/>
-          </a:xfrm>
-          <a:prstGeom prst="rect">
-            <a:avLst/>
-          </a:prstGeom>
-          <a:noFill/>
-        </p:spPr>
-        <p:txBody>
-          <a:bodyPr wrap="square">
-            <a:spAutoFit/>
-          </a:bodyPr>
-          <a:lstStyle/>
-          <a:p>
-            <a:pPr algn="ctr"/>
-            <a:r>
-              <a:rPr sz="3400" b="1">
-                <a:solidFill>
-                  <a:srgbClr val="1A202C"/>
-                </a:solidFill>
-              </a:rPr>
-              <a:t>3.4 Energy Resources in the Environment</a:t>
-            </a:r>
-          </a:p>
-        </p:txBody>
-      </p:sp>
-      <p:sp>
-        <p:nvSpPr>
-          <p:cNvPr id="7" name="Rounded Rectangle 6"/>
+          <p:cNvPr id="4" name="Rectangle 3"/>
           <p:cNvSpPr/>
           <p:nvPr/>
         </p:nvSpPr>
         <p:spPr>
           <a:xfrm>
-            <a:off x="1143000" y="2743200"/>
-            <a:ext cx="9921240" cy="2194560"/>
-          </a:xfrm>
-          <a:prstGeom prst="roundRect">
-            <a:avLst/>
-          </a:prstGeom>
-          <a:solidFill>
-            <a:srgbClr val="EFF6FF"/>
-          </a:solidFill>
-          <a:ln w="15240">
-            <a:solidFill>
-              <a:srgbClr val="2563EB"/>
-            </a:solidFill>
+            <a:off x="0" y="795528"/>
+            <a:ext cx="12191695" cy="64008"/>
+          </a:xfrm>
+          <a:prstGeom prst="rect">
+            <a:avLst/>
+          </a:prstGeom>
+          <a:solidFill>
+            <a:srgbClr val="D90000"/>
+          </a:solidFill>
+          <a:ln>
+            <a:noFill/>
           </a:ln>
         </p:spPr>
         <p:style>
@@ -3329,14 +3234,126 @@
       </p:sp>
       <p:sp>
         <p:nvSpPr>
+          <p:cNvPr id="5" name="Rectangle 4"/>
+          <p:cNvSpPr/>
+          <p:nvPr/>
+        </p:nvSpPr>
+        <p:spPr>
+          <a:xfrm>
+            <a:off x="0" y="859536"/>
+            <a:ext cx="164592" cy="5998464"/>
+          </a:xfrm>
+          <a:prstGeom prst="rect">
+            <a:avLst/>
+          </a:prstGeom>
+          <a:solidFill>
+            <a:srgbClr val="1D4ED8"/>
+          </a:solidFill>
+          <a:ln>
+            <a:noFill/>
+          </a:ln>
+        </p:spPr>
+        <p:style>
+          <a:lnRef idx="1">
+            <a:schemeClr val="accent1"/>
+          </a:lnRef>
+          <a:fillRef idx="3">
+            <a:schemeClr val="accent1"/>
+          </a:fillRef>
+          <a:effectRef idx="2">
+            <a:schemeClr val="accent1"/>
+          </a:effectRef>
+          <a:fontRef idx="minor">
+            <a:schemeClr val="lt1"/>
+          </a:fontRef>
+        </p:style>
+        <p:txBody>
+          <a:bodyPr rtlCol="0" anchor="ctr"/>
+          <a:lstStyle/>
+          <a:p>
+            <a:pPr algn="ctr"/>
+          </a:p>
+        </p:txBody>
+      </p:sp>
+      <p:sp>
+        <p:nvSpPr>
+          <p:cNvPr id="6" name="TextBox 5"/>
+          <p:cNvSpPr txBox="1"/>
+          <p:nvPr/>
+        </p:nvSpPr>
+        <p:spPr>
+          <a:xfrm>
+            <a:off x="502920" y="210312"/>
+            <a:ext cx="2926080" cy="256032"/>
+          </a:xfrm>
+          <a:prstGeom prst="rect">
+            <a:avLst/>
+          </a:prstGeom>
+          <a:noFill/>
+        </p:spPr>
+        <p:txBody>
+          <a:bodyPr wrap="square" lIns="0" rIns="0" tIns="0" bIns="0">
+            <a:spAutoFit/>
+          </a:bodyPr>
+          <a:lstStyle/>
+          <a:p>
+            <a:r>
+              <a:rPr sz="1200" b="1">
+                <a:solidFill>
+                  <a:srgbClr val="FFFFFF"/>
+                </a:solidFill>
+                <a:latin typeface="Arial"/>
+              </a:rPr>
+              <a:t>UGANDA P7 LESSON</a:t>
+            </a:r>
+          </a:p>
+        </p:txBody>
+      </p:sp>
+      <p:sp>
+        <p:nvSpPr>
+          <p:cNvPr id="7" name="TextBox 6"/>
+          <p:cNvSpPr txBox="1"/>
+          <p:nvPr/>
+        </p:nvSpPr>
+        <p:spPr>
+          <a:xfrm>
+            <a:off x="7589520" y="210312"/>
+            <a:ext cx="4069080" cy="256032"/>
+          </a:xfrm>
+          <a:prstGeom prst="rect">
+            <a:avLst/>
+          </a:prstGeom>
+          <a:noFill/>
+        </p:spPr>
+        <p:txBody>
+          <a:bodyPr wrap="square" lIns="0" rIns="0" tIns="0" bIns="0">
+            <a:spAutoFit/>
+          </a:bodyPr>
+          <a:lstStyle/>
+          <a:p>
+            <a:pPr algn="r"/>
+            <a:r>
+              <a:rPr sz="1000" b="0">
+                <a:solidFill>
+                  <a:srgbClr val="FFFFFF"/>
+                </a:solidFill>
+                <a:latin typeface="Arial"/>
+              </a:rPr>
+              <a:t>p7_t1_integrated_science_1205</a:t>
+            </a:r>
+          </a:p>
+        </p:txBody>
+      </p:sp>
+      <p:sp>
+        <p:nvSpPr>
           <p:cNvPr id="8" name="TextBox 7"/>
           <p:cNvSpPr txBox="1"/>
           <p:nvPr/>
         </p:nvSpPr>
         <p:spPr>
           <a:xfrm>
-            <a:off x="1508760" y="2999232"/>
-            <a:ext cx="9189720" cy="411480"/>
+            <a:off x="731520" y="1207008"/>
+            <a:ext cx="10789920" cy="731520"/>
           </a:xfrm>
           <a:prstGeom prst="rect">
             <a:avLst/>
@@ -3344,17 +3361,98 @@
           <a:noFill/>
         </p:spPr>
         <p:txBody>
-          <a:bodyPr wrap="square">
+          <a:bodyPr wrap="square" lIns="0" rIns="0" tIns="0" bIns="0">
             <a:spAutoFit/>
           </a:bodyPr>
           <a:lstStyle/>
           <a:p>
             <a:pPr algn="ctr"/>
             <a:r>
-              <a:rPr sz="1800" b="1">
-                <a:solidFill>
-                  <a:srgbClr val="2563EB"/>
-                </a:solidFill>
+              <a:rPr sz="3000" b="1">
+                <a:solidFill>
+                  <a:srgbClr val="111827"/>
+                </a:solidFill>
+                <a:latin typeface="Arial"/>
+              </a:rPr>
+              <a:t>3.4 Energy Resources in the Environment</a:t>
+            </a:r>
+          </a:p>
+        </p:txBody>
+      </p:sp>
+      <p:sp>
+        <p:nvSpPr>
+          <p:cNvPr id="9" name="Rectangle 8"/>
+          <p:cNvSpPr/>
+          <p:nvPr/>
+        </p:nvSpPr>
+        <p:spPr>
+          <a:xfrm>
+            <a:off x="1143000" y="2423160"/>
+            <a:ext cx="9921240" cy="2423160"/>
+          </a:xfrm>
+          <a:prstGeom prst="rect">
+            <a:avLst/>
+          </a:prstGeom>
+          <a:solidFill>
+            <a:srgbClr val="FFFFFF"/>
+          </a:solidFill>
+          <a:ln w="19050">
+            <a:solidFill>
+              <a:srgbClr val="1D4ED8"/>
+            </a:solidFill>
+          </a:ln>
+        </p:spPr>
+        <p:style>
+          <a:lnRef idx="1">
+            <a:schemeClr val="accent1"/>
+          </a:lnRef>
+          <a:fillRef idx="3">
+            <a:schemeClr val="accent1"/>
+          </a:fillRef>
+          <a:effectRef idx="2">
+            <a:schemeClr val="accent1"/>
+          </a:effectRef>
+          <a:fontRef idx="minor">
+            <a:schemeClr val="lt1"/>
+          </a:fontRef>
+        </p:style>
+        <p:txBody>
+          <a:bodyPr rtlCol="0" anchor="ctr"/>
+          <a:lstStyle/>
+          <a:p>
+            <a:pPr algn="ctr"/>
+          </a:p>
+        </p:txBody>
+      </p:sp>
+      <p:sp>
+        <p:nvSpPr>
+          <p:cNvPr id="10" name="TextBox 9"/>
+          <p:cNvSpPr txBox="1"/>
+          <p:nvPr/>
+        </p:nvSpPr>
+        <p:spPr>
+          <a:xfrm>
+            <a:off x="1463040" y="2743200"/>
+            <a:ext cx="9281160" cy="347472"/>
+          </a:xfrm>
+          <a:prstGeom prst="rect">
+            <a:avLst/>
+          </a:prstGeom>
+          <a:noFill/>
+        </p:spPr>
+        <p:txBody>
+          <a:bodyPr wrap="square" lIns="0" rIns="0" tIns="0" bIns="0">
+            <a:spAutoFit/>
+          </a:bodyPr>
+          <a:lstStyle/>
+          <a:p>
+            <a:pPr algn="ctr"/>
+            <a:r>
+              <a:rPr sz="1700" b="1">
+                <a:solidFill>
+                  <a:srgbClr val="1D4ED8"/>
+                </a:solidFill>
+                <a:latin typeface="Arial"/>
               </a:rPr>
               <a:t>Integrated Science</a:t>
             </a:r>
@@ -3363,14 +3461,14 @@
       </p:sp>
       <p:sp>
         <p:nvSpPr>
-          <p:cNvPr id="9" name="TextBox 8"/>
+          <p:cNvPr id="11" name="TextBox 10"/>
           <p:cNvSpPr txBox="1"/>
           <p:nvPr/>
         </p:nvSpPr>
         <p:spPr>
           <a:xfrm>
-            <a:off x="1508760" y="3611880"/>
-            <a:ext cx="9189720" cy="914400"/>
+            <a:off x="1645920" y="3355848"/>
+            <a:ext cx="8915400" cy="868680"/>
           </a:xfrm>
           <a:prstGeom prst="rect">
             <a:avLst/>
@@ -3378,17 +3476,18 @@
           <a:noFill/>
         </p:spPr>
         <p:txBody>
-          <a:bodyPr wrap="square">
+          <a:bodyPr wrap="square" lIns="0" rIns="0" tIns="0" bIns="0">
             <a:spAutoFit/>
           </a:bodyPr>
           <a:lstStyle/>
           <a:p>
             <a:pPr algn="ctr"/>
             <a:r>
-              <a:rPr sz="2500" b="1">
-                <a:solidFill>
-                  <a:srgbClr val="1A202C"/>
-                </a:solidFill>
+              <a:rPr sz="2400" b="1">
+                <a:solidFill>
+                  <a:srgbClr val="111827"/>
+                </a:solidFill>
+                <a:latin typeface="Arial"/>
               </a:rPr>
               <a:t>Big question: Which experiment did you find most challenging?</a:t>
             </a:r>
@@ -3397,14 +3496,14 @@
       </p:sp>
       <p:sp>
         <p:nvSpPr>
-          <p:cNvPr id="10" name="TextBox 9"/>
+          <p:cNvPr id="12" name="TextBox 11"/>
           <p:cNvSpPr txBox="1"/>
           <p:nvPr/>
         </p:nvSpPr>
         <p:spPr>
           <a:xfrm>
-            <a:off x="1508760" y="4617720"/>
-            <a:ext cx="9189720" cy="320040"/>
+            <a:off x="1143000" y="5074920"/>
+            <a:ext cx="9921240" cy="320040"/>
           </a:xfrm>
           <a:prstGeom prst="rect">
             <a:avLst/>
@@ -3412,19 +3511,20 @@
           <a:noFill/>
         </p:spPr>
         <p:txBody>
-          <a:bodyPr wrap="square">
+          <a:bodyPr wrap="square" lIns="0" rIns="0" tIns="0" bIns="0">
             <a:spAutoFit/>
           </a:bodyPr>
           <a:lstStyle/>
           <a:p>
             <a:pPr algn="ctr"/>
             <a:r>
-              <a:rPr sz="1500" b="0">
-                <a:solidFill>
-                  <a:srgbClr val="5B677D"/>
-                </a:solidFill>
+              <a:rPr sz="1400" b="0">
+                <a:solidFill>
+                  <a:srgbClr val="475569"/>
+                </a:solidFill>
+                <a:latin typeface="Arial"/>
               </a:rPr>
-              <a:t>Think silently first. Then be ready to explain one idea.</a:t>
+              <a:t>Think silently → pair talk → share one idea</a:t>
             </a:r>
           </a:p>
         </p:txBody>
@@ -3440,6 +3540,14 @@
 <file path=ppt/slides/slide2.xml><?xml version="1.0" encoding="utf-8"?>
 <p:sld xmlns:a="http://schemas.openxmlformats.org/drawingml/2006/main" xmlns:p="http://schemas.openxmlformats.org/presentationml/2006/main" xmlns:r="http://schemas.openxmlformats.org/officeDocument/2006/relationships">
   <p:cSld>
+    <p:bg>
+      <p:bgPr>
+        <a:solidFill>
+          <a:srgbClr val="F8FAFC"/>
+        </a:solidFill>
+        <a:effectLst/>
+      </p:bgPr>
+    </p:bg>
     <p:spTree>
       <p:nvGrpSpPr>
         <p:cNvPr id="1" name=""/>
@@ -3456,13 +3564,13 @@
         <p:spPr>
           <a:xfrm>
             <a:off x="0" y="0"/>
-            <a:ext cx="12191695" cy="914400"/>
-          </a:xfrm>
-          <a:prstGeom prst="rect">
-            <a:avLst/>
-          </a:prstGeom>
-          <a:solidFill>
-            <a:srgbClr val="059669"/>
+            <a:ext cx="12191695" cy="713232"/>
+          </a:xfrm>
+          <a:prstGeom prst="rect">
+            <a:avLst/>
+          </a:prstGeom>
+          <a:solidFill>
+            <a:srgbClr val="111827"/>
           </a:solidFill>
           <a:ln>
             <a:noFill/>
@@ -3498,14 +3606,14 @@
         </p:nvSpPr>
         <p:spPr>
           <a:xfrm>
-            <a:off x="0" y="914400"/>
-            <a:ext cx="164592" cy="5943600"/>
-          </a:xfrm>
-          <a:prstGeom prst="rect">
-            <a:avLst/>
-          </a:prstGeom>
-          <a:solidFill>
-            <a:srgbClr val="059669"/>
+            <a:off x="0" y="713232"/>
+            <a:ext cx="12191695" cy="82296"/>
+          </a:xfrm>
+          <a:prstGeom prst="rect">
+            <a:avLst/>
+          </a:prstGeom>
+          <a:solidFill>
+            <a:srgbClr val="FCD116"/>
           </a:solidFill>
           <a:ln>
             <a:noFill/>
@@ -3535,125 +3643,23 @@
       </p:sp>
       <p:sp>
         <p:nvSpPr>
-          <p:cNvPr id="4" name="TextBox 3"/>
-          <p:cNvSpPr txBox="1"/>
-          <p:nvPr/>
-        </p:nvSpPr>
-        <p:spPr>
-          <a:xfrm>
-            <a:off x="594360" y="246888"/>
-            <a:ext cx="2926080" cy="320040"/>
-          </a:xfrm>
-          <a:prstGeom prst="rect">
-            <a:avLst/>
-          </a:prstGeom>
-          <a:noFill/>
-        </p:spPr>
-        <p:txBody>
-          <a:bodyPr wrap="square">
-            <a:spAutoFit/>
-          </a:bodyPr>
-          <a:lstStyle/>
-          <a:p>
-            <a:r>
-              <a:rPr sz="1300" b="1">
-                <a:solidFill>
-                  <a:srgbClr val="FFFFFF"/>
-                </a:solidFill>
-              </a:rPr>
-              <a:t>2. MISSION</a:t>
-            </a:r>
-          </a:p>
-        </p:txBody>
-      </p:sp>
-      <p:sp>
-        <p:nvSpPr>
-          <p:cNvPr id="5" name="TextBox 4"/>
-          <p:cNvSpPr txBox="1"/>
-          <p:nvPr/>
-        </p:nvSpPr>
-        <p:spPr>
-          <a:xfrm>
-            <a:off x="7772400" y="246888"/>
-            <a:ext cx="3840480" cy="320040"/>
-          </a:xfrm>
-          <a:prstGeom prst="rect">
-            <a:avLst/>
-          </a:prstGeom>
-          <a:noFill/>
-        </p:spPr>
-        <p:txBody>
-          <a:bodyPr wrap="square">
-            <a:spAutoFit/>
-          </a:bodyPr>
-          <a:lstStyle/>
-          <a:p>
-            <a:pPr algn="r"/>
-            <a:r>
-              <a:rPr sz="1100" b="0">
-                <a:solidFill>
-                  <a:srgbClr val="FFFFFF"/>
-                </a:solidFill>
-              </a:rPr>
-              <a:t>p7_t1_integrated_science_1205</a:t>
-            </a:r>
-          </a:p>
-        </p:txBody>
-      </p:sp>
-      <p:sp>
-        <p:nvSpPr>
-          <p:cNvPr id="6" name="TextBox 5"/>
-          <p:cNvSpPr txBox="1"/>
-          <p:nvPr/>
-        </p:nvSpPr>
-        <p:spPr>
-          <a:xfrm>
-            <a:off x="640080" y="1143000"/>
-            <a:ext cx="10972800" cy="685800"/>
-          </a:xfrm>
-          <a:prstGeom prst="rect">
-            <a:avLst/>
-          </a:prstGeom>
-          <a:noFill/>
-        </p:spPr>
-        <p:txBody>
-          <a:bodyPr wrap="square">
-            <a:spAutoFit/>
-          </a:bodyPr>
-          <a:lstStyle/>
-          <a:p>
-            <a:r>
-              <a:rPr sz="2800" b="1">
-                <a:solidFill>
-                  <a:srgbClr val="1A202C"/>
-                </a:solidFill>
-              </a:rPr>
-              <a:t>Today's mission</a:t>
-            </a:r>
-          </a:p>
-        </p:txBody>
-      </p:sp>
-      <p:sp>
-        <p:nvSpPr>
-          <p:cNvPr id="7" name="Rounded Rectangle 6"/>
+          <p:cNvPr id="4" name="Rectangle 3"/>
           <p:cNvSpPr/>
           <p:nvPr/>
         </p:nvSpPr>
         <p:spPr>
           <a:xfrm>
-            <a:off x="777240" y="1993392"/>
-            <a:ext cx="10835640" cy="1005840"/>
-          </a:xfrm>
-          <a:prstGeom prst="roundRect">
-            <a:avLst/>
-          </a:prstGeom>
-          <a:solidFill>
-            <a:srgbClr val="FFFBEB"/>
-          </a:solidFill>
-          <a:ln w="15240">
-            <a:solidFill>
-              <a:srgbClr val="059669"/>
-            </a:solidFill>
+            <a:off x="0" y="795528"/>
+            <a:ext cx="12191695" cy="64008"/>
+          </a:xfrm>
+          <a:prstGeom prst="rect">
+            <a:avLst/>
+          </a:prstGeom>
+          <a:solidFill>
+            <a:srgbClr val="D90000"/>
+          </a:solidFill>
+          <a:ln>
+            <a:noFill/>
           </a:ln>
         </p:spPr>
         <p:style>
@@ -3680,58 +3686,23 @@
       </p:sp>
       <p:sp>
         <p:nvSpPr>
-          <p:cNvPr id="8" name="TextBox 7"/>
-          <p:cNvSpPr txBox="1"/>
-          <p:nvPr/>
-        </p:nvSpPr>
-        <p:spPr>
-          <a:xfrm>
-            <a:off x="1051560" y="2212848"/>
-            <a:ext cx="10287000" cy="502920"/>
-          </a:xfrm>
-          <a:prstGeom prst="rect">
-            <a:avLst/>
-          </a:prstGeom>
-          <a:noFill/>
-        </p:spPr>
-        <p:txBody>
-          <a:bodyPr wrap="square">
-            <a:spAutoFit/>
-          </a:bodyPr>
-          <a:lstStyle/>
-          <a:p>
-            <a:r>
-              <a:rPr sz="2100" b="1">
-                <a:solidFill>
-                  <a:srgbClr val="1A202C"/>
-                </a:solidFill>
-              </a:rPr>
-              <a:t>Goal: Recalls and identifies key experiments conducted during Term 1.</a:t>
-            </a:r>
-          </a:p>
-        </p:txBody>
-      </p:sp>
-      <p:sp>
-        <p:nvSpPr>
-          <p:cNvPr id="9" name="Rounded Rectangle 8"/>
+          <p:cNvPr id="5" name="Rectangle 4"/>
           <p:cNvSpPr/>
           <p:nvPr/>
         </p:nvSpPr>
         <p:spPr>
           <a:xfrm>
-            <a:off x="1005840" y="3246120"/>
-            <a:ext cx="10149840" cy="731520"/>
-          </a:xfrm>
-          <a:prstGeom prst="roundRect">
-            <a:avLst/>
-          </a:prstGeom>
-          <a:solidFill>
-            <a:srgbClr val="F8FAFC"/>
-          </a:solidFill>
-          <a:ln w="15240">
-            <a:solidFill>
-              <a:srgbClr val="CBD5E1"/>
-            </a:solidFill>
+            <a:off x="0" y="859536"/>
+            <a:ext cx="164592" cy="5998464"/>
+          </a:xfrm>
+          <a:prstGeom prst="rect">
+            <a:avLst/>
+          </a:prstGeom>
+          <a:solidFill>
+            <a:srgbClr val="1B7F3A"/>
+          </a:solidFill>
+          <a:ln>
+            <a:noFill/>
           </a:ln>
         </p:spPr>
         <p:style>
@@ -3758,23 +3729,128 @@
       </p:sp>
       <p:sp>
         <p:nvSpPr>
-          <p:cNvPr id="10" name="Oval 9"/>
+          <p:cNvPr id="6" name="TextBox 5"/>
+          <p:cNvSpPr txBox="1"/>
+          <p:nvPr/>
+        </p:nvSpPr>
+        <p:spPr>
+          <a:xfrm>
+            <a:off x="502920" y="210312"/>
+            <a:ext cx="3200400" cy="256032"/>
+          </a:xfrm>
+          <a:prstGeom prst="rect">
+            <a:avLst/>
+          </a:prstGeom>
+          <a:noFill/>
+        </p:spPr>
+        <p:txBody>
+          <a:bodyPr wrap="square" lIns="0" rIns="0" tIns="0" bIns="0">
+            <a:spAutoFit/>
+          </a:bodyPr>
+          <a:lstStyle/>
+          <a:p>
+            <a:r>
+              <a:rPr sz="1200" b="1">
+                <a:solidFill>
+                  <a:srgbClr val="FFFFFF"/>
+                </a:solidFill>
+                <a:latin typeface="Arial"/>
+              </a:rPr>
+              <a:t>2. MISSION</a:t>
+            </a:r>
+          </a:p>
+        </p:txBody>
+      </p:sp>
+      <p:sp>
+        <p:nvSpPr>
+          <p:cNvPr id="7" name="TextBox 6"/>
+          <p:cNvSpPr txBox="1"/>
+          <p:nvPr/>
+        </p:nvSpPr>
+        <p:spPr>
+          <a:xfrm>
+            <a:off x="7589520" y="210312"/>
+            <a:ext cx="4069080" cy="256032"/>
+          </a:xfrm>
+          <a:prstGeom prst="rect">
+            <a:avLst/>
+          </a:prstGeom>
+          <a:noFill/>
+        </p:spPr>
+        <p:txBody>
+          <a:bodyPr wrap="square" lIns="0" rIns="0" tIns="0" bIns="0">
+            <a:spAutoFit/>
+          </a:bodyPr>
+          <a:lstStyle/>
+          <a:p>
+            <a:pPr algn="r"/>
+            <a:r>
+              <a:rPr sz="1000" b="0">
+                <a:solidFill>
+                  <a:srgbClr val="FFFFFF"/>
+                </a:solidFill>
+                <a:latin typeface="Arial"/>
+              </a:rPr>
+              <a:t>p7_t1_integrated_science_1205</a:t>
+            </a:r>
+          </a:p>
+        </p:txBody>
+      </p:sp>
+      <p:sp>
+        <p:nvSpPr>
+          <p:cNvPr id="8" name="TextBox 7"/>
+          <p:cNvSpPr txBox="1"/>
+          <p:nvPr/>
+        </p:nvSpPr>
+        <p:spPr>
+          <a:xfrm>
+            <a:off x="594360" y="1042415"/>
+            <a:ext cx="11109960" cy="566928"/>
+          </a:xfrm>
+          <a:prstGeom prst="rect">
+            <a:avLst/>
+          </a:prstGeom>
+          <a:noFill/>
+        </p:spPr>
+        <p:txBody>
+          <a:bodyPr wrap="square" lIns="0" rIns="0" tIns="0" bIns="0">
+            <a:spAutoFit/>
+          </a:bodyPr>
+          <a:lstStyle/>
+          <a:p>
+            <a:r>
+              <a:rPr sz="2600" b="1">
+                <a:solidFill>
+                  <a:srgbClr val="111827"/>
+                </a:solidFill>
+                <a:latin typeface="Arial"/>
+              </a:rPr>
+              <a:t>Today's mission</a:t>
+            </a:r>
+          </a:p>
+        </p:txBody>
+      </p:sp>
+      <p:sp>
+        <p:nvSpPr>
+          <p:cNvPr id="9" name="Rectangle 8"/>
           <p:cNvSpPr/>
           <p:nvPr/>
         </p:nvSpPr>
         <p:spPr>
           <a:xfrm>
-            <a:off x="1234440" y="3364991"/>
-            <a:ext cx="347472" cy="347472"/>
-          </a:xfrm>
-          <a:prstGeom prst="ellipse">
-            <a:avLst/>
-          </a:prstGeom>
-          <a:solidFill>
-            <a:srgbClr val="059669"/>
-          </a:solidFill>
-          <a:ln>
-            <a:noFill/>
+            <a:off x="685800" y="1874519"/>
+            <a:ext cx="10835640" cy="804672"/>
+          </a:xfrm>
+          <a:prstGeom prst="rect">
+            <a:avLst/>
+          </a:prstGeom>
+          <a:solidFill>
+            <a:srgbClr val="FFF7E0"/>
+          </a:solidFill>
+          <a:ln w="17780">
+            <a:solidFill>
+              <a:srgbClr val="1B7F3A"/>
+            </a:solidFill>
           </a:ln>
         </p:spPr>
         <p:style>
@@ -3792,98 +3868,40 @@
           </a:fontRef>
         </p:style>
         <p:txBody>
-          <a:bodyPr rtlCol="0" anchor="ctr"/>
+          <a:bodyPr rtlCol="0" anchor="ctr" wrap="square" lIns="101600" rIns="101600" tIns="38100" bIns="38100"/>
           <a:lstStyle/>
           <a:p>
             <a:pPr algn="ctr"/>
-          </a:p>
-        </p:txBody>
-      </p:sp>
-      <p:sp>
-        <p:nvSpPr>
-          <p:cNvPr id="11" name="TextBox 10"/>
-          <p:cNvSpPr txBox="1"/>
-          <p:nvPr/>
-        </p:nvSpPr>
-        <p:spPr>
-          <a:xfrm>
-            <a:off x="1234440" y="3410712"/>
-            <a:ext cx="347472" cy="182880"/>
-          </a:xfrm>
-          <a:prstGeom prst="rect">
-            <a:avLst/>
-          </a:prstGeom>
-          <a:noFill/>
-        </p:spPr>
-        <p:txBody>
-          <a:bodyPr wrap="square">
-            <a:spAutoFit/>
-          </a:bodyPr>
-          <a:lstStyle/>
-          <a:p>
-            <a:pPr algn="ctr"/>
-            <a:r>
-              <a:rPr sz="1000" b="1">
-                <a:solidFill>
-                  <a:srgbClr val="FFFFFF"/>
-                </a:solidFill>
+            <a:r>
+              <a:rPr sz="1900" b="1">
+                <a:solidFill>
+                  <a:srgbClr val="111827"/>
+                </a:solidFill>
+                <a:latin typeface="Arial"/>
               </a:rPr>
-              <a:t>1</a:t>
-            </a:r>
-          </a:p>
-        </p:txBody>
-      </p:sp>
-      <p:sp>
-        <p:nvSpPr>
-          <p:cNvPr id="12" name="TextBox 11"/>
-          <p:cNvSpPr txBox="1"/>
-          <p:nvPr/>
-        </p:nvSpPr>
-        <p:spPr>
-          <a:xfrm>
-            <a:off x="1783080" y="3364991"/>
-            <a:ext cx="9006840" cy="347472"/>
-          </a:xfrm>
-          <a:prstGeom prst="rect">
-            <a:avLst/>
-          </a:prstGeom>
-          <a:noFill/>
-        </p:spPr>
-        <p:txBody>
-          <a:bodyPr wrap="square">
-            <a:spAutoFit/>
-          </a:bodyPr>
-          <a:lstStyle/>
-          <a:p>
-            <a:r>
-              <a:rPr sz="1700" b="0">
-                <a:solidFill>
-                  <a:srgbClr val="1A202C"/>
-                </a:solidFill>
-              </a:rPr>
-              <a:t>You will use: Looking Back at Our Experiments, How to Write a Science Report</a:t>
-            </a:r>
-          </a:p>
-        </p:txBody>
-      </p:sp>
-      <p:sp>
-        <p:nvSpPr>
-          <p:cNvPr id="13" name="Rounded Rectangle 12"/>
+              <a:t>Goal: Recalls and identify key experiments conducted from Ter...</a:t>
+            </a:r>
+          </a:p>
+        </p:txBody>
+      </p:sp>
+      <p:sp>
+        <p:nvSpPr>
+          <p:cNvPr id="10" name="Rectangle 9"/>
           <p:cNvSpPr/>
           <p:nvPr/>
         </p:nvSpPr>
         <p:spPr>
           <a:xfrm>
-            <a:off x="1005840" y="4178808"/>
-            <a:ext cx="10149840" cy="731520"/>
-          </a:xfrm>
-          <a:prstGeom prst="roundRect">
-            <a:avLst/>
-          </a:prstGeom>
-          <a:solidFill>
-            <a:srgbClr val="F8FAFC"/>
-          </a:solidFill>
-          <a:ln w="15240">
+            <a:off x="868680" y="2971800"/>
+            <a:ext cx="10378440" cy="713232"/>
+          </a:xfrm>
+          <a:prstGeom prst="rect">
+            <a:avLst/>
+          </a:prstGeom>
+          <a:solidFill>
+            <a:srgbClr val="FFFFFF"/>
+          </a:solidFill>
+          <a:ln w="11430">
             <a:solidFill>
               <a:srgbClr val="CBD5E1"/>
             </a:solidFill>
@@ -3913,20 +3931,20 @@
       </p:sp>
       <p:sp>
         <p:nvSpPr>
-          <p:cNvPr id="14" name="Oval 13"/>
+          <p:cNvPr id="11" name="Rectangle 10"/>
           <p:cNvSpPr/>
           <p:nvPr/>
         </p:nvSpPr>
         <p:spPr>
           <a:xfrm>
-            <a:off x="1234440" y="4297680"/>
-            <a:ext cx="347472" cy="347472"/>
-          </a:xfrm>
-          <a:prstGeom prst="ellipse">
-            <a:avLst/>
-          </a:prstGeom>
-          <a:solidFill>
-            <a:srgbClr val="059669"/>
+            <a:off x="868680" y="2971800"/>
+            <a:ext cx="530352" cy="713232"/>
+          </a:xfrm>
+          <a:prstGeom prst="rect">
+            <a:avLst/>
+          </a:prstGeom>
+          <a:solidFill>
+            <a:srgbClr val="1B7F3A"/>
           </a:solidFill>
           <a:ln>
             <a:noFill/>
@@ -3947,10 +3965,150 @@
           </a:fontRef>
         </p:style>
         <p:txBody>
+          <a:bodyPr rtlCol="0" anchor="ctr" wrap="square" lIns="101600" rIns="101600" tIns="38100" bIns="38100"/>
+          <a:lstStyle/>
+          <a:p>
+            <a:pPr algn="ctr"/>
+            <a:r>
+              <a:rPr sz="1500" b="1">
+                <a:solidFill>
+                  <a:srgbClr val="FFFFFF"/>
+                </a:solidFill>
+                <a:latin typeface="Arial"/>
+              </a:rPr>
+              <a:t>1</a:t>
+            </a:r>
+          </a:p>
+        </p:txBody>
+      </p:sp>
+      <p:sp>
+        <p:nvSpPr>
+          <p:cNvPr id="12" name="TextBox 11"/>
+          <p:cNvSpPr txBox="1"/>
+          <p:nvPr/>
+        </p:nvSpPr>
+        <p:spPr>
+          <a:xfrm>
+            <a:off x="1572768" y="3118104"/>
+            <a:ext cx="9372600" cy="384048"/>
+          </a:xfrm>
+          <a:prstGeom prst="rect">
+            <a:avLst/>
+          </a:prstGeom>
+          <a:noFill/>
+        </p:spPr>
+        <p:txBody>
+          <a:bodyPr wrap="square" lIns="0" rIns="0" tIns="0" bIns="0">
+            <a:spAutoFit/>
+          </a:bodyPr>
+          <a:lstStyle/>
+          <a:p>
+            <a:r>
+              <a:rPr sz="1500" b="0">
+                <a:solidFill>
+                  <a:srgbClr val="111827"/>
+                </a:solidFill>
+                <a:latin typeface="Arial"/>
+              </a:rPr>
+              <a:t>You will use: Looking Back at Our Experiments, How to Write a Sci...</a:t>
+            </a:r>
+          </a:p>
+        </p:txBody>
+      </p:sp>
+      <p:sp>
+        <p:nvSpPr>
+          <p:cNvPr id="13" name="Rectangle 12"/>
+          <p:cNvSpPr/>
+          <p:nvPr/>
+        </p:nvSpPr>
+        <p:spPr>
+          <a:xfrm>
+            <a:off x="868680" y="3822191"/>
+            <a:ext cx="10378440" cy="713232"/>
+          </a:xfrm>
+          <a:prstGeom prst="rect">
+            <a:avLst/>
+          </a:prstGeom>
+          <a:solidFill>
+            <a:srgbClr val="FFFFFF"/>
+          </a:solidFill>
+          <a:ln w="11430">
+            <a:solidFill>
+              <a:srgbClr val="CBD5E1"/>
+            </a:solidFill>
+          </a:ln>
+        </p:spPr>
+        <p:style>
+          <a:lnRef idx="1">
+            <a:schemeClr val="accent1"/>
+          </a:lnRef>
+          <a:fillRef idx="3">
+            <a:schemeClr val="accent1"/>
+          </a:fillRef>
+          <a:effectRef idx="2">
+            <a:schemeClr val="accent1"/>
+          </a:effectRef>
+          <a:fontRef idx="minor">
+            <a:schemeClr val="lt1"/>
+          </a:fontRef>
+        </p:style>
+        <p:txBody>
           <a:bodyPr rtlCol="0" anchor="ctr"/>
           <a:lstStyle/>
           <a:p>
             <a:pPr algn="ctr"/>
+          </a:p>
+        </p:txBody>
+      </p:sp>
+      <p:sp>
+        <p:nvSpPr>
+          <p:cNvPr id="14" name="Rectangle 13"/>
+          <p:cNvSpPr/>
+          <p:nvPr/>
+        </p:nvSpPr>
+        <p:spPr>
+          <a:xfrm>
+            <a:off x="868680" y="3822191"/>
+            <a:ext cx="530352" cy="713232"/>
+          </a:xfrm>
+          <a:prstGeom prst="rect">
+            <a:avLst/>
+          </a:prstGeom>
+          <a:solidFill>
+            <a:srgbClr val="1B7F3A"/>
+          </a:solidFill>
+          <a:ln>
+            <a:noFill/>
+          </a:ln>
+        </p:spPr>
+        <p:style>
+          <a:lnRef idx="1">
+            <a:schemeClr val="accent1"/>
+          </a:lnRef>
+          <a:fillRef idx="3">
+            <a:schemeClr val="accent1"/>
+          </a:fillRef>
+          <a:effectRef idx="2">
+            <a:schemeClr val="accent1"/>
+          </a:effectRef>
+          <a:fontRef idx="minor">
+            <a:schemeClr val="lt1"/>
+          </a:fontRef>
+        </p:style>
+        <p:txBody>
+          <a:bodyPr rtlCol="0" anchor="ctr" wrap="square" lIns="101600" rIns="101600" tIns="38100" bIns="38100"/>
+          <a:lstStyle/>
+          <a:p>
+            <a:pPr algn="ctr"/>
+            <a:r>
+              <a:rPr sz="1500" b="1">
+                <a:solidFill>
+                  <a:srgbClr val="FFFFFF"/>
+                </a:solidFill>
+                <a:latin typeface="Arial"/>
+              </a:rPr>
+              <a:t>2</a:t>
+            </a:r>
           </a:p>
         </p:txBody>
       </p:sp>
@@ -3962,8 +4120,8 @@
         </p:nvSpPr>
         <p:spPr>
           <a:xfrm>
-            <a:off x="1234440" y="4343400"/>
-            <a:ext cx="347472" cy="182880"/>
+            <a:off x="1572768" y="3968496"/>
+            <a:ext cx="9372600" cy="384048"/>
           </a:xfrm>
           <a:prstGeom prst="rect">
             <a:avLst/>
@@ -3971,33 +4129,130 @@
           <a:noFill/>
         </p:spPr>
         <p:txBody>
-          <a:bodyPr wrap="square">
+          <a:bodyPr wrap="square" lIns="0" rIns="0" tIns="0" bIns="0">
             <a:spAutoFit/>
           </a:bodyPr>
           <a:lstStyle/>
           <a:p>
+            <a:r>
+              <a:rPr sz="1500" b="0">
+                <a:solidFill>
+                  <a:srgbClr val="111827"/>
+                </a:solidFill>
+                <a:latin typeface="Arial"/>
+              </a:rPr>
+              <a:t>Success: explain, try, and answer in your own words.</a:t>
+            </a:r>
+          </a:p>
+        </p:txBody>
+      </p:sp>
+      <p:sp>
+        <p:nvSpPr>
+          <p:cNvPr id="16" name="Rectangle 15"/>
+          <p:cNvSpPr/>
+          <p:nvPr/>
+        </p:nvSpPr>
+        <p:spPr>
+          <a:xfrm>
+            <a:off x="868680" y="4672584"/>
+            <a:ext cx="10378440" cy="713232"/>
+          </a:xfrm>
+          <a:prstGeom prst="rect">
+            <a:avLst/>
+          </a:prstGeom>
+          <a:solidFill>
+            <a:srgbClr val="FFFFFF"/>
+          </a:solidFill>
+          <a:ln w="11430">
+            <a:solidFill>
+              <a:srgbClr val="CBD5E1"/>
+            </a:solidFill>
+          </a:ln>
+        </p:spPr>
+        <p:style>
+          <a:lnRef idx="1">
+            <a:schemeClr val="accent1"/>
+          </a:lnRef>
+          <a:fillRef idx="3">
+            <a:schemeClr val="accent1"/>
+          </a:fillRef>
+          <a:effectRef idx="2">
+            <a:schemeClr val="accent1"/>
+          </a:effectRef>
+          <a:fontRef idx="minor">
+            <a:schemeClr val="lt1"/>
+          </a:fontRef>
+        </p:style>
+        <p:txBody>
+          <a:bodyPr rtlCol="0" anchor="ctr"/>
+          <a:lstStyle/>
+          <a:p>
             <a:pPr algn="ctr"/>
-            <a:r>
-              <a:rPr sz="1000" b="1">
+          </a:p>
+        </p:txBody>
+      </p:sp>
+      <p:sp>
+        <p:nvSpPr>
+          <p:cNvPr id="17" name="Rectangle 16"/>
+          <p:cNvSpPr/>
+          <p:nvPr/>
+        </p:nvSpPr>
+        <p:spPr>
+          <a:xfrm>
+            <a:off x="868680" y="4672584"/>
+            <a:ext cx="530352" cy="713232"/>
+          </a:xfrm>
+          <a:prstGeom prst="rect">
+            <a:avLst/>
+          </a:prstGeom>
+          <a:solidFill>
+            <a:srgbClr val="1B7F3A"/>
+          </a:solidFill>
+          <a:ln>
+            <a:noFill/>
+          </a:ln>
+        </p:spPr>
+        <p:style>
+          <a:lnRef idx="1">
+            <a:schemeClr val="accent1"/>
+          </a:lnRef>
+          <a:fillRef idx="3">
+            <a:schemeClr val="accent1"/>
+          </a:fillRef>
+          <a:effectRef idx="2">
+            <a:schemeClr val="accent1"/>
+          </a:effectRef>
+          <a:fontRef idx="minor">
+            <a:schemeClr val="lt1"/>
+          </a:fontRef>
+        </p:style>
+        <p:txBody>
+          <a:bodyPr rtlCol="0" anchor="ctr" wrap="square" lIns="101600" rIns="101600" tIns="38100" bIns="38100"/>
+          <a:lstStyle/>
+          <a:p>
+            <a:pPr algn="ctr"/>
+            <a:r>
+              <a:rPr sz="1500" b="1">
                 <a:solidFill>
                   <a:srgbClr val="FFFFFF"/>
                 </a:solidFill>
+                <a:latin typeface="Arial"/>
               </a:rPr>
-              <a:t>2</a:t>
-            </a:r>
-          </a:p>
-        </p:txBody>
-      </p:sp>
-      <p:sp>
-        <p:nvSpPr>
-          <p:cNvPr id="16" name="TextBox 15"/>
+              <a:t>3</a:t>
+            </a:r>
+          </a:p>
+        </p:txBody>
+      </p:sp>
+      <p:sp>
+        <p:nvSpPr>
+          <p:cNvPr id="18" name="TextBox 17"/>
           <p:cNvSpPr txBox="1"/>
           <p:nvPr/>
         </p:nvSpPr>
         <p:spPr>
           <a:xfrm>
-            <a:off x="1783080" y="4297680"/>
-            <a:ext cx="9006840" cy="347472"/>
+            <a:off x="1572768" y="4818888"/>
+            <a:ext cx="9372600" cy="384048"/>
           </a:xfrm>
           <a:prstGeom prst="rect">
             <a:avLst/>
@@ -4005,32 +4260,130 @@
           <a:noFill/>
         </p:spPr>
         <p:txBody>
-          <a:bodyPr wrap="square">
+          <a:bodyPr wrap="square" lIns="0" rIns="0" tIns="0" bIns="0">
             <a:spAutoFit/>
           </a:bodyPr>
           <a:lstStyle/>
           <a:p>
             <a:r>
-              <a:rPr sz="1700" b="0">
-                <a:solidFill>
-                  <a:srgbClr val="1A202C"/>
-                </a:solidFill>
+              <a:rPr sz="1500" b="0">
+                <a:solidFill>
+                  <a:srgbClr val="111827"/>
+                </a:solidFill>
+                <a:latin typeface="Arial"/>
               </a:rPr>
-              <a:t>Success: explain, try, and answer in your own words.</a:t>
-            </a:r>
-          </a:p>
-        </p:txBody>
-      </p:sp>
-      <p:sp>
-        <p:nvSpPr>
-          <p:cNvPr id="17" name="TextBox 16"/>
+              <a:t>Write one clear response.</a:t>
+            </a:r>
+          </a:p>
+        </p:txBody>
+      </p:sp>
+      <p:sp>
+        <p:nvSpPr>
+          <p:cNvPr id="19" name="Rectangle 18"/>
+          <p:cNvSpPr/>
+          <p:nvPr/>
+        </p:nvSpPr>
+        <p:spPr>
+          <a:xfrm>
+            <a:off x="868680" y="5522976"/>
+            <a:ext cx="10378440" cy="713232"/>
+          </a:xfrm>
+          <a:prstGeom prst="rect">
+            <a:avLst/>
+          </a:prstGeom>
+          <a:solidFill>
+            <a:srgbClr val="FFFFFF"/>
+          </a:solidFill>
+          <a:ln w="11430">
+            <a:solidFill>
+              <a:srgbClr val="CBD5E1"/>
+            </a:solidFill>
+          </a:ln>
+        </p:spPr>
+        <p:style>
+          <a:lnRef idx="1">
+            <a:schemeClr val="accent1"/>
+          </a:lnRef>
+          <a:fillRef idx="3">
+            <a:schemeClr val="accent1"/>
+          </a:fillRef>
+          <a:effectRef idx="2">
+            <a:schemeClr val="accent1"/>
+          </a:effectRef>
+          <a:fontRef idx="minor">
+            <a:schemeClr val="lt1"/>
+          </a:fontRef>
+        </p:style>
+        <p:txBody>
+          <a:bodyPr rtlCol="0" anchor="ctr"/>
+          <a:lstStyle/>
+          <a:p>
+            <a:pPr algn="ctr"/>
+          </a:p>
+        </p:txBody>
+      </p:sp>
+      <p:sp>
+        <p:nvSpPr>
+          <p:cNvPr id="20" name="Rectangle 19"/>
+          <p:cNvSpPr/>
+          <p:nvPr/>
+        </p:nvSpPr>
+        <p:spPr>
+          <a:xfrm>
+            <a:off x="868680" y="5522976"/>
+            <a:ext cx="530352" cy="713232"/>
+          </a:xfrm>
+          <a:prstGeom prst="rect">
+            <a:avLst/>
+          </a:prstGeom>
+          <a:solidFill>
+            <a:srgbClr val="1B7F3A"/>
+          </a:solidFill>
+          <a:ln>
+            <a:noFill/>
+          </a:ln>
+        </p:spPr>
+        <p:style>
+          <a:lnRef idx="1">
+            <a:schemeClr val="accent1"/>
+          </a:lnRef>
+          <a:fillRef idx="3">
+            <a:schemeClr val="accent1"/>
+          </a:fillRef>
+          <a:effectRef idx="2">
+            <a:schemeClr val="accent1"/>
+          </a:effectRef>
+          <a:fontRef idx="minor">
+            <a:schemeClr val="lt1"/>
+          </a:fontRef>
+        </p:style>
+        <p:txBody>
+          <a:bodyPr rtlCol="0" anchor="ctr" wrap="square" lIns="101600" rIns="101600" tIns="38100" bIns="38100"/>
+          <a:lstStyle/>
+          <a:p>
+            <a:pPr algn="ctr"/>
+            <a:r>
+              <a:rPr sz="1500" b="1">
+                <a:solidFill>
+                  <a:srgbClr val="FFFFFF"/>
+                </a:solidFill>
+                <a:latin typeface="Arial"/>
+              </a:rPr>
+              <a:t>4</a:t>
+            </a:r>
+          </a:p>
+        </p:txBody>
+      </p:sp>
+      <p:sp>
+        <p:nvSpPr>
+          <p:cNvPr id="21" name="TextBox 20"/>
           <p:cNvSpPr txBox="1"/>
           <p:nvPr/>
         </p:nvSpPr>
         <p:spPr>
           <a:xfrm>
-            <a:off x="777240" y="6419088"/>
-            <a:ext cx="10835640" cy="228600"/>
+            <a:off x="1572768" y="5669280"/>
+            <a:ext cx="9372600" cy="384048"/>
           </a:xfrm>
           <a:prstGeom prst="rect">
             <a:avLst/>
@@ -4038,17 +4391,52 @@
           <a:noFill/>
         </p:spPr>
         <p:txBody>
-          <a:bodyPr wrap="square">
+          <a:bodyPr wrap="square" lIns="0" rIns="0" tIns="0" bIns="0">
             <a:spAutoFit/>
           </a:bodyPr>
           <a:lstStyle/>
           <a:p>
+            <a:r>
+              <a:rPr sz="1500" b="0">
+                <a:solidFill>
+                  <a:srgbClr val="111827"/>
+                </a:solidFill>
+                <a:latin typeface="Arial"/>
+              </a:rPr>
+              <a:t>Write one clear response.</a:t>
+            </a:r>
+          </a:p>
+        </p:txBody>
+      </p:sp>
+      <p:sp>
+        <p:nvSpPr>
+          <p:cNvPr id="22" name="TextBox 21"/>
+          <p:cNvSpPr txBox="1"/>
+          <p:nvPr/>
+        </p:nvSpPr>
+        <p:spPr>
+          <a:xfrm>
+            <a:off x="685800" y="6419088"/>
+            <a:ext cx="10835640" cy="228600"/>
+          </a:xfrm>
+          <a:prstGeom prst="rect">
+            <a:avLst/>
+          </a:prstGeom>
+          <a:noFill/>
+        </p:spPr>
+        <p:txBody>
+          <a:bodyPr wrap="square" lIns="0" rIns="0" tIns="0" bIns="0">
+            <a:spAutoFit/>
+          </a:bodyPr>
+          <a:lstStyle/>
+          <a:p>
             <a:pPr algn="r"/>
             <a:r>
               <a:rPr sz="1000" b="0">
                 <a:solidFill>
-                  <a:srgbClr val="5B677D"/>
-                </a:solidFill>
+                  <a:srgbClr val="475569"/>
+                </a:solidFill>
+                <a:latin typeface="Arial"/>
               </a:rPr>
               <a:t>Listen • Talk • Try • Explain</a:t>
             </a:r>
@@ -4066,6 +4454,14 @@
 <file path=ppt/slides/slide3.xml><?xml version="1.0" encoding="utf-8"?>
 <p:sld xmlns:a="http://schemas.openxmlformats.org/drawingml/2006/main" xmlns:p="http://schemas.openxmlformats.org/presentationml/2006/main" xmlns:r="http://schemas.openxmlformats.org/officeDocument/2006/relationships">
   <p:cSld>
+    <p:bg>
+      <p:bgPr>
+        <a:solidFill>
+          <a:srgbClr val="F8FAFC"/>
+        </a:solidFill>
+        <a:effectLst/>
+      </p:bgPr>
+    </p:bg>
     <p:spTree>
       <p:nvGrpSpPr>
         <p:cNvPr id="1" name=""/>
@@ -4082,13 +4478,13 @@
         <p:spPr>
           <a:xfrm>
             <a:off x="0" y="0"/>
-            <a:ext cx="12191695" cy="914400"/>
-          </a:xfrm>
-          <a:prstGeom prst="rect">
-            <a:avLst/>
-          </a:prstGeom>
-          <a:solidFill>
-            <a:srgbClr val="7C3AED"/>
+            <a:ext cx="12191695" cy="713232"/>
+          </a:xfrm>
+          <a:prstGeom prst="rect">
+            <a:avLst/>
+          </a:prstGeom>
+          <a:solidFill>
+            <a:srgbClr val="111827"/>
           </a:solidFill>
           <a:ln>
             <a:noFill/>
@@ -4124,14 +4520,14 @@
         </p:nvSpPr>
         <p:spPr>
           <a:xfrm>
-            <a:off x="0" y="914400"/>
-            <a:ext cx="164592" cy="5943600"/>
-          </a:xfrm>
-          <a:prstGeom prst="rect">
-            <a:avLst/>
-          </a:prstGeom>
-          <a:solidFill>
-            <a:srgbClr val="7C3AED"/>
+            <a:off x="0" y="713232"/>
+            <a:ext cx="12191695" cy="82296"/>
+          </a:xfrm>
+          <a:prstGeom prst="rect">
+            <a:avLst/>
+          </a:prstGeom>
+          <a:solidFill>
+            <a:srgbClr val="FCD116"/>
           </a:solidFill>
           <a:ln>
             <a:noFill/>
@@ -4161,125 +4557,23 @@
       </p:sp>
       <p:sp>
         <p:nvSpPr>
-          <p:cNvPr id="4" name="TextBox 3"/>
-          <p:cNvSpPr txBox="1"/>
-          <p:nvPr/>
-        </p:nvSpPr>
-        <p:spPr>
-          <a:xfrm>
-            <a:off x="594360" y="246888"/>
-            <a:ext cx="2926080" cy="320040"/>
-          </a:xfrm>
-          <a:prstGeom prst="rect">
-            <a:avLst/>
-          </a:prstGeom>
-          <a:noFill/>
-        </p:spPr>
-        <p:txBody>
-          <a:bodyPr wrap="square">
-            <a:spAutoFit/>
-          </a:bodyPr>
-          <a:lstStyle/>
-          <a:p>
-            <a:r>
-              <a:rPr sz="1300" b="1">
-                <a:solidFill>
-                  <a:srgbClr val="FFFFFF"/>
-                </a:solidFill>
-              </a:rPr>
-              <a:t>3. STARTER</a:t>
-            </a:r>
-          </a:p>
-        </p:txBody>
-      </p:sp>
-      <p:sp>
-        <p:nvSpPr>
-          <p:cNvPr id="5" name="TextBox 4"/>
-          <p:cNvSpPr txBox="1"/>
-          <p:nvPr/>
-        </p:nvSpPr>
-        <p:spPr>
-          <a:xfrm>
-            <a:off x="7772400" y="246888"/>
-            <a:ext cx="3840480" cy="320040"/>
-          </a:xfrm>
-          <a:prstGeom prst="rect">
-            <a:avLst/>
-          </a:prstGeom>
-          <a:noFill/>
-        </p:spPr>
-        <p:txBody>
-          <a:bodyPr wrap="square">
-            <a:spAutoFit/>
-          </a:bodyPr>
-          <a:lstStyle/>
-          <a:p>
-            <a:pPr algn="r"/>
-            <a:r>
-              <a:rPr sz="1100" b="0">
-                <a:solidFill>
-                  <a:srgbClr val="FFFFFF"/>
-                </a:solidFill>
-              </a:rPr>
-              <a:t>p7_t1_integrated_science_1205</a:t>
-            </a:r>
-          </a:p>
-        </p:txBody>
-      </p:sp>
-      <p:sp>
-        <p:nvSpPr>
-          <p:cNvPr id="6" name="TextBox 5"/>
-          <p:cNvSpPr txBox="1"/>
-          <p:nvPr/>
-        </p:nvSpPr>
-        <p:spPr>
-          <a:xfrm>
-            <a:off x="640080" y="1143000"/>
-            <a:ext cx="10972800" cy="685800"/>
-          </a:xfrm>
-          <a:prstGeom prst="rect">
-            <a:avLst/>
-          </a:prstGeom>
-          <a:noFill/>
-        </p:spPr>
-        <p:txBody>
-          <a:bodyPr wrap="square">
-            <a:spAutoFit/>
-          </a:bodyPr>
-          <a:lstStyle/>
-          <a:p>
-            <a:r>
-              <a:rPr sz="2800" b="1">
-                <a:solidFill>
-                  <a:srgbClr val="1A202C"/>
-                </a:solidFill>
-              </a:rPr>
-              <a:t>Starter: think first</a:t>
-            </a:r>
-          </a:p>
-        </p:txBody>
-      </p:sp>
-      <p:sp>
-        <p:nvSpPr>
-          <p:cNvPr id="7" name="Rounded Rectangle 6"/>
+          <p:cNvPr id="4" name="Rectangle 3"/>
           <p:cNvSpPr/>
           <p:nvPr/>
         </p:nvSpPr>
         <p:spPr>
           <a:xfrm>
-            <a:off x="777240" y="1993392"/>
-            <a:ext cx="10835640" cy="1005840"/>
-          </a:xfrm>
-          <a:prstGeom prst="roundRect">
-            <a:avLst/>
-          </a:prstGeom>
-          <a:solidFill>
-            <a:srgbClr val="FFFBEB"/>
-          </a:solidFill>
-          <a:ln w="15240">
-            <a:solidFill>
-              <a:srgbClr val="7C3AED"/>
-            </a:solidFill>
+            <a:off x="0" y="795528"/>
+            <a:ext cx="12191695" cy="64008"/>
+          </a:xfrm>
+          <a:prstGeom prst="rect">
+            <a:avLst/>
+          </a:prstGeom>
+          <a:solidFill>
+            <a:srgbClr val="D90000"/>
+          </a:solidFill>
+          <a:ln>
+            <a:noFill/>
           </a:ln>
         </p:spPr>
         <p:style>
@@ -4306,58 +4600,23 @@
       </p:sp>
       <p:sp>
         <p:nvSpPr>
-          <p:cNvPr id="8" name="TextBox 7"/>
-          <p:cNvSpPr txBox="1"/>
-          <p:nvPr/>
-        </p:nvSpPr>
-        <p:spPr>
-          <a:xfrm>
-            <a:off x="1051560" y="2212848"/>
-            <a:ext cx="10287000" cy="502920"/>
-          </a:xfrm>
-          <a:prstGeom prst="rect">
-            <a:avLst/>
-          </a:prstGeom>
-          <a:noFill/>
-        </p:spPr>
-        <p:txBody>
-          <a:bodyPr wrap="square">
-            <a:spAutoFit/>
-          </a:bodyPr>
-          <a:lstStyle/>
-          <a:p>
-            <a:r>
-              <a:rPr sz="2100" b="1">
-                <a:solidFill>
-                  <a:srgbClr val="1A202C"/>
-                </a:solidFill>
-              </a:rPr>
-              <a:t>Think: Which experiment did you find most challenging?</a:t>
-            </a:r>
-          </a:p>
-        </p:txBody>
-      </p:sp>
-      <p:sp>
-        <p:nvSpPr>
-          <p:cNvPr id="9" name="Rounded Rectangle 8"/>
+          <p:cNvPr id="5" name="Rectangle 4"/>
           <p:cNvSpPr/>
           <p:nvPr/>
         </p:nvSpPr>
         <p:spPr>
           <a:xfrm>
-            <a:off x="1005840" y="3246120"/>
-            <a:ext cx="10149840" cy="731520"/>
-          </a:xfrm>
-          <a:prstGeom prst="roundRect">
-            <a:avLst/>
-          </a:prstGeom>
-          <a:solidFill>
-            <a:srgbClr val="F8FAFC"/>
-          </a:solidFill>
-          <a:ln w="15240">
-            <a:solidFill>
-              <a:srgbClr val="CBD5E1"/>
-            </a:solidFill>
+            <a:off x="0" y="859536"/>
+            <a:ext cx="164592" cy="5998464"/>
+          </a:xfrm>
+          <a:prstGeom prst="rect">
+            <a:avLst/>
+          </a:prstGeom>
+          <a:solidFill>
+            <a:srgbClr val="7C3AED"/>
+          </a:solidFill>
+          <a:ln>
+            <a:noFill/>
           </a:ln>
         </p:spPr>
         <p:style>
@@ -4384,23 +4643,128 @@
       </p:sp>
       <p:sp>
         <p:nvSpPr>
-          <p:cNvPr id="10" name="Oval 9"/>
+          <p:cNvPr id="6" name="TextBox 5"/>
+          <p:cNvSpPr txBox="1"/>
+          <p:nvPr/>
+        </p:nvSpPr>
+        <p:spPr>
+          <a:xfrm>
+            <a:off x="502920" y="210312"/>
+            <a:ext cx="3200400" cy="256032"/>
+          </a:xfrm>
+          <a:prstGeom prst="rect">
+            <a:avLst/>
+          </a:prstGeom>
+          <a:noFill/>
+        </p:spPr>
+        <p:txBody>
+          <a:bodyPr wrap="square" lIns="0" rIns="0" tIns="0" bIns="0">
+            <a:spAutoFit/>
+          </a:bodyPr>
+          <a:lstStyle/>
+          <a:p>
+            <a:r>
+              <a:rPr sz="1200" b="1">
+                <a:solidFill>
+                  <a:srgbClr val="FFFFFF"/>
+                </a:solidFill>
+                <a:latin typeface="Arial"/>
+              </a:rPr>
+              <a:t>3. STARTER</a:t>
+            </a:r>
+          </a:p>
+        </p:txBody>
+      </p:sp>
+      <p:sp>
+        <p:nvSpPr>
+          <p:cNvPr id="7" name="TextBox 6"/>
+          <p:cNvSpPr txBox="1"/>
+          <p:nvPr/>
+        </p:nvSpPr>
+        <p:spPr>
+          <a:xfrm>
+            <a:off x="7589520" y="210312"/>
+            <a:ext cx="4069080" cy="256032"/>
+          </a:xfrm>
+          <a:prstGeom prst="rect">
+            <a:avLst/>
+          </a:prstGeom>
+          <a:noFill/>
+        </p:spPr>
+        <p:txBody>
+          <a:bodyPr wrap="square" lIns="0" rIns="0" tIns="0" bIns="0">
+            <a:spAutoFit/>
+          </a:bodyPr>
+          <a:lstStyle/>
+          <a:p>
+            <a:pPr algn="r"/>
+            <a:r>
+              <a:rPr sz="1000" b="0">
+                <a:solidFill>
+                  <a:srgbClr val="FFFFFF"/>
+                </a:solidFill>
+                <a:latin typeface="Arial"/>
+              </a:rPr>
+              <a:t>p7_t1_integrated_science_1205</a:t>
+            </a:r>
+          </a:p>
+        </p:txBody>
+      </p:sp>
+      <p:sp>
+        <p:nvSpPr>
+          <p:cNvPr id="8" name="TextBox 7"/>
+          <p:cNvSpPr txBox="1"/>
+          <p:nvPr/>
+        </p:nvSpPr>
+        <p:spPr>
+          <a:xfrm>
+            <a:off x="594360" y="1042415"/>
+            <a:ext cx="11109960" cy="566928"/>
+          </a:xfrm>
+          <a:prstGeom prst="rect">
+            <a:avLst/>
+          </a:prstGeom>
+          <a:noFill/>
+        </p:spPr>
+        <p:txBody>
+          <a:bodyPr wrap="square" lIns="0" rIns="0" tIns="0" bIns="0">
+            <a:spAutoFit/>
+          </a:bodyPr>
+          <a:lstStyle/>
+          <a:p>
+            <a:r>
+              <a:rPr sz="2600" b="1">
+                <a:solidFill>
+                  <a:srgbClr val="111827"/>
+                </a:solidFill>
+                <a:latin typeface="Arial"/>
+              </a:rPr>
+              <a:t>Starter: think first</a:t>
+            </a:r>
+          </a:p>
+        </p:txBody>
+      </p:sp>
+      <p:sp>
+        <p:nvSpPr>
+          <p:cNvPr id="9" name="Rectangle 8"/>
           <p:cNvSpPr/>
           <p:nvPr/>
         </p:nvSpPr>
         <p:spPr>
           <a:xfrm>
-            <a:off x="1234440" y="3364991"/>
-            <a:ext cx="347472" cy="347472"/>
-          </a:xfrm>
-          <a:prstGeom prst="ellipse">
-            <a:avLst/>
-          </a:prstGeom>
-          <a:solidFill>
-            <a:srgbClr val="7C3AED"/>
-          </a:solidFill>
-          <a:ln>
-            <a:noFill/>
+            <a:off x="685800" y="1874519"/>
+            <a:ext cx="10835640" cy="804672"/>
+          </a:xfrm>
+          <a:prstGeom prst="rect">
+            <a:avLst/>
+          </a:prstGeom>
+          <a:solidFill>
+            <a:srgbClr val="FFF7E0"/>
+          </a:solidFill>
+          <a:ln w="17780">
+            <a:solidFill>
+              <a:srgbClr val="7C3AED"/>
+            </a:solidFill>
           </a:ln>
         </p:spPr>
         <p:style>
@@ -4418,98 +4782,40 @@
           </a:fontRef>
         </p:style>
         <p:txBody>
-          <a:bodyPr rtlCol="0" anchor="ctr"/>
+          <a:bodyPr rtlCol="0" anchor="ctr" wrap="square" lIns="101600" rIns="101600" tIns="38100" bIns="38100"/>
           <a:lstStyle/>
           <a:p>
             <a:pPr algn="ctr"/>
-          </a:p>
-        </p:txBody>
-      </p:sp>
-      <p:sp>
-        <p:nvSpPr>
-          <p:cNvPr id="11" name="TextBox 10"/>
-          <p:cNvSpPr txBox="1"/>
-          <p:nvPr/>
-        </p:nvSpPr>
-        <p:spPr>
-          <a:xfrm>
-            <a:off x="1234440" y="3410712"/>
-            <a:ext cx="347472" cy="182880"/>
-          </a:xfrm>
-          <a:prstGeom prst="rect">
-            <a:avLst/>
-          </a:prstGeom>
-          <a:noFill/>
-        </p:spPr>
-        <p:txBody>
-          <a:bodyPr wrap="square">
-            <a:spAutoFit/>
-          </a:bodyPr>
-          <a:lstStyle/>
-          <a:p>
-            <a:pPr algn="ctr"/>
-            <a:r>
-              <a:rPr sz="1000" b="1">
-                <a:solidFill>
-                  <a:srgbClr val="FFFFFF"/>
-                </a:solidFill>
+            <a:r>
+              <a:rPr sz="1900" b="1">
+                <a:solidFill>
+                  <a:srgbClr val="111827"/>
+                </a:solidFill>
+                <a:latin typeface="Arial"/>
               </a:rPr>
-              <a:t>1</a:t>
-            </a:r>
-          </a:p>
-        </p:txBody>
-      </p:sp>
-      <p:sp>
-        <p:nvSpPr>
-          <p:cNvPr id="12" name="TextBox 11"/>
-          <p:cNvSpPr txBox="1"/>
-          <p:nvPr/>
-        </p:nvSpPr>
-        <p:spPr>
-          <a:xfrm>
-            <a:off x="1783080" y="3364991"/>
-            <a:ext cx="9006840" cy="347472"/>
-          </a:xfrm>
-          <a:prstGeom prst="rect">
-            <a:avLst/>
-          </a:prstGeom>
-          <a:noFill/>
-        </p:spPr>
-        <p:txBody>
-          <a:bodyPr wrap="square">
-            <a:spAutoFit/>
-          </a:bodyPr>
-          <a:lstStyle/>
-          <a:p>
-            <a:r>
-              <a:rPr sz="1700" b="0">
-                <a:solidFill>
-                  <a:srgbClr val="1A202C"/>
-                </a:solidFill>
-              </a:rPr>
-              <a:t>Pair: compare your first answer with a partner.</a:t>
-            </a:r>
-          </a:p>
-        </p:txBody>
-      </p:sp>
-      <p:sp>
-        <p:nvSpPr>
-          <p:cNvPr id="13" name="Rounded Rectangle 12"/>
+              <a:t>Think: Which experiment did you find most challenging?</a:t>
+            </a:r>
+          </a:p>
+        </p:txBody>
+      </p:sp>
+      <p:sp>
+        <p:nvSpPr>
+          <p:cNvPr id="10" name="Rectangle 9"/>
           <p:cNvSpPr/>
           <p:nvPr/>
         </p:nvSpPr>
         <p:spPr>
           <a:xfrm>
-            <a:off x="1005840" y="4178808"/>
-            <a:ext cx="10149840" cy="731520"/>
-          </a:xfrm>
-          <a:prstGeom prst="roundRect">
-            <a:avLst/>
-          </a:prstGeom>
-          <a:solidFill>
-            <a:srgbClr val="F8FAFC"/>
-          </a:solidFill>
-          <a:ln w="15240">
+            <a:off x="868680" y="2971800"/>
+            <a:ext cx="10378440" cy="713232"/>
+          </a:xfrm>
+          <a:prstGeom prst="rect">
+            <a:avLst/>
+          </a:prstGeom>
+          <a:solidFill>
+            <a:srgbClr val="FFFFFF"/>
+          </a:solidFill>
+          <a:ln w="11430">
             <a:solidFill>
               <a:srgbClr val="CBD5E1"/>
             </a:solidFill>
@@ -4539,16 +4845,16 @@
       </p:sp>
       <p:sp>
         <p:nvSpPr>
-          <p:cNvPr id="14" name="Oval 13"/>
+          <p:cNvPr id="11" name="Rectangle 10"/>
           <p:cNvSpPr/>
           <p:nvPr/>
         </p:nvSpPr>
         <p:spPr>
           <a:xfrm>
-            <a:off x="1234440" y="4297680"/>
-            <a:ext cx="347472" cy="347472"/>
-          </a:xfrm>
-          <a:prstGeom prst="ellipse">
+            <a:off x="868680" y="2971800"/>
+            <a:ext cx="530352" cy="713232"/>
+          </a:xfrm>
+          <a:prstGeom prst="rect">
             <a:avLst/>
           </a:prstGeom>
           <a:solidFill>
@@ -4573,10 +4879,150 @@
           </a:fontRef>
         </p:style>
         <p:txBody>
+          <a:bodyPr rtlCol="0" anchor="ctr" wrap="square" lIns="101600" rIns="101600" tIns="38100" bIns="38100"/>
+          <a:lstStyle/>
+          <a:p>
+            <a:pPr algn="ctr"/>
+            <a:r>
+              <a:rPr sz="1500" b="1">
+                <a:solidFill>
+                  <a:srgbClr val="FFFFFF"/>
+                </a:solidFill>
+                <a:latin typeface="Arial"/>
+              </a:rPr>
+              <a:t>1</a:t>
+            </a:r>
+          </a:p>
+        </p:txBody>
+      </p:sp>
+      <p:sp>
+        <p:nvSpPr>
+          <p:cNvPr id="12" name="TextBox 11"/>
+          <p:cNvSpPr txBox="1"/>
+          <p:nvPr/>
+        </p:nvSpPr>
+        <p:spPr>
+          <a:xfrm>
+            <a:off x="1572768" y="3118104"/>
+            <a:ext cx="9372600" cy="384048"/>
+          </a:xfrm>
+          <a:prstGeom prst="rect">
+            <a:avLst/>
+          </a:prstGeom>
+          <a:noFill/>
+        </p:spPr>
+        <p:txBody>
+          <a:bodyPr wrap="square" lIns="0" rIns="0" tIns="0" bIns="0">
+            <a:spAutoFit/>
+          </a:bodyPr>
+          <a:lstStyle/>
+          <a:p>
+            <a:r>
+              <a:rPr sz="1500" b="0">
+                <a:solidFill>
+                  <a:srgbClr val="111827"/>
+                </a:solidFill>
+                <a:latin typeface="Arial"/>
+              </a:rPr>
+              <a:t>Pair: compare your first answer with a partner.</a:t>
+            </a:r>
+          </a:p>
+        </p:txBody>
+      </p:sp>
+      <p:sp>
+        <p:nvSpPr>
+          <p:cNvPr id="13" name="Rectangle 12"/>
+          <p:cNvSpPr/>
+          <p:nvPr/>
+        </p:nvSpPr>
+        <p:spPr>
+          <a:xfrm>
+            <a:off x="868680" y="3822191"/>
+            <a:ext cx="10378440" cy="713232"/>
+          </a:xfrm>
+          <a:prstGeom prst="rect">
+            <a:avLst/>
+          </a:prstGeom>
+          <a:solidFill>
+            <a:srgbClr val="FFFFFF"/>
+          </a:solidFill>
+          <a:ln w="11430">
+            <a:solidFill>
+              <a:srgbClr val="CBD5E1"/>
+            </a:solidFill>
+          </a:ln>
+        </p:spPr>
+        <p:style>
+          <a:lnRef idx="1">
+            <a:schemeClr val="accent1"/>
+          </a:lnRef>
+          <a:fillRef idx="3">
+            <a:schemeClr val="accent1"/>
+          </a:fillRef>
+          <a:effectRef idx="2">
+            <a:schemeClr val="accent1"/>
+          </a:effectRef>
+          <a:fontRef idx="minor">
+            <a:schemeClr val="lt1"/>
+          </a:fontRef>
+        </p:style>
+        <p:txBody>
           <a:bodyPr rtlCol="0" anchor="ctr"/>
           <a:lstStyle/>
           <a:p>
             <a:pPr algn="ctr"/>
+          </a:p>
+        </p:txBody>
+      </p:sp>
+      <p:sp>
+        <p:nvSpPr>
+          <p:cNvPr id="14" name="Rectangle 13"/>
+          <p:cNvSpPr/>
+          <p:nvPr/>
+        </p:nvSpPr>
+        <p:spPr>
+          <a:xfrm>
+            <a:off x="868680" y="3822191"/>
+            <a:ext cx="530352" cy="713232"/>
+          </a:xfrm>
+          <a:prstGeom prst="rect">
+            <a:avLst/>
+          </a:prstGeom>
+          <a:solidFill>
+            <a:srgbClr val="7C3AED"/>
+          </a:solidFill>
+          <a:ln>
+            <a:noFill/>
+          </a:ln>
+        </p:spPr>
+        <p:style>
+          <a:lnRef idx="1">
+            <a:schemeClr val="accent1"/>
+          </a:lnRef>
+          <a:fillRef idx="3">
+            <a:schemeClr val="accent1"/>
+          </a:fillRef>
+          <a:effectRef idx="2">
+            <a:schemeClr val="accent1"/>
+          </a:effectRef>
+          <a:fontRef idx="minor">
+            <a:schemeClr val="lt1"/>
+          </a:fontRef>
+        </p:style>
+        <p:txBody>
+          <a:bodyPr rtlCol="0" anchor="ctr" wrap="square" lIns="101600" rIns="101600" tIns="38100" bIns="38100"/>
+          <a:lstStyle/>
+          <a:p>
+            <a:pPr algn="ctr"/>
+            <a:r>
+              <a:rPr sz="1500" b="1">
+                <a:solidFill>
+                  <a:srgbClr val="FFFFFF"/>
+                </a:solidFill>
+                <a:latin typeface="Arial"/>
+              </a:rPr>
+              <a:t>2</a:t>
+            </a:r>
           </a:p>
         </p:txBody>
       </p:sp>
@@ -4588,8 +5034,8 @@
         </p:nvSpPr>
         <p:spPr>
           <a:xfrm>
-            <a:off x="1234440" y="4343400"/>
-            <a:ext cx="347472" cy="182880"/>
+            <a:off x="1572768" y="3968496"/>
+            <a:ext cx="9372600" cy="384048"/>
           </a:xfrm>
           <a:prstGeom prst="rect">
             <a:avLst/>
@@ -4597,33 +5043,130 @@
           <a:noFill/>
         </p:spPr>
         <p:txBody>
-          <a:bodyPr wrap="square">
+          <a:bodyPr wrap="square" lIns="0" rIns="0" tIns="0" bIns="0">
             <a:spAutoFit/>
           </a:bodyPr>
           <a:lstStyle/>
           <a:p>
+            <a:r>
+              <a:rPr sz="1500" b="0">
+                <a:solidFill>
+                  <a:srgbClr val="111827"/>
+                </a:solidFill>
+                <a:latin typeface="Arial"/>
+              </a:rPr>
+              <a:t>Share: connect your answer to Looking Back at Our Experiments.</a:t>
+            </a:r>
+          </a:p>
+        </p:txBody>
+      </p:sp>
+      <p:sp>
+        <p:nvSpPr>
+          <p:cNvPr id="16" name="Rectangle 15"/>
+          <p:cNvSpPr/>
+          <p:nvPr/>
+        </p:nvSpPr>
+        <p:spPr>
+          <a:xfrm>
+            <a:off x="868680" y="4672584"/>
+            <a:ext cx="10378440" cy="713232"/>
+          </a:xfrm>
+          <a:prstGeom prst="rect">
+            <a:avLst/>
+          </a:prstGeom>
+          <a:solidFill>
+            <a:srgbClr val="FFFFFF"/>
+          </a:solidFill>
+          <a:ln w="11430">
+            <a:solidFill>
+              <a:srgbClr val="CBD5E1"/>
+            </a:solidFill>
+          </a:ln>
+        </p:spPr>
+        <p:style>
+          <a:lnRef idx="1">
+            <a:schemeClr val="accent1"/>
+          </a:lnRef>
+          <a:fillRef idx="3">
+            <a:schemeClr val="accent1"/>
+          </a:fillRef>
+          <a:effectRef idx="2">
+            <a:schemeClr val="accent1"/>
+          </a:effectRef>
+          <a:fontRef idx="minor">
+            <a:schemeClr val="lt1"/>
+          </a:fontRef>
+        </p:style>
+        <p:txBody>
+          <a:bodyPr rtlCol="0" anchor="ctr"/>
+          <a:lstStyle/>
+          <a:p>
             <a:pPr algn="ctr"/>
-            <a:r>
-              <a:rPr sz="1000" b="1">
+          </a:p>
+        </p:txBody>
+      </p:sp>
+      <p:sp>
+        <p:nvSpPr>
+          <p:cNvPr id="17" name="Rectangle 16"/>
+          <p:cNvSpPr/>
+          <p:nvPr/>
+        </p:nvSpPr>
+        <p:spPr>
+          <a:xfrm>
+            <a:off x="868680" y="4672584"/>
+            <a:ext cx="530352" cy="713232"/>
+          </a:xfrm>
+          <a:prstGeom prst="rect">
+            <a:avLst/>
+          </a:prstGeom>
+          <a:solidFill>
+            <a:srgbClr val="7C3AED"/>
+          </a:solidFill>
+          <a:ln>
+            <a:noFill/>
+          </a:ln>
+        </p:spPr>
+        <p:style>
+          <a:lnRef idx="1">
+            <a:schemeClr val="accent1"/>
+          </a:lnRef>
+          <a:fillRef idx="3">
+            <a:schemeClr val="accent1"/>
+          </a:fillRef>
+          <a:effectRef idx="2">
+            <a:schemeClr val="accent1"/>
+          </a:effectRef>
+          <a:fontRef idx="minor">
+            <a:schemeClr val="lt1"/>
+          </a:fontRef>
+        </p:style>
+        <p:txBody>
+          <a:bodyPr rtlCol="0" anchor="ctr" wrap="square" lIns="101600" rIns="101600" tIns="38100" bIns="38100"/>
+          <a:lstStyle/>
+          <a:p>
+            <a:pPr algn="ctr"/>
+            <a:r>
+              <a:rPr sz="1500" b="1">
                 <a:solidFill>
                   <a:srgbClr val="FFFFFF"/>
                 </a:solidFill>
+                <a:latin typeface="Arial"/>
               </a:rPr>
-              <a:t>2</a:t>
-            </a:r>
-          </a:p>
-        </p:txBody>
-      </p:sp>
-      <p:sp>
-        <p:nvSpPr>
-          <p:cNvPr id="16" name="TextBox 15"/>
+              <a:t>3</a:t>
+            </a:r>
+          </a:p>
+        </p:txBody>
+      </p:sp>
+      <p:sp>
+        <p:nvSpPr>
+          <p:cNvPr id="18" name="TextBox 17"/>
           <p:cNvSpPr txBox="1"/>
           <p:nvPr/>
         </p:nvSpPr>
         <p:spPr>
           <a:xfrm>
-            <a:off x="1783080" y="4297680"/>
-            <a:ext cx="9006840" cy="347472"/>
+            <a:off x="1572768" y="4818888"/>
+            <a:ext cx="9372600" cy="384048"/>
           </a:xfrm>
           <a:prstGeom prst="rect">
             <a:avLst/>
@@ -4631,32 +5174,130 @@
           <a:noFill/>
         </p:spPr>
         <p:txBody>
-          <a:bodyPr wrap="square">
+          <a:bodyPr wrap="square" lIns="0" rIns="0" tIns="0" bIns="0">
             <a:spAutoFit/>
           </a:bodyPr>
           <a:lstStyle/>
           <a:p>
             <a:r>
-              <a:rPr sz="1700" b="0">
-                <a:solidFill>
-                  <a:srgbClr val="1A202C"/>
-                </a:solidFill>
+              <a:rPr sz="1500" b="0">
+                <a:solidFill>
+                  <a:srgbClr val="111827"/>
+                </a:solidFill>
+                <a:latin typeface="Arial"/>
               </a:rPr>
-              <a:t>Share: connect your answer to Looking Back at Our Experiments.</a:t>
-            </a:r>
-          </a:p>
-        </p:txBody>
-      </p:sp>
-      <p:sp>
-        <p:nvSpPr>
-          <p:cNvPr id="17" name="TextBox 16"/>
+              <a:t>Write one clear response.</a:t>
+            </a:r>
+          </a:p>
+        </p:txBody>
+      </p:sp>
+      <p:sp>
+        <p:nvSpPr>
+          <p:cNvPr id="19" name="Rectangle 18"/>
+          <p:cNvSpPr/>
+          <p:nvPr/>
+        </p:nvSpPr>
+        <p:spPr>
+          <a:xfrm>
+            <a:off x="868680" y="5522976"/>
+            <a:ext cx="10378440" cy="713232"/>
+          </a:xfrm>
+          <a:prstGeom prst="rect">
+            <a:avLst/>
+          </a:prstGeom>
+          <a:solidFill>
+            <a:srgbClr val="FFFFFF"/>
+          </a:solidFill>
+          <a:ln w="11430">
+            <a:solidFill>
+              <a:srgbClr val="CBD5E1"/>
+            </a:solidFill>
+          </a:ln>
+        </p:spPr>
+        <p:style>
+          <a:lnRef idx="1">
+            <a:schemeClr val="accent1"/>
+          </a:lnRef>
+          <a:fillRef idx="3">
+            <a:schemeClr val="accent1"/>
+          </a:fillRef>
+          <a:effectRef idx="2">
+            <a:schemeClr val="accent1"/>
+          </a:effectRef>
+          <a:fontRef idx="minor">
+            <a:schemeClr val="lt1"/>
+          </a:fontRef>
+        </p:style>
+        <p:txBody>
+          <a:bodyPr rtlCol="0" anchor="ctr"/>
+          <a:lstStyle/>
+          <a:p>
+            <a:pPr algn="ctr"/>
+          </a:p>
+        </p:txBody>
+      </p:sp>
+      <p:sp>
+        <p:nvSpPr>
+          <p:cNvPr id="20" name="Rectangle 19"/>
+          <p:cNvSpPr/>
+          <p:nvPr/>
+        </p:nvSpPr>
+        <p:spPr>
+          <a:xfrm>
+            <a:off x="868680" y="5522976"/>
+            <a:ext cx="530352" cy="713232"/>
+          </a:xfrm>
+          <a:prstGeom prst="rect">
+            <a:avLst/>
+          </a:prstGeom>
+          <a:solidFill>
+            <a:srgbClr val="7C3AED"/>
+          </a:solidFill>
+          <a:ln>
+            <a:noFill/>
+          </a:ln>
+        </p:spPr>
+        <p:style>
+          <a:lnRef idx="1">
+            <a:schemeClr val="accent1"/>
+          </a:lnRef>
+          <a:fillRef idx="3">
+            <a:schemeClr val="accent1"/>
+          </a:fillRef>
+          <a:effectRef idx="2">
+            <a:schemeClr val="accent1"/>
+          </a:effectRef>
+          <a:fontRef idx="minor">
+            <a:schemeClr val="lt1"/>
+          </a:fontRef>
+        </p:style>
+        <p:txBody>
+          <a:bodyPr rtlCol="0" anchor="ctr" wrap="square" lIns="101600" rIns="101600" tIns="38100" bIns="38100"/>
+          <a:lstStyle/>
+          <a:p>
+            <a:pPr algn="ctr"/>
+            <a:r>
+              <a:rPr sz="1500" b="1">
+                <a:solidFill>
+                  <a:srgbClr val="FFFFFF"/>
+                </a:solidFill>
+                <a:latin typeface="Arial"/>
+              </a:rPr>
+              <a:t>4</a:t>
+            </a:r>
+          </a:p>
+        </p:txBody>
+      </p:sp>
+      <p:sp>
+        <p:nvSpPr>
+          <p:cNvPr id="21" name="TextBox 20"/>
           <p:cNvSpPr txBox="1"/>
           <p:nvPr/>
         </p:nvSpPr>
         <p:spPr>
           <a:xfrm>
-            <a:off x="777240" y="6419088"/>
-            <a:ext cx="10835640" cy="228600"/>
+            <a:off x="1572768" y="5669280"/>
+            <a:ext cx="9372600" cy="384048"/>
           </a:xfrm>
           <a:prstGeom prst="rect">
             <a:avLst/>
@@ -4664,17 +5305,52 @@
           <a:noFill/>
         </p:spPr>
         <p:txBody>
-          <a:bodyPr wrap="square">
+          <a:bodyPr wrap="square" lIns="0" rIns="0" tIns="0" bIns="0">
             <a:spAutoFit/>
           </a:bodyPr>
           <a:lstStyle/>
           <a:p>
+            <a:r>
+              <a:rPr sz="1500" b="0">
+                <a:solidFill>
+                  <a:srgbClr val="111827"/>
+                </a:solidFill>
+                <a:latin typeface="Arial"/>
+              </a:rPr>
+              <a:t>Write one clear response.</a:t>
+            </a:r>
+          </a:p>
+        </p:txBody>
+      </p:sp>
+      <p:sp>
+        <p:nvSpPr>
+          <p:cNvPr id="22" name="TextBox 21"/>
+          <p:cNvSpPr txBox="1"/>
+          <p:nvPr/>
+        </p:nvSpPr>
+        <p:spPr>
+          <a:xfrm>
+            <a:off x="685800" y="6419088"/>
+            <a:ext cx="10835640" cy="228600"/>
+          </a:xfrm>
+          <a:prstGeom prst="rect">
+            <a:avLst/>
+          </a:prstGeom>
+          <a:noFill/>
+        </p:spPr>
+        <p:txBody>
+          <a:bodyPr wrap="square" lIns="0" rIns="0" tIns="0" bIns="0">
+            <a:spAutoFit/>
+          </a:bodyPr>
+          <a:lstStyle/>
+          <a:p>
             <a:pPr algn="r"/>
             <a:r>
               <a:rPr sz="1000" b="0">
                 <a:solidFill>
-                  <a:srgbClr val="5B677D"/>
-                </a:solidFill>
+                  <a:srgbClr val="475569"/>
+                </a:solidFill>
+                <a:latin typeface="Arial"/>
               </a:rPr>
               <a:t>Listen • Talk • Try • Explain</a:t>
             </a:r>
@@ -4692,6 +5368,14 @@
 <file path=ppt/slides/slide4.xml><?xml version="1.0" encoding="utf-8"?>
 <p:sld xmlns:a="http://schemas.openxmlformats.org/drawingml/2006/main" xmlns:p="http://schemas.openxmlformats.org/presentationml/2006/main" xmlns:r="http://schemas.openxmlformats.org/officeDocument/2006/relationships">
   <p:cSld>
+    <p:bg>
+      <p:bgPr>
+        <a:solidFill>
+          <a:srgbClr val="F8FAFC"/>
+        </a:solidFill>
+        <a:effectLst/>
+      </p:bgPr>
+    </p:bg>
     <p:spTree>
       <p:nvGrpSpPr>
         <p:cNvPr id="1" name=""/>
@@ -4708,13 +5392,13 @@
         <p:spPr>
           <a:xfrm>
             <a:off x="0" y="0"/>
-            <a:ext cx="12191695" cy="914400"/>
-          </a:xfrm>
-          <a:prstGeom prst="rect">
-            <a:avLst/>
-          </a:prstGeom>
-          <a:solidFill>
-            <a:srgbClr val="0E7490"/>
+            <a:ext cx="12191695" cy="713232"/>
+          </a:xfrm>
+          <a:prstGeom prst="rect">
+            <a:avLst/>
+          </a:prstGeom>
+          <a:solidFill>
+            <a:srgbClr val="111827"/>
           </a:solidFill>
           <a:ln>
             <a:noFill/>
@@ -4750,14 +5434,14 @@
         </p:nvSpPr>
         <p:spPr>
           <a:xfrm>
-            <a:off x="0" y="914400"/>
-            <a:ext cx="164592" cy="5943600"/>
-          </a:xfrm>
-          <a:prstGeom prst="rect">
-            <a:avLst/>
-          </a:prstGeom>
-          <a:solidFill>
-            <a:srgbClr val="0E7490"/>
+            <a:off x="0" y="713232"/>
+            <a:ext cx="12191695" cy="82296"/>
+          </a:xfrm>
+          <a:prstGeom prst="rect">
+            <a:avLst/>
+          </a:prstGeom>
+          <a:solidFill>
+            <a:srgbClr val="FCD116"/>
           </a:solidFill>
           <a:ln>
             <a:noFill/>
@@ -4787,125 +5471,23 @@
       </p:sp>
       <p:sp>
         <p:nvSpPr>
-          <p:cNvPr id="4" name="TextBox 3"/>
-          <p:cNvSpPr txBox="1"/>
-          <p:nvPr/>
-        </p:nvSpPr>
-        <p:spPr>
-          <a:xfrm>
-            <a:off x="594360" y="246888"/>
-            <a:ext cx="2926080" cy="320040"/>
-          </a:xfrm>
-          <a:prstGeom prst="rect">
-            <a:avLst/>
-          </a:prstGeom>
-          <a:noFill/>
-        </p:spPr>
-        <p:txBody>
-          <a:bodyPr wrap="square">
-            <a:spAutoFit/>
-          </a:bodyPr>
-          <a:lstStyle/>
-          <a:p>
-            <a:r>
-              <a:rPr sz="1300" b="1">
-                <a:solidFill>
-                  <a:srgbClr val="FFFFFF"/>
-                </a:solidFill>
-              </a:rPr>
-              <a:t>4. CONCEPT</a:t>
-            </a:r>
-          </a:p>
-        </p:txBody>
-      </p:sp>
-      <p:sp>
-        <p:nvSpPr>
-          <p:cNvPr id="5" name="TextBox 4"/>
-          <p:cNvSpPr txBox="1"/>
-          <p:nvPr/>
-        </p:nvSpPr>
-        <p:spPr>
-          <a:xfrm>
-            <a:off x="7772400" y="246888"/>
-            <a:ext cx="3840480" cy="320040"/>
-          </a:xfrm>
-          <a:prstGeom prst="rect">
-            <a:avLst/>
-          </a:prstGeom>
-          <a:noFill/>
-        </p:spPr>
-        <p:txBody>
-          <a:bodyPr wrap="square">
-            <a:spAutoFit/>
-          </a:bodyPr>
-          <a:lstStyle/>
-          <a:p>
-            <a:pPr algn="r"/>
-            <a:r>
-              <a:rPr sz="1100" b="0">
-                <a:solidFill>
-                  <a:srgbClr val="FFFFFF"/>
-                </a:solidFill>
-              </a:rPr>
-              <a:t>p7_t1_integrated_science_1205</a:t>
-            </a:r>
-          </a:p>
-        </p:txBody>
-      </p:sp>
-      <p:sp>
-        <p:nvSpPr>
-          <p:cNvPr id="6" name="TextBox 5"/>
-          <p:cNvSpPr txBox="1"/>
-          <p:nvPr/>
-        </p:nvSpPr>
-        <p:spPr>
-          <a:xfrm>
-            <a:off x="640080" y="1143000"/>
-            <a:ext cx="10972800" cy="685800"/>
-          </a:xfrm>
-          <a:prstGeom prst="rect">
-            <a:avLst/>
-          </a:prstGeom>
-          <a:noFill/>
-        </p:spPr>
-        <p:txBody>
-          <a:bodyPr wrap="square">
-            <a:spAutoFit/>
-          </a:bodyPr>
-          <a:lstStyle/>
-          <a:p>
-            <a:r>
-              <a:rPr sz="2800" b="1">
-                <a:solidFill>
-                  <a:srgbClr val="1A202C"/>
-                </a:solidFill>
-              </a:rPr>
-              <a:t>Looking Back at Our Experiments</a:t>
-            </a:r>
-          </a:p>
-        </p:txBody>
-      </p:sp>
-      <p:sp>
-        <p:nvSpPr>
-          <p:cNvPr id="7" name="Rounded Rectangle 6"/>
+          <p:cNvPr id="4" name="Rectangle 3"/>
           <p:cNvSpPr/>
           <p:nvPr/>
         </p:nvSpPr>
         <p:spPr>
           <a:xfrm>
-            <a:off x="777240" y="1993392"/>
-            <a:ext cx="10835640" cy="1005840"/>
-          </a:xfrm>
-          <a:prstGeom prst="roundRect">
-            <a:avLst/>
-          </a:prstGeom>
-          <a:solidFill>
-            <a:srgbClr val="FFFBEB"/>
-          </a:solidFill>
-          <a:ln w="15240">
-            <a:solidFill>
-              <a:srgbClr val="0E7490"/>
-            </a:solidFill>
+            <a:off x="0" y="795528"/>
+            <a:ext cx="12191695" cy="64008"/>
+          </a:xfrm>
+          <a:prstGeom prst="rect">
+            <a:avLst/>
+          </a:prstGeom>
+          <a:solidFill>
+            <a:srgbClr val="D90000"/>
+          </a:solidFill>
+          <a:ln>
+            <a:noFill/>
           </a:ln>
         </p:spPr>
         <p:style>
@@ -4932,58 +5514,23 @@
       </p:sp>
       <p:sp>
         <p:nvSpPr>
-          <p:cNvPr id="8" name="TextBox 7"/>
-          <p:cNvSpPr txBox="1"/>
-          <p:nvPr/>
-        </p:nvSpPr>
-        <p:spPr>
-          <a:xfrm>
-            <a:off x="1051560" y="2212848"/>
-            <a:ext cx="10287000" cy="502920"/>
-          </a:xfrm>
-          <a:prstGeom prst="rect">
-            <a:avLst/>
-          </a:prstGeom>
-          <a:noFill/>
-        </p:spPr>
-        <p:txBody>
-          <a:bodyPr wrap="square">
-            <a:spAutoFit/>
-          </a:bodyPr>
-          <a:lstStyle/>
-          <a:p>
-            <a:r>
-              <a:rPr sz="2100" b="1">
-                <a:solidFill>
-                  <a:srgbClr val="1A202C"/>
-                </a:solidFill>
-              </a:rPr>
-              <a:t>Key idea: Prior knowledge activation regarding Term 1 Science practicals (Skeleton</a:t>
-            </a:r>
-          </a:p>
-        </p:txBody>
-      </p:sp>
-      <p:sp>
-        <p:nvSpPr>
-          <p:cNvPr id="9" name="Rounded Rectangle 8"/>
+          <p:cNvPr id="5" name="Rectangle 4"/>
           <p:cNvSpPr/>
           <p:nvPr/>
         </p:nvSpPr>
         <p:spPr>
           <a:xfrm>
-            <a:off x="1005840" y="3246120"/>
-            <a:ext cx="10149840" cy="621792"/>
-          </a:xfrm>
-          <a:prstGeom prst="roundRect">
-            <a:avLst/>
-          </a:prstGeom>
-          <a:solidFill>
-            <a:srgbClr val="F8FAFC"/>
-          </a:solidFill>
-          <a:ln w="15240">
-            <a:solidFill>
-              <a:srgbClr val="CBD5E1"/>
-            </a:solidFill>
+            <a:off x="0" y="859536"/>
+            <a:ext cx="164592" cy="5998464"/>
+          </a:xfrm>
+          <a:prstGeom prst="rect">
+            <a:avLst/>
+          </a:prstGeom>
+          <a:solidFill>
+            <a:srgbClr val="087490"/>
+          </a:solidFill>
+          <a:ln>
+            <a:noFill/>
           </a:ln>
         </p:spPr>
         <p:style>
@@ -5010,23 +5557,128 @@
       </p:sp>
       <p:sp>
         <p:nvSpPr>
-          <p:cNvPr id="10" name="Oval 9"/>
+          <p:cNvPr id="6" name="TextBox 5"/>
+          <p:cNvSpPr txBox="1"/>
+          <p:nvPr/>
+        </p:nvSpPr>
+        <p:spPr>
+          <a:xfrm>
+            <a:off x="502920" y="210312"/>
+            <a:ext cx="3200400" cy="256032"/>
+          </a:xfrm>
+          <a:prstGeom prst="rect">
+            <a:avLst/>
+          </a:prstGeom>
+          <a:noFill/>
+        </p:spPr>
+        <p:txBody>
+          <a:bodyPr wrap="square" lIns="0" rIns="0" tIns="0" bIns="0">
+            <a:spAutoFit/>
+          </a:bodyPr>
+          <a:lstStyle/>
+          <a:p>
+            <a:r>
+              <a:rPr sz="1200" b="1">
+                <a:solidFill>
+                  <a:srgbClr val="FFFFFF"/>
+                </a:solidFill>
+                <a:latin typeface="Arial"/>
+              </a:rPr>
+              <a:t>4. CONCEPT</a:t>
+            </a:r>
+          </a:p>
+        </p:txBody>
+      </p:sp>
+      <p:sp>
+        <p:nvSpPr>
+          <p:cNvPr id="7" name="TextBox 6"/>
+          <p:cNvSpPr txBox="1"/>
+          <p:nvPr/>
+        </p:nvSpPr>
+        <p:spPr>
+          <a:xfrm>
+            <a:off x="7589520" y="210312"/>
+            <a:ext cx="4069080" cy="256032"/>
+          </a:xfrm>
+          <a:prstGeom prst="rect">
+            <a:avLst/>
+          </a:prstGeom>
+          <a:noFill/>
+        </p:spPr>
+        <p:txBody>
+          <a:bodyPr wrap="square" lIns="0" rIns="0" tIns="0" bIns="0">
+            <a:spAutoFit/>
+          </a:bodyPr>
+          <a:lstStyle/>
+          <a:p>
+            <a:pPr algn="r"/>
+            <a:r>
+              <a:rPr sz="1000" b="0">
+                <a:solidFill>
+                  <a:srgbClr val="FFFFFF"/>
+                </a:solidFill>
+                <a:latin typeface="Arial"/>
+              </a:rPr>
+              <a:t>p7_t1_integrated_science_1205</a:t>
+            </a:r>
+          </a:p>
+        </p:txBody>
+      </p:sp>
+      <p:sp>
+        <p:nvSpPr>
+          <p:cNvPr id="8" name="TextBox 7"/>
+          <p:cNvSpPr txBox="1"/>
+          <p:nvPr/>
+        </p:nvSpPr>
+        <p:spPr>
+          <a:xfrm>
+            <a:off x="594360" y="1042415"/>
+            <a:ext cx="11109960" cy="566928"/>
+          </a:xfrm>
+          <a:prstGeom prst="rect">
+            <a:avLst/>
+          </a:prstGeom>
+          <a:noFill/>
+        </p:spPr>
+        <p:txBody>
+          <a:bodyPr wrap="square" lIns="0" rIns="0" tIns="0" bIns="0">
+            <a:spAutoFit/>
+          </a:bodyPr>
+          <a:lstStyle/>
+          <a:p>
+            <a:r>
+              <a:rPr sz="2600" b="1">
+                <a:solidFill>
+                  <a:srgbClr val="111827"/>
+                </a:solidFill>
+                <a:latin typeface="Arial"/>
+              </a:rPr>
+              <a:t>Looking Back at Our Experiments</a:t>
+            </a:r>
+          </a:p>
+        </p:txBody>
+      </p:sp>
+      <p:sp>
+        <p:nvSpPr>
+          <p:cNvPr id="9" name="Rectangle 8"/>
           <p:cNvSpPr/>
           <p:nvPr/>
         </p:nvSpPr>
         <p:spPr>
           <a:xfrm>
-            <a:off x="1234440" y="3364991"/>
-            <a:ext cx="347472" cy="347472"/>
-          </a:xfrm>
-          <a:prstGeom prst="ellipse">
-            <a:avLst/>
-          </a:prstGeom>
-          <a:solidFill>
-            <a:srgbClr val="0E7490"/>
-          </a:solidFill>
-          <a:ln>
-            <a:noFill/>
+            <a:off x="685800" y="1874519"/>
+            <a:ext cx="10835640" cy="804672"/>
+          </a:xfrm>
+          <a:prstGeom prst="rect">
+            <a:avLst/>
+          </a:prstGeom>
+          <a:solidFill>
+            <a:srgbClr val="FFF7E0"/>
+          </a:solidFill>
+          <a:ln w="17780">
+            <a:solidFill>
+              <a:srgbClr val="087490"/>
+            </a:solidFill>
           </a:ln>
         </p:spPr>
         <p:style>
@@ -5044,98 +5696,40 @@
           </a:fontRef>
         </p:style>
         <p:txBody>
-          <a:bodyPr rtlCol="0" anchor="ctr"/>
+          <a:bodyPr rtlCol="0" anchor="ctr" wrap="square" lIns="101600" rIns="101600" tIns="38100" bIns="38100"/>
           <a:lstStyle/>
           <a:p>
             <a:pPr algn="ctr"/>
-          </a:p>
-        </p:txBody>
-      </p:sp>
-      <p:sp>
-        <p:nvSpPr>
-          <p:cNvPr id="11" name="TextBox 10"/>
-          <p:cNvSpPr txBox="1"/>
-          <p:nvPr/>
-        </p:nvSpPr>
-        <p:spPr>
-          <a:xfrm>
-            <a:off x="1234440" y="3410712"/>
-            <a:ext cx="347472" cy="182880"/>
-          </a:xfrm>
-          <a:prstGeom prst="rect">
-            <a:avLst/>
-          </a:prstGeom>
-          <a:noFill/>
-        </p:spPr>
-        <p:txBody>
-          <a:bodyPr wrap="square">
-            <a:spAutoFit/>
-          </a:bodyPr>
-          <a:lstStyle/>
-          <a:p>
-            <a:pPr algn="ctr"/>
-            <a:r>
-              <a:rPr sz="1000" b="1">
-                <a:solidFill>
-                  <a:srgbClr val="FFFFFF"/>
-                </a:solidFill>
+            <a:r>
+              <a:rPr sz="1900" b="1">
+                <a:solidFill>
+                  <a:srgbClr val="111827"/>
+                </a:solidFill>
+                <a:latin typeface="Arial"/>
               </a:rPr>
-              <a:t>1</a:t>
-            </a:r>
-          </a:p>
-        </p:txBody>
-      </p:sp>
-      <p:sp>
-        <p:nvSpPr>
-          <p:cNvPr id="12" name="TextBox 11"/>
-          <p:cNvSpPr txBox="1"/>
-          <p:nvPr/>
-        </p:nvSpPr>
-        <p:spPr>
-          <a:xfrm>
-            <a:off x="1783080" y="3364991"/>
-            <a:ext cx="9006840" cy="347472"/>
-          </a:xfrm>
-          <a:prstGeom prst="rect">
-            <a:avLst/>
-          </a:prstGeom>
-          <a:noFill/>
-        </p:spPr>
-        <p:txBody>
-          <a:bodyPr wrap="square">
-            <a:spAutoFit/>
-          </a:bodyPr>
-          <a:lstStyle/>
-          <a:p>
-            <a:r>
-              <a:rPr sz="1700" b="0">
-                <a:solidFill>
-                  <a:srgbClr val="1A202C"/>
-                </a:solidFill>
-              </a:rPr>
-              <a:t>models, electricity circuits, and energy resources).</a:t>
-            </a:r>
-          </a:p>
-        </p:txBody>
-      </p:sp>
-      <p:sp>
-        <p:nvSpPr>
-          <p:cNvPr id="13" name="Rounded Rectangle 12"/>
+              <a:t>Key idea: Prior knowledge activation regarding Term 1 Science pra...</a:t>
+            </a:r>
+          </a:p>
+        </p:txBody>
+      </p:sp>
+      <p:sp>
+        <p:nvSpPr>
+          <p:cNvPr id="10" name="Rectangle 9"/>
           <p:cNvSpPr/>
           <p:nvPr/>
         </p:nvSpPr>
         <p:spPr>
           <a:xfrm>
-            <a:off x="1005840" y="4069080"/>
-            <a:ext cx="10149840" cy="621792"/>
-          </a:xfrm>
-          <a:prstGeom prst="roundRect">
-            <a:avLst/>
-          </a:prstGeom>
-          <a:solidFill>
-            <a:srgbClr val="F8FAFC"/>
-          </a:solidFill>
-          <a:ln w="15240">
+            <a:off x="868680" y="2971800"/>
+            <a:ext cx="10378440" cy="713232"/>
+          </a:xfrm>
+          <a:prstGeom prst="rect">
+            <a:avLst/>
+          </a:prstGeom>
+          <a:solidFill>
+            <a:srgbClr val="FFFFFF"/>
+          </a:solidFill>
+          <a:ln w="11430">
             <a:solidFill>
               <a:srgbClr val="CBD5E1"/>
             </a:solidFill>
@@ -5165,20 +5759,20 @@
       </p:sp>
       <p:sp>
         <p:nvSpPr>
-          <p:cNvPr id="14" name="Oval 13"/>
+          <p:cNvPr id="11" name="Rectangle 10"/>
           <p:cNvSpPr/>
           <p:nvPr/>
         </p:nvSpPr>
         <p:spPr>
           <a:xfrm>
-            <a:off x="1234440" y="4187952"/>
-            <a:ext cx="347472" cy="347472"/>
-          </a:xfrm>
-          <a:prstGeom prst="ellipse">
-            <a:avLst/>
-          </a:prstGeom>
-          <a:solidFill>
-            <a:srgbClr val="0E7490"/>
+            <a:off x="868680" y="2971800"/>
+            <a:ext cx="530352" cy="713232"/>
+          </a:xfrm>
+          <a:prstGeom prst="rect">
+            <a:avLst/>
+          </a:prstGeom>
+          <a:solidFill>
+            <a:srgbClr val="087490"/>
           </a:solidFill>
           <a:ln>
             <a:noFill/>
@@ -5199,23 +5793,32 @@
           </a:fontRef>
         </p:style>
         <p:txBody>
-          <a:bodyPr rtlCol="0" anchor="ctr"/>
+          <a:bodyPr rtlCol="0" anchor="ctr" wrap="square" lIns="101600" rIns="101600" tIns="38100" bIns="38100"/>
           <a:lstStyle/>
           <a:p>
             <a:pPr algn="ctr"/>
-          </a:p>
-        </p:txBody>
-      </p:sp>
-      <p:sp>
-        <p:nvSpPr>
-          <p:cNvPr id="15" name="TextBox 14"/>
+            <a:r>
+              <a:rPr sz="1500" b="1">
+                <a:solidFill>
+                  <a:srgbClr val="FFFFFF"/>
+                </a:solidFill>
+                <a:latin typeface="Arial"/>
+              </a:rPr>
+              <a:t>1</a:t>
+            </a:r>
+          </a:p>
+        </p:txBody>
+      </p:sp>
+      <p:sp>
+        <p:nvSpPr>
+          <p:cNvPr id="12" name="TextBox 11"/>
           <p:cNvSpPr txBox="1"/>
           <p:nvPr/>
         </p:nvSpPr>
         <p:spPr>
           <a:xfrm>
-            <a:off x="1234440" y="4233672"/>
-            <a:ext cx="347472" cy="182880"/>
+            <a:off x="1572768" y="3118104"/>
+            <a:ext cx="9372600" cy="384048"/>
           </a:xfrm>
           <a:prstGeom prst="rect">
             <a:avLst/>
@@ -5223,50 +5826,17 @@
           <a:noFill/>
         </p:spPr>
         <p:txBody>
-          <a:bodyPr wrap="square">
+          <a:bodyPr wrap="square" lIns="0" rIns="0" tIns="0" bIns="0">
             <a:spAutoFit/>
           </a:bodyPr>
           <a:lstStyle/>
           <a:p>
-            <a:pPr algn="ctr"/>
-            <a:r>
-              <a:rPr sz="1000" b="1">
-                <a:solidFill>
-                  <a:srgbClr val="FFFFFF"/>
-                </a:solidFill>
-              </a:rPr>
-              <a:t>2</a:t>
-            </a:r>
-          </a:p>
-        </p:txBody>
-      </p:sp>
-      <p:sp>
-        <p:nvSpPr>
-          <p:cNvPr id="16" name="TextBox 15"/>
-          <p:cNvSpPr txBox="1"/>
-          <p:nvPr/>
-        </p:nvSpPr>
-        <p:spPr>
-          <a:xfrm>
-            <a:off x="1783080" y="4187952"/>
-            <a:ext cx="9006840" cy="347472"/>
-          </a:xfrm>
-          <a:prstGeom prst="rect">
-            <a:avLst/>
-          </a:prstGeom>
-          <a:noFill/>
-        </p:spPr>
-        <p:txBody>
-          <a:bodyPr wrap="square">
-            <a:spAutoFit/>
-          </a:bodyPr>
-          <a:lstStyle/>
-          <a:p>
-            <a:r>
-              <a:rPr sz="1700" b="0">
-                <a:solidFill>
-                  <a:srgbClr val="1A202C"/>
-                </a:solidFill>
+            <a:r>
+              <a:rPr sz="1500" b="0">
+                <a:solidFill>
+                  <a:srgbClr val="111827"/>
+                </a:solidFill>
+                <a:latin typeface="Arial"/>
               </a:rPr>
               <a:t>Reviewing the Muscular-Skeletal model.</a:t>
             </a:r>
@@ -5275,22 +5845,22 @@
       </p:sp>
       <p:sp>
         <p:nvSpPr>
-          <p:cNvPr id="17" name="Rounded Rectangle 16"/>
+          <p:cNvPr id="13" name="Rectangle 12"/>
           <p:cNvSpPr/>
           <p:nvPr/>
         </p:nvSpPr>
         <p:spPr>
           <a:xfrm>
-            <a:off x="1005840" y="4892040"/>
-            <a:ext cx="10149840" cy="621792"/>
-          </a:xfrm>
-          <a:prstGeom prst="roundRect">
-            <a:avLst/>
-          </a:prstGeom>
-          <a:solidFill>
-            <a:srgbClr val="F8FAFC"/>
-          </a:solidFill>
-          <a:ln w="15240">
+            <a:off x="868680" y="3822191"/>
+            <a:ext cx="10378440" cy="713232"/>
+          </a:xfrm>
+          <a:prstGeom prst="rect">
+            <a:avLst/>
+          </a:prstGeom>
+          <a:solidFill>
+            <a:srgbClr val="FFFFFF"/>
+          </a:solidFill>
+          <a:ln w="11430">
             <a:solidFill>
               <a:srgbClr val="CBD5E1"/>
             </a:solidFill>
@@ -5320,20 +5890,20 @@
       </p:sp>
       <p:sp>
         <p:nvSpPr>
-          <p:cNvPr id="18" name="Oval 17"/>
+          <p:cNvPr id="14" name="Rectangle 13"/>
           <p:cNvSpPr/>
           <p:nvPr/>
         </p:nvSpPr>
         <p:spPr>
           <a:xfrm>
-            <a:off x="1234440" y="5010912"/>
-            <a:ext cx="347472" cy="347472"/>
-          </a:xfrm>
-          <a:prstGeom prst="ellipse">
-            <a:avLst/>
-          </a:prstGeom>
-          <a:solidFill>
-            <a:srgbClr val="0E7490"/>
+            <a:off x="868680" y="3822191"/>
+            <a:ext cx="530352" cy="713232"/>
+          </a:xfrm>
+          <a:prstGeom prst="rect">
+            <a:avLst/>
+          </a:prstGeom>
+          <a:solidFill>
+            <a:srgbClr val="087490"/>
           </a:solidFill>
           <a:ln>
             <a:noFill/>
@@ -5354,23 +5924,32 @@
           </a:fontRef>
         </p:style>
         <p:txBody>
-          <a:bodyPr rtlCol="0" anchor="ctr"/>
+          <a:bodyPr rtlCol="0" anchor="ctr" wrap="square" lIns="101600" rIns="101600" tIns="38100" bIns="38100"/>
           <a:lstStyle/>
           <a:p>
             <a:pPr algn="ctr"/>
-          </a:p>
-        </p:txBody>
-      </p:sp>
-      <p:sp>
-        <p:nvSpPr>
-          <p:cNvPr id="19" name="TextBox 18"/>
+            <a:r>
+              <a:rPr sz="1500" b="1">
+                <a:solidFill>
+                  <a:srgbClr val="FFFFFF"/>
+                </a:solidFill>
+                <a:latin typeface="Arial"/>
+              </a:rPr>
+              <a:t>2</a:t>
+            </a:r>
+          </a:p>
+        </p:txBody>
+      </p:sp>
+      <p:sp>
+        <p:nvSpPr>
+          <p:cNvPr id="15" name="TextBox 14"/>
           <p:cNvSpPr txBox="1"/>
           <p:nvPr/>
         </p:nvSpPr>
         <p:spPr>
           <a:xfrm>
-            <a:off x="1234440" y="5056632"/>
-            <a:ext cx="347472" cy="182880"/>
+            <a:off x="1572768" y="3968496"/>
+            <a:ext cx="9372600" cy="384048"/>
           </a:xfrm>
           <a:prstGeom prst="rect">
             <a:avLst/>
@@ -5378,50 +5957,17 @@
           <a:noFill/>
         </p:spPr>
         <p:txBody>
-          <a:bodyPr wrap="square">
+          <a:bodyPr wrap="square" lIns="0" rIns="0" tIns="0" bIns="0">
             <a:spAutoFit/>
           </a:bodyPr>
           <a:lstStyle/>
           <a:p>
-            <a:pPr algn="ctr"/>
-            <a:r>
-              <a:rPr sz="1000" b="1">
-                <a:solidFill>
-                  <a:srgbClr val="FFFFFF"/>
-                </a:solidFill>
-              </a:rPr>
-              <a:t>3</a:t>
-            </a:r>
-          </a:p>
-        </p:txBody>
-      </p:sp>
-      <p:sp>
-        <p:nvSpPr>
-          <p:cNvPr id="20" name="TextBox 19"/>
-          <p:cNvSpPr txBox="1"/>
-          <p:nvPr/>
-        </p:nvSpPr>
-        <p:spPr>
-          <a:xfrm>
-            <a:off x="1783080" y="5010912"/>
-            <a:ext cx="9006840" cy="347472"/>
-          </a:xfrm>
-          <a:prstGeom prst="rect">
-            <a:avLst/>
-          </a:prstGeom>
-          <a:noFill/>
-        </p:spPr>
-        <p:txBody>
-          <a:bodyPr wrap="square">
-            <a:spAutoFit/>
-          </a:bodyPr>
-          <a:lstStyle/>
-          <a:p>
-            <a:r>
-              <a:rPr sz="1700" b="0">
-                <a:solidFill>
-                  <a:srgbClr val="1A202C"/>
-                </a:solidFill>
+            <a:r>
+              <a:rPr sz="1500" b="0">
+                <a:solidFill>
+                  <a:srgbClr val="111827"/>
+                </a:solidFill>
+                <a:latin typeface="Arial"/>
               </a:rPr>
               <a:t>Recalling the Electricity and Magnetism circuit.</a:t>
             </a:r>
@@ -5430,22 +5976,22 @@
       </p:sp>
       <p:sp>
         <p:nvSpPr>
-          <p:cNvPr id="21" name="Rounded Rectangle 20"/>
+          <p:cNvPr id="16" name="Rectangle 15"/>
           <p:cNvSpPr/>
           <p:nvPr/>
         </p:nvSpPr>
         <p:spPr>
           <a:xfrm>
-            <a:off x="1005840" y="5715000"/>
-            <a:ext cx="10149840" cy="621792"/>
-          </a:xfrm>
-          <a:prstGeom prst="roundRect">
-            <a:avLst/>
-          </a:prstGeom>
-          <a:solidFill>
-            <a:srgbClr val="F8FAFC"/>
-          </a:solidFill>
-          <a:ln w="15240">
+            <a:off x="868680" y="4672584"/>
+            <a:ext cx="10378440" cy="713232"/>
+          </a:xfrm>
+          <a:prstGeom prst="rect">
+            <a:avLst/>
+          </a:prstGeom>
+          <a:solidFill>
+            <a:srgbClr val="FFFFFF"/>
+          </a:solidFill>
+          <a:ln w="11430">
             <a:solidFill>
               <a:srgbClr val="CBD5E1"/>
             </a:solidFill>
@@ -5475,20 +6021,20 @@
       </p:sp>
       <p:sp>
         <p:nvSpPr>
-          <p:cNvPr id="22" name="Oval 21"/>
+          <p:cNvPr id="17" name="Rectangle 16"/>
           <p:cNvSpPr/>
           <p:nvPr/>
         </p:nvSpPr>
         <p:spPr>
           <a:xfrm>
-            <a:off x="1234440" y="5833872"/>
-            <a:ext cx="347472" cy="347472"/>
-          </a:xfrm>
-          <a:prstGeom prst="ellipse">
-            <a:avLst/>
-          </a:prstGeom>
-          <a:solidFill>
-            <a:srgbClr val="0E7490"/>
+            <a:off x="868680" y="4672584"/>
+            <a:ext cx="530352" cy="713232"/>
+          </a:xfrm>
+          <a:prstGeom prst="rect">
+            <a:avLst/>
+          </a:prstGeom>
+          <a:solidFill>
+            <a:srgbClr val="087490"/>
           </a:solidFill>
           <a:ln>
             <a:noFill/>
@@ -5509,23 +6055,32 @@
           </a:fontRef>
         </p:style>
         <p:txBody>
-          <a:bodyPr rtlCol="0" anchor="ctr"/>
+          <a:bodyPr rtlCol="0" anchor="ctr" wrap="square" lIns="101600" rIns="101600" tIns="38100" bIns="38100"/>
           <a:lstStyle/>
           <a:p>
             <a:pPr algn="ctr"/>
-          </a:p>
-        </p:txBody>
-      </p:sp>
-      <p:sp>
-        <p:nvSpPr>
-          <p:cNvPr id="23" name="TextBox 22"/>
+            <a:r>
+              <a:rPr sz="1500" b="1">
+                <a:solidFill>
+                  <a:srgbClr val="FFFFFF"/>
+                </a:solidFill>
+                <a:latin typeface="Arial"/>
+              </a:rPr>
+              <a:t>3</a:t>
+            </a:r>
+          </a:p>
+        </p:txBody>
+      </p:sp>
+      <p:sp>
+        <p:nvSpPr>
+          <p:cNvPr id="18" name="TextBox 17"/>
           <p:cNvSpPr txBox="1"/>
           <p:nvPr/>
         </p:nvSpPr>
         <p:spPr>
           <a:xfrm>
-            <a:off x="1234440" y="5879592"/>
-            <a:ext cx="347472" cy="182880"/>
+            <a:off x="1572768" y="4818888"/>
+            <a:ext cx="9372600" cy="384048"/>
           </a:xfrm>
           <a:prstGeom prst="rect">
             <a:avLst/>
@@ -5533,17 +6088,114 @@
           <a:noFill/>
         </p:spPr>
         <p:txBody>
-          <a:bodyPr wrap="square">
+          <a:bodyPr wrap="square" lIns="0" rIns="0" tIns="0" bIns="0">
             <a:spAutoFit/>
           </a:bodyPr>
           <a:lstStyle/>
           <a:p>
+            <a:r>
+              <a:rPr sz="1500" b="0">
+                <a:solidFill>
+                  <a:srgbClr val="111827"/>
+                </a:solidFill>
+                <a:latin typeface="Arial"/>
+              </a:rPr>
+              <a:t>Remembering the Energy Resources (biogas/solar) project.</a:t>
+            </a:r>
+          </a:p>
+        </p:txBody>
+      </p:sp>
+      <p:sp>
+        <p:nvSpPr>
+          <p:cNvPr id="19" name="Rectangle 18"/>
+          <p:cNvSpPr/>
+          <p:nvPr/>
+        </p:nvSpPr>
+        <p:spPr>
+          <a:xfrm>
+            <a:off x="868680" y="5522976"/>
+            <a:ext cx="10378440" cy="713232"/>
+          </a:xfrm>
+          <a:prstGeom prst="rect">
+            <a:avLst/>
+          </a:prstGeom>
+          <a:solidFill>
+            <a:srgbClr val="FFFFFF"/>
+          </a:solidFill>
+          <a:ln w="11430">
+            <a:solidFill>
+              <a:srgbClr val="CBD5E1"/>
+            </a:solidFill>
+          </a:ln>
+        </p:spPr>
+        <p:style>
+          <a:lnRef idx="1">
+            <a:schemeClr val="accent1"/>
+          </a:lnRef>
+          <a:fillRef idx="3">
+            <a:schemeClr val="accent1"/>
+          </a:fillRef>
+          <a:effectRef idx="2">
+            <a:schemeClr val="accent1"/>
+          </a:effectRef>
+          <a:fontRef idx="minor">
+            <a:schemeClr val="lt1"/>
+          </a:fontRef>
+        </p:style>
+        <p:txBody>
+          <a:bodyPr rtlCol="0" anchor="ctr"/>
+          <a:lstStyle/>
+          <a:p>
             <a:pPr algn="ctr"/>
-            <a:r>
-              <a:rPr sz="1000" b="1">
+          </a:p>
+        </p:txBody>
+      </p:sp>
+      <p:sp>
+        <p:nvSpPr>
+          <p:cNvPr id="20" name="Rectangle 19"/>
+          <p:cNvSpPr/>
+          <p:nvPr/>
+        </p:nvSpPr>
+        <p:spPr>
+          <a:xfrm>
+            <a:off x="868680" y="5522976"/>
+            <a:ext cx="530352" cy="713232"/>
+          </a:xfrm>
+          <a:prstGeom prst="rect">
+            <a:avLst/>
+          </a:prstGeom>
+          <a:solidFill>
+            <a:srgbClr val="087490"/>
+          </a:solidFill>
+          <a:ln>
+            <a:noFill/>
+          </a:ln>
+        </p:spPr>
+        <p:style>
+          <a:lnRef idx="1">
+            <a:schemeClr val="accent1"/>
+          </a:lnRef>
+          <a:fillRef idx="3">
+            <a:schemeClr val="accent1"/>
+          </a:fillRef>
+          <a:effectRef idx="2">
+            <a:schemeClr val="accent1"/>
+          </a:effectRef>
+          <a:fontRef idx="minor">
+            <a:schemeClr val="lt1"/>
+          </a:fontRef>
+        </p:style>
+        <p:txBody>
+          <a:bodyPr rtlCol="0" anchor="ctr" wrap="square" lIns="101600" rIns="101600" tIns="38100" bIns="38100"/>
+          <a:lstStyle/>
+          <a:p>
+            <a:pPr algn="ctr"/>
+            <a:r>
+              <a:rPr sz="1500" b="1">
                 <a:solidFill>
                   <a:srgbClr val="FFFFFF"/>
                 </a:solidFill>
+                <a:latin typeface="Arial"/>
               </a:rPr>
               <a:t>4</a:t>
             </a:r>
@@ -5552,14 +6204,14 @@
       </p:sp>
       <p:sp>
         <p:nvSpPr>
-          <p:cNvPr id="24" name="TextBox 23"/>
+          <p:cNvPr id="21" name="TextBox 20"/>
           <p:cNvSpPr txBox="1"/>
           <p:nvPr/>
         </p:nvSpPr>
         <p:spPr>
           <a:xfrm>
-            <a:off x="1783080" y="5833872"/>
-            <a:ext cx="9006840" cy="347472"/>
+            <a:off x="1572768" y="5669280"/>
+            <a:ext cx="9372600" cy="384048"/>
           </a:xfrm>
           <a:prstGeom prst="rect">
             <a:avLst/>
@@ -5567,31 +6219,32 @@
           <a:noFill/>
         </p:spPr>
         <p:txBody>
-          <a:bodyPr wrap="square">
+          <a:bodyPr wrap="square" lIns="0" rIns="0" tIns="0" bIns="0">
             <a:spAutoFit/>
           </a:bodyPr>
           <a:lstStyle/>
           <a:p>
             <a:r>
-              <a:rPr sz="1700" b="0">
-                <a:solidFill>
-                  <a:srgbClr val="1A202C"/>
-                </a:solidFill>
+              <a:rPr sz="1500" b="0">
+                <a:solidFill>
+                  <a:srgbClr val="111827"/>
+                </a:solidFill>
+                <a:latin typeface="Arial"/>
               </a:rPr>
-              <a:t>Remembering the Energy Resources (biogas/solar) project.</a:t>
-            </a:r>
-          </a:p>
-        </p:txBody>
-      </p:sp>
-      <p:sp>
-        <p:nvSpPr>
-          <p:cNvPr id="25" name="TextBox 24"/>
+              <a:t>Write one clear response.</a:t>
+            </a:r>
+          </a:p>
+        </p:txBody>
+      </p:sp>
+      <p:sp>
+        <p:nvSpPr>
+          <p:cNvPr id="22" name="TextBox 21"/>
           <p:cNvSpPr txBox="1"/>
           <p:nvPr/>
         </p:nvSpPr>
         <p:spPr>
           <a:xfrm>
-            <a:off x="777240" y="6419088"/>
+            <a:off x="685800" y="6419088"/>
             <a:ext cx="10835640" cy="228600"/>
           </a:xfrm>
           <a:prstGeom prst="rect">
@@ -5600,7 +6253,7 @@
           <a:noFill/>
         </p:spPr>
         <p:txBody>
-          <a:bodyPr wrap="square">
+          <a:bodyPr wrap="square" lIns="0" rIns="0" tIns="0" bIns="0">
             <a:spAutoFit/>
           </a:bodyPr>
           <a:lstStyle/>
@@ -5609,8 +6262,9 @@
             <a:r>
               <a:rPr sz="1000" b="0">
                 <a:solidFill>
-                  <a:srgbClr val="5B677D"/>
-                </a:solidFill>
+                  <a:srgbClr val="475569"/>
+                </a:solidFill>
+                <a:latin typeface="Arial"/>
               </a:rPr>
               <a:t>Listen • Talk • Try • Explain</a:t>
             </a:r>
@@ -5628,6 +6282,14 @@
 <file path=ppt/slides/slide5.xml><?xml version="1.0" encoding="utf-8"?>
 <p:sld xmlns:a="http://schemas.openxmlformats.org/drawingml/2006/main" xmlns:p="http://schemas.openxmlformats.org/presentationml/2006/main" xmlns:r="http://schemas.openxmlformats.org/officeDocument/2006/relationships">
   <p:cSld>
+    <p:bg>
+      <p:bgPr>
+        <a:solidFill>
+          <a:srgbClr val="F8FAFC"/>
+        </a:solidFill>
+        <a:effectLst/>
+      </p:bgPr>
+    </p:bg>
     <p:spTree>
       <p:nvGrpSpPr>
         <p:cNvPr id="1" name=""/>
@@ -5644,13 +6306,13 @@
         <p:spPr>
           <a:xfrm>
             <a:off x="0" y="0"/>
-            <a:ext cx="12191695" cy="914400"/>
-          </a:xfrm>
-          <a:prstGeom prst="rect">
-            <a:avLst/>
-          </a:prstGeom>
-          <a:solidFill>
-            <a:srgbClr val="D97706"/>
+            <a:ext cx="12191695" cy="713232"/>
+          </a:xfrm>
+          <a:prstGeom prst="rect">
+            <a:avLst/>
+          </a:prstGeom>
+          <a:solidFill>
+            <a:srgbClr val="111827"/>
           </a:solidFill>
           <a:ln>
             <a:noFill/>
@@ -5686,14 +6348,14 @@
         </p:nvSpPr>
         <p:spPr>
           <a:xfrm>
-            <a:off x="0" y="914400"/>
-            <a:ext cx="164592" cy="5943600"/>
-          </a:xfrm>
-          <a:prstGeom prst="rect">
-            <a:avLst/>
-          </a:prstGeom>
-          <a:solidFill>
-            <a:srgbClr val="D97706"/>
+            <a:off x="0" y="713232"/>
+            <a:ext cx="12191695" cy="82296"/>
+          </a:xfrm>
+          <a:prstGeom prst="rect">
+            <a:avLst/>
+          </a:prstGeom>
+          <a:solidFill>
+            <a:srgbClr val="FCD116"/>
           </a:solidFill>
           <a:ln>
             <a:noFill/>
@@ -5723,125 +6385,23 @@
       </p:sp>
       <p:sp>
         <p:nvSpPr>
-          <p:cNvPr id="4" name="TextBox 3"/>
-          <p:cNvSpPr txBox="1"/>
-          <p:nvPr/>
-        </p:nvSpPr>
-        <p:spPr>
-          <a:xfrm>
-            <a:off x="594360" y="246888"/>
-            <a:ext cx="2926080" cy="320040"/>
-          </a:xfrm>
-          <a:prstGeom prst="rect">
-            <a:avLst/>
-          </a:prstGeom>
-          <a:noFill/>
-        </p:spPr>
-        <p:txBody>
-          <a:bodyPr wrap="square">
-            <a:spAutoFit/>
-          </a:bodyPr>
-          <a:lstStyle/>
-          <a:p>
-            <a:r>
-              <a:rPr sz="1300" b="1">
-                <a:solidFill>
-                  <a:srgbClr val="FFFFFF"/>
-                </a:solidFill>
-              </a:rPr>
-              <a:t>5. MODEL</a:t>
-            </a:r>
-          </a:p>
-        </p:txBody>
-      </p:sp>
-      <p:sp>
-        <p:nvSpPr>
-          <p:cNvPr id="5" name="TextBox 4"/>
-          <p:cNvSpPr txBox="1"/>
-          <p:nvPr/>
-        </p:nvSpPr>
-        <p:spPr>
-          <a:xfrm>
-            <a:off x="7772400" y="246888"/>
-            <a:ext cx="3840480" cy="320040"/>
-          </a:xfrm>
-          <a:prstGeom prst="rect">
-            <a:avLst/>
-          </a:prstGeom>
-          <a:noFill/>
-        </p:spPr>
-        <p:txBody>
-          <a:bodyPr wrap="square">
-            <a:spAutoFit/>
-          </a:bodyPr>
-          <a:lstStyle/>
-          <a:p>
-            <a:pPr algn="r"/>
-            <a:r>
-              <a:rPr sz="1100" b="0">
-                <a:solidFill>
-                  <a:srgbClr val="FFFFFF"/>
-                </a:solidFill>
-              </a:rPr>
-              <a:t>p7_t1_integrated_science_1205</a:t>
-            </a:r>
-          </a:p>
-        </p:txBody>
-      </p:sp>
-      <p:sp>
-        <p:nvSpPr>
-          <p:cNvPr id="6" name="TextBox 5"/>
-          <p:cNvSpPr txBox="1"/>
-          <p:nvPr/>
-        </p:nvSpPr>
-        <p:spPr>
-          <a:xfrm>
-            <a:off x="640080" y="1143000"/>
-            <a:ext cx="10972800" cy="685800"/>
-          </a:xfrm>
-          <a:prstGeom prst="rect">
-            <a:avLst/>
-          </a:prstGeom>
-          <a:noFill/>
-        </p:spPr>
-        <p:txBody>
-          <a:bodyPr wrap="square">
-            <a:spAutoFit/>
-          </a:bodyPr>
-          <a:lstStyle/>
-          <a:p>
-            <a:r>
-              <a:rPr sz="2800" b="1">
-                <a:solidFill>
-                  <a:srgbClr val="1A202C"/>
-                </a:solidFill>
-              </a:rPr>
-              <a:t>How to Write a Science Report</a:t>
-            </a:r>
-          </a:p>
-        </p:txBody>
-      </p:sp>
-      <p:sp>
-        <p:nvSpPr>
-          <p:cNvPr id="7" name="Rounded Rectangle 6"/>
+          <p:cNvPr id="4" name="Rectangle 3"/>
           <p:cNvSpPr/>
           <p:nvPr/>
         </p:nvSpPr>
         <p:spPr>
           <a:xfrm>
-            <a:off x="777240" y="1993392"/>
-            <a:ext cx="10835640" cy="1005840"/>
-          </a:xfrm>
-          <a:prstGeom prst="roundRect">
-            <a:avLst/>
-          </a:prstGeom>
-          <a:solidFill>
-            <a:srgbClr val="FFFBEB"/>
-          </a:solidFill>
-          <a:ln w="15240">
-            <a:solidFill>
-              <a:srgbClr val="D97706"/>
-            </a:solidFill>
+            <a:off x="0" y="795528"/>
+            <a:ext cx="12191695" cy="64008"/>
+          </a:xfrm>
+          <a:prstGeom prst="rect">
+            <a:avLst/>
+          </a:prstGeom>
+          <a:solidFill>
+            <a:srgbClr val="D90000"/>
+          </a:solidFill>
+          <a:ln>
+            <a:noFill/>
           </a:ln>
         </p:spPr>
         <p:style>
@@ -5868,58 +6428,23 @@
       </p:sp>
       <p:sp>
         <p:nvSpPr>
-          <p:cNvPr id="8" name="TextBox 7"/>
-          <p:cNvSpPr txBox="1"/>
-          <p:nvPr/>
-        </p:nvSpPr>
-        <p:spPr>
-          <a:xfrm>
-            <a:off x="1051560" y="2212848"/>
-            <a:ext cx="10287000" cy="502920"/>
-          </a:xfrm>
-          <a:prstGeom prst="rect">
-            <a:avLst/>
-          </a:prstGeom>
-          <a:noFill/>
-        </p:spPr>
-        <p:txBody>
-          <a:bodyPr wrap="square">
-            <a:spAutoFit/>
-          </a:bodyPr>
-          <a:lstStyle/>
-          <a:p>
-            <a:r>
-              <a:rPr sz="2100" b="1">
-                <a:solidFill>
-                  <a:srgbClr val="1A202C"/>
-                </a:solidFill>
-              </a:rPr>
-              <a:t>Watch the example.</a:t>
-            </a:r>
-          </a:p>
-        </p:txBody>
-      </p:sp>
-      <p:sp>
-        <p:nvSpPr>
-          <p:cNvPr id="9" name="Rounded Rectangle 8"/>
+          <p:cNvPr id="5" name="Rectangle 4"/>
           <p:cNvSpPr/>
           <p:nvPr/>
         </p:nvSpPr>
         <p:spPr>
           <a:xfrm>
-            <a:off x="1005840" y="3246120"/>
-            <a:ext cx="10149840" cy="621792"/>
-          </a:xfrm>
-          <a:prstGeom prst="roundRect">
-            <a:avLst/>
-          </a:prstGeom>
-          <a:solidFill>
-            <a:srgbClr val="F8FAFC"/>
-          </a:solidFill>
-          <a:ln w="15240">
-            <a:solidFill>
-              <a:srgbClr val="CBD5E1"/>
-            </a:solidFill>
+            <a:off x="0" y="859536"/>
+            <a:ext cx="164592" cy="5998464"/>
+          </a:xfrm>
+          <a:prstGeom prst="rect">
+            <a:avLst/>
+          </a:prstGeom>
+          <a:solidFill>
+            <a:srgbClr val="D97706"/>
+          </a:solidFill>
+          <a:ln>
+            <a:noFill/>
           </a:ln>
         </p:spPr>
         <p:style>
@@ -5946,23 +6471,128 @@
       </p:sp>
       <p:sp>
         <p:nvSpPr>
-          <p:cNvPr id="10" name="Oval 9"/>
+          <p:cNvPr id="6" name="TextBox 5"/>
+          <p:cNvSpPr txBox="1"/>
+          <p:nvPr/>
+        </p:nvSpPr>
+        <p:spPr>
+          <a:xfrm>
+            <a:off x="502920" y="210312"/>
+            <a:ext cx="3200400" cy="256032"/>
+          </a:xfrm>
+          <a:prstGeom prst="rect">
+            <a:avLst/>
+          </a:prstGeom>
+          <a:noFill/>
+        </p:spPr>
+        <p:txBody>
+          <a:bodyPr wrap="square" lIns="0" rIns="0" tIns="0" bIns="0">
+            <a:spAutoFit/>
+          </a:bodyPr>
+          <a:lstStyle/>
+          <a:p>
+            <a:r>
+              <a:rPr sz="1200" b="1">
+                <a:solidFill>
+                  <a:srgbClr val="FFFFFF"/>
+                </a:solidFill>
+                <a:latin typeface="Arial"/>
+              </a:rPr>
+              <a:t>5. MODEL</a:t>
+            </a:r>
+          </a:p>
+        </p:txBody>
+      </p:sp>
+      <p:sp>
+        <p:nvSpPr>
+          <p:cNvPr id="7" name="TextBox 6"/>
+          <p:cNvSpPr txBox="1"/>
+          <p:nvPr/>
+        </p:nvSpPr>
+        <p:spPr>
+          <a:xfrm>
+            <a:off x="7589520" y="210312"/>
+            <a:ext cx="4069080" cy="256032"/>
+          </a:xfrm>
+          <a:prstGeom prst="rect">
+            <a:avLst/>
+          </a:prstGeom>
+          <a:noFill/>
+        </p:spPr>
+        <p:txBody>
+          <a:bodyPr wrap="square" lIns="0" rIns="0" tIns="0" bIns="0">
+            <a:spAutoFit/>
+          </a:bodyPr>
+          <a:lstStyle/>
+          <a:p>
+            <a:pPr algn="r"/>
+            <a:r>
+              <a:rPr sz="1000" b="0">
+                <a:solidFill>
+                  <a:srgbClr val="FFFFFF"/>
+                </a:solidFill>
+                <a:latin typeface="Arial"/>
+              </a:rPr>
+              <a:t>p7_t1_integrated_science_1205</a:t>
+            </a:r>
+          </a:p>
+        </p:txBody>
+      </p:sp>
+      <p:sp>
+        <p:nvSpPr>
+          <p:cNvPr id="8" name="TextBox 7"/>
+          <p:cNvSpPr txBox="1"/>
+          <p:nvPr/>
+        </p:nvSpPr>
+        <p:spPr>
+          <a:xfrm>
+            <a:off x="594360" y="1042415"/>
+            <a:ext cx="11109960" cy="566928"/>
+          </a:xfrm>
+          <a:prstGeom prst="rect">
+            <a:avLst/>
+          </a:prstGeom>
+          <a:noFill/>
+        </p:spPr>
+        <p:txBody>
+          <a:bodyPr wrap="square" lIns="0" rIns="0" tIns="0" bIns="0">
+            <a:spAutoFit/>
+          </a:bodyPr>
+          <a:lstStyle/>
+          <a:p>
+            <a:r>
+              <a:rPr sz="2600" b="1">
+                <a:solidFill>
+                  <a:srgbClr val="111827"/>
+                </a:solidFill>
+                <a:latin typeface="Arial"/>
+              </a:rPr>
+              <a:t>How to Write a Science Report</a:t>
+            </a:r>
+          </a:p>
+        </p:txBody>
+      </p:sp>
+      <p:sp>
+        <p:nvSpPr>
+          <p:cNvPr id="9" name="Rectangle 8"/>
           <p:cNvSpPr/>
           <p:nvPr/>
         </p:nvSpPr>
         <p:spPr>
           <a:xfrm>
-            <a:off x="1234440" y="3364991"/>
-            <a:ext cx="347472" cy="347472"/>
-          </a:xfrm>
-          <a:prstGeom prst="ellipse">
-            <a:avLst/>
-          </a:prstGeom>
-          <a:solidFill>
-            <a:srgbClr val="D97706"/>
-          </a:solidFill>
-          <a:ln>
-            <a:noFill/>
+            <a:off x="685800" y="1874519"/>
+            <a:ext cx="10835640" cy="804672"/>
+          </a:xfrm>
+          <a:prstGeom prst="rect">
+            <a:avLst/>
+          </a:prstGeom>
+          <a:solidFill>
+            <a:srgbClr val="FFF7E0"/>
+          </a:solidFill>
+          <a:ln w="17780">
+            <a:solidFill>
+              <a:srgbClr val="D97706"/>
+            </a:solidFill>
           </a:ln>
         </p:spPr>
         <p:style>
@@ -5980,98 +6610,40 @@
           </a:fontRef>
         </p:style>
         <p:txBody>
-          <a:bodyPr rtlCol="0" anchor="ctr"/>
+          <a:bodyPr rtlCol="0" anchor="ctr" wrap="square" lIns="101600" rIns="101600" tIns="38100" bIns="38100"/>
           <a:lstStyle/>
           <a:p>
             <a:pPr algn="ctr"/>
-          </a:p>
-        </p:txBody>
-      </p:sp>
-      <p:sp>
-        <p:nvSpPr>
-          <p:cNvPr id="11" name="TextBox 10"/>
-          <p:cNvSpPr txBox="1"/>
-          <p:nvPr/>
-        </p:nvSpPr>
-        <p:spPr>
-          <a:xfrm>
-            <a:off x="1234440" y="3410712"/>
-            <a:ext cx="347472" cy="182880"/>
-          </a:xfrm>
-          <a:prstGeom prst="rect">
-            <a:avLst/>
-          </a:prstGeom>
-          <a:noFill/>
-        </p:spPr>
-        <p:txBody>
-          <a:bodyPr wrap="square">
-            <a:spAutoFit/>
-          </a:bodyPr>
-          <a:lstStyle/>
-          <a:p>
-            <a:pPr algn="ctr"/>
-            <a:r>
-              <a:rPr sz="1000" b="1">
-                <a:solidFill>
-                  <a:srgbClr val="FFFFFF"/>
-                </a:solidFill>
+            <a:r>
+              <a:rPr sz="1900" b="1">
+                <a:solidFill>
+                  <a:srgbClr val="111827"/>
+                </a:solidFill>
+                <a:latin typeface="Arial"/>
               </a:rPr>
-              <a:t>1</a:t>
-            </a:r>
-          </a:p>
-        </p:txBody>
-      </p:sp>
-      <p:sp>
-        <p:nvSpPr>
-          <p:cNvPr id="12" name="TextBox 11"/>
-          <p:cNvSpPr txBox="1"/>
-          <p:nvPr/>
-        </p:nvSpPr>
-        <p:spPr>
-          <a:xfrm>
-            <a:off x="1783080" y="3364991"/>
-            <a:ext cx="9006840" cy="347472"/>
-          </a:xfrm>
-          <a:prstGeom prst="rect">
-            <a:avLst/>
-          </a:prstGeom>
-          <a:noFill/>
-        </p:spPr>
-        <p:txBody>
-          <a:bodyPr wrap="square">
-            <a:spAutoFit/>
-          </a:bodyPr>
-          <a:lstStyle/>
-          <a:p>
-            <a:r>
-              <a:rPr sz="1700" b="0">
-                <a:solidFill>
-                  <a:srgbClr val="1A202C"/>
-                </a:solidFill>
-              </a:rPr>
-              <a:t>Title and Aim (What and Why).</a:t>
-            </a:r>
-          </a:p>
-        </p:txBody>
-      </p:sp>
-      <p:sp>
-        <p:nvSpPr>
-          <p:cNvPr id="13" name="Rounded Rectangle 12"/>
+              <a:t>Watch the example.</a:t>
+            </a:r>
+          </a:p>
+        </p:txBody>
+      </p:sp>
+      <p:sp>
+        <p:nvSpPr>
+          <p:cNvPr id="10" name="Rectangle 9"/>
           <p:cNvSpPr/>
           <p:nvPr/>
         </p:nvSpPr>
         <p:spPr>
           <a:xfrm>
-            <a:off x="1005840" y="4069080"/>
-            <a:ext cx="10149840" cy="621792"/>
-          </a:xfrm>
-          <a:prstGeom prst="roundRect">
-            <a:avLst/>
-          </a:prstGeom>
-          <a:solidFill>
-            <a:srgbClr val="F8FAFC"/>
-          </a:solidFill>
-          <a:ln w="15240">
+            <a:off x="868680" y="2971800"/>
+            <a:ext cx="10378440" cy="713232"/>
+          </a:xfrm>
+          <a:prstGeom prst="rect">
+            <a:avLst/>
+          </a:prstGeom>
+          <a:solidFill>
+            <a:srgbClr val="FFFFFF"/>
+          </a:solidFill>
+          <a:ln w="11430">
             <a:solidFill>
               <a:srgbClr val="CBD5E1"/>
             </a:solidFill>
@@ -6101,16 +6673,16 @@
       </p:sp>
       <p:sp>
         <p:nvSpPr>
-          <p:cNvPr id="14" name="Oval 13"/>
+          <p:cNvPr id="11" name="Rectangle 10"/>
           <p:cNvSpPr/>
           <p:nvPr/>
         </p:nvSpPr>
         <p:spPr>
           <a:xfrm>
-            <a:off x="1234440" y="4187952"/>
-            <a:ext cx="347472" cy="347472"/>
-          </a:xfrm>
-          <a:prstGeom prst="ellipse">
+            <a:off x="868680" y="2971800"/>
+            <a:ext cx="530352" cy="713232"/>
+          </a:xfrm>
+          <a:prstGeom prst="rect">
             <a:avLst/>
           </a:prstGeom>
           <a:solidFill>
@@ -6135,23 +6707,32 @@
           </a:fontRef>
         </p:style>
         <p:txBody>
-          <a:bodyPr rtlCol="0" anchor="ctr"/>
+          <a:bodyPr rtlCol="0" anchor="ctr" wrap="square" lIns="101600" rIns="101600" tIns="38100" bIns="38100"/>
           <a:lstStyle/>
           <a:p>
             <a:pPr algn="ctr"/>
-          </a:p>
-        </p:txBody>
-      </p:sp>
-      <p:sp>
-        <p:nvSpPr>
-          <p:cNvPr id="15" name="TextBox 14"/>
+            <a:r>
+              <a:rPr sz="1500" b="1">
+                <a:solidFill>
+                  <a:srgbClr val="FFFFFF"/>
+                </a:solidFill>
+                <a:latin typeface="Arial"/>
+              </a:rPr>
+              <a:t>1</a:t>
+            </a:r>
+          </a:p>
+        </p:txBody>
+      </p:sp>
+      <p:sp>
+        <p:nvSpPr>
+          <p:cNvPr id="12" name="TextBox 11"/>
           <p:cNvSpPr txBox="1"/>
           <p:nvPr/>
         </p:nvSpPr>
         <p:spPr>
           <a:xfrm>
-            <a:off x="1234440" y="4233672"/>
-            <a:ext cx="347472" cy="182880"/>
+            <a:off x="1572768" y="3118104"/>
+            <a:ext cx="9372600" cy="384048"/>
           </a:xfrm>
           <a:prstGeom prst="rect">
             <a:avLst/>
@@ -6159,74 +6740,41 @@
           <a:noFill/>
         </p:spPr>
         <p:txBody>
-          <a:bodyPr wrap="square">
+          <a:bodyPr wrap="square" lIns="0" rIns="0" tIns="0" bIns="0">
             <a:spAutoFit/>
           </a:bodyPr>
           <a:lstStyle/>
           <a:p>
-            <a:pPr algn="ctr"/>
-            <a:r>
-              <a:rPr sz="1000" b="1">
-                <a:solidFill>
-                  <a:srgbClr val="FFFFFF"/>
-                </a:solidFill>
+            <a:r>
+              <a:rPr sz="1500" b="0">
+                <a:solidFill>
+                  <a:srgbClr val="111827"/>
+                </a:solidFill>
+                <a:latin typeface="Arial"/>
               </a:rPr>
-              <a:t>2</a:t>
-            </a:r>
-          </a:p>
-        </p:txBody>
-      </p:sp>
-      <p:sp>
-        <p:nvSpPr>
-          <p:cNvPr id="16" name="TextBox 15"/>
-          <p:cNvSpPr txBox="1"/>
-          <p:nvPr/>
-        </p:nvSpPr>
-        <p:spPr>
-          <a:xfrm>
-            <a:off x="1783080" y="4187952"/>
-            <a:ext cx="9006840" cy="347472"/>
-          </a:xfrm>
-          <a:prstGeom prst="rect">
-            <a:avLst/>
-          </a:prstGeom>
-          <a:noFill/>
-        </p:spPr>
-        <p:txBody>
-          <a:bodyPr wrap="square">
-            <a:spAutoFit/>
-          </a:bodyPr>
-          <a:lstStyle/>
-          <a:p>
-            <a:r>
-              <a:rPr sz="1700" b="0">
-                <a:solidFill>
-                  <a:srgbClr val="1A202C"/>
-                </a:solidFill>
-              </a:rPr>
-              <a:t>Apparatus/Materials (The tools).</a:t>
-            </a:r>
-          </a:p>
-        </p:txBody>
-      </p:sp>
-      <p:sp>
-        <p:nvSpPr>
-          <p:cNvPr id="17" name="Rounded Rectangle 16"/>
+              <a:t>Title and Aim (What and Why).</a:t>
+            </a:r>
+          </a:p>
+        </p:txBody>
+      </p:sp>
+      <p:sp>
+        <p:nvSpPr>
+          <p:cNvPr id="13" name="Rectangle 12"/>
           <p:cNvSpPr/>
           <p:nvPr/>
         </p:nvSpPr>
         <p:spPr>
           <a:xfrm>
-            <a:off x="1005840" y="4892040"/>
-            <a:ext cx="10149840" cy="621792"/>
-          </a:xfrm>
-          <a:prstGeom prst="roundRect">
-            <a:avLst/>
-          </a:prstGeom>
-          <a:solidFill>
-            <a:srgbClr val="F8FAFC"/>
-          </a:solidFill>
-          <a:ln w="15240">
+            <a:off x="868680" y="3822191"/>
+            <a:ext cx="10378440" cy="713232"/>
+          </a:xfrm>
+          <a:prstGeom prst="rect">
+            <a:avLst/>
+          </a:prstGeom>
+          <a:solidFill>
+            <a:srgbClr val="FFFFFF"/>
+          </a:solidFill>
+          <a:ln w="11430">
             <a:solidFill>
               <a:srgbClr val="CBD5E1"/>
             </a:solidFill>
@@ -6256,16 +6804,16 @@
       </p:sp>
       <p:sp>
         <p:nvSpPr>
-          <p:cNvPr id="18" name="Oval 17"/>
+          <p:cNvPr id="14" name="Rectangle 13"/>
           <p:cNvSpPr/>
           <p:nvPr/>
         </p:nvSpPr>
         <p:spPr>
           <a:xfrm>
-            <a:off x="1234440" y="5010912"/>
-            <a:ext cx="347472" cy="347472"/>
-          </a:xfrm>
-          <a:prstGeom prst="ellipse">
+            <a:off x="868680" y="3822191"/>
+            <a:ext cx="530352" cy="713232"/>
+          </a:xfrm>
+          <a:prstGeom prst="rect">
             <a:avLst/>
           </a:prstGeom>
           <a:solidFill>
@@ -6290,23 +6838,32 @@
           </a:fontRef>
         </p:style>
         <p:txBody>
-          <a:bodyPr rtlCol="0" anchor="ctr"/>
+          <a:bodyPr rtlCol="0" anchor="ctr" wrap="square" lIns="101600" rIns="101600" tIns="38100" bIns="38100"/>
           <a:lstStyle/>
           <a:p>
             <a:pPr algn="ctr"/>
-          </a:p>
-        </p:txBody>
-      </p:sp>
-      <p:sp>
-        <p:nvSpPr>
-          <p:cNvPr id="19" name="TextBox 18"/>
+            <a:r>
+              <a:rPr sz="1500" b="1">
+                <a:solidFill>
+                  <a:srgbClr val="FFFFFF"/>
+                </a:solidFill>
+                <a:latin typeface="Arial"/>
+              </a:rPr>
+              <a:t>2</a:t>
+            </a:r>
+          </a:p>
+        </p:txBody>
+      </p:sp>
+      <p:sp>
+        <p:nvSpPr>
+          <p:cNvPr id="15" name="TextBox 14"/>
           <p:cNvSpPr txBox="1"/>
           <p:nvPr/>
         </p:nvSpPr>
         <p:spPr>
           <a:xfrm>
-            <a:off x="1234440" y="5056632"/>
-            <a:ext cx="347472" cy="182880"/>
+            <a:off x="1572768" y="3968496"/>
+            <a:ext cx="9372600" cy="384048"/>
           </a:xfrm>
           <a:prstGeom prst="rect">
             <a:avLst/>
@@ -6314,74 +6871,41 @@
           <a:noFill/>
         </p:spPr>
         <p:txBody>
-          <a:bodyPr wrap="square">
+          <a:bodyPr wrap="square" lIns="0" rIns="0" tIns="0" bIns="0">
             <a:spAutoFit/>
           </a:bodyPr>
           <a:lstStyle/>
           <a:p>
-            <a:pPr algn="ctr"/>
-            <a:r>
-              <a:rPr sz="1000" b="1">
-                <a:solidFill>
-                  <a:srgbClr val="FFFFFF"/>
-                </a:solidFill>
+            <a:r>
+              <a:rPr sz="1500" b="0">
+                <a:solidFill>
+                  <a:srgbClr val="111827"/>
+                </a:solidFill>
+                <a:latin typeface="Arial"/>
               </a:rPr>
-              <a:t>3</a:t>
-            </a:r>
-          </a:p>
-        </p:txBody>
-      </p:sp>
-      <p:sp>
-        <p:nvSpPr>
-          <p:cNvPr id="20" name="TextBox 19"/>
-          <p:cNvSpPr txBox="1"/>
-          <p:nvPr/>
-        </p:nvSpPr>
-        <p:spPr>
-          <a:xfrm>
-            <a:off x="1783080" y="5010912"/>
-            <a:ext cx="9006840" cy="347472"/>
-          </a:xfrm>
-          <a:prstGeom prst="rect">
-            <a:avLst/>
-          </a:prstGeom>
-          <a:noFill/>
-        </p:spPr>
-        <p:txBody>
-          <a:bodyPr wrap="square">
-            <a:spAutoFit/>
-          </a:bodyPr>
-          <a:lstStyle/>
-          <a:p>
-            <a:r>
-              <a:rPr sz="1700" b="0">
-                <a:solidFill>
-                  <a:srgbClr val="1A202C"/>
-                </a:solidFill>
-              </a:rPr>
-              <a:t>Procedure (The steps).</a:t>
-            </a:r>
-          </a:p>
-        </p:txBody>
-      </p:sp>
-      <p:sp>
-        <p:nvSpPr>
-          <p:cNvPr id="21" name="Rounded Rectangle 20"/>
+              <a:t>Apparatus/Materials (The tools).</a:t>
+            </a:r>
+          </a:p>
+        </p:txBody>
+      </p:sp>
+      <p:sp>
+        <p:nvSpPr>
+          <p:cNvPr id="16" name="Rectangle 15"/>
           <p:cNvSpPr/>
           <p:nvPr/>
         </p:nvSpPr>
         <p:spPr>
           <a:xfrm>
-            <a:off x="1005840" y="5715000"/>
-            <a:ext cx="10149840" cy="621792"/>
-          </a:xfrm>
-          <a:prstGeom prst="roundRect">
-            <a:avLst/>
-          </a:prstGeom>
-          <a:solidFill>
-            <a:srgbClr val="F8FAFC"/>
-          </a:solidFill>
-          <a:ln w="15240">
+            <a:off x="868680" y="4672584"/>
+            <a:ext cx="10378440" cy="713232"/>
+          </a:xfrm>
+          <a:prstGeom prst="rect">
+            <a:avLst/>
+          </a:prstGeom>
+          <a:solidFill>
+            <a:srgbClr val="FFFFFF"/>
+          </a:solidFill>
+          <a:ln w="11430">
             <a:solidFill>
               <a:srgbClr val="CBD5E1"/>
             </a:solidFill>
@@ -6411,16 +6935,16 @@
       </p:sp>
       <p:sp>
         <p:nvSpPr>
-          <p:cNvPr id="22" name="Oval 21"/>
+          <p:cNvPr id="17" name="Rectangle 16"/>
           <p:cNvSpPr/>
           <p:nvPr/>
         </p:nvSpPr>
         <p:spPr>
           <a:xfrm>
-            <a:off x="1234440" y="5833872"/>
-            <a:ext cx="347472" cy="347472"/>
-          </a:xfrm>
-          <a:prstGeom prst="ellipse">
+            <a:off x="868680" y="4672584"/>
+            <a:ext cx="530352" cy="713232"/>
+          </a:xfrm>
+          <a:prstGeom prst="rect">
             <a:avLst/>
           </a:prstGeom>
           <a:solidFill>
@@ -6445,23 +6969,32 @@
           </a:fontRef>
         </p:style>
         <p:txBody>
-          <a:bodyPr rtlCol="0" anchor="ctr"/>
+          <a:bodyPr rtlCol="0" anchor="ctr" wrap="square" lIns="101600" rIns="101600" tIns="38100" bIns="38100"/>
           <a:lstStyle/>
           <a:p>
             <a:pPr algn="ctr"/>
-          </a:p>
-        </p:txBody>
-      </p:sp>
-      <p:sp>
-        <p:nvSpPr>
-          <p:cNvPr id="23" name="TextBox 22"/>
+            <a:r>
+              <a:rPr sz="1500" b="1">
+                <a:solidFill>
+                  <a:srgbClr val="FFFFFF"/>
+                </a:solidFill>
+                <a:latin typeface="Arial"/>
+              </a:rPr>
+              <a:t>3</a:t>
+            </a:r>
+          </a:p>
+        </p:txBody>
+      </p:sp>
+      <p:sp>
+        <p:nvSpPr>
+          <p:cNvPr id="18" name="TextBox 17"/>
           <p:cNvSpPr txBox="1"/>
           <p:nvPr/>
         </p:nvSpPr>
         <p:spPr>
           <a:xfrm>
-            <a:off x="1234440" y="5879592"/>
-            <a:ext cx="347472" cy="182880"/>
+            <a:off x="1572768" y="4818888"/>
+            <a:ext cx="9372600" cy="384048"/>
           </a:xfrm>
           <a:prstGeom prst="rect">
             <a:avLst/>
@@ -6469,17 +7002,114 @@
           <a:noFill/>
         </p:spPr>
         <p:txBody>
-          <a:bodyPr wrap="square">
+          <a:bodyPr wrap="square" lIns="0" rIns="0" tIns="0" bIns="0">
             <a:spAutoFit/>
           </a:bodyPr>
           <a:lstStyle/>
           <a:p>
+            <a:r>
+              <a:rPr sz="1500" b="0">
+                <a:solidFill>
+                  <a:srgbClr val="111827"/>
+                </a:solidFill>
+                <a:latin typeface="Arial"/>
+              </a:rPr>
+              <a:t>Procedure (The steps).</a:t>
+            </a:r>
+          </a:p>
+        </p:txBody>
+      </p:sp>
+      <p:sp>
+        <p:nvSpPr>
+          <p:cNvPr id="19" name="Rectangle 18"/>
+          <p:cNvSpPr/>
+          <p:nvPr/>
+        </p:nvSpPr>
+        <p:spPr>
+          <a:xfrm>
+            <a:off x="868680" y="5522976"/>
+            <a:ext cx="10378440" cy="713232"/>
+          </a:xfrm>
+          <a:prstGeom prst="rect">
+            <a:avLst/>
+          </a:prstGeom>
+          <a:solidFill>
+            <a:srgbClr val="FFFFFF"/>
+          </a:solidFill>
+          <a:ln w="11430">
+            <a:solidFill>
+              <a:srgbClr val="CBD5E1"/>
+            </a:solidFill>
+          </a:ln>
+        </p:spPr>
+        <p:style>
+          <a:lnRef idx="1">
+            <a:schemeClr val="accent1"/>
+          </a:lnRef>
+          <a:fillRef idx="3">
+            <a:schemeClr val="accent1"/>
+          </a:fillRef>
+          <a:effectRef idx="2">
+            <a:schemeClr val="accent1"/>
+          </a:effectRef>
+          <a:fontRef idx="minor">
+            <a:schemeClr val="lt1"/>
+          </a:fontRef>
+        </p:style>
+        <p:txBody>
+          <a:bodyPr rtlCol="0" anchor="ctr"/>
+          <a:lstStyle/>
+          <a:p>
             <a:pPr algn="ctr"/>
-            <a:r>
-              <a:rPr sz="1000" b="1">
+          </a:p>
+        </p:txBody>
+      </p:sp>
+      <p:sp>
+        <p:nvSpPr>
+          <p:cNvPr id="20" name="Rectangle 19"/>
+          <p:cNvSpPr/>
+          <p:nvPr/>
+        </p:nvSpPr>
+        <p:spPr>
+          <a:xfrm>
+            <a:off x="868680" y="5522976"/>
+            <a:ext cx="530352" cy="713232"/>
+          </a:xfrm>
+          <a:prstGeom prst="rect">
+            <a:avLst/>
+          </a:prstGeom>
+          <a:solidFill>
+            <a:srgbClr val="D97706"/>
+          </a:solidFill>
+          <a:ln>
+            <a:noFill/>
+          </a:ln>
+        </p:spPr>
+        <p:style>
+          <a:lnRef idx="1">
+            <a:schemeClr val="accent1"/>
+          </a:lnRef>
+          <a:fillRef idx="3">
+            <a:schemeClr val="accent1"/>
+          </a:fillRef>
+          <a:effectRef idx="2">
+            <a:schemeClr val="accent1"/>
+          </a:effectRef>
+          <a:fontRef idx="minor">
+            <a:schemeClr val="lt1"/>
+          </a:fontRef>
+        </p:style>
+        <p:txBody>
+          <a:bodyPr rtlCol="0" anchor="ctr" wrap="square" lIns="101600" rIns="101600" tIns="38100" bIns="38100"/>
+          <a:lstStyle/>
+          <a:p>
+            <a:pPr algn="ctr"/>
+            <a:r>
+              <a:rPr sz="1500" b="1">
                 <a:solidFill>
                   <a:srgbClr val="FFFFFF"/>
                 </a:solidFill>
+                <a:latin typeface="Arial"/>
               </a:rPr>
               <a:t>4</a:t>
             </a:r>
@@ -6488,14 +7118,14 @@
       </p:sp>
       <p:sp>
         <p:nvSpPr>
-          <p:cNvPr id="24" name="TextBox 23"/>
+          <p:cNvPr id="21" name="TextBox 20"/>
           <p:cNvSpPr txBox="1"/>
           <p:nvPr/>
         </p:nvSpPr>
         <p:spPr>
           <a:xfrm>
-            <a:off x="1783080" y="5833872"/>
-            <a:ext cx="9006840" cy="347472"/>
+            <a:off x="1572768" y="5669280"/>
+            <a:ext cx="9372600" cy="384048"/>
           </a:xfrm>
           <a:prstGeom prst="rect">
             <a:avLst/>
@@ -6503,31 +7133,32 @@
           <a:noFill/>
         </p:spPr>
         <p:txBody>
-          <a:bodyPr wrap="square">
+          <a:bodyPr wrap="square" lIns="0" rIns="0" tIns="0" bIns="0">
             <a:spAutoFit/>
           </a:bodyPr>
           <a:lstStyle/>
           <a:p>
             <a:r>
-              <a:rPr sz="1700" b="0">
-                <a:solidFill>
-                  <a:srgbClr val="1A202C"/>
-                </a:solidFill>
+              <a:rPr sz="1500" b="0">
+                <a:solidFill>
+                  <a:srgbClr val="111827"/>
+                </a:solidFill>
+                <a:latin typeface="Arial"/>
               </a:rPr>
-              <a:t>Name the step that helped you most.</a:t>
-            </a:r>
-          </a:p>
-        </p:txBody>
-      </p:sp>
-      <p:sp>
-        <p:nvSpPr>
-          <p:cNvPr id="25" name="TextBox 24"/>
+              <a:t>Write one clear response.</a:t>
+            </a:r>
+          </a:p>
+        </p:txBody>
+      </p:sp>
+      <p:sp>
+        <p:nvSpPr>
+          <p:cNvPr id="22" name="TextBox 21"/>
           <p:cNvSpPr txBox="1"/>
           <p:nvPr/>
         </p:nvSpPr>
         <p:spPr>
           <a:xfrm>
-            <a:off x="777240" y="6419088"/>
+            <a:off x="685800" y="6419088"/>
             <a:ext cx="10835640" cy="228600"/>
           </a:xfrm>
           <a:prstGeom prst="rect">
@@ -6536,7 +7167,7 @@
           <a:noFill/>
         </p:spPr>
         <p:txBody>
-          <a:bodyPr wrap="square">
+          <a:bodyPr wrap="square" lIns="0" rIns="0" tIns="0" bIns="0">
             <a:spAutoFit/>
           </a:bodyPr>
           <a:lstStyle/>
@@ -6545,8 +7176,9 @@
             <a:r>
               <a:rPr sz="1000" b="0">
                 <a:solidFill>
-                  <a:srgbClr val="5B677D"/>
-                </a:solidFill>
+                  <a:srgbClr val="475569"/>
+                </a:solidFill>
+                <a:latin typeface="Arial"/>
               </a:rPr>
               <a:t>Listen • Talk • Try • Explain</a:t>
             </a:r>
@@ -6564,6 +7196,14 @@
 <file path=ppt/slides/slide6.xml><?xml version="1.0" encoding="utf-8"?>
 <p:sld xmlns:a="http://schemas.openxmlformats.org/drawingml/2006/main" xmlns:p="http://schemas.openxmlformats.org/presentationml/2006/main" xmlns:r="http://schemas.openxmlformats.org/officeDocument/2006/relationships">
   <p:cSld>
+    <p:bg>
+      <p:bgPr>
+        <a:solidFill>
+          <a:srgbClr val="F8FAFC"/>
+        </a:solidFill>
+        <a:effectLst/>
+      </p:bgPr>
+    </p:bg>
     <p:spTree>
       <p:nvGrpSpPr>
         <p:cNvPr id="1" name=""/>
@@ -6580,13 +7220,13 @@
         <p:spPr>
           <a:xfrm>
             <a:off x="0" y="0"/>
-            <a:ext cx="12191695" cy="914400"/>
-          </a:xfrm>
-          <a:prstGeom prst="rect">
-            <a:avLst/>
-          </a:prstGeom>
-          <a:solidFill>
-            <a:srgbClr val="BE123C"/>
+            <a:ext cx="12191695" cy="713232"/>
+          </a:xfrm>
+          <a:prstGeom prst="rect">
+            <a:avLst/>
+          </a:prstGeom>
+          <a:solidFill>
+            <a:srgbClr val="111827"/>
           </a:solidFill>
           <a:ln>
             <a:noFill/>
@@ -6622,14 +7262,14 @@
         </p:nvSpPr>
         <p:spPr>
           <a:xfrm>
-            <a:off x="0" y="914400"/>
-            <a:ext cx="164592" cy="5943600"/>
-          </a:xfrm>
-          <a:prstGeom prst="rect">
-            <a:avLst/>
-          </a:prstGeom>
-          <a:solidFill>
-            <a:srgbClr val="BE123C"/>
+            <a:off x="0" y="713232"/>
+            <a:ext cx="12191695" cy="82296"/>
+          </a:xfrm>
+          <a:prstGeom prst="rect">
+            <a:avLst/>
+          </a:prstGeom>
+          <a:solidFill>
+            <a:srgbClr val="FCD116"/>
           </a:solidFill>
           <a:ln>
             <a:noFill/>
@@ -6659,125 +7299,23 @@
       </p:sp>
       <p:sp>
         <p:nvSpPr>
-          <p:cNvPr id="4" name="TextBox 3"/>
-          <p:cNvSpPr txBox="1"/>
-          <p:nvPr/>
-        </p:nvSpPr>
-        <p:spPr>
-          <a:xfrm>
-            <a:off x="594360" y="246888"/>
-            <a:ext cx="2926080" cy="320040"/>
-          </a:xfrm>
-          <a:prstGeom prst="rect">
-            <a:avLst/>
-          </a:prstGeom>
-          <a:noFill/>
-        </p:spPr>
-        <p:txBody>
-          <a:bodyPr wrap="square">
-            <a:spAutoFit/>
-          </a:bodyPr>
-          <a:lstStyle/>
-          <a:p>
-            <a:r>
-              <a:rPr sz="1300" b="1">
-                <a:solidFill>
-                  <a:srgbClr val="FFFFFF"/>
-                </a:solidFill>
-              </a:rPr>
-              <a:t>6. PRACTICE</a:t>
-            </a:r>
-          </a:p>
-        </p:txBody>
-      </p:sp>
-      <p:sp>
-        <p:nvSpPr>
-          <p:cNvPr id="5" name="TextBox 4"/>
-          <p:cNvSpPr txBox="1"/>
-          <p:nvPr/>
-        </p:nvSpPr>
-        <p:spPr>
-          <a:xfrm>
-            <a:off x="7772400" y="246888"/>
-            <a:ext cx="3840480" cy="320040"/>
-          </a:xfrm>
-          <a:prstGeom prst="rect">
-            <a:avLst/>
-          </a:prstGeom>
-          <a:noFill/>
-        </p:spPr>
-        <p:txBody>
-          <a:bodyPr wrap="square">
-            <a:spAutoFit/>
-          </a:bodyPr>
-          <a:lstStyle/>
-          <a:p>
-            <a:pPr algn="r"/>
-            <a:r>
-              <a:rPr sz="1100" b="0">
-                <a:solidFill>
-                  <a:srgbClr val="FFFFFF"/>
-                </a:solidFill>
-              </a:rPr>
-              <a:t>p7_t1_integrated_science_1205</a:t>
-            </a:r>
-          </a:p>
-        </p:txBody>
-      </p:sp>
-      <p:sp>
-        <p:nvSpPr>
-          <p:cNvPr id="6" name="TextBox 5"/>
-          <p:cNvSpPr txBox="1"/>
-          <p:nvPr/>
-        </p:nvSpPr>
-        <p:spPr>
-          <a:xfrm>
-            <a:off x="640080" y="1143000"/>
-            <a:ext cx="10972800" cy="685800"/>
-          </a:xfrm>
-          <a:prstGeom prst="rect">
-            <a:avLst/>
-          </a:prstGeom>
-          <a:noFill/>
-        </p:spPr>
-        <p:txBody>
-          <a:bodyPr wrap="square">
-            <a:spAutoFit/>
-          </a:bodyPr>
-          <a:lstStyle/>
-          <a:p>
-            <a:r>
-              <a:rPr sz="2800" b="1">
-                <a:solidFill>
-                  <a:srgbClr val="1A202C"/>
-                </a:solidFill>
-              </a:rPr>
-              <a:t>Try it together</a:t>
-            </a:r>
-          </a:p>
-        </p:txBody>
-      </p:sp>
-      <p:sp>
-        <p:nvSpPr>
-          <p:cNvPr id="7" name="Rounded Rectangle 6"/>
+          <p:cNvPr id="4" name="Rectangle 3"/>
           <p:cNvSpPr/>
           <p:nvPr/>
         </p:nvSpPr>
         <p:spPr>
           <a:xfrm>
-            <a:off x="777240" y="1993392"/>
-            <a:ext cx="10835640" cy="1005840"/>
-          </a:xfrm>
-          <a:prstGeom prst="roundRect">
-            <a:avLst/>
-          </a:prstGeom>
-          <a:solidFill>
-            <a:srgbClr val="FFFBEB"/>
-          </a:solidFill>
-          <a:ln w="15240">
-            <a:solidFill>
-              <a:srgbClr val="BE123C"/>
-            </a:solidFill>
+            <a:off x="0" y="795528"/>
+            <a:ext cx="12191695" cy="64008"/>
+          </a:xfrm>
+          <a:prstGeom prst="rect">
+            <a:avLst/>
+          </a:prstGeom>
+          <a:solidFill>
+            <a:srgbClr val="D90000"/>
+          </a:solidFill>
+          <a:ln>
+            <a:noFill/>
           </a:ln>
         </p:spPr>
         <p:style>
@@ -6804,58 +7342,23 @@
       </p:sp>
       <p:sp>
         <p:nvSpPr>
-          <p:cNvPr id="8" name="TextBox 7"/>
-          <p:cNvSpPr txBox="1"/>
-          <p:nvPr/>
-        </p:nvSpPr>
-        <p:spPr>
-          <a:xfrm>
-            <a:off x="1051560" y="2212848"/>
-            <a:ext cx="10287000" cy="502920"/>
-          </a:xfrm>
-          <a:prstGeom prst="rect">
-            <a:avLst/>
-          </a:prstGeom>
-          <a:noFill/>
-        </p:spPr>
-        <p:txBody>
-          <a:bodyPr wrap="square">
-            <a:spAutoFit/>
-          </a:bodyPr>
-          <a:lstStyle/>
-          <a:p>
-            <a:r>
-              <a:rPr sz="2100" b="1">
-                <a:solidFill>
-                  <a:srgbClr val="1A202C"/>
-                </a:solidFill>
-              </a:rPr>
-              <a:t>What materials did we use to represent the backbone in our model?</a:t>
-            </a:r>
-          </a:p>
-        </p:txBody>
-      </p:sp>
-      <p:sp>
-        <p:nvSpPr>
-          <p:cNvPr id="9" name="Rounded Rectangle 8"/>
+          <p:cNvPr id="5" name="Rectangle 4"/>
           <p:cNvSpPr/>
           <p:nvPr/>
         </p:nvSpPr>
         <p:spPr>
           <a:xfrm>
-            <a:off x="1005840" y="3246120"/>
-            <a:ext cx="10149840" cy="731520"/>
-          </a:xfrm>
-          <a:prstGeom prst="roundRect">
-            <a:avLst/>
-          </a:prstGeom>
-          <a:solidFill>
-            <a:srgbClr val="F8FAFC"/>
-          </a:solidFill>
-          <a:ln w="15240">
-            <a:solidFill>
-              <a:srgbClr val="CBD5E1"/>
-            </a:solidFill>
+            <a:off x="0" y="859536"/>
+            <a:ext cx="164592" cy="5998464"/>
+          </a:xfrm>
+          <a:prstGeom prst="rect">
+            <a:avLst/>
+          </a:prstGeom>
+          <a:solidFill>
+            <a:srgbClr val="BE123C"/>
+          </a:solidFill>
+          <a:ln>
+            <a:noFill/>
           </a:ln>
         </p:spPr>
         <p:style>
@@ -6882,23 +7385,128 @@
       </p:sp>
       <p:sp>
         <p:nvSpPr>
-          <p:cNvPr id="10" name="Oval 9"/>
+          <p:cNvPr id="6" name="TextBox 5"/>
+          <p:cNvSpPr txBox="1"/>
+          <p:nvPr/>
+        </p:nvSpPr>
+        <p:spPr>
+          <a:xfrm>
+            <a:off x="502920" y="210312"/>
+            <a:ext cx="3200400" cy="256032"/>
+          </a:xfrm>
+          <a:prstGeom prst="rect">
+            <a:avLst/>
+          </a:prstGeom>
+          <a:noFill/>
+        </p:spPr>
+        <p:txBody>
+          <a:bodyPr wrap="square" lIns="0" rIns="0" tIns="0" bIns="0">
+            <a:spAutoFit/>
+          </a:bodyPr>
+          <a:lstStyle/>
+          <a:p>
+            <a:r>
+              <a:rPr sz="1200" b="1">
+                <a:solidFill>
+                  <a:srgbClr val="FFFFFF"/>
+                </a:solidFill>
+                <a:latin typeface="Arial"/>
+              </a:rPr>
+              <a:t>6. PRACTICE</a:t>
+            </a:r>
+          </a:p>
+        </p:txBody>
+      </p:sp>
+      <p:sp>
+        <p:nvSpPr>
+          <p:cNvPr id="7" name="TextBox 6"/>
+          <p:cNvSpPr txBox="1"/>
+          <p:nvPr/>
+        </p:nvSpPr>
+        <p:spPr>
+          <a:xfrm>
+            <a:off x="7589520" y="210312"/>
+            <a:ext cx="4069080" cy="256032"/>
+          </a:xfrm>
+          <a:prstGeom prst="rect">
+            <a:avLst/>
+          </a:prstGeom>
+          <a:noFill/>
+        </p:spPr>
+        <p:txBody>
+          <a:bodyPr wrap="square" lIns="0" rIns="0" tIns="0" bIns="0">
+            <a:spAutoFit/>
+          </a:bodyPr>
+          <a:lstStyle/>
+          <a:p>
+            <a:pPr algn="r"/>
+            <a:r>
+              <a:rPr sz="1000" b="0">
+                <a:solidFill>
+                  <a:srgbClr val="FFFFFF"/>
+                </a:solidFill>
+                <a:latin typeface="Arial"/>
+              </a:rPr>
+              <a:t>p7_t1_integrated_science_1205</a:t>
+            </a:r>
+          </a:p>
+        </p:txBody>
+      </p:sp>
+      <p:sp>
+        <p:nvSpPr>
+          <p:cNvPr id="8" name="TextBox 7"/>
+          <p:cNvSpPr txBox="1"/>
+          <p:nvPr/>
+        </p:nvSpPr>
+        <p:spPr>
+          <a:xfrm>
+            <a:off x="594360" y="1042415"/>
+            <a:ext cx="11109960" cy="566928"/>
+          </a:xfrm>
+          <a:prstGeom prst="rect">
+            <a:avLst/>
+          </a:prstGeom>
+          <a:noFill/>
+        </p:spPr>
+        <p:txBody>
+          <a:bodyPr wrap="square" lIns="0" rIns="0" tIns="0" bIns="0">
+            <a:spAutoFit/>
+          </a:bodyPr>
+          <a:lstStyle/>
+          <a:p>
+            <a:r>
+              <a:rPr sz="2600" b="1">
+                <a:solidFill>
+                  <a:srgbClr val="111827"/>
+                </a:solidFill>
+                <a:latin typeface="Arial"/>
+              </a:rPr>
+              <a:t>Try it together</a:t>
+            </a:r>
+          </a:p>
+        </p:txBody>
+      </p:sp>
+      <p:sp>
+        <p:nvSpPr>
+          <p:cNvPr id="9" name="Rectangle 8"/>
           <p:cNvSpPr/>
           <p:nvPr/>
         </p:nvSpPr>
         <p:spPr>
           <a:xfrm>
-            <a:off x="1234440" y="3364991"/>
-            <a:ext cx="347472" cy="347472"/>
-          </a:xfrm>
-          <a:prstGeom prst="ellipse">
-            <a:avLst/>
-          </a:prstGeom>
-          <a:solidFill>
-            <a:srgbClr val="BE123C"/>
-          </a:solidFill>
-          <a:ln>
-            <a:noFill/>
+            <a:off x="685800" y="1874519"/>
+            <a:ext cx="10835640" cy="804672"/>
+          </a:xfrm>
+          <a:prstGeom prst="rect">
+            <a:avLst/>
+          </a:prstGeom>
+          <a:solidFill>
+            <a:srgbClr val="FFF7E0"/>
+          </a:solidFill>
+          <a:ln w="17780">
+            <a:solidFill>
+              <a:srgbClr val="BE123C"/>
+            </a:solidFill>
           </a:ln>
         </p:spPr>
         <p:style>
@@ -6916,98 +7524,40 @@
           </a:fontRef>
         </p:style>
         <p:txBody>
-          <a:bodyPr rtlCol="0" anchor="ctr"/>
+          <a:bodyPr rtlCol="0" anchor="ctr" wrap="square" lIns="101600" rIns="101600" tIns="38100" bIns="38100"/>
           <a:lstStyle/>
           <a:p>
             <a:pPr algn="ctr"/>
-          </a:p>
-        </p:txBody>
-      </p:sp>
-      <p:sp>
-        <p:nvSpPr>
-          <p:cNvPr id="11" name="TextBox 10"/>
-          <p:cNvSpPr txBox="1"/>
-          <p:nvPr/>
-        </p:nvSpPr>
-        <p:spPr>
-          <a:xfrm>
-            <a:off x="1234440" y="3410712"/>
-            <a:ext cx="347472" cy="182880"/>
-          </a:xfrm>
-          <a:prstGeom prst="rect">
-            <a:avLst/>
-          </a:prstGeom>
-          <a:noFill/>
-        </p:spPr>
-        <p:txBody>
-          <a:bodyPr wrap="square">
-            <a:spAutoFit/>
-          </a:bodyPr>
-          <a:lstStyle/>
-          <a:p>
-            <a:pPr algn="ctr"/>
-            <a:r>
-              <a:rPr sz="1000" b="1">
-                <a:solidFill>
-                  <a:srgbClr val="FFFFFF"/>
-                </a:solidFill>
+            <a:r>
+              <a:rPr sz="1900" b="1">
+                <a:solidFill>
+                  <a:srgbClr val="111827"/>
+                </a:solidFill>
+                <a:latin typeface="Arial"/>
               </a:rPr>
-              <a:t>1</a:t>
-            </a:r>
-          </a:p>
-        </p:txBody>
-      </p:sp>
-      <p:sp>
-        <p:nvSpPr>
-          <p:cNvPr id="12" name="TextBox 11"/>
-          <p:cNvSpPr txBox="1"/>
-          <p:nvPr/>
-        </p:nvSpPr>
-        <p:spPr>
-          <a:xfrm>
-            <a:off x="1783080" y="3364991"/>
-            <a:ext cx="9006840" cy="347472"/>
-          </a:xfrm>
-          <a:prstGeom prst="rect">
-            <a:avLst/>
-          </a:prstGeom>
-          <a:noFill/>
-        </p:spPr>
-        <p:txBody>
-          <a:bodyPr wrap="square">
-            <a:spAutoFit/>
-          </a:bodyPr>
-          <a:lstStyle/>
-          <a:p>
-            <a:r>
-              <a:rPr sz="1700" b="0">
-                <a:solidFill>
-                  <a:srgbClr val="1A202C"/>
-                </a:solidFill>
-              </a:rPr>
-              <a:t>What is the difference between apparatus and procedure?</a:t>
-            </a:r>
-          </a:p>
-        </p:txBody>
-      </p:sp>
-      <p:sp>
-        <p:nvSpPr>
-          <p:cNvPr id="13" name="Rounded Rectangle 12"/>
+              <a:t>What materials did we use to represent the backbone in our model?</a:t>
+            </a:r>
+          </a:p>
+        </p:txBody>
+      </p:sp>
+      <p:sp>
+        <p:nvSpPr>
+          <p:cNvPr id="10" name="Rectangle 9"/>
           <p:cNvSpPr/>
           <p:nvPr/>
         </p:nvSpPr>
         <p:spPr>
           <a:xfrm>
-            <a:off x="1005840" y="4178808"/>
-            <a:ext cx="10149840" cy="731520"/>
-          </a:xfrm>
-          <a:prstGeom prst="roundRect">
-            <a:avLst/>
-          </a:prstGeom>
-          <a:solidFill>
-            <a:srgbClr val="F8FAFC"/>
-          </a:solidFill>
-          <a:ln w="15240">
+            <a:off x="868680" y="2971800"/>
+            <a:ext cx="10378440" cy="713232"/>
+          </a:xfrm>
+          <a:prstGeom prst="rect">
+            <a:avLst/>
+          </a:prstGeom>
+          <a:solidFill>
+            <a:srgbClr val="FFFFFF"/>
+          </a:solidFill>
+          <a:ln w="11430">
             <a:solidFill>
               <a:srgbClr val="CBD5E1"/>
             </a:solidFill>
@@ -7037,16 +7587,16 @@
       </p:sp>
       <p:sp>
         <p:nvSpPr>
-          <p:cNvPr id="14" name="Oval 13"/>
+          <p:cNvPr id="11" name="Rectangle 10"/>
           <p:cNvSpPr/>
           <p:nvPr/>
         </p:nvSpPr>
         <p:spPr>
           <a:xfrm>
-            <a:off x="1234440" y="4297680"/>
-            <a:ext cx="347472" cy="347472"/>
-          </a:xfrm>
-          <a:prstGeom prst="ellipse">
+            <a:off x="868680" y="2971800"/>
+            <a:ext cx="530352" cy="713232"/>
+          </a:xfrm>
+          <a:prstGeom prst="rect">
             <a:avLst/>
           </a:prstGeom>
           <a:solidFill>
@@ -7071,23 +7621,32 @@
           </a:fontRef>
         </p:style>
         <p:txBody>
-          <a:bodyPr rtlCol="0" anchor="ctr"/>
+          <a:bodyPr rtlCol="0" anchor="ctr" wrap="square" lIns="101600" rIns="101600" tIns="38100" bIns="38100"/>
           <a:lstStyle/>
           <a:p>
             <a:pPr algn="ctr"/>
-          </a:p>
-        </p:txBody>
-      </p:sp>
-      <p:sp>
-        <p:nvSpPr>
-          <p:cNvPr id="15" name="TextBox 14"/>
+            <a:r>
+              <a:rPr sz="1500" b="1">
+                <a:solidFill>
+                  <a:srgbClr val="FFFFFF"/>
+                </a:solidFill>
+                <a:latin typeface="Arial"/>
+              </a:rPr>
+              <a:t>1</a:t>
+            </a:r>
+          </a:p>
+        </p:txBody>
+      </p:sp>
+      <p:sp>
+        <p:nvSpPr>
+          <p:cNvPr id="12" name="TextBox 11"/>
           <p:cNvSpPr txBox="1"/>
           <p:nvPr/>
         </p:nvSpPr>
         <p:spPr>
           <a:xfrm>
-            <a:off x="1234440" y="4343400"/>
-            <a:ext cx="347472" cy="182880"/>
+            <a:off x="1572768" y="3118104"/>
+            <a:ext cx="9372600" cy="384048"/>
           </a:xfrm>
           <a:prstGeom prst="rect">
             <a:avLst/>
@@ -7095,74 +7654,41 @@
           <a:noFill/>
         </p:spPr>
         <p:txBody>
-          <a:bodyPr wrap="square">
+          <a:bodyPr wrap="square" lIns="0" rIns="0" tIns="0" bIns="0">
             <a:spAutoFit/>
           </a:bodyPr>
           <a:lstStyle/>
           <a:p>
-            <a:pPr algn="ctr"/>
-            <a:r>
-              <a:rPr sz="1000" b="1">
-                <a:solidFill>
-                  <a:srgbClr val="FFFFFF"/>
-                </a:solidFill>
+            <a:r>
+              <a:rPr sz="1500" b="0">
+                <a:solidFill>
+                  <a:srgbClr val="111827"/>
+                </a:solidFill>
+                <a:latin typeface="Arial"/>
               </a:rPr>
-              <a:t>2</a:t>
-            </a:r>
-          </a:p>
-        </p:txBody>
-      </p:sp>
-      <p:sp>
-        <p:nvSpPr>
-          <p:cNvPr id="16" name="TextBox 15"/>
-          <p:cNvSpPr txBox="1"/>
-          <p:nvPr/>
-        </p:nvSpPr>
-        <p:spPr>
-          <a:xfrm>
-            <a:off x="1783080" y="4297680"/>
-            <a:ext cx="9006840" cy="347472"/>
-          </a:xfrm>
-          <a:prstGeom prst="rect">
-            <a:avLst/>
-          </a:prstGeom>
-          <a:noFill/>
-        </p:spPr>
-        <p:txBody>
-          <a:bodyPr wrap="square">
-            <a:spAutoFit/>
-          </a:bodyPr>
-          <a:lstStyle/>
-          <a:p>
-            <a:r>
-              <a:rPr sz="1700" b="0">
-                <a:solidFill>
-                  <a:srgbClr val="1A202C"/>
-                </a:solidFill>
-              </a:rPr>
-              <a:t>Why do we need an 'Aim' in our report?</a:t>
-            </a:r>
-          </a:p>
-        </p:txBody>
-      </p:sp>
-      <p:sp>
-        <p:nvSpPr>
-          <p:cNvPr id="17" name="Rounded Rectangle 16"/>
+              <a:t>What is the difference between apparatus and procedure?</a:t>
+            </a:r>
+          </a:p>
+        </p:txBody>
+      </p:sp>
+      <p:sp>
+        <p:nvSpPr>
+          <p:cNvPr id="13" name="Rectangle 12"/>
           <p:cNvSpPr/>
           <p:nvPr/>
         </p:nvSpPr>
         <p:spPr>
           <a:xfrm>
-            <a:off x="1005840" y="5111496"/>
-            <a:ext cx="10149840" cy="731520"/>
-          </a:xfrm>
-          <a:prstGeom prst="roundRect">
-            <a:avLst/>
-          </a:prstGeom>
-          <a:solidFill>
-            <a:srgbClr val="F8FAFC"/>
-          </a:solidFill>
-          <a:ln w="15240">
+            <a:off x="868680" y="3822191"/>
+            <a:ext cx="10378440" cy="713232"/>
+          </a:xfrm>
+          <a:prstGeom prst="rect">
+            <a:avLst/>
+          </a:prstGeom>
+          <a:solidFill>
+            <a:srgbClr val="FFFFFF"/>
+          </a:solidFill>
+          <a:ln w="11430">
             <a:solidFill>
               <a:srgbClr val="CBD5E1"/>
             </a:solidFill>
@@ -7192,16 +7718,16 @@
       </p:sp>
       <p:sp>
         <p:nvSpPr>
-          <p:cNvPr id="18" name="Oval 17"/>
+          <p:cNvPr id="14" name="Rectangle 13"/>
           <p:cNvSpPr/>
           <p:nvPr/>
         </p:nvSpPr>
         <p:spPr>
           <a:xfrm>
-            <a:off x="1234440" y="5230368"/>
-            <a:ext cx="347472" cy="347472"/>
-          </a:xfrm>
-          <a:prstGeom prst="ellipse">
+            <a:off x="868680" y="3822191"/>
+            <a:ext cx="530352" cy="713232"/>
+          </a:xfrm>
+          <a:prstGeom prst="rect">
             <a:avLst/>
           </a:prstGeom>
           <a:solidFill>
@@ -7226,23 +7752,32 @@
           </a:fontRef>
         </p:style>
         <p:txBody>
-          <a:bodyPr rtlCol="0" anchor="ctr"/>
+          <a:bodyPr rtlCol="0" anchor="ctr" wrap="square" lIns="101600" rIns="101600" tIns="38100" bIns="38100"/>
           <a:lstStyle/>
           <a:p>
             <a:pPr algn="ctr"/>
-          </a:p>
-        </p:txBody>
-      </p:sp>
-      <p:sp>
-        <p:nvSpPr>
-          <p:cNvPr id="19" name="TextBox 18"/>
+            <a:r>
+              <a:rPr sz="1500" b="1">
+                <a:solidFill>
+                  <a:srgbClr val="FFFFFF"/>
+                </a:solidFill>
+                <a:latin typeface="Arial"/>
+              </a:rPr>
+              <a:t>2</a:t>
+            </a:r>
+          </a:p>
+        </p:txBody>
+      </p:sp>
+      <p:sp>
+        <p:nvSpPr>
+          <p:cNvPr id="15" name="TextBox 14"/>
           <p:cNvSpPr txBox="1"/>
           <p:nvPr/>
         </p:nvSpPr>
         <p:spPr>
           <a:xfrm>
-            <a:off x="1234440" y="5276088"/>
-            <a:ext cx="347472" cy="182880"/>
+            <a:off x="1572768" y="3968496"/>
+            <a:ext cx="9372600" cy="384048"/>
           </a:xfrm>
           <a:prstGeom prst="rect">
             <a:avLst/>
@@ -7250,17 +7785,114 @@
           <a:noFill/>
         </p:spPr>
         <p:txBody>
-          <a:bodyPr wrap="square">
+          <a:bodyPr wrap="square" lIns="0" rIns="0" tIns="0" bIns="0">
             <a:spAutoFit/>
           </a:bodyPr>
           <a:lstStyle/>
           <a:p>
+            <a:r>
+              <a:rPr sz="1500" b="0">
+                <a:solidFill>
+                  <a:srgbClr val="111827"/>
+                </a:solidFill>
+                <a:latin typeface="Arial"/>
+              </a:rPr>
+              <a:t>Why do we need an 'Aim' in our report?</a:t>
+            </a:r>
+          </a:p>
+        </p:txBody>
+      </p:sp>
+      <p:sp>
+        <p:nvSpPr>
+          <p:cNvPr id="16" name="Rectangle 15"/>
+          <p:cNvSpPr/>
+          <p:nvPr/>
+        </p:nvSpPr>
+        <p:spPr>
+          <a:xfrm>
+            <a:off x="868680" y="4672584"/>
+            <a:ext cx="10378440" cy="713232"/>
+          </a:xfrm>
+          <a:prstGeom prst="rect">
+            <a:avLst/>
+          </a:prstGeom>
+          <a:solidFill>
+            <a:srgbClr val="FFFFFF"/>
+          </a:solidFill>
+          <a:ln w="11430">
+            <a:solidFill>
+              <a:srgbClr val="CBD5E1"/>
+            </a:solidFill>
+          </a:ln>
+        </p:spPr>
+        <p:style>
+          <a:lnRef idx="1">
+            <a:schemeClr val="accent1"/>
+          </a:lnRef>
+          <a:fillRef idx="3">
+            <a:schemeClr val="accent1"/>
+          </a:fillRef>
+          <a:effectRef idx="2">
+            <a:schemeClr val="accent1"/>
+          </a:effectRef>
+          <a:fontRef idx="minor">
+            <a:schemeClr val="lt1"/>
+          </a:fontRef>
+        </p:style>
+        <p:txBody>
+          <a:bodyPr rtlCol="0" anchor="ctr"/>
+          <a:lstStyle/>
+          <a:p>
             <a:pPr algn="ctr"/>
-            <a:r>
-              <a:rPr sz="1000" b="1">
+          </a:p>
+        </p:txBody>
+      </p:sp>
+      <p:sp>
+        <p:nvSpPr>
+          <p:cNvPr id="17" name="Rectangle 16"/>
+          <p:cNvSpPr/>
+          <p:nvPr/>
+        </p:nvSpPr>
+        <p:spPr>
+          <a:xfrm>
+            <a:off x="868680" y="4672584"/>
+            <a:ext cx="530352" cy="713232"/>
+          </a:xfrm>
+          <a:prstGeom prst="rect">
+            <a:avLst/>
+          </a:prstGeom>
+          <a:solidFill>
+            <a:srgbClr val="BE123C"/>
+          </a:solidFill>
+          <a:ln>
+            <a:noFill/>
+          </a:ln>
+        </p:spPr>
+        <p:style>
+          <a:lnRef idx="1">
+            <a:schemeClr val="accent1"/>
+          </a:lnRef>
+          <a:fillRef idx="3">
+            <a:schemeClr val="accent1"/>
+          </a:fillRef>
+          <a:effectRef idx="2">
+            <a:schemeClr val="accent1"/>
+          </a:effectRef>
+          <a:fontRef idx="minor">
+            <a:schemeClr val="lt1"/>
+          </a:fontRef>
+        </p:style>
+        <p:txBody>
+          <a:bodyPr rtlCol="0" anchor="ctr" wrap="square" lIns="101600" rIns="101600" tIns="38100" bIns="38100"/>
+          <a:lstStyle/>
+          <a:p>
+            <a:pPr algn="ctr"/>
+            <a:r>
+              <a:rPr sz="1500" b="1">
                 <a:solidFill>
                   <a:srgbClr val="FFFFFF"/>
                 </a:solidFill>
+                <a:latin typeface="Arial"/>
               </a:rPr>
               <a:t>3</a:t>
             </a:r>
@@ -7269,14 +7901,14 @@
       </p:sp>
       <p:sp>
         <p:nvSpPr>
-          <p:cNvPr id="20" name="TextBox 19"/>
+          <p:cNvPr id="18" name="TextBox 17"/>
           <p:cNvSpPr txBox="1"/>
           <p:nvPr/>
         </p:nvSpPr>
         <p:spPr>
           <a:xfrm>
-            <a:off x="1783080" y="5230368"/>
-            <a:ext cx="9006840" cy="347472"/>
+            <a:off x="1572768" y="4818888"/>
+            <a:ext cx="9372600" cy="384048"/>
           </a:xfrm>
           <a:prstGeom prst="rect">
             <a:avLst/>
@@ -7284,16 +7916,17 @@
           <a:noFill/>
         </p:spPr>
         <p:txBody>
-          <a:bodyPr wrap="square">
+          <a:bodyPr wrap="square" lIns="0" rIns="0" tIns="0" bIns="0">
             <a:spAutoFit/>
           </a:bodyPr>
           <a:lstStyle/>
           <a:p>
             <a:r>
-              <a:rPr sz="1700" b="0">
-                <a:solidFill>
-                  <a:srgbClr val="1A202C"/>
-                </a:solidFill>
+              <a:rPr sz="1500" b="0">
+                <a:solidFill>
+                  <a:srgbClr val="111827"/>
+                </a:solidFill>
+                <a:latin typeface="Arial"/>
               </a:rPr>
               <a:t>Agree on one answer before writing.</a:t>
             </a:r>
@@ -7302,14 +7935,111 @@
       </p:sp>
       <p:sp>
         <p:nvSpPr>
+          <p:cNvPr id="19" name="Rectangle 18"/>
+          <p:cNvSpPr/>
+          <p:nvPr/>
+        </p:nvSpPr>
+        <p:spPr>
+          <a:xfrm>
+            <a:off x="868680" y="5522976"/>
+            <a:ext cx="10378440" cy="713232"/>
+          </a:xfrm>
+          <a:prstGeom prst="rect">
+            <a:avLst/>
+          </a:prstGeom>
+          <a:solidFill>
+            <a:srgbClr val="FFFFFF"/>
+          </a:solidFill>
+          <a:ln w="11430">
+            <a:solidFill>
+              <a:srgbClr val="CBD5E1"/>
+            </a:solidFill>
+          </a:ln>
+        </p:spPr>
+        <p:style>
+          <a:lnRef idx="1">
+            <a:schemeClr val="accent1"/>
+          </a:lnRef>
+          <a:fillRef idx="3">
+            <a:schemeClr val="accent1"/>
+          </a:fillRef>
+          <a:effectRef idx="2">
+            <a:schemeClr val="accent1"/>
+          </a:effectRef>
+          <a:fontRef idx="minor">
+            <a:schemeClr val="lt1"/>
+          </a:fontRef>
+        </p:style>
+        <p:txBody>
+          <a:bodyPr rtlCol="0" anchor="ctr"/>
+          <a:lstStyle/>
+          <a:p>
+            <a:pPr algn="ctr"/>
+          </a:p>
+        </p:txBody>
+      </p:sp>
+      <p:sp>
+        <p:nvSpPr>
+          <p:cNvPr id="20" name="Rectangle 19"/>
+          <p:cNvSpPr/>
+          <p:nvPr/>
+        </p:nvSpPr>
+        <p:spPr>
+          <a:xfrm>
+            <a:off x="868680" y="5522976"/>
+            <a:ext cx="530352" cy="713232"/>
+          </a:xfrm>
+          <a:prstGeom prst="rect">
+            <a:avLst/>
+          </a:prstGeom>
+          <a:solidFill>
+            <a:srgbClr val="BE123C"/>
+          </a:solidFill>
+          <a:ln>
+            <a:noFill/>
+          </a:ln>
+        </p:spPr>
+        <p:style>
+          <a:lnRef idx="1">
+            <a:schemeClr val="accent1"/>
+          </a:lnRef>
+          <a:fillRef idx="3">
+            <a:schemeClr val="accent1"/>
+          </a:fillRef>
+          <a:effectRef idx="2">
+            <a:schemeClr val="accent1"/>
+          </a:effectRef>
+          <a:fontRef idx="minor">
+            <a:schemeClr val="lt1"/>
+          </a:fontRef>
+        </p:style>
+        <p:txBody>
+          <a:bodyPr rtlCol="0" anchor="ctr" wrap="square" lIns="101600" rIns="101600" tIns="38100" bIns="38100"/>
+          <a:lstStyle/>
+          <a:p>
+            <a:pPr algn="ctr"/>
+            <a:r>
+              <a:rPr sz="1500" b="1">
+                <a:solidFill>
+                  <a:srgbClr val="FFFFFF"/>
+                </a:solidFill>
+                <a:latin typeface="Arial"/>
+              </a:rPr>
+              <a:t>4</a:t>
+            </a:r>
+          </a:p>
+        </p:txBody>
+      </p:sp>
+      <p:sp>
+        <p:nvSpPr>
           <p:cNvPr id="21" name="TextBox 20"/>
           <p:cNvSpPr txBox="1"/>
           <p:nvPr/>
         </p:nvSpPr>
         <p:spPr>
           <a:xfrm>
-            <a:off x="777240" y="6419088"/>
-            <a:ext cx="10835640" cy="228600"/>
+            <a:off x="1572768" y="5669280"/>
+            <a:ext cx="9372600" cy="384048"/>
           </a:xfrm>
           <a:prstGeom prst="rect">
             <a:avLst/>
@@ -7317,17 +8047,52 @@
           <a:noFill/>
         </p:spPr>
         <p:txBody>
-          <a:bodyPr wrap="square">
+          <a:bodyPr wrap="square" lIns="0" rIns="0" tIns="0" bIns="0">
             <a:spAutoFit/>
           </a:bodyPr>
           <a:lstStyle/>
           <a:p>
+            <a:r>
+              <a:rPr sz="1500" b="0">
+                <a:solidFill>
+                  <a:srgbClr val="111827"/>
+                </a:solidFill>
+                <a:latin typeface="Arial"/>
+              </a:rPr>
+              <a:t>Write one clear response.</a:t>
+            </a:r>
+          </a:p>
+        </p:txBody>
+      </p:sp>
+      <p:sp>
+        <p:nvSpPr>
+          <p:cNvPr id="22" name="TextBox 21"/>
+          <p:cNvSpPr txBox="1"/>
+          <p:nvPr/>
+        </p:nvSpPr>
+        <p:spPr>
+          <a:xfrm>
+            <a:off x="685800" y="6419088"/>
+            <a:ext cx="10835640" cy="228600"/>
+          </a:xfrm>
+          <a:prstGeom prst="rect">
+            <a:avLst/>
+          </a:prstGeom>
+          <a:noFill/>
+        </p:spPr>
+        <p:txBody>
+          <a:bodyPr wrap="square" lIns="0" rIns="0" tIns="0" bIns="0">
+            <a:spAutoFit/>
+          </a:bodyPr>
+          <a:lstStyle/>
+          <a:p>
             <a:pPr algn="r"/>
             <a:r>
               <a:rPr sz="1000" b="0">
                 <a:solidFill>
-                  <a:srgbClr val="5B677D"/>
-                </a:solidFill>
+                  <a:srgbClr val="475569"/>
+                </a:solidFill>
+                <a:latin typeface="Arial"/>
               </a:rPr>
               <a:t>Listen • Talk • Try • Explain</a:t>
             </a:r>
@@ -7345,6 +8110,14 @@
 <file path=ppt/slides/slide7.xml><?xml version="1.0" encoding="utf-8"?>
 <p:sld xmlns:a="http://schemas.openxmlformats.org/drawingml/2006/main" xmlns:p="http://schemas.openxmlformats.org/presentationml/2006/main" xmlns:r="http://schemas.openxmlformats.org/officeDocument/2006/relationships">
   <p:cSld>
+    <p:bg>
+      <p:bgPr>
+        <a:solidFill>
+          <a:srgbClr val="F8FAFC"/>
+        </a:solidFill>
+        <a:effectLst/>
+      </p:bgPr>
+    </p:bg>
     <p:spTree>
       <p:nvGrpSpPr>
         <p:cNvPr id="1" name=""/>
@@ -7361,13 +8134,13 @@
         <p:spPr>
           <a:xfrm>
             <a:off x="0" y="0"/>
-            <a:ext cx="12191695" cy="914400"/>
-          </a:xfrm>
-          <a:prstGeom prst="rect">
-            <a:avLst/>
-          </a:prstGeom>
-          <a:solidFill>
-            <a:srgbClr val="166534"/>
+            <a:ext cx="12191695" cy="713232"/>
+          </a:xfrm>
+          <a:prstGeom prst="rect">
+            <a:avLst/>
+          </a:prstGeom>
+          <a:solidFill>
+            <a:srgbClr val="111827"/>
           </a:solidFill>
           <a:ln>
             <a:noFill/>
@@ -7403,14 +8176,14 @@
         </p:nvSpPr>
         <p:spPr>
           <a:xfrm>
-            <a:off x="0" y="914400"/>
-            <a:ext cx="164592" cy="5943600"/>
-          </a:xfrm>
-          <a:prstGeom prst="rect">
-            <a:avLst/>
-          </a:prstGeom>
-          <a:solidFill>
-            <a:srgbClr val="166534"/>
+            <a:off x="0" y="713232"/>
+            <a:ext cx="12191695" cy="82296"/>
+          </a:xfrm>
+          <a:prstGeom prst="rect">
+            <a:avLst/>
+          </a:prstGeom>
+          <a:solidFill>
+            <a:srgbClr val="FCD116"/>
           </a:solidFill>
           <a:ln>
             <a:noFill/>
@@ -7440,125 +8213,23 @@
       </p:sp>
       <p:sp>
         <p:nvSpPr>
-          <p:cNvPr id="4" name="TextBox 3"/>
-          <p:cNvSpPr txBox="1"/>
-          <p:nvPr/>
-        </p:nvSpPr>
-        <p:spPr>
-          <a:xfrm>
-            <a:off x="594360" y="246888"/>
-            <a:ext cx="2926080" cy="320040"/>
-          </a:xfrm>
-          <a:prstGeom prst="rect">
-            <a:avLst/>
-          </a:prstGeom>
-          <a:noFill/>
-        </p:spPr>
-        <p:txBody>
-          <a:bodyPr wrap="square">
-            <a:spAutoFit/>
-          </a:bodyPr>
-          <a:lstStyle/>
-          <a:p>
-            <a:r>
-              <a:rPr sz="1300" b="1">
-                <a:solidFill>
-                  <a:srgbClr val="FFFFFF"/>
-                </a:solidFill>
-              </a:rPr>
-              <a:t>7. ACTIVITY</a:t>
-            </a:r>
-          </a:p>
-        </p:txBody>
-      </p:sp>
-      <p:sp>
-        <p:nvSpPr>
-          <p:cNvPr id="5" name="TextBox 4"/>
-          <p:cNvSpPr txBox="1"/>
-          <p:nvPr/>
-        </p:nvSpPr>
-        <p:spPr>
-          <a:xfrm>
-            <a:off x="7772400" y="246888"/>
-            <a:ext cx="3840480" cy="320040"/>
-          </a:xfrm>
-          <a:prstGeom prst="rect">
-            <a:avLst/>
-          </a:prstGeom>
-          <a:noFill/>
-        </p:spPr>
-        <p:txBody>
-          <a:bodyPr wrap="square">
-            <a:spAutoFit/>
-          </a:bodyPr>
-          <a:lstStyle/>
-          <a:p>
-            <a:pPr algn="r"/>
-            <a:r>
-              <a:rPr sz="1100" b="0">
-                <a:solidFill>
-                  <a:srgbClr val="FFFFFF"/>
-                </a:solidFill>
-              </a:rPr>
-              <a:t>p7_t1_integrated_science_1205</a:t>
-            </a:r>
-          </a:p>
-        </p:txBody>
-      </p:sp>
-      <p:sp>
-        <p:nvSpPr>
-          <p:cNvPr id="6" name="TextBox 5"/>
-          <p:cNvSpPr txBox="1"/>
-          <p:nvPr/>
-        </p:nvSpPr>
-        <p:spPr>
-          <a:xfrm>
-            <a:off x="640080" y="1143000"/>
-            <a:ext cx="10972800" cy="685800"/>
-          </a:xfrm>
-          <a:prstGeom prst="rect">
-            <a:avLst/>
-          </a:prstGeom>
-          <a:noFill/>
-        </p:spPr>
-        <p:txBody>
-          <a:bodyPr wrap="square">
-            <a:spAutoFit/>
-          </a:bodyPr>
-          <a:lstStyle/>
-          <a:p>
-            <a:r>
-              <a:rPr sz="2800" b="1">
-                <a:solidFill>
-                  <a:srgbClr val="1A202C"/>
-                </a:solidFill>
-              </a:rPr>
-              <a:t>Activity challenge</a:t>
-            </a:r>
-          </a:p>
-        </p:txBody>
-      </p:sp>
-      <p:sp>
-        <p:nvSpPr>
-          <p:cNvPr id="7" name="Rounded Rectangle 6"/>
+          <p:cNvPr id="4" name="Rectangle 3"/>
           <p:cNvSpPr/>
           <p:nvPr/>
         </p:nvSpPr>
         <p:spPr>
           <a:xfrm>
-            <a:off x="777240" y="1993392"/>
-            <a:ext cx="10835640" cy="1005840"/>
-          </a:xfrm>
-          <a:prstGeom prst="roundRect">
-            <a:avLst/>
-          </a:prstGeom>
-          <a:solidFill>
-            <a:srgbClr val="FFFBEB"/>
-          </a:solidFill>
-          <a:ln w="15240">
-            <a:solidFill>
-              <a:srgbClr val="166534"/>
-            </a:solidFill>
+            <a:off x="0" y="795528"/>
+            <a:ext cx="12191695" cy="64008"/>
+          </a:xfrm>
+          <a:prstGeom prst="rect">
+            <a:avLst/>
+          </a:prstGeom>
+          <a:solidFill>
+            <a:srgbClr val="D90000"/>
+          </a:solidFill>
+          <a:ln>
+            <a:noFill/>
           </a:ln>
         </p:spPr>
         <p:style>
@@ -7585,58 +8256,23 @@
       </p:sp>
       <p:sp>
         <p:nvSpPr>
-          <p:cNvPr id="8" name="TextBox 7"/>
-          <p:cNvSpPr txBox="1"/>
-          <p:nvPr/>
-        </p:nvSpPr>
-        <p:spPr>
-          <a:xfrm>
-            <a:off x="1051560" y="2212848"/>
-            <a:ext cx="10287000" cy="502920"/>
-          </a:xfrm>
-          <a:prstGeom prst="rect">
-            <a:avLst/>
-          </a:prstGeom>
-          <a:noFill/>
-        </p:spPr>
-        <p:txBody>
-          <a:bodyPr wrap="square">
-            <a:spAutoFit/>
-          </a:bodyPr>
-          <a:lstStyle/>
-          <a:p>
-            <a:r>
-              <a:rPr sz="2100" b="1">
-                <a:solidFill>
-                  <a:srgbClr val="1A202C"/>
-                </a:solidFill>
-              </a:rPr>
-              <a:t>Group task:</a:t>
-            </a:r>
-          </a:p>
-        </p:txBody>
-      </p:sp>
-      <p:sp>
-        <p:nvSpPr>
-          <p:cNvPr id="9" name="Rounded Rectangle 8"/>
+          <p:cNvPr id="5" name="Rectangle 4"/>
           <p:cNvSpPr/>
           <p:nvPr/>
         </p:nvSpPr>
         <p:spPr>
           <a:xfrm>
-            <a:off x="1005840" y="3246120"/>
-            <a:ext cx="10149840" cy="621792"/>
-          </a:xfrm>
-          <a:prstGeom prst="roundRect">
-            <a:avLst/>
-          </a:prstGeom>
-          <a:solidFill>
-            <a:srgbClr val="F8FAFC"/>
-          </a:solidFill>
-          <a:ln w="15240">
-            <a:solidFill>
-              <a:srgbClr val="CBD5E1"/>
-            </a:solidFill>
+            <a:off x="0" y="859536"/>
+            <a:ext cx="164592" cy="5998464"/>
+          </a:xfrm>
+          <a:prstGeom prst="rect">
+            <a:avLst/>
+          </a:prstGeom>
+          <a:solidFill>
+            <a:srgbClr val="1B7F3A"/>
+          </a:solidFill>
+          <a:ln>
+            <a:noFill/>
           </a:ln>
         </p:spPr>
         <p:style>
@@ -7663,23 +8299,128 @@
       </p:sp>
       <p:sp>
         <p:nvSpPr>
-          <p:cNvPr id="10" name="Oval 9"/>
+          <p:cNvPr id="6" name="TextBox 5"/>
+          <p:cNvSpPr txBox="1"/>
+          <p:nvPr/>
+        </p:nvSpPr>
+        <p:spPr>
+          <a:xfrm>
+            <a:off x="502920" y="210312"/>
+            <a:ext cx="3200400" cy="256032"/>
+          </a:xfrm>
+          <a:prstGeom prst="rect">
+            <a:avLst/>
+          </a:prstGeom>
+          <a:noFill/>
+        </p:spPr>
+        <p:txBody>
+          <a:bodyPr wrap="square" lIns="0" rIns="0" tIns="0" bIns="0">
+            <a:spAutoFit/>
+          </a:bodyPr>
+          <a:lstStyle/>
+          <a:p>
+            <a:r>
+              <a:rPr sz="1200" b="1">
+                <a:solidFill>
+                  <a:srgbClr val="FFFFFF"/>
+                </a:solidFill>
+                <a:latin typeface="Arial"/>
+              </a:rPr>
+              <a:t>7. ACTIVITY</a:t>
+            </a:r>
+          </a:p>
+        </p:txBody>
+      </p:sp>
+      <p:sp>
+        <p:nvSpPr>
+          <p:cNvPr id="7" name="TextBox 6"/>
+          <p:cNvSpPr txBox="1"/>
+          <p:nvPr/>
+        </p:nvSpPr>
+        <p:spPr>
+          <a:xfrm>
+            <a:off x="7589520" y="210312"/>
+            <a:ext cx="4069080" cy="256032"/>
+          </a:xfrm>
+          <a:prstGeom prst="rect">
+            <a:avLst/>
+          </a:prstGeom>
+          <a:noFill/>
+        </p:spPr>
+        <p:txBody>
+          <a:bodyPr wrap="square" lIns="0" rIns="0" tIns="0" bIns="0">
+            <a:spAutoFit/>
+          </a:bodyPr>
+          <a:lstStyle/>
+          <a:p>
+            <a:pPr algn="r"/>
+            <a:r>
+              <a:rPr sz="1000" b="0">
+                <a:solidFill>
+                  <a:srgbClr val="FFFFFF"/>
+                </a:solidFill>
+                <a:latin typeface="Arial"/>
+              </a:rPr>
+              <a:t>p7_t1_integrated_science_1205</a:t>
+            </a:r>
+          </a:p>
+        </p:txBody>
+      </p:sp>
+      <p:sp>
+        <p:nvSpPr>
+          <p:cNvPr id="8" name="TextBox 7"/>
+          <p:cNvSpPr txBox="1"/>
+          <p:nvPr/>
+        </p:nvSpPr>
+        <p:spPr>
+          <a:xfrm>
+            <a:off x="594360" y="1042415"/>
+            <a:ext cx="11109960" cy="566928"/>
+          </a:xfrm>
+          <a:prstGeom prst="rect">
+            <a:avLst/>
+          </a:prstGeom>
+          <a:noFill/>
+        </p:spPr>
+        <p:txBody>
+          <a:bodyPr wrap="square" lIns="0" rIns="0" tIns="0" bIns="0">
+            <a:spAutoFit/>
+          </a:bodyPr>
+          <a:lstStyle/>
+          <a:p>
+            <a:r>
+              <a:rPr sz="2600" b="1">
+                <a:solidFill>
+                  <a:srgbClr val="111827"/>
+                </a:solidFill>
+                <a:latin typeface="Arial"/>
+              </a:rPr>
+              <a:t>Activity challenge</a:t>
+            </a:r>
+          </a:p>
+        </p:txBody>
+      </p:sp>
+      <p:sp>
+        <p:nvSpPr>
+          <p:cNvPr id="9" name="Rectangle 8"/>
           <p:cNvSpPr/>
           <p:nvPr/>
         </p:nvSpPr>
         <p:spPr>
           <a:xfrm>
-            <a:off x="1234440" y="3364991"/>
-            <a:ext cx="347472" cy="347472"/>
-          </a:xfrm>
-          <a:prstGeom prst="ellipse">
-            <a:avLst/>
-          </a:prstGeom>
-          <a:solidFill>
-            <a:srgbClr val="166534"/>
-          </a:solidFill>
-          <a:ln>
-            <a:noFill/>
+            <a:off x="685800" y="1874519"/>
+            <a:ext cx="10835640" cy="804672"/>
+          </a:xfrm>
+          <a:prstGeom prst="rect">
+            <a:avLst/>
+          </a:prstGeom>
+          <a:solidFill>
+            <a:srgbClr val="FFF7E0"/>
+          </a:solidFill>
+          <a:ln w="17780">
+            <a:solidFill>
+              <a:srgbClr val="1B7F3A"/>
+            </a:solidFill>
           </a:ln>
         </p:spPr>
         <p:style>
@@ -7697,98 +8438,40 @@
           </a:fontRef>
         </p:style>
         <p:txBody>
-          <a:bodyPr rtlCol="0" anchor="ctr"/>
+          <a:bodyPr rtlCol="0" anchor="ctr" wrap="square" lIns="101600" rIns="101600" tIns="38100" bIns="38100"/>
           <a:lstStyle/>
           <a:p>
             <a:pPr algn="ctr"/>
-          </a:p>
-        </p:txBody>
-      </p:sp>
-      <p:sp>
-        <p:nvSpPr>
-          <p:cNvPr id="11" name="TextBox 10"/>
-          <p:cNvSpPr txBox="1"/>
-          <p:nvPr/>
-        </p:nvSpPr>
-        <p:spPr>
-          <a:xfrm>
-            <a:off x="1234440" y="3410712"/>
-            <a:ext cx="347472" cy="182880"/>
-          </a:xfrm>
-          <a:prstGeom prst="rect">
-            <a:avLst/>
-          </a:prstGeom>
-          <a:noFill/>
-        </p:spPr>
-        <p:txBody>
-          <a:bodyPr wrap="square">
-            <a:spAutoFit/>
-          </a:bodyPr>
-          <a:lstStyle/>
-          <a:p>
-            <a:pPr algn="ctr"/>
-            <a:r>
-              <a:rPr sz="1000" b="1">
-                <a:solidFill>
-                  <a:srgbClr val="FFFFFF"/>
-                </a:solidFill>
+            <a:r>
+              <a:rPr sz="1900" b="1">
+                <a:solidFill>
+                  <a:srgbClr val="111827"/>
+                </a:solidFill>
+                <a:latin typeface="Arial"/>
               </a:rPr>
-              <a:t>1</a:t>
-            </a:r>
-          </a:p>
-        </p:txBody>
-      </p:sp>
-      <p:sp>
-        <p:nvSpPr>
-          <p:cNvPr id="12" name="TextBox 11"/>
-          <p:cNvSpPr txBox="1"/>
-          <p:nvPr/>
-        </p:nvSpPr>
-        <p:spPr>
-          <a:xfrm>
-            <a:off x="1783080" y="3364991"/>
-            <a:ext cx="9006840" cy="347472"/>
-          </a:xfrm>
-          <a:prstGeom prst="rect">
-            <a:avLst/>
-          </a:prstGeom>
-          <a:noFill/>
-        </p:spPr>
-        <p:txBody>
-          <a:bodyPr wrap="square">
-            <a:spAutoFit/>
-          </a:bodyPr>
-          <a:lstStyle/>
-          <a:p>
-            <a:r>
-              <a:rPr sz="1700" b="0">
-                <a:solidFill>
-                  <a:srgbClr val="1A202C"/>
-                </a:solidFill>
-              </a:rPr>
-              <a:t>Students brainstorm in pairs and list all the scientific experiments and models</a:t>
-            </a:r>
-          </a:p>
-        </p:txBody>
-      </p:sp>
-      <p:sp>
-        <p:nvSpPr>
-          <p:cNvPr id="13" name="Rounded Rectangle 12"/>
+              <a:t>Group task:</a:t>
+            </a:r>
+          </a:p>
+        </p:txBody>
+      </p:sp>
+      <p:sp>
+        <p:nvSpPr>
+          <p:cNvPr id="10" name="Rectangle 9"/>
           <p:cNvSpPr/>
           <p:nvPr/>
         </p:nvSpPr>
         <p:spPr>
           <a:xfrm>
-            <a:off x="1005840" y="4069080"/>
-            <a:ext cx="10149840" cy="621792"/>
-          </a:xfrm>
-          <a:prstGeom prst="roundRect">
-            <a:avLst/>
-          </a:prstGeom>
-          <a:solidFill>
-            <a:srgbClr val="F8FAFC"/>
-          </a:solidFill>
-          <a:ln w="15240">
+            <a:off x="868680" y="2971800"/>
+            <a:ext cx="10378440" cy="713232"/>
+          </a:xfrm>
+          <a:prstGeom prst="rect">
+            <a:avLst/>
+          </a:prstGeom>
+          <a:solidFill>
+            <a:srgbClr val="FFFFFF"/>
+          </a:solidFill>
+          <a:ln w="11430">
             <a:solidFill>
               <a:srgbClr val="CBD5E1"/>
             </a:solidFill>
@@ -7818,20 +8501,20 @@
       </p:sp>
       <p:sp>
         <p:nvSpPr>
-          <p:cNvPr id="14" name="Oval 13"/>
+          <p:cNvPr id="11" name="Rectangle 10"/>
           <p:cNvSpPr/>
           <p:nvPr/>
         </p:nvSpPr>
         <p:spPr>
           <a:xfrm>
-            <a:off x="1234440" y="4187952"/>
-            <a:ext cx="347472" cy="347472"/>
-          </a:xfrm>
-          <a:prstGeom prst="ellipse">
-            <a:avLst/>
-          </a:prstGeom>
-          <a:solidFill>
-            <a:srgbClr val="166534"/>
+            <a:off x="868680" y="2971800"/>
+            <a:ext cx="530352" cy="713232"/>
+          </a:xfrm>
+          <a:prstGeom prst="rect">
+            <a:avLst/>
+          </a:prstGeom>
+          <a:solidFill>
+            <a:srgbClr val="1B7F3A"/>
           </a:solidFill>
           <a:ln>
             <a:noFill/>
@@ -7852,23 +8535,32 @@
           </a:fontRef>
         </p:style>
         <p:txBody>
-          <a:bodyPr rtlCol="0" anchor="ctr"/>
+          <a:bodyPr rtlCol="0" anchor="ctr" wrap="square" lIns="101600" rIns="101600" tIns="38100" bIns="38100"/>
           <a:lstStyle/>
           <a:p>
             <a:pPr algn="ctr"/>
-          </a:p>
-        </p:txBody>
-      </p:sp>
-      <p:sp>
-        <p:nvSpPr>
-          <p:cNvPr id="15" name="TextBox 14"/>
+            <a:r>
+              <a:rPr sz="1500" b="1">
+                <a:solidFill>
+                  <a:srgbClr val="FFFFFF"/>
+                </a:solidFill>
+                <a:latin typeface="Arial"/>
+              </a:rPr>
+              <a:t>1</a:t>
+            </a:r>
+          </a:p>
+        </p:txBody>
+      </p:sp>
+      <p:sp>
+        <p:nvSpPr>
+          <p:cNvPr id="12" name="TextBox 11"/>
           <p:cNvSpPr txBox="1"/>
           <p:nvPr/>
         </p:nvSpPr>
         <p:spPr>
           <a:xfrm>
-            <a:off x="1234440" y="4233672"/>
-            <a:ext cx="347472" cy="182880"/>
+            <a:off x="1572768" y="3118104"/>
+            <a:ext cx="9372600" cy="384048"/>
           </a:xfrm>
           <a:prstGeom prst="rect">
             <a:avLst/>
@@ -7876,74 +8568,41 @@
           <a:noFill/>
         </p:spPr>
         <p:txBody>
-          <a:bodyPr wrap="square">
+          <a:bodyPr wrap="square" lIns="0" rIns="0" tIns="0" bIns="0">
             <a:spAutoFit/>
           </a:bodyPr>
           <a:lstStyle/>
           <a:p>
-            <a:pPr algn="ctr"/>
-            <a:r>
-              <a:rPr sz="1000" b="1">
-                <a:solidFill>
-                  <a:srgbClr val="FFFFFF"/>
-                </a:solidFill>
+            <a:r>
+              <a:rPr sz="1500" b="0">
+                <a:solidFill>
+                  <a:srgbClr val="111827"/>
+                </a:solidFill>
+                <a:latin typeface="Arial"/>
               </a:rPr>
-              <a:t>2</a:t>
-            </a:r>
-          </a:p>
-        </p:txBody>
-      </p:sp>
-      <p:sp>
-        <p:nvSpPr>
-          <p:cNvPr id="16" name="TextBox 15"/>
-          <p:cNvSpPr txBox="1"/>
-          <p:nvPr/>
-        </p:nvSpPr>
-        <p:spPr>
-          <a:xfrm>
-            <a:off x="1783080" y="4187952"/>
-            <a:ext cx="9006840" cy="347472"/>
-          </a:xfrm>
-          <a:prstGeom prst="rect">
-            <a:avLst/>
-          </a:prstGeom>
-          <a:noFill/>
-        </p:spPr>
-        <p:txBody>
-          <a:bodyPr wrap="square">
-            <a:spAutoFit/>
-          </a:bodyPr>
-          <a:lstStyle/>
-          <a:p>
-            <a:r>
-              <a:rPr sz="1700" b="0">
-                <a:solidFill>
-                  <a:srgbClr val="1A202C"/>
-                </a:solidFill>
-              </a:rPr>
-              <a:t>created during Term 1 in their notebooks.</a:t>
-            </a:r>
-          </a:p>
-        </p:txBody>
-      </p:sp>
-      <p:sp>
-        <p:nvSpPr>
-          <p:cNvPr id="17" name="Rounded Rectangle 16"/>
+              <a:t>Students brainstorm in pairs and list all the scientific experime...</a:t>
+            </a:r>
+          </a:p>
+        </p:txBody>
+      </p:sp>
+      <p:sp>
+        <p:nvSpPr>
+          <p:cNvPr id="13" name="Rectangle 12"/>
           <p:cNvSpPr/>
           <p:nvPr/>
         </p:nvSpPr>
         <p:spPr>
           <a:xfrm>
-            <a:off x="1005840" y="4892040"/>
-            <a:ext cx="10149840" cy="621792"/>
-          </a:xfrm>
-          <a:prstGeom prst="roundRect">
-            <a:avLst/>
-          </a:prstGeom>
-          <a:solidFill>
-            <a:srgbClr val="F8FAFC"/>
-          </a:solidFill>
-          <a:ln w="15240">
+            <a:off x="868680" y="3822191"/>
+            <a:ext cx="10378440" cy="713232"/>
+          </a:xfrm>
+          <a:prstGeom prst="rect">
+            <a:avLst/>
+          </a:prstGeom>
+          <a:solidFill>
+            <a:srgbClr val="FFFFFF"/>
+          </a:solidFill>
+          <a:ln w="11430">
             <a:solidFill>
               <a:srgbClr val="CBD5E1"/>
             </a:solidFill>
@@ -7973,20 +8632,20 @@
       </p:sp>
       <p:sp>
         <p:nvSpPr>
-          <p:cNvPr id="18" name="Oval 17"/>
+          <p:cNvPr id="14" name="Rectangle 13"/>
           <p:cNvSpPr/>
           <p:nvPr/>
         </p:nvSpPr>
         <p:spPr>
           <a:xfrm>
-            <a:off x="1234440" y="5010912"/>
-            <a:ext cx="347472" cy="347472"/>
-          </a:xfrm>
-          <a:prstGeom prst="ellipse">
-            <a:avLst/>
-          </a:prstGeom>
-          <a:solidFill>
-            <a:srgbClr val="166534"/>
+            <a:off x="868680" y="3822191"/>
+            <a:ext cx="530352" cy="713232"/>
+          </a:xfrm>
+          <a:prstGeom prst="rect">
+            <a:avLst/>
+          </a:prstGeom>
+          <a:solidFill>
+            <a:srgbClr val="1B7F3A"/>
           </a:solidFill>
           <a:ln>
             <a:noFill/>
@@ -8007,23 +8666,32 @@
           </a:fontRef>
         </p:style>
         <p:txBody>
-          <a:bodyPr rtlCol="0" anchor="ctr"/>
+          <a:bodyPr rtlCol="0" anchor="ctr" wrap="square" lIns="101600" rIns="101600" tIns="38100" bIns="38100"/>
           <a:lstStyle/>
           <a:p>
             <a:pPr algn="ctr"/>
-          </a:p>
-        </p:txBody>
-      </p:sp>
-      <p:sp>
-        <p:nvSpPr>
-          <p:cNvPr id="19" name="TextBox 18"/>
+            <a:r>
+              <a:rPr sz="1500" b="1">
+                <a:solidFill>
+                  <a:srgbClr val="FFFFFF"/>
+                </a:solidFill>
+                <a:latin typeface="Arial"/>
+              </a:rPr>
+              <a:t>2</a:t>
+            </a:r>
+          </a:p>
+        </p:txBody>
+      </p:sp>
+      <p:sp>
+        <p:nvSpPr>
+          <p:cNvPr id="15" name="TextBox 14"/>
           <p:cNvSpPr txBox="1"/>
           <p:nvPr/>
         </p:nvSpPr>
         <p:spPr>
           <a:xfrm>
-            <a:off x="1234440" y="5056632"/>
-            <a:ext cx="347472" cy="182880"/>
+            <a:off x="1572768" y="3968496"/>
+            <a:ext cx="9372600" cy="384048"/>
           </a:xfrm>
           <a:prstGeom prst="rect">
             <a:avLst/>
@@ -8031,74 +8699,41 @@
           <a:noFill/>
         </p:spPr>
         <p:txBody>
-          <a:bodyPr wrap="square">
+          <a:bodyPr wrap="square" lIns="0" rIns="0" tIns="0" bIns="0">
             <a:spAutoFit/>
           </a:bodyPr>
           <a:lstStyle/>
           <a:p>
-            <a:pPr algn="ctr"/>
-            <a:r>
-              <a:rPr sz="1000" b="1">
-                <a:solidFill>
-                  <a:srgbClr val="FFFFFF"/>
-                </a:solidFill>
+            <a:r>
+              <a:rPr sz="1500" b="0">
+                <a:solidFill>
+                  <a:srgbClr val="111827"/>
+                </a:solidFill>
+                <a:latin typeface="Arial"/>
               </a:rPr>
-              <a:t>3</a:t>
-            </a:r>
-          </a:p>
-        </p:txBody>
-      </p:sp>
-      <p:sp>
-        <p:nvSpPr>
-          <p:cNvPr id="20" name="TextBox 19"/>
-          <p:cNvSpPr txBox="1"/>
-          <p:nvPr/>
-        </p:nvSpPr>
-        <p:spPr>
-          <a:xfrm>
-            <a:off x="1783080" y="5010912"/>
-            <a:ext cx="9006840" cy="347472"/>
-          </a:xfrm>
-          <a:prstGeom prst="rect">
-            <a:avLst/>
-          </a:prstGeom>
-          <a:noFill/>
-        </p:spPr>
-        <p:txBody>
-          <a:bodyPr wrap="square">
-            <a:spAutoFit/>
-          </a:bodyPr>
-          <a:lstStyle/>
-          <a:p>
-            <a:r>
-              <a:rPr sz="1700" b="0">
-                <a:solidFill>
-                  <a:srgbClr val="1A202C"/>
-                </a:solidFill>
-              </a:rPr>
-              <a:t>Students copy the report structure into their notebooks and label each part based on</a:t>
-            </a:r>
-          </a:p>
-        </p:txBody>
-      </p:sp>
-      <p:sp>
-        <p:nvSpPr>
-          <p:cNvPr id="21" name="Rounded Rectangle 20"/>
+              <a:t>Students copy the report structure into their notebooks and label...</a:t>
+            </a:r>
+          </a:p>
+        </p:txBody>
+      </p:sp>
+      <p:sp>
+        <p:nvSpPr>
+          <p:cNvPr id="16" name="Rectangle 15"/>
           <p:cNvSpPr/>
           <p:nvPr/>
         </p:nvSpPr>
         <p:spPr>
           <a:xfrm>
-            <a:off x="1005840" y="5715000"/>
-            <a:ext cx="10149840" cy="621792"/>
-          </a:xfrm>
-          <a:prstGeom prst="roundRect">
-            <a:avLst/>
-          </a:prstGeom>
-          <a:solidFill>
-            <a:srgbClr val="F8FAFC"/>
-          </a:solidFill>
-          <a:ln w="15240">
+            <a:off x="868680" y="4672584"/>
+            <a:ext cx="10378440" cy="713232"/>
+          </a:xfrm>
+          <a:prstGeom prst="rect">
+            <a:avLst/>
+          </a:prstGeom>
+          <a:solidFill>
+            <a:srgbClr val="FFFFFF"/>
+          </a:solidFill>
+          <a:ln w="11430">
             <a:solidFill>
               <a:srgbClr val="CBD5E1"/>
             </a:solidFill>
@@ -8128,20 +8763,20 @@
       </p:sp>
       <p:sp>
         <p:nvSpPr>
-          <p:cNvPr id="22" name="Oval 21"/>
+          <p:cNvPr id="17" name="Rectangle 16"/>
           <p:cNvSpPr/>
           <p:nvPr/>
         </p:nvSpPr>
         <p:spPr>
           <a:xfrm>
-            <a:off x="1234440" y="5833872"/>
-            <a:ext cx="347472" cy="347472"/>
-          </a:xfrm>
-          <a:prstGeom prst="ellipse">
-            <a:avLst/>
-          </a:prstGeom>
-          <a:solidFill>
-            <a:srgbClr val="166534"/>
+            <a:off x="868680" y="4672584"/>
+            <a:ext cx="530352" cy="713232"/>
+          </a:xfrm>
+          <a:prstGeom prst="rect">
+            <a:avLst/>
+          </a:prstGeom>
+          <a:solidFill>
+            <a:srgbClr val="1B7F3A"/>
           </a:solidFill>
           <a:ln>
             <a:noFill/>
@@ -8162,23 +8797,32 @@
           </a:fontRef>
         </p:style>
         <p:txBody>
-          <a:bodyPr rtlCol="0" anchor="ctr"/>
+          <a:bodyPr rtlCol="0" anchor="ctr" wrap="square" lIns="101600" rIns="101600" tIns="38100" bIns="38100"/>
           <a:lstStyle/>
           <a:p>
             <a:pPr algn="ctr"/>
-          </a:p>
-        </p:txBody>
-      </p:sp>
-      <p:sp>
-        <p:nvSpPr>
-          <p:cNvPr id="23" name="TextBox 22"/>
+            <a:r>
+              <a:rPr sz="1500" b="1">
+                <a:solidFill>
+                  <a:srgbClr val="FFFFFF"/>
+                </a:solidFill>
+                <a:latin typeface="Arial"/>
+              </a:rPr>
+              <a:t>3</a:t>
+            </a:r>
+          </a:p>
+        </p:txBody>
+      </p:sp>
+      <p:sp>
+        <p:nvSpPr>
+          <p:cNvPr id="18" name="TextBox 17"/>
           <p:cNvSpPr txBox="1"/>
           <p:nvPr/>
         </p:nvSpPr>
         <p:spPr>
           <a:xfrm>
-            <a:off x="1234440" y="5879592"/>
-            <a:ext cx="347472" cy="182880"/>
+            <a:off x="1572768" y="4818888"/>
+            <a:ext cx="9372600" cy="384048"/>
           </a:xfrm>
           <a:prstGeom prst="rect">
             <a:avLst/>
@@ -8186,74 +8830,41 @@
           <a:noFill/>
         </p:spPr>
         <p:txBody>
-          <a:bodyPr wrap="square">
+          <a:bodyPr wrap="square" lIns="0" rIns="0" tIns="0" bIns="0">
             <a:spAutoFit/>
           </a:bodyPr>
           <a:lstStyle/>
           <a:p>
-            <a:pPr algn="ctr"/>
-            <a:r>
-              <a:rPr sz="1000" b="1">
-                <a:solidFill>
-                  <a:srgbClr val="FFFFFF"/>
-                </a:solidFill>
+            <a:r>
+              <a:rPr sz="1500" b="0">
+                <a:solidFill>
+                  <a:srgbClr val="111827"/>
+                </a:solidFill>
+                <a:latin typeface="Arial"/>
               </a:rPr>
-              <a:t>4</a:t>
-            </a:r>
-          </a:p>
-        </p:txBody>
-      </p:sp>
-      <p:sp>
-        <p:nvSpPr>
-          <p:cNvPr id="24" name="TextBox 23"/>
-          <p:cNvSpPr txBox="1"/>
-          <p:nvPr/>
-        </p:nvSpPr>
-        <p:spPr>
-          <a:xfrm>
-            <a:off x="1783080" y="5833872"/>
-            <a:ext cx="9006840" cy="347472"/>
-          </a:xfrm>
-          <a:prstGeom prst="rect">
-            <a:avLst/>
-          </a:prstGeom>
-          <a:noFill/>
-        </p:spPr>
-        <p:txBody>
-          <a:bodyPr wrap="square">
-            <a:spAutoFit/>
-          </a:bodyPr>
-          <a:lstStyle/>
-          <a:p>
-            <a:r>
-              <a:rPr sz="1700" b="0">
-                <a:solidFill>
-                  <a:srgbClr val="1A202C"/>
-                </a:solidFill>
-              </a:rPr>
-              <a:t>a verbal example given by the teacher.</a:t>
-            </a:r>
-          </a:p>
-        </p:txBody>
-      </p:sp>
-      <p:sp>
-        <p:nvSpPr>
-          <p:cNvPr id="25" name="Rounded Rectangle 24"/>
+              <a:t>Students participate in a whole-class exercise to verbally summar...</a:t>
+            </a:r>
+          </a:p>
+        </p:txBody>
+      </p:sp>
+      <p:sp>
+        <p:nvSpPr>
+          <p:cNvPr id="19" name="Rectangle 18"/>
           <p:cNvSpPr/>
           <p:nvPr/>
         </p:nvSpPr>
         <p:spPr>
           <a:xfrm>
-            <a:off x="1005840" y="6537960"/>
-            <a:ext cx="10149840" cy="621792"/>
-          </a:xfrm>
-          <a:prstGeom prst="roundRect">
-            <a:avLst/>
-          </a:prstGeom>
-          <a:solidFill>
-            <a:srgbClr val="F8FAFC"/>
-          </a:solidFill>
-          <a:ln w="15240">
+            <a:off x="868680" y="5522976"/>
+            <a:ext cx="10378440" cy="713232"/>
+          </a:xfrm>
+          <a:prstGeom prst="rect">
+            <a:avLst/>
+          </a:prstGeom>
+          <a:solidFill>
+            <a:srgbClr val="FFFFFF"/>
+          </a:solidFill>
+          <a:ln w="11430">
             <a:solidFill>
               <a:srgbClr val="CBD5E1"/>
             </a:solidFill>
@@ -8283,20 +8894,20 @@
       </p:sp>
       <p:sp>
         <p:nvSpPr>
-          <p:cNvPr id="26" name="Oval 25"/>
+          <p:cNvPr id="20" name="Rectangle 19"/>
           <p:cNvSpPr/>
           <p:nvPr/>
         </p:nvSpPr>
         <p:spPr>
           <a:xfrm>
-            <a:off x="1234440" y="6656832"/>
-            <a:ext cx="347472" cy="347472"/>
-          </a:xfrm>
-          <a:prstGeom prst="ellipse">
-            <a:avLst/>
-          </a:prstGeom>
-          <a:solidFill>
-            <a:srgbClr val="166534"/>
+            <a:off x="868680" y="5522976"/>
+            <a:ext cx="530352" cy="713232"/>
+          </a:xfrm>
+          <a:prstGeom prst="rect">
+            <a:avLst/>
+          </a:prstGeom>
+          <a:solidFill>
+            <a:srgbClr val="1B7F3A"/>
           </a:solidFill>
           <a:ln>
             <a:noFill/>
@@ -8317,23 +8928,32 @@
           </a:fontRef>
         </p:style>
         <p:txBody>
-          <a:bodyPr rtlCol="0" anchor="ctr"/>
+          <a:bodyPr rtlCol="0" anchor="ctr" wrap="square" lIns="101600" rIns="101600" tIns="38100" bIns="38100"/>
           <a:lstStyle/>
           <a:p>
             <a:pPr algn="ctr"/>
-          </a:p>
-        </p:txBody>
-      </p:sp>
-      <p:sp>
-        <p:nvSpPr>
-          <p:cNvPr id="27" name="TextBox 26"/>
+            <a:r>
+              <a:rPr sz="1500" b="1">
+                <a:solidFill>
+                  <a:srgbClr val="FFFFFF"/>
+                </a:solidFill>
+                <a:latin typeface="Arial"/>
+              </a:rPr>
+              <a:t>4</a:t>
+            </a:r>
+          </a:p>
+        </p:txBody>
+      </p:sp>
+      <p:sp>
+        <p:nvSpPr>
+          <p:cNvPr id="21" name="TextBox 20"/>
           <p:cNvSpPr txBox="1"/>
           <p:nvPr/>
         </p:nvSpPr>
         <p:spPr>
           <a:xfrm>
-            <a:off x="1234440" y="6702552"/>
-            <a:ext cx="347472" cy="182880"/>
+            <a:off x="1572768" y="5669280"/>
+            <a:ext cx="9372600" cy="384048"/>
           </a:xfrm>
           <a:prstGeom prst="rect">
             <a:avLst/>
@@ -8341,33 +8961,33 @@
           <a:noFill/>
         </p:spPr>
         <p:txBody>
-          <a:bodyPr wrap="square">
+          <a:bodyPr wrap="square" lIns="0" rIns="0" tIns="0" bIns="0">
             <a:spAutoFit/>
           </a:bodyPr>
           <a:lstStyle/>
           <a:p>
-            <a:pPr algn="ctr"/>
-            <a:r>
-              <a:rPr sz="1000" b="1">
-                <a:solidFill>
-                  <a:srgbClr val="FFFFFF"/>
-                </a:solidFill>
+            <a:r>
+              <a:rPr sz="1500" b="0">
+                <a:solidFill>
+                  <a:srgbClr val="111827"/>
+                </a:solidFill>
+                <a:latin typeface="Arial"/>
               </a:rPr>
-              <a:t>5</a:t>
-            </a:r>
-          </a:p>
-        </p:txBody>
-      </p:sp>
-      <p:sp>
-        <p:nvSpPr>
-          <p:cNvPr id="28" name="TextBox 27"/>
+              <a:t>Write one clear response.</a:t>
+            </a:r>
+          </a:p>
+        </p:txBody>
+      </p:sp>
+      <p:sp>
+        <p:nvSpPr>
+          <p:cNvPr id="22" name="TextBox 21"/>
           <p:cNvSpPr txBox="1"/>
           <p:nvPr/>
         </p:nvSpPr>
         <p:spPr>
           <a:xfrm>
-            <a:off x="1783080" y="6656832"/>
-            <a:ext cx="9006840" cy="347472"/>
+            <a:off x="685800" y="6419088"/>
+            <a:ext cx="10835640" cy="228600"/>
           </a:xfrm>
           <a:prstGeom prst="rect">
             <a:avLst/>
@@ -8375,50 +8995,18 @@
           <a:noFill/>
         </p:spPr>
         <p:txBody>
-          <a:bodyPr wrap="square">
+          <a:bodyPr wrap="square" lIns="0" rIns="0" tIns="0" bIns="0">
             <a:spAutoFit/>
           </a:bodyPr>
           <a:lstStyle/>
           <a:p>
-            <a:r>
-              <a:rPr sz="1700" b="0">
-                <a:solidFill>
-                  <a:srgbClr val="1A202C"/>
-                </a:solidFill>
-              </a:rPr>
-              <a:t>Students participate in a whole-class exercise to verbally summarize the...</a:t>
-            </a:r>
-          </a:p>
-        </p:txBody>
-      </p:sp>
-      <p:sp>
-        <p:nvSpPr>
-          <p:cNvPr id="29" name="TextBox 28"/>
-          <p:cNvSpPr txBox="1"/>
-          <p:nvPr/>
-        </p:nvSpPr>
-        <p:spPr>
-          <a:xfrm>
-            <a:off x="777240" y="6419088"/>
-            <a:ext cx="10835640" cy="228600"/>
-          </a:xfrm>
-          <a:prstGeom prst="rect">
-            <a:avLst/>
-          </a:prstGeom>
-          <a:noFill/>
-        </p:spPr>
-        <p:txBody>
-          <a:bodyPr wrap="square">
-            <a:spAutoFit/>
-          </a:bodyPr>
-          <a:lstStyle/>
-          <a:p>
             <a:pPr algn="r"/>
             <a:r>
               <a:rPr sz="1000" b="0">
                 <a:solidFill>
-                  <a:srgbClr val="5B677D"/>
-                </a:solidFill>
+                  <a:srgbClr val="475569"/>
+                </a:solidFill>
+                <a:latin typeface="Arial"/>
               </a:rPr>
               <a:t>Listen • Talk • Try • Explain</a:t>
             </a:r>
@@ -8436,6 +9024,14 @@
 <file path=ppt/slides/slide8.xml><?xml version="1.0" encoding="utf-8"?>
 <p:sld xmlns:a="http://schemas.openxmlformats.org/drawingml/2006/main" xmlns:p="http://schemas.openxmlformats.org/presentationml/2006/main" xmlns:r="http://schemas.openxmlformats.org/officeDocument/2006/relationships">
   <p:cSld>
+    <p:bg>
+      <p:bgPr>
+        <a:solidFill>
+          <a:srgbClr val="F8FAFC"/>
+        </a:solidFill>
+        <a:effectLst/>
+      </p:bgPr>
+    </p:bg>
     <p:spTree>
       <p:nvGrpSpPr>
         <p:cNvPr id="1" name=""/>
@@ -8452,13 +9048,13 @@
         <p:spPr>
           <a:xfrm>
             <a:off x="0" y="0"/>
-            <a:ext cx="12191695" cy="914400"/>
-          </a:xfrm>
-          <a:prstGeom prst="rect">
-            <a:avLst/>
-          </a:prstGeom>
-          <a:solidFill>
-            <a:srgbClr val="4338CA"/>
+            <a:ext cx="12191695" cy="713232"/>
+          </a:xfrm>
+          <a:prstGeom prst="rect">
+            <a:avLst/>
+          </a:prstGeom>
+          <a:solidFill>
+            <a:srgbClr val="111827"/>
           </a:solidFill>
           <a:ln>
             <a:noFill/>
@@ -8494,14 +9090,14 @@
         </p:nvSpPr>
         <p:spPr>
           <a:xfrm>
-            <a:off x="0" y="914400"/>
-            <a:ext cx="164592" cy="5943600"/>
-          </a:xfrm>
-          <a:prstGeom prst="rect">
-            <a:avLst/>
-          </a:prstGeom>
-          <a:solidFill>
-            <a:srgbClr val="4338CA"/>
+            <a:off x="0" y="713232"/>
+            <a:ext cx="12191695" cy="82296"/>
+          </a:xfrm>
+          <a:prstGeom prst="rect">
+            <a:avLst/>
+          </a:prstGeom>
+          <a:solidFill>
+            <a:srgbClr val="FCD116"/>
           </a:solidFill>
           <a:ln>
             <a:noFill/>
@@ -8531,125 +9127,23 @@
       </p:sp>
       <p:sp>
         <p:nvSpPr>
-          <p:cNvPr id="4" name="TextBox 3"/>
-          <p:cNvSpPr txBox="1"/>
-          <p:nvPr/>
-        </p:nvSpPr>
-        <p:spPr>
-          <a:xfrm>
-            <a:off x="594360" y="246888"/>
-            <a:ext cx="2926080" cy="320040"/>
-          </a:xfrm>
-          <a:prstGeom prst="rect">
-            <a:avLst/>
-          </a:prstGeom>
-          <a:noFill/>
-        </p:spPr>
-        <p:txBody>
-          <a:bodyPr wrap="square">
-            <a:spAutoFit/>
-          </a:bodyPr>
-          <a:lstStyle/>
-          <a:p>
-            <a:r>
-              <a:rPr sz="1300" b="1">
-                <a:solidFill>
-                  <a:srgbClr val="FFFFFF"/>
-                </a:solidFill>
-              </a:rPr>
-              <a:t>8. EXIT</a:t>
-            </a:r>
-          </a:p>
-        </p:txBody>
-      </p:sp>
-      <p:sp>
-        <p:nvSpPr>
-          <p:cNvPr id="5" name="TextBox 4"/>
-          <p:cNvSpPr txBox="1"/>
-          <p:nvPr/>
-        </p:nvSpPr>
-        <p:spPr>
-          <a:xfrm>
-            <a:off x="7772400" y="246888"/>
-            <a:ext cx="3840480" cy="320040"/>
-          </a:xfrm>
-          <a:prstGeom prst="rect">
-            <a:avLst/>
-          </a:prstGeom>
-          <a:noFill/>
-        </p:spPr>
-        <p:txBody>
-          <a:bodyPr wrap="square">
-            <a:spAutoFit/>
-          </a:bodyPr>
-          <a:lstStyle/>
-          <a:p>
-            <a:pPr algn="r"/>
-            <a:r>
-              <a:rPr sz="1100" b="0">
-                <a:solidFill>
-                  <a:srgbClr val="FFFFFF"/>
-                </a:solidFill>
-              </a:rPr>
-              <a:t>p7_t1_integrated_science_1205</a:t>
-            </a:r>
-          </a:p>
-        </p:txBody>
-      </p:sp>
-      <p:sp>
-        <p:nvSpPr>
-          <p:cNvPr id="6" name="TextBox 5"/>
-          <p:cNvSpPr txBox="1"/>
-          <p:nvPr/>
-        </p:nvSpPr>
-        <p:spPr>
-          <a:xfrm>
-            <a:off x="640080" y="1143000"/>
-            <a:ext cx="10972800" cy="685800"/>
-          </a:xfrm>
-          <a:prstGeom prst="rect">
-            <a:avLst/>
-          </a:prstGeom>
-          <a:noFill/>
-        </p:spPr>
-        <p:txBody>
-          <a:bodyPr wrap="square">
-            <a:spAutoFit/>
-          </a:bodyPr>
-          <a:lstStyle/>
-          <a:p>
-            <a:r>
-              <a:rPr sz="2800" b="1">
-                <a:solidFill>
-                  <a:srgbClr val="1A202C"/>
-                </a:solidFill>
-              </a:rPr>
-              <a:t>Exit ticket</a:t>
-            </a:r>
-          </a:p>
-        </p:txBody>
-      </p:sp>
-      <p:sp>
-        <p:nvSpPr>
-          <p:cNvPr id="7" name="Rounded Rectangle 6"/>
+          <p:cNvPr id="4" name="Rectangle 3"/>
           <p:cNvSpPr/>
           <p:nvPr/>
         </p:nvSpPr>
         <p:spPr>
           <a:xfrm>
-            <a:off x="777240" y="1993392"/>
-            <a:ext cx="10835640" cy="1005840"/>
-          </a:xfrm>
-          <a:prstGeom prst="roundRect">
-            <a:avLst/>
-          </a:prstGeom>
-          <a:solidFill>
-            <a:srgbClr val="FFFBEB"/>
-          </a:solidFill>
-          <a:ln w="15240">
-            <a:solidFill>
-              <a:srgbClr val="4338CA"/>
-            </a:solidFill>
+            <a:off x="0" y="795528"/>
+            <a:ext cx="12191695" cy="64008"/>
+          </a:xfrm>
+          <a:prstGeom prst="rect">
+            <a:avLst/>
+          </a:prstGeom>
+          <a:solidFill>
+            <a:srgbClr val="D90000"/>
+          </a:solidFill>
+          <a:ln>
+            <a:noFill/>
           </a:ln>
         </p:spPr>
         <p:style>
@@ -8676,58 +9170,23 @@
       </p:sp>
       <p:sp>
         <p:nvSpPr>
-          <p:cNvPr id="8" name="TextBox 7"/>
-          <p:cNvSpPr txBox="1"/>
-          <p:nvPr/>
-        </p:nvSpPr>
-        <p:spPr>
-          <a:xfrm>
-            <a:off x="1051560" y="2212848"/>
-            <a:ext cx="10287000" cy="502920"/>
-          </a:xfrm>
-          <a:prstGeom prst="rect">
-            <a:avLst/>
-          </a:prstGeom>
-          <a:noFill/>
-        </p:spPr>
-        <p:txBody>
-          <a:bodyPr wrap="square">
-            <a:spAutoFit/>
-          </a:bodyPr>
-          <a:lstStyle/>
-          <a:p>
-            <a:r>
-              <a:rPr sz="2100" b="1">
-                <a:solidFill>
-                  <a:srgbClr val="1A202C"/>
-                </a:solidFill>
-              </a:rPr>
-              <a:t>Answer: How does writing a report help you remember the experiment?</a:t>
-            </a:r>
-          </a:p>
-        </p:txBody>
-      </p:sp>
-      <p:sp>
-        <p:nvSpPr>
-          <p:cNvPr id="9" name="Rounded Rectangle 8"/>
+          <p:cNvPr id="5" name="Rectangle 4"/>
           <p:cNvSpPr/>
           <p:nvPr/>
         </p:nvSpPr>
         <p:spPr>
           <a:xfrm>
-            <a:off x="1005840" y="3246120"/>
-            <a:ext cx="10149840" cy="731520"/>
-          </a:xfrm>
-          <a:prstGeom prst="roundRect">
-            <a:avLst/>
-          </a:prstGeom>
-          <a:solidFill>
-            <a:srgbClr val="F8FAFC"/>
-          </a:solidFill>
-          <a:ln w="15240">
-            <a:solidFill>
-              <a:srgbClr val="CBD5E1"/>
-            </a:solidFill>
+            <a:off x="0" y="859536"/>
+            <a:ext cx="164592" cy="5998464"/>
+          </a:xfrm>
+          <a:prstGeom prst="rect">
+            <a:avLst/>
+          </a:prstGeom>
+          <a:solidFill>
+            <a:srgbClr val="4338CA"/>
+          </a:solidFill>
+          <a:ln>
+            <a:noFill/>
           </a:ln>
         </p:spPr>
         <p:style>
@@ -8754,23 +9213,128 @@
       </p:sp>
       <p:sp>
         <p:nvSpPr>
-          <p:cNvPr id="10" name="Oval 9"/>
+          <p:cNvPr id="6" name="TextBox 5"/>
+          <p:cNvSpPr txBox="1"/>
+          <p:nvPr/>
+        </p:nvSpPr>
+        <p:spPr>
+          <a:xfrm>
+            <a:off x="502920" y="210312"/>
+            <a:ext cx="3200400" cy="256032"/>
+          </a:xfrm>
+          <a:prstGeom prst="rect">
+            <a:avLst/>
+          </a:prstGeom>
+          <a:noFill/>
+        </p:spPr>
+        <p:txBody>
+          <a:bodyPr wrap="square" lIns="0" rIns="0" tIns="0" bIns="0">
+            <a:spAutoFit/>
+          </a:bodyPr>
+          <a:lstStyle/>
+          <a:p>
+            <a:r>
+              <a:rPr sz="1200" b="1">
+                <a:solidFill>
+                  <a:srgbClr val="FFFFFF"/>
+                </a:solidFill>
+                <a:latin typeface="Arial"/>
+              </a:rPr>
+              <a:t>8. EXIT</a:t>
+            </a:r>
+          </a:p>
+        </p:txBody>
+      </p:sp>
+      <p:sp>
+        <p:nvSpPr>
+          <p:cNvPr id="7" name="TextBox 6"/>
+          <p:cNvSpPr txBox="1"/>
+          <p:nvPr/>
+        </p:nvSpPr>
+        <p:spPr>
+          <a:xfrm>
+            <a:off x="7589520" y="210312"/>
+            <a:ext cx="4069080" cy="256032"/>
+          </a:xfrm>
+          <a:prstGeom prst="rect">
+            <a:avLst/>
+          </a:prstGeom>
+          <a:noFill/>
+        </p:spPr>
+        <p:txBody>
+          <a:bodyPr wrap="square" lIns="0" rIns="0" tIns="0" bIns="0">
+            <a:spAutoFit/>
+          </a:bodyPr>
+          <a:lstStyle/>
+          <a:p>
+            <a:pPr algn="r"/>
+            <a:r>
+              <a:rPr sz="1000" b="0">
+                <a:solidFill>
+                  <a:srgbClr val="FFFFFF"/>
+                </a:solidFill>
+                <a:latin typeface="Arial"/>
+              </a:rPr>
+              <a:t>p7_t1_integrated_science_1205</a:t>
+            </a:r>
+          </a:p>
+        </p:txBody>
+      </p:sp>
+      <p:sp>
+        <p:nvSpPr>
+          <p:cNvPr id="8" name="TextBox 7"/>
+          <p:cNvSpPr txBox="1"/>
+          <p:nvPr/>
+        </p:nvSpPr>
+        <p:spPr>
+          <a:xfrm>
+            <a:off x="594360" y="1042415"/>
+            <a:ext cx="11109960" cy="566928"/>
+          </a:xfrm>
+          <a:prstGeom prst="rect">
+            <a:avLst/>
+          </a:prstGeom>
+          <a:noFill/>
+        </p:spPr>
+        <p:txBody>
+          <a:bodyPr wrap="square" lIns="0" rIns="0" tIns="0" bIns="0">
+            <a:spAutoFit/>
+          </a:bodyPr>
+          <a:lstStyle/>
+          <a:p>
+            <a:r>
+              <a:rPr sz="2600" b="1">
+                <a:solidFill>
+                  <a:srgbClr val="111827"/>
+                </a:solidFill>
+                <a:latin typeface="Arial"/>
+              </a:rPr>
+              <a:t>Exit ticket</a:t>
+            </a:r>
+          </a:p>
+        </p:txBody>
+      </p:sp>
+      <p:sp>
+        <p:nvSpPr>
+          <p:cNvPr id="9" name="Rectangle 8"/>
           <p:cNvSpPr/>
           <p:nvPr/>
         </p:nvSpPr>
         <p:spPr>
           <a:xfrm>
-            <a:off x="1234440" y="3364991"/>
-            <a:ext cx="347472" cy="347472"/>
-          </a:xfrm>
-          <a:prstGeom prst="ellipse">
-            <a:avLst/>
-          </a:prstGeom>
-          <a:solidFill>
-            <a:srgbClr val="4338CA"/>
-          </a:solidFill>
-          <a:ln>
-            <a:noFill/>
+            <a:off x="685800" y="1874519"/>
+            <a:ext cx="10835640" cy="804672"/>
+          </a:xfrm>
+          <a:prstGeom prst="rect">
+            <a:avLst/>
+          </a:prstGeom>
+          <a:solidFill>
+            <a:srgbClr val="FFF7E0"/>
+          </a:solidFill>
+          <a:ln w="17780">
+            <a:solidFill>
+              <a:srgbClr val="4338CA"/>
+            </a:solidFill>
           </a:ln>
         </p:spPr>
         <p:style>
@@ -8788,98 +9352,40 @@
           </a:fontRef>
         </p:style>
         <p:txBody>
-          <a:bodyPr rtlCol="0" anchor="ctr"/>
+          <a:bodyPr rtlCol="0" anchor="ctr" wrap="square" lIns="101600" rIns="101600" tIns="38100" bIns="38100"/>
           <a:lstStyle/>
           <a:p>
             <a:pPr algn="ctr"/>
-          </a:p>
-        </p:txBody>
-      </p:sp>
-      <p:sp>
-        <p:nvSpPr>
-          <p:cNvPr id="11" name="TextBox 10"/>
-          <p:cNvSpPr txBox="1"/>
-          <p:nvPr/>
-        </p:nvSpPr>
-        <p:spPr>
-          <a:xfrm>
-            <a:off x="1234440" y="3410712"/>
-            <a:ext cx="347472" cy="182880"/>
-          </a:xfrm>
-          <a:prstGeom prst="rect">
-            <a:avLst/>
-          </a:prstGeom>
-          <a:noFill/>
-        </p:spPr>
-        <p:txBody>
-          <a:bodyPr wrap="square">
-            <a:spAutoFit/>
-          </a:bodyPr>
-          <a:lstStyle/>
-          <a:p>
-            <a:pPr algn="ctr"/>
-            <a:r>
-              <a:rPr sz="1000" b="1">
-                <a:solidFill>
-                  <a:srgbClr val="FFFFFF"/>
-                </a:solidFill>
+            <a:r>
+              <a:rPr sz="1900" b="1">
+                <a:solidFill>
+                  <a:srgbClr val="111827"/>
+                </a:solidFill>
+                <a:latin typeface="Arial"/>
               </a:rPr>
-              <a:t>1</a:t>
-            </a:r>
-          </a:p>
-        </p:txBody>
-      </p:sp>
-      <p:sp>
-        <p:nvSpPr>
-          <p:cNvPr id="12" name="TextBox 11"/>
-          <p:cNvSpPr txBox="1"/>
-          <p:nvPr/>
-        </p:nvSpPr>
-        <p:spPr>
-          <a:xfrm>
-            <a:off x="1783080" y="3364991"/>
-            <a:ext cx="9006840" cy="347472"/>
-          </a:xfrm>
-          <a:prstGeom prst="rect">
-            <a:avLst/>
-          </a:prstGeom>
-          <a:noFill/>
-        </p:spPr>
-        <p:txBody>
-          <a:bodyPr wrap="square">
-            <a:spAutoFit/>
-          </a:bodyPr>
-          <a:lstStyle/>
-          <a:p>
-            <a:r>
-              <a:rPr sz="1700" b="0">
-                <a:solidFill>
-                  <a:srgbClr val="1A202C"/>
-                </a:solidFill>
-              </a:rPr>
-              <a:t>Use one complete sentence.</a:t>
-            </a:r>
-          </a:p>
-        </p:txBody>
-      </p:sp>
-      <p:sp>
-        <p:nvSpPr>
-          <p:cNvPr id="13" name="Rounded Rectangle 12"/>
+              <a:t>Answer: How does writing a report help you remember the experiment?</a:t>
+            </a:r>
+          </a:p>
+        </p:txBody>
+      </p:sp>
+      <p:sp>
+        <p:nvSpPr>
+          <p:cNvPr id="10" name="Rectangle 9"/>
           <p:cNvSpPr/>
           <p:nvPr/>
         </p:nvSpPr>
         <p:spPr>
           <a:xfrm>
-            <a:off x="1005840" y="4178808"/>
-            <a:ext cx="10149840" cy="731520"/>
-          </a:xfrm>
-          <a:prstGeom prst="roundRect">
-            <a:avLst/>
-          </a:prstGeom>
-          <a:solidFill>
-            <a:srgbClr val="F8FAFC"/>
-          </a:solidFill>
-          <a:ln w="15240">
+            <a:off x="868680" y="2971800"/>
+            <a:ext cx="10378440" cy="713232"/>
+          </a:xfrm>
+          <a:prstGeom prst="rect">
+            <a:avLst/>
+          </a:prstGeom>
+          <a:solidFill>
+            <a:srgbClr val="FFFFFF"/>
+          </a:solidFill>
+          <a:ln w="11430">
             <a:solidFill>
               <a:srgbClr val="CBD5E1"/>
             </a:solidFill>
@@ -8909,16 +9415,16 @@
       </p:sp>
       <p:sp>
         <p:nvSpPr>
-          <p:cNvPr id="14" name="Oval 13"/>
+          <p:cNvPr id="11" name="Rectangle 10"/>
           <p:cNvSpPr/>
           <p:nvPr/>
         </p:nvSpPr>
         <p:spPr>
           <a:xfrm>
-            <a:off x="1234440" y="4297680"/>
-            <a:ext cx="347472" cy="347472"/>
-          </a:xfrm>
-          <a:prstGeom prst="ellipse">
+            <a:off x="868680" y="2971800"/>
+            <a:ext cx="530352" cy="713232"/>
+          </a:xfrm>
+          <a:prstGeom prst="rect">
             <a:avLst/>
           </a:prstGeom>
           <a:solidFill>
@@ -8943,10 +9449,150 @@
           </a:fontRef>
         </p:style>
         <p:txBody>
+          <a:bodyPr rtlCol="0" anchor="ctr" wrap="square" lIns="101600" rIns="101600" tIns="38100" bIns="38100"/>
+          <a:lstStyle/>
+          <a:p>
+            <a:pPr algn="ctr"/>
+            <a:r>
+              <a:rPr sz="1500" b="1">
+                <a:solidFill>
+                  <a:srgbClr val="FFFFFF"/>
+                </a:solidFill>
+                <a:latin typeface="Arial"/>
+              </a:rPr>
+              <a:t>1</a:t>
+            </a:r>
+          </a:p>
+        </p:txBody>
+      </p:sp>
+      <p:sp>
+        <p:nvSpPr>
+          <p:cNvPr id="12" name="TextBox 11"/>
+          <p:cNvSpPr txBox="1"/>
+          <p:nvPr/>
+        </p:nvSpPr>
+        <p:spPr>
+          <a:xfrm>
+            <a:off x="1572768" y="3118104"/>
+            <a:ext cx="9372600" cy="384048"/>
+          </a:xfrm>
+          <a:prstGeom prst="rect">
+            <a:avLst/>
+          </a:prstGeom>
+          <a:noFill/>
+        </p:spPr>
+        <p:txBody>
+          <a:bodyPr wrap="square" lIns="0" rIns="0" tIns="0" bIns="0">
+            <a:spAutoFit/>
+          </a:bodyPr>
+          <a:lstStyle/>
+          <a:p>
+            <a:r>
+              <a:rPr sz="1500" b="0">
+                <a:solidFill>
+                  <a:srgbClr val="111827"/>
+                </a:solidFill>
+                <a:latin typeface="Arial"/>
+              </a:rPr>
+              <a:t>Use one complete sentence.</a:t>
+            </a:r>
+          </a:p>
+        </p:txBody>
+      </p:sp>
+      <p:sp>
+        <p:nvSpPr>
+          <p:cNvPr id="13" name="Rectangle 12"/>
+          <p:cNvSpPr/>
+          <p:nvPr/>
+        </p:nvSpPr>
+        <p:spPr>
+          <a:xfrm>
+            <a:off x="868680" y="3822191"/>
+            <a:ext cx="10378440" cy="713232"/>
+          </a:xfrm>
+          <a:prstGeom prst="rect">
+            <a:avLst/>
+          </a:prstGeom>
+          <a:solidFill>
+            <a:srgbClr val="FFFFFF"/>
+          </a:solidFill>
+          <a:ln w="11430">
+            <a:solidFill>
+              <a:srgbClr val="CBD5E1"/>
+            </a:solidFill>
+          </a:ln>
+        </p:spPr>
+        <p:style>
+          <a:lnRef idx="1">
+            <a:schemeClr val="accent1"/>
+          </a:lnRef>
+          <a:fillRef idx="3">
+            <a:schemeClr val="accent1"/>
+          </a:fillRef>
+          <a:effectRef idx="2">
+            <a:schemeClr val="accent1"/>
+          </a:effectRef>
+          <a:fontRef idx="minor">
+            <a:schemeClr val="lt1"/>
+          </a:fontRef>
+        </p:style>
+        <p:txBody>
           <a:bodyPr rtlCol="0" anchor="ctr"/>
           <a:lstStyle/>
           <a:p>
             <a:pPr algn="ctr"/>
+          </a:p>
+        </p:txBody>
+      </p:sp>
+      <p:sp>
+        <p:nvSpPr>
+          <p:cNvPr id="14" name="Rectangle 13"/>
+          <p:cNvSpPr/>
+          <p:nvPr/>
+        </p:nvSpPr>
+        <p:spPr>
+          <a:xfrm>
+            <a:off x="868680" y="3822191"/>
+            <a:ext cx="530352" cy="713232"/>
+          </a:xfrm>
+          <a:prstGeom prst="rect">
+            <a:avLst/>
+          </a:prstGeom>
+          <a:solidFill>
+            <a:srgbClr val="4338CA"/>
+          </a:solidFill>
+          <a:ln>
+            <a:noFill/>
+          </a:ln>
+        </p:spPr>
+        <p:style>
+          <a:lnRef idx="1">
+            <a:schemeClr val="accent1"/>
+          </a:lnRef>
+          <a:fillRef idx="3">
+            <a:schemeClr val="accent1"/>
+          </a:fillRef>
+          <a:effectRef idx="2">
+            <a:schemeClr val="accent1"/>
+          </a:effectRef>
+          <a:fontRef idx="minor">
+            <a:schemeClr val="lt1"/>
+          </a:fontRef>
+        </p:style>
+        <p:txBody>
+          <a:bodyPr rtlCol="0" anchor="ctr" wrap="square" lIns="101600" rIns="101600" tIns="38100" bIns="38100"/>
+          <a:lstStyle/>
+          <a:p>
+            <a:pPr algn="ctr"/>
+            <a:r>
+              <a:rPr sz="1500" b="1">
+                <a:solidFill>
+                  <a:srgbClr val="FFFFFF"/>
+                </a:solidFill>
+                <a:latin typeface="Arial"/>
+              </a:rPr>
+              <a:t>2</a:t>
+            </a:r>
           </a:p>
         </p:txBody>
       </p:sp>
@@ -8958,8 +9604,8 @@
         </p:nvSpPr>
         <p:spPr>
           <a:xfrm>
-            <a:off x="1234440" y="4343400"/>
-            <a:ext cx="347472" cy="182880"/>
+            <a:off x="1572768" y="3968496"/>
+            <a:ext cx="9372600" cy="384048"/>
           </a:xfrm>
           <a:prstGeom prst="rect">
             <a:avLst/>
@@ -8967,33 +9613,130 @@
           <a:noFill/>
         </p:spPr>
         <p:txBody>
-          <a:bodyPr wrap="square">
+          <a:bodyPr wrap="square" lIns="0" rIns="0" tIns="0" bIns="0">
             <a:spAutoFit/>
           </a:bodyPr>
           <a:lstStyle/>
           <a:p>
+            <a:r>
+              <a:rPr sz="1500" b="0">
+                <a:solidFill>
+                  <a:srgbClr val="111827"/>
+                </a:solidFill>
+                <a:latin typeface="Arial"/>
+              </a:rPr>
+              <a:t>Hand in or read your answer aloud.</a:t>
+            </a:r>
+          </a:p>
+        </p:txBody>
+      </p:sp>
+      <p:sp>
+        <p:nvSpPr>
+          <p:cNvPr id="16" name="Rectangle 15"/>
+          <p:cNvSpPr/>
+          <p:nvPr/>
+        </p:nvSpPr>
+        <p:spPr>
+          <a:xfrm>
+            <a:off x="868680" y="4672584"/>
+            <a:ext cx="10378440" cy="713232"/>
+          </a:xfrm>
+          <a:prstGeom prst="rect">
+            <a:avLst/>
+          </a:prstGeom>
+          <a:solidFill>
+            <a:srgbClr val="FFFFFF"/>
+          </a:solidFill>
+          <a:ln w="11430">
+            <a:solidFill>
+              <a:srgbClr val="CBD5E1"/>
+            </a:solidFill>
+          </a:ln>
+        </p:spPr>
+        <p:style>
+          <a:lnRef idx="1">
+            <a:schemeClr val="accent1"/>
+          </a:lnRef>
+          <a:fillRef idx="3">
+            <a:schemeClr val="accent1"/>
+          </a:fillRef>
+          <a:effectRef idx="2">
+            <a:schemeClr val="accent1"/>
+          </a:effectRef>
+          <a:fontRef idx="minor">
+            <a:schemeClr val="lt1"/>
+          </a:fontRef>
+        </p:style>
+        <p:txBody>
+          <a:bodyPr rtlCol="0" anchor="ctr"/>
+          <a:lstStyle/>
+          <a:p>
             <a:pPr algn="ctr"/>
-            <a:r>
-              <a:rPr sz="1000" b="1">
+          </a:p>
+        </p:txBody>
+      </p:sp>
+      <p:sp>
+        <p:nvSpPr>
+          <p:cNvPr id="17" name="Rectangle 16"/>
+          <p:cNvSpPr/>
+          <p:nvPr/>
+        </p:nvSpPr>
+        <p:spPr>
+          <a:xfrm>
+            <a:off x="868680" y="4672584"/>
+            <a:ext cx="530352" cy="713232"/>
+          </a:xfrm>
+          <a:prstGeom prst="rect">
+            <a:avLst/>
+          </a:prstGeom>
+          <a:solidFill>
+            <a:srgbClr val="4338CA"/>
+          </a:solidFill>
+          <a:ln>
+            <a:noFill/>
+          </a:ln>
+        </p:spPr>
+        <p:style>
+          <a:lnRef idx="1">
+            <a:schemeClr val="accent1"/>
+          </a:lnRef>
+          <a:fillRef idx="3">
+            <a:schemeClr val="accent1"/>
+          </a:fillRef>
+          <a:effectRef idx="2">
+            <a:schemeClr val="accent1"/>
+          </a:effectRef>
+          <a:fontRef idx="minor">
+            <a:schemeClr val="lt1"/>
+          </a:fontRef>
+        </p:style>
+        <p:txBody>
+          <a:bodyPr rtlCol="0" anchor="ctr" wrap="square" lIns="101600" rIns="101600" tIns="38100" bIns="38100"/>
+          <a:lstStyle/>
+          <a:p>
+            <a:pPr algn="ctr"/>
+            <a:r>
+              <a:rPr sz="1500" b="1">
                 <a:solidFill>
                   <a:srgbClr val="FFFFFF"/>
                 </a:solidFill>
+                <a:latin typeface="Arial"/>
               </a:rPr>
-              <a:t>2</a:t>
-            </a:r>
-          </a:p>
-        </p:txBody>
-      </p:sp>
-      <p:sp>
-        <p:nvSpPr>
-          <p:cNvPr id="16" name="TextBox 15"/>
+              <a:t>3</a:t>
+            </a:r>
+          </a:p>
+        </p:txBody>
+      </p:sp>
+      <p:sp>
+        <p:nvSpPr>
+          <p:cNvPr id="18" name="TextBox 17"/>
           <p:cNvSpPr txBox="1"/>
           <p:nvPr/>
         </p:nvSpPr>
         <p:spPr>
           <a:xfrm>
-            <a:off x="1783080" y="4297680"/>
-            <a:ext cx="9006840" cy="347472"/>
+            <a:off x="1572768" y="4818888"/>
+            <a:ext cx="9372600" cy="384048"/>
           </a:xfrm>
           <a:prstGeom prst="rect">
             <a:avLst/>
@@ -9001,32 +9744,130 @@
           <a:noFill/>
         </p:spPr>
         <p:txBody>
-          <a:bodyPr wrap="square">
+          <a:bodyPr wrap="square" lIns="0" rIns="0" tIns="0" bIns="0">
             <a:spAutoFit/>
           </a:bodyPr>
           <a:lstStyle/>
           <a:p>
             <a:r>
-              <a:rPr sz="1700" b="0">
-                <a:solidFill>
-                  <a:srgbClr val="1A202C"/>
-                </a:solidFill>
+              <a:rPr sz="1500" b="0">
+                <a:solidFill>
+                  <a:srgbClr val="111827"/>
+                </a:solidFill>
+                <a:latin typeface="Arial"/>
               </a:rPr>
-              <a:t>Hand in or read your answer aloud.</a:t>
-            </a:r>
-          </a:p>
-        </p:txBody>
-      </p:sp>
-      <p:sp>
-        <p:nvSpPr>
-          <p:cNvPr id="17" name="TextBox 16"/>
+              <a:t>Write one clear response.</a:t>
+            </a:r>
+          </a:p>
+        </p:txBody>
+      </p:sp>
+      <p:sp>
+        <p:nvSpPr>
+          <p:cNvPr id="19" name="Rectangle 18"/>
+          <p:cNvSpPr/>
+          <p:nvPr/>
+        </p:nvSpPr>
+        <p:spPr>
+          <a:xfrm>
+            <a:off x="868680" y="5522976"/>
+            <a:ext cx="10378440" cy="713232"/>
+          </a:xfrm>
+          <a:prstGeom prst="rect">
+            <a:avLst/>
+          </a:prstGeom>
+          <a:solidFill>
+            <a:srgbClr val="FFFFFF"/>
+          </a:solidFill>
+          <a:ln w="11430">
+            <a:solidFill>
+              <a:srgbClr val="CBD5E1"/>
+            </a:solidFill>
+          </a:ln>
+        </p:spPr>
+        <p:style>
+          <a:lnRef idx="1">
+            <a:schemeClr val="accent1"/>
+          </a:lnRef>
+          <a:fillRef idx="3">
+            <a:schemeClr val="accent1"/>
+          </a:fillRef>
+          <a:effectRef idx="2">
+            <a:schemeClr val="accent1"/>
+          </a:effectRef>
+          <a:fontRef idx="minor">
+            <a:schemeClr val="lt1"/>
+          </a:fontRef>
+        </p:style>
+        <p:txBody>
+          <a:bodyPr rtlCol="0" anchor="ctr"/>
+          <a:lstStyle/>
+          <a:p>
+            <a:pPr algn="ctr"/>
+          </a:p>
+        </p:txBody>
+      </p:sp>
+      <p:sp>
+        <p:nvSpPr>
+          <p:cNvPr id="20" name="Rectangle 19"/>
+          <p:cNvSpPr/>
+          <p:nvPr/>
+        </p:nvSpPr>
+        <p:spPr>
+          <a:xfrm>
+            <a:off x="868680" y="5522976"/>
+            <a:ext cx="530352" cy="713232"/>
+          </a:xfrm>
+          <a:prstGeom prst="rect">
+            <a:avLst/>
+          </a:prstGeom>
+          <a:solidFill>
+            <a:srgbClr val="4338CA"/>
+          </a:solidFill>
+          <a:ln>
+            <a:noFill/>
+          </a:ln>
+        </p:spPr>
+        <p:style>
+          <a:lnRef idx="1">
+            <a:schemeClr val="accent1"/>
+          </a:lnRef>
+          <a:fillRef idx="3">
+            <a:schemeClr val="accent1"/>
+          </a:fillRef>
+          <a:effectRef idx="2">
+            <a:schemeClr val="accent1"/>
+          </a:effectRef>
+          <a:fontRef idx="minor">
+            <a:schemeClr val="lt1"/>
+          </a:fontRef>
+        </p:style>
+        <p:txBody>
+          <a:bodyPr rtlCol="0" anchor="ctr" wrap="square" lIns="101600" rIns="101600" tIns="38100" bIns="38100"/>
+          <a:lstStyle/>
+          <a:p>
+            <a:pPr algn="ctr"/>
+            <a:r>
+              <a:rPr sz="1500" b="1">
+                <a:solidFill>
+                  <a:srgbClr val="FFFFFF"/>
+                </a:solidFill>
+                <a:latin typeface="Arial"/>
+              </a:rPr>
+              <a:t>4</a:t>
+            </a:r>
+          </a:p>
+        </p:txBody>
+      </p:sp>
+      <p:sp>
+        <p:nvSpPr>
+          <p:cNvPr id="21" name="TextBox 20"/>
           <p:cNvSpPr txBox="1"/>
           <p:nvPr/>
         </p:nvSpPr>
         <p:spPr>
           <a:xfrm>
-            <a:off x="777240" y="6419088"/>
-            <a:ext cx="10835640" cy="228600"/>
+            <a:off x="1572768" y="5669280"/>
+            <a:ext cx="9372600" cy="384048"/>
           </a:xfrm>
           <a:prstGeom prst="rect">
             <a:avLst/>
@@ -9034,17 +9875,52 @@
           <a:noFill/>
         </p:spPr>
         <p:txBody>
-          <a:bodyPr wrap="square">
+          <a:bodyPr wrap="square" lIns="0" rIns="0" tIns="0" bIns="0">
             <a:spAutoFit/>
           </a:bodyPr>
           <a:lstStyle/>
           <a:p>
+            <a:r>
+              <a:rPr sz="1500" b="0">
+                <a:solidFill>
+                  <a:srgbClr val="111827"/>
+                </a:solidFill>
+                <a:latin typeface="Arial"/>
+              </a:rPr>
+              <a:t>Write one clear response.</a:t>
+            </a:r>
+          </a:p>
+        </p:txBody>
+      </p:sp>
+      <p:sp>
+        <p:nvSpPr>
+          <p:cNvPr id="22" name="TextBox 21"/>
+          <p:cNvSpPr txBox="1"/>
+          <p:nvPr/>
+        </p:nvSpPr>
+        <p:spPr>
+          <a:xfrm>
+            <a:off x="685800" y="6419088"/>
+            <a:ext cx="10835640" cy="228600"/>
+          </a:xfrm>
+          <a:prstGeom prst="rect">
+            <a:avLst/>
+          </a:prstGeom>
+          <a:noFill/>
+        </p:spPr>
+        <p:txBody>
+          <a:bodyPr wrap="square" lIns="0" rIns="0" tIns="0" bIns="0">
+            <a:spAutoFit/>
+          </a:bodyPr>
+          <a:lstStyle/>
+          <a:p>
             <a:pPr algn="r"/>
             <a:r>
               <a:rPr sz="1000" b="0">
                 <a:solidFill>
-                  <a:srgbClr val="5B677D"/>
-                </a:solidFill>
+                  <a:srgbClr val="475569"/>
+                </a:solidFill>
+                <a:latin typeface="Arial"/>
               </a:rPr>
               <a:t>Listen • Talk • Try • Explain</a:t>
             </a:r>

--- a/uganda-p7-mvp/p7_t1_integrated_science_1205/p7_t1_integrated_science_1205.pptx
+++ b/uganda-p7-mvp/p7_t1_integrated_science_1205/p7_t1_integrated_science_1205.pptx
@@ -3277,14 +3277,100 @@
       </p:sp>
       <p:sp>
         <p:nvSpPr>
-          <p:cNvPr id="6" name="TextBox 5"/>
+          <p:cNvPr id="6" name="Rectangle 5"/>
+          <p:cNvSpPr/>
+          <p:nvPr/>
+        </p:nvSpPr>
+        <p:spPr>
+          <a:xfrm>
+            <a:off x="164592" y="6565392"/>
+            <a:ext cx="12027103" cy="73152"/>
+          </a:xfrm>
+          <a:prstGeom prst="rect">
+            <a:avLst/>
+          </a:prstGeom>
+          <a:solidFill>
+            <a:srgbClr val="FCD116"/>
+          </a:solidFill>
+          <a:ln>
+            <a:noFill/>
+          </a:ln>
+        </p:spPr>
+        <p:style>
+          <a:lnRef idx="1">
+            <a:schemeClr val="accent1"/>
+          </a:lnRef>
+          <a:fillRef idx="3">
+            <a:schemeClr val="accent1"/>
+          </a:fillRef>
+          <a:effectRef idx="2">
+            <a:schemeClr val="accent1"/>
+          </a:effectRef>
+          <a:fontRef idx="minor">
+            <a:schemeClr val="lt1"/>
+          </a:fontRef>
+        </p:style>
+        <p:txBody>
+          <a:bodyPr rtlCol="0" anchor="ctr"/>
+          <a:lstStyle/>
+          <a:p>
+            <a:pPr algn="ctr"/>
+          </a:p>
+        </p:txBody>
+      </p:sp>
+      <p:sp>
+        <p:nvSpPr>
+          <p:cNvPr id="7" name="Rectangle 6"/>
+          <p:cNvSpPr/>
+          <p:nvPr/>
+        </p:nvSpPr>
+        <p:spPr>
+          <a:xfrm>
+            <a:off x="164592" y="6638544"/>
+            <a:ext cx="12027103" cy="45720"/>
+          </a:xfrm>
+          <a:prstGeom prst="rect">
+            <a:avLst/>
+          </a:prstGeom>
+          <a:solidFill>
+            <a:srgbClr val="D90000"/>
+          </a:solidFill>
+          <a:ln>
+            <a:noFill/>
+          </a:ln>
+        </p:spPr>
+        <p:style>
+          <a:lnRef idx="1">
+            <a:schemeClr val="accent1"/>
+          </a:lnRef>
+          <a:fillRef idx="3">
+            <a:schemeClr val="accent1"/>
+          </a:fillRef>
+          <a:effectRef idx="2">
+            <a:schemeClr val="accent1"/>
+          </a:effectRef>
+          <a:fontRef idx="minor">
+            <a:schemeClr val="lt1"/>
+          </a:fontRef>
+        </p:style>
+        <p:txBody>
+          <a:bodyPr rtlCol="0" anchor="ctr"/>
+          <a:lstStyle/>
+          <a:p>
+            <a:pPr algn="ctr"/>
+          </a:p>
+        </p:txBody>
+      </p:sp>
+      <p:sp>
+        <p:nvSpPr>
+          <p:cNvPr id="8" name="TextBox 7"/>
           <p:cNvSpPr txBox="1"/>
           <p:nvPr/>
         </p:nvSpPr>
         <p:spPr>
           <a:xfrm>
             <a:off x="502920" y="210312"/>
-            <a:ext cx="2926080" cy="256032"/>
+            <a:ext cx="3200400" cy="256032"/>
           </a:xfrm>
           <a:prstGeom prst="rect">
             <a:avLst/>
@@ -3304,14 +3390,14 @@
                 </a:solidFill>
                 <a:latin typeface="Arial"/>
               </a:rPr>
-              <a:t>UGANDA P7 LESSON</a:t>
-            </a:r>
-          </a:p>
-        </p:txBody>
-      </p:sp>
-      <p:sp>
-        <p:nvSpPr>
-          <p:cNvPr id="7" name="TextBox 6"/>
+              <a:t>1. HOOK</a:t>
+            </a:r>
+          </a:p>
+        </p:txBody>
+      </p:sp>
+      <p:sp>
+        <p:nvSpPr>
+          <p:cNvPr id="9" name="TextBox 8"/>
           <p:cNvSpPr txBox="1"/>
           <p:nvPr/>
         </p:nvSpPr>
@@ -3346,14 +3432,14 @@
       </p:sp>
       <p:sp>
         <p:nvSpPr>
-          <p:cNvPr id="8" name="TextBox 7"/>
+          <p:cNvPr id="10" name="TextBox 9"/>
           <p:cNvSpPr txBox="1"/>
           <p:nvPr/>
         </p:nvSpPr>
         <p:spPr>
           <a:xfrm>
-            <a:off x="731520" y="1207008"/>
-            <a:ext cx="10789920" cy="731520"/>
+            <a:off x="685800" y="1024128"/>
+            <a:ext cx="10835640" cy="502920"/>
           </a:xfrm>
           <a:prstGeom prst="rect">
             <a:avLst/>
@@ -3381,22 +3467,22 @@
       </p:sp>
       <p:sp>
         <p:nvSpPr>
-          <p:cNvPr id="9" name="Rectangle 8"/>
+          <p:cNvPr id="11" name="Rounded Rectangle 10"/>
           <p:cNvSpPr/>
           <p:nvPr/>
         </p:nvSpPr>
         <p:spPr>
           <a:xfrm>
-            <a:off x="1143000" y="2423160"/>
-            <a:ext cx="9921240" cy="2423160"/>
-          </a:xfrm>
-          <a:prstGeom prst="rect">
+            <a:off x="777240" y="1783080"/>
+            <a:ext cx="3794760" cy="4343400"/>
+          </a:xfrm>
+          <a:prstGeom prst="roundRect">
             <a:avLst/>
           </a:prstGeom>
           <a:solidFill>
             <a:srgbClr val="FFFFFF"/>
           </a:solidFill>
-          <a:ln w="19050">
+          <a:ln w="17780">
             <a:solidFill>
               <a:srgbClr val="1D4ED8"/>
             </a:solidFill>
@@ -3417,38 +3503,12 @@
           </a:fontRef>
         </p:style>
         <p:txBody>
-          <a:bodyPr rtlCol="0" anchor="ctr"/>
-          <a:lstStyle/>
-          <a:p>
-            <a:pPr algn="ctr"/>
-          </a:p>
-        </p:txBody>
-      </p:sp>
-      <p:sp>
-        <p:nvSpPr>
-          <p:cNvPr id="10" name="TextBox 9"/>
-          <p:cNvSpPr txBox="1"/>
-          <p:nvPr/>
-        </p:nvSpPr>
-        <p:spPr>
-          <a:xfrm>
-            <a:off x="1463040" y="2743200"/>
-            <a:ext cx="9281160" cy="347472"/>
-          </a:xfrm>
-          <a:prstGeom prst="rect">
-            <a:avLst/>
-          </a:prstGeom>
-          <a:noFill/>
-        </p:spPr>
-        <p:txBody>
-          <a:bodyPr wrap="square" lIns="0" rIns="0" tIns="0" bIns="0">
-            <a:spAutoFit/>
-          </a:bodyPr>
-          <a:lstStyle/>
-          <a:p>
-            <a:pPr algn="ctr"/>
-            <a:r>
-              <a:rPr sz="1700" b="1">
+          <a:bodyPr rtlCol="0" anchor="t" wrap="square" lIns="101600" rIns="101600" tIns="152400" bIns="38100"/>
+          <a:lstStyle/>
+          <a:p>
+            <a:pPr algn="ctr"/>
+            <a:r>
+              <a:rPr sz="1800" b="1">
                 <a:solidFill>
                   <a:srgbClr val="1D4ED8"/>
                 </a:solidFill>
@@ -3461,14 +3521,190 @@
       </p:sp>
       <p:sp>
         <p:nvSpPr>
-          <p:cNvPr id="11" name="TextBox 10"/>
+          <p:cNvPr id="12" name="Oval 11"/>
+          <p:cNvSpPr/>
+          <p:nvPr/>
+        </p:nvSpPr>
+        <p:spPr>
+          <a:xfrm>
+            <a:off x="2429560" y="2939796"/>
+            <a:ext cx="490118" cy="402336"/>
+          </a:xfrm>
+          <a:prstGeom prst="ellipse">
+            <a:avLst/>
+          </a:prstGeom>
+          <a:solidFill>
+            <a:srgbClr val="FFF7E0"/>
+          </a:solidFill>
+          <a:ln w="10160">
+            <a:solidFill>
+              <a:srgbClr val="087490"/>
+            </a:solidFill>
+          </a:ln>
+        </p:spPr>
+        <p:style>
+          <a:lnRef idx="1">
+            <a:schemeClr val="accent1"/>
+          </a:lnRef>
+          <a:fillRef idx="3">
+            <a:schemeClr val="accent1"/>
+          </a:fillRef>
+          <a:effectRef idx="2">
+            <a:schemeClr val="accent1"/>
+          </a:effectRef>
+          <a:fontRef idx="minor">
+            <a:schemeClr val="lt1"/>
+          </a:fontRef>
+        </p:style>
+        <p:txBody>
+          <a:bodyPr rtlCol="0" anchor="ctr"/>
+          <a:lstStyle/>
+          <a:p>
+            <a:pPr algn="ctr"/>
+          </a:p>
+        </p:txBody>
+      </p:sp>
+      <p:sp>
+        <p:nvSpPr>
+          <p:cNvPr id="13" name="Rounded Rectangle 12"/>
+          <p:cNvSpPr/>
+          <p:nvPr/>
+        </p:nvSpPr>
+        <p:spPr>
+          <a:xfrm>
+            <a:off x="2245766" y="3392424"/>
+            <a:ext cx="857707" cy="1056132"/>
+          </a:xfrm>
+          <a:prstGeom prst="roundRect">
+            <a:avLst/>
+          </a:prstGeom>
+          <a:solidFill>
+            <a:srgbClr val="ECFDF5"/>
+          </a:solidFill>
+          <a:ln w="10160">
+            <a:solidFill>
+              <a:srgbClr val="087490"/>
+            </a:solidFill>
+          </a:ln>
+        </p:spPr>
+        <p:style>
+          <a:lnRef idx="1">
+            <a:schemeClr val="accent1"/>
+          </a:lnRef>
+          <a:fillRef idx="3">
+            <a:schemeClr val="accent1"/>
+          </a:fillRef>
+          <a:effectRef idx="2">
+            <a:schemeClr val="accent1"/>
+          </a:effectRef>
+          <a:fontRef idx="minor">
+            <a:schemeClr val="lt1"/>
+          </a:fontRef>
+        </p:style>
+        <p:txBody>
+          <a:bodyPr rtlCol="0" anchor="ctr"/>
+          <a:lstStyle/>
+          <a:p>
+            <a:pPr algn="ctr"/>
+          </a:p>
+        </p:txBody>
+      </p:sp>
+      <p:sp>
+        <p:nvSpPr>
+          <p:cNvPr id="14" name="Oval 13"/>
+          <p:cNvSpPr/>
+          <p:nvPr/>
+        </p:nvSpPr>
+        <p:spPr>
+          <a:xfrm>
+            <a:off x="2429560" y="3643884"/>
+            <a:ext cx="490118" cy="301751"/>
+          </a:xfrm>
+          <a:prstGeom prst="ellipse">
+            <a:avLst/>
+          </a:prstGeom>
+          <a:solidFill>
+            <a:srgbClr val="D90000"/>
+          </a:solidFill>
+          <a:ln>
+            <a:noFill/>
+          </a:ln>
+        </p:spPr>
+        <p:style>
+          <a:lnRef idx="1">
+            <a:schemeClr val="accent1"/>
+          </a:lnRef>
+          <a:fillRef idx="3">
+            <a:schemeClr val="accent1"/>
+          </a:fillRef>
+          <a:effectRef idx="2">
+            <a:schemeClr val="accent1"/>
+          </a:effectRef>
+          <a:fontRef idx="minor">
+            <a:schemeClr val="lt1"/>
+          </a:fontRef>
+        </p:style>
+        <p:txBody>
+          <a:bodyPr rtlCol="0" anchor="ctr"/>
+          <a:lstStyle/>
+          <a:p>
+            <a:pPr algn="ctr"/>
+          </a:p>
+        </p:txBody>
+      </p:sp>
+      <p:sp>
+        <p:nvSpPr>
+          <p:cNvPr id="15" name="Rectangle 14"/>
+          <p:cNvSpPr/>
+          <p:nvPr/>
+        </p:nvSpPr>
+        <p:spPr>
+          <a:xfrm>
+            <a:off x="1816912" y="3744468"/>
+            <a:ext cx="1715414" cy="100584"/>
+          </a:xfrm>
+          <a:prstGeom prst="rect">
+            <a:avLst/>
+          </a:prstGeom>
+          <a:solidFill>
+            <a:srgbClr val="087490"/>
+          </a:solidFill>
+          <a:ln>
+            <a:noFill/>
+          </a:ln>
+        </p:spPr>
+        <p:style>
+          <a:lnRef idx="1">
+            <a:schemeClr val="accent1"/>
+          </a:lnRef>
+          <a:fillRef idx="3">
+            <a:schemeClr val="accent1"/>
+          </a:fillRef>
+          <a:effectRef idx="2">
+            <a:schemeClr val="accent1"/>
+          </a:effectRef>
+          <a:fontRef idx="minor">
+            <a:schemeClr val="lt1"/>
+          </a:fontRef>
+        </p:style>
+        <p:txBody>
+          <a:bodyPr rtlCol="0" anchor="ctr"/>
+          <a:lstStyle/>
+          <a:p>
+            <a:pPr algn="ctr"/>
+          </a:p>
+        </p:txBody>
+      </p:sp>
+      <p:sp>
+        <p:nvSpPr>
+          <p:cNvPr id="16" name="TextBox 15"/>
           <p:cNvSpPr txBox="1"/>
           <p:nvPr/>
         </p:nvSpPr>
         <p:spPr>
           <a:xfrm>
-            <a:off x="1645920" y="3355848"/>
-            <a:ext cx="8915400" cy="868680"/>
+            <a:off x="1143000" y="4745736"/>
+            <a:ext cx="3063240" cy="228600"/>
           </a:xfrm>
           <a:prstGeom prst="rect">
             <a:avLst/>
@@ -3483,7 +3719,157 @@
           <a:p>
             <a:pPr algn="ctr"/>
             <a:r>
-              <a:rPr sz="2400" b="1">
+              <a:rPr sz="1000" b="0">
+                <a:solidFill>
+                  <a:srgbClr val="475569"/>
+                </a:solidFill>
+                <a:latin typeface="Arial"/>
+              </a:rPr>
+              <a:t>Integrated Science</a:t>
+            </a:r>
+          </a:p>
+        </p:txBody>
+      </p:sp>
+      <p:sp>
+        <p:nvSpPr>
+          <p:cNvPr id="17" name="TextBox 16"/>
+          <p:cNvSpPr txBox="1"/>
+          <p:nvPr/>
+        </p:nvSpPr>
+        <p:spPr>
+          <a:xfrm>
+            <a:off x="960120" y="5504688"/>
+            <a:ext cx="3429000" cy="274320"/>
+          </a:xfrm>
+          <a:prstGeom prst="rect">
+            <a:avLst/>
+          </a:prstGeom>
+          <a:noFill/>
+        </p:spPr>
+        <p:txBody>
+          <a:bodyPr wrap="square" lIns="0" rIns="0" tIns="0" bIns="0">
+            <a:spAutoFit/>
+          </a:bodyPr>
+          <a:lstStyle/>
+          <a:p>
+            <a:pPr algn="ctr"/>
+            <a:r>
+              <a:rPr sz="1200" b="0">
+                <a:solidFill>
+                  <a:srgbClr val="475569"/>
+                </a:solidFill>
+                <a:latin typeface="Arial"/>
+              </a:rPr>
+              <a:t>Look • wonder • predict</a:t>
+            </a:r>
+          </a:p>
+        </p:txBody>
+      </p:sp>
+      <p:sp>
+        <p:nvSpPr>
+          <p:cNvPr id="18" name="Rounded Rectangle 17"/>
+          <p:cNvSpPr/>
+          <p:nvPr/>
+        </p:nvSpPr>
+        <p:spPr>
+          <a:xfrm>
+            <a:off x="4892040" y="1965960"/>
+            <a:ext cx="6355080" cy="3520440"/>
+          </a:xfrm>
+          <a:prstGeom prst="roundRect">
+            <a:avLst/>
+          </a:prstGeom>
+          <a:solidFill>
+            <a:srgbClr val="FFF7E0"/>
+          </a:solidFill>
+          <a:ln w="20320">
+            <a:solidFill>
+              <a:srgbClr val="1D4ED8"/>
+            </a:solidFill>
+          </a:ln>
+        </p:spPr>
+        <p:style>
+          <a:lnRef idx="1">
+            <a:schemeClr val="accent1"/>
+          </a:lnRef>
+          <a:fillRef idx="3">
+            <a:schemeClr val="accent1"/>
+          </a:fillRef>
+          <a:effectRef idx="2">
+            <a:schemeClr val="accent1"/>
+          </a:effectRef>
+          <a:fontRef idx="minor">
+            <a:schemeClr val="lt1"/>
+          </a:fontRef>
+        </p:style>
+        <p:txBody>
+          <a:bodyPr rtlCol="0" anchor="ctr"/>
+          <a:lstStyle/>
+          <a:p>
+            <a:pPr algn="ctr"/>
+          </a:p>
+        </p:txBody>
+      </p:sp>
+      <p:sp>
+        <p:nvSpPr>
+          <p:cNvPr id="19" name="TextBox 18"/>
+          <p:cNvSpPr txBox="1"/>
+          <p:nvPr/>
+        </p:nvSpPr>
+        <p:spPr>
+          <a:xfrm>
+            <a:off x="5257800" y="2267712"/>
+            <a:ext cx="5623560" cy="256032"/>
+          </a:xfrm>
+          <a:prstGeom prst="rect">
+            <a:avLst/>
+          </a:prstGeom>
+          <a:noFill/>
+        </p:spPr>
+        <p:txBody>
+          <a:bodyPr wrap="square" lIns="0" rIns="0" tIns="0" bIns="0">
+            <a:spAutoFit/>
+          </a:bodyPr>
+          <a:lstStyle/>
+          <a:p>
+            <a:pPr algn="ctr"/>
+            <a:r>
+              <a:rPr sz="1200" b="1">
+                <a:solidFill>
+                  <a:srgbClr val="1D4ED8"/>
+                </a:solidFill>
+                <a:latin typeface="Arial"/>
+              </a:rPr>
+              <a:t>OPENING QUESTION</a:t>
+            </a:r>
+          </a:p>
+        </p:txBody>
+      </p:sp>
+      <p:sp>
+        <p:nvSpPr>
+          <p:cNvPr id="20" name="TextBox 19"/>
+          <p:cNvSpPr txBox="1"/>
+          <p:nvPr/>
+        </p:nvSpPr>
+        <p:spPr>
+          <a:xfrm>
+            <a:off x="5285232" y="2788920"/>
+            <a:ext cx="5577840" cy="987552"/>
+          </a:xfrm>
+          <a:prstGeom prst="rect">
+            <a:avLst/>
+          </a:prstGeom>
+          <a:noFill/>
+        </p:spPr>
+        <p:txBody>
+          <a:bodyPr wrap="square" lIns="0" rIns="0" tIns="0" bIns="0">
+            <a:spAutoFit/>
+          </a:bodyPr>
+          <a:lstStyle/>
+          <a:p>
+            <a:pPr algn="ctr"/>
+            <a:r>
+              <a:rPr sz="2600" b="1">
                 <a:solidFill>
                   <a:srgbClr val="111827"/>
                 </a:solidFill>
@@ -3496,14 +3882,14 @@
       </p:sp>
       <p:sp>
         <p:nvSpPr>
-          <p:cNvPr id="12" name="TextBox 11"/>
+          <p:cNvPr id="21" name="TextBox 20"/>
           <p:cNvSpPr txBox="1"/>
           <p:nvPr/>
         </p:nvSpPr>
         <p:spPr>
           <a:xfrm>
-            <a:off x="1143000" y="5074920"/>
-            <a:ext cx="9921240" cy="320040"/>
+            <a:off x="5285232" y="4315968"/>
+            <a:ext cx="5577840" cy="411480"/>
           </a:xfrm>
           <a:prstGeom prst="rect">
             <a:avLst/>
@@ -3524,7 +3910,7 @@
                 </a:solidFill>
                 <a:latin typeface="Arial"/>
               </a:rPr>
-              <a:t>Think silently → pair talk → share one idea</a:t>
+              <a:t>First think alone. Then tell a partner one possible answer.</a:t>
             </a:r>
           </a:p>
         </p:txBody>
@@ -3729,7 +4115,93 @@
       </p:sp>
       <p:sp>
         <p:nvSpPr>
-          <p:cNvPr id="6" name="TextBox 5"/>
+          <p:cNvPr id="6" name="Rectangle 5"/>
+          <p:cNvSpPr/>
+          <p:nvPr/>
+        </p:nvSpPr>
+        <p:spPr>
+          <a:xfrm>
+            <a:off x="164592" y="6565392"/>
+            <a:ext cx="12027103" cy="73152"/>
+          </a:xfrm>
+          <a:prstGeom prst="rect">
+            <a:avLst/>
+          </a:prstGeom>
+          <a:solidFill>
+            <a:srgbClr val="FCD116"/>
+          </a:solidFill>
+          <a:ln>
+            <a:noFill/>
+          </a:ln>
+        </p:spPr>
+        <p:style>
+          <a:lnRef idx="1">
+            <a:schemeClr val="accent1"/>
+          </a:lnRef>
+          <a:fillRef idx="3">
+            <a:schemeClr val="accent1"/>
+          </a:fillRef>
+          <a:effectRef idx="2">
+            <a:schemeClr val="accent1"/>
+          </a:effectRef>
+          <a:fontRef idx="minor">
+            <a:schemeClr val="lt1"/>
+          </a:fontRef>
+        </p:style>
+        <p:txBody>
+          <a:bodyPr rtlCol="0" anchor="ctr"/>
+          <a:lstStyle/>
+          <a:p>
+            <a:pPr algn="ctr"/>
+          </a:p>
+        </p:txBody>
+      </p:sp>
+      <p:sp>
+        <p:nvSpPr>
+          <p:cNvPr id="7" name="Rectangle 6"/>
+          <p:cNvSpPr/>
+          <p:nvPr/>
+        </p:nvSpPr>
+        <p:spPr>
+          <a:xfrm>
+            <a:off x="164592" y="6638544"/>
+            <a:ext cx="12027103" cy="45720"/>
+          </a:xfrm>
+          <a:prstGeom prst="rect">
+            <a:avLst/>
+          </a:prstGeom>
+          <a:solidFill>
+            <a:srgbClr val="D90000"/>
+          </a:solidFill>
+          <a:ln>
+            <a:noFill/>
+          </a:ln>
+        </p:spPr>
+        <p:style>
+          <a:lnRef idx="1">
+            <a:schemeClr val="accent1"/>
+          </a:lnRef>
+          <a:fillRef idx="3">
+            <a:schemeClr val="accent1"/>
+          </a:fillRef>
+          <a:effectRef idx="2">
+            <a:schemeClr val="accent1"/>
+          </a:effectRef>
+          <a:fontRef idx="minor">
+            <a:schemeClr val="lt1"/>
+          </a:fontRef>
+        </p:style>
+        <p:txBody>
+          <a:bodyPr rtlCol="0" anchor="ctr"/>
+          <a:lstStyle/>
+          <a:p>
+            <a:pPr algn="ctr"/>
+          </a:p>
+        </p:txBody>
+      </p:sp>
+      <p:sp>
+        <p:nvSpPr>
+          <p:cNvPr id="8" name="TextBox 7"/>
           <p:cNvSpPr txBox="1"/>
           <p:nvPr/>
         </p:nvSpPr>
@@ -3763,7 +4235,7 @@
       </p:sp>
       <p:sp>
         <p:nvSpPr>
-          <p:cNvPr id="7" name="TextBox 6"/>
+          <p:cNvPr id="9" name="TextBox 8"/>
           <p:cNvSpPr txBox="1"/>
           <p:nvPr/>
         </p:nvSpPr>
@@ -3798,14 +4270,14 @@
       </p:sp>
       <p:sp>
         <p:nvSpPr>
-          <p:cNvPr id="8" name="TextBox 7"/>
+          <p:cNvPr id="10" name="TextBox 9"/>
           <p:cNvSpPr txBox="1"/>
           <p:nvPr/>
         </p:nvSpPr>
         <p:spPr>
           <a:xfrm>
-            <a:off x="594360" y="1042415"/>
-            <a:ext cx="11109960" cy="566928"/>
+            <a:off x="594360" y="1005840"/>
+            <a:ext cx="11064240" cy="512064"/>
           </a:xfrm>
           <a:prstGeom prst="rect">
             <a:avLst/>
@@ -3832,16 +4304,16 @@
       </p:sp>
       <p:sp>
         <p:nvSpPr>
-          <p:cNvPr id="9" name="Rectangle 8"/>
+          <p:cNvPr id="11" name="Rounded Rectangle 10"/>
           <p:cNvSpPr/>
           <p:nvPr/>
         </p:nvSpPr>
         <p:spPr>
           <a:xfrm>
-            <a:off x="685800" y="1874519"/>
-            <a:ext cx="10835640" cy="804672"/>
-          </a:xfrm>
-          <a:prstGeom prst="rect">
+            <a:off x="777240" y="1755648"/>
+            <a:ext cx="10652760" cy="822960"/>
+          </a:xfrm>
+          <a:prstGeom prst="roundRect">
             <a:avLst/>
           </a:prstGeom>
           <a:solidFill>
@@ -3879,23 +4351,23 @@
                 </a:solidFill>
                 <a:latin typeface="Arial"/>
               </a:rPr>
-              <a:t>Goal: Recalls and identify key experiments conducted from Ter...</a:t>
-            </a:r>
-          </a:p>
-        </p:txBody>
-      </p:sp>
-      <p:sp>
-        <p:nvSpPr>
-          <p:cNvPr id="10" name="Rectangle 9"/>
+              <a:t>Goal: Recalls and identify key experiments conducted from Term</a:t>
+            </a:r>
+          </a:p>
+        </p:txBody>
+      </p:sp>
+      <p:sp>
+        <p:nvSpPr>
+          <p:cNvPr id="12" name="Rounded Rectangle 11"/>
           <p:cNvSpPr/>
           <p:nvPr/>
         </p:nvSpPr>
         <p:spPr>
           <a:xfrm>
-            <a:off x="868680" y="2971800"/>
-            <a:ext cx="10378440" cy="713232"/>
-          </a:xfrm>
-          <a:prstGeom prst="rect">
+            <a:off x="777240" y="2971800"/>
+            <a:ext cx="2423160" cy="2103120"/>
+          </a:xfrm>
+          <a:prstGeom prst="roundRect">
             <a:avLst/>
           </a:prstGeom>
           <a:solidFill>
@@ -3931,14 +4403,14 @@
       </p:sp>
       <p:sp>
         <p:nvSpPr>
-          <p:cNvPr id="11" name="Rectangle 10"/>
+          <p:cNvPr id="13" name="Rectangle 12"/>
           <p:cNvSpPr/>
           <p:nvPr/>
         </p:nvSpPr>
         <p:spPr>
           <a:xfrm>
-            <a:off x="868680" y="2971800"/>
-            <a:ext cx="530352" cy="713232"/>
+            <a:off x="777240" y="2971800"/>
+            <a:ext cx="2423160" cy="164592"/>
           </a:xfrm>
           <a:prstGeom prst="rect">
             <a:avLst/>
@@ -3965,32 +4437,58 @@
           </a:fontRef>
         </p:style>
         <p:txBody>
-          <a:bodyPr rtlCol="0" anchor="ctr" wrap="square" lIns="101600" rIns="101600" tIns="38100" bIns="38100"/>
+          <a:bodyPr rtlCol="0" anchor="ctr"/>
+          <a:lstStyle/>
+          <a:p>
+            <a:pPr algn="ctr"/>
+          </a:p>
+        </p:txBody>
+      </p:sp>
+      <p:sp>
+        <p:nvSpPr>
+          <p:cNvPr id="14" name="TextBox 13"/>
+          <p:cNvSpPr txBox="1"/>
+          <p:nvPr/>
+        </p:nvSpPr>
+        <p:spPr>
+          <a:xfrm>
+            <a:off x="978408" y="3355848"/>
+            <a:ext cx="2020824" cy="320040"/>
+          </a:xfrm>
+          <a:prstGeom prst="rect">
+            <a:avLst/>
+          </a:prstGeom>
+          <a:noFill/>
+        </p:spPr>
+        <p:txBody>
+          <a:bodyPr wrap="square" lIns="0" rIns="0" tIns="0" bIns="0">
+            <a:spAutoFit/>
+          </a:bodyPr>
           <a:lstStyle/>
           <a:p>
             <a:pPr algn="ctr"/>
             <a:r>
               <a:rPr sz="1500" b="1">
                 <a:solidFill>
-                  <a:srgbClr val="FFFFFF"/>
+                  <a:srgbClr val="1B7F3A"/>
                 </a:solidFill>
                 <a:latin typeface="Arial"/>
               </a:rPr>
-              <a:t>1</a:t>
-            </a:r>
-          </a:p>
-        </p:txBody>
-      </p:sp>
-      <p:sp>
-        <p:nvSpPr>
-          <p:cNvPr id="12" name="TextBox 11"/>
+              <a:t>1  Learn</a:t>
+            </a:r>
+          </a:p>
+        </p:txBody>
+      </p:sp>
+      <p:sp>
+        <p:nvSpPr>
+          <p:cNvPr id="15" name="TextBox 14"/>
           <p:cNvSpPr txBox="1"/>
           <p:nvPr/>
         </p:nvSpPr>
         <p:spPr>
           <a:xfrm>
-            <a:off x="1572768" y="3118104"/>
-            <a:ext cx="9372600" cy="384048"/>
+            <a:off x="1005840" y="3922776"/>
+            <a:ext cx="1965960" cy="658368"/>
           </a:xfrm>
           <a:prstGeom prst="rect">
             <a:avLst/>
@@ -4003,30 +4501,31 @@
           </a:bodyPr>
           <a:lstStyle/>
           <a:p>
-            <a:r>
-              <a:rPr sz="1500" b="0">
+            <a:pPr algn="ctr"/>
+            <a:r>
+              <a:rPr sz="1400" b="1">
                 <a:solidFill>
                   <a:srgbClr val="111827"/>
                 </a:solidFill>
                 <a:latin typeface="Arial"/>
               </a:rPr>
-              <a:t>You will use: Looking Back at Our Experiments, How to Write a Sci...</a:t>
-            </a:r>
-          </a:p>
-        </p:txBody>
-      </p:sp>
-      <p:sp>
-        <p:nvSpPr>
-          <p:cNvPr id="13" name="Rectangle 12"/>
+              <a:t>Use: Looking Back at Our Experiments, How to Write a Science Report</a:t>
+            </a:r>
+          </a:p>
+        </p:txBody>
+      </p:sp>
+      <p:sp>
+        <p:nvSpPr>
+          <p:cNvPr id="16" name="Rounded Rectangle 15"/>
           <p:cNvSpPr/>
           <p:nvPr/>
         </p:nvSpPr>
         <p:spPr>
           <a:xfrm>
-            <a:off x="868680" y="3822191"/>
-            <a:ext cx="10378440" cy="713232"/>
-          </a:xfrm>
-          <a:prstGeom prst="rect">
+            <a:off x="3566160" y="2971800"/>
+            <a:ext cx="2423160" cy="2103120"/>
+          </a:xfrm>
+          <a:prstGeom prst="roundRect">
             <a:avLst/>
           </a:prstGeom>
           <a:solidFill>
@@ -4062,14 +4561,14 @@
       </p:sp>
       <p:sp>
         <p:nvSpPr>
-          <p:cNvPr id="14" name="Rectangle 13"/>
+          <p:cNvPr id="17" name="Rectangle 16"/>
           <p:cNvSpPr/>
           <p:nvPr/>
         </p:nvSpPr>
         <p:spPr>
           <a:xfrm>
-            <a:off x="868680" y="3822191"/>
-            <a:ext cx="530352" cy="713232"/>
+            <a:off x="3566160" y="2971800"/>
+            <a:ext cx="2423160" cy="164592"/>
           </a:xfrm>
           <a:prstGeom prst="rect">
             <a:avLst/>
@@ -4096,32 +4595,58 @@
           </a:fontRef>
         </p:style>
         <p:txBody>
-          <a:bodyPr rtlCol="0" anchor="ctr" wrap="square" lIns="101600" rIns="101600" tIns="38100" bIns="38100"/>
+          <a:bodyPr rtlCol="0" anchor="ctr"/>
+          <a:lstStyle/>
+          <a:p>
+            <a:pPr algn="ctr"/>
+          </a:p>
+        </p:txBody>
+      </p:sp>
+      <p:sp>
+        <p:nvSpPr>
+          <p:cNvPr id="18" name="TextBox 17"/>
+          <p:cNvSpPr txBox="1"/>
+          <p:nvPr/>
+        </p:nvSpPr>
+        <p:spPr>
+          <a:xfrm>
+            <a:off x="3767328" y="3355848"/>
+            <a:ext cx="2020824" cy="320040"/>
+          </a:xfrm>
+          <a:prstGeom prst="rect">
+            <a:avLst/>
+          </a:prstGeom>
+          <a:noFill/>
+        </p:spPr>
+        <p:txBody>
+          <a:bodyPr wrap="square" lIns="0" rIns="0" tIns="0" bIns="0">
+            <a:spAutoFit/>
+          </a:bodyPr>
           <a:lstStyle/>
           <a:p>
             <a:pPr algn="ctr"/>
             <a:r>
               <a:rPr sz="1500" b="1">
                 <a:solidFill>
-                  <a:srgbClr val="FFFFFF"/>
+                  <a:srgbClr val="1B7F3A"/>
                 </a:solidFill>
                 <a:latin typeface="Arial"/>
               </a:rPr>
-              <a:t>2</a:t>
-            </a:r>
-          </a:p>
-        </p:txBody>
-      </p:sp>
-      <p:sp>
-        <p:nvSpPr>
-          <p:cNvPr id="15" name="TextBox 14"/>
+              <a:t>2  Practise</a:t>
+            </a:r>
+          </a:p>
+        </p:txBody>
+      </p:sp>
+      <p:sp>
+        <p:nvSpPr>
+          <p:cNvPr id="19" name="TextBox 18"/>
           <p:cNvSpPr txBox="1"/>
           <p:nvPr/>
         </p:nvSpPr>
         <p:spPr>
           <a:xfrm>
-            <a:off x="1572768" y="3968496"/>
-            <a:ext cx="9372600" cy="384048"/>
+            <a:off x="3794760" y="3922776"/>
+            <a:ext cx="1965960" cy="658368"/>
           </a:xfrm>
           <a:prstGeom prst="rect">
             <a:avLst/>
@@ -4134,30 +4659,31 @@
           </a:bodyPr>
           <a:lstStyle/>
           <a:p>
-            <a:r>
-              <a:rPr sz="1500" b="0">
+            <a:pPr algn="ctr"/>
+            <a:r>
+              <a:rPr sz="1400" b="1">
                 <a:solidFill>
                   <a:srgbClr val="111827"/>
                 </a:solidFill>
                 <a:latin typeface="Arial"/>
               </a:rPr>
-              <a:t>Success: explain, try, and answer in your own words.</a:t>
-            </a:r>
-          </a:p>
-        </p:txBody>
-      </p:sp>
-      <p:sp>
-        <p:nvSpPr>
-          <p:cNvPr id="16" name="Rectangle 15"/>
+              <a:t>Show: answer with one reason or example.</a:t>
+            </a:r>
+          </a:p>
+        </p:txBody>
+      </p:sp>
+      <p:sp>
+        <p:nvSpPr>
+          <p:cNvPr id="20" name="Rounded Rectangle 19"/>
           <p:cNvSpPr/>
           <p:nvPr/>
         </p:nvSpPr>
         <p:spPr>
           <a:xfrm>
-            <a:off x="868680" y="4672584"/>
-            <a:ext cx="10378440" cy="713232"/>
-          </a:xfrm>
-          <a:prstGeom prst="rect">
+            <a:off x="6355079" y="2971800"/>
+            <a:ext cx="2423160" cy="2103120"/>
+          </a:xfrm>
+          <a:prstGeom prst="roundRect">
             <a:avLst/>
           </a:prstGeom>
           <a:solidFill>
@@ -4193,14 +4719,14 @@
       </p:sp>
       <p:sp>
         <p:nvSpPr>
-          <p:cNvPr id="17" name="Rectangle 16"/>
+          <p:cNvPr id="21" name="Rectangle 20"/>
           <p:cNvSpPr/>
           <p:nvPr/>
         </p:nvSpPr>
         <p:spPr>
           <a:xfrm>
-            <a:off x="868680" y="4672584"/>
-            <a:ext cx="530352" cy="713232"/>
+            <a:off x="6355079" y="2971800"/>
+            <a:ext cx="2423160" cy="164592"/>
           </a:xfrm>
           <a:prstGeom prst="rect">
             <a:avLst/>
@@ -4227,32 +4753,58 @@
           </a:fontRef>
         </p:style>
         <p:txBody>
-          <a:bodyPr rtlCol="0" anchor="ctr" wrap="square" lIns="101600" rIns="101600" tIns="38100" bIns="38100"/>
+          <a:bodyPr rtlCol="0" anchor="ctr"/>
+          <a:lstStyle/>
+          <a:p>
+            <a:pPr algn="ctr"/>
+          </a:p>
+        </p:txBody>
+      </p:sp>
+      <p:sp>
+        <p:nvSpPr>
+          <p:cNvPr id="22" name="TextBox 21"/>
+          <p:cNvSpPr txBox="1"/>
+          <p:nvPr/>
+        </p:nvSpPr>
+        <p:spPr>
+          <a:xfrm>
+            <a:off x="6556247" y="3355848"/>
+            <a:ext cx="2020824" cy="320040"/>
+          </a:xfrm>
+          <a:prstGeom prst="rect">
+            <a:avLst/>
+          </a:prstGeom>
+          <a:noFill/>
+        </p:spPr>
+        <p:txBody>
+          <a:bodyPr wrap="square" lIns="0" rIns="0" tIns="0" bIns="0">
+            <a:spAutoFit/>
+          </a:bodyPr>
           <a:lstStyle/>
           <a:p>
             <a:pPr algn="ctr"/>
             <a:r>
               <a:rPr sz="1500" b="1">
                 <a:solidFill>
-                  <a:srgbClr val="FFFFFF"/>
+                  <a:srgbClr val="1B7F3A"/>
                 </a:solidFill>
                 <a:latin typeface="Arial"/>
               </a:rPr>
-              <a:t>3</a:t>
-            </a:r>
-          </a:p>
-        </p:txBody>
-      </p:sp>
-      <p:sp>
-        <p:nvSpPr>
-          <p:cNvPr id="18" name="TextBox 17"/>
+              <a:t>3  Show</a:t>
+            </a:r>
+          </a:p>
+        </p:txBody>
+      </p:sp>
+      <p:sp>
+        <p:nvSpPr>
+          <p:cNvPr id="23" name="TextBox 22"/>
           <p:cNvSpPr txBox="1"/>
           <p:nvPr/>
         </p:nvSpPr>
         <p:spPr>
           <a:xfrm>
-            <a:off x="1572768" y="4818888"/>
-            <a:ext cx="9372600" cy="384048"/>
+            <a:off x="6583679" y="3922776"/>
+            <a:ext cx="1965960" cy="658368"/>
           </a:xfrm>
           <a:prstGeom prst="rect">
             <a:avLst/>
@@ -4265,30 +4817,31 @@
           </a:bodyPr>
           <a:lstStyle/>
           <a:p>
-            <a:r>
-              <a:rPr sz="1500" b="0">
+            <a:pPr algn="ctr"/>
+            <a:r>
+              <a:rPr sz="1400" b="1">
                 <a:solidFill>
                   <a:srgbClr val="111827"/>
                 </a:solidFill>
                 <a:latin typeface="Arial"/>
               </a:rPr>
-              <a:t>Write one clear response.</a:t>
-            </a:r>
-          </a:p>
-        </p:txBody>
-      </p:sp>
-      <p:sp>
-        <p:nvSpPr>
-          <p:cNvPr id="19" name="Rectangle 18"/>
+              <a:t>Routine: listen, talk, try, explain.</a:t>
+            </a:r>
+          </a:p>
+        </p:txBody>
+      </p:sp>
+      <p:sp>
+        <p:nvSpPr>
+          <p:cNvPr id="24" name="Rounded Rectangle 23"/>
           <p:cNvSpPr/>
           <p:nvPr/>
         </p:nvSpPr>
         <p:spPr>
           <a:xfrm>
-            <a:off x="868680" y="5522976"/>
-            <a:ext cx="10378440" cy="713232"/>
-          </a:xfrm>
-          <a:prstGeom prst="rect">
+            <a:off x="9143999" y="2971800"/>
+            <a:ext cx="2423160" cy="2103120"/>
+          </a:xfrm>
+          <a:prstGeom prst="roundRect">
             <a:avLst/>
           </a:prstGeom>
           <a:solidFill>
@@ -4324,14 +4877,14 @@
       </p:sp>
       <p:sp>
         <p:nvSpPr>
-          <p:cNvPr id="20" name="Rectangle 19"/>
+          <p:cNvPr id="25" name="Rectangle 24"/>
           <p:cNvSpPr/>
           <p:nvPr/>
         </p:nvSpPr>
         <p:spPr>
           <a:xfrm>
-            <a:off x="868680" y="5522976"/>
-            <a:ext cx="530352" cy="713232"/>
+            <a:off x="9143999" y="2971800"/>
+            <a:ext cx="2423160" cy="164592"/>
           </a:xfrm>
           <a:prstGeom prst="rect">
             <a:avLst/>
@@ -4358,32 +4911,58 @@
           </a:fontRef>
         </p:style>
         <p:txBody>
-          <a:bodyPr rtlCol="0" anchor="ctr" wrap="square" lIns="101600" rIns="101600" tIns="38100" bIns="38100"/>
+          <a:bodyPr rtlCol="0" anchor="ctr"/>
+          <a:lstStyle/>
+          <a:p>
+            <a:pPr algn="ctr"/>
+          </a:p>
+        </p:txBody>
+      </p:sp>
+      <p:sp>
+        <p:nvSpPr>
+          <p:cNvPr id="26" name="TextBox 25"/>
+          <p:cNvSpPr txBox="1"/>
+          <p:nvPr/>
+        </p:nvSpPr>
+        <p:spPr>
+          <a:xfrm>
+            <a:off x="9345167" y="3355848"/>
+            <a:ext cx="2020824" cy="320040"/>
+          </a:xfrm>
+          <a:prstGeom prst="rect">
+            <a:avLst/>
+          </a:prstGeom>
+          <a:noFill/>
+        </p:spPr>
+        <p:txBody>
+          <a:bodyPr wrap="square" lIns="0" rIns="0" tIns="0" bIns="0">
+            <a:spAutoFit/>
+          </a:bodyPr>
           <a:lstStyle/>
           <a:p>
             <a:pPr algn="ctr"/>
             <a:r>
               <a:rPr sz="1500" b="1">
                 <a:solidFill>
-                  <a:srgbClr val="FFFFFF"/>
+                  <a:srgbClr val="1B7F3A"/>
                 </a:solidFill>
                 <a:latin typeface="Arial"/>
               </a:rPr>
-              <a:t>4</a:t>
-            </a:r>
-          </a:p>
-        </p:txBody>
-      </p:sp>
-      <p:sp>
-        <p:nvSpPr>
-          <p:cNvPr id="21" name="TextBox 20"/>
+              <a:t>4  Reflect</a:t>
+            </a:r>
+          </a:p>
+        </p:txBody>
+      </p:sp>
+      <p:sp>
+        <p:nvSpPr>
+          <p:cNvPr id="27" name="TextBox 26"/>
           <p:cNvSpPr txBox="1"/>
           <p:nvPr/>
         </p:nvSpPr>
         <p:spPr>
           <a:xfrm>
-            <a:off x="1572768" y="5669280"/>
-            <a:ext cx="9372600" cy="384048"/>
+            <a:off x="9372599" y="3922776"/>
+            <a:ext cx="1965960" cy="658368"/>
           </a:xfrm>
           <a:prstGeom prst="rect">
             <a:avLst/>
@@ -4396,28 +4975,205 @@
           </a:bodyPr>
           <a:lstStyle/>
           <a:p>
-            <a:r>
-              <a:rPr sz="1500" b="0">
+            <a:pPr algn="ctr"/>
+            <a:r>
+              <a:rPr sz="1400" b="1">
                 <a:solidFill>
                   <a:srgbClr val="111827"/>
                 </a:solidFill>
                 <a:latin typeface="Arial"/>
               </a:rPr>
-              <a:t>Write one clear response.</a:t>
-            </a:r>
-          </a:p>
-        </p:txBody>
-      </p:sp>
-      <p:sp>
-        <p:nvSpPr>
-          <p:cNvPr id="22" name="TextBox 21"/>
+              <a:t>Explain in your own words.</a:t>
+            </a:r>
+          </a:p>
+        </p:txBody>
+      </p:sp>
+      <p:sp>
+        <p:nvSpPr>
+          <p:cNvPr id="28" name="Oval 27"/>
+          <p:cNvSpPr/>
+          <p:nvPr/>
+        </p:nvSpPr>
+        <p:spPr>
+          <a:xfrm>
+            <a:off x="5848502" y="5360212"/>
+            <a:ext cx="409651" cy="131673"/>
+          </a:xfrm>
+          <a:prstGeom prst="ellipse">
+            <a:avLst/>
+          </a:prstGeom>
+          <a:solidFill>
+            <a:srgbClr val="FFF7E0"/>
+          </a:solidFill>
+          <a:ln w="10160">
+            <a:solidFill>
+              <a:srgbClr val="087490"/>
+            </a:solidFill>
+          </a:ln>
+        </p:spPr>
+        <p:style>
+          <a:lnRef idx="1">
+            <a:schemeClr val="accent1"/>
+          </a:lnRef>
+          <a:fillRef idx="3">
+            <a:schemeClr val="accent1"/>
+          </a:fillRef>
+          <a:effectRef idx="2">
+            <a:schemeClr val="accent1"/>
+          </a:effectRef>
+          <a:fontRef idx="minor">
+            <a:schemeClr val="lt1"/>
+          </a:fontRef>
+        </p:style>
+        <p:txBody>
+          <a:bodyPr rtlCol="0" anchor="ctr"/>
+          <a:lstStyle/>
+          <a:p>
+            <a:pPr algn="ctr"/>
+          </a:p>
+        </p:txBody>
+      </p:sp>
+      <p:sp>
+        <p:nvSpPr>
+          <p:cNvPr id="29" name="Rounded Rectangle 28"/>
+          <p:cNvSpPr/>
+          <p:nvPr/>
+        </p:nvSpPr>
+        <p:spPr>
+          <a:xfrm>
+            <a:off x="5694883" y="5508345"/>
+            <a:ext cx="716889" cy="345643"/>
+          </a:xfrm>
+          <a:prstGeom prst="roundRect">
+            <a:avLst/>
+          </a:prstGeom>
+          <a:solidFill>
+            <a:srgbClr val="ECFDF5"/>
+          </a:solidFill>
+          <a:ln w="10160">
+            <a:solidFill>
+              <a:srgbClr val="087490"/>
+            </a:solidFill>
+          </a:ln>
+        </p:spPr>
+        <p:style>
+          <a:lnRef idx="1">
+            <a:schemeClr val="accent1"/>
+          </a:lnRef>
+          <a:fillRef idx="3">
+            <a:schemeClr val="accent1"/>
+          </a:fillRef>
+          <a:effectRef idx="2">
+            <a:schemeClr val="accent1"/>
+          </a:effectRef>
+          <a:fontRef idx="minor">
+            <a:schemeClr val="lt1"/>
+          </a:fontRef>
+        </p:style>
+        <p:txBody>
+          <a:bodyPr rtlCol="0" anchor="ctr"/>
+          <a:lstStyle/>
+          <a:p>
+            <a:pPr algn="ctr"/>
+          </a:p>
+        </p:txBody>
+      </p:sp>
+      <p:sp>
+        <p:nvSpPr>
+          <p:cNvPr id="30" name="Oval 29"/>
+          <p:cNvSpPr/>
+          <p:nvPr/>
+        </p:nvSpPr>
+        <p:spPr>
+          <a:xfrm>
+            <a:off x="5848502" y="5590641"/>
+            <a:ext cx="409651" cy="98755"/>
+          </a:xfrm>
+          <a:prstGeom prst="ellipse">
+            <a:avLst/>
+          </a:prstGeom>
+          <a:solidFill>
+            <a:srgbClr val="D90000"/>
+          </a:solidFill>
+          <a:ln>
+            <a:noFill/>
+          </a:ln>
+        </p:spPr>
+        <p:style>
+          <a:lnRef idx="1">
+            <a:schemeClr val="accent1"/>
+          </a:lnRef>
+          <a:fillRef idx="3">
+            <a:schemeClr val="accent1"/>
+          </a:fillRef>
+          <a:effectRef idx="2">
+            <a:schemeClr val="accent1"/>
+          </a:effectRef>
+          <a:fontRef idx="minor">
+            <a:schemeClr val="lt1"/>
+          </a:fontRef>
+        </p:style>
+        <p:txBody>
+          <a:bodyPr rtlCol="0" anchor="ctr"/>
+          <a:lstStyle/>
+          <a:p>
+            <a:pPr algn="ctr"/>
+          </a:p>
+        </p:txBody>
+      </p:sp>
+      <p:sp>
+        <p:nvSpPr>
+          <p:cNvPr id="31" name="Rectangle 30"/>
+          <p:cNvSpPr/>
+          <p:nvPr/>
+        </p:nvSpPr>
+        <p:spPr>
+          <a:xfrm>
+            <a:off x="5336438" y="5623560"/>
+            <a:ext cx="1433779" cy="32918"/>
+          </a:xfrm>
+          <a:prstGeom prst="rect">
+            <a:avLst/>
+          </a:prstGeom>
+          <a:solidFill>
+            <a:srgbClr val="087490"/>
+          </a:solidFill>
+          <a:ln>
+            <a:noFill/>
+          </a:ln>
+        </p:spPr>
+        <p:style>
+          <a:lnRef idx="1">
+            <a:schemeClr val="accent1"/>
+          </a:lnRef>
+          <a:fillRef idx="3">
+            <a:schemeClr val="accent1"/>
+          </a:fillRef>
+          <a:effectRef idx="2">
+            <a:schemeClr val="accent1"/>
+          </a:effectRef>
+          <a:fontRef idx="minor">
+            <a:schemeClr val="lt1"/>
+          </a:fontRef>
+        </p:style>
+        <p:txBody>
+          <a:bodyPr rtlCol="0" anchor="ctr"/>
+          <a:lstStyle/>
+          <a:p>
+            <a:pPr algn="ctr"/>
+          </a:p>
+        </p:txBody>
+      </p:sp>
+      <p:sp>
+        <p:nvSpPr>
+          <p:cNvPr id="32" name="TextBox 31"/>
           <p:cNvSpPr txBox="1"/>
           <p:nvPr/>
         </p:nvSpPr>
         <p:spPr>
           <a:xfrm>
-            <a:off x="685800" y="6419088"/>
-            <a:ext cx="10835640" cy="228600"/>
+            <a:off x="713232" y="6355080"/>
+            <a:ext cx="10835640" cy="219456"/>
           </a:xfrm>
           <a:prstGeom prst="rect">
             <a:avLst/>
@@ -4438,7 +5194,7 @@
                 </a:solidFill>
                 <a:latin typeface="Arial"/>
               </a:rPr>
-              <a:t>Listen • Talk • Try • Explain</a:t>
+              <a:t>P7 class flow: listen • talk • try • explain</a:t>
             </a:r>
           </a:p>
         </p:txBody>
@@ -4643,7 +5399,93 @@
       </p:sp>
       <p:sp>
         <p:nvSpPr>
-          <p:cNvPr id="6" name="TextBox 5"/>
+          <p:cNvPr id="6" name="Rectangle 5"/>
+          <p:cNvSpPr/>
+          <p:nvPr/>
+        </p:nvSpPr>
+        <p:spPr>
+          <a:xfrm>
+            <a:off x="164592" y="6565392"/>
+            <a:ext cx="12027103" cy="73152"/>
+          </a:xfrm>
+          <a:prstGeom prst="rect">
+            <a:avLst/>
+          </a:prstGeom>
+          <a:solidFill>
+            <a:srgbClr val="FCD116"/>
+          </a:solidFill>
+          <a:ln>
+            <a:noFill/>
+          </a:ln>
+        </p:spPr>
+        <p:style>
+          <a:lnRef idx="1">
+            <a:schemeClr val="accent1"/>
+          </a:lnRef>
+          <a:fillRef idx="3">
+            <a:schemeClr val="accent1"/>
+          </a:fillRef>
+          <a:effectRef idx="2">
+            <a:schemeClr val="accent1"/>
+          </a:effectRef>
+          <a:fontRef idx="minor">
+            <a:schemeClr val="lt1"/>
+          </a:fontRef>
+        </p:style>
+        <p:txBody>
+          <a:bodyPr rtlCol="0" anchor="ctr"/>
+          <a:lstStyle/>
+          <a:p>
+            <a:pPr algn="ctr"/>
+          </a:p>
+        </p:txBody>
+      </p:sp>
+      <p:sp>
+        <p:nvSpPr>
+          <p:cNvPr id="7" name="Rectangle 6"/>
+          <p:cNvSpPr/>
+          <p:nvPr/>
+        </p:nvSpPr>
+        <p:spPr>
+          <a:xfrm>
+            <a:off x="164592" y="6638544"/>
+            <a:ext cx="12027103" cy="45720"/>
+          </a:xfrm>
+          <a:prstGeom prst="rect">
+            <a:avLst/>
+          </a:prstGeom>
+          <a:solidFill>
+            <a:srgbClr val="D90000"/>
+          </a:solidFill>
+          <a:ln>
+            <a:noFill/>
+          </a:ln>
+        </p:spPr>
+        <p:style>
+          <a:lnRef idx="1">
+            <a:schemeClr val="accent1"/>
+          </a:lnRef>
+          <a:fillRef idx="3">
+            <a:schemeClr val="accent1"/>
+          </a:fillRef>
+          <a:effectRef idx="2">
+            <a:schemeClr val="accent1"/>
+          </a:effectRef>
+          <a:fontRef idx="minor">
+            <a:schemeClr val="lt1"/>
+          </a:fontRef>
+        </p:style>
+        <p:txBody>
+          <a:bodyPr rtlCol="0" anchor="ctr"/>
+          <a:lstStyle/>
+          <a:p>
+            <a:pPr algn="ctr"/>
+          </a:p>
+        </p:txBody>
+      </p:sp>
+      <p:sp>
+        <p:nvSpPr>
+          <p:cNvPr id="8" name="TextBox 7"/>
           <p:cNvSpPr txBox="1"/>
           <p:nvPr/>
         </p:nvSpPr>
@@ -4677,7 +5519,7 @@
       </p:sp>
       <p:sp>
         <p:nvSpPr>
-          <p:cNvPr id="7" name="TextBox 6"/>
+          <p:cNvPr id="9" name="TextBox 8"/>
           <p:cNvSpPr txBox="1"/>
           <p:nvPr/>
         </p:nvSpPr>
@@ -4712,14 +5554,14 @@
       </p:sp>
       <p:sp>
         <p:nvSpPr>
-          <p:cNvPr id="8" name="TextBox 7"/>
+          <p:cNvPr id="10" name="TextBox 9"/>
           <p:cNvSpPr txBox="1"/>
           <p:nvPr/>
         </p:nvSpPr>
         <p:spPr>
           <a:xfrm>
-            <a:off x="594360" y="1042415"/>
-            <a:ext cx="11109960" cy="566928"/>
+            <a:off x="594360" y="1005840"/>
+            <a:ext cx="11064240" cy="512064"/>
           </a:xfrm>
           <a:prstGeom prst="rect">
             <a:avLst/>
@@ -4746,22 +5588,22 @@
       </p:sp>
       <p:sp>
         <p:nvSpPr>
-          <p:cNvPr id="9" name="Rectangle 8"/>
+          <p:cNvPr id="11" name="Rounded Rectangle 10"/>
           <p:cNvSpPr/>
           <p:nvPr/>
         </p:nvSpPr>
         <p:spPr>
           <a:xfrm>
-            <a:off x="685800" y="1874519"/>
-            <a:ext cx="10835640" cy="804672"/>
-          </a:xfrm>
-          <a:prstGeom prst="rect">
-            <a:avLst/>
-          </a:prstGeom>
-          <a:solidFill>
-            <a:srgbClr val="FFF7E0"/>
-          </a:solidFill>
-          <a:ln w="17780">
+            <a:off x="822960" y="1874519"/>
+            <a:ext cx="3154680" cy="3977639"/>
+          </a:xfrm>
+          <a:prstGeom prst="roundRect">
+            <a:avLst/>
+          </a:prstGeom>
+          <a:solidFill>
+            <a:srgbClr val="FFFFFF"/>
+          </a:solidFill>
+          <a:ln w="16510">
             <a:solidFill>
               <a:srgbClr val="7C3AED"/>
             </a:solidFill>
@@ -4782,79 +5624,25 @@
           </a:fontRef>
         </p:style>
         <p:txBody>
-          <a:bodyPr rtlCol="0" anchor="ctr" wrap="square" lIns="101600" rIns="101600" tIns="38100" bIns="38100"/>
-          <a:lstStyle/>
-          <a:p>
-            <a:pPr algn="ctr"/>
-            <a:r>
-              <a:rPr sz="1900" b="1">
-                <a:solidFill>
-                  <a:srgbClr val="111827"/>
-                </a:solidFill>
-                <a:latin typeface="Arial"/>
-              </a:rPr>
-              <a:t>Think: Which experiment did you find most challenging?</a:t>
-            </a:r>
-          </a:p>
-        </p:txBody>
-      </p:sp>
-      <p:sp>
-        <p:nvSpPr>
-          <p:cNvPr id="10" name="Rectangle 9"/>
+          <a:bodyPr rtlCol="0" anchor="ctr"/>
+          <a:lstStyle/>
+          <a:p>
+            <a:pPr algn="ctr"/>
+          </a:p>
+        </p:txBody>
+      </p:sp>
+      <p:sp>
+        <p:nvSpPr>
+          <p:cNvPr id="12" name="Oval 11"/>
           <p:cNvSpPr/>
           <p:nvPr/>
         </p:nvSpPr>
         <p:spPr>
           <a:xfrm>
-            <a:off x="868680" y="2971800"/>
-            <a:ext cx="10378440" cy="713232"/>
-          </a:xfrm>
-          <a:prstGeom prst="rect">
-            <a:avLst/>
-          </a:prstGeom>
-          <a:solidFill>
-            <a:srgbClr val="FFFFFF"/>
-          </a:solidFill>
-          <a:ln w="11430">
-            <a:solidFill>
-              <a:srgbClr val="CBD5E1"/>
-            </a:solidFill>
-          </a:ln>
-        </p:spPr>
-        <p:style>
-          <a:lnRef idx="1">
-            <a:schemeClr val="accent1"/>
-          </a:lnRef>
-          <a:fillRef idx="3">
-            <a:schemeClr val="accent1"/>
-          </a:fillRef>
-          <a:effectRef idx="2">
-            <a:schemeClr val="accent1"/>
-          </a:effectRef>
-          <a:fontRef idx="minor">
-            <a:schemeClr val="lt1"/>
-          </a:fontRef>
-        </p:style>
-        <p:txBody>
-          <a:bodyPr rtlCol="0" anchor="ctr"/>
-          <a:lstStyle/>
-          <a:p>
-            <a:pPr algn="ctr"/>
-          </a:p>
-        </p:txBody>
-      </p:sp>
-      <p:sp>
-        <p:nvSpPr>
-          <p:cNvPr id="11" name="Rectangle 10"/>
-          <p:cNvSpPr/>
-          <p:nvPr/>
-        </p:nvSpPr>
-        <p:spPr>
-          <a:xfrm>
-            <a:off x="868680" y="2971800"/>
-            <a:ext cx="530352" cy="713232"/>
-          </a:xfrm>
-          <a:prstGeom prst="rect">
+            <a:off x="2029968" y="2148840"/>
+            <a:ext cx="713232" cy="713232"/>
+          </a:xfrm>
+          <a:prstGeom prst="ellipse">
             <a:avLst/>
           </a:prstGeom>
           <a:solidFill>
@@ -4897,14 +5685,14 @@
       </p:sp>
       <p:sp>
         <p:nvSpPr>
-          <p:cNvPr id="12" name="TextBox 11"/>
+          <p:cNvPr id="13" name="TextBox 12"/>
           <p:cNvSpPr txBox="1"/>
           <p:nvPr/>
         </p:nvSpPr>
         <p:spPr>
           <a:xfrm>
-            <a:off x="1572768" y="3118104"/>
-            <a:ext cx="9372600" cy="384048"/>
+            <a:off x="1143000" y="2999232"/>
+            <a:ext cx="2514600" cy="310896"/>
           </a:xfrm>
           <a:prstGeom prst="rect">
             <a:avLst/>
@@ -4917,38 +5705,109 @@
           </a:bodyPr>
           <a:lstStyle/>
           <a:p>
-            <a:r>
-              <a:rPr sz="1500" b="0">
+            <a:pPr algn="ctr"/>
+            <a:r>
+              <a:rPr sz="1600" b="1">
+                <a:solidFill>
+                  <a:srgbClr val="7C3AED"/>
+                </a:solidFill>
+                <a:latin typeface="Arial"/>
+              </a:rPr>
+              <a:t>THINK</a:t>
+            </a:r>
+          </a:p>
+        </p:txBody>
+      </p:sp>
+      <p:sp>
+        <p:nvSpPr>
+          <p:cNvPr id="14" name="TextBox 13"/>
+          <p:cNvSpPr txBox="1"/>
+          <p:nvPr/>
+        </p:nvSpPr>
+        <p:spPr>
+          <a:xfrm>
+            <a:off x="1143000" y="3657600"/>
+            <a:ext cx="2514600" cy="960120"/>
+          </a:xfrm>
+          <a:prstGeom prst="rect">
+            <a:avLst/>
+          </a:prstGeom>
+          <a:noFill/>
+        </p:spPr>
+        <p:txBody>
+          <a:bodyPr wrap="square" lIns="0" rIns="0" tIns="0" bIns="0">
+            <a:spAutoFit/>
+          </a:bodyPr>
+          <a:lstStyle/>
+          <a:p>
+            <a:pPr algn="ctr"/>
+            <a:r>
+              <a:rPr sz="1800" b="1">
                 <a:solidFill>
                   <a:srgbClr val="111827"/>
                 </a:solidFill>
                 <a:latin typeface="Arial"/>
               </a:rPr>
-              <a:t>Pair: compare your first answer with a partner.</a:t>
-            </a:r>
-          </a:p>
-        </p:txBody>
-      </p:sp>
-      <p:sp>
-        <p:nvSpPr>
-          <p:cNvPr id="13" name="Rectangle 12"/>
+              <a:t>Which experiment did you find most challenging?</a:t>
+            </a:r>
+          </a:p>
+        </p:txBody>
+      </p:sp>
+      <p:sp>
+        <p:nvSpPr>
+          <p:cNvPr id="15" name="TextBox 14"/>
+          <p:cNvSpPr txBox="1"/>
+          <p:nvPr/>
+        </p:nvSpPr>
+        <p:spPr>
+          <a:xfrm>
+            <a:off x="1143000" y="5166360"/>
+            <a:ext cx="2514600" cy="274320"/>
+          </a:xfrm>
+          <a:prstGeom prst="rect">
+            <a:avLst/>
+          </a:prstGeom>
+          <a:noFill/>
+        </p:spPr>
+        <p:txBody>
+          <a:bodyPr wrap="square" lIns="0" rIns="0" tIns="0" bIns="0">
+            <a:spAutoFit/>
+          </a:bodyPr>
+          <a:lstStyle/>
+          <a:p>
+            <a:pPr algn="ctr"/>
+            <a:r>
+              <a:rPr sz="1100" b="0">
+                <a:solidFill>
+                  <a:srgbClr val="475569"/>
+                </a:solidFill>
+                <a:latin typeface="Arial"/>
+              </a:rPr>
+              <a:t>30 seconds</a:t>
+            </a:r>
+          </a:p>
+        </p:txBody>
+      </p:sp>
+      <p:sp>
+        <p:nvSpPr>
+          <p:cNvPr id="16" name="Rounded Rectangle 15"/>
           <p:cNvSpPr/>
           <p:nvPr/>
         </p:nvSpPr>
         <p:spPr>
           <a:xfrm>
-            <a:off x="868680" y="3822191"/>
-            <a:ext cx="10378440" cy="713232"/>
-          </a:xfrm>
-          <a:prstGeom prst="rect">
+            <a:off x="4526280" y="1874519"/>
+            <a:ext cx="3154680" cy="3977639"/>
+          </a:xfrm>
+          <a:prstGeom prst="roundRect">
             <a:avLst/>
           </a:prstGeom>
           <a:solidFill>
             <a:srgbClr val="FFFFFF"/>
           </a:solidFill>
-          <a:ln w="11430">
+          <a:ln w="16510">
             <a:solidFill>
-              <a:srgbClr val="CBD5E1"/>
+              <a:srgbClr val="7C3AED"/>
             </a:solidFill>
           </a:ln>
         </p:spPr>
@@ -4976,16 +5835,16 @@
       </p:sp>
       <p:sp>
         <p:nvSpPr>
-          <p:cNvPr id="14" name="Rectangle 13"/>
+          <p:cNvPr id="17" name="Oval 16"/>
           <p:cNvSpPr/>
           <p:nvPr/>
         </p:nvSpPr>
         <p:spPr>
           <a:xfrm>
-            <a:off x="868680" y="3822191"/>
-            <a:ext cx="530352" cy="713232"/>
-          </a:xfrm>
-          <a:prstGeom prst="rect">
+            <a:off x="5733288" y="2148840"/>
+            <a:ext cx="713232" cy="713232"/>
+          </a:xfrm>
+          <a:prstGeom prst="ellipse">
             <a:avLst/>
           </a:prstGeom>
           <a:solidFill>
@@ -5028,14 +5887,14 @@
       </p:sp>
       <p:sp>
         <p:nvSpPr>
-          <p:cNvPr id="15" name="TextBox 14"/>
+          <p:cNvPr id="18" name="TextBox 17"/>
           <p:cNvSpPr txBox="1"/>
           <p:nvPr/>
         </p:nvSpPr>
         <p:spPr>
           <a:xfrm>
-            <a:off x="1572768" y="3968496"/>
-            <a:ext cx="9372600" cy="384048"/>
+            <a:off x="4846320" y="2999232"/>
+            <a:ext cx="2514600" cy="310896"/>
           </a:xfrm>
           <a:prstGeom prst="rect">
             <a:avLst/>
@@ -5048,38 +5907,109 @@
           </a:bodyPr>
           <a:lstStyle/>
           <a:p>
-            <a:r>
-              <a:rPr sz="1500" b="0">
+            <a:pPr algn="ctr"/>
+            <a:r>
+              <a:rPr sz="1600" b="1">
+                <a:solidFill>
+                  <a:srgbClr val="7C3AED"/>
+                </a:solidFill>
+                <a:latin typeface="Arial"/>
+              </a:rPr>
+              <a:t>PAIR</a:t>
+            </a:r>
+          </a:p>
+        </p:txBody>
+      </p:sp>
+      <p:sp>
+        <p:nvSpPr>
+          <p:cNvPr id="19" name="TextBox 18"/>
+          <p:cNvSpPr txBox="1"/>
+          <p:nvPr/>
+        </p:nvSpPr>
+        <p:spPr>
+          <a:xfrm>
+            <a:off x="4846320" y="3657600"/>
+            <a:ext cx="2514600" cy="960120"/>
+          </a:xfrm>
+          <a:prstGeom prst="rect">
+            <a:avLst/>
+          </a:prstGeom>
+          <a:noFill/>
+        </p:spPr>
+        <p:txBody>
+          <a:bodyPr wrap="square" lIns="0" rIns="0" tIns="0" bIns="0">
+            <a:spAutoFit/>
+          </a:bodyPr>
+          <a:lstStyle/>
+          <a:p>
+            <a:pPr algn="ctr"/>
+            <a:r>
+              <a:rPr sz="1800" b="1">
                 <a:solidFill>
                   <a:srgbClr val="111827"/>
                 </a:solidFill>
                 <a:latin typeface="Arial"/>
               </a:rPr>
-              <a:t>Share: connect your answer to Looking Back at Our Experiments.</a:t>
-            </a:r>
-          </a:p>
-        </p:txBody>
-      </p:sp>
-      <p:sp>
-        <p:nvSpPr>
-          <p:cNvPr id="16" name="Rectangle 15"/>
+              <a:t>compare your first answer with a partner.</a:t>
+            </a:r>
+          </a:p>
+        </p:txBody>
+      </p:sp>
+      <p:sp>
+        <p:nvSpPr>
+          <p:cNvPr id="20" name="TextBox 19"/>
+          <p:cNvSpPr txBox="1"/>
+          <p:nvPr/>
+        </p:nvSpPr>
+        <p:spPr>
+          <a:xfrm>
+            <a:off x="4846320" y="5166360"/>
+            <a:ext cx="2514600" cy="274320"/>
+          </a:xfrm>
+          <a:prstGeom prst="rect">
+            <a:avLst/>
+          </a:prstGeom>
+          <a:noFill/>
+        </p:spPr>
+        <p:txBody>
+          <a:bodyPr wrap="square" lIns="0" rIns="0" tIns="0" bIns="0">
+            <a:spAutoFit/>
+          </a:bodyPr>
+          <a:lstStyle/>
+          <a:p>
+            <a:pPr algn="ctr"/>
+            <a:r>
+              <a:rPr sz="1100" b="0">
+                <a:solidFill>
+                  <a:srgbClr val="475569"/>
+                </a:solidFill>
+                <a:latin typeface="Arial"/>
+              </a:rPr>
+              <a:t>with partner</a:t>
+            </a:r>
+          </a:p>
+        </p:txBody>
+      </p:sp>
+      <p:sp>
+        <p:nvSpPr>
+          <p:cNvPr id="21" name="Rounded Rectangle 20"/>
           <p:cNvSpPr/>
           <p:nvPr/>
         </p:nvSpPr>
         <p:spPr>
           <a:xfrm>
-            <a:off x="868680" y="4672584"/>
-            <a:ext cx="10378440" cy="713232"/>
-          </a:xfrm>
-          <a:prstGeom prst="rect">
+            <a:off x="8229600" y="1874519"/>
+            <a:ext cx="3154680" cy="3977639"/>
+          </a:xfrm>
+          <a:prstGeom prst="roundRect">
             <a:avLst/>
           </a:prstGeom>
           <a:solidFill>
             <a:srgbClr val="FFFFFF"/>
           </a:solidFill>
-          <a:ln w="11430">
+          <a:ln w="16510">
             <a:solidFill>
-              <a:srgbClr val="CBD5E1"/>
+              <a:srgbClr val="7C3AED"/>
             </a:solidFill>
           </a:ln>
         </p:spPr>
@@ -5107,16 +6037,16 @@
       </p:sp>
       <p:sp>
         <p:nvSpPr>
-          <p:cNvPr id="17" name="Rectangle 16"/>
+          <p:cNvPr id="22" name="Oval 21"/>
           <p:cNvSpPr/>
           <p:nvPr/>
         </p:nvSpPr>
         <p:spPr>
           <a:xfrm>
-            <a:off x="868680" y="4672584"/>
-            <a:ext cx="530352" cy="713232"/>
-          </a:xfrm>
-          <a:prstGeom prst="rect">
+            <a:off x="9436608" y="2148840"/>
+            <a:ext cx="713232" cy="713232"/>
+          </a:xfrm>
+          <a:prstGeom prst="ellipse">
             <a:avLst/>
           </a:prstGeom>
           <a:solidFill>
@@ -5159,14 +6089,14 @@
       </p:sp>
       <p:sp>
         <p:nvSpPr>
-          <p:cNvPr id="18" name="TextBox 17"/>
+          <p:cNvPr id="23" name="TextBox 22"/>
           <p:cNvSpPr txBox="1"/>
           <p:nvPr/>
         </p:nvSpPr>
         <p:spPr>
           <a:xfrm>
-            <a:off x="1572768" y="4818888"/>
-            <a:ext cx="9372600" cy="384048"/>
+            <a:off x="8549640" y="2999232"/>
+            <a:ext cx="2514600" cy="310896"/>
           </a:xfrm>
           <a:prstGeom prst="rect">
             <a:avLst/>
@@ -5179,159 +6109,99 @@
           </a:bodyPr>
           <a:lstStyle/>
           <a:p>
-            <a:r>
-              <a:rPr sz="1500" b="0">
+            <a:pPr algn="ctr"/>
+            <a:r>
+              <a:rPr sz="1600" b="1">
+                <a:solidFill>
+                  <a:srgbClr val="7C3AED"/>
+                </a:solidFill>
+                <a:latin typeface="Arial"/>
+              </a:rPr>
+              <a:t>SHARE</a:t>
+            </a:r>
+          </a:p>
+        </p:txBody>
+      </p:sp>
+      <p:sp>
+        <p:nvSpPr>
+          <p:cNvPr id="24" name="TextBox 23"/>
+          <p:cNvSpPr txBox="1"/>
+          <p:nvPr/>
+        </p:nvSpPr>
+        <p:spPr>
+          <a:xfrm>
+            <a:off x="8549640" y="3657600"/>
+            <a:ext cx="2514600" cy="960120"/>
+          </a:xfrm>
+          <a:prstGeom prst="rect">
+            <a:avLst/>
+          </a:prstGeom>
+          <a:noFill/>
+        </p:spPr>
+        <p:txBody>
+          <a:bodyPr wrap="square" lIns="0" rIns="0" tIns="0" bIns="0">
+            <a:spAutoFit/>
+          </a:bodyPr>
+          <a:lstStyle/>
+          <a:p>
+            <a:pPr algn="ctr"/>
+            <a:r>
+              <a:rPr sz="1800" b="1">
                 <a:solidFill>
                   <a:srgbClr val="111827"/>
                 </a:solidFill>
                 <a:latin typeface="Arial"/>
               </a:rPr>
-              <a:t>Write one clear response.</a:t>
-            </a:r>
-          </a:p>
-        </p:txBody>
-      </p:sp>
-      <p:sp>
-        <p:nvSpPr>
-          <p:cNvPr id="19" name="Rectangle 18"/>
-          <p:cNvSpPr/>
-          <p:nvPr/>
-        </p:nvSpPr>
-        <p:spPr>
-          <a:xfrm>
-            <a:off x="868680" y="5522976"/>
-            <a:ext cx="10378440" cy="713232"/>
-          </a:xfrm>
-          <a:prstGeom prst="rect">
-            <a:avLst/>
-          </a:prstGeom>
-          <a:solidFill>
-            <a:srgbClr val="FFFFFF"/>
-          </a:solidFill>
-          <a:ln w="11430">
-            <a:solidFill>
-              <a:srgbClr val="CBD5E1"/>
-            </a:solidFill>
-          </a:ln>
-        </p:spPr>
-        <p:style>
-          <a:lnRef idx="1">
-            <a:schemeClr val="accent1"/>
-          </a:lnRef>
-          <a:fillRef idx="3">
-            <a:schemeClr val="accent1"/>
-          </a:fillRef>
-          <a:effectRef idx="2">
-            <a:schemeClr val="accent1"/>
-          </a:effectRef>
-          <a:fontRef idx="minor">
-            <a:schemeClr val="lt1"/>
-          </a:fontRef>
-        </p:style>
-        <p:txBody>
-          <a:bodyPr rtlCol="0" anchor="ctr"/>
-          <a:lstStyle/>
-          <a:p>
-            <a:pPr algn="ctr"/>
-          </a:p>
-        </p:txBody>
-      </p:sp>
-      <p:sp>
-        <p:nvSpPr>
-          <p:cNvPr id="20" name="Rectangle 19"/>
-          <p:cNvSpPr/>
-          <p:nvPr/>
-        </p:nvSpPr>
-        <p:spPr>
-          <a:xfrm>
-            <a:off x="868680" y="5522976"/>
-            <a:ext cx="530352" cy="713232"/>
-          </a:xfrm>
-          <a:prstGeom prst="rect">
-            <a:avLst/>
-          </a:prstGeom>
-          <a:solidFill>
-            <a:srgbClr val="7C3AED"/>
-          </a:solidFill>
-          <a:ln>
-            <a:noFill/>
-          </a:ln>
-        </p:spPr>
-        <p:style>
-          <a:lnRef idx="1">
-            <a:schemeClr val="accent1"/>
-          </a:lnRef>
-          <a:fillRef idx="3">
-            <a:schemeClr val="accent1"/>
-          </a:fillRef>
-          <a:effectRef idx="2">
-            <a:schemeClr val="accent1"/>
-          </a:effectRef>
-          <a:fontRef idx="minor">
-            <a:schemeClr val="lt1"/>
-          </a:fontRef>
-        </p:style>
-        <p:txBody>
-          <a:bodyPr rtlCol="0" anchor="ctr" wrap="square" lIns="101600" rIns="101600" tIns="38100" bIns="38100"/>
-          <a:lstStyle/>
-          <a:p>
-            <a:pPr algn="ctr"/>
-            <a:r>
-              <a:rPr sz="1500" b="1">
+              <a:t>connect your answer to Looking Back at Our Experiments.</a:t>
+            </a:r>
+          </a:p>
+        </p:txBody>
+      </p:sp>
+      <p:sp>
+        <p:nvSpPr>
+          <p:cNvPr id="25" name="TextBox 24"/>
+          <p:cNvSpPr txBox="1"/>
+          <p:nvPr/>
+        </p:nvSpPr>
+        <p:spPr>
+          <a:xfrm>
+            <a:off x="8549640" y="5166360"/>
+            <a:ext cx="2514600" cy="274320"/>
+          </a:xfrm>
+          <a:prstGeom prst="rect">
+            <a:avLst/>
+          </a:prstGeom>
+          <a:noFill/>
+        </p:spPr>
+        <p:txBody>
+          <a:bodyPr wrap="square" lIns="0" rIns="0" tIns="0" bIns="0">
+            <a:spAutoFit/>
+          </a:bodyPr>
+          <a:lstStyle/>
+          <a:p>
+            <a:pPr algn="ctr"/>
+            <a:r>
+              <a:rPr sz="1100" b="0">
                 <a:solidFill>
-                  <a:srgbClr val="FFFFFF"/>
+                  <a:srgbClr val="475569"/>
                 </a:solidFill>
                 <a:latin typeface="Arial"/>
               </a:rPr>
-              <a:t>4</a:t>
-            </a:r>
-          </a:p>
-        </p:txBody>
-      </p:sp>
-      <p:sp>
-        <p:nvSpPr>
-          <p:cNvPr id="21" name="TextBox 20"/>
+              <a:t>whole class</a:t>
+            </a:r>
+          </a:p>
+        </p:txBody>
+      </p:sp>
+      <p:sp>
+        <p:nvSpPr>
+          <p:cNvPr id="26" name="TextBox 25"/>
           <p:cNvSpPr txBox="1"/>
           <p:nvPr/>
         </p:nvSpPr>
         <p:spPr>
           <a:xfrm>
-            <a:off x="1572768" y="5669280"/>
-            <a:ext cx="9372600" cy="384048"/>
-          </a:xfrm>
-          <a:prstGeom prst="rect">
-            <a:avLst/>
-          </a:prstGeom>
-          <a:noFill/>
-        </p:spPr>
-        <p:txBody>
-          <a:bodyPr wrap="square" lIns="0" rIns="0" tIns="0" bIns="0">
-            <a:spAutoFit/>
-          </a:bodyPr>
-          <a:lstStyle/>
-          <a:p>
-            <a:r>
-              <a:rPr sz="1500" b="0">
-                <a:solidFill>
-                  <a:srgbClr val="111827"/>
-                </a:solidFill>
-                <a:latin typeface="Arial"/>
-              </a:rPr>
-              <a:t>Write one clear response.</a:t>
-            </a:r>
-          </a:p>
-        </p:txBody>
-      </p:sp>
-      <p:sp>
-        <p:nvSpPr>
-          <p:cNvPr id="22" name="TextBox 21"/>
-          <p:cNvSpPr txBox="1"/>
-          <p:nvPr/>
-        </p:nvSpPr>
-        <p:spPr>
-          <a:xfrm>
-            <a:off x="685800" y="6419088"/>
-            <a:ext cx="10835640" cy="228600"/>
+            <a:off x="713232" y="6355080"/>
+            <a:ext cx="10835640" cy="219456"/>
           </a:xfrm>
           <a:prstGeom prst="rect">
             <a:avLst/>
@@ -5352,7 +6222,7 @@
                 </a:solidFill>
                 <a:latin typeface="Arial"/>
               </a:rPr>
-              <a:t>Listen • Talk • Try • Explain</a:t>
+              <a:t>P7 class flow: listen • talk • try • explain</a:t>
             </a:r>
           </a:p>
         </p:txBody>
@@ -5557,7 +6427,93 @@
       </p:sp>
       <p:sp>
         <p:nvSpPr>
-          <p:cNvPr id="6" name="TextBox 5"/>
+          <p:cNvPr id="6" name="Rectangle 5"/>
+          <p:cNvSpPr/>
+          <p:nvPr/>
+        </p:nvSpPr>
+        <p:spPr>
+          <a:xfrm>
+            <a:off x="164592" y="6565392"/>
+            <a:ext cx="12027103" cy="73152"/>
+          </a:xfrm>
+          <a:prstGeom prst="rect">
+            <a:avLst/>
+          </a:prstGeom>
+          <a:solidFill>
+            <a:srgbClr val="FCD116"/>
+          </a:solidFill>
+          <a:ln>
+            <a:noFill/>
+          </a:ln>
+        </p:spPr>
+        <p:style>
+          <a:lnRef idx="1">
+            <a:schemeClr val="accent1"/>
+          </a:lnRef>
+          <a:fillRef idx="3">
+            <a:schemeClr val="accent1"/>
+          </a:fillRef>
+          <a:effectRef idx="2">
+            <a:schemeClr val="accent1"/>
+          </a:effectRef>
+          <a:fontRef idx="minor">
+            <a:schemeClr val="lt1"/>
+          </a:fontRef>
+        </p:style>
+        <p:txBody>
+          <a:bodyPr rtlCol="0" anchor="ctr"/>
+          <a:lstStyle/>
+          <a:p>
+            <a:pPr algn="ctr"/>
+          </a:p>
+        </p:txBody>
+      </p:sp>
+      <p:sp>
+        <p:nvSpPr>
+          <p:cNvPr id="7" name="Rectangle 6"/>
+          <p:cNvSpPr/>
+          <p:nvPr/>
+        </p:nvSpPr>
+        <p:spPr>
+          <a:xfrm>
+            <a:off x="164592" y="6638544"/>
+            <a:ext cx="12027103" cy="45720"/>
+          </a:xfrm>
+          <a:prstGeom prst="rect">
+            <a:avLst/>
+          </a:prstGeom>
+          <a:solidFill>
+            <a:srgbClr val="D90000"/>
+          </a:solidFill>
+          <a:ln>
+            <a:noFill/>
+          </a:ln>
+        </p:spPr>
+        <p:style>
+          <a:lnRef idx="1">
+            <a:schemeClr val="accent1"/>
+          </a:lnRef>
+          <a:fillRef idx="3">
+            <a:schemeClr val="accent1"/>
+          </a:fillRef>
+          <a:effectRef idx="2">
+            <a:schemeClr val="accent1"/>
+          </a:effectRef>
+          <a:fontRef idx="minor">
+            <a:schemeClr val="lt1"/>
+          </a:fontRef>
+        </p:style>
+        <p:txBody>
+          <a:bodyPr rtlCol="0" anchor="ctr"/>
+          <a:lstStyle/>
+          <a:p>
+            <a:pPr algn="ctr"/>
+          </a:p>
+        </p:txBody>
+      </p:sp>
+      <p:sp>
+        <p:nvSpPr>
+          <p:cNvPr id="8" name="TextBox 7"/>
           <p:cNvSpPr txBox="1"/>
           <p:nvPr/>
         </p:nvSpPr>
@@ -5591,7 +6547,7 @@
       </p:sp>
       <p:sp>
         <p:nvSpPr>
-          <p:cNvPr id="7" name="TextBox 6"/>
+          <p:cNvPr id="9" name="TextBox 8"/>
           <p:cNvSpPr txBox="1"/>
           <p:nvPr/>
         </p:nvSpPr>
@@ -5626,14 +6582,14 @@
       </p:sp>
       <p:sp>
         <p:nvSpPr>
-          <p:cNvPr id="8" name="TextBox 7"/>
+          <p:cNvPr id="10" name="TextBox 9"/>
           <p:cNvSpPr txBox="1"/>
           <p:nvPr/>
         </p:nvSpPr>
         <p:spPr>
           <a:xfrm>
-            <a:off x="594360" y="1042415"/>
-            <a:ext cx="11109960" cy="566928"/>
+            <a:off x="594360" y="1005840"/>
+            <a:ext cx="11064240" cy="512064"/>
           </a:xfrm>
           <a:prstGeom prst="rect">
             <a:avLst/>
@@ -5660,22 +6616,22 @@
       </p:sp>
       <p:sp>
         <p:nvSpPr>
-          <p:cNvPr id="9" name="Rectangle 8"/>
+          <p:cNvPr id="11" name="Rounded Rectangle 10"/>
           <p:cNvSpPr/>
           <p:nvPr/>
         </p:nvSpPr>
         <p:spPr>
           <a:xfrm>
-            <a:off x="685800" y="1874519"/>
-            <a:ext cx="10835640" cy="804672"/>
-          </a:xfrm>
-          <a:prstGeom prst="rect">
+            <a:off x="777240" y="1828800"/>
+            <a:ext cx="3337560" cy="4160520"/>
+          </a:xfrm>
+          <a:prstGeom prst="roundRect">
             <a:avLst/>
           </a:prstGeom>
           <a:solidFill>
             <a:srgbClr val="FFF7E0"/>
           </a:solidFill>
-          <a:ln w="17780">
+          <a:ln w="19050">
             <a:solidFill>
               <a:srgbClr val="087490"/>
             </a:solidFill>
@@ -5696,34 +6652,306 @@
           </a:fontRef>
         </p:style>
         <p:txBody>
-          <a:bodyPr rtlCol="0" anchor="ctr" wrap="square" lIns="101600" rIns="101600" tIns="38100" bIns="38100"/>
-          <a:lstStyle/>
-          <a:p>
-            <a:pPr algn="ctr"/>
-            <a:r>
-              <a:rPr sz="1900" b="1">
+          <a:bodyPr rtlCol="0" anchor="ctr"/>
+          <a:lstStyle/>
+          <a:p>
+            <a:pPr algn="ctr"/>
+          </a:p>
+        </p:txBody>
+      </p:sp>
+      <p:sp>
+        <p:nvSpPr>
+          <p:cNvPr id="12" name="Oval 11"/>
+          <p:cNvSpPr/>
+          <p:nvPr/>
+        </p:nvSpPr>
+        <p:spPr>
+          <a:xfrm>
+            <a:off x="2230221" y="2610612"/>
+            <a:ext cx="431596" cy="329184"/>
+          </a:xfrm>
+          <a:prstGeom prst="ellipse">
+            <a:avLst/>
+          </a:prstGeom>
+          <a:solidFill>
+            <a:srgbClr val="FFF7E0"/>
+          </a:solidFill>
+          <a:ln w="10160">
+            <a:solidFill>
+              <a:srgbClr val="087490"/>
+            </a:solidFill>
+          </a:ln>
+        </p:spPr>
+        <p:style>
+          <a:lnRef idx="1">
+            <a:schemeClr val="accent1"/>
+          </a:lnRef>
+          <a:fillRef idx="3">
+            <a:schemeClr val="accent1"/>
+          </a:fillRef>
+          <a:effectRef idx="2">
+            <a:schemeClr val="accent1"/>
+          </a:effectRef>
+          <a:fontRef idx="minor">
+            <a:schemeClr val="lt1"/>
+          </a:fontRef>
+        </p:style>
+        <p:txBody>
+          <a:bodyPr rtlCol="0" anchor="ctr"/>
+          <a:lstStyle/>
+          <a:p>
+            <a:pPr algn="ctr"/>
+          </a:p>
+        </p:txBody>
+      </p:sp>
+      <p:sp>
+        <p:nvSpPr>
+          <p:cNvPr id="13" name="Rounded Rectangle 12"/>
+          <p:cNvSpPr/>
+          <p:nvPr/>
+        </p:nvSpPr>
+        <p:spPr>
+          <a:xfrm>
+            <a:off x="2068372" y="2980944"/>
+            <a:ext cx="755294" cy="864108"/>
+          </a:xfrm>
+          <a:prstGeom prst="roundRect">
+            <a:avLst/>
+          </a:prstGeom>
+          <a:solidFill>
+            <a:srgbClr val="ECFDF5"/>
+          </a:solidFill>
+          <a:ln w="10160">
+            <a:solidFill>
+              <a:srgbClr val="087490"/>
+            </a:solidFill>
+          </a:ln>
+        </p:spPr>
+        <p:style>
+          <a:lnRef idx="1">
+            <a:schemeClr val="accent1"/>
+          </a:lnRef>
+          <a:fillRef idx="3">
+            <a:schemeClr val="accent1"/>
+          </a:fillRef>
+          <a:effectRef idx="2">
+            <a:schemeClr val="accent1"/>
+          </a:effectRef>
+          <a:fontRef idx="minor">
+            <a:schemeClr val="lt1"/>
+          </a:fontRef>
+        </p:style>
+        <p:txBody>
+          <a:bodyPr rtlCol="0" anchor="ctr"/>
+          <a:lstStyle/>
+          <a:p>
+            <a:pPr algn="ctr"/>
+          </a:p>
+        </p:txBody>
+      </p:sp>
+      <p:sp>
+        <p:nvSpPr>
+          <p:cNvPr id="14" name="Oval 13"/>
+          <p:cNvSpPr/>
+          <p:nvPr/>
+        </p:nvSpPr>
+        <p:spPr>
+          <a:xfrm>
+            <a:off x="2230221" y="3186684"/>
+            <a:ext cx="431596" cy="246888"/>
+          </a:xfrm>
+          <a:prstGeom prst="ellipse">
+            <a:avLst/>
+          </a:prstGeom>
+          <a:solidFill>
+            <a:srgbClr val="D90000"/>
+          </a:solidFill>
+          <a:ln>
+            <a:noFill/>
+          </a:ln>
+        </p:spPr>
+        <p:style>
+          <a:lnRef idx="1">
+            <a:schemeClr val="accent1"/>
+          </a:lnRef>
+          <a:fillRef idx="3">
+            <a:schemeClr val="accent1"/>
+          </a:fillRef>
+          <a:effectRef idx="2">
+            <a:schemeClr val="accent1"/>
+          </a:effectRef>
+          <a:fontRef idx="minor">
+            <a:schemeClr val="lt1"/>
+          </a:fontRef>
+        </p:style>
+        <p:txBody>
+          <a:bodyPr rtlCol="0" anchor="ctr"/>
+          <a:lstStyle/>
+          <a:p>
+            <a:pPr algn="ctr"/>
+          </a:p>
+        </p:txBody>
+      </p:sp>
+      <p:sp>
+        <p:nvSpPr>
+          <p:cNvPr id="15" name="Rectangle 14"/>
+          <p:cNvSpPr/>
+          <p:nvPr/>
+        </p:nvSpPr>
+        <p:spPr>
+          <a:xfrm>
+            <a:off x="1690725" y="3268980"/>
+            <a:ext cx="1510588" cy="82296"/>
+          </a:xfrm>
+          <a:prstGeom prst="rect">
+            <a:avLst/>
+          </a:prstGeom>
+          <a:solidFill>
+            <a:srgbClr val="087490"/>
+          </a:solidFill>
+          <a:ln>
+            <a:noFill/>
+          </a:ln>
+        </p:spPr>
+        <p:style>
+          <a:lnRef idx="1">
+            <a:schemeClr val="accent1"/>
+          </a:lnRef>
+          <a:fillRef idx="3">
+            <a:schemeClr val="accent1"/>
+          </a:fillRef>
+          <a:effectRef idx="2">
+            <a:schemeClr val="accent1"/>
+          </a:effectRef>
+          <a:fontRef idx="minor">
+            <a:schemeClr val="lt1"/>
+          </a:fontRef>
+        </p:style>
+        <p:txBody>
+          <a:bodyPr rtlCol="0" anchor="ctr"/>
+          <a:lstStyle/>
+          <a:p>
+            <a:pPr algn="ctr"/>
+          </a:p>
+        </p:txBody>
+      </p:sp>
+      <p:sp>
+        <p:nvSpPr>
+          <p:cNvPr id="16" name="TextBox 15"/>
+          <p:cNvSpPr txBox="1"/>
+          <p:nvPr/>
+        </p:nvSpPr>
+        <p:spPr>
+          <a:xfrm>
+            <a:off x="1097280" y="4041648"/>
+            <a:ext cx="2697480" cy="228600"/>
+          </a:xfrm>
+          <a:prstGeom prst="rect">
+            <a:avLst/>
+          </a:prstGeom>
+          <a:noFill/>
+        </p:spPr>
+        <p:txBody>
+          <a:bodyPr wrap="square" lIns="0" rIns="0" tIns="0" bIns="0">
+            <a:spAutoFit/>
+          </a:bodyPr>
+          <a:lstStyle/>
+          <a:p>
+            <a:pPr algn="ctr"/>
+            <a:r>
+              <a:rPr sz="1000" b="0">
+                <a:solidFill>
+                  <a:srgbClr val="475569"/>
+                </a:solidFill>
+                <a:latin typeface="Arial"/>
+              </a:rPr>
+              <a:t>Integrated Science</a:t>
+            </a:r>
+          </a:p>
+        </p:txBody>
+      </p:sp>
+      <p:sp>
+        <p:nvSpPr>
+          <p:cNvPr id="17" name="TextBox 16"/>
+          <p:cNvSpPr txBox="1"/>
+          <p:nvPr/>
+        </p:nvSpPr>
+        <p:spPr>
+          <a:xfrm>
+            <a:off x="987552" y="4617720"/>
+            <a:ext cx="2907792" cy="256032"/>
+          </a:xfrm>
+          <a:prstGeom prst="rect">
+            <a:avLst/>
+          </a:prstGeom>
+          <a:noFill/>
+        </p:spPr>
+        <p:txBody>
+          <a:bodyPr wrap="square" lIns="0" rIns="0" tIns="0" bIns="0">
+            <a:spAutoFit/>
+          </a:bodyPr>
+          <a:lstStyle/>
+          <a:p>
+            <a:pPr algn="ctr"/>
+            <a:r>
+              <a:rPr sz="1200" b="1">
+                <a:solidFill>
+                  <a:srgbClr val="087490"/>
+                </a:solidFill>
+                <a:latin typeface="Arial"/>
+              </a:rPr>
+              <a:t>KEY IDEA</a:t>
+            </a:r>
+          </a:p>
+        </p:txBody>
+      </p:sp>
+      <p:sp>
+        <p:nvSpPr>
+          <p:cNvPr id="18" name="TextBox 17"/>
+          <p:cNvSpPr txBox="1"/>
+          <p:nvPr/>
+        </p:nvSpPr>
+        <p:spPr>
+          <a:xfrm>
+            <a:off x="960120" y="4919472"/>
+            <a:ext cx="2971800" cy="685800"/>
+          </a:xfrm>
+          <a:prstGeom prst="rect">
+            <a:avLst/>
+          </a:prstGeom>
+          <a:noFill/>
+        </p:spPr>
+        <p:txBody>
+          <a:bodyPr wrap="square" lIns="0" rIns="0" tIns="0" bIns="0">
+            <a:spAutoFit/>
+          </a:bodyPr>
+          <a:lstStyle/>
+          <a:p>
+            <a:pPr algn="ctr"/>
+            <a:r>
+              <a:rPr sz="1500" b="1">
                 <a:solidFill>
                   <a:srgbClr val="111827"/>
                 </a:solidFill>
                 <a:latin typeface="Arial"/>
               </a:rPr>
-              <a:t>Key idea: Prior knowledge activation regarding Term 1 Science pra...</a:t>
-            </a:r>
-          </a:p>
-        </p:txBody>
-      </p:sp>
-      <p:sp>
-        <p:nvSpPr>
-          <p:cNvPr id="10" name="Rectangle 9"/>
+              <a:t>Key idea: Prior knowledge activation regarding Term 1 Science practicals (Skeleton</a:t>
+            </a:r>
+          </a:p>
+        </p:txBody>
+      </p:sp>
+      <p:sp>
+        <p:nvSpPr>
+          <p:cNvPr id="19" name="Rounded Rectangle 18"/>
           <p:cNvSpPr/>
           <p:nvPr/>
         </p:nvSpPr>
         <p:spPr>
           <a:xfrm>
-            <a:off x="868680" y="2971800"/>
-            <a:ext cx="10378440" cy="713232"/>
-          </a:xfrm>
-          <a:prstGeom prst="rect">
+            <a:off x="4572000" y="1874519"/>
+            <a:ext cx="6812280" cy="932688"/>
+          </a:xfrm>
+          <a:prstGeom prst="roundRect">
             <a:avLst/>
           </a:prstGeom>
           <a:solidFill>
@@ -5759,14 +6987,14 @@
       </p:sp>
       <p:sp>
         <p:nvSpPr>
-          <p:cNvPr id="11" name="Rectangle 10"/>
+          <p:cNvPr id="20" name="Rectangle 19"/>
           <p:cNvSpPr/>
           <p:nvPr/>
         </p:nvSpPr>
         <p:spPr>
           <a:xfrm>
-            <a:off x="868680" y="2971800"/>
-            <a:ext cx="530352" cy="713232"/>
+            <a:off x="4572000" y="1874519"/>
+            <a:ext cx="566928" cy="932688"/>
           </a:xfrm>
           <a:prstGeom prst="rect">
             <a:avLst/>
@@ -5793,12 +7021,38 @@
           </a:fontRef>
         </p:style>
         <p:txBody>
-          <a:bodyPr rtlCol="0" anchor="ctr" wrap="square" lIns="101600" rIns="101600" tIns="38100" bIns="38100"/>
-          <a:lstStyle/>
-          <a:p>
-            <a:pPr algn="ctr"/>
-            <a:r>
-              <a:rPr sz="1500" b="1">
+          <a:bodyPr rtlCol="0" anchor="ctr"/>
+          <a:lstStyle/>
+          <a:p>
+            <a:pPr algn="ctr"/>
+          </a:p>
+        </p:txBody>
+      </p:sp>
+      <p:sp>
+        <p:nvSpPr>
+          <p:cNvPr id="21" name="TextBox 20"/>
+          <p:cNvSpPr txBox="1"/>
+          <p:nvPr/>
+        </p:nvSpPr>
+        <p:spPr>
+          <a:xfrm>
+            <a:off x="4572000" y="2221991"/>
+            <a:ext cx="566928" cy="237744"/>
+          </a:xfrm>
+          <a:prstGeom prst="rect">
+            <a:avLst/>
+          </a:prstGeom>
+          <a:noFill/>
+        </p:spPr>
+        <p:txBody>
+          <a:bodyPr wrap="square" lIns="0" rIns="0" tIns="0" bIns="0">
+            <a:spAutoFit/>
+          </a:bodyPr>
+          <a:lstStyle/>
+          <a:p>
+            <a:pPr algn="ctr"/>
+            <a:r>
+              <a:rPr sz="1400" b="1">
                 <a:solidFill>
                   <a:srgbClr val="FFFFFF"/>
                 </a:solidFill>
@@ -5811,14 +7065,14 @@
       </p:sp>
       <p:sp>
         <p:nvSpPr>
-          <p:cNvPr id="12" name="TextBox 11"/>
+          <p:cNvPr id="22" name="TextBox 21"/>
           <p:cNvSpPr txBox="1"/>
           <p:nvPr/>
         </p:nvSpPr>
         <p:spPr>
           <a:xfrm>
-            <a:off x="1572768" y="3118104"/>
-            <a:ext cx="9372600" cy="384048"/>
+            <a:off x="5358384" y="2039112"/>
+            <a:ext cx="5788152" cy="694944"/>
           </a:xfrm>
           <a:prstGeom prst="rect">
             <a:avLst/>
@@ -5832,7 +7086,7 @@
           <a:lstStyle/>
           <a:p>
             <a:r>
-              <a:rPr sz="1500" b="0">
+              <a:rPr sz="1600" b="1">
                 <a:solidFill>
                   <a:srgbClr val="111827"/>
                 </a:solidFill>
@@ -5845,16 +7099,16 @@
       </p:sp>
       <p:sp>
         <p:nvSpPr>
-          <p:cNvPr id="13" name="Rectangle 12"/>
+          <p:cNvPr id="23" name="Rounded Rectangle 22"/>
           <p:cNvSpPr/>
           <p:nvPr/>
         </p:nvSpPr>
         <p:spPr>
           <a:xfrm>
-            <a:off x="868680" y="3822191"/>
-            <a:ext cx="10378440" cy="713232"/>
-          </a:xfrm>
-          <a:prstGeom prst="rect">
+            <a:off x="4572000" y="3108960"/>
+            <a:ext cx="6812280" cy="932688"/>
+          </a:xfrm>
+          <a:prstGeom prst="roundRect">
             <a:avLst/>
           </a:prstGeom>
           <a:solidFill>
@@ -5890,14 +7144,14 @@
       </p:sp>
       <p:sp>
         <p:nvSpPr>
-          <p:cNvPr id="14" name="Rectangle 13"/>
+          <p:cNvPr id="24" name="Rectangle 23"/>
           <p:cNvSpPr/>
           <p:nvPr/>
         </p:nvSpPr>
         <p:spPr>
           <a:xfrm>
-            <a:off x="868680" y="3822191"/>
-            <a:ext cx="530352" cy="713232"/>
+            <a:off x="4572000" y="3108960"/>
+            <a:ext cx="566928" cy="932688"/>
           </a:xfrm>
           <a:prstGeom prst="rect">
             <a:avLst/>
@@ -5924,12 +7178,38 @@
           </a:fontRef>
         </p:style>
         <p:txBody>
-          <a:bodyPr rtlCol="0" anchor="ctr" wrap="square" lIns="101600" rIns="101600" tIns="38100" bIns="38100"/>
-          <a:lstStyle/>
-          <a:p>
-            <a:pPr algn="ctr"/>
-            <a:r>
-              <a:rPr sz="1500" b="1">
+          <a:bodyPr rtlCol="0" anchor="ctr"/>
+          <a:lstStyle/>
+          <a:p>
+            <a:pPr algn="ctr"/>
+          </a:p>
+        </p:txBody>
+      </p:sp>
+      <p:sp>
+        <p:nvSpPr>
+          <p:cNvPr id="25" name="TextBox 24"/>
+          <p:cNvSpPr txBox="1"/>
+          <p:nvPr/>
+        </p:nvSpPr>
+        <p:spPr>
+          <a:xfrm>
+            <a:off x="4572000" y="3456432"/>
+            <a:ext cx="566928" cy="237744"/>
+          </a:xfrm>
+          <a:prstGeom prst="rect">
+            <a:avLst/>
+          </a:prstGeom>
+          <a:noFill/>
+        </p:spPr>
+        <p:txBody>
+          <a:bodyPr wrap="square" lIns="0" rIns="0" tIns="0" bIns="0">
+            <a:spAutoFit/>
+          </a:bodyPr>
+          <a:lstStyle/>
+          <a:p>
+            <a:pPr algn="ctr"/>
+            <a:r>
+              <a:rPr sz="1400" b="1">
                 <a:solidFill>
                   <a:srgbClr val="FFFFFF"/>
                 </a:solidFill>
@@ -5942,14 +7222,14 @@
       </p:sp>
       <p:sp>
         <p:nvSpPr>
-          <p:cNvPr id="15" name="TextBox 14"/>
+          <p:cNvPr id="26" name="TextBox 25"/>
           <p:cNvSpPr txBox="1"/>
           <p:nvPr/>
         </p:nvSpPr>
         <p:spPr>
           <a:xfrm>
-            <a:off x="1572768" y="3968496"/>
-            <a:ext cx="9372600" cy="384048"/>
+            <a:off x="5358384" y="3273552"/>
+            <a:ext cx="5788152" cy="694944"/>
           </a:xfrm>
           <a:prstGeom prst="rect">
             <a:avLst/>
@@ -5963,7 +7243,7 @@
           <a:lstStyle/>
           <a:p>
             <a:r>
-              <a:rPr sz="1500" b="0">
+              <a:rPr sz="1400" b="1">
                 <a:solidFill>
                   <a:srgbClr val="111827"/>
                 </a:solidFill>
@@ -5976,16 +7256,16 @@
       </p:sp>
       <p:sp>
         <p:nvSpPr>
-          <p:cNvPr id="16" name="Rectangle 15"/>
+          <p:cNvPr id="27" name="Rounded Rectangle 26"/>
           <p:cNvSpPr/>
           <p:nvPr/>
         </p:nvSpPr>
         <p:spPr>
           <a:xfrm>
-            <a:off x="868680" y="4672584"/>
-            <a:ext cx="10378440" cy="713232"/>
-          </a:xfrm>
-          <a:prstGeom prst="rect">
+            <a:off x="4572000" y="4343400"/>
+            <a:ext cx="6812280" cy="932688"/>
+          </a:xfrm>
+          <a:prstGeom prst="roundRect">
             <a:avLst/>
           </a:prstGeom>
           <a:solidFill>
@@ -6021,14 +7301,14 @@
       </p:sp>
       <p:sp>
         <p:nvSpPr>
-          <p:cNvPr id="17" name="Rectangle 16"/>
+          <p:cNvPr id="28" name="Rectangle 27"/>
           <p:cNvSpPr/>
           <p:nvPr/>
         </p:nvSpPr>
         <p:spPr>
           <a:xfrm>
-            <a:off x="868680" y="4672584"/>
-            <a:ext cx="530352" cy="713232"/>
+            <a:off x="4572000" y="4343400"/>
+            <a:ext cx="566928" cy="932688"/>
           </a:xfrm>
           <a:prstGeom prst="rect">
             <a:avLst/>
@@ -6055,12 +7335,38 @@
           </a:fontRef>
         </p:style>
         <p:txBody>
-          <a:bodyPr rtlCol="0" anchor="ctr" wrap="square" lIns="101600" rIns="101600" tIns="38100" bIns="38100"/>
-          <a:lstStyle/>
-          <a:p>
-            <a:pPr algn="ctr"/>
-            <a:r>
-              <a:rPr sz="1500" b="1">
+          <a:bodyPr rtlCol="0" anchor="ctr"/>
+          <a:lstStyle/>
+          <a:p>
+            <a:pPr algn="ctr"/>
+          </a:p>
+        </p:txBody>
+      </p:sp>
+      <p:sp>
+        <p:nvSpPr>
+          <p:cNvPr id="29" name="TextBox 28"/>
+          <p:cNvSpPr txBox="1"/>
+          <p:nvPr/>
+        </p:nvSpPr>
+        <p:spPr>
+          <a:xfrm>
+            <a:off x="4572000" y="4690872"/>
+            <a:ext cx="566928" cy="237744"/>
+          </a:xfrm>
+          <a:prstGeom prst="rect">
+            <a:avLst/>
+          </a:prstGeom>
+          <a:noFill/>
+        </p:spPr>
+        <p:txBody>
+          <a:bodyPr wrap="square" lIns="0" rIns="0" tIns="0" bIns="0">
+            <a:spAutoFit/>
+          </a:bodyPr>
+          <a:lstStyle/>
+          <a:p>
+            <a:pPr algn="ctr"/>
+            <a:r>
+              <a:rPr sz="1400" b="1">
                 <a:solidFill>
                   <a:srgbClr val="FFFFFF"/>
                 </a:solidFill>
@@ -6073,14 +7379,14 @@
       </p:sp>
       <p:sp>
         <p:nvSpPr>
-          <p:cNvPr id="18" name="TextBox 17"/>
+          <p:cNvPr id="30" name="TextBox 29"/>
           <p:cNvSpPr txBox="1"/>
           <p:nvPr/>
         </p:nvSpPr>
         <p:spPr>
           <a:xfrm>
-            <a:off x="1572768" y="4818888"/>
-            <a:ext cx="9372600" cy="384048"/>
+            <a:off x="5358384" y="4507992"/>
+            <a:ext cx="5788152" cy="694944"/>
           </a:xfrm>
           <a:prstGeom prst="rect">
             <a:avLst/>
@@ -6094,7 +7400,7 @@
           <a:lstStyle/>
           <a:p>
             <a:r>
-              <a:rPr sz="1500" b="0">
+              <a:rPr sz="1400" b="1">
                 <a:solidFill>
                   <a:srgbClr val="111827"/>
                 </a:solidFill>
@@ -6107,145 +7413,14 @@
       </p:sp>
       <p:sp>
         <p:nvSpPr>
-          <p:cNvPr id="19" name="Rectangle 18"/>
-          <p:cNvSpPr/>
-          <p:nvPr/>
-        </p:nvSpPr>
-        <p:spPr>
-          <a:xfrm>
-            <a:off x="868680" y="5522976"/>
-            <a:ext cx="10378440" cy="713232"/>
-          </a:xfrm>
-          <a:prstGeom prst="rect">
-            <a:avLst/>
-          </a:prstGeom>
-          <a:solidFill>
-            <a:srgbClr val="FFFFFF"/>
-          </a:solidFill>
-          <a:ln w="11430">
-            <a:solidFill>
-              <a:srgbClr val="CBD5E1"/>
-            </a:solidFill>
-          </a:ln>
-        </p:spPr>
-        <p:style>
-          <a:lnRef idx="1">
-            <a:schemeClr val="accent1"/>
-          </a:lnRef>
-          <a:fillRef idx="3">
-            <a:schemeClr val="accent1"/>
-          </a:fillRef>
-          <a:effectRef idx="2">
-            <a:schemeClr val="accent1"/>
-          </a:effectRef>
-          <a:fontRef idx="minor">
-            <a:schemeClr val="lt1"/>
-          </a:fontRef>
-        </p:style>
-        <p:txBody>
-          <a:bodyPr rtlCol="0" anchor="ctr"/>
-          <a:lstStyle/>
-          <a:p>
-            <a:pPr algn="ctr"/>
-          </a:p>
-        </p:txBody>
-      </p:sp>
-      <p:sp>
-        <p:nvSpPr>
-          <p:cNvPr id="20" name="Rectangle 19"/>
-          <p:cNvSpPr/>
-          <p:nvPr/>
-        </p:nvSpPr>
-        <p:spPr>
-          <a:xfrm>
-            <a:off x="868680" y="5522976"/>
-            <a:ext cx="530352" cy="713232"/>
-          </a:xfrm>
-          <a:prstGeom prst="rect">
-            <a:avLst/>
-          </a:prstGeom>
-          <a:solidFill>
-            <a:srgbClr val="087490"/>
-          </a:solidFill>
-          <a:ln>
-            <a:noFill/>
-          </a:ln>
-        </p:spPr>
-        <p:style>
-          <a:lnRef idx="1">
-            <a:schemeClr val="accent1"/>
-          </a:lnRef>
-          <a:fillRef idx="3">
-            <a:schemeClr val="accent1"/>
-          </a:fillRef>
-          <a:effectRef idx="2">
-            <a:schemeClr val="accent1"/>
-          </a:effectRef>
-          <a:fontRef idx="minor">
-            <a:schemeClr val="lt1"/>
-          </a:fontRef>
-        </p:style>
-        <p:txBody>
-          <a:bodyPr rtlCol="0" anchor="ctr" wrap="square" lIns="101600" rIns="101600" tIns="38100" bIns="38100"/>
-          <a:lstStyle/>
-          <a:p>
-            <a:pPr algn="ctr"/>
-            <a:r>
-              <a:rPr sz="1500" b="1">
-                <a:solidFill>
-                  <a:srgbClr val="FFFFFF"/>
-                </a:solidFill>
-                <a:latin typeface="Arial"/>
-              </a:rPr>
-              <a:t>4</a:t>
-            </a:r>
-          </a:p>
-        </p:txBody>
-      </p:sp>
-      <p:sp>
-        <p:nvSpPr>
-          <p:cNvPr id="21" name="TextBox 20"/>
+          <p:cNvPr id="31" name="TextBox 30"/>
           <p:cNvSpPr txBox="1"/>
           <p:nvPr/>
         </p:nvSpPr>
         <p:spPr>
           <a:xfrm>
-            <a:off x="1572768" y="5669280"/>
-            <a:ext cx="9372600" cy="384048"/>
-          </a:xfrm>
-          <a:prstGeom prst="rect">
-            <a:avLst/>
-          </a:prstGeom>
-          <a:noFill/>
-        </p:spPr>
-        <p:txBody>
-          <a:bodyPr wrap="square" lIns="0" rIns="0" tIns="0" bIns="0">
-            <a:spAutoFit/>
-          </a:bodyPr>
-          <a:lstStyle/>
-          <a:p>
-            <a:r>
-              <a:rPr sz="1500" b="0">
-                <a:solidFill>
-                  <a:srgbClr val="111827"/>
-                </a:solidFill>
-                <a:latin typeface="Arial"/>
-              </a:rPr>
-              <a:t>Write one clear response.</a:t>
-            </a:r>
-          </a:p>
-        </p:txBody>
-      </p:sp>
-      <p:sp>
-        <p:nvSpPr>
-          <p:cNvPr id="22" name="TextBox 21"/>
-          <p:cNvSpPr txBox="1"/>
-          <p:nvPr/>
-        </p:nvSpPr>
-        <p:spPr>
-          <a:xfrm>
-            <a:off x="685800" y="6419088"/>
-            <a:ext cx="10835640" cy="228600"/>
+            <a:off x="713232" y="6355080"/>
+            <a:ext cx="10835640" cy="219456"/>
           </a:xfrm>
           <a:prstGeom prst="rect">
             <a:avLst/>
@@ -6266,7 +7441,7 @@
                 </a:solidFill>
                 <a:latin typeface="Arial"/>
               </a:rPr>
-              <a:t>Listen • Talk • Try • Explain</a:t>
+              <a:t>P7 class flow: listen • talk • try • explain</a:t>
             </a:r>
           </a:p>
         </p:txBody>
@@ -6471,7 +7646,93 @@
       </p:sp>
       <p:sp>
         <p:nvSpPr>
-          <p:cNvPr id="6" name="TextBox 5"/>
+          <p:cNvPr id="6" name="Rectangle 5"/>
+          <p:cNvSpPr/>
+          <p:nvPr/>
+        </p:nvSpPr>
+        <p:spPr>
+          <a:xfrm>
+            <a:off x="164592" y="6565392"/>
+            <a:ext cx="12027103" cy="73152"/>
+          </a:xfrm>
+          <a:prstGeom prst="rect">
+            <a:avLst/>
+          </a:prstGeom>
+          <a:solidFill>
+            <a:srgbClr val="FCD116"/>
+          </a:solidFill>
+          <a:ln>
+            <a:noFill/>
+          </a:ln>
+        </p:spPr>
+        <p:style>
+          <a:lnRef idx="1">
+            <a:schemeClr val="accent1"/>
+          </a:lnRef>
+          <a:fillRef idx="3">
+            <a:schemeClr val="accent1"/>
+          </a:fillRef>
+          <a:effectRef idx="2">
+            <a:schemeClr val="accent1"/>
+          </a:effectRef>
+          <a:fontRef idx="minor">
+            <a:schemeClr val="lt1"/>
+          </a:fontRef>
+        </p:style>
+        <p:txBody>
+          <a:bodyPr rtlCol="0" anchor="ctr"/>
+          <a:lstStyle/>
+          <a:p>
+            <a:pPr algn="ctr"/>
+          </a:p>
+        </p:txBody>
+      </p:sp>
+      <p:sp>
+        <p:nvSpPr>
+          <p:cNvPr id="7" name="Rectangle 6"/>
+          <p:cNvSpPr/>
+          <p:nvPr/>
+        </p:nvSpPr>
+        <p:spPr>
+          <a:xfrm>
+            <a:off x="164592" y="6638544"/>
+            <a:ext cx="12027103" cy="45720"/>
+          </a:xfrm>
+          <a:prstGeom prst="rect">
+            <a:avLst/>
+          </a:prstGeom>
+          <a:solidFill>
+            <a:srgbClr val="D90000"/>
+          </a:solidFill>
+          <a:ln>
+            <a:noFill/>
+          </a:ln>
+        </p:spPr>
+        <p:style>
+          <a:lnRef idx="1">
+            <a:schemeClr val="accent1"/>
+          </a:lnRef>
+          <a:fillRef idx="3">
+            <a:schemeClr val="accent1"/>
+          </a:fillRef>
+          <a:effectRef idx="2">
+            <a:schemeClr val="accent1"/>
+          </a:effectRef>
+          <a:fontRef idx="minor">
+            <a:schemeClr val="lt1"/>
+          </a:fontRef>
+        </p:style>
+        <p:txBody>
+          <a:bodyPr rtlCol="0" anchor="ctr"/>
+          <a:lstStyle/>
+          <a:p>
+            <a:pPr algn="ctr"/>
+          </a:p>
+        </p:txBody>
+      </p:sp>
+      <p:sp>
+        <p:nvSpPr>
+          <p:cNvPr id="8" name="TextBox 7"/>
           <p:cNvSpPr txBox="1"/>
           <p:nvPr/>
         </p:nvSpPr>
@@ -6505,7 +7766,7 @@
       </p:sp>
       <p:sp>
         <p:nvSpPr>
-          <p:cNvPr id="7" name="TextBox 6"/>
+          <p:cNvPr id="9" name="TextBox 8"/>
           <p:cNvSpPr txBox="1"/>
           <p:nvPr/>
         </p:nvSpPr>
@@ -6540,14 +7801,14 @@
       </p:sp>
       <p:sp>
         <p:nvSpPr>
-          <p:cNvPr id="8" name="TextBox 7"/>
+          <p:cNvPr id="10" name="TextBox 9"/>
           <p:cNvSpPr txBox="1"/>
           <p:nvPr/>
         </p:nvSpPr>
         <p:spPr>
           <a:xfrm>
-            <a:off x="594360" y="1042415"/>
-            <a:ext cx="11109960" cy="566928"/>
+            <a:off x="594360" y="1005840"/>
+            <a:ext cx="11064240" cy="512064"/>
           </a:xfrm>
           <a:prstGeom prst="rect">
             <a:avLst/>
@@ -6574,24 +7835,24 @@
       </p:sp>
       <p:sp>
         <p:nvSpPr>
-          <p:cNvPr id="9" name="Rectangle 8"/>
+          <p:cNvPr id="11" name="Rounded Rectangle 10"/>
           <p:cNvSpPr/>
           <p:nvPr/>
         </p:nvSpPr>
         <p:spPr>
           <a:xfrm>
-            <a:off x="685800" y="1874519"/>
-            <a:ext cx="10835640" cy="804672"/>
-          </a:xfrm>
-          <a:prstGeom prst="rect">
-            <a:avLst/>
-          </a:prstGeom>
-          <a:solidFill>
-            <a:srgbClr val="FFF7E0"/>
-          </a:solidFill>
-          <a:ln w="17780">
+            <a:off x="822960" y="1828800"/>
+            <a:ext cx="7360920" cy="4251960"/>
+          </a:xfrm>
+          <a:prstGeom prst="roundRect">
+            <a:avLst/>
+          </a:prstGeom>
+          <a:solidFill>
+            <a:srgbClr val="1F2937"/>
+          </a:solidFill>
+          <a:ln w="19050">
             <a:solidFill>
-              <a:srgbClr val="D97706"/>
+              <a:srgbClr val="FCD116"/>
             </a:solidFill>
           </a:ln>
         </p:spPr>
@@ -6610,42 +7871,169 @@
           </a:fontRef>
         </p:style>
         <p:txBody>
-          <a:bodyPr rtlCol="0" anchor="ctr" wrap="square" lIns="101600" rIns="101600" tIns="38100" bIns="38100"/>
-          <a:lstStyle/>
-          <a:p>
-            <a:pPr algn="ctr"/>
-            <a:r>
-              <a:rPr sz="1900" b="1">
+          <a:bodyPr rtlCol="0" anchor="ctr"/>
+          <a:lstStyle/>
+          <a:p>
+            <a:pPr algn="ctr"/>
+          </a:p>
+        </p:txBody>
+      </p:sp>
+      <p:sp>
+        <p:nvSpPr>
+          <p:cNvPr id="12" name="TextBox 11"/>
+          <p:cNvSpPr txBox="1"/>
+          <p:nvPr/>
+        </p:nvSpPr>
+        <p:spPr>
+          <a:xfrm>
+            <a:off x="1097280" y="2084831"/>
+            <a:ext cx="6812280" cy="256032"/>
+          </a:xfrm>
+          <a:prstGeom prst="rect">
+            <a:avLst/>
+          </a:prstGeom>
+          <a:noFill/>
+        </p:spPr>
+        <p:txBody>
+          <a:bodyPr wrap="square" lIns="0" rIns="0" tIns="0" bIns="0">
+            <a:spAutoFit/>
+          </a:bodyPr>
+          <a:lstStyle/>
+          <a:p>
+            <a:r>
+              <a:rPr sz="1200" b="1">
                 <a:solidFill>
-                  <a:srgbClr val="111827"/>
+                  <a:srgbClr val="FCD116"/>
                 </a:solidFill>
                 <a:latin typeface="Arial"/>
               </a:rPr>
-              <a:t>Watch the example.</a:t>
-            </a:r>
-          </a:p>
-        </p:txBody>
-      </p:sp>
-      <p:sp>
-        <p:nvSpPr>
-          <p:cNvPr id="10" name="Rectangle 9"/>
+              <a:t>BOARD MODEL</a:t>
+            </a:r>
+          </a:p>
+        </p:txBody>
+      </p:sp>
+      <p:sp>
+        <p:nvSpPr>
+          <p:cNvPr id="13" name="TextBox 12"/>
+          <p:cNvSpPr txBox="1"/>
+          <p:nvPr/>
+        </p:nvSpPr>
+        <p:spPr>
+          <a:xfrm>
+            <a:off x="1143000" y="2578608"/>
+            <a:ext cx="6583680" cy="347472"/>
+          </a:xfrm>
+          <a:prstGeom prst="rect">
+            <a:avLst/>
+          </a:prstGeom>
+          <a:noFill/>
+        </p:spPr>
+        <p:txBody>
+          <a:bodyPr wrap="square" lIns="0" rIns="0" tIns="0" bIns="0">
+            <a:spAutoFit/>
+          </a:bodyPr>
+          <a:lstStyle/>
+          <a:p>
+            <a:r>
+              <a:rPr sz="1600" b="0">
+                <a:solidFill>
+                  <a:srgbClr val="FFFFFF"/>
+                </a:solidFill>
+                <a:latin typeface="Arial"/>
+              </a:rPr>
+              <a:t>1. Title and Aim (What and Why).</a:t>
+            </a:r>
+          </a:p>
+        </p:txBody>
+      </p:sp>
+      <p:sp>
+        <p:nvSpPr>
+          <p:cNvPr id="14" name="TextBox 13"/>
+          <p:cNvSpPr txBox="1"/>
+          <p:nvPr/>
+        </p:nvSpPr>
+        <p:spPr>
+          <a:xfrm>
+            <a:off x="1143000" y="3154679"/>
+            <a:ext cx="6583680" cy="347472"/>
+          </a:xfrm>
+          <a:prstGeom prst="rect">
+            <a:avLst/>
+          </a:prstGeom>
+          <a:noFill/>
+        </p:spPr>
+        <p:txBody>
+          <a:bodyPr wrap="square" lIns="0" rIns="0" tIns="0" bIns="0">
+            <a:spAutoFit/>
+          </a:bodyPr>
+          <a:lstStyle/>
+          <a:p>
+            <a:r>
+              <a:rPr sz="1600" b="0">
+                <a:solidFill>
+                  <a:srgbClr val="FFFFFF"/>
+                </a:solidFill>
+                <a:latin typeface="Arial"/>
+              </a:rPr>
+              <a:t>2. Apparatus/Materials (The tools).</a:t>
+            </a:r>
+          </a:p>
+        </p:txBody>
+      </p:sp>
+      <p:sp>
+        <p:nvSpPr>
+          <p:cNvPr id="15" name="TextBox 14"/>
+          <p:cNvSpPr txBox="1"/>
+          <p:nvPr/>
+        </p:nvSpPr>
+        <p:spPr>
+          <a:xfrm>
+            <a:off x="1143000" y="3730752"/>
+            <a:ext cx="6583680" cy="347472"/>
+          </a:xfrm>
+          <a:prstGeom prst="rect">
+            <a:avLst/>
+          </a:prstGeom>
+          <a:noFill/>
+        </p:spPr>
+        <p:txBody>
+          <a:bodyPr wrap="square" lIns="0" rIns="0" tIns="0" bIns="0">
+            <a:spAutoFit/>
+          </a:bodyPr>
+          <a:lstStyle/>
+          <a:p>
+            <a:r>
+              <a:rPr sz="1600" b="0">
+                <a:solidFill>
+                  <a:srgbClr val="FFFFFF"/>
+                </a:solidFill>
+                <a:latin typeface="Arial"/>
+              </a:rPr>
+              <a:t>3. Procedure (The steps).</a:t>
+            </a:r>
+          </a:p>
+        </p:txBody>
+      </p:sp>
+      <p:sp>
+        <p:nvSpPr>
+          <p:cNvPr id="16" name="Rounded Rectangle 15"/>
           <p:cNvSpPr/>
           <p:nvPr/>
         </p:nvSpPr>
         <p:spPr>
           <a:xfrm>
-            <a:off x="868680" y="2971800"/>
-            <a:ext cx="10378440" cy="713232"/>
-          </a:xfrm>
-          <a:prstGeom prst="rect">
-            <a:avLst/>
-          </a:prstGeom>
-          <a:solidFill>
-            <a:srgbClr val="FFFFFF"/>
-          </a:solidFill>
-          <a:ln w="11430">
+            <a:off x="8549640" y="1828800"/>
+            <a:ext cx="2697480" cy="4251960"/>
+          </a:xfrm>
+          <a:prstGeom prst="roundRect">
+            <a:avLst/>
+          </a:prstGeom>
+          <a:solidFill>
+            <a:srgbClr val="FFF7E0"/>
+          </a:solidFill>
+          <a:ln w="16510">
             <a:solidFill>
-              <a:srgbClr val="CBD5E1"/>
+              <a:srgbClr val="D97706"/>
             </a:solidFill>
           </a:ln>
         </p:spPr>
@@ -6673,23 +8061,25 @@
       </p:sp>
       <p:sp>
         <p:nvSpPr>
-          <p:cNvPr id="11" name="Rectangle 10"/>
+          <p:cNvPr id="17" name="Oval 16"/>
           <p:cNvSpPr/>
           <p:nvPr/>
         </p:nvSpPr>
         <p:spPr>
           <a:xfrm>
-            <a:off x="868680" y="2971800"/>
-            <a:ext cx="530352" cy="713232"/>
-          </a:xfrm>
-          <a:prstGeom prst="rect">
-            <a:avLst/>
-          </a:prstGeom>
-          <a:solidFill>
-            <a:srgbClr val="D97706"/>
-          </a:solidFill>
-          <a:ln>
-            <a:noFill/>
+            <a:off x="9748418" y="2636215"/>
+            <a:ext cx="299923" cy="270662"/>
+          </a:xfrm>
+          <a:prstGeom prst="ellipse">
+            <a:avLst/>
+          </a:prstGeom>
+          <a:solidFill>
+            <a:srgbClr val="FFF7E0"/>
+          </a:solidFill>
+          <a:ln w="10160">
+            <a:solidFill>
+              <a:srgbClr val="087490"/>
+            </a:solidFill>
           </a:ln>
         </p:spPr>
         <p:style>
@@ -6707,76 +8097,33 @@
           </a:fontRef>
         </p:style>
         <p:txBody>
-          <a:bodyPr rtlCol="0" anchor="ctr" wrap="square" lIns="101600" rIns="101600" tIns="38100" bIns="38100"/>
-          <a:lstStyle/>
-          <a:p>
-            <a:pPr algn="ctr"/>
-            <a:r>
-              <a:rPr sz="1500" b="1">
-                <a:solidFill>
-                  <a:srgbClr val="FFFFFF"/>
-                </a:solidFill>
-                <a:latin typeface="Arial"/>
-              </a:rPr>
-              <a:t>1</a:t>
-            </a:r>
-          </a:p>
-        </p:txBody>
-      </p:sp>
-      <p:sp>
-        <p:nvSpPr>
-          <p:cNvPr id="12" name="TextBox 11"/>
-          <p:cNvSpPr txBox="1"/>
-          <p:nvPr/>
-        </p:nvSpPr>
-        <p:spPr>
-          <a:xfrm>
-            <a:off x="1572768" y="3118104"/>
-            <a:ext cx="9372600" cy="384048"/>
-          </a:xfrm>
-          <a:prstGeom prst="rect">
-            <a:avLst/>
-          </a:prstGeom>
-          <a:noFill/>
-        </p:spPr>
-        <p:txBody>
-          <a:bodyPr wrap="square" lIns="0" rIns="0" tIns="0" bIns="0">
-            <a:spAutoFit/>
-          </a:bodyPr>
-          <a:lstStyle/>
-          <a:p>
-            <a:r>
-              <a:rPr sz="1500" b="0">
-                <a:solidFill>
-                  <a:srgbClr val="111827"/>
-                </a:solidFill>
-                <a:latin typeface="Arial"/>
-              </a:rPr>
-              <a:t>Title and Aim (What and Why).</a:t>
-            </a:r>
-          </a:p>
-        </p:txBody>
-      </p:sp>
-      <p:sp>
-        <p:nvSpPr>
-          <p:cNvPr id="13" name="Rectangle 12"/>
+          <a:bodyPr rtlCol="0" anchor="ctr"/>
+          <a:lstStyle/>
+          <a:p>
+            <a:pPr algn="ctr"/>
+          </a:p>
+        </p:txBody>
+      </p:sp>
+      <p:sp>
+        <p:nvSpPr>
+          <p:cNvPr id="18" name="Rounded Rectangle 17"/>
           <p:cNvSpPr/>
           <p:nvPr/>
         </p:nvSpPr>
         <p:spPr>
           <a:xfrm>
-            <a:off x="868680" y="3822191"/>
-            <a:ext cx="10378440" cy="713232"/>
-          </a:xfrm>
-          <a:prstGeom prst="rect">
-            <a:avLst/>
-          </a:prstGeom>
-          <a:solidFill>
-            <a:srgbClr val="FFFFFF"/>
-          </a:solidFill>
-          <a:ln w="11430">
+            <a:off x="9635947" y="2940710"/>
+            <a:ext cx="524865" cy="710488"/>
+          </a:xfrm>
+          <a:prstGeom prst="roundRect">
+            <a:avLst/>
+          </a:prstGeom>
+          <a:solidFill>
+            <a:srgbClr val="ECFDF5"/>
+          </a:solidFill>
+          <a:ln w="10160">
             <a:solidFill>
-              <a:srgbClr val="CBD5E1"/>
+              <a:srgbClr val="087490"/>
             </a:solidFill>
           </a:ln>
         </p:spPr>
@@ -6804,20 +8151,20 @@
       </p:sp>
       <p:sp>
         <p:nvSpPr>
-          <p:cNvPr id="14" name="Rectangle 13"/>
+          <p:cNvPr id="19" name="Oval 18"/>
           <p:cNvSpPr/>
           <p:nvPr/>
         </p:nvSpPr>
         <p:spPr>
           <a:xfrm>
-            <a:off x="868680" y="3822191"/>
-            <a:ext cx="530352" cy="713232"/>
-          </a:xfrm>
-          <a:prstGeom prst="rect">
-            <a:avLst/>
-          </a:prstGeom>
-          <a:solidFill>
-            <a:srgbClr val="D97706"/>
+            <a:off x="9748418" y="3109874"/>
+            <a:ext cx="299923" cy="202996"/>
+          </a:xfrm>
+          <a:prstGeom prst="ellipse">
+            <a:avLst/>
+          </a:prstGeom>
+          <a:solidFill>
+            <a:srgbClr val="D90000"/>
           </a:solidFill>
           <a:ln>
             <a:noFill/>
@@ -6838,77 +8185,32 @@
           </a:fontRef>
         </p:style>
         <p:txBody>
-          <a:bodyPr rtlCol="0" anchor="ctr" wrap="square" lIns="101600" rIns="101600" tIns="38100" bIns="38100"/>
-          <a:lstStyle/>
-          <a:p>
-            <a:pPr algn="ctr"/>
-            <a:r>
-              <a:rPr sz="1500" b="1">
-                <a:solidFill>
-                  <a:srgbClr val="FFFFFF"/>
-                </a:solidFill>
-                <a:latin typeface="Arial"/>
-              </a:rPr>
-              <a:t>2</a:t>
-            </a:r>
-          </a:p>
-        </p:txBody>
-      </p:sp>
-      <p:sp>
-        <p:nvSpPr>
-          <p:cNvPr id="15" name="TextBox 14"/>
-          <p:cNvSpPr txBox="1"/>
-          <p:nvPr/>
-        </p:nvSpPr>
-        <p:spPr>
-          <a:xfrm>
-            <a:off x="1572768" y="3968496"/>
-            <a:ext cx="9372600" cy="384048"/>
-          </a:xfrm>
-          <a:prstGeom prst="rect">
-            <a:avLst/>
-          </a:prstGeom>
-          <a:noFill/>
-        </p:spPr>
-        <p:txBody>
-          <a:bodyPr wrap="square" lIns="0" rIns="0" tIns="0" bIns="0">
-            <a:spAutoFit/>
-          </a:bodyPr>
-          <a:lstStyle/>
-          <a:p>
-            <a:r>
-              <a:rPr sz="1500" b="0">
-                <a:solidFill>
-                  <a:srgbClr val="111827"/>
-                </a:solidFill>
-                <a:latin typeface="Arial"/>
-              </a:rPr>
-              <a:t>Apparatus/Materials (The tools).</a:t>
-            </a:r>
-          </a:p>
-        </p:txBody>
-      </p:sp>
-      <p:sp>
-        <p:nvSpPr>
-          <p:cNvPr id="16" name="Rectangle 15"/>
+          <a:bodyPr rtlCol="0" anchor="ctr"/>
+          <a:lstStyle/>
+          <a:p>
+            <a:pPr algn="ctr"/>
+          </a:p>
+        </p:txBody>
+      </p:sp>
+      <p:sp>
+        <p:nvSpPr>
+          <p:cNvPr id="20" name="Rectangle 19"/>
           <p:cNvSpPr/>
           <p:nvPr/>
         </p:nvSpPr>
         <p:spPr>
           <a:xfrm>
-            <a:off x="868680" y="4672584"/>
-            <a:ext cx="10378440" cy="713232"/>
-          </a:xfrm>
-          <a:prstGeom prst="rect">
-            <a:avLst/>
-          </a:prstGeom>
-          <a:solidFill>
-            <a:srgbClr val="FFFFFF"/>
-          </a:solidFill>
-          <a:ln w="11430">
-            <a:solidFill>
-              <a:srgbClr val="CBD5E1"/>
-            </a:solidFill>
+            <a:off x="9373514" y="3177539"/>
+            <a:ext cx="1049731" cy="67665"/>
+          </a:xfrm>
+          <a:prstGeom prst="rect">
+            <a:avLst/>
+          </a:prstGeom>
+          <a:solidFill>
+            <a:srgbClr val="087490"/>
+          </a:solidFill>
+          <a:ln>
+            <a:noFill/>
           </a:ln>
         </p:spPr>
         <p:style>
@@ -6935,66 +8237,14 @@
       </p:sp>
       <p:sp>
         <p:nvSpPr>
-          <p:cNvPr id="17" name="Rectangle 16"/>
-          <p:cNvSpPr/>
-          <p:nvPr/>
-        </p:nvSpPr>
-        <p:spPr>
-          <a:xfrm>
-            <a:off x="868680" y="4672584"/>
-            <a:ext cx="530352" cy="713232"/>
-          </a:xfrm>
-          <a:prstGeom prst="rect">
-            <a:avLst/>
-          </a:prstGeom>
-          <a:solidFill>
-            <a:srgbClr val="D97706"/>
-          </a:solidFill>
-          <a:ln>
-            <a:noFill/>
-          </a:ln>
-        </p:spPr>
-        <p:style>
-          <a:lnRef idx="1">
-            <a:schemeClr val="accent1"/>
-          </a:lnRef>
-          <a:fillRef idx="3">
-            <a:schemeClr val="accent1"/>
-          </a:fillRef>
-          <a:effectRef idx="2">
-            <a:schemeClr val="accent1"/>
-          </a:effectRef>
-          <a:fontRef idx="minor">
-            <a:schemeClr val="lt1"/>
-          </a:fontRef>
-        </p:style>
-        <p:txBody>
-          <a:bodyPr rtlCol="0" anchor="ctr" wrap="square" lIns="101600" rIns="101600" tIns="38100" bIns="38100"/>
-          <a:lstStyle/>
-          <a:p>
-            <a:pPr algn="ctr"/>
-            <a:r>
-              <a:rPr sz="1500" b="1">
-                <a:solidFill>
-                  <a:srgbClr val="FFFFFF"/>
-                </a:solidFill>
-                <a:latin typeface="Arial"/>
-              </a:rPr>
-              <a:t>3</a:t>
-            </a:r>
-          </a:p>
-        </p:txBody>
-      </p:sp>
-      <p:sp>
-        <p:nvSpPr>
-          <p:cNvPr id="18" name="TextBox 17"/>
+          <p:cNvPr id="21" name="TextBox 20"/>
           <p:cNvSpPr txBox="1"/>
           <p:nvPr/>
         </p:nvSpPr>
         <p:spPr>
           <a:xfrm>
-            <a:off x="1572768" y="4818888"/>
-            <a:ext cx="9372600" cy="384048"/>
+            <a:off x="8961120" y="3767328"/>
+            <a:ext cx="1874519" cy="228600"/>
           </a:xfrm>
           <a:prstGeom prst="rect">
             <a:avLst/>
@@ -7007,172 +8257,7 @@
           </a:bodyPr>
           <a:lstStyle/>
           <a:p>
-            <a:r>
-              <a:rPr sz="1500" b="0">
-                <a:solidFill>
-                  <a:srgbClr val="111827"/>
-                </a:solidFill>
-                <a:latin typeface="Arial"/>
-              </a:rPr>
-              <a:t>Procedure (The steps).</a:t>
-            </a:r>
-          </a:p>
-        </p:txBody>
-      </p:sp>
-      <p:sp>
-        <p:nvSpPr>
-          <p:cNvPr id="19" name="Rectangle 18"/>
-          <p:cNvSpPr/>
-          <p:nvPr/>
-        </p:nvSpPr>
-        <p:spPr>
-          <a:xfrm>
-            <a:off x="868680" y="5522976"/>
-            <a:ext cx="10378440" cy="713232"/>
-          </a:xfrm>
-          <a:prstGeom prst="rect">
-            <a:avLst/>
-          </a:prstGeom>
-          <a:solidFill>
-            <a:srgbClr val="FFFFFF"/>
-          </a:solidFill>
-          <a:ln w="11430">
-            <a:solidFill>
-              <a:srgbClr val="CBD5E1"/>
-            </a:solidFill>
-          </a:ln>
-        </p:spPr>
-        <p:style>
-          <a:lnRef idx="1">
-            <a:schemeClr val="accent1"/>
-          </a:lnRef>
-          <a:fillRef idx="3">
-            <a:schemeClr val="accent1"/>
-          </a:fillRef>
-          <a:effectRef idx="2">
-            <a:schemeClr val="accent1"/>
-          </a:effectRef>
-          <a:fontRef idx="minor">
-            <a:schemeClr val="lt1"/>
-          </a:fontRef>
-        </p:style>
-        <p:txBody>
-          <a:bodyPr rtlCol="0" anchor="ctr"/>
-          <a:lstStyle/>
-          <a:p>
-            <a:pPr algn="ctr"/>
-          </a:p>
-        </p:txBody>
-      </p:sp>
-      <p:sp>
-        <p:nvSpPr>
-          <p:cNvPr id="20" name="Rectangle 19"/>
-          <p:cNvSpPr/>
-          <p:nvPr/>
-        </p:nvSpPr>
-        <p:spPr>
-          <a:xfrm>
-            <a:off x="868680" y="5522976"/>
-            <a:ext cx="530352" cy="713232"/>
-          </a:xfrm>
-          <a:prstGeom prst="rect">
-            <a:avLst/>
-          </a:prstGeom>
-          <a:solidFill>
-            <a:srgbClr val="D97706"/>
-          </a:solidFill>
-          <a:ln>
-            <a:noFill/>
-          </a:ln>
-        </p:spPr>
-        <p:style>
-          <a:lnRef idx="1">
-            <a:schemeClr val="accent1"/>
-          </a:lnRef>
-          <a:fillRef idx="3">
-            <a:schemeClr val="accent1"/>
-          </a:fillRef>
-          <a:effectRef idx="2">
-            <a:schemeClr val="accent1"/>
-          </a:effectRef>
-          <a:fontRef idx="minor">
-            <a:schemeClr val="lt1"/>
-          </a:fontRef>
-        </p:style>
-        <p:txBody>
-          <a:bodyPr rtlCol="0" anchor="ctr" wrap="square" lIns="101600" rIns="101600" tIns="38100" bIns="38100"/>
-          <a:lstStyle/>
-          <a:p>
-            <a:pPr algn="ctr"/>
-            <a:r>
-              <a:rPr sz="1500" b="1">
-                <a:solidFill>
-                  <a:srgbClr val="FFFFFF"/>
-                </a:solidFill>
-                <a:latin typeface="Arial"/>
-              </a:rPr>
-              <a:t>4</a:t>
-            </a:r>
-          </a:p>
-        </p:txBody>
-      </p:sp>
-      <p:sp>
-        <p:nvSpPr>
-          <p:cNvPr id="21" name="TextBox 20"/>
-          <p:cNvSpPr txBox="1"/>
-          <p:nvPr/>
-        </p:nvSpPr>
-        <p:spPr>
-          <a:xfrm>
-            <a:off x="1572768" y="5669280"/>
-            <a:ext cx="9372600" cy="384048"/>
-          </a:xfrm>
-          <a:prstGeom prst="rect">
-            <a:avLst/>
-          </a:prstGeom>
-          <a:noFill/>
-        </p:spPr>
-        <p:txBody>
-          <a:bodyPr wrap="square" lIns="0" rIns="0" tIns="0" bIns="0">
-            <a:spAutoFit/>
-          </a:bodyPr>
-          <a:lstStyle/>
-          <a:p>
-            <a:r>
-              <a:rPr sz="1500" b="0">
-                <a:solidFill>
-                  <a:srgbClr val="111827"/>
-                </a:solidFill>
-                <a:latin typeface="Arial"/>
-              </a:rPr>
-              <a:t>Write one clear response.</a:t>
-            </a:r>
-          </a:p>
-        </p:txBody>
-      </p:sp>
-      <p:sp>
-        <p:nvSpPr>
-          <p:cNvPr id="22" name="TextBox 21"/>
-          <p:cNvSpPr txBox="1"/>
-          <p:nvPr/>
-        </p:nvSpPr>
-        <p:spPr>
-          <a:xfrm>
-            <a:off x="685800" y="6419088"/>
-            <a:ext cx="10835640" cy="228600"/>
-          </a:xfrm>
-          <a:prstGeom prst="rect">
-            <a:avLst/>
-          </a:prstGeom>
-          <a:noFill/>
-        </p:spPr>
-        <p:txBody>
-          <a:bodyPr wrap="square" lIns="0" rIns="0" tIns="0" bIns="0">
-            <a:spAutoFit/>
-          </a:bodyPr>
-          <a:lstStyle/>
-          <a:p>
-            <a:pPr algn="r"/>
+            <a:pPr algn="ctr"/>
             <a:r>
               <a:rPr sz="1000" b="0">
                 <a:solidFill>
@@ -7180,7 +8265,77 @@
                 </a:solidFill>
                 <a:latin typeface="Arial"/>
               </a:rPr>
-              <a:t>Listen • Talk • Try • Explain</a:t>
+              <a:t>Integrated Science</a:t>
+            </a:r>
+          </a:p>
+        </p:txBody>
+      </p:sp>
+      <p:sp>
+        <p:nvSpPr>
+          <p:cNvPr id="22" name="TextBox 21"/>
+          <p:cNvSpPr txBox="1"/>
+          <p:nvPr/>
+        </p:nvSpPr>
+        <p:spPr>
+          <a:xfrm>
+            <a:off x="8869680" y="4526280"/>
+            <a:ext cx="2057400" cy="804672"/>
+          </a:xfrm>
+          <a:prstGeom prst="rect">
+            <a:avLst/>
+          </a:prstGeom>
+          <a:noFill/>
+        </p:spPr>
+        <p:txBody>
+          <a:bodyPr wrap="square" lIns="0" rIns="0" tIns="0" bIns="0">
+            <a:spAutoFit/>
+          </a:bodyPr>
+          <a:lstStyle/>
+          <a:p>
+            <a:pPr algn="ctr"/>
+            <a:r>
+              <a:rPr sz="1400" b="1">
+                <a:solidFill>
+                  <a:srgbClr val="111827"/>
+                </a:solidFill>
+                <a:latin typeface="Arial"/>
+              </a:rPr>
+              <a:t>Teacher models first. Learners copy the pattern, then explain the step.</a:t>
+            </a:r>
+          </a:p>
+        </p:txBody>
+      </p:sp>
+      <p:sp>
+        <p:nvSpPr>
+          <p:cNvPr id="23" name="TextBox 22"/>
+          <p:cNvSpPr txBox="1"/>
+          <p:nvPr/>
+        </p:nvSpPr>
+        <p:spPr>
+          <a:xfrm>
+            <a:off x="713232" y="6355080"/>
+            <a:ext cx="10835640" cy="219456"/>
+          </a:xfrm>
+          <a:prstGeom prst="rect">
+            <a:avLst/>
+          </a:prstGeom>
+          <a:noFill/>
+        </p:spPr>
+        <p:txBody>
+          <a:bodyPr wrap="square" lIns="0" rIns="0" tIns="0" bIns="0">
+            <a:spAutoFit/>
+          </a:bodyPr>
+          <a:lstStyle/>
+          <a:p>
+            <a:pPr algn="r"/>
+            <a:r>
+              <a:rPr sz="1000" b="0">
+                <a:solidFill>
+                  <a:srgbClr val="475569"/>
+                </a:solidFill>
+                <a:latin typeface="Arial"/>
+              </a:rPr>
+              <a:t>P7 class flow: listen • talk • try • explain</a:t>
             </a:r>
           </a:p>
         </p:txBody>
@@ -7385,7 +8540,93 @@
       </p:sp>
       <p:sp>
         <p:nvSpPr>
-          <p:cNvPr id="6" name="TextBox 5"/>
+          <p:cNvPr id="6" name="Rectangle 5"/>
+          <p:cNvSpPr/>
+          <p:nvPr/>
+        </p:nvSpPr>
+        <p:spPr>
+          <a:xfrm>
+            <a:off x="164592" y="6565392"/>
+            <a:ext cx="12027103" cy="73152"/>
+          </a:xfrm>
+          <a:prstGeom prst="rect">
+            <a:avLst/>
+          </a:prstGeom>
+          <a:solidFill>
+            <a:srgbClr val="FCD116"/>
+          </a:solidFill>
+          <a:ln>
+            <a:noFill/>
+          </a:ln>
+        </p:spPr>
+        <p:style>
+          <a:lnRef idx="1">
+            <a:schemeClr val="accent1"/>
+          </a:lnRef>
+          <a:fillRef idx="3">
+            <a:schemeClr val="accent1"/>
+          </a:fillRef>
+          <a:effectRef idx="2">
+            <a:schemeClr val="accent1"/>
+          </a:effectRef>
+          <a:fontRef idx="minor">
+            <a:schemeClr val="lt1"/>
+          </a:fontRef>
+        </p:style>
+        <p:txBody>
+          <a:bodyPr rtlCol="0" anchor="ctr"/>
+          <a:lstStyle/>
+          <a:p>
+            <a:pPr algn="ctr"/>
+          </a:p>
+        </p:txBody>
+      </p:sp>
+      <p:sp>
+        <p:nvSpPr>
+          <p:cNvPr id="7" name="Rectangle 6"/>
+          <p:cNvSpPr/>
+          <p:nvPr/>
+        </p:nvSpPr>
+        <p:spPr>
+          <a:xfrm>
+            <a:off x="164592" y="6638544"/>
+            <a:ext cx="12027103" cy="45720"/>
+          </a:xfrm>
+          <a:prstGeom prst="rect">
+            <a:avLst/>
+          </a:prstGeom>
+          <a:solidFill>
+            <a:srgbClr val="D90000"/>
+          </a:solidFill>
+          <a:ln>
+            <a:noFill/>
+          </a:ln>
+        </p:spPr>
+        <p:style>
+          <a:lnRef idx="1">
+            <a:schemeClr val="accent1"/>
+          </a:lnRef>
+          <a:fillRef idx="3">
+            <a:schemeClr val="accent1"/>
+          </a:fillRef>
+          <a:effectRef idx="2">
+            <a:schemeClr val="accent1"/>
+          </a:effectRef>
+          <a:fontRef idx="minor">
+            <a:schemeClr val="lt1"/>
+          </a:fontRef>
+        </p:style>
+        <p:txBody>
+          <a:bodyPr rtlCol="0" anchor="ctr"/>
+          <a:lstStyle/>
+          <a:p>
+            <a:pPr algn="ctr"/>
+          </a:p>
+        </p:txBody>
+      </p:sp>
+      <p:sp>
+        <p:nvSpPr>
+          <p:cNvPr id="8" name="TextBox 7"/>
           <p:cNvSpPr txBox="1"/>
           <p:nvPr/>
         </p:nvSpPr>
@@ -7419,7 +8660,7 @@
       </p:sp>
       <p:sp>
         <p:nvSpPr>
-          <p:cNvPr id="7" name="TextBox 6"/>
+          <p:cNvPr id="9" name="TextBox 8"/>
           <p:cNvSpPr txBox="1"/>
           <p:nvPr/>
         </p:nvSpPr>
@@ -7454,14 +8695,14 @@
       </p:sp>
       <p:sp>
         <p:nvSpPr>
-          <p:cNvPr id="8" name="TextBox 7"/>
+          <p:cNvPr id="10" name="TextBox 9"/>
           <p:cNvSpPr txBox="1"/>
           <p:nvPr/>
         </p:nvSpPr>
         <p:spPr>
           <a:xfrm>
-            <a:off x="594360" y="1042415"/>
-            <a:ext cx="11109960" cy="566928"/>
+            <a:off x="594360" y="1005840"/>
+            <a:ext cx="11064240" cy="512064"/>
           </a:xfrm>
           <a:prstGeom prst="rect">
             <a:avLst/>
@@ -7488,16 +8729,16 @@
       </p:sp>
       <p:sp>
         <p:nvSpPr>
-          <p:cNvPr id="9" name="Rectangle 8"/>
+          <p:cNvPr id="11" name="Rounded Rectangle 10"/>
           <p:cNvSpPr/>
           <p:nvPr/>
         </p:nvSpPr>
         <p:spPr>
           <a:xfrm>
-            <a:off x="685800" y="1874519"/>
-            <a:ext cx="10835640" cy="804672"/>
-          </a:xfrm>
-          <a:prstGeom prst="rect">
+            <a:off x="777240" y="1719072"/>
+            <a:ext cx="10652760" cy="822960"/>
+          </a:xfrm>
+          <a:prstGeom prst="roundRect">
             <a:avLst/>
           </a:prstGeom>
           <a:solidFill>
@@ -7535,23 +8776,23 @@
                 </a:solidFill>
                 <a:latin typeface="Arial"/>
               </a:rPr>
-              <a:t>What materials did we use to represent the backbone in our model?</a:t>
-            </a:r>
-          </a:p>
-        </p:txBody>
-      </p:sp>
-      <p:sp>
-        <p:nvSpPr>
-          <p:cNvPr id="10" name="Rectangle 9"/>
+              <a:t>Answer with evidence:</a:t>
+            </a:r>
+          </a:p>
+        </p:txBody>
+      </p:sp>
+      <p:sp>
+        <p:nvSpPr>
+          <p:cNvPr id="12" name="Rounded Rectangle 11"/>
           <p:cNvSpPr/>
           <p:nvPr/>
         </p:nvSpPr>
         <p:spPr>
           <a:xfrm>
-            <a:off x="868680" y="2971800"/>
-            <a:ext cx="10378440" cy="713232"/>
-          </a:xfrm>
-          <a:prstGeom prst="rect">
+            <a:off x="868680" y="2743200"/>
+            <a:ext cx="10378440" cy="804672"/>
+          </a:xfrm>
+          <a:prstGeom prst="roundRect">
             <a:avLst/>
           </a:prstGeom>
           <a:solidFill>
@@ -7587,16 +8828,16 @@
       </p:sp>
       <p:sp>
         <p:nvSpPr>
-          <p:cNvPr id="11" name="Rectangle 10"/>
+          <p:cNvPr id="13" name="Oval 12"/>
           <p:cNvSpPr/>
           <p:nvPr/>
         </p:nvSpPr>
         <p:spPr>
           <a:xfrm>
-            <a:off x="868680" y="2971800"/>
-            <a:ext cx="530352" cy="713232"/>
-          </a:xfrm>
-          <a:prstGeom prst="rect">
+            <a:off x="1078992" y="2898648"/>
+            <a:ext cx="475488" cy="475488"/>
+          </a:xfrm>
+          <a:prstGeom prst="ellipse">
             <a:avLst/>
           </a:prstGeom>
           <a:solidFill>
@@ -7632,21 +8873,21 @@
                 </a:solidFill>
                 <a:latin typeface="Arial"/>
               </a:rPr>
-              <a:t>1</a:t>
-            </a:r>
-          </a:p>
-        </p:txBody>
-      </p:sp>
-      <p:sp>
-        <p:nvSpPr>
-          <p:cNvPr id="12" name="TextBox 11"/>
+              <a:t>?</a:t>
+            </a:r>
+          </a:p>
+        </p:txBody>
+      </p:sp>
+      <p:sp>
+        <p:nvSpPr>
+          <p:cNvPr id="14" name="TextBox 13"/>
           <p:cNvSpPr txBox="1"/>
           <p:nvPr/>
         </p:nvSpPr>
         <p:spPr>
           <a:xfrm>
-            <a:off x="1572768" y="3118104"/>
-            <a:ext cx="9372600" cy="384048"/>
+            <a:off x="1719072" y="2889504"/>
+            <a:ext cx="5623560" cy="384048"/>
           </a:xfrm>
           <a:prstGeom prst="rect">
             <a:avLst/>
@@ -7660,7 +8901,181 @@
           <a:lstStyle/>
           <a:p>
             <a:r>
-              <a:rPr sz="1500" b="0">
+              <a:rPr sz="1600" b="1">
+                <a:solidFill>
+                  <a:srgbClr val="111827"/>
+                </a:solidFill>
+                <a:latin typeface="Arial"/>
+              </a:rPr>
+              <a:t>What materials did we use to represent the backbone in our model?</a:t>
+            </a:r>
+          </a:p>
+        </p:txBody>
+      </p:sp>
+      <p:sp>
+        <p:nvSpPr>
+          <p:cNvPr id="15" name="Rectangle 14"/>
+          <p:cNvSpPr/>
+          <p:nvPr/>
+        </p:nvSpPr>
+        <p:spPr>
+          <a:xfrm>
+            <a:off x="7635240" y="3264408"/>
+            <a:ext cx="3246120" cy="36576"/>
+          </a:xfrm>
+          <a:prstGeom prst="rect">
+            <a:avLst/>
+          </a:prstGeom>
+          <a:solidFill>
+            <a:srgbClr val="CBD5E1"/>
+          </a:solidFill>
+          <a:ln>
+            <a:noFill/>
+          </a:ln>
+        </p:spPr>
+        <p:style>
+          <a:lnRef idx="1">
+            <a:schemeClr val="accent1"/>
+          </a:lnRef>
+          <a:fillRef idx="3">
+            <a:schemeClr val="accent1"/>
+          </a:fillRef>
+          <a:effectRef idx="2">
+            <a:schemeClr val="accent1"/>
+          </a:effectRef>
+          <a:fontRef idx="minor">
+            <a:schemeClr val="lt1"/>
+          </a:fontRef>
+        </p:style>
+        <p:txBody>
+          <a:bodyPr rtlCol="0" anchor="ctr"/>
+          <a:lstStyle/>
+          <a:p>
+            <a:pPr algn="ctr"/>
+          </a:p>
+        </p:txBody>
+      </p:sp>
+      <p:sp>
+        <p:nvSpPr>
+          <p:cNvPr id="16" name="Rounded Rectangle 15"/>
+          <p:cNvSpPr/>
+          <p:nvPr/>
+        </p:nvSpPr>
+        <p:spPr>
+          <a:xfrm>
+            <a:off x="868680" y="3822191"/>
+            <a:ext cx="10378440" cy="804672"/>
+          </a:xfrm>
+          <a:prstGeom prst="roundRect">
+            <a:avLst/>
+          </a:prstGeom>
+          <a:solidFill>
+            <a:srgbClr val="FFFFFF"/>
+          </a:solidFill>
+          <a:ln w="11430">
+            <a:solidFill>
+              <a:srgbClr val="CBD5E1"/>
+            </a:solidFill>
+          </a:ln>
+        </p:spPr>
+        <p:style>
+          <a:lnRef idx="1">
+            <a:schemeClr val="accent1"/>
+          </a:lnRef>
+          <a:fillRef idx="3">
+            <a:schemeClr val="accent1"/>
+          </a:fillRef>
+          <a:effectRef idx="2">
+            <a:schemeClr val="accent1"/>
+          </a:effectRef>
+          <a:fontRef idx="minor">
+            <a:schemeClr val="lt1"/>
+          </a:fontRef>
+        </p:style>
+        <p:txBody>
+          <a:bodyPr rtlCol="0" anchor="ctr"/>
+          <a:lstStyle/>
+          <a:p>
+            <a:pPr algn="ctr"/>
+          </a:p>
+        </p:txBody>
+      </p:sp>
+      <p:sp>
+        <p:nvSpPr>
+          <p:cNvPr id="17" name="Oval 16"/>
+          <p:cNvSpPr/>
+          <p:nvPr/>
+        </p:nvSpPr>
+        <p:spPr>
+          <a:xfrm>
+            <a:off x="1078992" y="3977639"/>
+            <a:ext cx="475488" cy="475488"/>
+          </a:xfrm>
+          <a:prstGeom prst="ellipse">
+            <a:avLst/>
+          </a:prstGeom>
+          <a:solidFill>
+            <a:srgbClr val="BE123C"/>
+          </a:solidFill>
+          <a:ln>
+            <a:noFill/>
+          </a:ln>
+        </p:spPr>
+        <p:style>
+          <a:lnRef idx="1">
+            <a:schemeClr val="accent1"/>
+          </a:lnRef>
+          <a:fillRef idx="3">
+            <a:schemeClr val="accent1"/>
+          </a:fillRef>
+          <a:effectRef idx="2">
+            <a:schemeClr val="accent1"/>
+          </a:effectRef>
+          <a:fontRef idx="minor">
+            <a:schemeClr val="lt1"/>
+          </a:fontRef>
+        </p:style>
+        <p:txBody>
+          <a:bodyPr rtlCol="0" anchor="ctr" wrap="square" lIns="101600" rIns="101600" tIns="38100" bIns="38100"/>
+          <a:lstStyle/>
+          <a:p>
+            <a:pPr algn="ctr"/>
+            <a:r>
+              <a:rPr sz="1500" b="1">
+                <a:solidFill>
+                  <a:srgbClr val="FFFFFF"/>
+                </a:solidFill>
+                <a:latin typeface="Arial"/>
+              </a:rPr>
+              <a:t>?</a:t>
+            </a:r>
+          </a:p>
+        </p:txBody>
+      </p:sp>
+      <p:sp>
+        <p:nvSpPr>
+          <p:cNvPr id="18" name="TextBox 17"/>
+          <p:cNvSpPr txBox="1"/>
+          <p:nvPr/>
+        </p:nvSpPr>
+        <p:spPr>
+          <a:xfrm>
+            <a:off x="1719072" y="3968496"/>
+            <a:ext cx="5623560" cy="384048"/>
+          </a:xfrm>
+          <a:prstGeom prst="rect">
+            <a:avLst/>
+          </a:prstGeom>
+          <a:noFill/>
+        </p:spPr>
+        <p:txBody>
+          <a:bodyPr wrap="square" lIns="0" rIns="0" tIns="0" bIns="0">
+            <a:spAutoFit/>
+          </a:bodyPr>
+          <a:lstStyle/>
+          <a:p>
+            <a:r>
+              <a:rPr sz="1600" b="1">
                 <a:solidFill>
                   <a:srgbClr val="111827"/>
                 </a:solidFill>
@@ -7673,16 +9088,59 @@
       </p:sp>
       <p:sp>
         <p:nvSpPr>
-          <p:cNvPr id="13" name="Rectangle 12"/>
+          <p:cNvPr id="19" name="Rectangle 18"/>
           <p:cNvSpPr/>
           <p:nvPr/>
         </p:nvSpPr>
         <p:spPr>
           <a:xfrm>
-            <a:off x="868680" y="3822191"/>
-            <a:ext cx="10378440" cy="713232"/>
-          </a:xfrm>
-          <a:prstGeom prst="rect">
+            <a:off x="7635240" y="4343400"/>
+            <a:ext cx="3246120" cy="36576"/>
+          </a:xfrm>
+          <a:prstGeom prst="rect">
+            <a:avLst/>
+          </a:prstGeom>
+          <a:solidFill>
+            <a:srgbClr val="CBD5E1"/>
+          </a:solidFill>
+          <a:ln>
+            <a:noFill/>
+          </a:ln>
+        </p:spPr>
+        <p:style>
+          <a:lnRef idx="1">
+            <a:schemeClr val="accent1"/>
+          </a:lnRef>
+          <a:fillRef idx="3">
+            <a:schemeClr val="accent1"/>
+          </a:fillRef>
+          <a:effectRef idx="2">
+            <a:schemeClr val="accent1"/>
+          </a:effectRef>
+          <a:fontRef idx="minor">
+            <a:schemeClr val="lt1"/>
+          </a:fontRef>
+        </p:style>
+        <p:txBody>
+          <a:bodyPr rtlCol="0" anchor="ctr"/>
+          <a:lstStyle/>
+          <a:p>
+            <a:pPr algn="ctr"/>
+          </a:p>
+        </p:txBody>
+      </p:sp>
+      <p:sp>
+        <p:nvSpPr>
+          <p:cNvPr id="20" name="Rounded Rectangle 19"/>
+          <p:cNvSpPr/>
+          <p:nvPr/>
+        </p:nvSpPr>
+        <p:spPr>
+          <a:xfrm>
+            <a:off x="868680" y="4901183"/>
+            <a:ext cx="10378440" cy="804672"/>
+          </a:xfrm>
+          <a:prstGeom prst="roundRect">
             <a:avLst/>
           </a:prstGeom>
           <a:solidFill>
@@ -7718,16 +9176,16 @@
       </p:sp>
       <p:sp>
         <p:nvSpPr>
-          <p:cNvPr id="14" name="Rectangle 13"/>
+          <p:cNvPr id="21" name="Oval 20"/>
           <p:cNvSpPr/>
           <p:nvPr/>
         </p:nvSpPr>
         <p:spPr>
           <a:xfrm>
-            <a:off x="868680" y="3822191"/>
-            <a:ext cx="530352" cy="713232"/>
-          </a:xfrm>
-          <a:prstGeom prst="rect">
+            <a:off x="1078992" y="5056631"/>
+            <a:ext cx="475488" cy="475488"/>
+          </a:xfrm>
+          <a:prstGeom prst="ellipse">
             <a:avLst/>
           </a:prstGeom>
           <a:solidFill>
@@ -7763,21 +9221,21 @@
                 </a:solidFill>
                 <a:latin typeface="Arial"/>
               </a:rPr>
-              <a:t>2</a:t>
-            </a:r>
-          </a:p>
-        </p:txBody>
-      </p:sp>
-      <p:sp>
-        <p:nvSpPr>
-          <p:cNvPr id="15" name="TextBox 14"/>
+              <a:t>?</a:t>
+            </a:r>
+          </a:p>
+        </p:txBody>
+      </p:sp>
+      <p:sp>
+        <p:nvSpPr>
+          <p:cNvPr id="22" name="TextBox 21"/>
           <p:cNvSpPr txBox="1"/>
           <p:nvPr/>
         </p:nvSpPr>
         <p:spPr>
           <a:xfrm>
-            <a:off x="1572768" y="3968496"/>
-            <a:ext cx="9372600" cy="384048"/>
+            <a:off x="1719072" y="5047488"/>
+            <a:ext cx="5623560" cy="384048"/>
           </a:xfrm>
           <a:prstGeom prst="rect">
             <a:avLst/>
@@ -7791,7 +9249,7 @@
           <a:lstStyle/>
           <a:p>
             <a:r>
-              <a:rPr sz="1500" b="0">
+              <a:rPr sz="1600" b="1">
                 <a:solidFill>
                   <a:srgbClr val="111827"/>
                 </a:solidFill>
@@ -7804,25 +9262,23 @@
       </p:sp>
       <p:sp>
         <p:nvSpPr>
-          <p:cNvPr id="16" name="Rectangle 15"/>
+          <p:cNvPr id="23" name="Rectangle 22"/>
           <p:cNvSpPr/>
           <p:nvPr/>
         </p:nvSpPr>
         <p:spPr>
           <a:xfrm>
-            <a:off x="868680" y="4672584"/>
-            <a:ext cx="10378440" cy="713232"/>
-          </a:xfrm>
-          <a:prstGeom prst="rect">
-            <a:avLst/>
-          </a:prstGeom>
-          <a:solidFill>
-            <a:srgbClr val="FFFFFF"/>
-          </a:solidFill>
-          <a:ln w="11430">
-            <a:solidFill>
-              <a:srgbClr val="CBD5E1"/>
-            </a:solidFill>
+            <a:off x="7635240" y="5422392"/>
+            <a:ext cx="3246120" cy="36576"/>
+          </a:xfrm>
+          <a:prstGeom prst="rect">
+            <a:avLst/>
+          </a:prstGeom>
+          <a:solidFill>
+            <a:srgbClr val="CBD5E1"/>
+          </a:solidFill>
+          <a:ln>
+            <a:noFill/>
           </a:ln>
         </p:spPr>
         <p:style>
@@ -7849,231 +9305,49 @@
       </p:sp>
       <p:sp>
         <p:nvSpPr>
-          <p:cNvPr id="17" name="Rectangle 16"/>
-          <p:cNvSpPr/>
-          <p:nvPr/>
-        </p:nvSpPr>
-        <p:spPr>
-          <a:xfrm>
-            <a:off x="868680" y="4672584"/>
-            <a:ext cx="530352" cy="713232"/>
-          </a:xfrm>
-          <a:prstGeom prst="rect">
-            <a:avLst/>
-          </a:prstGeom>
-          <a:solidFill>
-            <a:srgbClr val="BE123C"/>
-          </a:solidFill>
-          <a:ln>
-            <a:noFill/>
-          </a:ln>
-        </p:spPr>
-        <p:style>
-          <a:lnRef idx="1">
-            <a:schemeClr val="accent1"/>
-          </a:lnRef>
-          <a:fillRef idx="3">
-            <a:schemeClr val="accent1"/>
-          </a:fillRef>
-          <a:effectRef idx="2">
-            <a:schemeClr val="accent1"/>
-          </a:effectRef>
-          <a:fontRef idx="minor">
-            <a:schemeClr val="lt1"/>
-          </a:fontRef>
-        </p:style>
-        <p:txBody>
-          <a:bodyPr rtlCol="0" anchor="ctr" wrap="square" lIns="101600" rIns="101600" tIns="38100" bIns="38100"/>
-          <a:lstStyle/>
-          <a:p>
-            <a:pPr algn="ctr"/>
-            <a:r>
-              <a:rPr sz="1500" b="1">
+          <p:cNvPr id="24" name="TextBox 23"/>
+          <p:cNvSpPr txBox="1"/>
+          <p:nvPr/>
+        </p:nvSpPr>
+        <p:spPr>
+          <a:xfrm>
+            <a:off x="896112" y="5989320"/>
+            <a:ext cx="10287000" cy="274320"/>
+          </a:xfrm>
+          <a:prstGeom prst="rect">
+            <a:avLst/>
+          </a:prstGeom>
+          <a:noFill/>
+        </p:spPr>
+        <p:txBody>
+          <a:bodyPr wrap="square" lIns="0" rIns="0" tIns="0" bIns="0">
+            <a:spAutoFit/>
+          </a:bodyPr>
+          <a:lstStyle/>
+          <a:p>
+            <a:pPr algn="ctr"/>
+            <a:r>
+              <a:rPr sz="1200" b="0">
                 <a:solidFill>
-                  <a:srgbClr val="FFFFFF"/>
+                  <a:srgbClr val="475569"/>
                 </a:solidFill>
                 <a:latin typeface="Arial"/>
               </a:rPr>
-              <a:t>3</a:t>
-            </a:r>
-          </a:p>
-        </p:txBody>
-      </p:sp>
-      <p:sp>
-        <p:nvSpPr>
-          <p:cNvPr id="18" name="TextBox 17"/>
+              <a:t>Use the source idea, not guessing.</a:t>
+            </a:r>
+          </a:p>
+        </p:txBody>
+      </p:sp>
+      <p:sp>
+        <p:nvSpPr>
+          <p:cNvPr id="25" name="TextBox 24"/>
           <p:cNvSpPr txBox="1"/>
           <p:nvPr/>
         </p:nvSpPr>
         <p:spPr>
           <a:xfrm>
-            <a:off x="1572768" y="4818888"/>
-            <a:ext cx="9372600" cy="384048"/>
-          </a:xfrm>
-          <a:prstGeom prst="rect">
-            <a:avLst/>
-          </a:prstGeom>
-          <a:noFill/>
-        </p:spPr>
-        <p:txBody>
-          <a:bodyPr wrap="square" lIns="0" rIns="0" tIns="0" bIns="0">
-            <a:spAutoFit/>
-          </a:bodyPr>
-          <a:lstStyle/>
-          <a:p>
-            <a:r>
-              <a:rPr sz="1500" b="0">
-                <a:solidFill>
-                  <a:srgbClr val="111827"/>
-                </a:solidFill>
-                <a:latin typeface="Arial"/>
-              </a:rPr>
-              <a:t>Agree on one answer before writing.</a:t>
-            </a:r>
-          </a:p>
-        </p:txBody>
-      </p:sp>
-      <p:sp>
-        <p:nvSpPr>
-          <p:cNvPr id="19" name="Rectangle 18"/>
-          <p:cNvSpPr/>
-          <p:nvPr/>
-        </p:nvSpPr>
-        <p:spPr>
-          <a:xfrm>
-            <a:off x="868680" y="5522976"/>
-            <a:ext cx="10378440" cy="713232"/>
-          </a:xfrm>
-          <a:prstGeom prst="rect">
-            <a:avLst/>
-          </a:prstGeom>
-          <a:solidFill>
-            <a:srgbClr val="FFFFFF"/>
-          </a:solidFill>
-          <a:ln w="11430">
-            <a:solidFill>
-              <a:srgbClr val="CBD5E1"/>
-            </a:solidFill>
-          </a:ln>
-        </p:spPr>
-        <p:style>
-          <a:lnRef idx="1">
-            <a:schemeClr val="accent1"/>
-          </a:lnRef>
-          <a:fillRef idx="3">
-            <a:schemeClr val="accent1"/>
-          </a:fillRef>
-          <a:effectRef idx="2">
-            <a:schemeClr val="accent1"/>
-          </a:effectRef>
-          <a:fontRef idx="minor">
-            <a:schemeClr val="lt1"/>
-          </a:fontRef>
-        </p:style>
-        <p:txBody>
-          <a:bodyPr rtlCol="0" anchor="ctr"/>
-          <a:lstStyle/>
-          <a:p>
-            <a:pPr algn="ctr"/>
-          </a:p>
-        </p:txBody>
-      </p:sp>
-      <p:sp>
-        <p:nvSpPr>
-          <p:cNvPr id="20" name="Rectangle 19"/>
-          <p:cNvSpPr/>
-          <p:nvPr/>
-        </p:nvSpPr>
-        <p:spPr>
-          <a:xfrm>
-            <a:off x="868680" y="5522976"/>
-            <a:ext cx="530352" cy="713232"/>
-          </a:xfrm>
-          <a:prstGeom prst="rect">
-            <a:avLst/>
-          </a:prstGeom>
-          <a:solidFill>
-            <a:srgbClr val="BE123C"/>
-          </a:solidFill>
-          <a:ln>
-            <a:noFill/>
-          </a:ln>
-        </p:spPr>
-        <p:style>
-          <a:lnRef idx="1">
-            <a:schemeClr val="accent1"/>
-          </a:lnRef>
-          <a:fillRef idx="3">
-            <a:schemeClr val="accent1"/>
-          </a:fillRef>
-          <a:effectRef idx="2">
-            <a:schemeClr val="accent1"/>
-          </a:effectRef>
-          <a:fontRef idx="minor">
-            <a:schemeClr val="lt1"/>
-          </a:fontRef>
-        </p:style>
-        <p:txBody>
-          <a:bodyPr rtlCol="0" anchor="ctr" wrap="square" lIns="101600" rIns="101600" tIns="38100" bIns="38100"/>
-          <a:lstStyle/>
-          <a:p>
-            <a:pPr algn="ctr"/>
-            <a:r>
-              <a:rPr sz="1500" b="1">
-                <a:solidFill>
-                  <a:srgbClr val="FFFFFF"/>
-                </a:solidFill>
-                <a:latin typeface="Arial"/>
-              </a:rPr>
-              <a:t>4</a:t>
-            </a:r>
-          </a:p>
-        </p:txBody>
-      </p:sp>
-      <p:sp>
-        <p:nvSpPr>
-          <p:cNvPr id="21" name="TextBox 20"/>
-          <p:cNvSpPr txBox="1"/>
-          <p:nvPr/>
-        </p:nvSpPr>
-        <p:spPr>
-          <a:xfrm>
-            <a:off x="1572768" y="5669280"/>
-            <a:ext cx="9372600" cy="384048"/>
-          </a:xfrm>
-          <a:prstGeom prst="rect">
-            <a:avLst/>
-          </a:prstGeom>
-          <a:noFill/>
-        </p:spPr>
-        <p:txBody>
-          <a:bodyPr wrap="square" lIns="0" rIns="0" tIns="0" bIns="0">
-            <a:spAutoFit/>
-          </a:bodyPr>
-          <a:lstStyle/>
-          <a:p>
-            <a:r>
-              <a:rPr sz="1500" b="0">
-                <a:solidFill>
-                  <a:srgbClr val="111827"/>
-                </a:solidFill>
-                <a:latin typeface="Arial"/>
-              </a:rPr>
-              <a:t>Write one clear response.</a:t>
-            </a:r>
-          </a:p>
-        </p:txBody>
-      </p:sp>
-      <p:sp>
-        <p:nvSpPr>
-          <p:cNvPr id="22" name="TextBox 21"/>
-          <p:cNvSpPr txBox="1"/>
-          <p:nvPr/>
-        </p:nvSpPr>
-        <p:spPr>
-          <a:xfrm>
-            <a:off x="685800" y="6419088"/>
-            <a:ext cx="10835640" cy="228600"/>
+            <a:off x="713232" y="6355080"/>
+            <a:ext cx="10835640" cy="219456"/>
           </a:xfrm>
           <a:prstGeom prst="rect">
             <a:avLst/>
@@ -8094,7 +9368,7 @@
                 </a:solidFill>
                 <a:latin typeface="Arial"/>
               </a:rPr>
-              <a:t>Listen • Talk • Try • Explain</a:t>
+              <a:t>P7 class flow: listen • talk • try • explain</a:t>
             </a:r>
           </a:p>
         </p:txBody>
@@ -8299,7 +9573,93 @@
       </p:sp>
       <p:sp>
         <p:nvSpPr>
-          <p:cNvPr id="6" name="TextBox 5"/>
+          <p:cNvPr id="6" name="Rectangle 5"/>
+          <p:cNvSpPr/>
+          <p:nvPr/>
+        </p:nvSpPr>
+        <p:spPr>
+          <a:xfrm>
+            <a:off x="164592" y="6565392"/>
+            <a:ext cx="12027103" cy="73152"/>
+          </a:xfrm>
+          <a:prstGeom prst="rect">
+            <a:avLst/>
+          </a:prstGeom>
+          <a:solidFill>
+            <a:srgbClr val="FCD116"/>
+          </a:solidFill>
+          <a:ln>
+            <a:noFill/>
+          </a:ln>
+        </p:spPr>
+        <p:style>
+          <a:lnRef idx="1">
+            <a:schemeClr val="accent1"/>
+          </a:lnRef>
+          <a:fillRef idx="3">
+            <a:schemeClr val="accent1"/>
+          </a:fillRef>
+          <a:effectRef idx="2">
+            <a:schemeClr val="accent1"/>
+          </a:effectRef>
+          <a:fontRef idx="minor">
+            <a:schemeClr val="lt1"/>
+          </a:fontRef>
+        </p:style>
+        <p:txBody>
+          <a:bodyPr rtlCol="0" anchor="ctr"/>
+          <a:lstStyle/>
+          <a:p>
+            <a:pPr algn="ctr"/>
+          </a:p>
+        </p:txBody>
+      </p:sp>
+      <p:sp>
+        <p:nvSpPr>
+          <p:cNvPr id="7" name="Rectangle 6"/>
+          <p:cNvSpPr/>
+          <p:nvPr/>
+        </p:nvSpPr>
+        <p:spPr>
+          <a:xfrm>
+            <a:off x="164592" y="6638544"/>
+            <a:ext cx="12027103" cy="45720"/>
+          </a:xfrm>
+          <a:prstGeom prst="rect">
+            <a:avLst/>
+          </a:prstGeom>
+          <a:solidFill>
+            <a:srgbClr val="D90000"/>
+          </a:solidFill>
+          <a:ln>
+            <a:noFill/>
+          </a:ln>
+        </p:spPr>
+        <p:style>
+          <a:lnRef idx="1">
+            <a:schemeClr val="accent1"/>
+          </a:lnRef>
+          <a:fillRef idx="3">
+            <a:schemeClr val="accent1"/>
+          </a:fillRef>
+          <a:effectRef idx="2">
+            <a:schemeClr val="accent1"/>
+          </a:effectRef>
+          <a:fontRef idx="minor">
+            <a:schemeClr val="lt1"/>
+          </a:fontRef>
+        </p:style>
+        <p:txBody>
+          <a:bodyPr rtlCol="0" anchor="ctr"/>
+          <a:lstStyle/>
+          <a:p>
+            <a:pPr algn="ctr"/>
+          </a:p>
+        </p:txBody>
+      </p:sp>
+      <p:sp>
+        <p:nvSpPr>
+          <p:cNvPr id="8" name="TextBox 7"/>
           <p:cNvSpPr txBox="1"/>
           <p:nvPr/>
         </p:nvSpPr>
@@ -8333,7 +9693,7 @@
       </p:sp>
       <p:sp>
         <p:nvSpPr>
-          <p:cNvPr id="7" name="TextBox 6"/>
+          <p:cNvPr id="9" name="TextBox 8"/>
           <p:cNvSpPr txBox="1"/>
           <p:nvPr/>
         </p:nvSpPr>
@@ -8368,14 +9728,14 @@
       </p:sp>
       <p:sp>
         <p:nvSpPr>
-          <p:cNvPr id="8" name="TextBox 7"/>
+          <p:cNvPr id="10" name="TextBox 9"/>
           <p:cNvSpPr txBox="1"/>
           <p:nvPr/>
         </p:nvSpPr>
         <p:spPr>
           <a:xfrm>
-            <a:off x="594360" y="1042415"/>
-            <a:ext cx="11109960" cy="566928"/>
+            <a:off x="594360" y="1005840"/>
+            <a:ext cx="11064240" cy="512064"/>
           </a:xfrm>
           <a:prstGeom prst="rect">
             <a:avLst/>
@@ -8402,16 +9762,16 @@
       </p:sp>
       <p:sp>
         <p:nvSpPr>
-          <p:cNvPr id="9" name="Rectangle 8"/>
+          <p:cNvPr id="11" name="Rounded Rectangle 10"/>
           <p:cNvSpPr/>
           <p:nvPr/>
         </p:nvSpPr>
         <p:spPr>
           <a:xfrm>
-            <a:off x="685800" y="1874519"/>
-            <a:ext cx="10835640" cy="804672"/>
-          </a:xfrm>
-          <a:prstGeom prst="rect">
+            <a:off x="777240" y="1783080"/>
+            <a:ext cx="3063240" cy="4343400"/>
+          </a:xfrm>
+          <a:prstGeom prst="roundRect">
             <a:avLst/>
           </a:prstGeom>
           <a:solidFill>
@@ -8438,34 +9798,306 @@
           </a:fontRef>
         </p:style>
         <p:txBody>
-          <a:bodyPr rtlCol="0" anchor="ctr" wrap="square" lIns="101600" rIns="101600" tIns="38100" bIns="38100"/>
-          <a:lstStyle/>
-          <a:p>
-            <a:pPr algn="ctr"/>
-            <a:r>
-              <a:rPr sz="1900" b="1">
+          <a:bodyPr rtlCol="0" anchor="ctr"/>
+          <a:lstStyle/>
+          <a:p>
+            <a:pPr algn="ctr"/>
+          </a:p>
+        </p:txBody>
+      </p:sp>
+      <p:sp>
+        <p:nvSpPr>
+          <p:cNvPr id="12" name="Oval 11"/>
+          <p:cNvSpPr/>
+          <p:nvPr/>
+        </p:nvSpPr>
+        <p:spPr>
+          <a:xfrm>
+            <a:off x="2122322" y="2461564"/>
+            <a:ext cx="373075" cy="277977"/>
+          </a:xfrm>
+          <a:prstGeom prst="ellipse">
+            <a:avLst/>
+          </a:prstGeom>
+          <a:solidFill>
+            <a:srgbClr val="FFF7E0"/>
+          </a:solidFill>
+          <a:ln w="10160">
+            <a:solidFill>
+              <a:srgbClr val="087490"/>
+            </a:solidFill>
+          </a:ln>
+        </p:spPr>
+        <p:style>
+          <a:lnRef idx="1">
+            <a:schemeClr val="accent1"/>
+          </a:lnRef>
+          <a:fillRef idx="3">
+            <a:schemeClr val="accent1"/>
+          </a:fillRef>
+          <a:effectRef idx="2">
+            <a:schemeClr val="accent1"/>
+          </a:effectRef>
+          <a:fontRef idx="minor">
+            <a:schemeClr val="lt1"/>
+          </a:fontRef>
+        </p:style>
+        <p:txBody>
+          <a:bodyPr rtlCol="0" anchor="ctr"/>
+          <a:lstStyle/>
+          <a:p>
+            <a:pPr algn="ctr"/>
+          </a:p>
+        </p:txBody>
+      </p:sp>
+      <p:sp>
+        <p:nvSpPr>
+          <p:cNvPr id="13" name="Rounded Rectangle 12"/>
+          <p:cNvSpPr/>
+          <p:nvPr/>
+        </p:nvSpPr>
+        <p:spPr>
+          <a:xfrm>
+            <a:off x="1982419" y="2774289"/>
+            <a:ext cx="652881" cy="729691"/>
+          </a:xfrm>
+          <a:prstGeom prst="roundRect">
+            <a:avLst/>
+          </a:prstGeom>
+          <a:solidFill>
+            <a:srgbClr val="ECFDF5"/>
+          </a:solidFill>
+          <a:ln w="10160">
+            <a:solidFill>
+              <a:srgbClr val="087490"/>
+            </a:solidFill>
+          </a:ln>
+        </p:spPr>
+        <p:style>
+          <a:lnRef idx="1">
+            <a:schemeClr val="accent1"/>
+          </a:lnRef>
+          <a:fillRef idx="3">
+            <a:schemeClr val="accent1"/>
+          </a:fillRef>
+          <a:effectRef idx="2">
+            <a:schemeClr val="accent1"/>
+          </a:effectRef>
+          <a:fontRef idx="minor">
+            <a:schemeClr val="lt1"/>
+          </a:fontRef>
+        </p:style>
+        <p:txBody>
+          <a:bodyPr rtlCol="0" anchor="ctr"/>
+          <a:lstStyle/>
+          <a:p>
+            <a:pPr algn="ctr"/>
+          </a:p>
+        </p:txBody>
+      </p:sp>
+      <p:sp>
+        <p:nvSpPr>
+          <p:cNvPr id="14" name="Oval 13"/>
+          <p:cNvSpPr/>
+          <p:nvPr/>
+        </p:nvSpPr>
+        <p:spPr>
+          <a:xfrm>
+            <a:off x="2122322" y="2948025"/>
+            <a:ext cx="373075" cy="208483"/>
+          </a:xfrm>
+          <a:prstGeom prst="ellipse">
+            <a:avLst/>
+          </a:prstGeom>
+          <a:solidFill>
+            <a:srgbClr val="D90000"/>
+          </a:solidFill>
+          <a:ln>
+            <a:noFill/>
+          </a:ln>
+        </p:spPr>
+        <p:style>
+          <a:lnRef idx="1">
+            <a:schemeClr val="accent1"/>
+          </a:lnRef>
+          <a:fillRef idx="3">
+            <a:schemeClr val="accent1"/>
+          </a:fillRef>
+          <a:effectRef idx="2">
+            <a:schemeClr val="accent1"/>
+          </a:effectRef>
+          <a:fontRef idx="minor">
+            <a:schemeClr val="lt1"/>
+          </a:fontRef>
+        </p:style>
+        <p:txBody>
+          <a:bodyPr rtlCol="0" anchor="ctr"/>
+          <a:lstStyle/>
+          <a:p>
+            <a:pPr algn="ctr"/>
+          </a:p>
+        </p:txBody>
+      </p:sp>
+      <p:sp>
+        <p:nvSpPr>
+          <p:cNvPr id="15" name="Rectangle 14"/>
+          <p:cNvSpPr/>
+          <p:nvPr/>
+        </p:nvSpPr>
+        <p:spPr>
+          <a:xfrm>
+            <a:off x="1655978" y="3017520"/>
+            <a:ext cx="1305763" cy="69494"/>
+          </a:xfrm>
+          <a:prstGeom prst="rect">
+            <a:avLst/>
+          </a:prstGeom>
+          <a:solidFill>
+            <a:srgbClr val="087490"/>
+          </a:solidFill>
+          <a:ln>
+            <a:noFill/>
+          </a:ln>
+        </p:spPr>
+        <p:style>
+          <a:lnRef idx="1">
+            <a:schemeClr val="accent1"/>
+          </a:lnRef>
+          <a:fillRef idx="3">
+            <a:schemeClr val="accent1"/>
+          </a:fillRef>
+          <a:effectRef idx="2">
+            <a:schemeClr val="accent1"/>
+          </a:effectRef>
+          <a:fontRef idx="minor">
+            <a:schemeClr val="lt1"/>
+          </a:fontRef>
+        </p:style>
+        <p:txBody>
+          <a:bodyPr rtlCol="0" anchor="ctr"/>
+          <a:lstStyle/>
+          <a:p>
+            <a:pPr algn="ctr"/>
+          </a:p>
+        </p:txBody>
+      </p:sp>
+      <p:sp>
+        <p:nvSpPr>
+          <p:cNvPr id="16" name="TextBox 15"/>
+          <p:cNvSpPr txBox="1"/>
+          <p:nvPr/>
+        </p:nvSpPr>
+        <p:spPr>
+          <a:xfrm>
+            <a:off x="1143000" y="3630168"/>
+            <a:ext cx="2331720" cy="228600"/>
+          </a:xfrm>
+          <a:prstGeom prst="rect">
+            <a:avLst/>
+          </a:prstGeom>
+          <a:noFill/>
+        </p:spPr>
+        <p:txBody>
+          <a:bodyPr wrap="square" lIns="0" rIns="0" tIns="0" bIns="0">
+            <a:spAutoFit/>
+          </a:bodyPr>
+          <a:lstStyle/>
+          <a:p>
+            <a:pPr algn="ctr"/>
+            <a:r>
+              <a:rPr sz="1000" b="0">
+                <a:solidFill>
+                  <a:srgbClr val="475569"/>
+                </a:solidFill>
+                <a:latin typeface="Arial"/>
+              </a:rPr>
+              <a:t>Integrated Science</a:t>
+            </a:r>
+          </a:p>
+        </p:txBody>
+      </p:sp>
+      <p:sp>
+        <p:nvSpPr>
+          <p:cNvPr id="17" name="TextBox 16"/>
+          <p:cNvSpPr txBox="1"/>
+          <p:nvPr/>
+        </p:nvSpPr>
+        <p:spPr>
+          <a:xfrm>
+            <a:off x="960120" y="4315968"/>
+            <a:ext cx="2697480" cy="310896"/>
+          </a:xfrm>
+          <a:prstGeom prst="rect">
+            <a:avLst/>
+          </a:prstGeom>
+          <a:noFill/>
+        </p:spPr>
+        <p:txBody>
+          <a:bodyPr wrap="square" lIns="0" rIns="0" tIns="0" bIns="0">
+            <a:spAutoFit/>
+          </a:bodyPr>
+          <a:lstStyle/>
+          <a:p>
+            <a:pPr algn="ctr"/>
+            <a:r>
+              <a:rPr sz="1300" b="1">
+                <a:solidFill>
+                  <a:srgbClr val="1B7F3A"/>
+                </a:solidFill>
+                <a:latin typeface="Arial"/>
+              </a:rPr>
+              <a:t>GROUP CHALLENGE</a:t>
+            </a:r>
+          </a:p>
+        </p:txBody>
+      </p:sp>
+      <p:sp>
+        <p:nvSpPr>
+          <p:cNvPr id="18" name="TextBox 17"/>
+          <p:cNvSpPr txBox="1"/>
+          <p:nvPr/>
+        </p:nvSpPr>
+        <p:spPr>
+          <a:xfrm>
+            <a:off x="1005840" y="4754880"/>
+            <a:ext cx="2606040" cy="640080"/>
+          </a:xfrm>
+          <a:prstGeom prst="rect">
+            <a:avLst/>
+          </a:prstGeom>
+          <a:noFill/>
+        </p:spPr>
+        <p:txBody>
+          <a:bodyPr wrap="square" lIns="0" rIns="0" tIns="0" bIns="0">
+            <a:spAutoFit/>
+          </a:bodyPr>
+          <a:lstStyle/>
+          <a:p>
+            <a:pPr algn="ctr"/>
+            <a:r>
+              <a:rPr sz="1500" b="1">
                 <a:solidFill>
                   <a:srgbClr val="111827"/>
                 </a:solidFill>
                 <a:latin typeface="Arial"/>
               </a:rPr>
-              <a:t>Group task:</a:t>
-            </a:r>
-          </a:p>
-        </p:txBody>
-      </p:sp>
-      <p:sp>
-        <p:nvSpPr>
-          <p:cNvPr id="10" name="Rectangle 9"/>
+              <a:t>Produce one answer the class can check.</a:t>
+            </a:r>
+          </a:p>
+        </p:txBody>
+      </p:sp>
+      <p:sp>
+        <p:nvSpPr>
+          <p:cNvPr id="19" name="Rounded Rectangle 18"/>
           <p:cNvSpPr/>
           <p:nvPr/>
         </p:nvSpPr>
         <p:spPr>
           <a:xfrm>
-            <a:off x="868680" y="2971800"/>
-            <a:ext cx="10378440" cy="713232"/>
-          </a:xfrm>
-          <a:prstGeom prst="rect">
+            <a:off x="4343400" y="1828800"/>
+            <a:ext cx="6903720" cy="868680"/>
+          </a:xfrm>
+          <a:prstGeom prst="roundRect">
             <a:avLst/>
           </a:prstGeom>
           <a:solidFill>
@@ -8501,14 +10133,14 @@
       </p:sp>
       <p:sp>
         <p:nvSpPr>
-          <p:cNvPr id="11" name="Rectangle 10"/>
+          <p:cNvPr id="20" name="Rectangle 19"/>
           <p:cNvSpPr/>
           <p:nvPr/>
         </p:nvSpPr>
         <p:spPr>
           <a:xfrm>
-            <a:off x="868680" y="2971800"/>
-            <a:ext cx="530352" cy="713232"/>
+            <a:off x="4343400" y="1828800"/>
+            <a:ext cx="566928" cy="868680"/>
           </a:xfrm>
           <a:prstGeom prst="rect">
             <a:avLst/>
@@ -8535,12 +10167,38 @@
           </a:fontRef>
         </p:style>
         <p:txBody>
-          <a:bodyPr rtlCol="0" anchor="ctr" wrap="square" lIns="101600" rIns="101600" tIns="38100" bIns="38100"/>
-          <a:lstStyle/>
-          <a:p>
-            <a:pPr algn="ctr"/>
-            <a:r>
-              <a:rPr sz="1500" b="1">
+          <a:bodyPr rtlCol="0" anchor="ctr"/>
+          <a:lstStyle/>
+          <a:p>
+            <a:pPr algn="ctr"/>
+          </a:p>
+        </p:txBody>
+      </p:sp>
+      <p:sp>
+        <p:nvSpPr>
+          <p:cNvPr id="21" name="TextBox 20"/>
+          <p:cNvSpPr txBox="1"/>
+          <p:nvPr/>
+        </p:nvSpPr>
+        <p:spPr>
+          <a:xfrm>
+            <a:off x="4343400" y="2144268"/>
+            <a:ext cx="566928" cy="237744"/>
+          </a:xfrm>
+          <a:prstGeom prst="rect">
+            <a:avLst/>
+          </a:prstGeom>
+          <a:noFill/>
+        </p:spPr>
+        <p:txBody>
+          <a:bodyPr wrap="square" lIns="0" rIns="0" tIns="0" bIns="0">
+            <a:spAutoFit/>
+          </a:bodyPr>
+          <a:lstStyle/>
+          <a:p>
+            <a:pPr algn="ctr"/>
+            <a:r>
+              <a:rPr sz="1400" b="1">
                 <a:solidFill>
                   <a:srgbClr val="FFFFFF"/>
                 </a:solidFill>
@@ -8553,14 +10211,14 @@
       </p:sp>
       <p:sp>
         <p:nvSpPr>
-          <p:cNvPr id="12" name="TextBox 11"/>
+          <p:cNvPr id="22" name="TextBox 21"/>
           <p:cNvSpPr txBox="1"/>
           <p:nvPr/>
         </p:nvSpPr>
         <p:spPr>
           <a:xfrm>
-            <a:off x="1572768" y="3118104"/>
-            <a:ext cx="9372600" cy="384048"/>
+            <a:off x="5129784" y="1993392"/>
+            <a:ext cx="5879592" cy="630936"/>
           </a:xfrm>
           <a:prstGeom prst="rect">
             <a:avLst/>
@@ -8574,29 +10232,29 @@
           <a:lstStyle/>
           <a:p>
             <a:r>
-              <a:rPr sz="1500" b="0">
+              <a:rPr sz="1200" b="1">
                 <a:solidFill>
                   <a:srgbClr val="111827"/>
                 </a:solidFill>
                 <a:latin typeface="Arial"/>
               </a:rPr>
-              <a:t>Students brainstorm in pairs and list all the scientific experime...</a:t>
-            </a:r>
-          </a:p>
-        </p:txBody>
-      </p:sp>
-      <p:sp>
-        <p:nvSpPr>
-          <p:cNvPr id="13" name="Rectangle 12"/>
+              <a:t>Brainstorm in pairs and list all the scientific experiments and models created</a:t>
+            </a:r>
+          </a:p>
+        </p:txBody>
+      </p:sp>
+      <p:sp>
+        <p:nvSpPr>
+          <p:cNvPr id="23" name="Rounded Rectangle 22"/>
           <p:cNvSpPr/>
           <p:nvPr/>
         </p:nvSpPr>
         <p:spPr>
           <a:xfrm>
-            <a:off x="868680" y="3822191"/>
-            <a:ext cx="10378440" cy="713232"/>
-          </a:xfrm>
-          <a:prstGeom prst="rect">
+            <a:off x="4343400" y="2999232"/>
+            <a:ext cx="6903720" cy="868680"/>
+          </a:xfrm>
+          <a:prstGeom prst="roundRect">
             <a:avLst/>
           </a:prstGeom>
           <a:solidFill>
@@ -8632,14 +10290,14 @@
       </p:sp>
       <p:sp>
         <p:nvSpPr>
-          <p:cNvPr id="14" name="Rectangle 13"/>
+          <p:cNvPr id="24" name="Rectangle 23"/>
           <p:cNvSpPr/>
           <p:nvPr/>
         </p:nvSpPr>
         <p:spPr>
           <a:xfrm>
-            <a:off x="868680" y="3822191"/>
-            <a:ext cx="530352" cy="713232"/>
+            <a:off x="4343400" y="2999232"/>
+            <a:ext cx="566928" cy="868680"/>
           </a:xfrm>
           <a:prstGeom prst="rect">
             <a:avLst/>
@@ -8666,12 +10324,38 @@
           </a:fontRef>
         </p:style>
         <p:txBody>
-          <a:bodyPr rtlCol="0" anchor="ctr" wrap="square" lIns="101600" rIns="101600" tIns="38100" bIns="38100"/>
-          <a:lstStyle/>
-          <a:p>
-            <a:pPr algn="ctr"/>
-            <a:r>
-              <a:rPr sz="1500" b="1">
+          <a:bodyPr rtlCol="0" anchor="ctr"/>
+          <a:lstStyle/>
+          <a:p>
+            <a:pPr algn="ctr"/>
+          </a:p>
+        </p:txBody>
+      </p:sp>
+      <p:sp>
+        <p:nvSpPr>
+          <p:cNvPr id="25" name="TextBox 24"/>
+          <p:cNvSpPr txBox="1"/>
+          <p:nvPr/>
+        </p:nvSpPr>
+        <p:spPr>
+          <a:xfrm>
+            <a:off x="4343400" y="3314700"/>
+            <a:ext cx="566928" cy="237744"/>
+          </a:xfrm>
+          <a:prstGeom prst="rect">
+            <a:avLst/>
+          </a:prstGeom>
+          <a:noFill/>
+        </p:spPr>
+        <p:txBody>
+          <a:bodyPr wrap="square" lIns="0" rIns="0" tIns="0" bIns="0">
+            <a:spAutoFit/>
+          </a:bodyPr>
+          <a:lstStyle/>
+          <a:p>
+            <a:pPr algn="ctr"/>
+            <a:r>
+              <a:rPr sz="1400" b="1">
                 <a:solidFill>
                   <a:srgbClr val="FFFFFF"/>
                 </a:solidFill>
@@ -8684,14 +10368,14 @@
       </p:sp>
       <p:sp>
         <p:nvSpPr>
-          <p:cNvPr id="15" name="TextBox 14"/>
+          <p:cNvPr id="26" name="TextBox 25"/>
           <p:cNvSpPr txBox="1"/>
           <p:nvPr/>
         </p:nvSpPr>
         <p:spPr>
           <a:xfrm>
-            <a:off x="1572768" y="3968496"/>
-            <a:ext cx="9372600" cy="384048"/>
+            <a:off x="5129784" y="3163824"/>
+            <a:ext cx="5879592" cy="630936"/>
           </a:xfrm>
           <a:prstGeom prst="rect">
             <a:avLst/>
@@ -8705,29 +10389,29 @@
           <a:lstStyle/>
           <a:p>
             <a:r>
-              <a:rPr sz="1500" b="0">
+              <a:rPr sz="1200" b="1">
                 <a:solidFill>
                   <a:srgbClr val="111827"/>
                 </a:solidFill>
                 <a:latin typeface="Arial"/>
               </a:rPr>
-              <a:t>Students copy the report structure into their notebooks and label...</a:t>
-            </a:r>
-          </a:p>
-        </p:txBody>
-      </p:sp>
-      <p:sp>
-        <p:nvSpPr>
-          <p:cNvPr id="16" name="Rectangle 15"/>
+              <a:t>Copy the report structure into their notebooks and label each part based</a:t>
+            </a:r>
+          </a:p>
+        </p:txBody>
+      </p:sp>
+      <p:sp>
+        <p:nvSpPr>
+          <p:cNvPr id="27" name="Rounded Rectangle 26"/>
           <p:cNvSpPr/>
           <p:nvPr/>
         </p:nvSpPr>
         <p:spPr>
           <a:xfrm>
-            <a:off x="868680" y="4672584"/>
-            <a:ext cx="10378440" cy="713232"/>
-          </a:xfrm>
-          <a:prstGeom prst="rect">
+            <a:off x="4343400" y="4169664"/>
+            <a:ext cx="6903720" cy="868680"/>
+          </a:xfrm>
+          <a:prstGeom prst="roundRect">
             <a:avLst/>
           </a:prstGeom>
           <a:solidFill>
@@ -8763,14 +10447,14 @@
       </p:sp>
       <p:sp>
         <p:nvSpPr>
-          <p:cNvPr id="17" name="Rectangle 16"/>
+          <p:cNvPr id="28" name="Rectangle 27"/>
           <p:cNvSpPr/>
           <p:nvPr/>
         </p:nvSpPr>
         <p:spPr>
           <a:xfrm>
-            <a:off x="868680" y="4672584"/>
-            <a:ext cx="530352" cy="713232"/>
+            <a:off x="4343400" y="4169664"/>
+            <a:ext cx="566928" cy="868680"/>
           </a:xfrm>
           <a:prstGeom prst="rect">
             <a:avLst/>
@@ -8797,12 +10481,38 @@
           </a:fontRef>
         </p:style>
         <p:txBody>
-          <a:bodyPr rtlCol="0" anchor="ctr" wrap="square" lIns="101600" rIns="101600" tIns="38100" bIns="38100"/>
-          <a:lstStyle/>
-          <a:p>
-            <a:pPr algn="ctr"/>
-            <a:r>
-              <a:rPr sz="1500" b="1">
+          <a:bodyPr rtlCol="0" anchor="ctr"/>
+          <a:lstStyle/>
+          <a:p>
+            <a:pPr algn="ctr"/>
+          </a:p>
+        </p:txBody>
+      </p:sp>
+      <p:sp>
+        <p:nvSpPr>
+          <p:cNvPr id="29" name="TextBox 28"/>
+          <p:cNvSpPr txBox="1"/>
+          <p:nvPr/>
+        </p:nvSpPr>
+        <p:spPr>
+          <a:xfrm>
+            <a:off x="4343400" y="4485132"/>
+            <a:ext cx="566928" cy="237744"/>
+          </a:xfrm>
+          <a:prstGeom prst="rect">
+            <a:avLst/>
+          </a:prstGeom>
+          <a:noFill/>
+        </p:spPr>
+        <p:txBody>
+          <a:bodyPr wrap="square" lIns="0" rIns="0" tIns="0" bIns="0">
+            <a:spAutoFit/>
+          </a:bodyPr>
+          <a:lstStyle/>
+          <a:p>
+            <a:pPr algn="ctr"/>
+            <a:r>
+              <a:rPr sz="1400" b="1">
                 <a:solidFill>
                   <a:srgbClr val="FFFFFF"/>
                 </a:solidFill>
@@ -8815,14 +10525,14 @@
       </p:sp>
       <p:sp>
         <p:nvSpPr>
-          <p:cNvPr id="18" name="TextBox 17"/>
+          <p:cNvPr id="30" name="TextBox 29"/>
           <p:cNvSpPr txBox="1"/>
           <p:nvPr/>
         </p:nvSpPr>
         <p:spPr>
           <a:xfrm>
-            <a:off x="1572768" y="4818888"/>
-            <a:ext cx="9372600" cy="384048"/>
+            <a:off x="5129784" y="4334256"/>
+            <a:ext cx="5879592" cy="630936"/>
           </a:xfrm>
           <a:prstGeom prst="rect">
             <a:avLst/>
@@ -8836,37 +10546,37 @@
           <a:lstStyle/>
           <a:p>
             <a:r>
-              <a:rPr sz="1500" b="0">
+              <a:rPr sz="1200" b="1">
                 <a:solidFill>
                   <a:srgbClr val="111827"/>
                 </a:solidFill>
                 <a:latin typeface="Arial"/>
               </a:rPr>
-              <a:t>Students participate in a whole-class exercise to verbally summar...</a:t>
-            </a:r>
-          </a:p>
-        </p:txBody>
-      </p:sp>
-      <p:sp>
-        <p:nvSpPr>
-          <p:cNvPr id="19" name="Rectangle 18"/>
+              <a:t>Participate in a whole-class exercise to verbally summarize the 'Biogas Digester'</a:t>
+            </a:r>
+          </a:p>
+        </p:txBody>
+      </p:sp>
+      <p:sp>
+        <p:nvSpPr>
+          <p:cNvPr id="31" name="Rounded Rectangle 30"/>
           <p:cNvSpPr/>
           <p:nvPr/>
         </p:nvSpPr>
         <p:spPr>
           <a:xfrm>
-            <a:off x="868680" y="5522976"/>
-            <a:ext cx="10378440" cy="713232"/>
-          </a:xfrm>
-          <a:prstGeom prst="rect">
+            <a:off x="4343400" y="5413248"/>
+            <a:ext cx="6903720" cy="658368"/>
+          </a:xfrm>
+          <a:prstGeom prst="roundRect">
             <a:avLst/>
           </a:prstGeom>
           <a:solidFill>
             <a:srgbClr val="FFFFFF"/>
           </a:solidFill>
-          <a:ln w="11430">
+          <a:ln w="13970">
             <a:solidFill>
-              <a:srgbClr val="CBD5E1"/>
+              <a:srgbClr val="D90000"/>
             </a:solidFill>
           </a:ln>
         </p:spPr>
@@ -8894,100 +10604,49 @@
       </p:sp>
       <p:sp>
         <p:nvSpPr>
-          <p:cNvPr id="20" name="Rectangle 19"/>
-          <p:cNvSpPr/>
-          <p:nvPr/>
-        </p:nvSpPr>
-        <p:spPr>
-          <a:xfrm>
-            <a:off x="868680" y="5522976"/>
-            <a:ext cx="530352" cy="713232"/>
-          </a:xfrm>
-          <a:prstGeom prst="rect">
-            <a:avLst/>
-          </a:prstGeom>
-          <a:solidFill>
-            <a:srgbClr val="1B7F3A"/>
-          </a:solidFill>
-          <a:ln>
-            <a:noFill/>
-          </a:ln>
-        </p:spPr>
-        <p:style>
-          <a:lnRef idx="1">
-            <a:schemeClr val="accent1"/>
-          </a:lnRef>
-          <a:fillRef idx="3">
-            <a:schemeClr val="accent1"/>
-          </a:fillRef>
-          <a:effectRef idx="2">
-            <a:schemeClr val="accent1"/>
-          </a:effectRef>
-          <a:fontRef idx="minor">
-            <a:schemeClr val="lt1"/>
-          </a:fontRef>
-        </p:style>
-        <p:txBody>
-          <a:bodyPr rtlCol="0" anchor="ctr" wrap="square" lIns="101600" rIns="101600" tIns="38100" bIns="38100"/>
-          <a:lstStyle/>
-          <a:p>
-            <a:pPr algn="ctr"/>
-            <a:r>
-              <a:rPr sz="1500" b="1">
+          <p:cNvPr id="32" name="TextBox 31"/>
+          <p:cNvSpPr txBox="1"/>
+          <p:nvPr/>
+        </p:nvSpPr>
+        <p:spPr>
+          <a:xfrm>
+            <a:off x="4572000" y="5577840"/>
+            <a:ext cx="6446520" cy="274320"/>
+          </a:xfrm>
+          <a:prstGeom prst="rect">
+            <a:avLst/>
+          </a:prstGeom>
+          <a:noFill/>
+        </p:spPr>
+        <p:txBody>
+          <a:bodyPr wrap="square" lIns="0" rIns="0" tIns="0" bIns="0">
+            <a:spAutoFit/>
+          </a:bodyPr>
+          <a:lstStyle/>
+          <a:p>
+            <a:pPr algn="ctr"/>
+            <a:r>
+              <a:rPr sz="1400" b="1">
                 <a:solidFill>
-                  <a:srgbClr val="FFFFFF"/>
+                  <a:srgbClr val="D90000"/>
                 </a:solidFill>
                 <a:latin typeface="Arial"/>
               </a:rPr>
-              <a:t>4</a:t>
-            </a:r>
-          </a:p>
-        </p:txBody>
-      </p:sp>
-      <p:sp>
-        <p:nvSpPr>
-          <p:cNvPr id="21" name="TextBox 20"/>
+              <a:t>Class share-out: one group explains, one group improves it.</a:t>
+            </a:r>
+          </a:p>
+        </p:txBody>
+      </p:sp>
+      <p:sp>
+        <p:nvSpPr>
+          <p:cNvPr id="33" name="TextBox 32"/>
           <p:cNvSpPr txBox="1"/>
           <p:nvPr/>
         </p:nvSpPr>
         <p:spPr>
           <a:xfrm>
-            <a:off x="1572768" y="5669280"/>
-            <a:ext cx="9372600" cy="384048"/>
-          </a:xfrm>
-          <a:prstGeom prst="rect">
-            <a:avLst/>
-          </a:prstGeom>
-          <a:noFill/>
-        </p:spPr>
-        <p:txBody>
-          <a:bodyPr wrap="square" lIns="0" rIns="0" tIns="0" bIns="0">
-            <a:spAutoFit/>
-          </a:bodyPr>
-          <a:lstStyle/>
-          <a:p>
-            <a:r>
-              <a:rPr sz="1500" b="0">
-                <a:solidFill>
-                  <a:srgbClr val="111827"/>
-                </a:solidFill>
-                <a:latin typeface="Arial"/>
-              </a:rPr>
-              <a:t>Write one clear response.</a:t>
-            </a:r>
-          </a:p>
-        </p:txBody>
-      </p:sp>
-      <p:sp>
-        <p:nvSpPr>
-          <p:cNvPr id="22" name="TextBox 21"/>
-          <p:cNvSpPr txBox="1"/>
-          <p:nvPr/>
-        </p:nvSpPr>
-        <p:spPr>
-          <a:xfrm>
-            <a:off x="685800" y="6419088"/>
-            <a:ext cx="10835640" cy="228600"/>
+            <a:off x="713232" y="6355080"/>
+            <a:ext cx="10835640" cy="219456"/>
           </a:xfrm>
           <a:prstGeom prst="rect">
             <a:avLst/>
@@ -9008,7 +10667,7 @@
                 </a:solidFill>
                 <a:latin typeface="Arial"/>
               </a:rPr>
-              <a:t>Listen • Talk • Try • Explain</a:t>
+              <a:t>P7 class flow: listen • talk • try • explain</a:t>
             </a:r>
           </a:p>
         </p:txBody>
@@ -9213,7 +10872,93 @@
       </p:sp>
       <p:sp>
         <p:nvSpPr>
-          <p:cNvPr id="6" name="TextBox 5"/>
+          <p:cNvPr id="6" name="Rectangle 5"/>
+          <p:cNvSpPr/>
+          <p:nvPr/>
+        </p:nvSpPr>
+        <p:spPr>
+          <a:xfrm>
+            <a:off x="164592" y="6565392"/>
+            <a:ext cx="12027103" cy="73152"/>
+          </a:xfrm>
+          <a:prstGeom prst="rect">
+            <a:avLst/>
+          </a:prstGeom>
+          <a:solidFill>
+            <a:srgbClr val="FCD116"/>
+          </a:solidFill>
+          <a:ln>
+            <a:noFill/>
+          </a:ln>
+        </p:spPr>
+        <p:style>
+          <a:lnRef idx="1">
+            <a:schemeClr val="accent1"/>
+          </a:lnRef>
+          <a:fillRef idx="3">
+            <a:schemeClr val="accent1"/>
+          </a:fillRef>
+          <a:effectRef idx="2">
+            <a:schemeClr val="accent1"/>
+          </a:effectRef>
+          <a:fontRef idx="minor">
+            <a:schemeClr val="lt1"/>
+          </a:fontRef>
+        </p:style>
+        <p:txBody>
+          <a:bodyPr rtlCol="0" anchor="ctr"/>
+          <a:lstStyle/>
+          <a:p>
+            <a:pPr algn="ctr"/>
+          </a:p>
+        </p:txBody>
+      </p:sp>
+      <p:sp>
+        <p:nvSpPr>
+          <p:cNvPr id="7" name="Rectangle 6"/>
+          <p:cNvSpPr/>
+          <p:nvPr/>
+        </p:nvSpPr>
+        <p:spPr>
+          <a:xfrm>
+            <a:off x="164592" y="6638544"/>
+            <a:ext cx="12027103" cy="45720"/>
+          </a:xfrm>
+          <a:prstGeom prst="rect">
+            <a:avLst/>
+          </a:prstGeom>
+          <a:solidFill>
+            <a:srgbClr val="D90000"/>
+          </a:solidFill>
+          <a:ln>
+            <a:noFill/>
+          </a:ln>
+        </p:spPr>
+        <p:style>
+          <a:lnRef idx="1">
+            <a:schemeClr val="accent1"/>
+          </a:lnRef>
+          <a:fillRef idx="3">
+            <a:schemeClr val="accent1"/>
+          </a:fillRef>
+          <a:effectRef idx="2">
+            <a:schemeClr val="accent1"/>
+          </a:effectRef>
+          <a:fontRef idx="minor">
+            <a:schemeClr val="lt1"/>
+          </a:fontRef>
+        </p:style>
+        <p:txBody>
+          <a:bodyPr rtlCol="0" anchor="ctr"/>
+          <a:lstStyle/>
+          <a:p>
+            <a:pPr algn="ctr"/>
+          </a:p>
+        </p:txBody>
+      </p:sp>
+      <p:sp>
+        <p:nvSpPr>
+          <p:cNvPr id="8" name="TextBox 7"/>
           <p:cNvSpPr txBox="1"/>
           <p:nvPr/>
         </p:nvSpPr>
@@ -9247,7 +10992,7 @@
       </p:sp>
       <p:sp>
         <p:nvSpPr>
-          <p:cNvPr id="7" name="TextBox 6"/>
+          <p:cNvPr id="9" name="TextBox 8"/>
           <p:cNvSpPr txBox="1"/>
           <p:nvPr/>
         </p:nvSpPr>
@@ -9282,14 +11027,14 @@
       </p:sp>
       <p:sp>
         <p:nvSpPr>
-          <p:cNvPr id="8" name="TextBox 7"/>
+          <p:cNvPr id="10" name="TextBox 9"/>
           <p:cNvSpPr txBox="1"/>
           <p:nvPr/>
         </p:nvSpPr>
         <p:spPr>
           <a:xfrm>
-            <a:off x="594360" y="1042415"/>
-            <a:ext cx="11109960" cy="566928"/>
+            <a:off x="594360" y="1005840"/>
+            <a:ext cx="11064240" cy="512064"/>
           </a:xfrm>
           <a:prstGeom prst="rect">
             <a:avLst/>
@@ -9316,22 +11061,22 @@
       </p:sp>
       <p:sp>
         <p:nvSpPr>
-          <p:cNvPr id="9" name="Rectangle 8"/>
+          <p:cNvPr id="11" name="Rounded Rectangle 10"/>
           <p:cNvSpPr/>
           <p:nvPr/>
         </p:nvSpPr>
         <p:spPr>
           <a:xfrm>
-            <a:off x="685800" y="1874519"/>
-            <a:ext cx="10835640" cy="804672"/>
-          </a:xfrm>
-          <a:prstGeom prst="rect">
-            <a:avLst/>
-          </a:prstGeom>
-          <a:solidFill>
-            <a:srgbClr val="FFF7E0"/>
-          </a:solidFill>
-          <a:ln w="17780">
+            <a:off x="1143000" y="1783080"/>
+            <a:ext cx="9921240" cy="4434840"/>
+          </a:xfrm>
+          <a:prstGeom prst="roundRect">
+            <a:avLst/>
+          </a:prstGeom>
+          <a:solidFill>
+            <a:srgbClr val="FFFFFF"/>
+          </a:solidFill>
+          <a:ln w="20320">
             <a:solidFill>
               <a:srgbClr val="4338CA"/>
             </a:solidFill>
@@ -9352,12 +11097,47 @@
           </a:fontRef>
         </p:style>
         <p:txBody>
-          <a:bodyPr rtlCol="0" anchor="ctr" wrap="square" lIns="101600" rIns="101600" tIns="38100" bIns="38100"/>
-          <a:lstStyle/>
-          <a:p>
-            <a:pPr algn="ctr"/>
-            <a:r>
-              <a:rPr sz="1900" b="1">
+          <a:bodyPr rtlCol="0" anchor="t" wrap="square" lIns="101600" rIns="101600" tIns="127000" bIns="38100"/>
+          <a:lstStyle/>
+          <a:p>
+            <a:pPr algn="ctr"/>
+            <a:r>
+              <a:rPr sz="1500" b="1">
+                <a:solidFill>
+                  <a:srgbClr val="4338CA"/>
+                </a:solidFill>
+                <a:latin typeface="Arial"/>
+              </a:rPr>
+              <a:t>EXIT TICKET</a:t>
+            </a:r>
+          </a:p>
+        </p:txBody>
+      </p:sp>
+      <p:sp>
+        <p:nvSpPr>
+          <p:cNvPr id="12" name="TextBox 11"/>
+          <p:cNvSpPr txBox="1"/>
+          <p:nvPr/>
+        </p:nvSpPr>
+        <p:spPr>
+          <a:xfrm>
+            <a:off x="1691640" y="2487168"/>
+            <a:ext cx="8823960" cy="658368"/>
+          </a:xfrm>
+          <a:prstGeom prst="rect">
+            <a:avLst/>
+          </a:prstGeom>
+          <a:noFill/>
+        </p:spPr>
+        <p:txBody>
+          <a:bodyPr wrap="square" lIns="0" rIns="0" tIns="0" bIns="0">
+            <a:spAutoFit/>
+          </a:bodyPr>
+          <a:lstStyle/>
+          <a:p>
+            <a:pPr algn="ctr"/>
+            <a:r>
+              <a:rPr sz="2100" b="1">
                 <a:solidFill>
                   <a:srgbClr val="111827"/>
                 </a:solidFill>
@@ -9370,25 +11150,23 @@
       </p:sp>
       <p:sp>
         <p:nvSpPr>
-          <p:cNvPr id="10" name="Rectangle 9"/>
+          <p:cNvPr id="13" name="Rectangle 12"/>
           <p:cNvSpPr/>
           <p:nvPr/>
         </p:nvSpPr>
         <p:spPr>
           <a:xfrm>
-            <a:off x="868680" y="2971800"/>
-            <a:ext cx="10378440" cy="713232"/>
-          </a:xfrm>
-          <a:prstGeom prst="rect">
-            <a:avLst/>
-          </a:prstGeom>
-          <a:solidFill>
-            <a:srgbClr val="FFFFFF"/>
-          </a:solidFill>
-          <a:ln w="11430">
-            <a:solidFill>
-              <a:srgbClr val="CBD5E1"/>
-            </a:solidFill>
+            <a:off x="1920240" y="3493008"/>
+            <a:ext cx="8321040" cy="32004"/>
+          </a:xfrm>
+          <a:prstGeom prst="rect">
+            <a:avLst/>
+          </a:prstGeom>
+          <a:solidFill>
+            <a:srgbClr val="CBD5E1"/>
+          </a:solidFill>
+          <a:ln>
+            <a:noFill/>
           </a:ln>
         </p:spPr>
         <p:style>
@@ -9415,20 +11193,20 @@
       </p:sp>
       <p:sp>
         <p:nvSpPr>
-          <p:cNvPr id="11" name="Rectangle 10"/>
+          <p:cNvPr id="14" name="Rectangle 13"/>
           <p:cNvSpPr/>
           <p:nvPr/>
         </p:nvSpPr>
         <p:spPr>
           <a:xfrm>
-            <a:off x="868680" y="2971800"/>
-            <a:ext cx="530352" cy="713232"/>
-          </a:xfrm>
-          <a:prstGeom prst="rect">
-            <a:avLst/>
-          </a:prstGeom>
-          <a:solidFill>
-            <a:srgbClr val="4338CA"/>
+            <a:off x="1920240" y="3977639"/>
+            <a:ext cx="8321040" cy="32004"/>
+          </a:xfrm>
+          <a:prstGeom prst="rect">
+            <a:avLst/>
+          </a:prstGeom>
+          <a:solidFill>
+            <a:srgbClr val="CBD5E1"/>
           </a:solidFill>
           <a:ln>
             <a:noFill/>
@@ -9449,77 +11227,32 @@
           </a:fontRef>
         </p:style>
         <p:txBody>
-          <a:bodyPr rtlCol="0" anchor="ctr" wrap="square" lIns="101600" rIns="101600" tIns="38100" bIns="38100"/>
-          <a:lstStyle/>
-          <a:p>
-            <a:pPr algn="ctr"/>
-            <a:r>
-              <a:rPr sz="1500" b="1">
-                <a:solidFill>
-                  <a:srgbClr val="FFFFFF"/>
-                </a:solidFill>
-                <a:latin typeface="Arial"/>
-              </a:rPr>
-              <a:t>1</a:t>
-            </a:r>
-          </a:p>
-        </p:txBody>
-      </p:sp>
-      <p:sp>
-        <p:nvSpPr>
-          <p:cNvPr id="12" name="TextBox 11"/>
-          <p:cNvSpPr txBox="1"/>
-          <p:nvPr/>
-        </p:nvSpPr>
-        <p:spPr>
-          <a:xfrm>
-            <a:off x="1572768" y="3118104"/>
-            <a:ext cx="9372600" cy="384048"/>
-          </a:xfrm>
-          <a:prstGeom prst="rect">
-            <a:avLst/>
-          </a:prstGeom>
-          <a:noFill/>
-        </p:spPr>
-        <p:txBody>
-          <a:bodyPr wrap="square" lIns="0" rIns="0" tIns="0" bIns="0">
-            <a:spAutoFit/>
-          </a:bodyPr>
-          <a:lstStyle/>
-          <a:p>
-            <a:r>
-              <a:rPr sz="1500" b="0">
-                <a:solidFill>
-                  <a:srgbClr val="111827"/>
-                </a:solidFill>
-                <a:latin typeface="Arial"/>
-              </a:rPr>
-              <a:t>Use one complete sentence.</a:t>
-            </a:r>
-          </a:p>
-        </p:txBody>
-      </p:sp>
-      <p:sp>
-        <p:nvSpPr>
-          <p:cNvPr id="13" name="Rectangle 12"/>
+          <a:bodyPr rtlCol="0" anchor="ctr"/>
+          <a:lstStyle/>
+          <a:p>
+            <a:pPr algn="ctr"/>
+          </a:p>
+        </p:txBody>
+      </p:sp>
+      <p:sp>
+        <p:nvSpPr>
+          <p:cNvPr id="15" name="Rectangle 14"/>
           <p:cNvSpPr/>
           <p:nvPr/>
         </p:nvSpPr>
         <p:spPr>
           <a:xfrm>
-            <a:off x="868680" y="3822191"/>
-            <a:ext cx="10378440" cy="713232"/>
-          </a:xfrm>
-          <a:prstGeom prst="rect">
-            <a:avLst/>
-          </a:prstGeom>
-          <a:solidFill>
-            <a:srgbClr val="FFFFFF"/>
-          </a:solidFill>
-          <a:ln w="11430">
-            <a:solidFill>
-              <a:srgbClr val="CBD5E1"/>
-            </a:solidFill>
+            <a:off x="1920240" y="4462272"/>
+            <a:ext cx="8321040" cy="32004"/>
+          </a:xfrm>
+          <a:prstGeom prst="rect">
+            <a:avLst/>
+          </a:prstGeom>
+          <a:solidFill>
+            <a:srgbClr val="CBD5E1"/>
+          </a:solidFill>
+          <a:ln>
+            <a:noFill/>
           </a:ln>
         </p:spPr>
         <p:style>
@@ -9546,66 +11279,49 @@
       </p:sp>
       <p:sp>
         <p:nvSpPr>
-          <p:cNvPr id="14" name="Rectangle 13"/>
-          <p:cNvSpPr/>
-          <p:nvPr/>
-        </p:nvSpPr>
-        <p:spPr>
-          <a:xfrm>
-            <a:off x="868680" y="3822191"/>
-            <a:ext cx="530352" cy="713232"/>
-          </a:xfrm>
-          <a:prstGeom prst="rect">
-            <a:avLst/>
-          </a:prstGeom>
-          <a:solidFill>
-            <a:srgbClr val="4338CA"/>
-          </a:solidFill>
-          <a:ln>
-            <a:noFill/>
-          </a:ln>
-        </p:spPr>
-        <p:style>
-          <a:lnRef idx="1">
-            <a:schemeClr val="accent1"/>
-          </a:lnRef>
-          <a:fillRef idx="3">
-            <a:schemeClr val="accent1"/>
-          </a:fillRef>
-          <a:effectRef idx="2">
-            <a:schemeClr val="accent1"/>
-          </a:effectRef>
-          <a:fontRef idx="minor">
-            <a:schemeClr val="lt1"/>
-          </a:fontRef>
-        </p:style>
-        <p:txBody>
-          <a:bodyPr rtlCol="0" anchor="ctr" wrap="square" lIns="101600" rIns="101600" tIns="38100" bIns="38100"/>
-          <a:lstStyle/>
-          <a:p>
-            <a:pPr algn="ctr"/>
-            <a:r>
-              <a:rPr sz="1500" b="1">
+          <p:cNvPr id="16" name="TextBox 15"/>
+          <p:cNvSpPr txBox="1"/>
+          <p:nvPr/>
+        </p:nvSpPr>
+        <p:spPr>
+          <a:xfrm>
+            <a:off x="1691640" y="4864608"/>
+            <a:ext cx="8823960" cy="237744"/>
+          </a:xfrm>
+          <a:prstGeom prst="rect">
+            <a:avLst/>
+          </a:prstGeom>
+          <a:noFill/>
+        </p:spPr>
+        <p:txBody>
+          <a:bodyPr wrap="square" lIns="0" rIns="0" tIns="0" bIns="0">
+            <a:spAutoFit/>
+          </a:bodyPr>
+          <a:lstStyle/>
+          <a:p>
+            <a:pPr algn="ctr"/>
+            <a:r>
+              <a:rPr sz="1200" b="0">
                 <a:solidFill>
-                  <a:srgbClr val="FFFFFF"/>
+                  <a:srgbClr val="475569"/>
                 </a:solidFill>
                 <a:latin typeface="Arial"/>
               </a:rPr>
-              <a:t>2</a:t>
-            </a:r>
-          </a:p>
-        </p:txBody>
-      </p:sp>
-      <p:sp>
-        <p:nvSpPr>
-          <p:cNvPr id="15" name="TextBox 14"/>
+              <a:t>Use one complete sentence.</a:t>
+            </a:r>
+          </a:p>
+        </p:txBody>
+      </p:sp>
+      <p:sp>
+        <p:nvSpPr>
+          <p:cNvPr id="17" name="TextBox 16"/>
           <p:cNvSpPr txBox="1"/>
           <p:nvPr/>
         </p:nvSpPr>
         <p:spPr>
           <a:xfrm>
-            <a:off x="1572768" y="3968496"/>
-            <a:ext cx="9372600" cy="384048"/>
+            <a:off x="1691640" y="5184648"/>
+            <a:ext cx="8823960" cy="237744"/>
           </a:xfrm>
           <a:prstGeom prst="rect">
             <a:avLst/>
@@ -9618,10 +11334,11 @@
           </a:bodyPr>
           <a:lstStyle/>
           <a:p>
-            <a:r>
-              <a:rPr sz="1500" b="0">
+            <a:pPr algn="ctr"/>
+            <a:r>
+              <a:rPr sz="1200" b="0">
                 <a:solidFill>
-                  <a:srgbClr val="111827"/>
+                  <a:srgbClr val="475569"/>
                 </a:solidFill>
                 <a:latin typeface="Arial"/>
               </a:rPr>
@@ -9632,276 +11349,14 @@
       </p:sp>
       <p:sp>
         <p:nvSpPr>
-          <p:cNvPr id="16" name="Rectangle 15"/>
-          <p:cNvSpPr/>
-          <p:nvPr/>
-        </p:nvSpPr>
-        <p:spPr>
-          <a:xfrm>
-            <a:off x="868680" y="4672584"/>
-            <a:ext cx="10378440" cy="713232"/>
-          </a:xfrm>
-          <a:prstGeom prst="rect">
-            <a:avLst/>
-          </a:prstGeom>
-          <a:solidFill>
-            <a:srgbClr val="FFFFFF"/>
-          </a:solidFill>
-          <a:ln w="11430">
-            <a:solidFill>
-              <a:srgbClr val="CBD5E1"/>
-            </a:solidFill>
-          </a:ln>
-        </p:spPr>
-        <p:style>
-          <a:lnRef idx="1">
-            <a:schemeClr val="accent1"/>
-          </a:lnRef>
-          <a:fillRef idx="3">
-            <a:schemeClr val="accent1"/>
-          </a:fillRef>
-          <a:effectRef idx="2">
-            <a:schemeClr val="accent1"/>
-          </a:effectRef>
-          <a:fontRef idx="minor">
-            <a:schemeClr val="lt1"/>
-          </a:fontRef>
-        </p:style>
-        <p:txBody>
-          <a:bodyPr rtlCol="0" anchor="ctr"/>
-          <a:lstStyle/>
-          <a:p>
-            <a:pPr algn="ctr"/>
-          </a:p>
-        </p:txBody>
-      </p:sp>
-      <p:sp>
-        <p:nvSpPr>
-          <p:cNvPr id="17" name="Rectangle 16"/>
-          <p:cNvSpPr/>
-          <p:nvPr/>
-        </p:nvSpPr>
-        <p:spPr>
-          <a:xfrm>
-            <a:off x="868680" y="4672584"/>
-            <a:ext cx="530352" cy="713232"/>
-          </a:xfrm>
-          <a:prstGeom prst="rect">
-            <a:avLst/>
-          </a:prstGeom>
-          <a:solidFill>
-            <a:srgbClr val="4338CA"/>
-          </a:solidFill>
-          <a:ln>
-            <a:noFill/>
-          </a:ln>
-        </p:spPr>
-        <p:style>
-          <a:lnRef idx="1">
-            <a:schemeClr val="accent1"/>
-          </a:lnRef>
-          <a:fillRef idx="3">
-            <a:schemeClr val="accent1"/>
-          </a:fillRef>
-          <a:effectRef idx="2">
-            <a:schemeClr val="accent1"/>
-          </a:effectRef>
-          <a:fontRef idx="minor">
-            <a:schemeClr val="lt1"/>
-          </a:fontRef>
-        </p:style>
-        <p:txBody>
-          <a:bodyPr rtlCol="0" anchor="ctr" wrap="square" lIns="101600" rIns="101600" tIns="38100" bIns="38100"/>
-          <a:lstStyle/>
-          <a:p>
-            <a:pPr algn="ctr"/>
-            <a:r>
-              <a:rPr sz="1500" b="1">
-                <a:solidFill>
-                  <a:srgbClr val="FFFFFF"/>
-                </a:solidFill>
-                <a:latin typeface="Arial"/>
-              </a:rPr>
-              <a:t>3</a:t>
-            </a:r>
-          </a:p>
-        </p:txBody>
-      </p:sp>
-      <p:sp>
-        <p:nvSpPr>
           <p:cNvPr id="18" name="TextBox 17"/>
           <p:cNvSpPr txBox="1"/>
           <p:nvPr/>
         </p:nvSpPr>
         <p:spPr>
           <a:xfrm>
-            <a:off x="1572768" y="4818888"/>
-            <a:ext cx="9372600" cy="384048"/>
-          </a:xfrm>
-          <a:prstGeom prst="rect">
-            <a:avLst/>
-          </a:prstGeom>
-          <a:noFill/>
-        </p:spPr>
-        <p:txBody>
-          <a:bodyPr wrap="square" lIns="0" rIns="0" tIns="0" bIns="0">
-            <a:spAutoFit/>
-          </a:bodyPr>
-          <a:lstStyle/>
-          <a:p>
-            <a:r>
-              <a:rPr sz="1500" b="0">
-                <a:solidFill>
-                  <a:srgbClr val="111827"/>
-                </a:solidFill>
-                <a:latin typeface="Arial"/>
-              </a:rPr>
-              <a:t>Write one clear response.</a:t>
-            </a:r>
-          </a:p>
-        </p:txBody>
-      </p:sp>
-      <p:sp>
-        <p:nvSpPr>
-          <p:cNvPr id="19" name="Rectangle 18"/>
-          <p:cNvSpPr/>
-          <p:nvPr/>
-        </p:nvSpPr>
-        <p:spPr>
-          <a:xfrm>
-            <a:off x="868680" y="5522976"/>
-            <a:ext cx="10378440" cy="713232"/>
-          </a:xfrm>
-          <a:prstGeom prst="rect">
-            <a:avLst/>
-          </a:prstGeom>
-          <a:solidFill>
-            <a:srgbClr val="FFFFFF"/>
-          </a:solidFill>
-          <a:ln w="11430">
-            <a:solidFill>
-              <a:srgbClr val="CBD5E1"/>
-            </a:solidFill>
-          </a:ln>
-        </p:spPr>
-        <p:style>
-          <a:lnRef idx="1">
-            <a:schemeClr val="accent1"/>
-          </a:lnRef>
-          <a:fillRef idx="3">
-            <a:schemeClr val="accent1"/>
-          </a:fillRef>
-          <a:effectRef idx="2">
-            <a:schemeClr val="accent1"/>
-          </a:effectRef>
-          <a:fontRef idx="minor">
-            <a:schemeClr val="lt1"/>
-          </a:fontRef>
-        </p:style>
-        <p:txBody>
-          <a:bodyPr rtlCol="0" anchor="ctr"/>
-          <a:lstStyle/>
-          <a:p>
-            <a:pPr algn="ctr"/>
-          </a:p>
-        </p:txBody>
-      </p:sp>
-      <p:sp>
-        <p:nvSpPr>
-          <p:cNvPr id="20" name="Rectangle 19"/>
-          <p:cNvSpPr/>
-          <p:nvPr/>
-        </p:nvSpPr>
-        <p:spPr>
-          <a:xfrm>
-            <a:off x="868680" y="5522976"/>
-            <a:ext cx="530352" cy="713232"/>
-          </a:xfrm>
-          <a:prstGeom prst="rect">
-            <a:avLst/>
-          </a:prstGeom>
-          <a:solidFill>
-            <a:srgbClr val="4338CA"/>
-          </a:solidFill>
-          <a:ln>
-            <a:noFill/>
-          </a:ln>
-        </p:spPr>
-        <p:style>
-          <a:lnRef idx="1">
-            <a:schemeClr val="accent1"/>
-          </a:lnRef>
-          <a:fillRef idx="3">
-            <a:schemeClr val="accent1"/>
-          </a:fillRef>
-          <a:effectRef idx="2">
-            <a:schemeClr val="accent1"/>
-          </a:effectRef>
-          <a:fontRef idx="minor">
-            <a:schemeClr val="lt1"/>
-          </a:fontRef>
-        </p:style>
-        <p:txBody>
-          <a:bodyPr rtlCol="0" anchor="ctr" wrap="square" lIns="101600" rIns="101600" tIns="38100" bIns="38100"/>
-          <a:lstStyle/>
-          <a:p>
-            <a:pPr algn="ctr"/>
-            <a:r>
-              <a:rPr sz="1500" b="1">
-                <a:solidFill>
-                  <a:srgbClr val="FFFFFF"/>
-                </a:solidFill>
-                <a:latin typeface="Arial"/>
-              </a:rPr>
-              <a:t>4</a:t>
-            </a:r>
-          </a:p>
-        </p:txBody>
-      </p:sp>
-      <p:sp>
-        <p:nvSpPr>
-          <p:cNvPr id="21" name="TextBox 20"/>
-          <p:cNvSpPr txBox="1"/>
-          <p:nvPr/>
-        </p:nvSpPr>
-        <p:spPr>
-          <a:xfrm>
-            <a:off x="1572768" y="5669280"/>
-            <a:ext cx="9372600" cy="384048"/>
-          </a:xfrm>
-          <a:prstGeom prst="rect">
-            <a:avLst/>
-          </a:prstGeom>
-          <a:noFill/>
-        </p:spPr>
-        <p:txBody>
-          <a:bodyPr wrap="square" lIns="0" rIns="0" tIns="0" bIns="0">
-            <a:spAutoFit/>
-          </a:bodyPr>
-          <a:lstStyle/>
-          <a:p>
-            <a:r>
-              <a:rPr sz="1500" b="0">
-                <a:solidFill>
-                  <a:srgbClr val="111827"/>
-                </a:solidFill>
-                <a:latin typeface="Arial"/>
-              </a:rPr>
-              <a:t>Write one clear response.</a:t>
-            </a:r>
-          </a:p>
-        </p:txBody>
-      </p:sp>
-      <p:sp>
-        <p:nvSpPr>
-          <p:cNvPr id="22" name="TextBox 21"/>
-          <p:cNvSpPr txBox="1"/>
-          <p:nvPr/>
-        </p:nvSpPr>
-        <p:spPr>
-          <a:xfrm>
-            <a:off x="685800" y="6419088"/>
-            <a:ext cx="10835640" cy="228600"/>
+            <a:off x="713232" y="6355080"/>
+            <a:ext cx="10835640" cy="219456"/>
           </a:xfrm>
           <a:prstGeom prst="rect">
             <a:avLst/>
@@ -9922,7 +11377,7 @@
                 </a:solidFill>
                 <a:latin typeface="Arial"/>
               </a:rPr>
-              <a:t>Listen • Talk • Try • Explain</a:t>
+              <a:t>P7 class flow: listen • talk • try • explain</a:t>
             </a:r>
           </a:p>
         </p:txBody>

--- a/uganda-p7-mvp/p7_t1_integrated_science_1205/p7_t1_integrated_science_1205.pptx
+++ b/uganda-p7-mvp/p7_t1_integrated_science_1205/p7_t1_integrated_science_1205.pptx
@@ -3438,7 +3438,7 @@
         </p:nvSpPr>
         <p:spPr>
           <a:xfrm>
-            <a:off x="685800" y="1024128"/>
+            <a:off x="685800" y="987552"/>
             <a:ext cx="10835640" cy="502920"/>
           </a:xfrm>
           <a:prstGeom prst="rect">
@@ -3473,8 +3473,8 @@
         </p:nvSpPr>
         <p:spPr>
           <a:xfrm>
-            <a:off x="777240" y="1783080"/>
-            <a:ext cx="3794760" cy="4343400"/>
+            <a:off x="777240" y="1755648"/>
+            <a:ext cx="10652760" cy="4480560"/>
           </a:xfrm>
           <a:prstGeom prst="roundRect">
             <a:avLst/>
@@ -3482,7 +3482,7 @@
           <a:solidFill>
             <a:srgbClr val="FFFFFF"/>
           </a:solidFill>
-          <a:ln w="17780">
+          <a:ln w="17145">
             <a:solidFill>
               <a:srgbClr val="1D4ED8"/>
             </a:solidFill>
@@ -3503,336 +3503,10 @@
           </a:fontRef>
         </p:style>
         <p:txBody>
-          <a:bodyPr rtlCol="0" anchor="t" wrap="square" lIns="101600" rIns="101600" tIns="152400" bIns="38100"/>
-          <a:lstStyle/>
-          <a:p>
-            <a:pPr algn="ctr"/>
-            <a:r>
-              <a:rPr sz="1800" b="1">
-                <a:solidFill>
-                  <a:srgbClr val="1D4ED8"/>
-                </a:solidFill>
-                <a:latin typeface="Arial"/>
-              </a:rPr>
-              <a:t>Integrated Science</a:t>
-            </a:r>
-          </a:p>
-        </p:txBody>
-      </p:sp>
-      <p:sp>
-        <p:nvSpPr>
-          <p:cNvPr id="12" name="Oval 11"/>
-          <p:cNvSpPr/>
-          <p:nvPr/>
-        </p:nvSpPr>
-        <p:spPr>
-          <a:xfrm>
-            <a:off x="2429560" y="2939796"/>
-            <a:ext cx="490118" cy="402336"/>
-          </a:xfrm>
-          <a:prstGeom prst="ellipse">
-            <a:avLst/>
-          </a:prstGeom>
-          <a:solidFill>
-            <a:srgbClr val="FFF7E0"/>
-          </a:solidFill>
-          <a:ln w="10160">
-            <a:solidFill>
-              <a:srgbClr val="087490"/>
-            </a:solidFill>
-          </a:ln>
-        </p:spPr>
-        <p:style>
-          <a:lnRef idx="1">
-            <a:schemeClr val="accent1"/>
-          </a:lnRef>
-          <a:fillRef idx="3">
-            <a:schemeClr val="accent1"/>
-          </a:fillRef>
-          <a:effectRef idx="2">
-            <a:schemeClr val="accent1"/>
-          </a:effectRef>
-          <a:fontRef idx="minor">
-            <a:schemeClr val="lt1"/>
-          </a:fontRef>
-        </p:style>
-        <p:txBody>
-          <a:bodyPr rtlCol="0" anchor="ctr"/>
-          <a:lstStyle/>
-          <a:p>
-            <a:pPr algn="ctr"/>
-          </a:p>
-        </p:txBody>
-      </p:sp>
-      <p:sp>
-        <p:nvSpPr>
-          <p:cNvPr id="13" name="Rounded Rectangle 12"/>
-          <p:cNvSpPr/>
-          <p:nvPr/>
-        </p:nvSpPr>
-        <p:spPr>
-          <a:xfrm>
-            <a:off x="2245766" y="3392424"/>
-            <a:ext cx="857707" cy="1056132"/>
-          </a:xfrm>
-          <a:prstGeom prst="roundRect">
-            <a:avLst/>
-          </a:prstGeom>
-          <a:solidFill>
-            <a:srgbClr val="ECFDF5"/>
-          </a:solidFill>
-          <a:ln w="10160">
-            <a:solidFill>
-              <a:srgbClr val="087490"/>
-            </a:solidFill>
-          </a:ln>
-        </p:spPr>
-        <p:style>
-          <a:lnRef idx="1">
-            <a:schemeClr val="accent1"/>
-          </a:lnRef>
-          <a:fillRef idx="3">
-            <a:schemeClr val="accent1"/>
-          </a:fillRef>
-          <a:effectRef idx="2">
-            <a:schemeClr val="accent1"/>
-          </a:effectRef>
-          <a:fontRef idx="minor">
-            <a:schemeClr val="lt1"/>
-          </a:fontRef>
-        </p:style>
-        <p:txBody>
-          <a:bodyPr rtlCol="0" anchor="ctr"/>
-          <a:lstStyle/>
-          <a:p>
-            <a:pPr algn="ctr"/>
-          </a:p>
-        </p:txBody>
-      </p:sp>
-      <p:sp>
-        <p:nvSpPr>
-          <p:cNvPr id="14" name="Oval 13"/>
-          <p:cNvSpPr/>
-          <p:nvPr/>
-        </p:nvSpPr>
-        <p:spPr>
-          <a:xfrm>
-            <a:off x="2429560" y="3643884"/>
-            <a:ext cx="490118" cy="301751"/>
-          </a:xfrm>
-          <a:prstGeom prst="ellipse">
-            <a:avLst/>
-          </a:prstGeom>
-          <a:solidFill>
-            <a:srgbClr val="D90000"/>
-          </a:solidFill>
-          <a:ln>
-            <a:noFill/>
-          </a:ln>
-        </p:spPr>
-        <p:style>
-          <a:lnRef idx="1">
-            <a:schemeClr val="accent1"/>
-          </a:lnRef>
-          <a:fillRef idx="3">
-            <a:schemeClr val="accent1"/>
-          </a:fillRef>
-          <a:effectRef idx="2">
-            <a:schemeClr val="accent1"/>
-          </a:effectRef>
-          <a:fontRef idx="minor">
-            <a:schemeClr val="lt1"/>
-          </a:fontRef>
-        </p:style>
-        <p:txBody>
-          <a:bodyPr rtlCol="0" anchor="ctr"/>
-          <a:lstStyle/>
-          <a:p>
-            <a:pPr algn="ctr"/>
-          </a:p>
-        </p:txBody>
-      </p:sp>
-      <p:sp>
-        <p:nvSpPr>
-          <p:cNvPr id="15" name="Rectangle 14"/>
-          <p:cNvSpPr/>
-          <p:nvPr/>
-        </p:nvSpPr>
-        <p:spPr>
-          <a:xfrm>
-            <a:off x="1816912" y="3744468"/>
-            <a:ext cx="1715414" cy="100584"/>
-          </a:xfrm>
-          <a:prstGeom prst="rect">
-            <a:avLst/>
-          </a:prstGeom>
-          <a:solidFill>
-            <a:srgbClr val="087490"/>
-          </a:solidFill>
-          <a:ln>
-            <a:noFill/>
-          </a:ln>
-        </p:spPr>
-        <p:style>
-          <a:lnRef idx="1">
-            <a:schemeClr val="accent1"/>
-          </a:lnRef>
-          <a:fillRef idx="3">
-            <a:schemeClr val="accent1"/>
-          </a:fillRef>
-          <a:effectRef idx="2">
-            <a:schemeClr val="accent1"/>
-          </a:effectRef>
-          <a:fontRef idx="minor">
-            <a:schemeClr val="lt1"/>
-          </a:fontRef>
-        </p:style>
-        <p:txBody>
-          <a:bodyPr rtlCol="0" anchor="ctr"/>
-          <a:lstStyle/>
-          <a:p>
-            <a:pPr algn="ctr"/>
-          </a:p>
-        </p:txBody>
-      </p:sp>
-      <p:sp>
-        <p:nvSpPr>
-          <p:cNvPr id="16" name="TextBox 15"/>
-          <p:cNvSpPr txBox="1"/>
-          <p:nvPr/>
-        </p:nvSpPr>
-        <p:spPr>
-          <a:xfrm>
-            <a:off x="1143000" y="4745736"/>
-            <a:ext cx="3063240" cy="228600"/>
-          </a:xfrm>
-          <a:prstGeom prst="rect">
-            <a:avLst/>
-          </a:prstGeom>
-          <a:noFill/>
-        </p:spPr>
-        <p:txBody>
-          <a:bodyPr wrap="square" lIns="0" rIns="0" tIns="0" bIns="0">
-            <a:spAutoFit/>
-          </a:bodyPr>
-          <a:lstStyle/>
-          <a:p>
-            <a:pPr algn="ctr"/>
-            <a:r>
-              <a:rPr sz="1000" b="0">
-                <a:solidFill>
-                  <a:srgbClr val="475569"/>
-                </a:solidFill>
-                <a:latin typeface="Arial"/>
-              </a:rPr>
-              <a:t>Integrated Science</a:t>
-            </a:r>
-          </a:p>
-        </p:txBody>
-      </p:sp>
-      <p:sp>
-        <p:nvSpPr>
-          <p:cNvPr id="17" name="TextBox 16"/>
-          <p:cNvSpPr txBox="1"/>
-          <p:nvPr/>
-        </p:nvSpPr>
-        <p:spPr>
-          <a:xfrm>
-            <a:off x="960120" y="5504688"/>
-            <a:ext cx="3429000" cy="274320"/>
-          </a:xfrm>
-          <a:prstGeom prst="rect">
-            <a:avLst/>
-          </a:prstGeom>
-          <a:noFill/>
-        </p:spPr>
-        <p:txBody>
-          <a:bodyPr wrap="square" lIns="0" rIns="0" tIns="0" bIns="0">
-            <a:spAutoFit/>
-          </a:bodyPr>
-          <a:lstStyle/>
-          <a:p>
-            <a:pPr algn="ctr"/>
-            <a:r>
-              <a:rPr sz="1200" b="0">
-                <a:solidFill>
-                  <a:srgbClr val="475569"/>
-                </a:solidFill>
-                <a:latin typeface="Arial"/>
-              </a:rPr>
-              <a:t>Look • wonder • predict</a:t>
-            </a:r>
-          </a:p>
-        </p:txBody>
-      </p:sp>
-      <p:sp>
-        <p:nvSpPr>
-          <p:cNvPr id="18" name="Rounded Rectangle 17"/>
-          <p:cNvSpPr/>
-          <p:nvPr/>
-        </p:nvSpPr>
-        <p:spPr>
-          <a:xfrm>
-            <a:off x="4892040" y="1965960"/>
-            <a:ext cx="6355080" cy="3520440"/>
-          </a:xfrm>
-          <a:prstGeom prst="roundRect">
-            <a:avLst/>
-          </a:prstGeom>
-          <a:solidFill>
-            <a:srgbClr val="FFF7E0"/>
-          </a:solidFill>
-          <a:ln w="20320">
-            <a:solidFill>
-              <a:srgbClr val="1D4ED8"/>
-            </a:solidFill>
-          </a:ln>
-        </p:spPr>
-        <p:style>
-          <a:lnRef idx="1">
-            <a:schemeClr val="accent1"/>
-          </a:lnRef>
-          <a:fillRef idx="3">
-            <a:schemeClr val="accent1"/>
-          </a:fillRef>
-          <a:effectRef idx="2">
-            <a:schemeClr val="accent1"/>
-          </a:effectRef>
-          <a:fontRef idx="minor">
-            <a:schemeClr val="lt1"/>
-          </a:fontRef>
-        </p:style>
-        <p:txBody>
-          <a:bodyPr rtlCol="0" anchor="ctr"/>
-          <a:lstStyle/>
-          <a:p>
-            <a:pPr algn="ctr"/>
-          </a:p>
-        </p:txBody>
-      </p:sp>
-      <p:sp>
-        <p:nvSpPr>
-          <p:cNvPr id="19" name="TextBox 18"/>
-          <p:cNvSpPr txBox="1"/>
-          <p:nvPr/>
-        </p:nvSpPr>
-        <p:spPr>
-          <a:xfrm>
-            <a:off x="5257800" y="2267712"/>
-            <a:ext cx="5623560" cy="256032"/>
-          </a:xfrm>
-          <a:prstGeom prst="rect">
-            <a:avLst/>
-          </a:prstGeom>
-          <a:noFill/>
-        </p:spPr>
-        <p:txBody>
-          <a:bodyPr wrap="square" lIns="0" rIns="0" tIns="0" bIns="0">
-            <a:spAutoFit/>
-          </a:bodyPr>
-          <a:lstStyle/>
-          <a:p>
-            <a:pPr algn="ctr"/>
+          <a:bodyPr rtlCol="0" anchor="t" wrap="square" lIns="101600" rIns="101600" tIns="101600" bIns="38100"/>
+          <a:lstStyle/>
+          <a:p>
+            <a:pPr algn="l"/>
             <a:r>
               <a:rPr sz="1200" b="1">
                 <a:solidFill>
@@ -3840,21 +3514,21 @@
                 </a:solidFill>
                 <a:latin typeface="Arial"/>
               </a:rPr>
-              <a:t>OPENING QUESTION</a:t>
-            </a:r>
-          </a:p>
-        </p:txBody>
-      </p:sp>
-      <p:sp>
-        <p:nvSpPr>
-          <p:cNvPr id="20" name="TextBox 19"/>
+              <a:t>OPENING VISUAL</a:t>
+            </a:r>
+          </a:p>
+        </p:txBody>
+      </p:sp>
+      <p:sp>
+        <p:nvSpPr>
+          <p:cNvPr id="12" name="TextBox 11"/>
           <p:cNvSpPr txBox="1"/>
           <p:nvPr/>
         </p:nvSpPr>
         <p:spPr>
           <a:xfrm>
-            <a:off x="5285232" y="2788920"/>
-            <a:ext cx="5577840" cy="987552"/>
+            <a:off x="1417319" y="2322576"/>
+            <a:ext cx="9372600" cy="411480"/>
           </a:xfrm>
           <a:prstGeom prst="rect">
             <a:avLst/>
@@ -3869,27 +3543,197 @@
           <a:p>
             <a:pPr algn="ctr"/>
             <a:r>
-              <a:rPr sz="2600" b="1">
+              <a:rPr sz="1800" b="1">
                 <a:solidFill>
                   <a:srgbClr val="111827"/>
                 </a:solidFill>
                 <a:latin typeface="Arial"/>
               </a:rPr>
-              <a:t>Big question: Which experiment did you find most challenging?</a:t>
-            </a:r>
-          </a:p>
-        </p:txBody>
-      </p:sp>
-      <p:sp>
-        <p:nvSpPr>
-          <p:cNvPr id="21" name="TextBox 20"/>
+              <a:t>Which experiment did you find most</a:t>
+            </a:r>
+          </a:p>
+        </p:txBody>
+      </p:sp>
+      <p:sp>
+        <p:nvSpPr>
+          <p:cNvPr id="13" name="Oval 12"/>
+          <p:cNvSpPr/>
+          <p:nvPr/>
+        </p:nvSpPr>
+        <p:spPr>
+          <a:xfrm>
+            <a:off x="5756148" y="3355848"/>
+            <a:ext cx="694944" cy="694944"/>
+          </a:xfrm>
+          <a:prstGeom prst="ellipse">
+            <a:avLst/>
+          </a:prstGeom>
+          <a:solidFill>
+            <a:srgbClr val="FCD116"/>
+          </a:solidFill>
+          <a:ln w="15240">
+            <a:solidFill>
+              <a:srgbClr val="111827"/>
+            </a:solidFill>
+          </a:ln>
+        </p:spPr>
+        <p:style>
+          <a:lnRef idx="1">
+            <a:schemeClr val="accent1"/>
+          </a:lnRef>
+          <a:fillRef idx="3">
+            <a:schemeClr val="accent1"/>
+          </a:fillRef>
+          <a:effectRef idx="2">
+            <a:schemeClr val="accent1"/>
+          </a:effectRef>
+          <a:fontRef idx="minor">
+            <a:schemeClr val="lt1"/>
+          </a:fontRef>
+        </p:style>
+        <p:txBody>
+          <a:bodyPr rtlCol="0" anchor="ctr"/>
+          <a:lstStyle/>
+          <a:p>
+            <a:pPr algn="ctr"/>
+          </a:p>
+        </p:txBody>
+      </p:sp>
+      <p:sp>
+        <p:nvSpPr>
+          <p:cNvPr id="14" name="Rounded Rectangle 13"/>
+          <p:cNvSpPr/>
+          <p:nvPr/>
+        </p:nvSpPr>
+        <p:spPr>
+          <a:xfrm>
+            <a:off x="5628131" y="4078224"/>
+            <a:ext cx="950976" cy="1463040"/>
+          </a:xfrm>
+          <a:prstGeom prst="roundRect">
+            <a:avLst/>
+          </a:prstGeom>
+          <a:solidFill>
+            <a:srgbClr val="ECFDF5"/>
+          </a:solidFill>
+          <a:ln w="17780">
+            <a:solidFill>
+              <a:srgbClr val="1D4ED8"/>
+            </a:solidFill>
+          </a:ln>
+        </p:spPr>
+        <p:style>
+          <a:lnRef idx="1">
+            <a:schemeClr val="accent1"/>
+          </a:lnRef>
+          <a:fillRef idx="3">
+            <a:schemeClr val="accent1"/>
+          </a:fillRef>
+          <a:effectRef idx="2">
+            <a:schemeClr val="accent1"/>
+          </a:effectRef>
+          <a:fontRef idx="minor">
+            <a:schemeClr val="lt1"/>
+          </a:fontRef>
+        </p:style>
+        <p:txBody>
+          <a:bodyPr rtlCol="0" anchor="ctr"/>
+          <a:lstStyle/>
+          <a:p>
+            <a:pPr algn="ctr"/>
+          </a:p>
+        </p:txBody>
+      </p:sp>
+      <p:cxnSp>
+        <p:nvCxnSpPr>
+          <p:cNvPr id="15" name="Connector 14"/>
+          <p:cNvCxnSpPr/>
+          <p:nvPr/>
+        </p:nvCxnSpPr>
+        <p:spPr>
+          <a:xfrm flipH="1" flipV="1">
+            <a:off x="2697480" y="3611880"/>
+            <a:ext cx="3406140" cy="704088"/>
+          </a:xfrm>
+          <a:prstGeom prst="line">
+            <a:avLst/>
+          </a:prstGeom>
+          <a:ln w="20320">
+            <a:solidFill>
+              <a:srgbClr val="1D4ED8"/>
+            </a:solidFill>
+          </a:ln>
+        </p:spPr>
+        <p:style>
+          <a:lnRef idx="2">
+            <a:schemeClr val="accent1"/>
+          </a:lnRef>
+          <a:fillRef idx="0">
+            <a:schemeClr val="accent1"/>
+          </a:fillRef>
+          <a:effectRef idx="1">
+            <a:schemeClr val="accent1"/>
+          </a:effectRef>
+          <a:fontRef idx="minor">
+            <a:schemeClr val="tx1"/>
+          </a:fontRef>
+        </p:style>
+      </p:cxnSp>
+      <p:sp>
+        <p:nvSpPr>
+          <p:cNvPr id="16" name="Rounded Rectangle 15"/>
+          <p:cNvSpPr/>
+          <p:nvPr/>
+        </p:nvSpPr>
+        <p:spPr>
+          <a:xfrm>
+            <a:off x="1463040" y="3218688"/>
+            <a:ext cx="2468880" cy="786384"/>
+          </a:xfrm>
+          <a:prstGeom prst="roundRect">
+            <a:avLst/>
+          </a:prstGeom>
+          <a:solidFill>
+            <a:srgbClr val="FFFFFF"/>
+          </a:solidFill>
+          <a:ln w="11430">
+            <a:solidFill>
+              <a:srgbClr val="CBD5E1"/>
+            </a:solidFill>
+          </a:ln>
+        </p:spPr>
+        <p:style>
+          <a:lnRef idx="1">
+            <a:schemeClr val="accent1"/>
+          </a:lnRef>
+          <a:fillRef idx="3">
+            <a:schemeClr val="accent1"/>
+          </a:fillRef>
+          <a:effectRef idx="2">
+            <a:schemeClr val="accent1"/>
+          </a:effectRef>
+          <a:fontRef idx="minor">
+            <a:schemeClr val="lt1"/>
+          </a:fontRef>
+        </p:style>
+        <p:txBody>
+          <a:bodyPr rtlCol="0" anchor="ctr"/>
+          <a:lstStyle/>
+          <a:p>
+            <a:pPr algn="ctr"/>
+          </a:p>
+        </p:txBody>
+      </p:sp>
+      <p:sp>
+        <p:nvSpPr>
+          <p:cNvPr id="17" name="TextBox 16"/>
           <p:cNvSpPr txBox="1"/>
           <p:nvPr/>
         </p:nvSpPr>
         <p:spPr>
           <a:xfrm>
-            <a:off x="5285232" y="4315968"/>
-            <a:ext cx="5577840" cy="411480"/>
+            <a:off x="1609344" y="3392424"/>
+            <a:ext cx="2176272" cy="347472"/>
           </a:xfrm>
           <a:prstGeom prst="rect">
             <a:avLst/>
@@ -3904,13 +3748,243 @@
           <a:p>
             <a:pPr algn="ctr"/>
             <a:r>
-              <a:rPr sz="1400" b="0">
+              <a:rPr sz="1200" b="1">
                 <a:solidFill>
-                  <a:srgbClr val="475569"/>
+                  <a:srgbClr val="111827"/>
                 </a:solidFill>
                 <a:latin typeface="Arial"/>
               </a:rPr>
-              <a:t>First think alone. Then tell a partner one possible answer.</a:t>
+              <a:t>Think alone</a:t>
+            </a:r>
+          </a:p>
+        </p:txBody>
+      </p:sp>
+      <p:cxnSp>
+        <p:nvCxnSpPr>
+          <p:cNvPr id="18" name="Connector 17"/>
+          <p:cNvCxnSpPr/>
+          <p:nvPr/>
+        </p:nvCxnSpPr>
+        <p:spPr>
+          <a:xfrm flipV="1">
+            <a:off x="6103620" y="3611880"/>
+            <a:ext cx="3497580" cy="704088"/>
+          </a:xfrm>
+          <a:prstGeom prst="line">
+            <a:avLst/>
+          </a:prstGeom>
+          <a:ln w="20320">
+            <a:solidFill>
+              <a:srgbClr val="1D4ED8"/>
+            </a:solidFill>
+          </a:ln>
+        </p:spPr>
+        <p:style>
+          <a:lnRef idx="2">
+            <a:schemeClr val="accent1"/>
+          </a:lnRef>
+          <a:fillRef idx="0">
+            <a:schemeClr val="accent1"/>
+          </a:fillRef>
+          <a:effectRef idx="1">
+            <a:schemeClr val="accent1"/>
+          </a:effectRef>
+          <a:fontRef idx="minor">
+            <a:schemeClr val="tx1"/>
+          </a:fontRef>
+        </p:style>
+      </p:cxnSp>
+      <p:sp>
+        <p:nvSpPr>
+          <p:cNvPr id="19" name="Rounded Rectangle 18"/>
+          <p:cNvSpPr/>
+          <p:nvPr/>
+        </p:nvSpPr>
+        <p:spPr>
+          <a:xfrm>
+            <a:off x="8366760" y="3218688"/>
+            <a:ext cx="2468880" cy="786384"/>
+          </a:xfrm>
+          <a:prstGeom prst="roundRect">
+            <a:avLst/>
+          </a:prstGeom>
+          <a:solidFill>
+            <a:srgbClr val="FFFFFF"/>
+          </a:solidFill>
+          <a:ln w="11430">
+            <a:solidFill>
+              <a:srgbClr val="CBD5E1"/>
+            </a:solidFill>
+          </a:ln>
+        </p:spPr>
+        <p:style>
+          <a:lnRef idx="1">
+            <a:schemeClr val="accent1"/>
+          </a:lnRef>
+          <a:fillRef idx="3">
+            <a:schemeClr val="accent1"/>
+          </a:fillRef>
+          <a:effectRef idx="2">
+            <a:schemeClr val="accent1"/>
+          </a:effectRef>
+          <a:fontRef idx="minor">
+            <a:schemeClr val="lt1"/>
+          </a:fontRef>
+        </p:style>
+        <p:txBody>
+          <a:bodyPr rtlCol="0" anchor="ctr"/>
+          <a:lstStyle/>
+          <a:p>
+            <a:pPr algn="ctr"/>
+          </a:p>
+        </p:txBody>
+      </p:sp>
+      <p:sp>
+        <p:nvSpPr>
+          <p:cNvPr id="20" name="TextBox 19"/>
+          <p:cNvSpPr txBox="1"/>
+          <p:nvPr/>
+        </p:nvSpPr>
+        <p:spPr>
+          <a:xfrm>
+            <a:off x="8513064" y="3392424"/>
+            <a:ext cx="2176272" cy="347472"/>
+          </a:xfrm>
+          <a:prstGeom prst="rect">
+            <a:avLst/>
+          </a:prstGeom>
+          <a:noFill/>
+        </p:spPr>
+        <p:txBody>
+          <a:bodyPr wrap="square" lIns="0" rIns="0" tIns="0" bIns="0">
+            <a:spAutoFit/>
+          </a:bodyPr>
+          <a:lstStyle/>
+          <a:p>
+            <a:pPr algn="ctr"/>
+            <a:r>
+              <a:rPr sz="1200" b="1">
+                <a:solidFill>
+                  <a:srgbClr val="111827"/>
+                </a:solidFill>
+                <a:latin typeface="Arial"/>
+              </a:rPr>
+              <a:t>Pair talk</a:t>
+            </a:r>
+          </a:p>
+        </p:txBody>
+      </p:sp>
+      <p:cxnSp>
+        <p:nvCxnSpPr>
+          <p:cNvPr id="21" name="Connector 20"/>
+          <p:cNvCxnSpPr/>
+          <p:nvPr/>
+        </p:nvCxnSpPr>
+        <p:spPr>
+          <a:xfrm flipH="1">
+            <a:off x="2697480" y="4315968"/>
+            <a:ext cx="3406140" cy="1170432"/>
+          </a:xfrm>
+          <a:prstGeom prst="line">
+            <a:avLst/>
+          </a:prstGeom>
+          <a:ln w="20320">
+            <a:solidFill>
+              <a:srgbClr val="1D4ED8"/>
+            </a:solidFill>
+          </a:ln>
+        </p:spPr>
+        <p:style>
+          <a:lnRef idx="2">
+            <a:schemeClr val="accent1"/>
+          </a:lnRef>
+          <a:fillRef idx="0">
+            <a:schemeClr val="accent1"/>
+          </a:fillRef>
+          <a:effectRef idx="1">
+            <a:schemeClr val="accent1"/>
+          </a:effectRef>
+          <a:fontRef idx="minor">
+            <a:schemeClr val="tx1"/>
+          </a:fontRef>
+        </p:style>
+      </p:cxnSp>
+      <p:sp>
+        <p:nvSpPr>
+          <p:cNvPr id="22" name="Rounded Rectangle 21"/>
+          <p:cNvSpPr/>
+          <p:nvPr/>
+        </p:nvSpPr>
+        <p:spPr>
+          <a:xfrm>
+            <a:off x="1463040" y="5093208"/>
+            <a:ext cx="2468880" cy="786384"/>
+          </a:xfrm>
+          <a:prstGeom prst="roundRect">
+            <a:avLst/>
+          </a:prstGeom>
+          <a:solidFill>
+            <a:srgbClr val="FFFFFF"/>
+          </a:solidFill>
+          <a:ln w="11430">
+            <a:solidFill>
+              <a:srgbClr val="CBD5E1"/>
+            </a:solidFill>
+          </a:ln>
+        </p:spPr>
+        <p:style>
+          <a:lnRef idx="1">
+            <a:schemeClr val="accent1"/>
+          </a:lnRef>
+          <a:fillRef idx="3">
+            <a:schemeClr val="accent1"/>
+          </a:fillRef>
+          <a:effectRef idx="2">
+            <a:schemeClr val="accent1"/>
+          </a:effectRef>
+          <a:fontRef idx="minor">
+            <a:schemeClr val="lt1"/>
+          </a:fontRef>
+        </p:style>
+        <p:txBody>
+          <a:bodyPr rtlCol="0" anchor="ctr"/>
+          <a:lstStyle/>
+          <a:p>
+            <a:pPr algn="ctr"/>
+          </a:p>
+        </p:txBody>
+      </p:sp>
+      <p:sp>
+        <p:nvSpPr>
+          <p:cNvPr id="23" name="TextBox 22"/>
+          <p:cNvSpPr txBox="1"/>
+          <p:nvPr/>
+        </p:nvSpPr>
+        <p:spPr>
+          <a:xfrm>
+            <a:off x="1609344" y="5266944"/>
+            <a:ext cx="2176272" cy="347472"/>
+          </a:xfrm>
+          <a:prstGeom prst="rect">
+            <a:avLst/>
+          </a:prstGeom>
+          <a:noFill/>
+        </p:spPr>
+        <p:txBody>
+          <a:bodyPr wrap="square" lIns="0" rIns="0" tIns="0" bIns="0">
+            <a:spAutoFit/>
+          </a:bodyPr>
+          <a:lstStyle/>
+          <a:p>
+            <a:pPr algn="ctr"/>
+            <a:r>
+              <a:rPr sz="1200" b="1">
+                <a:solidFill>
+                  <a:srgbClr val="111827"/>
+                </a:solidFill>
+                <a:latin typeface="Arial"/>
+              </a:rPr>
+              <a:t>Share one idea</a:t>
             </a:r>
           </a:p>
         </p:txBody>
@@ -6622,16 +6696,16 @@
         </p:nvSpPr>
         <p:spPr>
           <a:xfrm>
-            <a:off x="777240" y="1828800"/>
-            <a:ext cx="3337560" cy="4160520"/>
+            <a:off x="777240" y="1755648"/>
+            <a:ext cx="10652760" cy="4480560"/>
           </a:xfrm>
           <a:prstGeom prst="roundRect">
             <a:avLst/>
           </a:prstGeom>
           <a:solidFill>
-            <a:srgbClr val="FFF7E0"/>
-          </a:solidFill>
-          <a:ln w="19050">
+            <a:srgbClr val="FFFFFF"/>
+          </a:solidFill>
+          <a:ln w="17145">
             <a:solidFill>
               <a:srgbClr val="087490"/>
             </a:solidFill>
@@ -6652,247 +6726,10 @@
           </a:fontRef>
         </p:style>
         <p:txBody>
-          <a:bodyPr rtlCol="0" anchor="ctr"/>
-          <a:lstStyle/>
-          <a:p>
-            <a:pPr algn="ctr"/>
-          </a:p>
-        </p:txBody>
-      </p:sp>
-      <p:sp>
-        <p:nvSpPr>
-          <p:cNvPr id="12" name="Oval 11"/>
-          <p:cNvSpPr/>
-          <p:nvPr/>
-        </p:nvSpPr>
-        <p:spPr>
-          <a:xfrm>
-            <a:off x="2230221" y="2610612"/>
-            <a:ext cx="431596" cy="329184"/>
-          </a:xfrm>
-          <a:prstGeom prst="ellipse">
-            <a:avLst/>
-          </a:prstGeom>
-          <a:solidFill>
-            <a:srgbClr val="FFF7E0"/>
-          </a:solidFill>
-          <a:ln w="10160">
-            <a:solidFill>
-              <a:srgbClr val="087490"/>
-            </a:solidFill>
-          </a:ln>
-        </p:spPr>
-        <p:style>
-          <a:lnRef idx="1">
-            <a:schemeClr val="accent1"/>
-          </a:lnRef>
-          <a:fillRef idx="3">
-            <a:schemeClr val="accent1"/>
-          </a:fillRef>
-          <a:effectRef idx="2">
-            <a:schemeClr val="accent1"/>
-          </a:effectRef>
-          <a:fontRef idx="minor">
-            <a:schemeClr val="lt1"/>
-          </a:fontRef>
-        </p:style>
-        <p:txBody>
-          <a:bodyPr rtlCol="0" anchor="ctr"/>
-          <a:lstStyle/>
-          <a:p>
-            <a:pPr algn="ctr"/>
-          </a:p>
-        </p:txBody>
-      </p:sp>
-      <p:sp>
-        <p:nvSpPr>
-          <p:cNvPr id="13" name="Rounded Rectangle 12"/>
-          <p:cNvSpPr/>
-          <p:nvPr/>
-        </p:nvSpPr>
-        <p:spPr>
-          <a:xfrm>
-            <a:off x="2068372" y="2980944"/>
-            <a:ext cx="755294" cy="864108"/>
-          </a:xfrm>
-          <a:prstGeom prst="roundRect">
-            <a:avLst/>
-          </a:prstGeom>
-          <a:solidFill>
-            <a:srgbClr val="ECFDF5"/>
-          </a:solidFill>
-          <a:ln w="10160">
-            <a:solidFill>
-              <a:srgbClr val="087490"/>
-            </a:solidFill>
-          </a:ln>
-        </p:spPr>
-        <p:style>
-          <a:lnRef idx="1">
-            <a:schemeClr val="accent1"/>
-          </a:lnRef>
-          <a:fillRef idx="3">
-            <a:schemeClr val="accent1"/>
-          </a:fillRef>
-          <a:effectRef idx="2">
-            <a:schemeClr val="accent1"/>
-          </a:effectRef>
-          <a:fontRef idx="minor">
-            <a:schemeClr val="lt1"/>
-          </a:fontRef>
-        </p:style>
-        <p:txBody>
-          <a:bodyPr rtlCol="0" anchor="ctr"/>
-          <a:lstStyle/>
-          <a:p>
-            <a:pPr algn="ctr"/>
-          </a:p>
-        </p:txBody>
-      </p:sp>
-      <p:sp>
-        <p:nvSpPr>
-          <p:cNvPr id="14" name="Oval 13"/>
-          <p:cNvSpPr/>
-          <p:nvPr/>
-        </p:nvSpPr>
-        <p:spPr>
-          <a:xfrm>
-            <a:off x="2230221" y="3186684"/>
-            <a:ext cx="431596" cy="246888"/>
-          </a:xfrm>
-          <a:prstGeom prst="ellipse">
-            <a:avLst/>
-          </a:prstGeom>
-          <a:solidFill>
-            <a:srgbClr val="D90000"/>
-          </a:solidFill>
-          <a:ln>
-            <a:noFill/>
-          </a:ln>
-        </p:spPr>
-        <p:style>
-          <a:lnRef idx="1">
-            <a:schemeClr val="accent1"/>
-          </a:lnRef>
-          <a:fillRef idx="3">
-            <a:schemeClr val="accent1"/>
-          </a:fillRef>
-          <a:effectRef idx="2">
-            <a:schemeClr val="accent1"/>
-          </a:effectRef>
-          <a:fontRef idx="minor">
-            <a:schemeClr val="lt1"/>
-          </a:fontRef>
-        </p:style>
-        <p:txBody>
-          <a:bodyPr rtlCol="0" anchor="ctr"/>
-          <a:lstStyle/>
-          <a:p>
-            <a:pPr algn="ctr"/>
-          </a:p>
-        </p:txBody>
-      </p:sp>
-      <p:sp>
-        <p:nvSpPr>
-          <p:cNvPr id="15" name="Rectangle 14"/>
-          <p:cNvSpPr/>
-          <p:nvPr/>
-        </p:nvSpPr>
-        <p:spPr>
-          <a:xfrm>
-            <a:off x="1690725" y="3268980"/>
-            <a:ext cx="1510588" cy="82296"/>
-          </a:xfrm>
-          <a:prstGeom prst="rect">
-            <a:avLst/>
-          </a:prstGeom>
-          <a:solidFill>
-            <a:srgbClr val="087490"/>
-          </a:solidFill>
-          <a:ln>
-            <a:noFill/>
-          </a:ln>
-        </p:spPr>
-        <p:style>
-          <a:lnRef idx="1">
-            <a:schemeClr val="accent1"/>
-          </a:lnRef>
-          <a:fillRef idx="3">
-            <a:schemeClr val="accent1"/>
-          </a:fillRef>
-          <a:effectRef idx="2">
-            <a:schemeClr val="accent1"/>
-          </a:effectRef>
-          <a:fontRef idx="minor">
-            <a:schemeClr val="lt1"/>
-          </a:fontRef>
-        </p:style>
-        <p:txBody>
-          <a:bodyPr rtlCol="0" anchor="ctr"/>
-          <a:lstStyle/>
-          <a:p>
-            <a:pPr algn="ctr"/>
-          </a:p>
-        </p:txBody>
-      </p:sp>
-      <p:sp>
-        <p:nvSpPr>
-          <p:cNvPr id="16" name="TextBox 15"/>
-          <p:cNvSpPr txBox="1"/>
-          <p:nvPr/>
-        </p:nvSpPr>
-        <p:spPr>
-          <a:xfrm>
-            <a:off x="1097280" y="4041648"/>
-            <a:ext cx="2697480" cy="228600"/>
-          </a:xfrm>
-          <a:prstGeom prst="rect">
-            <a:avLst/>
-          </a:prstGeom>
-          <a:noFill/>
-        </p:spPr>
-        <p:txBody>
-          <a:bodyPr wrap="square" lIns="0" rIns="0" tIns="0" bIns="0">
-            <a:spAutoFit/>
-          </a:bodyPr>
-          <a:lstStyle/>
-          <a:p>
-            <a:pPr algn="ctr"/>
-            <a:r>
-              <a:rPr sz="1000" b="0">
-                <a:solidFill>
-                  <a:srgbClr val="475569"/>
-                </a:solidFill>
-                <a:latin typeface="Arial"/>
-              </a:rPr>
-              <a:t>Integrated Science</a:t>
-            </a:r>
-          </a:p>
-        </p:txBody>
-      </p:sp>
-      <p:sp>
-        <p:nvSpPr>
-          <p:cNvPr id="17" name="TextBox 16"/>
-          <p:cNvSpPr txBox="1"/>
-          <p:nvPr/>
-        </p:nvSpPr>
-        <p:spPr>
-          <a:xfrm>
-            <a:off x="987552" y="4617720"/>
-            <a:ext cx="2907792" cy="256032"/>
-          </a:xfrm>
-          <a:prstGeom prst="rect">
-            <a:avLst/>
-          </a:prstGeom>
-          <a:noFill/>
-        </p:spPr>
-        <p:txBody>
-          <a:bodyPr wrap="square" lIns="0" rIns="0" tIns="0" bIns="0">
-            <a:spAutoFit/>
-          </a:bodyPr>
-          <a:lstStyle/>
-          <a:p>
-            <a:pPr algn="ctr"/>
+          <a:bodyPr rtlCol="0" anchor="t" wrap="square" lIns="101600" rIns="101600" tIns="101600" bIns="38100"/>
+          <a:lstStyle/>
+          <a:p>
+            <a:pPr algn="l"/>
             <a:r>
               <a:rPr sz="1200" b="1">
                 <a:solidFill>
@@ -6900,21 +6737,21 @@
                 </a:solidFill>
                 <a:latin typeface="Arial"/>
               </a:rPr>
-              <a:t>KEY IDEA</a:t>
-            </a:r>
-          </a:p>
-        </p:txBody>
-      </p:sp>
-      <p:sp>
-        <p:nvSpPr>
-          <p:cNvPr id="18" name="TextBox 17"/>
+              <a:t>CONTENT MAP</a:t>
+            </a:r>
+          </a:p>
+        </p:txBody>
+      </p:sp>
+      <p:sp>
+        <p:nvSpPr>
+          <p:cNvPr id="12" name="TextBox 11"/>
           <p:cNvSpPr txBox="1"/>
           <p:nvPr/>
         </p:nvSpPr>
         <p:spPr>
           <a:xfrm>
-            <a:off x="960120" y="4919472"/>
-            <a:ext cx="2971800" cy="685800"/>
+            <a:off x="1417319" y="2322576"/>
+            <a:ext cx="9372600" cy="411480"/>
           </a:xfrm>
           <a:prstGeom prst="rect">
             <a:avLst/>
@@ -6929,27 +6766,152 @@
           <a:p>
             <a:pPr algn="ctr"/>
             <a:r>
-              <a:rPr sz="1500" b="1">
+              <a:rPr sz="1800" b="1">
                 <a:solidFill>
                   <a:srgbClr val="111827"/>
                 </a:solidFill>
                 <a:latin typeface="Arial"/>
               </a:rPr>
-              <a:t>Key idea: Prior knowledge activation regarding Term 1 Science practicals (Skeleton</a:t>
-            </a:r>
-          </a:p>
-        </p:txBody>
-      </p:sp>
-      <p:sp>
-        <p:nvSpPr>
-          <p:cNvPr id="19" name="Rounded Rectangle 18"/>
+              <a:t>Prior knowledge activation regarding Term 1</a:t>
+            </a:r>
+          </a:p>
+        </p:txBody>
+      </p:sp>
+      <p:sp>
+        <p:nvSpPr>
+          <p:cNvPr id="13" name="Oval 12"/>
           <p:cNvSpPr/>
           <p:nvPr/>
         </p:nvSpPr>
         <p:spPr>
           <a:xfrm>
-            <a:off x="4572000" y="1874519"/>
-            <a:ext cx="6812280" cy="932688"/>
+            <a:off x="5756148" y="3355848"/>
+            <a:ext cx="694944" cy="694944"/>
+          </a:xfrm>
+          <a:prstGeom prst="ellipse">
+            <a:avLst/>
+          </a:prstGeom>
+          <a:solidFill>
+            <a:srgbClr val="FCD116"/>
+          </a:solidFill>
+          <a:ln w="15240">
+            <a:solidFill>
+              <a:srgbClr val="111827"/>
+            </a:solidFill>
+          </a:ln>
+        </p:spPr>
+        <p:style>
+          <a:lnRef idx="1">
+            <a:schemeClr val="accent1"/>
+          </a:lnRef>
+          <a:fillRef idx="3">
+            <a:schemeClr val="accent1"/>
+          </a:fillRef>
+          <a:effectRef idx="2">
+            <a:schemeClr val="accent1"/>
+          </a:effectRef>
+          <a:fontRef idx="minor">
+            <a:schemeClr val="lt1"/>
+          </a:fontRef>
+        </p:style>
+        <p:txBody>
+          <a:bodyPr rtlCol="0" anchor="ctr"/>
+          <a:lstStyle/>
+          <a:p>
+            <a:pPr algn="ctr"/>
+          </a:p>
+        </p:txBody>
+      </p:sp>
+      <p:sp>
+        <p:nvSpPr>
+          <p:cNvPr id="14" name="Rounded Rectangle 13"/>
+          <p:cNvSpPr/>
+          <p:nvPr/>
+        </p:nvSpPr>
+        <p:spPr>
+          <a:xfrm>
+            <a:off x="5628131" y="4078224"/>
+            <a:ext cx="950976" cy="1463040"/>
+          </a:xfrm>
+          <a:prstGeom prst="roundRect">
+            <a:avLst/>
+          </a:prstGeom>
+          <a:solidFill>
+            <a:srgbClr val="ECFDF5"/>
+          </a:solidFill>
+          <a:ln w="17780">
+            <a:solidFill>
+              <a:srgbClr val="087490"/>
+            </a:solidFill>
+          </a:ln>
+        </p:spPr>
+        <p:style>
+          <a:lnRef idx="1">
+            <a:schemeClr val="accent1"/>
+          </a:lnRef>
+          <a:fillRef idx="3">
+            <a:schemeClr val="accent1"/>
+          </a:fillRef>
+          <a:effectRef idx="2">
+            <a:schemeClr val="accent1"/>
+          </a:effectRef>
+          <a:fontRef idx="minor">
+            <a:schemeClr val="lt1"/>
+          </a:fontRef>
+        </p:style>
+        <p:txBody>
+          <a:bodyPr rtlCol="0" anchor="ctr"/>
+          <a:lstStyle/>
+          <a:p>
+            <a:pPr algn="ctr"/>
+          </a:p>
+        </p:txBody>
+      </p:sp>
+      <p:cxnSp>
+        <p:nvCxnSpPr>
+          <p:cNvPr id="15" name="Connector 14"/>
+          <p:cNvCxnSpPr/>
+          <p:nvPr/>
+        </p:nvCxnSpPr>
+        <p:spPr>
+          <a:xfrm flipH="1" flipV="1">
+            <a:off x="2697480" y="3611880"/>
+            <a:ext cx="3406140" cy="704088"/>
+          </a:xfrm>
+          <a:prstGeom prst="line">
+            <a:avLst/>
+          </a:prstGeom>
+          <a:ln w="20320">
+            <a:solidFill>
+              <a:srgbClr val="087490"/>
+            </a:solidFill>
+          </a:ln>
+        </p:spPr>
+        <p:style>
+          <a:lnRef idx="2">
+            <a:schemeClr val="accent1"/>
+          </a:lnRef>
+          <a:fillRef idx="0">
+            <a:schemeClr val="accent1"/>
+          </a:fillRef>
+          <a:effectRef idx="1">
+            <a:schemeClr val="accent1"/>
+          </a:effectRef>
+          <a:fontRef idx="minor">
+            <a:schemeClr val="tx1"/>
+          </a:fontRef>
+        </p:style>
+      </p:cxnSp>
+      <p:sp>
+        <p:nvSpPr>
+          <p:cNvPr id="16" name="Rounded Rectangle 15"/>
+          <p:cNvSpPr/>
+          <p:nvPr/>
+        </p:nvSpPr>
+        <p:spPr>
+          <a:xfrm>
+            <a:off x="1463040" y="3218688"/>
+            <a:ext cx="2468880" cy="786384"/>
           </a:xfrm>
           <a:prstGeom prst="roundRect">
             <a:avLst/>
@@ -6987,57 +6949,14 @@
       </p:sp>
       <p:sp>
         <p:nvSpPr>
-          <p:cNvPr id="20" name="Rectangle 19"/>
-          <p:cNvSpPr/>
-          <p:nvPr/>
-        </p:nvSpPr>
-        <p:spPr>
-          <a:xfrm>
-            <a:off x="4572000" y="1874519"/>
-            <a:ext cx="566928" cy="932688"/>
-          </a:xfrm>
-          <a:prstGeom prst="rect">
-            <a:avLst/>
-          </a:prstGeom>
-          <a:solidFill>
-            <a:srgbClr val="087490"/>
-          </a:solidFill>
-          <a:ln>
-            <a:noFill/>
-          </a:ln>
-        </p:spPr>
-        <p:style>
-          <a:lnRef idx="1">
-            <a:schemeClr val="accent1"/>
-          </a:lnRef>
-          <a:fillRef idx="3">
-            <a:schemeClr val="accent1"/>
-          </a:fillRef>
-          <a:effectRef idx="2">
-            <a:schemeClr val="accent1"/>
-          </a:effectRef>
-          <a:fontRef idx="minor">
-            <a:schemeClr val="lt1"/>
-          </a:fontRef>
-        </p:style>
-        <p:txBody>
-          <a:bodyPr rtlCol="0" anchor="ctr"/>
-          <a:lstStyle/>
-          <a:p>
-            <a:pPr algn="ctr"/>
-          </a:p>
-        </p:txBody>
-      </p:sp>
-      <p:sp>
-        <p:nvSpPr>
-          <p:cNvPr id="21" name="TextBox 20"/>
+          <p:cNvPr id="17" name="TextBox 16"/>
           <p:cNvSpPr txBox="1"/>
           <p:nvPr/>
         </p:nvSpPr>
         <p:spPr>
           <a:xfrm>
-            <a:off x="4572000" y="2221991"/>
-            <a:ext cx="566928" cy="237744"/>
+            <a:off x="1609344" y="3392424"/>
+            <a:ext cx="2176272" cy="347472"/>
           </a:xfrm>
           <a:prstGeom prst="rect">
             <a:avLst/>
@@ -7052,61 +6971,62 @@
           <a:p>
             <a:pPr algn="ctr"/>
             <a:r>
-              <a:rPr sz="1400" b="1">
-                <a:solidFill>
-                  <a:srgbClr val="FFFFFF"/>
-                </a:solidFill>
-                <a:latin typeface="Arial"/>
-              </a:rPr>
-              <a:t>1</a:t>
-            </a:r>
-          </a:p>
-        </p:txBody>
-      </p:sp>
-      <p:sp>
-        <p:nvSpPr>
-          <p:cNvPr id="22" name="TextBox 21"/>
-          <p:cNvSpPr txBox="1"/>
-          <p:nvPr/>
-        </p:nvSpPr>
-        <p:spPr>
-          <a:xfrm>
-            <a:off x="5358384" y="2039112"/>
-            <a:ext cx="5788152" cy="694944"/>
-          </a:xfrm>
-          <a:prstGeom prst="rect">
-            <a:avLst/>
-          </a:prstGeom>
-          <a:noFill/>
-        </p:spPr>
-        <p:txBody>
-          <a:bodyPr wrap="square" lIns="0" rIns="0" tIns="0" bIns="0">
-            <a:spAutoFit/>
-          </a:bodyPr>
-          <a:lstStyle/>
-          <a:p>
-            <a:r>
-              <a:rPr sz="1600" b="1">
+              <a:rPr sz="1200" b="1">
                 <a:solidFill>
                   <a:srgbClr val="111827"/>
                 </a:solidFill>
                 <a:latin typeface="Arial"/>
               </a:rPr>
-              <a:t>Reviewing the Muscular-Skeletal model.</a:t>
-            </a:r>
-          </a:p>
-        </p:txBody>
-      </p:sp>
-      <p:sp>
-        <p:nvSpPr>
-          <p:cNvPr id="23" name="Rounded Rectangle 22"/>
+              <a:t>Reviewing the Muscular-Skeletal model</a:t>
+            </a:r>
+          </a:p>
+        </p:txBody>
+      </p:sp>
+      <p:cxnSp>
+        <p:nvCxnSpPr>
+          <p:cNvPr id="18" name="Connector 17"/>
+          <p:cNvCxnSpPr/>
+          <p:nvPr/>
+        </p:nvCxnSpPr>
+        <p:spPr>
+          <a:xfrm flipV="1">
+            <a:off x="6103620" y="3611880"/>
+            <a:ext cx="3497580" cy="704088"/>
+          </a:xfrm>
+          <a:prstGeom prst="line">
+            <a:avLst/>
+          </a:prstGeom>
+          <a:ln w="20320">
+            <a:solidFill>
+              <a:srgbClr val="087490"/>
+            </a:solidFill>
+          </a:ln>
+        </p:spPr>
+        <p:style>
+          <a:lnRef idx="2">
+            <a:schemeClr val="accent1"/>
+          </a:lnRef>
+          <a:fillRef idx="0">
+            <a:schemeClr val="accent1"/>
+          </a:fillRef>
+          <a:effectRef idx="1">
+            <a:schemeClr val="accent1"/>
+          </a:effectRef>
+          <a:fontRef idx="minor">
+            <a:schemeClr val="tx1"/>
+          </a:fontRef>
+        </p:style>
+      </p:cxnSp>
+      <p:sp>
+        <p:nvSpPr>
+          <p:cNvPr id="19" name="Rounded Rectangle 18"/>
           <p:cNvSpPr/>
           <p:nvPr/>
         </p:nvSpPr>
         <p:spPr>
           <a:xfrm>
-            <a:off x="4572000" y="3108960"/>
-            <a:ext cx="6812280" cy="932688"/>
+            <a:off x="8366760" y="3218688"/>
+            <a:ext cx="2468880" cy="786384"/>
           </a:xfrm>
           <a:prstGeom prst="roundRect">
             <a:avLst/>
@@ -7144,57 +7064,14 @@
       </p:sp>
       <p:sp>
         <p:nvSpPr>
-          <p:cNvPr id="24" name="Rectangle 23"/>
-          <p:cNvSpPr/>
-          <p:nvPr/>
-        </p:nvSpPr>
-        <p:spPr>
-          <a:xfrm>
-            <a:off x="4572000" y="3108960"/>
-            <a:ext cx="566928" cy="932688"/>
-          </a:xfrm>
-          <a:prstGeom prst="rect">
-            <a:avLst/>
-          </a:prstGeom>
-          <a:solidFill>
-            <a:srgbClr val="087490"/>
-          </a:solidFill>
-          <a:ln>
-            <a:noFill/>
-          </a:ln>
-        </p:spPr>
-        <p:style>
-          <a:lnRef idx="1">
-            <a:schemeClr val="accent1"/>
-          </a:lnRef>
-          <a:fillRef idx="3">
-            <a:schemeClr val="accent1"/>
-          </a:fillRef>
-          <a:effectRef idx="2">
-            <a:schemeClr val="accent1"/>
-          </a:effectRef>
-          <a:fontRef idx="minor">
-            <a:schemeClr val="lt1"/>
-          </a:fontRef>
-        </p:style>
-        <p:txBody>
-          <a:bodyPr rtlCol="0" anchor="ctr"/>
-          <a:lstStyle/>
-          <a:p>
-            <a:pPr algn="ctr"/>
-          </a:p>
-        </p:txBody>
-      </p:sp>
-      <p:sp>
-        <p:nvSpPr>
-          <p:cNvPr id="25" name="TextBox 24"/>
+          <p:cNvPr id="20" name="TextBox 19"/>
           <p:cNvSpPr txBox="1"/>
           <p:nvPr/>
         </p:nvSpPr>
         <p:spPr>
           <a:xfrm>
-            <a:off x="4572000" y="3456432"/>
-            <a:ext cx="566928" cy="237744"/>
+            <a:off x="8513064" y="3392424"/>
+            <a:ext cx="2176272" cy="347472"/>
           </a:xfrm>
           <a:prstGeom prst="rect">
             <a:avLst/>
@@ -7209,61 +7086,62 @@
           <a:p>
             <a:pPr algn="ctr"/>
             <a:r>
-              <a:rPr sz="1400" b="1">
-                <a:solidFill>
-                  <a:srgbClr val="FFFFFF"/>
-                </a:solidFill>
-                <a:latin typeface="Arial"/>
-              </a:rPr>
-              <a:t>2</a:t>
-            </a:r>
-          </a:p>
-        </p:txBody>
-      </p:sp>
-      <p:sp>
-        <p:nvSpPr>
-          <p:cNvPr id="26" name="TextBox 25"/>
-          <p:cNvSpPr txBox="1"/>
-          <p:nvPr/>
-        </p:nvSpPr>
-        <p:spPr>
-          <a:xfrm>
-            <a:off x="5358384" y="3273552"/>
-            <a:ext cx="5788152" cy="694944"/>
-          </a:xfrm>
-          <a:prstGeom prst="rect">
-            <a:avLst/>
-          </a:prstGeom>
-          <a:noFill/>
-        </p:spPr>
-        <p:txBody>
-          <a:bodyPr wrap="square" lIns="0" rIns="0" tIns="0" bIns="0">
-            <a:spAutoFit/>
-          </a:bodyPr>
-          <a:lstStyle/>
-          <a:p>
-            <a:r>
-              <a:rPr sz="1400" b="1">
+              <a:rPr sz="1200" b="1">
                 <a:solidFill>
                   <a:srgbClr val="111827"/>
                 </a:solidFill>
                 <a:latin typeface="Arial"/>
               </a:rPr>
-              <a:t>Recalling the Electricity and Magnetism circuit.</a:t>
-            </a:r>
-          </a:p>
-        </p:txBody>
-      </p:sp>
-      <p:sp>
-        <p:nvSpPr>
-          <p:cNvPr id="27" name="Rounded Rectangle 26"/>
+              <a:t>Recalling the Electricity and Magnetism</a:t>
+            </a:r>
+          </a:p>
+        </p:txBody>
+      </p:sp>
+      <p:cxnSp>
+        <p:nvCxnSpPr>
+          <p:cNvPr id="21" name="Connector 20"/>
+          <p:cNvCxnSpPr/>
+          <p:nvPr/>
+        </p:nvCxnSpPr>
+        <p:spPr>
+          <a:xfrm flipH="1">
+            <a:off x="2697480" y="4315968"/>
+            <a:ext cx="3406140" cy="1170432"/>
+          </a:xfrm>
+          <a:prstGeom prst="line">
+            <a:avLst/>
+          </a:prstGeom>
+          <a:ln w="20320">
+            <a:solidFill>
+              <a:srgbClr val="087490"/>
+            </a:solidFill>
+          </a:ln>
+        </p:spPr>
+        <p:style>
+          <a:lnRef idx="2">
+            <a:schemeClr val="accent1"/>
+          </a:lnRef>
+          <a:fillRef idx="0">
+            <a:schemeClr val="accent1"/>
+          </a:fillRef>
+          <a:effectRef idx="1">
+            <a:schemeClr val="accent1"/>
+          </a:effectRef>
+          <a:fontRef idx="minor">
+            <a:schemeClr val="tx1"/>
+          </a:fontRef>
+        </p:style>
+      </p:cxnSp>
+      <p:sp>
+        <p:nvSpPr>
+          <p:cNvPr id="22" name="Rounded Rectangle 21"/>
           <p:cNvSpPr/>
           <p:nvPr/>
         </p:nvSpPr>
         <p:spPr>
           <a:xfrm>
-            <a:off x="4572000" y="4343400"/>
-            <a:ext cx="6812280" cy="932688"/>
+            <a:off x="1463040" y="5093208"/>
+            <a:ext cx="2468880" cy="786384"/>
           </a:xfrm>
           <a:prstGeom prst="roundRect">
             <a:avLst/>
@@ -7301,57 +7179,14 @@
       </p:sp>
       <p:sp>
         <p:nvSpPr>
-          <p:cNvPr id="28" name="Rectangle 27"/>
-          <p:cNvSpPr/>
-          <p:nvPr/>
-        </p:nvSpPr>
-        <p:spPr>
-          <a:xfrm>
-            <a:off x="4572000" y="4343400"/>
-            <a:ext cx="566928" cy="932688"/>
-          </a:xfrm>
-          <a:prstGeom prst="rect">
-            <a:avLst/>
-          </a:prstGeom>
-          <a:solidFill>
-            <a:srgbClr val="087490"/>
-          </a:solidFill>
-          <a:ln>
-            <a:noFill/>
-          </a:ln>
-        </p:spPr>
-        <p:style>
-          <a:lnRef idx="1">
-            <a:schemeClr val="accent1"/>
-          </a:lnRef>
-          <a:fillRef idx="3">
-            <a:schemeClr val="accent1"/>
-          </a:fillRef>
-          <a:effectRef idx="2">
-            <a:schemeClr val="accent1"/>
-          </a:effectRef>
-          <a:fontRef idx="minor">
-            <a:schemeClr val="lt1"/>
-          </a:fontRef>
-        </p:style>
-        <p:txBody>
-          <a:bodyPr rtlCol="0" anchor="ctr"/>
-          <a:lstStyle/>
-          <a:p>
-            <a:pPr algn="ctr"/>
-          </a:p>
-        </p:txBody>
-      </p:sp>
-      <p:sp>
-        <p:nvSpPr>
-          <p:cNvPr id="29" name="TextBox 28"/>
+          <p:cNvPr id="23" name="TextBox 22"/>
           <p:cNvSpPr txBox="1"/>
           <p:nvPr/>
         </p:nvSpPr>
         <p:spPr>
           <a:xfrm>
-            <a:off x="4572000" y="4690872"/>
-            <a:ext cx="566928" cy="237744"/>
+            <a:off x="1609344" y="5266944"/>
+            <a:ext cx="2176272" cy="347472"/>
           </a:xfrm>
           <a:prstGeom prst="rect">
             <a:avLst/>
@@ -7366,54 +7201,20 @@
           <a:p>
             <a:pPr algn="ctr"/>
             <a:r>
-              <a:rPr sz="1400" b="1">
-                <a:solidFill>
-                  <a:srgbClr val="FFFFFF"/>
-                </a:solidFill>
-                <a:latin typeface="Arial"/>
-              </a:rPr>
-              <a:t>3</a:t>
-            </a:r>
-          </a:p>
-        </p:txBody>
-      </p:sp>
-      <p:sp>
-        <p:nvSpPr>
-          <p:cNvPr id="30" name="TextBox 29"/>
-          <p:cNvSpPr txBox="1"/>
-          <p:nvPr/>
-        </p:nvSpPr>
-        <p:spPr>
-          <a:xfrm>
-            <a:off x="5358384" y="4507992"/>
-            <a:ext cx="5788152" cy="694944"/>
-          </a:xfrm>
-          <a:prstGeom prst="rect">
-            <a:avLst/>
-          </a:prstGeom>
-          <a:noFill/>
-        </p:spPr>
-        <p:txBody>
-          <a:bodyPr wrap="square" lIns="0" rIns="0" tIns="0" bIns="0">
-            <a:spAutoFit/>
-          </a:bodyPr>
-          <a:lstStyle/>
-          <a:p>
-            <a:r>
-              <a:rPr sz="1400" b="1">
+              <a:rPr sz="1200" b="1">
                 <a:solidFill>
                   <a:srgbClr val="111827"/>
                 </a:solidFill>
                 <a:latin typeface="Arial"/>
               </a:rPr>
-              <a:t>Remembering the Energy Resources (biogas/solar) project.</a:t>
-            </a:r>
-          </a:p>
-        </p:txBody>
-      </p:sp>
-      <p:sp>
-        <p:nvSpPr>
-          <p:cNvPr id="31" name="TextBox 30"/>
+              <a:t>Remembering the Energy Resources</a:t>
+            </a:r>
+          </a:p>
+        </p:txBody>
+      </p:sp>
+      <p:sp>
+        <p:nvSpPr>
+          <p:cNvPr id="24" name="TextBox 23"/>
           <p:cNvSpPr txBox="1"/>
           <p:nvPr/>
         </p:nvSpPr>
@@ -7841,18 +7642,18 @@
         </p:nvSpPr>
         <p:spPr>
           <a:xfrm>
-            <a:off x="822960" y="1828800"/>
-            <a:ext cx="7360920" cy="4251960"/>
+            <a:off x="777240" y="1755648"/>
+            <a:ext cx="10652760" cy="4480560"/>
           </a:xfrm>
           <a:prstGeom prst="roundRect">
             <a:avLst/>
           </a:prstGeom>
           <a:solidFill>
-            <a:srgbClr val="1F2937"/>
-          </a:solidFill>
-          <a:ln w="19050">
+            <a:srgbClr val="FFFFFF"/>
+          </a:solidFill>
+          <a:ln w="17145">
             <a:solidFill>
-              <a:srgbClr val="FCD116"/>
+              <a:srgbClr val="D97706"/>
             </a:solidFill>
           </a:ln>
         </p:spPr>
@@ -7871,10 +7672,19 @@
           </a:fontRef>
         </p:style>
         <p:txBody>
-          <a:bodyPr rtlCol="0" anchor="ctr"/>
-          <a:lstStyle/>
-          <a:p>
-            <a:pPr algn="ctr"/>
+          <a:bodyPr rtlCol="0" anchor="t" wrap="square" lIns="101600" rIns="101600" tIns="101600" bIns="38100"/>
+          <a:lstStyle/>
+          <a:p>
+            <a:pPr algn="l"/>
+            <a:r>
+              <a:rPr sz="1200" b="1">
+                <a:solidFill>
+                  <a:srgbClr val="D97706"/>
+                </a:solidFill>
+                <a:latin typeface="Arial"/>
+              </a:rPr>
+              <a:t>MODEL MAP</a:t>
+            </a:r>
           </a:p>
         </p:txBody>
       </p:sp>
@@ -7886,8 +7696,8 @@
         </p:nvSpPr>
         <p:spPr>
           <a:xfrm>
-            <a:off x="1097280" y="2084831"/>
-            <a:ext cx="6812280" cy="256032"/>
+            <a:off x="1417319" y="2322576"/>
+            <a:ext cx="9372600" cy="411480"/>
           </a:xfrm>
           <a:prstGeom prst="rect">
             <a:avLst/>
@@ -7900,414 +7710,457 @@
           </a:bodyPr>
           <a:lstStyle/>
           <a:p>
-            <a:r>
-              <a:rPr sz="1200" b="1">
-                <a:solidFill>
-                  <a:srgbClr val="FCD116"/>
-                </a:solidFill>
-                <a:latin typeface="Arial"/>
-              </a:rPr>
-              <a:t>BOARD MODEL</a:t>
-            </a:r>
-          </a:p>
-        </p:txBody>
-      </p:sp>
-      <p:sp>
-        <p:nvSpPr>
-          <p:cNvPr id="13" name="TextBox 12"/>
-          <p:cNvSpPr txBox="1"/>
-          <p:nvPr/>
-        </p:nvSpPr>
-        <p:spPr>
-          <a:xfrm>
-            <a:off x="1143000" y="2578608"/>
-            <a:ext cx="6583680" cy="347472"/>
-          </a:xfrm>
-          <a:prstGeom prst="rect">
-            <a:avLst/>
-          </a:prstGeom>
-          <a:noFill/>
-        </p:spPr>
-        <p:txBody>
-          <a:bodyPr wrap="square" lIns="0" rIns="0" tIns="0" bIns="0">
-            <a:spAutoFit/>
-          </a:bodyPr>
-          <a:lstStyle/>
-          <a:p>
-            <a:r>
-              <a:rPr sz="1600" b="0">
-                <a:solidFill>
-                  <a:srgbClr val="FFFFFF"/>
-                </a:solidFill>
-                <a:latin typeface="Arial"/>
-              </a:rPr>
-              <a:t>1. Title and Aim (What and Why).</a:t>
-            </a:r>
-          </a:p>
-        </p:txBody>
-      </p:sp>
-      <p:sp>
-        <p:nvSpPr>
-          <p:cNvPr id="14" name="TextBox 13"/>
-          <p:cNvSpPr txBox="1"/>
-          <p:nvPr/>
-        </p:nvSpPr>
-        <p:spPr>
-          <a:xfrm>
-            <a:off x="1143000" y="3154679"/>
-            <a:ext cx="6583680" cy="347472"/>
-          </a:xfrm>
-          <a:prstGeom prst="rect">
-            <a:avLst/>
-          </a:prstGeom>
-          <a:noFill/>
-        </p:spPr>
-        <p:txBody>
-          <a:bodyPr wrap="square" lIns="0" rIns="0" tIns="0" bIns="0">
-            <a:spAutoFit/>
-          </a:bodyPr>
-          <a:lstStyle/>
-          <a:p>
-            <a:r>
-              <a:rPr sz="1600" b="0">
-                <a:solidFill>
-                  <a:srgbClr val="FFFFFF"/>
-                </a:solidFill>
-                <a:latin typeface="Arial"/>
-              </a:rPr>
-              <a:t>2. Apparatus/Materials (The tools).</a:t>
-            </a:r>
-          </a:p>
-        </p:txBody>
-      </p:sp>
-      <p:sp>
-        <p:nvSpPr>
-          <p:cNvPr id="15" name="TextBox 14"/>
-          <p:cNvSpPr txBox="1"/>
-          <p:nvPr/>
-        </p:nvSpPr>
-        <p:spPr>
-          <a:xfrm>
-            <a:off x="1143000" y="3730752"/>
-            <a:ext cx="6583680" cy="347472"/>
-          </a:xfrm>
-          <a:prstGeom prst="rect">
-            <a:avLst/>
-          </a:prstGeom>
-          <a:noFill/>
-        </p:spPr>
-        <p:txBody>
-          <a:bodyPr wrap="square" lIns="0" rIns="0" tIns="0" bIns="0">
-            <a:spAutoFit/>
-          </a:bodyPr>
-          <a:lstStyle/>
-          <a:p>
-            <a:r>
-              <a:rPr sz="1600" b="0">
-                <a:solidFill>
-                  <a:srgbClr val="FFFFFF"/>
-                </a:solidFill>
-                <a:latin typeface="Arial"/>
-              </a:rPr>
-              <a:t>3. Procedure (The steps).</a:t>
-            </a:r>
-          </a:p>
-        </p:txBody>
-      </p:sp>
-      <p:sp>
-        <p:nvSpPr>
-          <p:cNvPr id="16" name="Rounded Rectangle 15"/>
-          <p:cNvSpPr/>
-          <p:nvPr/>
-        </p:nvSpPr>
-        <p:spPr>
-          <a:xfrm>
-            <a:off x="8549640" y="1828800"/>
-            <a:ext cx="2697480" cy="4251960"/>
-          </a:xfrm>
-          <a:prstGeom prst="roundRect">
-            <a:avLst/>
-          </a:prstGeom>
-          <a:solidFill>
-            <a:srgbClr val="FFF7E0"/>
-          </a:solidFill>
-          <a:ln w="16510">
-            <a:solidFill>
-              <a:srgbClr val="D97706"/>
-            </a:solidFill>
-          </a:ln>
-        </p:spPr>
-        <p:style>
-          <a:lnRef idx="1">
-            <a:schemeClr val="accent1"/>
-          </a:lnRef>
-          <a:fillRef idx="3">
-            <a:schemeClr val="accent1"/>
-          </a:fillRef>
-          <a:effectRef idx="2">
-            <a:schemeClr val="accent1"/>
-          </a:effectRef>
-          <a:fontRef idx="minor">
-            <a:schemeClr val="lt1"/>
-          </a:fontRef>
-        </p:style>
-        <p:txBody>
-          <a:bodyPr rtlCol="0" anchor="ctr"/>
-          <a:lstStyle/>
-          <a:p>
-            <a:pPr algn="ctr"/>
-          </a:p>
-        </p:txBody>
-      </p:sp>
-      <p:sp>
-        <p:nvSpPr>
-          <p:cNvPr id="17" name="Oval 16"/>
-          <p:cNvSpPr/>
-          <p:nvPr/>
-        </p:nvSpPr>
-        <p:spPr>
-          <a:xfrm>
-            <a:off x="9748418" y="2636215"/>
-            <a:ext cx="299923" cy="270662"/>
-          </a:xfrm>
-          <a:prstGeom prst="ellipse">
-            <a:avLst/>
-          </a:prstGeom>
-          <a:solidFill>
-            <a:srgbClr val="FFF7E0"/>
-          </a:solidFill>
-          <a:ln w="10160">
-            <a:solidFill>
-              <a:srgbClr val="087490"/>
-            </a:solidFill>
-          </a:ln>
-        </p:spPr>
-        <p:style>
-          <a:lnRef idx="1">
-            <a:schemeClr val="accent1"/>
-          </a:lnRef>
-          <a:fillRef idx="3">
-            <a:schemeClr val="accent1"/>
-          </a:fillRef>
-          <a:effectRef idx="2">
-            <a:schemeClr val="accent1"/>
-          </a:effectRef>
-          <a:fontRef idx="minor">
-            <a:schemeClr val="lt1"/>
-          </a:fontRef>
-        </p:style>
-        <p:txBody>
-          <a:bodyPr rtlCol="0" anchor="ctr"/>
-          <a:lstStyle/>
-          <a:p>
-            <a:pPr algn="ctr"/>
-          </a:p>
-        </p:txBody>
-      </p:sp>
-      <p:sp>
-        <p:nvSpPr>
-          <p:cNvPr id="18" name="Rounded Rectangle 17"/>
-          <p:cNvSpPr/>
-          <p:nvPr/>
-        </p:nvSpPr>
-        <p:spPr>
-          <a:xfrm>
-            <a:off x="9635947" y="2940710"/>
-            <a:ext cx="524865" cy="710488"/>
-          </a:xfrm>
-          <a:prstGeom prst="roundRect">
-            <a:avLst/>
-          </a:prstGeom>
-          <a:solidFill>
-            <a:srgbClr val="ECFDF5"/>
-          </a:solidFill>
-          <a:ln w="10160">
-            <a:solidFill>
-              <a:srgbClr val="087490"/>
-            </a:solidFill>
-          </a:ln>
-        </p:spPr>
-        <p:style>
-          <a:lnRef idx="1">
-            <a:schemeClr val="accent1"/>
-          </a:lnRef>
-          <a:fillRef idx="3">
-            <a:schemeClr val="accent1"/>
-          </a:fillRef>
-          <a:effectRef idx="2">
-            <a:schemeClr val="accent1"/>
-          </a:effectRef>
-          <a:fontRef idx="minor">
-            <a:schemeClr val="lt1"/>
-          </a:fontRef>
-        </p:style>
-        <p:txBody>
-          <a:bodyPr rtlCol="0" anchor="ctr"/>
-          <a:lstStyle/>
-          <a:p>
-            <a:pPr algn="ctr"/>
-          </a:p>
-        </p:txBody>
-      </p:sp>
-      <p:sp>
-        <p:nvSpPr>
-          <p:cNvPr id="19" name="Oval 18"/>
-          <p:cNvSpPr/>
-          <p:nvPr/>
-        </p:nvSpPr>
-        <p:spPr>
-          <a:xfrm>
-            <a:off x="9748418" y="3109874"/>
-            <a:ext cx="299923" cy="202996"/>
-          </a:xfrm>
-          <a:prstGeom prst="ellipse">
-            <a:avLst/>
-          </a:prstGeom>
-          <a:solidFill>
-            <a:srgbClr val="D90000"/>
-          </a:solidFill>
-          <a:ln>
-            <a:noFill/>
-          </a:ln>
-        </p:spPr>
-        <p:style>
-          <a:lnRef idx="1">
-            <a:schemeClr val="accent1"/>
-          </a:lnRef>
-          <a:fillRef idx="3">
-            <a:schemeClr val="accent1"/>
-          </a:fillRef>
-          <a:effectRef idx="2">
-            <a:schemeClr val="accent1"/>
-          </a:effectRef>
-          <a:fontRef idx="minor">
-            <a:schemeClr val="lt1"/>
-          </a:fontRef>
-        </p:style>
-        <p:txBody>
-          <a:bodyPr rtlCol="0" anchor="ctr"/>
-          <a:lstStyle/>
-          <a:p>
-            <a:pPr algn="ctr"/>
-          </a:p>
-        </p:txBody>
-      </p:sp>
-      <p:sp>
-        <p:nvSpPr>
-          <p:cNvPr id="20" name="Rectangle 19"/>
-          <p:cNvSpPr/>
-          <p:nvPr/>
-        </p:nvSpPr>
-        <p:spPr>
-          <a:xfrm>
-            <a:off x="9373514" y="3177539"/>
-            <a:ext cx="1049731" cy="67665"/>
-          </a:xfrm>
-          <a:prstGeom prst="rect">
-            <a:avLst/>
-          </a:prstGeom>
-          <a:solidFill>
-            <a:srgbClr val="087490"/>
-          </a:solidFill>
-          <a:ln>
-            <a:noFill/>
-          </a:ln>
-        </p:spPr>
-        <p:style>
-          <a:lnRef idx="1">
-            <a:schemeClr val="accent1"/>
-          </a:lnRef>
-          <a:fillRef idx="3">
-            <a:schemeClr val="accent1"/>
-          </a:fillRef>
-          <a:effectRef idx="2">
-            <a:schemeClr val="accent1"/>
-          </a:effectRef>
-          <a:fontRef idx="minor">
-            <a:schemeClr val="lt1"/>
-          </a:fontRef>
-        </p:style>
-        <p:txBody>
-          <a:bodyPr rtlCol="0" anchor="ctr"/>
-          <a:lstStyle/>
-          <a:p>
-            <a:pPr algn="ctr"/>
-          </a:p>
-        </p:txBody>
-      </p:sp>
-      <p:sp>
-        <p:nvSpPr>
-          <p:cNvPr id="21" name="TextBox 20"/>
-          <p:cNvSpPr txBox="1"/>
-          <p:nvPr/>
-        </p:nvSpPr>
-        <p:spPr>
-          <a:xfrm>
-            <a:off x="8961120" y="3767328"/>
-            <a:ext cx="1874519" cy="228600"/>
-          </a:xfrm>
-          <a:prstGeom prst="rect">
-            <a:avLst/>
-          </a:prstGeom>
-          <a:noFill/>
-        </p:spPr>
-        <p:txBody>
-          <a:bodyPr wrap="square" lIns="0" rIns="0" tIns="0" bIns="0">
-            <a:spAutoFit/>
-          </a:bodyPr>
-          <a:lstStyle/>
-          <a:p>
-            <a:pPr algn="ctr"/>
-            <a:r>
-              <a:rPr sz="1000" b="0">
-                <a:solidFill>
-                  <a:srgbClr val="475569"/>
-                </a:solidFill>
-                <a:latin typeface="Arial"/>
-              </a:rPr>
-              <a:t>Integrated Science</a:t>
-            </a:r>
-          </a:p>
-        </p:txBody>
-      </p:sp>
-      <p:sp>
-        <p:nvSpPr>
-          <p:cNvPr id="22" name="TextBox 21"/>
-          <p:cNvSpPr txBox="1"/>
-          <p:nvPr/>
-        </p:nvSpPr>
-        <p:spPr>
-          <a:xfrm>
-            <a:off x="8869680" y="4526280"/>
-            <a:ext cx="2057400" cy="804672"/>
-          </a:xfrm>
-          <a:prstGeom prst="rect">
-            <a:avLst/>
-          </a:prstGeom>
-          <a:noFill/>
-        </p:spPr>
-        <p:txBody>
-          <a:bodyPr wrap="square" lIns="0" rIns="0" tIns="0" bIns="0">
-            <a:spAutoFit/>
-          </a:bodyPr>
-          <a:lstStyle/>
-          <a:p>
-            <a:pPr algn="ctr"/>
-            <a:r>
-              <a:rPr sz="1400" b="1">
+            <a:pPr algn="ctr"/>
+            <a:r>
+              <a:rPr sz="1800" b="1">
                 <a:solidFill>
                   <a:srgbClr val="111827"/>
                 </a:solidFill>
                 <a:latin typeface="Arial"/>
               </a:rPr>
-              <a:t>Teacher models first. Learners copy the pattern, then explain the step.</a:t>
-            </a:r>
+              <a:t>Worked example</a:t>
+            </a:r>
+          </a:p>
+        </p:txBody>
+      </p:sp>
+      <p:sp>
+        <p:nvSpPr>
+          <p:cNvPr id="13" name="Oval 12"/>
+          <p:cNvSpPr/>
+          <p:nvPr/>
+        </p:nvSpPr>
+        <p:spPr>
+          <a:xfrm>
+            <a:off x="5756148" y="3355848"/>
+            <a:ext cx="694944" cy="694944"/>
+          </a:xfrm>
+          <a:prstGeom prst="ellipse">
+            <a:avLst/>
+          </a:prstGeom>
+          <a:solidFill>
+            <a:srgbClr val="FCD116"/>
+          </a:solidFill>
+          <a:ln w="15240">
+            <a:solidFill>
+              <a:srgbClr val="111827"/>
+            </a:solidFill>
+          </a:ln>
+        </p:spPr>
+        <p:style>
+          <a:lnRef idx="1">
+            <a:schemeClr val="accent1"/>
+          </a:lnRef>
+          <a:fillRef idx="3">
+            <a:schemeClr val="accent1"/>
+          </a:fillRef>
+          <a:effectRef idx="2">
+            <a:schemeClr val="accent1"/>
+          </a:effectRef>
+          <a:fontRef idx="minor">
+            <a:schemeClr val="lt1"/>
+          </a:fontRef>
+        </p:style>
+        <p:txBody>
+          <a:bodyPr rtlCol="0" anchor="ctr"/>
+          <a:lstStyle/>
+          <a:p>
+            <a:pPr algn="ctr"/>
+          </a:p>
+        </p:txBody>
+      </p:sp>
+      <p:sp>
+        <p:nvSpPr>
+          <p:cNvPr id="14" name="Rounded Rectangle 13"/>
+          <p:cNvSpPr/>
+          <p:nvPr/>
+        </p:nvSpPr>
+        <p:spPr>
+          <a:xfrm>
+            <a:off x="5628131" y="4078224"/>
+            <a:ext cx="950976" cy="1463040"/>
+          </a:xfrm>
+          <a:prstGeom prst="roundRect">
+            <a:avLst/>
+          </a:prstGeom>
+          <a:solidFill>
+            <a:srgbClr val="ECFDF5"/>
+          </a:solidFill>
+          <a:ln w="17780">
+            <a:solidFill>
+              <a:srgbClr val="D97706"/>
+            </a:solidFill>
+          </a:ln>
+        </p:spPr>
+        <p:style>
+          <a:lnRef idx="1">
+            <a:schemeClr val="accent1"/>
+          </a:lnRef>
+          <a:fillRef idx="3">
+            <a:schemeClr val="accent1"/>
+          </a:fillRef>
+          <a:effectRef idx="2">
+            <a:schemeClr val="accent1"/>
+          </a:effectRef>
+          <a:fontRef idx="minor">
+            <a:schemeClr val="lt1"/>
+          </a:fontRef>
+        </p:style>
+        <p:txBody>
+          <a:bodyPr rtlCol="0" anchor="ctr"/>
+          <a:lstStyle/>
+          <a:p>
+            <a:pPr algn="ctr"/>
+          </a:p>
+        </p:txBody>
+      </p:sp>
+      <p:cxnSp>
+        <p:nvCxnSpPr>
+          <p:cNvPr id="15" name="Connector 14"/>
+          <p:cNvCxnSpPr/>
+          <p:nvPr/>
+        </p:nvCxnSpPr>
+        <p:spPr>
+          <a:xfrm flipH="1" flipV="1">
+            <a:off x="2697480" y="3611880"/>
+            <a:ext cx="3406140" cy="704088"/>
+          </a:xfrm>
+          <a:prstGeom prst="line">
+            <a:avLst/>
+          </a:prstGeom>
+          <a:ln w="20320">
+            <a:solidFill>
+              <a:srgbClr val="D97706"/>
+            </a:solidFill>
+          </a:ln>
+        </p:spPr>
+        <p:style>
+          <a:lnRef idx="2">
+            <a:schemeClr val="accent1"/>
+          </a:lnRef>
+          <a:fillRef idx="0">
+            <a:schemeClr val="accent1"/>
+          </a:fillRef>
+          <a:effectRef idx="1">
+            <a:schemeClr val="accent1"/>
+          </a:effectRef>
+          <a:fontRef idx="minor">
+            <a:schemeClr val="tx1"/>
+          </a:fontRef>
+        </p:style>
+      </p:cxnSp>
+      <p:sp>
+        <p:nvSpPr>
+          <p:cNvPr id="16" name="Rounded Rectangle 15"/>
+          <p:cNvSpPr/>
+          <p:nvPr/>
+        </p:nvSpPr>
+        <p:spPr>
+          <a:xfrm>
+            <a:off x="1463040" y="3218688"/>
+            <a:ext cx="2468880" cy="786384"/>
+          </a:xfrm>
+          <a:prstGeom prst="roundRect">
+            <a:avLst/>
+          </a:prstGeom>
+          <a:solidFill>
+            <a:srgbClr val="FFFFFF"/>
+          </a:solidFill>
+          <a:ln w="11430">
+            <a:solidFill>
+              <a:srgbClr val="CBD5E1"/>
+            </a:solidFill>
+          </a:ln>
+        </p:spPr>
+        <p:style>
+          <a:lnRef idx="1">
+            <a:schemeClr val="accent1"/>
+          </a:lnRef>
+          <a:fillRef idx="3">
+            <a:schemeClr val="accent1"/>
+          </a:fillRef>
+          <a:effectRef idx="2">
+            <a:schemeClr val="accent1"/>
+          </a:effectRef>
+          <a:fontRef idx="minor">
+            <a:schemeClr val="lt1"/>
+          </a:fontRef>
+        </p:style>
+        <p:txBody>
+          <a:bodyPr rtlCol="0" anchor="ctr"/>
+          <a:lstStyle/>
+          <a:p>
+            <a:pPr algn="ctr"/>
+          </a:p>
+        </p:txBody>
+      </p:sp>
+      <p:sp>
+        <p:nvSpPr>
+          <p:cNvPr id="17" name="TextBox 16"/>
+          <p:cNvSpPr txBox="1"/>
+          <p:nvPr/>
+        </p:nvSpPr>
+        <p:spPr>
+          <a:xfrm>
+            <a:off x="1609344" y="3392424"/>
+            <a:ext cx="2176272" cy="347472"/>
+          </a:xfrm>
+          <a:prstGeom prst="rect">
+            <a:avLst/>
+          </a:prstGeom>
+          <a:noFill/>
+        </p:spPr>
+        <p:txBody>
+          <a:bodyPr wrap="square" lIns="0" rIns="0" tIns="0" bIns="0">
+            <a:spAutoFit/>
+          </a:bodyPr>
+          <a:lstStyle/>
+          <a:p>
+            <a:pPr algn="ctr"/>
+            <a:r>
+              <a:rPr sz="1200" b="1">
+                <a:solidFill>
+                  <a:srgbClr val="111827"/>
+                </a:solidFill>
+                <a:latin typeface="Arial"/>
+              </a:rPr>
+              <a:t>Title and Aim (What and Why)</a:t>
+            </a:r>
+          </a:p>
+        </p:txBody>
+      </p:sp>
+      <p:cxnSp>
+        <p:nvCxnSpPr>
+          <p:cNvPr id="18" name="Connector 17"/>
+          <p:cNvCxnSpPr/>
+          <p:nvPr/>
+        </p:nvCxnSpPr>
+        <p:spPr>
+          <a:xfrm flipV="1">
+            <a:off x="6103620" y="3611880"/>
+            <a:ext cx="3497580" cy="704088"/>
+          </a:xfrm>
+          <a:prstGeom prst="line">
+            <a:avLst/>
+          </a:prstGeom>
+          <a:ln w="20320">
+            <a:solidFill>
+              <a:srgbClr val="D97706"/>
+            </a:solidFill>
+          </a:ln>
+        </p:spPr>
+        <p:style>
+          <a:lnRef idx="2">
+            <a:schemeClr val="accent1"/>
+          </a:lnRef>
+          <a:fillRef idx="0">
+            <a:schemeClr val="accent1"/>
+          </a:fillRef>
+          <a:effectRef idx="1">
+            <a:schemeClr val="accent1"/>
+          </a:effectRef>
+          <a:fontRef idx="minor">
+            <a:schemeClr val="tx1"/>
+          </a:fontRef>
+        </p:style>
+      </p:cxnSp>
+      <p:sp>
+        <p:nvSpPr>
+          <p:cNvPr id="19" name="Rounded Rectangle 18"/>
+          <p:cNvSpPr/>
+          <p:nvPr/>
+        </p:nvSpPr>
+        <p:spPr>
+          <a:xfrm>
+            <a:off x="8366760" y="3218688"/>
+            <a:ext cx="2468880" cy="786384"/>
+          </a:xfrm>
+          <a:prstGeom prst="roundRect">
+            <a:avLst/>
+          </a:prstGeom>
+          <a:solidFill>
+            <a:srgbClr val="FFFFFF"/>
+          </a:solidFill>
+          <a:ln w="11430">
+            <a:solidFill>
+              <a:srgbClr val="CBD5E1"/>
+            </a:solidFill>
+          </a:ln>
+        </p:spPr>
+        <p:style>
+          <a:lnRef idx="1">
+            <a:schemeClr val="accent1"/>
+          </a:lnRef>
+          <a:fillRef idx="3">
+            <a:schemeClr val="accent1"/>
+          </a:fillRef>
+          <a:effectRef idx="2">
+            <a:schemeClr val="accent1"/>
+          </a:effectRef>
+          <a:fontRef idx="minor">
+            <a:schemeClr val="lt1"/>
+          </a:fontRef>
+        </p:style>
+        <p:txBody>
+          <a:bodyPr rtlCol="0" anchor="ctr"/>
+          <a:lstStyle/>
+          <a:p>
+            <a:pPr algn="ctr"/>
+          </a:p>
+        </p:txBody>
+      </p:sp>
+      <p:sp>
+        <p:nvSpPr>
+          <p:cNvPr id="20" name="TextBox 19"/>
+          <p:cNvSpPr txBox="1"/>
+          <p:nvPr/>
+        </p:nvSpPr>
+        <p:spPr>
+          <a:xfrm>
+            <a:off x="8513064" y="3392424"/>
+            <a:ext cx="2176272" cy="347472"/>
+          </a:xfrm>
+          <a:prstGeom prst="rect">
+            <a:avLst/>
+          </a:prstGeom>
+          <a:noFill/>
+        </p:spPr>
+        <p:txBody>
+          <a:bodyPr wrap="square" lIns="0" rIns="0" tIns="0" bIns="0">
+            <a:spAutoFit/>
+          </a:bodyPr>
+          <a:lstStyle/>
+          <a:p>
+            <a:pPr algn="ctr"/>
+            <a:r>
+              <a:rPr sz="1200" b="1">
+                <a:solidFill>
+                  <a:srgbClr val="111827"/>
+                </a:solidFill>
+                <a:latin typeface="Arial"/>
+              </a:rPr>
+              <a:t>Apparatus/Materials (The tools)</a:t>
+            </a:r>
+          </a:p>
+        </p:txBody>
+      </p:sp>
+      <p:cxnSp>
+        <p:nvCxnSpPr>
+          <p:cNvPr id="21" name="Connector 20"/>
+          <p:cNvCxnSpPr/>
+          <p:nvPr/>
+        </p:nvCxnSpPr>
+        <p:spPr>
+          <a:xfrm flipH="1">
+            <a:off x="2697480" y="4315968"/>
+            <a:ext cx="3406140" cy="1170432"/>
+          </a:xfrm>
+          <a:prstGeom prst="line">
+            <a:avLst/>
+          </a:prstGeom>
+          <a:ln w="20320">
+            <a:solidFill>
+              <a:srgbClr val="D97706"/>
+            </a:solidFill>
+          </a:ln>
+        </p:spPr>
+        <p:style>
+          <a:lnRef idx="2">
+            <a:schemeClr val="accent1"/>
+          </a:lnRef>
+          <a:fillRef idx="0">
+            <a:schemeClr val="accent1"/>
+          </a:fillRef>
+          <a:effectRef idx="1">
+            <a:schemeClr val="accent1"/>
+          </a:effectRef>
+          <a:fontRef idx="minor">
+            <a:schemeClr val="tx1"/>
+          </a:fontRef>
+        </p:style>
+      </p:cxnSp>
+      <p:sp>
+        <p:nvSpPr>
+          <p:cNvPr id="22" name="Rounded Rectangle 21"/>
+          <p:cNvSpPr/>
+          <p:nvPr/>
+        </p:nvSpPr>
+        <p:spPr>
+          <a:xfrm>
+            <a:off x="1463040" y="5093208"/>
+            <a:ext cx="2468880" cy="786384"/>
+          </a:xfrm>
+          <a:prstGeom prst="roundRect">
+            <a:avLst/>
+          </a:prstGeom>
+          <a:solidFill>
+            <a:srgbClr val="FFFFFF"/>
+          </a:solidFill>
+          <a:ln w="11430">
+            <a:solidFill>
+              <a:srgbClr val="CBD5E1"/>
+            </a:solidFill>
+          </a:ln>
+        </p:spPr>
+        <p:style>
+          <a:lnRef idx="1">
+            <a:schemeClr val="accent1"/>
+          </a:lnRef>
+          <a:fillRef idx="3">
+            <a:schemeClr val="accent1"/>
+          </a:fillRef>
+          <a:effectRef idx="2">
+            <a:schemeClr val="accent1"/>
+          </a:effectRef>
+          <a:fontRef idx="minor">
+            <a:schemeClr val="lt1"/>
+          </a:fontRef>
+        </p:style>
+        <p:txBody>
+          <a:bodyPr rtlCol="0" anchor="ctr"/>
+          <a:lstStyle/>
+          <a:p>
+            <a:pPr algn="ctr"/>
           </a:p>
         </p:txBody>
       </p:sp>
       <p:sp>
         <p:nvSpPr>
           <p:cNvPr id="23" name="TextBox 22"/>
+          <p:cNvSpPr txBox="1"/>
+          <p:nvPr/>
+        </p:nvSpPr>
+        <p:spPr>
+          <a:xfrm>
+            <a:off x="1609344" y="5266944"/>
+            <a:ext cx="2176272" cy="347472"/>
+          </a:xfrm>
+          <a:prstGeom prst="rect">
+            <a:avLst/>
+          </a:prstGeom>
+          <a:noFill/>
+        </p:spPr>
+        <p:txBody>
+          <a:bodyPr wrap="square" lIns="0" rIns="0" tIns="0" bIns="0">
+            <a:spAutoFit/>
+          </a:bodyPr>
+          <a:lstStyle/>
+          <a:p>
+            <a:pPr algn="ctr"/>
+            <a:r>
+              <a:rPr sz="1200" b="1">
+                <a:solidFill>
+                  <a:srgbClr val="111827"/>
+                </a:solidFill>
+                <a:latin typeface="Arial"/>
+              </a:rPr>
+              <a:t>Procedure (The steps)</a:t>
+            </a:r>
+          </a:p>
+        </p:txBody>
+      </p:sp>
+      <p:sp>
+        <p:nvSpPr>
+          <p:cNvPr id="24" name="TextBox 23"/>
           <p:cNvSpPr txBox="1"/>
           <p:nvPr/>
         </p:nvSpPr>
@@ -8735,7 +8588,86 @@
         </p:nvSpPr>
         <p:spPr>
           <a:xfrm>
-            <a:off x="777240" y="1719072"/>
+            <a:off x="777240" y="1755648"/>
+            <a:ext cx="10652760" cy="4480560"/>
+          </a:xfrm>
+          <a:prstGeom prst="roundRect">
+            <a:avLst/>
+          </a:prstGeom>
+          <a:solidFill>
+            <a:srgbClr val="FFFFFF"/>
+          </a:solidFill>
+          <a:ln w="17780">
+            <a:solidFill>
+              <a:srgbClr val="BE123C"/>
+            </a:solidFill>
+          </a:ln>
+        </p:spPr>
+        <p:style>
+          <a:lnRef idx="1">
+            <a:schemeClr val="accent1"/>
+          </a:lnRef>
+          <a:fillRef idx="3">
+            <a:schemeClr val="accent1"/>
+          </a:fillRef>
+          <a:effectRef idx="2">
+            <a:schemeClr val="accent1"/>
+          </a:effectRef>
+          <a:fontRef idx="minor">
+            <a:schemeClr val="lt1"/>
+          </a:fontRef>
+        </p:style>
+        <p:txBody>
+          <a:bodyPr rtlCol="0" anchor="ctr"/>
+          <a:lstStyle/>
+          <a:p>
+            <a:pPr algn="ctr"/>
+          </a:p>
+        </p:txBody>
+      </p:sp>
+      <p:sp>
+        <p:nvSpPr>
+          <p:cNvPr id="12" name="TextBox 11"/>
+          <p:cNvSpPr txBox="1"/>
+          <p:nvPr/>
+        </p:nvSpPr>
+        <p:spPr>
+          <a:xfrm>
+            <a:off x="1051560" y="1975104"/>
+            <a:ext cx="1920240" cy="237744"/>
+          </a:xfrm>
+          <a:prstGeom prst="rect">
+            <a:avLst/>
+          </a:prstGeom>
+          <a:noFill/>
+        </p:spPr>
+        <p:txBody>
+          <a:bodyPr wrap="square" lIns="0" rIns="0" tIns="0" bIns="0">
+            <a:spAutoFit/>
+          </a:bodyPr>
+          <a:lstStyle/>
+          <a:p>
+            <a:r>
+              <a:rPr sz="1200" b="1">
+                <a:solidFill>
+                  <a:srgbClr val="BE123C"/>
+                </a:solidFill>
+                <a:latin typeface="Arial"/>
+              </a:rPr>
+              <a:t>PRACTICE FLOW</a:t>
+            </a:r>
+          </a:p>
+        </p:txBody>
+      </p:sp>
+      <p:sp>
+        <p:nvSpPr>
+          <p:cNvPr id="13" name="Rounded Rectangle 12"/>
+          <p:cNvSpPr/>
+          <p:nvPr/>
+        </p:nvSpPr>
+        <p:spPr>
+          <a:xfrm>
+            <a:off x="777240" y="2304288"/>
             <a:ext cx="10652760" cy="822960"/>
           </a:xfrm>
           <a:prstGeom prst="roundRect">
@@ -8776,21 +8708,21 @@
                 </a:solidFill>
                 <a:latin typeface="Arial"/>
               </a:rPr>
-              <a:t>Answer with evidence:</a:t>
-            </a:r>
-          </a:p>
-        </p:txBody>
-      </p:sp>
-      <p:sp>
-        <p:nvSpPr>
-          <p:cNvPr id="12" name="Rounded Rectangle 11"/>
+              <a:t>Answer with evidence</a:t>
+            </a:r>
+          </a:p>
+        </p:txBody>
+      </p:sp>
+      <p:sp>
+        <p:nvSpPr>
+          <p:cNvPr id="14" name="Rounded Rectangle 13"/>
           <p:cNvSpPr/>
           <p:nvPr/>
         </p:nvSpPr>
         <p:spPr>
           <a:xfrm>
-            <a:off x="868680" y="2743200"/>
-            <a:ext cx="10378440" cy="804672"/>
+            <a:off x="960120" y="3401568"/>
+            <a:ext cx="3063240" cy="1691640"/>
           </a:xfrm>
           <a:prstGeom prst="roundRect">
             <a:avLst/>
@@ -8798,9 +8730,9 @@
           <a:solidFill>
             <a:srgbClr val="FFFFFF"/>
           </a:solidFill>
-          <a:ln w="11430">
+          <a:ln w="12700">
             <a:solidFill>
-              <a:srgbClr val="CBD5E1"/>
+              <a:srgbClr val="BE123C"/>
             </a:solidFill>
           </a:ln>
         </p:spPr>
@@ -8828,14 +8760,14 @@
       </p:sp>
       <p:sp>
         <p:nvSpPr>
-          <p:cNvPr id="13" name="Oval 12"/>
+          <p:cNvPr id="15" name="Oval 14"/>
           <p:cNvSpPr/>
           <p:nvPr/>
         </p:nvSpPr>
         <p:spPr>
           <a:xfrm>
-            <a:off x="1078992" y="2898648"/>
-            <a:ext cx="475488" cy="475488"/>
+            <a:off x="1106424" y="3584448"/>
+            <a:ext cx="420624" cy="420624"/>
           </a:xfrm>
           <a:prstGeom prst="ellipse">
             <a:avLst/>
@@ -8880,14 +8812,14 @@
       </p:sp>
       <p:sp>
         <p:nvSpPr>
-          <p:cNvPr id="14" name="TextBox 13"/>
+          <p:cNvPr id="16" name="TextBox 15"/>
           <p:cNvSpPr txBox="1"/>
           <p:nvPr/>
         </p:nvSpPr>
         <p:spPr>
           <a:xfrm>
-            <a:off x="1719072" y="2889504"/>
-            <a:ext cx="5623560" cy="384048"/>
+            <a:off x="1655064" y="3529584"/>
+            <a:ext cx="2148840" cy="502920"/>
           </a:xfrm>
           <a:prstGeom prst="rect">
             <a:avLst/>
@@ -8900,8 +8832,9 @@
           </a:bodyPr>
           <a:lstStyle/>
           <a:p>
-            <a:r>
-              <a:rPr sz="1600" b="1">
+            <a:pPr algn="ctr"/>
+            <a:r>
+              <a:rPr sz="1400" b="1">
                 <a:solidFill>
                   <a:srgbClr val="111827"/>
                 </a:solidFill>
@@ -8914,14 +8847,14 @@
       </p:sp>
       <p:sp>
         <p:nvSpPr>
-          <p:cNvPr id="15" name="Rectangle 14"/>
+          <p:cNvPr id="17" name="Rectangle 16"/>
           <p:cNvSpPr/>
           <p:nvPr/>
         </p:nvSpPr>
         <p:spPr>
           <a:xfrm>
-            <a:off x="7635240" y="3264408"/>
-            <a:ext cx="3246120" cy="36576"/>
+            <a:off x="1463040" y="4553712"/>
+            <a:ext cx="2057400" cy="32004"/>
           </a:xfrm>
           <a:prstGeom prst="rect">
             <a:avLst/>
@@ -8957,24 +8890,94 @@
       </p:sp>
       <p:sp>
         <p:nvSpPr>
-          <p:cNvPr id="16" name="Rounded Rectangle 15"/>
+          <p:cNvPr id="18" name="TextBox 17"/>
+          <p:cNvSpPr txBox="1"/>
+          <p:nvPr/>
+        </p:nvSpPr>
+        <p:spPr>
+          <a:xfrm>
+            <a:off x="1463040" y="4709160"/>
+            <a:ext cx="2057400" cy="201168"/>
+          </a:xfrm>
+          <a:prstGeom prst="rect">
+            <a:avLst/>
+          </a:prstGeom>
+          <a:noFill/>
+        </p:spPr>
+        <p:txBody>
+          <a:bodyPr wrap="square" lIns="0" rIns="0" tIns="0" bIns="0">
+            <a:spAutoFit/>
+          </a:bodyPr>
+          <a:lstStyle/>
+          <a:p>
+            <a:pPr algn="ctr"/>
+            <a:r>
+              <a:rPr sz="1000" b="0">
+                <a:solidFill>
+                  <a:srgbClr val="475569"/>
+                </a:solidFill>
+                <a:latin typeface="Arial"/>
+              </a:rPr>
+              <a:t>answer + reason</a:t>
+            </a:r>
+          </a:p>
+        </p:txBody>
+      </p:sp>
+      <p:cxnSp>
+        <p:nvCxnSpPr>
+          <p:cNvPr id="19" name="Connector 18"/>
+          <p:cNvCxnSpPr/>
+          <p:nvPr/>
+        </p:nvCxnSpPr>
+        <p:spPr>
+          <a:xfrm>
+            <a:off x="4014215" y="4251960"/>
+            <a:ext cx="402337" cy="0"/>
+          </a:xfrm>
+          <a:prstGeom prst="line">
+            <a:avLst/>
+          </a:prstGeom>
+          <a:ln w="25400">
+            <a:solidFill>
+              <a:srgbClr val="BE123C"/>
+            </a:solidFill>
+          </a:ln>
+        </p:spPr>
+        <p:style>
+          <a:lnRef idx="2">
+            <a:schemeClr val="accent1"/>
+          </a:lnRef>
+          <a:fillRef idx="0">
+            <a:schemeClr val="accent1"/>
+          </a:fillRef>
+          <a:effectRef idx="1">
+            <a:schemeClr val="accent1"/>
+          </a:effectRef>
+          <a:fontRef idx="minor">
+            <a:schemeClr val="tx1"/>
+          </a:fontRef>
+        </p:style>
+      </p:cxnSp>
+      <p:sp>
+        <p:nvSpPr>
+          <p:cNvPr id="20" name="Rounded Rectangle 19"/>
           <p:cNvSpPr/>
           <p:nvPr/>
         </p:nvSpPr>
         <p:spPr>
           <a:xfrm>
-            <a:off x="868680" y="3822191"/>
-            <a:ext cx="10378440" cy="804672"/>
+            <a:off x="4416552" y="3401568"/>
+            <a:ext cx="3063240" cy="1691640"/>
           </a:xfrm>
           <a:prstGeom prst="roundRect">
             <a:avLst/>
           </a:prstGeom>
           <a:solidFill>
-            <a:srgbClr val="FFFFFF"/>
-          </a:solidFill>
-          <a:ln w="11430">
+            <a:srgbClr val="FFF7E0"/>
+          </a:solidFill>
+          <a:ln w="12700">
             <a:solidFill>
-              <a:srgbClr val="CBD5E1"/>
+              <a:srgbClr val="BE123C"/>
             </a:solidFill>
           </a:ln>
         </p:spPr>
@@ -9002,14 +9005,14 @@
       </p:sp>
       <p:sp>
         <p:nvSpPr>
-          <p:cNvPr id="17" name="Oval 16"/>
+          <p:cNvPr id="21" name="Oval 20"/>
           <p:cNvSpPr/>
           <p:nvPr/>
         </p:nvSpPr>
         <p:spPr>
           <a:xfrm>
-            <a:off x="1078992" y="3977639"/>
-            <a:ext cx="475488" cy="475488"/>
+            <a:off x="4562856" y="3584448"/>
+            <a:ext cx="420624" cy="420624"/>
           </a:xfrm>
           <a:prstGeom prst="ellipse">
             <a:avLst/>
@@ -9054,14 +9057,14 @@
       </p:sp>
       <p:sp>
         <p:nvSpPr>
-          <p:cNvPr id="18" name="TextBox 17"/>
+          <p:cNvPr id="22" name="TextBox 21"/>
           <p:cNvSpPr txBox="1"/>
           <p:nvPr/>
         </p:nvSpPr>
         <p:spPr>
           <a:xfrm>
-            <a:off x="1719072" y="3968496"/>
-            <a:ext cx="5623560" cy="384048"/>
+            <a:off x="5111496" y="3529584"/>
+            <a:ext cx="2148840" cy="502920"/>
           </a:xfrm>
           <a:prstGeom prst="rect">
             <a:avLst/>
@@ -9074,8 +9077,9 @@
           </a:bodyPr>
           <a:lstStyle/>
           <a:p>
-            <a:r>
-              <a:rPr sz="1600" b="1">
+            <a:pPr algn="ctr"/>
+            <a:r>
+              <a:rPr sz="1400" b="1">
                 <a:solidFill>
                   <a:srgbClr val="111827"/>
                 </a:solidFill>
@@ -9088,14 +9092,14 @@
       </p:sp>
       <p:sp>
         <p:nvSpPr>
-          <p:cNvPr id="19" name="Rectangle 18"/>
+          <p:cNvPr id="23" name="Rectangle 22"/>
           <p:cNvSpPr/>
           <p:nvPr/>
         </p:nvSpPr>
         <p:spPr>
           <a:xfrm>
-            <a:off x="7635240" y="4343400"/>
-            <a:ext cx="3246120" cy="36576"/>
+            <a:off x="4919472" y="4553712"/>
+            <a:ext cx="2057400" cy="32004"/>
           </a:xfrm>
           <a:prstGeom prst="rect">
             <a:avLst/>
@@ -9131,14 +9135,84 @@
       </p:sp>
       <p:sp>
         <p:nvSpPr>
-          <p:cNvPr id="20" name="Rounded Rectangle 19"/>
+          <p:cNvPr id="24" name="TextBox 23"/>
+          <p:cNvSpPr txBox="1"/>
+          <p:nvPr/>
+        </p:nvSpPr>
+        <p:spPr>
+          <a:xfrm>
+            <a:off x="4919472" y="4709160"/>
+            <a:ext cx="2057400" cy="201168"/>
+          </a:xfrm>
+          <a:prstGeom prst="rect">
+            <a:avLst/>
+          </a:prstGeom>
+          <a:noFill/>
+        </p:spPr>
+        <p:txBody>
+          <a:bodyPr wrap="square" lIns="0" rIns="0" tIns="0" bIns="0">
+            <a:spAutoFit/>
+          </a:bodyPr>
+          <a:lstStyle/>
+          <a:p>
+            <a:pPr algn="ctr"/>
+            <a:r>
+              <a:rPr sz="1000" b="0">
+                <a:solidFill>
+                  <a:srgbClr val="475569"/>
+                </a:solidFill>
+                <a:latin typeface="Arial"/>
+              </a:rPr>
+              <a:t>answer + reason</a:t>
+            </a:r>
+          </a:p>
+        </p:txBody>
+      </p:sp>
+      <p:cxnSp>
+        <p:nvCxnSpPr>
+          <p:cNvPr id="25" name="Connector 24"/>
+          <p:cNvCxnSpPr/>
+          <p:nvPr/>
+        </p:nvCxnSpPr>
+        <p:spPr>
+          <a:xfrm>
+            <a:off x="7470648" y="4251960"/>
+            <a:ext cx="402335" cy="0"/>
+          </a:xfrm>
+          <a:prstGeom prst="line">
+            <a:avLst/>
+          </a:prstGeom>
+          <a:ln w="25400">
+            <a:solidFill>
+              <a:srgbClr val="BE123C"/>
+            </a:solidFill>
+          </a:ln>
+        </p:spPr>
+        <p:style>
+          <a:lnRef idx="2">
+            <a:schemeClr val="accent1"/>
+          </a:lnRef>
+          <a:fillRef idx="0">
+            <a:schemeClr val="accent1"/>
+          </a:fillRef>
+          <a:effectRef idx="1">
+            <a:schemeClr val="accent1"/>
+          </a:effectRef>
+          <a:fontRef idx="minor">
+            <a:schemeClr val="tx1"/>
+          </a:fontRef>
+        </p:style>
+      </p:cxnSp>
+      <p:sp>
+        <p:nvSpPr>
+          <p:cNvPr id="26" name="Rounded Rectangle 25"/>
           <p:cNvSpPr/>
           <p:nvPr/>
         </p:nvSpPr>
         <p:spPr>
           <a:xfrm>
-            <a:off x="868680" y="4901183"/>
-            <a:ext cx="10378440" cy="804672"/>
+            <a:off x="7872983" y="3401568"/>
+            <a:ext cx="3063240" cy="1691640"/>
           </a:xfrm>
           <a:prstGeom prst="roundRect">
             <a:avLst/>
@@ -9146,9 +9220,9 @@
           <a:solidFill>
             <a:srgbClr val="FFFFFF"/>
           </a:solidFill>
-          <a:ln w="11430">
+          <a:ln w="12700">
             <a:solidFill>
-              <a:srgbClr val="CBD5E1"/>
+              <a:srgbClr val="BE123C"/>
             </a:solidFill>
           </a:ln>
         </p:spPr>
@@ -9176,14 +9250,14 @@
       </p:sp>
       <p:sp>
         <p:nvSpPr>
-          <p:cNvPr id="21" name="Oval 20"/>
+          <p:cNvPr id="27" name="Oval 26"/>
           <p:cNvSpPr/>
           <p:nvPr/>
         </p:nvSpPr>
         <p:spPr>
           <a:xfrm>
-            <a:off x="1078992" y="5056631"/>
-            <a:ext cx="475488" cy="475488"/>
+            <a:off x="8019288" y="3584448"/>
+            <a:ext cx="420624" cy="420624"/>
           </a:xfrm>
           <a:prstGeom prst="ellipse">
             <a:avLst/>
@@ -9228,14 +9302,14 @@
       </p:sp>
       <p:sp>
         <p:nvSpPr>
-          <p:cNvPr id="22" name="TextBox 21"/>
+          <p:cNvPr id="28" name="TextBox 27"/>
           <p:cNvSpPr txBox="1"/>
           <p:nvPr/>
         </p:nvSpPr>
         <p:spPr>
           <a:xfrm>
-            <a:off x="1719072" y="5047488"/>
-            <a:ext cx="5623560" cy="384048"/>
+            <a:off x="8567928" y="3529584"/>
+            <a:ext cx="2148840" cy="502920"/>
           </a:xfrm>
           <a:prstGeom prst="rect">
             <a:avLst/>
@@ -9248,8 +9322,9 @@
           </a:bodyPr>
           <a:lstStyle/>
           <a:p>
-            <a:r>
-              <a:rPr sz="1600" b="1">
+            <a:pPr algn="ctr"/>
+            <a:r>
+              <a:rPr sz="1400" b="1">
                 <a:solidFill>
                   <a:srgbClr val="111827"/>
                 </a:solidFill>
@@ -9262,14 +9337,14 @@
       </p:sp>
       <p:sp>
         <p:nvSpPr>
-          <p:cNvPr id="23" name="Rectangle 22"/>
+          <p:cNvPr id="29" name="Rectangle 28"/>
           <p:cNvSpPr/>
           <p:nvPr/>
         </p:nvSpPr>
         <p:spPr>
           <a:xfrm>
-            <a:off x="7635240" y="5422392"/>
-            <a:ext cx="3246120" cy="36576"/>
+            <a:off x="8375904" y="4553712"/>
+            <a:ext cx="2057400" cy="32004"/>
           </a:xfrm>
           <a:prstGeom prst="rect">
             <a:avLst/>
@@ -9305,13 +9380,48 @@
       </p:sp>
       <p:sp>
         <p:nvSpPr>
-          <p:cNvPr id="24" name="TextBox 23"/>
+          <p:cNvPr id="30" name="TextBox 29"/>
           <p:cNvSpPr txBox="1"/>
           <p:nvPr/>
         </p:nvSpPr>
         <p:spPr>
           <a:xfrm>
-            <a:off x="896112" y="5989320"/>
+            <a:off x="8375904" y="4709160"/>
+            <a:ext cx="2057400" cy="201168"/>
+          </a:xfrm>
+          <a:prstGeom prst="rect">
+            <a:avLst/>
+          </a:prstGeom>
+          <a:noFill/>
+        </p:spPr>
+        <p:txBody>
+          <a:bodyPr wrap="square" lIns="0" rIns="0" tIns="0" bIns="0">
+            <a:spAutoFit/>
+          </a:bodyPr>
+          <a:lstStyle/>
+          <a:p>
+            <a:pPr algn="ctr"/>
+            <a:r>
+              <a:rPr sz="1000" b="0">
+                <a:solidFill>
+                  <a:srgbClr val="475569"/>
+                </a:solidFill>
+                <a:latin typeface="Arial"/>
+              </a:rPr>
+              <a:t>answer + reason</a:t>
+            </a:r>
+          </a:p>
+        </p:txBody>
+      </p:sp>
+      <p:sp>
+        <p:nvSpPr>
+          <p:cNvPr id="31" name="TextBox 30"/>
+          <p:cNvSpPr txBox="1"/>
+          <p:nvPr/>
+        </p:nvSpPr>
+        <p:spPr>
+          <a:xfrm>
+            <a:off x="914400" y="5907024"/>
             <a:ext cx="10287000" cy="274320"/>
           </a:xfrm>
           <a:prstGeom prst="rect">
@@ -9333,14 +9443,14 @@
                 </a:solidFill>
                 <a:latin typeface="Arial"/>
               </a:rPr>
-              <a:t>Use the source idea, not guessing.</a:t>
-            </a:r>
-          </a:p>
-        </p:txBody>
-      </p:sp>
-      <p:sp>
-        <p:nvSpPr>
-          <p:cNvPr id="25" name="TextBox 24"/>
+              <a:t>Use evidence from the lesson, not guessing.</a:t>
+            </a:r>
+          </a:p>
+        </p:txBody>
+      </p:sp>
+      <p:sp>
+        <p:nvSpPr>
+          <p:cNvPr id="32" name="TextBox 31"/>
           <p:cNvSpPr txBox="1"/>
           <p:nvPr/>
         </p:nvSpPr>
@@ -9768,16 +9878,16 @@
         </p:nvSpPr>
         <p:spPr>
           <a:xfrm>
-            <a:off x="777240" y="1783080"/>
-            <a:ext cx="3063240" cy="4343400"/>
+            <a:off x="777240" y="1755648"/>
+            <a:ext cx="10652760" cy="4480560"/>
           </a:xfrm>
           <a:prstGeom prst="roundRect">
             <a:avLst/>
           </a:prstGeom>
           <a:solidFill>
-            <a:srgbClr val="FFF7E0"/>
-          </a:solidFill>
-          <a:ln w="17780">
+            <a:srgbClr val="FFFFFF"/>
+          </a:solidFill>
+          <a:ln w="17145">
             <a:solidFill>
               <a:srgbClr val="1B7F3A"/>
             </a:solidFill>
@@ -9798,269 +9908,32 @@
           </a:fontRef>
         </p:style>
         <p:txBody>
-          <a:bodyPr rtlCol="0" anchor="ctr"/>
-          <a:lstStyle/>
-          <a:p>
-            <a:pPr algn="ctr"/>
-          </a:p>
-        </p:txBody>
-      </p:sp>
-      <p:sp>
-        <p:nvSpPr>
-          <p:cNvPr id="12" name="Oval 11"/>
-          <p:cNvSpPr/>
-          <p:nvPr/>
-        </p:nvSpPr>
-        <p:spPr>
-          <a:xfrm>
-            <a:off x="2122322" y="2461564"/>
-            <a:ext cx="373075" cy="277977"/>
-          </a:xfrm>
-          <a:prstGeom prst="ellipse">
-            <a:avLst/>
-          </a:prstGeom>
-          <a:solidFill>
-            <a:srgbClr val="FFF7E0"/>
-          </a:solidFill>
-          <a:ln w="10160">
-            <a:solidFill>
-              <a:srgbClr val="087490"/>
-            </a:solidFill>
-          </a:ln>
-        </p:spPr>
-        <p:style>
-          <a:lnRef idx="1">
-            <a:schemeClr val="accent1"/>
-          </a:lnRef>
-          <a:fillRef idx="3">
-            <a:schemeClr val="accent1"/>
-          </a:fillRef>
-          <a:effectRef idx="2">
-            <a:schemeClr val="accent1"/>
-          </a:effectRef>
-          <a:fontRef idx="minor">
-            <a:schemeClr val="lt1"/>
-          </a:fontRef>
-        </p:style>
-        <p:txBody>
-          <a:bodyPr rtlCol="0" anchor="ctr"/>
-          <a:lstStyle/>
-          <a:p>
-            <a:pPr algn="ctr"/>
-          </a:p>
-        </p:txBody>
-      </p:sp>
-      <p:sp>
-        <p:nvSpPr>
-          <p:cNvPr id="13" name="Rounded Rectangle 12"/>
-          <p:cNvSpPr/>
-          <p:nvPr/>
-        </p:nvSpPr>
-        <p:spPr>
-          <a:xfrm>
-            <a:off x="1982419" y="2774289"/>
-            <a:ext cx="652881" cy="729691"/>
-          </a:xfrm>
-          <a:prstGeom prst="roundRect">
-            <a:avLst/>
-          </a:prstGeom>
-          <a:solidFill>
-            <a:srgbClr val="ECFDF5"/>
-          </a:solidFill>
-          <a:ln w="10160">
-            <a:solidFill>
-              <a:srgbClr val="087490"/>
-            </a:solidFill>
-          </a:ln>
-        </p:spPr>
-        <p:style>
-          <a:lnRef idx="1">
-            <a:schemeClr val="accent1"/>
-          </a:lnRef>
-          <a:fillRef idx="3">
-            <a:schemeClr val="accent1"/>
-          </a:fillRef>
-          <a:effectRef idx="2">
-            <a:schemeClr val="accent1"/>
-          </a:effectRef>
-          <a:fontRef idx="minor">
-            <a:schemeClr val="lt1"/>
-          </a:fontRef>
-        </p:style>
-        <p:txBody>
-          <a:bodyPr rtlCol="0" anchor="ctr"/>
-          <a:lstStyle/>
-          <a:p>
-            <a:pPr algn="ctr"/>
-          </a:p>
-        </p:txBody>
-      </p:sp>
-      <p:sp>
-        <p:nvSpPr>
-          <p:cNvPr id="14" name="Oval 13"/>
-          <p:cNvSpPr/>
-          <p:nvPr/>
-        </p:nvSpPr>
-        <p:spPr>
-          <a:xfrm>
-            <a:off x="2122322" y="2948025"/>
-            <a:ext cx="373075" cy="208483"/>
-          </a:xfrm>
-          <a:prstGeom prst="ellipse">
-            <a:avLst/>
-          </a:prstGeom>
-          <a:solidFill>
-            <a:srgbClr val="D90000"/>
-          </a:solidFill>
-          <a:ln>
-            <a:noFill/>
-          </a:ln>
-        </p:spPr>
-        <p:style>
-          <a:lnRef idx="1">
-            <a:schemeClr val="accent1"/>
-          </a:lnRef>
-          <a:fillRef idx="3">
-            <a:schemeClr val="accent1"/>
-          </a:fillRef>
-          <a:effectRef idx="2">
-            <a:schemeClr val="accent1"/>
-          </a:effectRef>
-          <a:fontRef idx="minor">
-            <a:schemeClr val="lt1"/>
-          </a:fontRef>
-        </p:style>
-        <p:txBody>
-          <a:bodyPr rtlCol="0" anchor="ctr"/>
-          <a:lstStyle/>
-          <a:p>
-            <a:pPr algn="ctr"/>
-          </a:p>
-        </p:txBody>
-      </p:sp>
-      <p:sp>
-        <p:nvSpPr>
-          <p:cNvPr id="15" name="Rectangle 14"/>
-          <p:cNvSpPr/>
-          <p:nvPr/>
-        </p:nvSpPr>
-        <p:spPr>
-          <a:xfrm>
-            <a:off x="1655978" y="3017520"/>
-            <a:ext cx="1305763" cy="69494"/>
-          </a:xfrm>
-          <a:prstGeom prst="rect">
-            <a:avLst/>
-          </a:prstGeom>
-          <a:solidFill>
-            <a:srgbClr val="087490"/>
-          </a:solidFill>
-          <a:ln>
-            <a:noFill/>
-          </a:ln>
-        </p:spPr>
-        <p:style>
-          <a:lnRef idx="1">
-            <a:schemeClr val="accent1"/>
-          </a:lnRef>
-          <a:fillRef idx="3">
-            <a:schemeClr val="accent1"/>
-          </a:fillRef>
-          <a:effectRef idx="2">
-            <a:schemeClr val="accent1"/>
-          </a:effectRef>
-          <a:fontRef idx="minor">
-            <a:schemeClr val="lt1"/>
-          </a:fontRef>
-        </p:style>
-        <p:txBody>
-          <a:bodyPr rtlCol="0" anchor="ctr"/>
-          <a:lstStyle/>
-          <a:p>
-            <a:pPr algn="ctr"/>
-          </a:p>
-        </p:txBody>
-      </p:sp>
-      <p:sp>
-        <p:nvSpPr>
-          <p:cNvPr id="16" name="TextBox 15"/>
-          <p:cNvSpPr txBox="1"/>
-          <p:nvPr/>
-        </p:nvSpPr>
-        <p:spPr>
-          <a:xfrm>
-            <a:off x="1143000" y="3630168"/>
-            <a:ext cx="2331720" cy="228600"/>
-          </a:xfrm>
-          <a:prstGeom prst="rect">
-            <a:avLst/>
-          </a:prstGeom>
-          <a:noFill/>
-        </p:spPr>
-        <p:txBody>
-          <a:bodyPr wrap="square" lIns="0" rIns="0" tIns="0" bIns="0">
-            <a:spAutoFit/>
-          </a:bodyPr>
-          <a:lstStyle/>
-          <a:p>
-            <a:pPr algn="ctr"/>
-            <a:r>
-              <a:rPr sz="1000" b="0">
-                <a:solidFill>
-                  <a:srgbClr val="475569"/>
-                </a:solidFill>
-                <a:latin typeface="Arial"/>
-              </a:rPr>
-              <a:t>Integrated Science</a:t>
-            </a:r>
-          </a:p>
-        </p:txBody>
-      </p:sp>
-      <p:sp>
-        <p:nvSpPr>
-          <p:cNvPr id="17" name="TextBox 16"/>
-          <p:cNvSpPr txBox="1"/>
-          <p:nvPr/>
-        </p:nvSpPr>
-        <p:spPr>
-          <a:xfrm>
-            <a:off x="960120" y="4315968"/>
-            <a:ext cx="2697480" cy="310896"/>
-          </a:xfrm>
-          <a:prstGeom prst="rect">
-            <a:avLst/>
-          </a:prstGeom>
-          <a:noFill/>
-        </p:spPr>
-        <p:txBody>
-          <a:bodyPr wrap="square" lIns="0" rIns="0" tIns="0" bIns="0">
-            <a:spAutoFit/>
-          </a:bodyPr>
-          <a:lstStyle/>
-          <a:p>
-            <a:pPr algn="ctr"/>
-            <a:r>
-              <a:rPr sz="1300" b="1">
+          <a:bodyPr rtlCol="0" anchor="t" wrap="square" lIns="101600" rIns="101600" tIns="101600" bIns="38100"/>
+          <a:lstStyle/>
+          <a:p>
+            <a:pPr algn="l"/>
+            <a:r>
+              <a:rPr sz="1200" b="1">
                 <a:solidFill>
                   <a:srgbClr val="1B7F3A"/>
                 </a:solidFill>
                 <a:latin typeface="Arial"/>
               </a:rPr>
-              <a:t>GROUP CHALLENGE</a:t>
-            </a:r>
-          </a:p>
-        </p:txBody>
-      </p:sp>
-      <p:sp>
-        <p:nvSpPr>
-          <p:cNvPr id="18" name="TextBox 17"/>
+              <a:t>GROUP INFOGRAPHIC</a:t>
+            </a:r>
+          </a:p>
+        </p:txBody>
+      </p:sp>
+      <p:sp>
+        <p:nvSpPr>
+          <p:cNvPr id="12" name="TextBox 11"/>
           <p:cNvSpPr txBox="1"/>
           <p:nvPr/>
         </p:nvSpPr>
         <p:spPr>
           <a:xfrm>
-            <a:off x="1005840" y="4754880"/>
-            <a:ext cx="2606040" cy="640080"/>
+            <a:off x="1417319" y="2322576"/>
+            <a:ext cx="9372600" cy="411480"/>
           </a:xfrm>
           <a:prstGeom prst="rect">
             <a:avLst/>
@@ -10075,27 +9948,152 @@
           <a:p>
             <a:pPr algn="ctr"/>
             <a:r>
-              <a:rPr sz="1500" b="1">
+              <a:rPr sz="1800" b="1">
                 <a:solidFill>
                   <a:srgbClr val="111827"/>
                 </a:solidFill>
                 <a:latin typeface="Arial"/>
               </a:rPr>
-              <a:t>Produce one answer the class can check.</a:t>
-            </a:r>
-          </a:p>
-        </p:txBody>
-      </p:sp>
-      <p:sp>
-        <p:nvSpPr>
-          <p:cNvPr id="19" name="Rounded Rectangle 18"/>
+              <a:t>Challenge</a:t>
+            </a:r>
+          </a:p>
+        </p:txBody>
+      </p:sp>
+      <p:sp>
+        <p:nvSpPr>
+          <p:cNvPr id="13" name="Oval 12"/>
           <p:cNvSpPr/>
           <p:nvPr/>
         </p:nvSpPr>
         <p:spPr>
           <a:xfrm>
-            <a:off x="4343400" y="1828800"/>
-            <a:ext cx="6903720" cy="868680"/>
+            <a:off x="5756148" y="3355848"/>
+            <a:ext cx="694944" cy="694944"/>
+          </a:xfrm>
+          <a:prstGeom prst="ellipse">
+            <a:avLst/>
+          </a:prstGeom>
+          <a:solidFill>
+            <a:srgbClr val="FCD116"/>
+          </a:solidFill>
+          <a:ln w="15240">
+            <a:solidFill>
+              <a:srgbClr val="111827"/>
+            </a:solidFill>
+          </a:ln>
+        </p:spPr>
+        <p:style>
+          <a:lnRef idx="1">
+            <a:schemeClr val="accent1"/>
+          </a:lnRef>
+          <a:fillRef idx="3">
+            <a:schemeClr val="accent1"/>
+          </a:fillRef>
+          <a:effectRef idx="2">
+            <a:schemeClr val="accent1"/>
+          </a:effectRef>
+          <a:fontRef idx="minor">
+            <a:schemeClr val="lt1"/>
+          </a:fontRef>
+        </p:style>
+        <p:txBody>
+          <a:bodyPr rtlCol="0" anchor="ctr"/>
+          <a:lstStyle/>
+          <a:p>
+            <a:pPr algn="ctr"/>
+          </a:p>
+        </p:txBody>
+      </p:sp>
+      <p:sp>
+        <p:nvSpPr>
+          <p:cNvPr id="14" name="Rounded Rectangle 13"/>
+          <p:cNvSpPr/>
+          <p:nvPr/>
+        </p:nvSpPr>
+        <p:spPr>
+          <a:xfrm>
+            <a:off x="5628131" y="4078224"/>
+            <a:ext cx="950976" cy="1463040"/>
+          </a:xfrm>
+          <a:prstGeom prst="roundRect">
+            <a:avLst/>
+          </a:prstGeom>
+          <a:solidFill>
+            <a:srgbClr val="ECFDF5"/>
+          </a:solidFill>
+          <a:ln w="17780">
+            <a:solidFill>
+              <a:srgbClr val="1B7F3A"/>
+            </a:solidFill>
+          </a:ln>
+        </p:spPr>
+        <p:style>
+          <a:lnRef idx="1">
+            <a:schemeClr val="accent1"/>
+          </a:lnRef>
+          <a:fillRef idx="3">
+            <a:schemeClr val="accent1"/>
+          </a:fillRef>
+          <a:effectRef idx="2">
+            <a:schemeClr val="accent1"/>
+          </a:effectRef>
+          <a:fontRef idx="minor">
+            <a:schemeClr val="lt1"/>
+          </a:fontRef>
+        </p:style>
+        <p:txBody>
+          <a:bodyPr rtlCol="0" anchor="ctr"/>
+          <a:lstStyle/>
+          <a:p>
+            <a:pPr algn="ctr"/>
+          </a:p>
+        </p:txBody>
+      </p:sp>
+      <p:cxnSp>
+        <p:nvCxnSpPr>
+          <p:cNvPr id="15" name="Connector 14"/>
+          <p:cNvCxnSpPr/>
+          <p:nvPr/>
+        </p:nvCxnSpPr>
+        <p:spPr>
+          <a:xfrm flipH="1" flipV="1">
+            <a:off x="2697480" y="3611880"/>
+            <a:ext cx="3406140" cy="704088"/>
+          </a:xfrm>
+          <a:prstGeom prst="line">
+            <a:avLst/>
+          </a:prstGeom>
+          <a:ln w="20320">
+            <a:solidFill>
+              <a:srgbClr val="1B7F3A"/>
+            </a:solidFill>
+          </a:ln>
+        </p:spPr>
+        <p:style>
+          <a:lnRef idx="2">
+            <a:schemeClr val="accent1"/>
+          </a:lnRef>
+          <a:fillRef idx="0">
+            <a:schemeClr val="accent1"/>
+          </a:fillRef>
+          <a:effectRef idx="1">
+            <a:schemeClr val="accent1"/>
+          </a:effectRef>
+          <a:fontRef idx="minor">
+            <a:schemeClr val="tx1"/>
+          </a:fontRef>
+        </p:style>
+      </p:cxnSp>
+      <p:sp>
+        <p:nvSpPr>
+          <p:cNvPr id="16" name="Rounded Rectangle 15"/>
+          <p:cNvSpPr/>
+          <p:nvPr/>
+        </p:nvSpPr>
+        <p:spPr>
+          <a:xfrm>
+            <a:off x="1463040" y="3218688"/>
+            <a:ext cx="2468880" cy="786384"/>
           </a:xfrm>
           <a:prstGeom prst="roundRect">
             <a:avLst/>
@@ -10133,57 +10131,14 @@
       </p:sp>
       <p:sp>
         <p:nvSpPr>
-          <p:cNvPr id="20" name="Rectangle 19"/>
-          <p:cNvSpPr/>
-          <p:nvPr/>
-        </p:nvSpPr>
-        <p:spPr>
-          <a:xfrm>
-            <a:off x="4343400" y="1828800"/>
-            <a:ext cx="566928" cy="868680"/>
-          </a:xfrm>
-          <a:prstGeom prst="rect">
-            <a:avLst/>
-          </a:prstGeom>
-          <a:solidFill>
-            <a:srgbClr val="1B7F3A"/>
-          </a:solidFill>
-          <a:ln>
-            <a:noFill/>
-          </a:ln>
-        </p:spPr>
-        <p:style>
-          <a:lnRef idx="1">
-            <a:schemeClr val="accent1"/>
-          </a:lnRef>
-          <a:fillRef idx="3">
-            <a:schemeClr val="accent1"/>
-          </a:fillRef>
-          <a:effectRef idx="2">
-            <a:schemeClr val="accent1"/>
-          </a:effectRef>
-          <a:fontRef idx="minor">
-            <a:schemeClr val="lt1"/>
-          </a:fontRef>
-        </p:style>
-        <p:txBody>
-          <a:bodyPr rtlCol="0" anchor="ctr"/>
-          <a:lstStyle/>
-          <a:p>
-            <a:pPr algn="ctr"/>
-          </a:p>
-        </p:txBody>
-      </p:sp>
-      <p:sp>
-        <p:nvSpPr>
-          <p:cNvPr id="21" name="TextBox 20"/>
+          <p:cNvPr id="17" name="TextBox 16"/>
           <p:cNvSpPr txBox="1"/>
           <p:nvPr/>
         </p:nvSpPr>
         <p:spPr>
           <a:xfrm>
-            <a:off x="4343400" y="2144268"/>
-            <a:ext cx="566928" cy="237744"/>
+            <a:off x="1609344" y="3392424"/>
+            <a:ext cx="2176272" cy="347472"/>
           </a:xfrm>
           <a:prstGeom prst="rect">
             <a:avLst/>
@@ -10197,40 +10152,6 @@
           <a:lstStyle/>
           <a:p>
             <a:pPr algn="ctr"/>
-            <a:r>
-              <a:rPr sz="1400" b="1">
-                <a:solidFill>
-                  <a:srgbClr val="FFFFFF"/>
-                </a:solidFill>
-                <a:latin typeface="Arial"/>
-              </a:rPr>
-              <a:t>1</a:t>
-            </a:r>
-          </a:p>
-        </p:txBody>
-      </p:sp>
-      <p:sp>
-        <p:nvSpPr>
-          <p:cNvPr id="22" name="TextBox 21"/>
-          <p:cNvSpPr txBox="1"/>
-          <p:nvPr/>
-        </p:nvSpPr>
-        <p:spPr>
-          <a:xfrm>
-            <a:off x="5129784" y="1993392"/>
-            <a:ext cx="5879592" cy="630936"/>
-          </a:xfrm>
-          <a:prstGeom prst="rect">
-            <a:avLst/>
-          </a:prstGeom>
-          <a:noFill/>
-        </p:spPr>
-        <p:txBody>
-          <a:bodyPr wrap="square" lIns="0" rIns="0" tIns="0" bIns="0">
-            <a:spAutoFit/>
-          </a:bodyPr>
-          <a:lstStyle/>
-          <a:p>
             <a:r>
               <a:rPr sz="1200" b="1">
                 <a:solidFill>
@@ -10238,21 +10159,56 @@
                 </a:solidFill>
                 <a:latin typeface="Arial"/>
               </a:rPr>
-              <a:t>Brainstorm in pairs and list all the scientific experiments and models created</a:t>
-            </a:r>
-          </a:p>
-        </p:txBody>
-      </p:sp>
-      <p:sp>
-        <p:nvSpPr>
-          <p:cNvPr id="23" name="Rounded Rectangle 22"/>
+              <a:t>Brainstorm in pairs and list all the</a:t>
+            </a:r>
+          </a:p>
+        </p:txBody>
+      </p:sp>
+      <p:cxnSp>
+        <p:nvCxnSpPr>
+          <p:cNvPr id="18" name="Connector 17"/>
+          <p:cNvCxnSpPr/>
+          <p:nvPr/>
+        </p:nvCxnSpPr>
+        <p:spPr>
+          <a:xfrm flipV="1">
+            <a:off x="6103620" y="3611880"/>
+            <a:ext cx="3497580" cy="704088"/>
+          </a:xfrm>
+          <a:prstGeom prst="line">
+            <a:avLst/>
+          </a:prstGeom>
+          <a:ln w="20320">
+            <a:solidFill>
+              <a:srgbClr val="1B7F3A"/>
+            </a:solidFill>
+          </a:ln>
+        </p:spPr>
+        <p:style>
+          <a:lnRef idx="2">
+            <a:schemeClr val="accent1"/>
+          </a:lnRef>
+          <a:fillRef idx="0">
+            <a:schemeClr val="accent1"/>
+          </a:fillRef>
+          <a:effectRef idx="1">
+            <a:schemeClr val="accent1"/>
+          </a:effectRef>
+          <a:fontRef idx="minor">
+            <a:schemeClr val="tx1"/>
+          </a:fontRef>
+        </p:style>
+      </p:cxnSp>
+      <p:sp>
+        <p:nvSpPr>
+          <p:cNvPr id="19" name="Rounded Rectangle 18"/>
           <p:cNvSpPr/>
           <p:nvPr/>
         </p:nvSpPr>
         <p:spPr>
           <a:xfrm>
-            <a:off x="4343400" y="2999232"/>
-            <a:ext cx="6903720" cy="868680"/>
+            <a:off x="8366760" y="3218688"/>
+            <a:ext cx="2468880" cy="786384"/>
           </a:xfrm>
           <a:prstGeom prst="roundRect">
             <a:avLst/>
@@ -10290,57 +10246,14 @@
       </p:sp>
       <p:sp>
         <p:nvSpPr>
-          <p:cNvPr id="24" name="Rectangle 23"/>
-          <p:cNvSpPr/>
-          <p:nvPr/>
-        </p:nvSpPr>
-        <p:spPr>
-          <a:xfrm>
-            <a:off x="4343400" y="2999232"/>
-            <a:ext cx="566928" cy="868680"/>
-          </a:xfrm>
-          <a:prstGeom prst="rect">
-            <a:avLst/>
-          </a:prstGeom>
-          <a:solidFill>
-            <a:srgbClr val="1B7F3A"/>
-          </a:solidFill>
-          <a:ln>
-            <a:noFill/>
-          </a:ln>
-        </p:spPr>
-        <p:style>
-          <a:lnRef idx="1">
-            <a:schemeClr val="accent1"/>
-          </a:lnRef>
-          <a:fillRef idx="3">
-            <a:schemeClr val="accent1"/>
-          </a:fillRef>
-          <a:effectRef idx="2">
-            <a:schemeClr val="accent1"/>
-          </a:effectRef>
-          <a:fontRef idx="minor">
-            <a:schemeClr val="lt1"/>
-          </a:fontRef>
-        </p:style>
-        <p:txBody>
-          <a:bodyPr rtlCol="0" anchor="ctr"/>
-          <a:lstStyle/>
-          <a:p>
-            <a:pPr algn="ctr"/>
-          </a:p>
-        </p:txBody>
-      </p:sp>
-      <p:sp>
-        <p:nvSpPr>
-          <p:cNvPr id="25" name="TextBox 24"/>
+          <p:cNvPr id="20" name="TextBox 19"/>
           <p:cNvSpPr txBox="1"/>
           <p:nvPr/>
         </p:nvSpPr>
         <p:spPr>
           <a:xfrm>
-            <a:off x="4343400" y="3314700"/>
-            <a:ext cx="566928" cy="237744"/>
+            <a:off x="8513064" y="3392424"/>
+            <a:ext cx="2176272" cy="347472"/>
           </a:xfrm>
           <a:prstGeom prst="rect">
             <a:avLst/>
@@ -10354,40 +10267,6 @@
           <a:lstStyle/>
           <a:p>
             <a:pPr algn="ctr"/>
-            <a:r>
-              <a:rPr sz="1400" b="1">
-                <a:solidFill>
-                  <a:srgbClr val="FFFFFF"/>
-                </a:solidFill>
-                <a:latin typeface="Arial"/>
-              </a:rPr>
-              <a:t>2</a:t>
-            </a:r>
-          </a:p>
-        </p:txBody>
-      </p:sp>
-      <p:sp>
-        <p:nvSpPr>
-          <p:cNvPr id="26" name="TextBox 25"/>
-          <p:cNvSpPr txBox="1"/>
-          <p:nvPr/>
-        </p:nvSpPr>
-        <p:spPr>
-          <a:xfrm>
-            <a:off x="5129784" y="3163824"/>
-            <a:ext cx="5879592" cy="630936"/>
-          </a:xfrm>
-          <a:prstGeom prst="rect">
-            <a:avLst/>
-          </a:prstGeom>
-          <a:noFill/>
-        </p:spPr>
-        <p:txBody>
-          <a:bodyPr wrap="square" lIns="0" rIns="0" tIns="0" bIns="0">
-            <a:spAutoFit/>
-          </a:bodyPr>
-          <a:lstStyle/>
-          <a:p>
             <a:r>
               <a:rPr sz="1200" b="1">
                 <a:solidFill>
@@ -10395,21 +10274,56 @@
                 </a:solidFill>
                 <a:latin typeface="Arial"/>
               </a:rPr>
-              <a:t>Copy the report structure into their notebooks and label each part based</a:t>
-            </a:r>
-          </a:p>
-        </p:txBody>
-      </p:sp>
-      <p:sp>
-        <p:nvSpPr>
-          <p:cNvPr id="27" name="Rounded Rectangle 26"/>
+              <a:t>Copy the report structure into their notebooks</a:t>
+            </a:r>
+          </a:p>
+        </p:txBody>
+      </p:sp>
+      <p:cxnSp>
+        <p:nvCxnSpPr>
+          <p:cNvPr id="21" name="Connector 20"/>
+          <p:cNvCxnSpPr/>
+          <p:nvPr/>
+        </p:nvCxnSpPr>
+        <p:spPr>
+          <a:xfrm flipH="1">
+            <a:off x="2697480" y="4315968"/>
+            <a:ext cx="3406140" cy="1170432"/>
+          </a:xfrm>
+          <a:prstGeom prst="line">
+            <a:avLst/>
+          </a:prstGeom>
+          <a:ln w="20320">
+            <a:solidFill>
+              <a:srgbClr val="1B7F3A"/>
+            </a:solidFill>
+          </a:ln>
+        </p:spPr>
+        <p:style>
+          <a:lnRef idx="2">
+            <a:schemeClr val="accent1"/>
+          </a:lnRef>
+          <a:fillRef idx="0">
+            <a:schemeClr val="accent1"/>
+          </a:fillRef>
+          <a:effectRef idx="1">
+            <a:schemeClr val="accent1"/>
+          </a:effectRef>
+          <a:fontRef idx="minor">
+            <a:schemeClr val="tx1"/>
+          </a:fontRef>
+        </p:style>
+      </p:cxnSp>
+      <p:sp>
+        <p:nvSpPr>
+          <p:cNvPr id="22" name="Rounded Rectangle 21"/>
           <p:cNvSpPr/>
           <p:nvPr/>
         </p:nvSpPr>
         <p:spPr>
           <a:xfrm>
-            <a:off x="4343400" y="4169664"/>
-            <a:ext cx="6903720" cy="868680"/>
+            <a:off x="1463040" y="5093208"/>
+            <a:ext cx="2468880" cy="786384"/>
           </a:xfrm>
           <a:prstGeom prst="roundRect">
             <a:avLst/>
@@ -10447,57 +10361,14 @@
       </p:sp>
       <p:sp>
         <p:nvSpPr>
-          <p:cNvPr id="28" name="Rectangle 27"/>
-          <p:cNvSpPr/>
-          <p:nvPr/>
-        </p:nvSpPr>
-        <p:spPr>
-          <a:xfrm>
-            <a:off x="4343400" y="4169664"/>
-            <a:ext cx="566928" cy="868680"/>
-          </a:xfrm>
-          <a:prstGeom prst="rect">
-            <a:avLst/>
-          </a:prstGeom>
-          <a:solidFill>
-            <a:srgbClr val="1B7F3A"/>
-          </a:solidFill>
-          <a:ln>
-            <a:noFill/>
-          </a:ln>
-        </p:spPr>
-        <p:style>
-          <a:lnRef idx="1">
-            <a:schemeClr val="accent1"/>
-          </a:lnRef>
-          <a:fillRef idx="3">
-            <a:schemeClr val="accent1"/>
-          </a:fillRef>
-          <a:effectRef idx="2">
-            <a:schemeClr val="accent1"/>
-          </a:effectRef>
-          <a:fontRef idx="minor">
-            <a:schemeClr val="lt1"/>
-          </a:fontRef>
-        </p:style>
-        <p:txBody>
-          <a:bodyPr rtlCol="0" anchor="ctr"/>
-          <a:lstStyle/>
-          <a:p>
-            <a:pPr algn="ctr"/>
-          </a:p>
-        </p:txBody>
-      </p:sp>
-      <p:sp>
-        <p:nvSpPr>
-          <p:cNvPr id="29" name="TextBox 28"/>
+          <p:cNvPr id="23" name="TextBox 22"/>
           <p:cNvSpPr txBox="1"/>
           <p:nvPr/>
         </p:nvSpPr>
         <p:spPr>
           <a:xfrm>
-            <a:off x="4343400" y="4485132"/>
-            <a:ext cx="566928" cy="237744"/>
+            <a:off x="1609344" y="5266944"/>
+            <a:ext cx="2176272" cy="347472"/>
           </a:xfrm>
           <a:prstGeom prst="rect">
             <a:avLst/>
@@ -10511,40 +10382,6 @@
           <a:lstStyle/>
           <a:p>
             <a:pPr algn="ctr"/>
-            <a:r>
-              <a:rPr sz="1400" b="1">
-                <a:solidFill>
-                  <a:srgbClr val="FFFFFF"/>
-                </a:solidFill>
-                <a:latin typeface="Arial"/>
-              </a:rPr>
-              <a:t>3</a:t>
-            </a:r>
-          </a:p>
-        </p:txBody>
-      </p:sp>
-      <p:sp>
-        <p:nvSpPr>
-          <p:cNvPr id="30" name="TextBox 29"/>
-          <p:cNvSpPr txBox="1"/>
-          <p:nvPr/>
-        </p:nvSpPr>
-        <p:spPr>
-          <a:xfrm>
-            <a:off x="5129784" y="4334256"/>
-            <a:ext cx="5879592" cy="630936"/>
-          </a:xfrm>
-          <a:prstGeom prst="rect">
-            <a:avLst/>
-          </a:prstGeom>
-          <a:noFill/>
-        </p:spPr>
-        <p:txBody>
-          <a:bodyPr wrap="square" lIns="0" rIns="0" tIns="0" bIns="0">
-            <a:spAutoFit/>
-          </a:bodyPr>
-          <a:lstStyle/>
-          <a:p>
             <a:r>
               <a:rPr sz="1200" b="1">
                 <a:solidFill>
@@ -10552,21 +10389,21 @@
                 </a:solidFill>
                 <a:latin typeface="Arial"/>
               </a:rPr>
-              <a:t>Participate in a whole-class exercise to verbally summarize the 'Biogas Digester'</a:t>
-            </a:r>
-          </a:p>
-        </p:txBody>
-      </p:sp>
-      <p:sp>
-        <p:nvSpPr>
-          <p:cNvPr id="31" name="Rounded Rectangle 30"/>
+              <a:t>Participate in a whole-class exercise to</a:t>
+            </a:r>
+          </a:p>
+        </p:txBody>
+      </p:sp>
+      <p:sp>
+        <p:nvSpPr>
+          <p:cNvPr id="24" name="Rounded Rectangle 23"/>
           <p:cNvSpPr/>
           <p:nvPr/>
         </p:nvSpPr>
         <p:spPr>
           <a:xfrm>
-            <a:off x="4343400" y="5413248"/>
-            <a:ext cx="6903720" cy="658368"/>
+            <a:off x="3703320" y="5650992"/>
+            <a:ext cx="5440680" cy="457200"/>
           </a:xfrm>
           <a:prstGeom prst="roundRect">
             <a:avLst/>
@@ -10574,7 +10411,7 @@
           <a:solidFill>
             <a:srgbClr val="FFFFFF"/>
           </a:solidFill>
-          <a:ln w="13970">
+          <a:ln w="12700">
             <a:solidFill>
               <a:srgbClr val="D90000"/>
             </a:solidFill>
@@ -10604,14 +10441,14 @@
       </p:sp>
       <p:sp>
         <p:nvSpPr>
-          <p:cNvPr id="32" name="TextBox 31"/>
+          <p:cNvPr id="25" name="TextBox 24"/>
           <p:cNvSpPr txBox="1"/>
           <p:nvPr/>
         </p:nvSpPr>
         <p:spPr>
           <a:xfrm>
-            <a:off x="4572000" y="5577840"/>
-            <a:ext cx="6446520" cy="274320"/>
+            <a:off x="3886200" y="5769864"/>
+            <a:ext cx="5074920" cy="164592"/>
           </a:xfrm>
           <a:prstGeom prst="rect">
             <a:avLst/>
@@ -10626,20 +10463,20 @@
           <a:p>
             <a:pPr algn="ctr"/>
             <a:r>
-              <a:rPr sz="1400" b="1">
+              <a:rPr sz="1100" b="1">
                 <a:solidFill>
                   <a:srgbClr val="D90000"/>
                 </a:solidFill>
                 <a:latin typeface="Arial"/>
               </a:rPr>
-              <a:t>Class share-out: one group explains, one group improves it.</a:t>
-            </a:r>
-          </a:p>
-        </p:txBody>
-      </p:sp>
-      <p:sp>
-        <p:nvSpPr>
-          <p:cNvPr id="33" name="TextBox 32"/>
+              <a:t>Share-out: explain one result, then improve it.</a:t>
+            </a:r>
+          </a:p>
+        </p:txBody>
+      </p:sp>
+      <p:sp>
+        <p:nvSpPr>
+          <p:cNvPr id="26" name="TextBox 25"/>
           <p:cNvSpPr txBox="1"/>
           <p:nvPr/>
         </p:nvSpPr>

--- a/uganda-p7-mvp/p7_t1_integrated_science_1205/p7_t1_integrated_science_1205.pptx
+++ b/uganda-p7-mvp/p7_t1_integrated_science_1205/p7_t1_integrated_science_1205.pptx
@@ -3527,8 +3527,8 @@
         </p:nvSpPr>
         <p:spPr>
           <a:xfrm>
-            <a:off x="1417319" y="2322576"/>
-            <a:ext cx="9372600" cy="411480"/>
+            <a:off x="1417319" y="2286000"/>
+            <a:ext cx="9372600" cy="310896"/>
           </a:xfrm>
           <a:prstGeom prst="rect">
             <a:avLst/>
@@ -3543,7 +3543,7 @@
           <a:p>
             <a:pPr algn="ctr"/>
             <a:r>
-              <a:rPr sz="1800" b="1">
+              <a:rPr sz="1700" b="1">
                 <a:solidFill>
                   <a:srgbClr val="111827"/>
                 </a:solidFill>
@@ -3556,22 +3556,22 @@
       </p:sp>
       <p:sp>
         <p:nvSpPr>
-          <p:cNvPr id="13" name="Oval 12"/>
+          <p:cNvPr id="13" name="Rounded Rectangle 12"/>
           <p:cNvSpPr/>
           <p:nvPr/>
         </p:nvSpPr>
         <p:spPr>
           <a:xfrm>
-            <a:off x="5756148" y="3355848"/>
-            <a:ext cx="694944" cy="694944"/>
-          </a:xfrm>
-          <a:prstGeom prst="ellipse">
-            <a:avLst/>
-          </a:prstGeom>
-          <a:solidFill>
-            <a:srgbClr val="FCD116"/>
-          </a:solidFill>
-          <a:ln w="15240">
+            <a:off x="1691640" y="2834639"/>
+            <a:ext cx="3931920" cy="3063240"/>
+          </a:xfrm>
+          <a:prstGeom prst="roundRect">
+            <a:avLst/>
+          </a:prstGeom>
+          <a:solidFill>
+            <a:srgbClr val="FFFFFF"/>
+          </a:solidFill>
+          <a:ln w="13970">
             <a:solidFill>
               <a:srgbClr val="111827"/>
             </a:solidFill>
@@ -3601,22 +3601,410 @@
       </p:sp>
       <p:sp>
         <p:nvSpPr>
-          <p:cNvPr id="14" name="Rounded Rectangle 13"/>
+          <p:cNvPr id="14" name="Rectangle 13"/>
           <p:cNvSpPr/>
           <p:nvPr/>
         </p:nvSpPr>
         <p:spPr>
           <a:xfrm>
-            <a:off x="5628131" y="4078224"/>
-            <a:ext cx="950976" cy="1463040"/>
+            <a:off x="2011680" y="3264408"/>
+            <a:ext cx="3246120" cy="32004"/>
+          </a:xfrm>
+          <a:prstGeom prst="rect">
+            <a:avLst/>
+          </a:prstGeom>
+          <a:solidFill>
+            <a:srgbClr val="CBD5E1"/>
+          </a:solidFill>
+          <a:ln>
+            <a:noFill/>
+          </a:ln>
+        </p:spPr>
+        <p:style>
+          <a:lnRef idx="1">
+            <a:schemeClr val="accent1"/>
+          </a:lnRef>
+          <a:fillRef idx="3">
+            <a:schemeClr val="accent1"/>
+          </a:fillRef>
+          <a:effectRef idx="2">
+            <a:schemeClr val="accent1"/>
+          </a:effectRef>
+          <a:fontRef idx="minor">
+            <a:schemeClr val="lt1"/>
+          </a:fontRef>
+        </p:style>
+        <p:txBody>
+          <a:bodyPr rtlCol="0" anchor="ctr"/>
+          <a:lstStyle/>
+          <a:p>
+            <a:pPr algn="ctr"/>
+          </a:p>
+        </p:txBody>
+      </p:sp>
+      <p:sp>
+        <p:nvSpPr>
+          <p:cNvPr id="15" name="TextBox 14"/>
+          <p:cNvSpPr txBox="1"/>
+          <p:nvPr/>
+        </p:nvSpPr>
+        <p:spPr>
+          <a:xfrm>
+            <a:off x="2103120" y="3054096"/>
+            <a:ext cx="1325880" cy="201168"/>
+          </a:xfrm>
+          <a:prstGeom prst="rect">
+            <a:avLst/>
+          </a:prstGeom>
+          <a:noFill/>
+        </p:spPr>
+        <p:txBody>
+          <a:bodyPr wrap="square" lIns="0" rIns="0" tIns="0" bIns="0">
+            <a:spAutoFit/>
+          </a:bodyPr>
+          <a:lstStyle/>
+          <a:p>
+            <a:r>
+              <a:rPr sz="1000" b="1">
+                <a:solidFill>
+                  <a:srgbClr val="1D4ED8"/>
+                </a:solidFill>
+                <a:latin typeface="Arial"/>
+              </a:rPr>
+              <a:t>Title/Aim</a:t>
+            </a:r>
+          </a:p>
+        </p:txBody>
+      </p:sp>
+      <p:sp>
+        <p:nvSpPr>
+          <p:cNvPr id="16" name="Rectangle 15"/>
+          <p:cNvSpPr/>
+          <p:nvPr/>
+        </p:nvSpPr>
+        <p:spPr>
+          <a:xfrm>
+            <a:off x="2011680" y="3831335"/>
+            <a:ext cx="3246120" cy="32004"/>
+          </a:xfrm>
+          <a:prstGeom prst="rect">
+            <a:avLst/>
+          </a:prstGeom>
+          <a:solidFill>
+            <a:srgbClr val="CBD5E1"/>
+          </a:solidFill>
+          <a:ln>
+            <a:noFill/>
+          </a:ln>
+        </p:spPr>
+        <p:style>
+          <a:lnRef idx="1">
+            <a:schemeClr val="accent1"/>
+          </a:lnRef>
+          <a:fillRef idx="3">
+            <a:schemeClr val="accent1"/>
+          </a:fillRef>
+          <a:effectRef idx="2">
+            <a:schemeClr val="accent1"/>
+          </a:effectRef>
+          <a:fontRef idx="minor">
+            <a:schemeClr val="lt1"/>
+          </a:fontRef>
+        </p:style>
+        <p:txBody>
+          <a:bodyPr rtlCol="0" anchor="ctr"/>
+          <a:lstStyle/>
+          <a:p>
+            <a:pPr algn="ctr"/>
+          </a:p>
+        </p:txBody>
+      </p:sp>
+      <p:sp>
+        <p:nvSpPr>
+          <p:cNvPr id="17" name="TextBox 16"/>
+          <p:cNvSpPr txBox="1"/>
+          <p:nvPr/>
+        </p:nvSpPr>
+        <p:spPr>
+          <a:xfrm>
+            <a:off x="2103120" y="3621024"/>
+            <a:ext cx="1325880" cy="201168"/>
+          </a:xfrm>
+          <a:prstGeom prst="rect">
+            <a:avLst/>
+          </a:prstGeom>
+          <a:noFill/>
+        </p:spPr>
+        <p:txBody>
+          <a:bodyPr wrap="square" lIns="0" rIns="0" tIns="0" bIns="0">
+            <a:spAutoFit/>
+          </a:bodyPr>
+          <a:lstStyle/>
+          <a:p>
+            <a:r>
+              <a:rPr sz="1000" b="1">
+                <a:solidFill>
+                  <a:srgbClr val="1D4ED8"/>
+                </a:solidFill>
+                <a:latin typeface="Arial"/>
+              </a:rPr>
+              <a:t>Materials</a:t>
+            </a:r>
+          </a:p>
+        </p:txBody>
+      </p:sp>
+      <p:sp>
+        <p:nvSpPr>
+          <p:cNvPr id="18" name="Rectangle 17"/>
+          <p:cNvSpPr/>
+          <p:nvPr/>
+        </p:nvSpPr>
+        <p:spPr>
+          <a:xfrm>
+            <a:off x="2011680" y="4398264"/>
+            <a:ext cx="3246120" cy="32004"/>
+          </a:xfrm>
+          <a:prstGeom prst="rect">
+            <a:avLst/>
+          </a:prstGeom>
+          <a:solidFill>
+            <a:srgbClr val="CBD5E1"/>
+          </a:solidFill>
+          <a:ln>
+            <a:noFill/>
+          </a:ln>
+        </p:spPr>
+        <p:style>
+          <a:lnRef idx="1">
+            <a:schemeClr val="accent1"/>
+          </a:lnRef>
+          <a:fillRef idx="3">
+            <a:schemeClr val="accent1"/>
+          </a:fillRef>
+          <a:effectRef idx="2">
+            <a:schemeClr val="accent1"/>
+          </a:effectRef>
+          <a:fontRef idx="minor">
+            <a:schemeClr val="lt1"/>
+          </a:fontRef>
+        </p:style>
+        <p:txBody>
+          <a:bodyPr rtlCol="0" anchor="ctr"/>
+          <a:lstStyle/>
+          <a:p>
+            <a:pPr algn="ctr"/>
+          </a:p>
+        </p:txBody>
+      </p:sp>
+      <p:sp>
+        <p:nvSpPr>
+          <p:cNvPr id="19" name="TextBox 18"/>
+          <p:cNvSpPr txBox="1"/>
+          <p:nvPr/>
+        </p:nvSpPr>
+        <p:spPr>
+          <a:xfrm>
+            <a:off x="2103120" y="4187952"/>
+            <a:ext cx="1325880" cy="201168"/>
+          </a:xfrm>
+          <a:prstGeom prst="rect">
+            <a:avLst/>
+          </a:prstGeom>
+          <a:noFill/>
+        </p:spPr>
+        <p:txBody>
+          <a:bodyPr wrap="square" lIns="0" rIns="0" tIns="0" bIns="0">
+            <a:spAutoFit/>
+          </a:bodyPr>
+          <a:lstStyle/>
+          <a:p>
+            <a:r>
+              <a:rPr sz="1000" b="1">
+                <a:solidFill>
+                  <a:srgbClr val="1D4ED8"/>
+                </a:solidFill>
+                <a:latin typeface="Arial"/>
+              </a:rPr>
+              <a:t>Procedure</a:t>
+            </a:r>
+          </a:p>
+        </p:txBody>
+      </p:sp>
+      <p:sp>
+        <p:nvSpPr>
+          <p:cNvPr id="20" name="Rectangle 19"/>
+          <p:cNvSpPr/>
+          <p:nvPr/>
+        </p:nvSpPr>
+        <p:spPr>
+          <a:xfrm>
+            <a:off x="2011680" y="4965192"/>
+            <a:ext cx="3246120" cy="32004"/>
+          </a:xfrm>
+          <a:prstGeom prst="rect">
+            <a:avLst/>
+          </a:prstGeom>
+          <a:solidFill>
+            <a:srgbClr val="CBD5E1"/>
+          </a:solidFill>
+          <a:ln>
+            <a:noFill/>
+          </a:ln>
+        </p:spPr>
+        <p:style>
+          <a:lnRef idx="1">
+            <a:schemeClr val="accent1"/>
+          </a:lnRef>
+          <a:fillRef idx="3">
+            <a:schemeClr val="accent1"/>
+          </a:fillRef>
+          <a:effectRef idx="2">
+            <a:schemeClr val="accent1"/>
+          </a:effectRef>
+          <a:fontRef idx="minor">
+            <a:schemeClr val="lt1"/>
+          </a:fontRef>
+        </p:style>
+        <p:txBody>
+          <a:bodyPr rtlCol="0" anchor="ctr"/>
+          <a:lstStyle/>
+          <a:p>
+            <a:pPr algn="ctr"/>
+          </a:p>
+        </p:txBody>
+      </p:sp>
+      <p:sp>
+        <p:nvSpPr>
+          <p:cNvPr id="21" name="TextBox 20"/>
+          <p:cNvSpPr txBox="1"/>
+          <p:nvPr/>
+        </p:nvSpPr>
+        <p:spPr>
+          <a:xfrm>
+            <a:off x="2103120" y="4754879"/>
+            <a:ext cx="1325880" cy="201168"/>
+          </a:xfrm>
+          <a:prstGeom prst="rect">
+            <a:avLst/>
+          </a:prstGeom>
+          <a:noFill/>
+        </p:spPr>
+        <p:txBody>
+          <a:bodyPr wrap="square" lIns="0" rIns="0" tIns="0" bIns="0">
+            <a:spAutoFit/>
+          </a:bodyPr>
+          <a:lstStyle/>
+          <a:p>
+            <a:r>
+              <a:rPr sz="1000" b="1">
+                <a:solidFill>
+                  <a:srgbClr val="1D4ED8"/>
+                </a:solidFill>
+                <a:latin typeface="Arial"/>
+              </a:rPr>
+              <a:t>Result</a:t>
+            </a:r>
+          </a:p>
+        </p:txBody>
+      </p:sp>
+      <p:sp>
+        <p:nvSpPr>
+          <p:cNvPr id="22" name="Rounded Rectangle 21"/>
+          <p:cNvSpPr/>
+          <p:nvPr/>
+        </p:nvSpPr>
+        <p:spPr>
+          <a:xfrm>
+            <a:off x="6492240" y="3172968"/>
+            <a:ext cx="1627632" cy="960120"/>
           </a:xfrm>
           <a:prstGeom prst="roundRect">
             <a:avLst/>
           </a:prstGeom>
           <a:solidFill>
-            <a:srgbClr val="ECFDF5"/>
-          </a:solidFill>
-          <a:ln w="17780">
+            <a:srgbClr val="FFFFFF"/>
+          </a:solidFill>
+          <a:ln w="12700">
+            <a:solidFill>
+              <a:srgbClr val="1B7F3A"/>
+            </a:solidFill>
+          </a:ln>
+        </p:spPr>
+        <p:style>
+          <a:lnRef idx="1">
+            <a:schemeClr val="accent1"/>
+          </a:lnRef>
+          <a:fillRef idx="3">
+            <a:schemeClr val="accent1"/>
+          </a:fillRef>
+          <a:effectRef idx="2">
+            <a:schemeClr val="accent1"/>
+          </a:effectRef>
+          <a:fontRef idx="minor">
+            <a:schemeClr val="lt1"/>
+          </a:fontRef>
+        </p:style>
+        <p:txBody>
+          <a:bodyPr rtlCol="0" anchor="ctr"/>
+          <a:lstStyle/>
+          <a:p>
+            <a:pPr algn="ctr"/>
+          </a:p>
+        </p:txBody>
+      </p:sp>
+      <p:sp>
+        <p:nvSpPr>
+          <p:cNvPr id="23" name="TextBox 22"/>
+          <p:cNvSpPr txBox="1"/>
+          <p:nvPr/>
+        </p:nvSpPr>
+        <p:spPr>
+          <a:xfrm>
+            <a:off x="6629400" y="3520439"/>
+            <a:ext cx="1353312" cy="201168"/>
+          </a:xfrm>
+          <a:prstGeom prst="rect">
+            <a:avLst/>
+          </a:prstGeom>
+          <a:noFill/>
+        </p:spPr>
+        <p:txBody>
+          <a:bodyPr wrap="square" lIns="0" rIns="0" tIns="0" bIns="0">
+            <a:spAutoFit/>
+          </a:bodyPr>
+          <a:lstStyle/>
+          <a:p>
+            <a:pPr algn="ctr"/>
+            <a:r>
+              <a:rPr sz="1000" b="1">
+                <a:solidFill>
+                  <a:srgbClr val="111827"/>
+                </a:solidFill>
+                <a:latin typeface="Arial"/>
+              </a:rPr>
+              <a:t>skeleton</a:t>
+            </a:r>
+          </a:p>
+        </p:txBody>
+      </p:sp>
+      <p:sp>
+        <p:nvSpPr>
+          <p:cNvPr id="24" name="Rounded Rectangle 23"/>
+          <p:cNvSpPr/>
+          <p:nvPr/>
+        </p:nvSpPr>
+        <p:spPr>
+          <a:xfrm>
+            <a:off x="8595359" y="3172968"/>
+            <a:ext cx="1627632" cy="960120"/>
+          </a:xfrm>
+          <a:prstGeom prst="roundRect">
+            <a:avLst/>
+          </a:prstGeom>
+          <a:solidFill>
+            <a:srgbClr val="FFFFFF"/>
+          </a:solidFill>
+          <a:ln w="12700">
             <a:solidFill>
               <a:srgbClr val="1D4ED8"/>
             </a:solidFill>
@@ -3644,65 +4032,225 @@
           </a:p>
         </p:txBody>
       </p:sp>
-      <p:cxnSp>
-        <p:nvCxnSpPr>
-          <p:cNvPr id="15" name="Connector 14"/>
-          <p:cNvCxnSpPr/>
-          <p:nvPr/>
-        </p:nvCxnSpPr>
-        <p:spPr>
-          <a:xfrm flipH="1" flipV="1">
-            <a:off x="2697480" y="3611880"/>
-            <a:ext cx="3406140" cy="704088"/>
-          </a:xfrm>
-          <a:prstGeom prst="line">
-            <a:avLst/>
-          </a:prstGeom>
-          <a:ln w="20320">
+      <p:sp>
+        <p:nvSpPr>
+          <p:cNvPr id="25" name="TextBox 24"/>
+          <p:cNvSpPr txBox="1"/>
+          <p:nvPr/>
+        </p:nvSpPr>
+        <p:spPr>
+          <a:xfrm>
+            <a:off x="8732519" y="3520439"/>
+            <a:ext cx="1353312" cy="201168"/>
+          </a:xfrm>
+          <a:prstGeom prst="rect">
+            <a:avLst/>
+          </a:prstGeom>
+          <a:noFill/>
+        </p:spPr>
+        <p:txBody>
+          <a:bodyPr wrap="square" lIns="0" rIns="0" tIns="0" bIns="0">
+            <a:spAutoFit/>
+          </a:bodyPr>
+          <a:lstStyle/>
+          <a:p>
+            <a:pPr algn="ctr"/>
+            <a:r>
+              <a:rPr sz="1000" b="1">
+                <a:solidFill>
+                  <a:srgbClr val="111827"/>
+                </a:solidFill>
+                <a:latin typeface="Arial"/>
+              </a:rPr>
+              <a:t>circuit</a:t>
+            </a:r>
+          </a:p>
+        </p:txBody>
+      </p:sp>
+      <p:sp>
+        <p:nvSpPr>
+          <p:cNvPr id="26" name="Rounded Rectangle 25"/>
+          <p:cNvSpPr/>
+          <p:nvPr/>
+        </p:nvSpPr>
+        <p:spPr>
+          <a:xfrm>
+            <a:off x="6492240" y="4590288"/>
+            <a:ext cx="1627632" cy="960120"/>
+          </a:xfrm>
+          <a:prstGeom prst="roundRect">
+            <a:avLst/>
+          </a:prstGeom>
+          <a:solidFill>
+            <a:srgbClr val="FFF7E0"/>
+          </a:solidFill>
+          <a:ln w="12700">
+            <a:solidFill>
+              <a:srgbClr val="FCD116"/>
+            </a:solidFill>
+          </a:ln>
+        </p:spPr>
+        <p:style>
+          <a:lnRef idx="1">
+            <a:schemeClr val="accent1"/>
+          </a:lnRef>
+          <a:fillRef idx="3">
+            <a:schemeClr val="accent1"/>
+          </a:fillRef>
+          <a:effectRef idx="2">
+            <a:schemeClr val="accent1"/>
+          </a:effectRef>
+          <a:fontRef idx="minor">
+            <a:schemeClr val="lt1"/>
+          </a:fontRef>
+        </p:style>
+        <p:txBody>
+          <a:bodyPr rtlCol="0" anchor="ctr"/>
+          <a:lstStyle/>
+          <a:p>
+            <a:pPr algn="ctr"/>
+          </a:p>
+        </p:txBody>
+      </p:sp>
+      <p:sp>
+        <p:nvSpPr>
+          <p:cNvPr id="27" name="TextBox 26"/>
+          <p:cNvSpPr txBox="1"/>
+          <p:nvPr/>
+        </p:nvSpPr>
+        <p:spPr>
+          <a:xfrm>
+            <a:off x="6629400" y="4937759"/>
+            <a:ext cx="1353312" cy="201168"/>
+          </a:xfrm>
+          <a:prstGeom prst="rect">
+            <a:avLst/>
+          </a:prstGeom>
+          <a:noFill/>
+        </p:spPr>
+        <p:txBody>
+          <a:bodyPr wrap="square" lIns="0" rIns="0" tIns="0" bIns="0">
+            <a:spAutoFit/>
+          </a:bodyPr>
+          <a:lstStyle/>
+          <a:p>
+            <a:pPr algn="ctr"/>
+            <a:r>
+              <a:rPr sz="1000" b="1">
+                <a:solidFill>
+                  <a:srgbClr val="111827"/>
+                </a:solidFill>
+                <a:latin typeface="Arial"/>
+              </a:rPr>
+              <a:t>solar</a:t>
+            </a:r>
+          </a:p>
+        </p:txBody>
+      </p:sp>
+      <p:sp>
+        <p:nvSpPr>
+          <p:cNvPr id="28" name="Rounded Rectangle 27"/>
+          <p:cNvSpPr/>
+          <p:nvPr/>
+        </p:nvSpPr>
+        <p:spPr>
+          <a:xfrm>
+            <a:off x="8595359" y="4590288"/>
+            <a:ext cx="1627632" cy="960120"/>
+          </a:xfrm>
+          <a:prstGeom prst="roundRect">
+            <a:avLst/>
+          </a:prstGeom>
+          <a:solidFill>
+            <a:srgbClr val="FFFFFF"/>
+          </a:solidFill>
+          <a:ln w="12700">
+            <a:solidFill>
+              <a:srgbClr val="D90000"/>
+            </a:solidFill>
+          </a:ln>
+        </p:spPr>
+        <p:style>
+          <a:lnRef idx="1">
+            <a:schemeClr val="accent1"/>
+          </a:lnRef>
+          <a:fillRef idx="3">
+            <a:schemeClr val="accent1"/>
+          </a:fillRef>
+          <a:effectRef idx="2">
+            <a:schemeClr val="accent1"/>
+          </a:effectRef>
+          <a:fontRef idx="minor">
+            <a:schemeClr val="lt1"/>
+          </a:fontRef>
+        </p:style>
+        <p:txBody>
+          <a:bodyPr rtlCol="0" anchor="ctr"/>
+          <a:lstStyle/>
+          <a:p>
+            <a:pPr algn="ctr"/>
+          </a:p>
+        </p:txBody>
+      </p:sp>
+      <p:sp>
+        <p:nvSpPr>
+          <p:cNvPr id="29" name="TextBox 28"/>
+          <p:cNvSpPr txBox="1"/>
+          <p:nvPr/>
+        </p:nvSpPr>
+        <p:spPr>
+          <a:xfrm>
+            <a:off x="8732519" y="4937759"/>
+            <a:ext cx="1353312" cy="201168"/>
+          </a:xfrm>
+          <a:prstGeom prst="rect">
+            <a:avLst/>
+          </a:prstGeom>
+          <a:noFill/>
+        </p:spPr>
+        <p:txBody>
+          <a:bodyPr wrap="square" lIns="0" rIns="0" tIns="0" bIns="0">
+            <a:spAutoFit/>
+          </a:bodyPr>
+          <a:lstStyle/>
+          <a:p>
+            <a:pPr algn="ctr"/>
+            <a:r>
+              <a:rPr sz="1000" b="1">
+                <a:solidFill>
+                  <a:srgbClr val="111827"/>
+                </a:solidFill>
+                <a:latin typeface="Arial"/>
+              </a:rPr>
+              <a:t>biogas</a:t>
+            </a:r>
+          </a:p>
+        </p:txBody>
+      </p:sp>
+      <p:sp>
+        <p:nvSpPr>
+          <p:cNvPr id="30" name="Rounded Rectangle 29"/>
+          <p:cNvSpPr/>
+          <p:nvPr/>
+        </p:nvSpPr>
+        <p:spPr>
+          <a:xfrm>
+            <a:off x="1691640" y="6071616"/>
+            <a:ext cx="2727960" cy="713232"/>
+          </a:xfrm>
+          <a:prstGeom prst="roundRect">
+            <a:avLst/>
+          </a:prstGeom>
+          <a:solidFill>
+            <a:srgbClr val="FFFFFF"/>
+          </a:solidFill>
+          <a:ln w="11430">
             <a:solidFill>
               <a:srgbClr val="1D4ED8"/>
             </a:solidFill>
           </a:ln>
         </p:spPr>
         <p:style>
-          <a:lnRef idx="2">
-            <a:schemeClr val="accent1"/>
-          </a:lnRef>
-          <a:fillRef idx="0">
-            <a:schemeClr val="accent1"/>
-          </a:fillRef>
-          <a:effectRef idx="1">
-            <a:schemeClr val="accent1"/>
-          </a:effectRef>
-          <a:fontRef idx="minor">
-            <a:schemeClr val="tx1"/>
-          </a:fontRef>
-        </p:style>
-      </p:cxnSp>
-      <p:sp>
-        <p:nvSpPr>
-          <p:cNvPr id="16" name="Rounded Rectangle 15"/>
-          <p:cNvSpPr/>
-          <p:nvPr/>
-        </p:nvSpPr>
-        <p:spPr>
-          <a:xfrm>
-            <a:off x="1463040" y="3218688"/>
-            <a:ext cx="2468880" cy="786384"/>
-          </a:xfrm>
-          <a:prstGeom prst="roundRect">
-            <a:avLst/>
-          </a:prstGeom>
-          <a:solidFill>
-            <a:srgbClr val="FFFFFF"/>
-          </a:solidFill>
-          <a:ln w="11430">
-            <a:solidFill>
-              <a:srgbClr val="CBD5E1"/>
-            </a:solidFill>
-          </a:ln>
-        </p:spPr>
-        <p:style>
           <a:lnRef idx="1">
             <a:schemeClr val="accent1"/>
           </a:lnRef>
@@ -3726,14 +4274,14 @@
       </p:sp>
       <p:sp>
         <p:nvSpPr>
-          <p:cNvPr id="17" name="TextBox 16"/>
+          <p:cNvPr id="31" name="TextBox 30"/>
           <p:cNvSpPr txBox="1"/>
           <p:nvPr/>
         </p:nvSpPr>
         <p:spPr>
           <a:xfrm>
-            <a:off x="1609344" y="3392424"/>
-            <a:ext cx="2176272" cy="347472"/>
+            <a:off x="1801368" y="6208776"/>
+            <a:ext cx="2508504" cy="329184"/>
           </a:xfrm>
           <a:prstGeom prst="rect">
             <a:avLst/>
@@ -3748,7 +4296,7 @@
           <a:p>
             <a:pPr algn="ctr"/>
             <a:r>
-              <a:rPr sz="1200" b="1">
+              <a:rPr sz="1100" b="1">
                 <a:solidFill>
                   <a:srgbClr val="111827"/>
                 </a:solidFill>
@@ -3759,65 +4307,30 @@
           </a:p>
         </p:txBody>
       </p:sp>
-      <p:cxnSp>
-        <p:nvCxnSpPr>
-          <p:cNvPr id="18" name="Connector 17"/>
-          <p:cNvCxnSpPr/>
-          <p:nvPr/>
-        </p:nvCxnSpPr>
-        <p:spPr>
-          <a:xfrm flipV="1">
-            <a:off x="6103620" y="3611880"/>
-            <a:ext cx="3497580" cy="704088"/>
-          </a:xfrm>
-          <a:prstGeom prst="line">
-            <a:avLst/>
-          </a:prstGeom>
-          <a:ln w="20320">
+      <p:sp>
+        <p:nvSpPr>
+          <p:cNvPr id="32" name="Rounded Rectangle 31"/>
+          <p:cNvSpPr/>
+          <p:nvPr/>
+        </p:nvSpPr>
+        <p:spPr>
+          <a:xfrm>
+            <a:off x="4739640" y="6071616"/>
+            <a:ext cx="2727960" cy="713232"/>
+          </a:xfrm>
+          <a:prstGeom prst="roundRect">
+            <a:avLst/>
+          </a:prstGeom>
+          <a:solidFill>
+            <a:srgbClr val="FFFFFF"/>
+          </a:solidFill>
+          <a:ln w="11430">
             <a:solidFill>
               <a:srgbClr val="1D4ED8"/>
             </a:solidFill>
           </a:ln>
         </p:spPr>
         <p:style>
-          <a:lnRef idx="2">
-            <a:schemeClr val="accent1"/>
-          </a:lnRef>
-          <a:fillRef idx="0">
-            <a:schemeClr val="accent1"/>
-          </a:fillRef>
-          <a:effectRef idx="1">
-            <a:schemeClr val="accent1"/>
-          </a:effectRef>
-          <a:fontRef idx="minor">
-            <a:schemeClr val="tx1"/>
-          </a:fontRef>
-        </p:style>
-      </p:cxnSp>
-      <p:sp>
-        <p:nvSpPr>
-          <p:cNvPr id="19" name="Rounded Rectangle 18"/>
-          <p:cNvSpPr/>
-          <p:nvPr/>
-        </p:nvSpPr>
-        <p:spPr>
-          <a:xfrm>
-            <a:off x="8366760" y="3218688"/>
-            <a:ext cx="2468880" cy="786384"/>
-          </a:xfrm>
-          <a:prstGeom prst="roundRect">
-            <a:avLst/>
-          </a:prstGeom>
-          <a:solidFill>
-            <a:srgbClr val="FFFFFF"/>
-          </a:solidFill>
-          <a:ln w="11430">
-            <a:solidFill>
-              <a:srgbClr val="CBD5E1"/>
-            </a:solidFill>
-          </a:ln>
-        </p:spPr>
-        <p:style>
           <a:lnRef idx="1">
             <a:schemeClr val="accent1"/>
           </a:lnRef>
@@ -3841,14 +4354,14 @@
       </p:sp>
       <p:sp>
         <p:nvSpPr>
-          <p:cNvPr id="20" name="TextBox 19"/>
+          <p:cNvPr id="33" name="TextBox 32"/>
           <p:cNvSpPr txBox="1"/>
           <p:nvPr/>
         </p:nvSpPr>
         <p:spPr>
           <a:xfrm>
-            <a:off x="8513064" y="3392424"/>
-            <a:ext cx="2176272" cy="347472"/>
+            <a:off x="4849368" y="6208776"/>
+            <a:ext cx="2508504" cy="329184"/>
           </a:xfrm>
           <a:prstGeom prst="rect">
             <a:avLst/>
@@ -3863,7 +4376,7 @@
           <a:p>
             <a:pPr algn="ctr"/>
             <a:r>
-              <a:rPr sz="1200" b="1">
+              <a:rPr sz="1100" b="1">
                 <a:solidFill>
                   <a:srgbClr val="111827"/>
                 </a:solidFill>
@@ -3874,65 +4387,30 @@
           </a:p>
         </p:txBody>
       </p:sp>
-      <p:cxnSp>
-        <p:nvCxnSpPr>
-          <p:cNvPr id="21" name="Connector 20"/>
-          <p:cNvCxnSpPr/>
-          <p:nvPr/>
-        </p:nvCxnSpPr>
-        <p:spPr>
-          <a:xfrm flipH="1">
-            <a:off x="2697480" y="4315968"/>
-            <a:ext cx="3406140" cy="1170432"/>
-          </a:xfrm>
-          <a:prstGeom prst="line">
-            <a:avLst/>
-          </a:prstGeom>
-          <a:ln w="20320">
+      <p:sp>
+        <p:nvSpPr>
+          <p:cNvPr id="34" name="Rounded Rectangle 33"/>
+          <p:cNvSpPr/>
+          <p:nvPr/>
+        </p:nvSpPr>
+        <p:spPr>
+          <a:xfrm>
+            <a:off x="7787640" y="6071616"/>
+            <a:ext cx="2727960" cy="713232"/>
+          </a:xfrm>
+          <a:prstGeom prst="roundRect">
+            <a:avLst/>
+          </a:prstGeom>
+          <a:solidFill>
+            <a:srgbClr val="FFFFFF"/>
+          </a:solidFill>
+          <a:ln w="11430">
             <a:solidFill>
               <a:srgbClr val="1D4ED8"/>
             </a:solidFill>
           </a:ln>
         </p:spPr>
         <p:style>
-          <a:lnRef idx="2">
-            <a:schemeClr val="accent1"/>
-          </a:lnRef>
-          <a:fillRef idx="0">
-            <a:schemeClr val="accent1"/>
-          </a:fillRef>
-          <a:effectRef idx="1">
-            <a:schemeClr val="accent1"/>
-          </a:effectRef>
-          <a:fontRef idx="minor">
-            <a:schemeClr val="tx1"/>
-          </a:fontRef>
-        </p:style>
-      </p:cxnSp>
-      <p:sp>
-        <p:nvSpPr>
-          <p:cNvPr id="22" name="Rounded Rectangle 21"/>
-          <p:cNvSpPr/>
-          <p:nvPr/>
-        </p:nvSpPr>
-        <p:spPr>
-          <a:xfrm>
-            <a:off x="1463040" y="5093208"/>
-            <a:ext cx="2468880" cy="786384"/>
-          </a:xfrm>
-          <a:prstGeom prst="roundRect">
-            <a:avLst/>
-          </a:prstGeom>
-          <a:solidFill>
-            <a:srgbClr val="FFFFFF"/>
-          </a:solidFill>
-          <a:ln w="11430">
-            <a:solidFill>
-              <a:srgbClr val="CBD5E1"/>
-            </a:solidFill>
-          </a:ln>
-        </p:spPr>
-        <p:style>
           <a:lnRef idx="1">
             <a:schemeClr val="accent1"/>
           </a:lnRef>
@@ -3956,14 +4434,14 @@
       </p:sp>
       <p:sp>
         <p:nvSpPr>
-          <p:cNvPr id="23" name="TextBox 22"/>
+          <p:cNvPr id="35" name="TextBox 34"/>
           <p:cNvSpPr txBox="1"/>
           <p:nvPr/>
         </p:nvSpPr>
         <p:spPr>
           <a:xfrm>
-            <a:off x="1609344" y="5266944"/>
-            <a:ext cx="2176272" cy="347472"/>
+            <a:off x="7897368" y="6208776"/>
+            <a:ext cx="2508504" cy="329184"/>
           </a:xfrm>
           <a:prstGeom prst="rect">
             <a:avLst/>
@@ -3978,7 +4456,7 @@
           <a:p>
             <a:pPr algn="ctr"/>
             <a:r>
-              <a:rPr sz="1200" b="1">
+              <a:rPr sz="1100" b="1">
                 <a:solidFill>
                   <a:srgbClr val="111827"/>
                 </a:solidFill>
@@ -6750,8 +7228,8 @@
         </p:nvSpPr>
         <p:spPr>
           <a:xfrm>
-            <a:off x="1417319" y="2322576"/>
-            <a:ext cx="9372600" cy="411480"/>
+            <a:off x="1417319" y="2286000"/>
+            <a:ext cx="9372600" cy="310896"/>
           </a:xfrm>
           <a:prstGeom prst="rect">
             <a:avLst/>
@@ -6766,7 +7244,7 @@
           <a:p>
             <a:pPr algn="ctr"/>
             <a:r>
-              <a:rPr sz="1800" b="1">
+              <a:rPr sz="1700" b="1">
                 <a:solidFill>
                   <a:srgbClr val="111827"/>
                 </a:solidFill>
@@ -6779,22 +7257,22 @@
       </p:sp>
       <p:sp>
         <p:nvSpPr>
-          <p:cNvPr id="13" name="Oval 12"/>
+          <p:cNvPr id="13" name="Rounded Rectangle 12"/>
           <p:cNvSpPr/>
           <p:nvPr/>
         </p:nvSpPr>
         <p:spPr>
           <a:xfrm>
-            <a:off x="5756148" y="3355848"/>
-            <a:ext cx="694944" cy="694944"/>
-          </a:xfrm>
-          <a:prstGeom prst="ellipse">
-            <a:avLst/>
-          </a:prstGeom>
-          <a:solidFill>
-            <a:srgbClr val="FCD116"/>
-          </a:solidFill>
-          <a:ln w="15240">
+            <a:off x="1691640" y="2834639"/>
+            <a:ext cx="3931920" cy="3063240"/>
+          </a:xfrm>
+          <a:prstGeom prst="roundRect">
+            <a:avLst/>
+          </a:prstGeom>
+          <a:solidFill>
+            <a:srgbClr val="FFFFFF"/>
+          </a:solidFill>
+          <a:ln w="13970">
             <a:solidFill>
               <a:srgbClr val="111827"/>
             </a:solidFill>
@@ -6824,22 +7302,650 @@
       </p:sp>
       <p:sp>
         <p:nvSpPr>
-          <p:cNvPr id="14" name="Rounded Rectangle 13"/>
+          <p:cNvPr id="14" name="Rectangle 13"/>
           <p:cNvSpPr/>
           <p:nvPr/>
         </p:nvSpPr>
         <p:spPr>
           <a:xfrm>
-            <a:off x="5628131" y="4078224"/>
-            <a:ext cx="950976" cy="1463040"/>
+            <a:off x="2011680" y="3264408"/>
+            <a:ext cx="3246120" cy="32004"/>
+          </a:xfrm>
+          <a:prstGeom prst="rect">
+            <a:avLst/>
+          </a:prstGeom>
+          <a:solidFill>
+            <a:srgbClr val="CBD5E1"/>
+          </a:solidFill>
+          <a:ln>
+            <a:noFill/>
+          </a:ln>
+        </p:spPr>
+        <p:style>
+          <a:lnRef idx="1">
+            <a:schemeClr val="accent1"/>
+          </a:lnRef>
+          <a:fillRef idx="3">
+            <a:schemeClr val="accent1"/>
+          </a:fillRef>
+          <a:effectRef idx="2">
+            <a:schemeClr val="accent1"/>
+          </a:effectRef>
+          <a:fontRef idx="minor">
+            <a:schemeClr val="lt1"/>
+          </a:fontRef>
+        </p:style>
+        <p:txBody>
+          <a:bodyPr rtlCol="0" anchor="ctr"/>
+          <a:lstStyle/>
+          <a:p>
+            <a:pPr algn="ctr"/>
+          </a:p>
+        </p:txBody>
+      </p:sp>
+      <p:sp>
+        <p:nvSpPr>
+          <p:cNvPr id="15" name="TextBox 14"/>
+          <p:cNvSpPr txBox="1"/>
+          <p:nvPr/>
+        </p:nvSpPr>
+        <p:spPr>
+          <a:xfrm>
+            <a:off x="2103120" y="3054096"/>
+            <a:ext cx="1325880" cy="201168"/>
+          </a:xfrm>
+          <a:prstGeom prst="rect">
+            <a:avLst/>
+          </a:prstGeom>
+          <a:noFill/>
+        </p:spPr>
+        <p:txBody>
+          <a:bodyPr wrap="square" lIns="0" rIns="0" tIns="0" bIns="0">
+            <a:spAutoFit/>
+          </a:bodyPr>
+          <a:lstStyle/>
+          <a:p>
+            <a:r>
+              <a:rPr sz="1000" b="1">
+                <a:solidFill>
+                  <a:srgbClr val="087490"/>
+                </a:solidFill>
+                <a:latin typeface="Arial"/>
+              </a:rPr>
+              <a:t>Title/Aim</a:t>
+            </a:r>
+          </a:p>
+        </p:txBody>
+      </p:sp>
+      <p:sp>
+        <p:nvSpPr>
+          <p:cNvPr id="16" name="Rectangle 15"/>
+          <p:cNvSpPr/>
+          <p:nvPr/>
+        </p:nvSpPr>
+        <p:spPr>
+          <a:xfrm>
+            <a:off x="2011680" y="3831335"/>
+            <a:ext cx="3246120" cy="32004"/>
+          </a:xfrm>
+          <a:prstGeom prst="rect">
+            <a:avLst/>
+          </a:prstGeom>
+          <a:solidFill>
+            <a:srgbClr val="CBD5E1"/>
+          </a:solidFill>
+          <a:ln>
+            <a:noFill/>
+          </a:ln>
+        </p:spPr>
+        <p:style>
+          <a:lnRef idx="1">
+            <a:schemeClr val="accent1"/>
+          </a:lnRef>
+          <a:fillRef idx="3">
+            <a:schemeClr val="accent1"/>
+          </a:fillRef>
+          <a:effectRef idx="2">
+            <a:schemeClr val="accent1"/>
+          </a:effectRef>
+          <a:fontRef idx="minor">
+            <a:schemeClr val="lt1"/>
+          </a:fontRef>
+        </p:style>
+        <p:txBody>
+          <a:bodyPr rtlCol="0" anchor="ctr"/>
+          <a:lstStyle/>
+          <a:p>
+            <a:pPr algn="ctr"/>
+          </a:p>
+        </p:txBody>
+      </p:sp>
+      <p:sp>
+        <p:nvSpPr>
+          <p:cNvPr id="17" name="TextBox 16"/>
+          <p:cNvSpPr txBox="1"/>
+          <p:nvPr/>
+        </p:nvSpPr>
+        <p:spPr>
+          <a:xfrm>
+            <a:off x="2103120" y="3621024"/>
+            <a:ext cx="1325880" cy="201168"/>
+          </a:xfrm>
+          <a:prstGeom prst="rect">
+            <a:avLst/>
+          </a:prstGeom>
+          <a:noFill/>
+        </p:spPr>
+        <p:txBody>
+          <a:bodyPr wrap="square" lIns="0" rIns="0" tIns="0" bIns="0">
+            <a:spAutoFit/>
+          </a:bodyPr>
+          <a:lstStyle/>
+          <a:p>
+            <a:r>
+              <a:rPr sz="1000" b="1">
+                <a:solidFill>
+                  <a:srgbClr val="087490"/>
+                </a:solidFill>
+                <a:latin typeface="Arial"/>
+              </a:rPr>
+              <a:t>Materials</a:t>
+            </a:r>
+          </a:p>
+        </p:txBody>
+      </p:sp>
+      <p:sp>
+        <p:nvSpPr>
+          <p:cNvPr id="18" name="Rectangle 17"/>
+          <p:cNvSpPr/>
+          <p:nvPr/>
+        </p:nvSpPr>
+        <p:spPr>
+          <a:xfrm>
+            <a:off x="2011680" y="4398264"/>
+            <a:ext cx="3246120" cy="32004"/>
+          </a:xfrm>
+          <a:prstGeom prst="rect">
+            <a:avLst/>
+          </a:prstGeom>
+          <a:solidFill>
+            <a:srgbClr val="CBD5E1"/>
+          </a:solidFill>
+          <a:ln>
+            <a:noFill/>
+          </a:ln>
+        </p:spPr>
+        <p:style>
+          <a:lnRef idx="1">
+            <a:schemeClr val="accent1"/>
+          </a:lnRef>
+          <a:fillRef idx="3">
+            <a:schemeClr val="accent1"/>
+          </a:fillRef>
+          <a:effectRef idx="2">
+            <a:schemeClr val="accent1"/>
+          </a:effectRef>
+          <a:fontRef idx="minor">
+            <a:schemeClr val="lt1"/>
+          </a:fontRef>
+        </p:style>
+        <p:txBody>
+          <a:bodyPr rtlCol="0" anchor="ctr"/>
+          <a:lstStyle/>
+          <a:p>
+            <a:pPr algn="ctr"/>
+          </a:p>
+        </p:txBody>
+      </p:sp>
+      <p:sp>
+        <p:nvSpPr>
+          <p:cNvPr id="19" name="TextBox 18"/>
+          <p:cNvSpPr txBox="1"/>
+          <p:nvPr/>
+        </p:nvSpPr>
+        <p:spPr>
+          <a:xfrm>
+            <a:off x="2103120" y="4187952"/>
+            <a:ext cx="1325880" cy="201168"/>
+          </a:xfrm>
+          <a:prstGeom prst="rect">
+            <a:avLst/>
+          </a:prstGeom>
+          <a:noFill/>
+        </p:spPr>
+        <p:txBody>
+          <a:bodyPr wrap="square" lIns="0" rIns="0" tIns="0" bIns="0">
+            <a:spAutoFit/>
+          </a:bodyPr>
+          <a:lstStyle/>
+          <a:p>
+            <a:r>
+              <a:rPr sz="1000" b="1">
+                <a:solidFill>
+                  <a:srgbClr val="087490"/>
+                </a:solidFill>
+                <a:latin typeface="Arial"/>
+              </a:rPr>
+              <a:t>Procedure</a:t>
+            </a:r>
+          </a:p>
+        </p:txBody>
+      </p:sp>
+      <p:sp>
+        <p:nvSpPr>
+          <p:cNvPr id="20" name="Rectangle 19"/>
+          <p:cNvSpPr/>
+          <p:nvPr/>
+        </p:nvSpPr>
+        <p:spPr>
+          <a:xfrm>
+            <a:off x="2011680" y="4965192"/>
+            <a:ext cx="3246120" cy="32004"/>
+          </a:xfrm>
+          <a:prstGeom prst="rect">
+            <a:avLst/>
+          </a:prstGeom>
+          <a:solidFill>
+            <a:srgbClr val="CBD5E1"/>
+          </a:solidFill>
+          <a:ln>
+            <a:noFill/>
+          </a:ln>
+        </p:spPr>
+        <p:style>
+          <a:lnRef idx="1">
+            <a:schemeClr val="accent1"/>
+          </a:lnRef>
+          <a:fillRef idx="3">
+            <a:schemeClr val="accent1"/>
+          </a:fillRef>
+          <a:effectRef idx="2">
+            <a:schemeClr val="accent1"/>
+          </a:effectRef>
+          <a:fontRef idx="minor">
+            <a:schemeClr val="lt1"/>
+          </a:fontRef>
+        </p:style>
+        <p:txBody>
+          <a:bodyPr rtlCol="0" anchor="ctr"/>
+          <a:lstStyle/>
+          <a:p>
+            <a:pPr algn="ctr"/>
+          </a:p>
+        </p:txBody>
+      </p:sp>
+      <p:sp>
+        <p:nvSpPr>
+          <p:cNvPr id="21" name="TextBox 20"/>
+          <p:cNvSpPr txBox="1"/>
+          <p:nvPr/>
+        </p:nvSpPr>
+        <p:spPr>
+          <a:xfrm>
+            <a:off x="2103120" y="4754879"/>
+            <a:ext cx="1325880" cy="201168"/>
+          </a:xfrm>
+          <a:prstGeom prst="rect">
+            <a:avLst/>
+          </a:prstGeom>
+          <a:noFill/>
+        </p:spPr>
+        <p:txBody>
+          <a:bodyPr wrap="square" lIns="0" rIns="0" tIns="0" bIns="0">
+            <a:spAutoFit/>
+          </a:bodyPr>
+          <a:lstStyle/>
+          <a:p>
+            <a:r>
+              <a:rPr sz="1000" b="1">
+                <a:solidFill>
+                  <a:srgbClr val="087490"/>
+                </a:solidFill>
+                <a:latin typeface="Arial"/>
+              </a:rPr>
+              <a:t>Result</a:t>
+            </a:r>
+          </a:p>
+        </p:txBody>
+      </p:sp>
+      <p:sp>
+        <p:nvSpPr>
+          <p:cNvPr id="22" name="Rounded Rectangle 21"/>
+          <p:cNvSpPr/>
+          <p:nvPr/>
+        </p:nvSpPr>
+        <p:spPr>
+          <a:xfrm>
+            <a:off x="6492240" y="3172968"/>
+            <a:ext cx="1627632" cy="960120"/>
           </a:xfrm>
           <a:prstGeom prst="roundRect">
             <a:avLst/>
           </a:prstGeom>
           <a:solidFill>
-            <a:srgbClr val="ECFDF5"/>
-          </a:solidFill>
-          <a:ln w="17780">
+            <a:srgbClr val="FFFFFF"/>
+          </a:solidFill>
+          <a:ln w="12700">
+            <a:solidFill>
+              <a:srgbClr val="1B7F3A"/>
+            </a:solidFill>
+          </a:ln>
+        </p:spPr>
+        <p:style>
+          <a:lnRef idx="1">
+            <a:schemeClr val="accent1"/>
+          </a:lnRef>
+          <a:fillRef idx="3">
+            <a:schemeClr val="accent1"/>
+          </a:fillRef>
+          <a:effectRef idx="2">
+            <a:schemeClr val="accent1"/>
+          </a:effectRef>
+          <a:fontRef idx="minor">
+            <a:schemeClr val="lt1"/>
+          </a:fontRef>
+        </p:style>
+        <p:txBody>
+          <a:bodyPr rtlCol="0" anchor="ctr"/>
+          <a:lstStyle/>
+          <a:p>
+            <a:pPr algn="ctr"/>
+          </a:p>
+        </p:txBody>
+      </p:sp>
+      <p:sp>
+        <p:nvSpPr>
+          <p:cNvPr id="23" name="TextBox 22"/>
+          <p:cNvSpPr txBox="1"/>
+          <p:nvPr/>
+        </p:nvSpPr>
+        <p:spPr>
+          <a:xfrm>
+            <a:off x="6629400" y="3520439"/>
+            <a:ext cx="1353312" cy="201168"/>
+          </a:xfrm>
+          <a:prstGeom prst="rect">
+            <a:avLst/>
+          </a:prstGeom>
+          <a:noFill/>
+        </p:spPr>
+        <p:txBody>
+          <a:bodyPr wrap="square" lIns="0" rIns="0" tIns="0" bIns="0">
+            <a:spAutoFit/>
+          </a:bodyPr>
+          <a:lstStyle/>
+          <a:p>
+            <a:pPr algn="ctr"/>
+            <a:r>
+              <a:rPr sz="1000" b="1">
+                <a:solidFill>
+                  <a:srgbClr val="111827"/>
+                </a:solidFill>
+                <a:latin typeface="Arial"/>
+              </a:rPr>
+              <a:t>skeleton</a:t>
+            </a:r>
+          </a:p>
+        </p:txBody>
+      </p:sp>
+      <p:sp>
+        <p:nvSpPr>
+          <p:cNvPr id="24" name="Rounded Rectangle 23"/>
+          <p:cNvSpPr/>
+          <p:nvPr/>
+        </p:nvSpPr>
+        <p:spPr>
+          <a:xfrm>
+            <a:off x="8595359" y="3172968"/>
+            <a:ext cx="1627632" cy="960120"/>
+          </a:xfrm>
+          <a:prstGeom prst="roundRect">
+            <a:avLst/>
+          </a:prstGeom>
+          <a:solidFill>
+            <a:srgbClr val="FFFFFF"/>
+          </a:solidFill>
+          <a:ln w="12700">
+            <a:solidFill>
+              <a:srgbClr val="1D4ED8"/>
+            </a:solidFill>
+          </a:ln>
+        </p:spPr>
+        <p:style>
+          <a:lnRef idx="1">
+            <a:schemeClr val="accent1"/>
+          </a:lnRef>
+          <a:fillRef idx="3">
+            <a:schemeClr val="accent1"/>
+          </a:fillRef>
+          <a:effectRef idx="2">
+            <a:schemeClr val="accent1"/>
+          </a:effectRef>
+          <a:fontRef idx="minor">
+            <a:schemeClr val="lt1"/>
+          </a:fontRef>
+        </p:style>
+        <p:txBody>
+          <a:bodyPr rtlCol="0" anchor="ctr"/>
+          <a:lstStyle/>
+          <a:p>
+            <a:pPr algn="ctr"/>
+          </a:p>
+        </p:txBody>
+      </p:sp>
+      <p:sp>
+        <p:nvSpPr>
+          <p:cNvPr id="25" name="TextBox 24"/>
+          <p:cNvSpPr txBox="1"/>
+          <p:nvPr/>
+        </p:nvSpPr>
+        <p:spPr>
+          <a:xfrm>
+            <a:off x="8732519" y="3520439"/>
+            <a:ext cx="1353312" cy="201168"/>
+          </a:xfrm>
+          <a:prstGeom prst="rect">
+            <a:avLst/>
+          </a:prstGeom>
+          <a:noFill/>
+        </p:spPr>
+        <p:txBody>
+          <a:bodyPr wrap="square" lIns="0" rIns="0" tIns="0" bIns="0">
+            <a:spAutoFit/>
+          </a:bodyPr>
+          <a:lstStyle/>
+          <a:p>
+            <a:pPr algn="ctr"/>
+            <a:r>
+              <a:rPr sz="1000" b="1">
+                <a:solidFill>
+                  <a:srgbClr val="111827"/>
+                </a:solidFill>
+                <a:latin typeface="Arial"/>
+              </a:rPr>
+              <a:t>circuit</a:t>
+            </a:r>
+          </a:p>
+        </p:txBody>
+      </p:sp>
+      <p:sp>
+        <p:nvSpPr>
+          <p:cNvPr id="26" name="Rounded Rectangle 25"/>
+          <p:cNvSpPr/>
+          <p:nvPr/>
+        </p:nvSpPr>
+        <p:spPr>
+          <a:xfrm>
+            <a:off x="6492240" y="4590288"/>
+            <a:ext cx="1627632" cy="960120"/>
+          </a:xfrm>
+          <a:prstGeom prst="roundRect">
+            <a:avLst/>
+          </a:prstGeom>
+          <a:solidFill>
+            <a:srgbClr val="FFF7E0"/>
+          </a:solidFill>
+          <a:ln w="12700">
+            <a:solidFill>
+              <a:srgbClr val="FCD116"/>
+            </a:solidFill>
+          </a:ln>
+        </p:spPr>
+        <p:style>
+          <a:lnRef idx="1">
+            <a:schemeClr val="accent1"/>
+          </a:lnRef>
+          <a:fillRef idx="3">
+            <a:schemeClr val="accent1"/>
+          </a:fillRef>
+          <a:effectRef idx="2">
+            <a:schemeClr val="accent1"/>
+          </a:effectRef>
+          <a:fontRef idx="minor">
+            <a:schemeClr val="lt1"/>
+          </a:fontRef>
+        </p:style>
+        <p:txBody>
+          <a:bodyPr rtlCol="0" anchor="ctr"/>
+          <a:lstStyle/>
+          <a:p>
+            <a:pPr algn="ctr"/>
+          </a:p>
+        </p:txBody>
+      </p:sp>
+      <p:sp>
+        <p:nvSpPr>
+          <p:cNvPr id="27" name="TextBox 26"/>
+          <p:cNvSpPr txBox="1"/>
+          <p:nvPr/>
+        </p:nvSpPr>
+        <p:spPr>
+          <a:xfrm>
+            <a:off x="6629400" y="4937759"/>
+            <a:ext cx="1353312" cy="201168"/>
+          </a:xfrm>
+          <a:prstGeom prst="rect">
+            <a:avLst/>
+          </a:prstGeom>
+          <a:noFill/>
+        </p:spPr>
+        <p:txBody>
+          <a:bodyPr wrap="square" lIns="0" rIns="0" tIns="0" bIns="0">
+            <a:spAutoFit/>
+          </a:bodyPr>
+          <a:lstStyle/>
+          <a:p>
+            <a:pPr algn="ctr"/>
+            <a:r>
+              <a:rPr sz="1000" b="1">
+                <a:solidFill>
+                  <a:srgbClr val="111827"/>
+                </a:solidFill>
+                <a:latin typeface="Arial"/>
+              </a:rPr>
+              <a:t>solar</a:t>
+            </a:r>
+          </a:p>
+        </p:txBody>
+      </p:sp>
+      <p:sp>
+        <p:nvSpPr>
+          <p:cNvPr id="28" name="Rounded Rectangle 27"/>
+          <p:cNvSpPr/>
+          <p:nvPr/>
+        </p:nvSpPr>
+        <p:spPr>
+          <a:xfrm>
+            <a:off x="8595359" y="4590288"/>
+            <a:ext cx="1627632" cy="960120"/>
+          </a:xfrm>
+          <a:prstGeom prst="roundRect">
+            <a:avLst/>
+          </a:prstGeom>
+          <a:solidFill>
+            <a:srgbClr val="FFFFFF"/>
+          </a:solidFill>
+          <a:ln w="12700">
+            <a:solidFill>
+              <a:srgbClr val="D90000"/>
+            </a:solidFill>
+          </a:ln>
+        </p:spPr>
+        <p:style>
+          <a:lnRef idx="1">
+            <a:schemeClr val="accent1"/>
+          </a:lnRef>
+          <a:fillRef idx="3">
+            <a:schemeClr val="accent1"/>
+          </a:fillRef>
+          <a:effectRef idx="2">
+            <a:schemeClr val="accent1"/>
+          </a:effectRef>
+          <a:fontRef idx="minor">
+            <a:schemeClr val="lt1"/>
+          </a:fontRef>
+        </p:style>
+        <p:txBody>
+          <a:bodyPr rtlCol="0" anchor="ctr"/>
+          <a:lstStyle/>
+          <a:p>
+            <a:pPr algn="ctr"/>
+          </a:p>
+        </p:txBody>
+      </p:sp>
+      <p:sp>
+        <p:nvSpPr>
+          <p:cNvPr id="29" name="TextBox 28"/>
+          <p:cNvSpPr txBox="1"/>
+          <p:nvPr/>
+        </p:nvSpPr>
+        <p:spPr>
+          <a:xfrm>
+            <a:off x="8732519" y="4937759"/>
+            <a:ext cx="1353312" cy="201168"/>
+          </a:xfrm>
+          <a:prstGeom prst="rect">
+            <a:avLst/>
+          </a:prstGeom>
+          <a:noFill/>
+        </p:spPr>
+        <p:txBody>
+          <a:bodyPr wrap="square" lIns="0" rIns="0" tIns="0" bIns="0">
+            <a:spAutoFit/>
+          </a:bodyPr>
+          <a:lstStyle/>
+          <a:p>
+            <a:pPr algn="ctr"/>
+            <a:r>
+              <a:rPr sz="1000" b="1">
+                <a:solidFill>
+                  <a:srgbClr val="111827"/>
+                </a:solidFill>
+                <a:latin typeface="Arial"/>
+              </a:rPr>
+              <a:t>biogas</a:t>
+            </a:r>
+          </a:p>
+        </p:txBody>
+      </p:sp>
+      <p:sp>
+        <p:nvSpPr>
+          <p:cNvPr id="30" name="Rounded Rectangle 29"/>
+          <p:cNvSpPr/>
+          <p:nvPr/>
+        </p:nvSpPr>
+        <p:spPr>
+          <a:xfrm>
+            <a:off x="1691640" y="6071616"/>
+            <a:ext cx="2727960" cy="713232"/>
+          </a:xfrm>
+          <a:prstGeom prst="roundRect">
+            <a:avLst/>
+          </a:prstGeom>
+          <a:solidFill>
+            <a:srgbClr val="FFFFFF"/>
+          </a:solidFill>
+          <a:ln w="11430">
             <a:solidFill>
               <a:srgbClr val="087490"/>
             </a:solidFill>
@@ -6867,65 +7973,65 @@
           </a:p>
         </p:txBody>
       </p:sp>
-      <p:cxnSp>
-        <p:nvCxnSpPr>
-          <p:cNvPr id="15" name="Connector 14"/>
-          <p:cNvCxnSpPr/>
-          <p:nvPr/>
-        </p:nvCxnSpPr>
-        <p:spPr>
-          <a:xfrm flipH="1" flipV="1">
-            <a:off x="2697480" y="3611880"/>
-            <a:ext cx="3406140" cy="704088"/>
-          </a:xfrm>
-          <a:prstGeom prst="line">
-            <a:avLst/>
-          </a:prstGeom>
-          <a:ln w="20320">
+      <p:sp>
+        <p:nvSpPr>
+          <p:cNvPr id="31" name="TextBox 30"/>
+          <p:cNvSpPr txBox="1"/>
+          <p:nvPr/>
+        </p:nvSpPr>
+        <p:spPr>
+          <a:xfrm>
+            <a:off x="1801368" y="6208776"/>
+            <a:ext cx="2508504" cy="329184"/>
+          </a:xfrm>
+          <a:prstGeom prst="rect">
+            <a:avLst/>
+          </a:prstGeom>
+          <a:noFill/>
+        </p:spPr>
+        <p:txBody>
+          <a:bodyPr wrap="square" lIns="0" rIns="0" tIns="0" bIns="0">
+            <a:spAutoFit/>
+          </a:bodyPr>
+          <a:lstStyle/>
+          <a:p>
+            <a:pPr algn="ctr"/>
+            <a:r>
+              <a:rPr sz="1100" b="1">
+                <a:solidFill>
+                  <a:srgbClr val="111827"/>
+                </a:solidFill>
+                <a:latin typeface="Arial"/>
+              </a:rPr>
+              <a:t>Reviewing the Muscular-Skeletal model</a:t>
+            </a:r>
+          </a:p>
+        </p:txBody>
+      </p:sp>
+      <p:sp>
+        <p:nvSpPr>
+          <p:cNvPr id="32" name="Rounded Rectangle 31"/>
+          <p:cNvSpPr/>
+          <p:nvPr/>
+        </p:nvSpPr>
+        <p:spPr>
+          <a:xfrm>
+            <a:off x="4739640" y="6071616"/>
+            <a:ext cx="2727960" cy="713232"/>
+          </a:xfrm>
+          <a:prstGeom prst="roundRect">
+            <a:avLst/>
+          </a:prstGeom>
+          <a:solidFill>
+            <a:srgbClr val="FFFFFF"/>
+          </a:solidFill>
+          <a:ln w="11430">
             <a:solidFill>
               <a:srgbClr val="087490"/>
             </a:solidFill>
           </a:ln>
         </p:spPr>
         <p:style>
-          <a:lnRef idx="2">
-            <a:schemeClr val="accent1"/>
-          </a:lnRef>
-          <a:fillRef idx="0">
-            <a:schemeClr val="accent1"/>
-          </a:fillRef>
-          <a:effectRef idx="1">
-            <a:schemeClr val="accent1"/>
-          </a:effectRef>
-          <a:fontRef idx="minor">
-            <a:schemeClr val="tx1"/>
-          </a:fontRef>
-        </p:style>
-      </p:cxnSp>
-      <p:sp>
-        <p:nvSpPr>
-          <p:cNvPr id="16" name="Rounded Rectangle 15"/>
-          <p:cNvSpPr/>
-          <p:nvPr/>
-        </p:nvSpPr>
-        <p:spPr>
-          <a:xfrm>
-            <a:off x="1463040" y="3218688"/>
-            <a:ext cx="2468880" cy="786384"/>
-          </a:xfrm>
-          <a:prstGeom prst="roundRect">
-            <a:avLst/>
-          </a:prstGeom>
-          <a:solidFill>
-            <a:srgbClr val="FFFFFF"/>
-          </a:solidFill>
-          <a:ln w="11430">
-            <a:solidFill>
-              <a:srgbClr val="CBD5E1"/>
-            </a:solidFill>
-          </a:ln>
-        </p:spPr>
-        <p:style>
           <a:lnRef idx="1">
             <a:schemeClr val="accent1"/>
           </a:lnRef>
@@ -6949,14 +8055,14 @@
       </p:sp>
       <p:sp>
         <p:nvSpPr>
-          <p:cNvPr id="17" name="TextBox 16"/>
+          <p:cNvPr id="33" name="TextBox 32"/>
           <p:cNvSpPr txBox="1"/>
           <p:nvPr/>
         </p:nvSpPr>
         <p:spPr>
           <a:xfrm>
-            <a:off x="1609344" y="3392424"/>
-            <a:ext cx="2176272" cy="347472"/>
+            <a:off x="4849368" y="6208776"/>
+            <a:ext cx="2508504" cy="329184"/>
           </a:xfrm>
           <a:prstGeom prst="rect">
             <a:avLst/>
@@ -6971,76 +8077,41 @@
           <a:p>
             <a:pPr algn="ctr"/>
             <a:r>
-              <a:rPr sz="1200" b="1">
+              <a:rPr sz="1100" b="1">
                 <a:solidFill>
                   <a:srgbClr val="111827"/>
                 </a:solidFill>
                 <a:latin typeface="Arial"/>
               </a:rPr>
-              <a:t>Reviewing the Muscular-Skeletal model</a:t>
-            </a:r>
-          </a:p>
-        </p:txBody>
-      </p:sp>
-      <p:cxnSp>
-        <p:nvCxnSpPr>
-          <p:cNvPr id="18" name="Connector 17"/>
-          <p:cNvCxnSpPr/>
-          <p:nvPr/>
-        </p:nvCxnSpPr>
-        <p:spPr>
-          <a:xfrm flipV="1">
-            <a:off x="6103620" y="3611880"/>
-            <a:ext cx="3497580" cy="704088"/>
-          </a:xfrm>
-          <a:prstGeom prst="line">
-            <a:avLst/>
-          </a:prstGeom>
-          <a:ln w="20320">
+              <a:t>Recalling the Electricity and Magnetism</a:t>
+            </a:r>
+          </a:p>
+        </p:txBody>
+      </p:sp>
+      <p:sp>
+        <p:nvSpPr>
+          <p:cNvPr id="34" name="Rounded Rectangle 33"/>
+          <p:cNvSpPr/>
+          <p:nvPr/>
+        </p:nvSpPr>
+        <p:spPr>
+          <a:xfrm>
+            <a:off x="7787640" y="6071616"/>
+            <a:ext cx="2727960" cy="713232"/>
+          </a:xfrm>
+          <a:prstGeom prst="roundRect">
+            <a:avLst/>
+          </a:prstGeom>
+          <a:solidFill>
+            <a:srgbClr val="FFFFFF"/>
+          </a:solidFill>
+          <a:ln w="11430">
             <a:solidFill>
               <a:srgbClr val="087490"/>
             </a:solidFill>
           </a:ln>
         </p:spPr>
         <p:style>
-          <a:lnRef idx="2">
-            <a:schemeClr val="accent1"/>
-          </a:lnRef>
-          <a:fillRef idx="0">
-            <a:schemeClr val="accent1"/>
-          </a:fillRef>
-          <a:effectRef idx="1">
-            <a:schemeClr val="accent1"/>
-          </a:effectRef>
-          <a:fontRef idx="minor">
-            <a:schemeClr val="tx1"/>
-          </a:fontRef>
-        </p:style>
-      </p:cxnSp>
-      <p:sp>
-        <p:nvSpPr>
-          <p:cNvPr id="19" name="Rounded Rectangle 18"/>
-          <p:cNvSpPr/>
-          <p:nvPr/>
-        </p:nvSpPr>
-        <p:spPr>
-          <a:xfrm>
-            <a:off x="8366760" y="3218688"/>
-            <a:ext cx="2468880" cy="786384"/>
-          </a:xfrm>
-          <a:prstGeom prst="roundRect">
-            <a:avLst/>
-          </a:prstGeom>
-          <a:solidFill>
-            <a:srgbClr val="FFFFFF"/>
-          </a:solidFill>
-          <a:ln w="11430">
-            <a:solidFill>
-              <a:srgbClr val="CBD5E1"/>
-            </a:solidFill>
-          </a:ln>
-        </p:spPr>
-        <p:style>
           <a:lnRef idx="1">
             <a:schemeClr val="accent1"/>
           </a:lnRef>
@@ -7064,14 +8135,14 @@
       </p:sp>
       <p:sp>
         <p:nvSpPr>
-          <p:cNvPr id="20" name="TextBox 19"/>
+          <p:cNvPr id="35" name="TextBox 34"/>
           <p:cNvSpPr txBox="1"/>
           <p:nvPr/>
         </p:nvSpPr>
         <p:spPr>
           <a:xfrm>
-            <a:off x="8513064" y="3392424"/>
-            <a:ext cx="2176272" cy="347472"/>
+            <a:off x="7897368" y="6208776"/>
+            <a:ext cx="2508504" cy="329184"/>
           </a:xfrm>
           <a:prstGeom prst="rect">
             <a:avLst/>
@@ -7086,122 +8157,7 @@
           <a:p>
             <a:pPr algn="ctr"/>
             <a:r>
-              <a:rPr sz="1200" b="1">
-                <a:solidFill>
-                  <a:srgbClr val="111827"/>
-                </a:solidFill>
-                <a:latin typeface="Arial"/>
-              </a:rPr>
-              <a:t>Recalling the Electricity and Magnetism</a:t>
-            </a:r>
-          </a:p>
-        </p:txBody>
-      </p:sp>
-      <p:cxnSp>
-        <p:nvCxnSpPr>
-          <p:cNvPr id="21" name="Connector 20"/>
-          <p:cNvCxnSpPr/>
-          <p:nvPr/>
-        </p:nvCxnSpPr>
-        <p:spPr>
-          <a:xfrm flipH="1">
-            <a:off x="2697480" y="4315968"/>
-            <a:ext cx="3406140" cy="1170432"/>
-          </a:xfrm>
-          <a:prstGeom prst="line">
-            <a:avLst/>
-          </a:prstGeom>
-          <a:ln w="20320">
-            <a:solidFill>
-              <a:srgbClr val="087490"/>
-            </a:solidFill>
-          </a:ln>
-        </p:spPr>
-        <p:style>
-          <a:lnRef idx="2">
-            <a:schemeClr val="accent1"/>
-          </a:lnRef>
-          <a:fillRef idx="0">
-            <a:schemeClr val="accent1"/>
-          </a:fillRef>
-          <a:effectRef idx="1">
-            <a:schemeClr val="accent1"/>
-          </a:effectRef>
-          <a:fontRef idx="minor">
-            <a:schemeClr val="tx1"/>
-          </a:fontRef>
-        </p:style>
-      </p:cxnSp>
-      <p:sp>
-        <p:nvSpPr>
-          <p:cNvPr id="22" name="Rounded Rectangle 21"/>
-          <p:cNvSpPr/>
-          <p:nvPr/>
-        </p:nvSpPr>
-        <p:spPr>
-          <a:xfrm>
-            <a:off x="1463040" y="5093208"/>
-            <a:ext cx="2468880" cy="786384"/>
-          </a:xfrm>
-          <a:prstGeom prst="roundRect">
-            <a:avLst/>
-          </a:prstGeom>
-          <a:solidFill>
-            <a:srgbClr val="FFFFFF"/>
-          </a:solidFill>
-          <a:ln w="11430">
-            <a:solidFill>
-              <a:srgbClr val="CBD5E1"/>
-            </a:solidFill>
-          </a:ln>
-        </p:spPr>
-        <p:style>
-          <a:lnRef idx="1">
-            <a:schemeClr val="accent1"/>
-          </a:lnRef>
-          <a:fillRef idx="3">
-            <a:schemeClr val="accent1"/>
-          </a:fillRef>
-          <a:effectRef idx="2">
-            <a:schemeClr val="accent1"/>
-          </a:effectRef>
-          <a:fontRef idx="minor">
-            <a:schemeClr val="lt1"/>
-          </a:fontRef>
-        </p:style>
-        <p:txBody>
-          <a:bodyPr rtlCol="0" anchor="ctr"/>
-          <a:lstStyle/>
-          <a:p>
-            <a:pPr algn="ctr"/>
-          </a:p>
-        </p:txBody>
-      </p:sp>
-      <p:sp>
-        <p:nvSpPr>
-          <p:cNvPr id="23" name="TextBox 22"/>
-          <p:cNvSpPr txBox="1"/>
-          <p:nvPr/>
-        </p:nvSpPr>
-        <p:spPr>
-          <a:xfrm>
-            <a:off x="1609344" y="5266944"/>
-            <a:ext cx="2176272" cy="347472"/>
-          </a:xfrm>
-          <a:prstGeom prst="rect">
-            <a:avLst/>
-          </a:prstGeom>
-          <a:noFill/>
-        </p:spPr>
-        <p:txBody>
-          <a:bodyPr wrap="square" lIns="0" rIns="0" tIns="0" bIns="0">
-            <a:spAutoFit/>
-          </a:bodyPr>
-          <a:lstStyle/>
-          <a:p>
-            <a:pPr algn="ctr"/>
-            <a:r>
-              <a:rPr sz="1200" b="1">
+              <a:rPr sz="1100" b="1">
                 <a:solidFill>
                   <a:srgbClr val="111827"/>
                 </a:solidFill>
@@ -7214,7 +8170,7 @@
       </p:sp>
       <p:sp>
         <p:nvSpPr>
-          <p:cNvPr id="24" name="TextBox 23"/>
+          <p:cNvPr id="36" name="TextBox 35"/>
           <p:cNvSpPr txBox="1"/>
           <p:nvPr/>
         </p:nvSpPr>
@@ -7696,8 +8652,8 @@
         </p:nvSpPr>
         <p:spPr>
           <a:xfrm>
-            <a:off x="1417319" y="2322576"/>
-            <a:ext cx="9372600" cy="411480"/>
+            <a:off x="1417319" y="2286000"/>
+            <a:ext cx="9372600" cy="310896"/>
           </a:xfrm>
           <a:prstGeom prst="rect">
             <a:avLst/>
@@ -7712,7 +8668,7 @@
           <a:p>
             <a:pPr algn="ctr"/>
             <a:r>
-              <a:rPr sz="1800" b="1">
+              <a:rPr sz="1700" b="1">
                 <a:solidFill>
                   <a:srgbClr val="111827"/>
                 </a:solidFill>
@@ -7725,22 +8681,22 @@
       </p:sp>
       <p:sp>
         <p:nvSpPr>
-          <p:cNvPr id="13" name="Oval 12"/>
+          <p:cNvPr id="13" name="Rounded Rectangle 12"/>
           <p:cNvSpPr/>
           <p:nvPr/>
         </p:nvSpPr>
         <p:spPr>
           <a:xfrm>
-            <a:off x="5756148" y="3355848"/>
-            <a:ext cx="694944" cy="694944"/>
-          </a:xfrm>
-          <a:prstGeom prst="ellipse">
-            <a:avLst/>
-          </a:prstGeom>
-          <a:solidFill>
-            <a:srgbClr val="FCD116"/>
-          </a:solidFill>
-          <a:ln w="15240">
+            <a:off x="1691640" y="2834639"/>
+            <a:ext cx="3931920" cy="3063240"/>
+          </a:xfrm>
+          <a:prstGeom prst="roundRect">
+            <a:avLst/>
+          </a:prstGeom>
+          <a:solidFill>
+            <a:srgbClr val="FFFFFF"/>
+          </a:solidFill>
+          <a:ln w="13970">
             <a:solidFill>
               <a:srgbClr val="111827"/>
             </a:solidFill>
@@ -7770,22 +8726,650 @@
       </p:sp>
       <p:sp>
         <p:nvSpPr>
-          <p:cNvPr id="14" name="Rounded Rectangle 13"/>
+          <p:cNvPr id="14" name="Rectangle 13"/>
           <p:cNvSpPr/>
           <p:nvPr/>
         </p:nvSpPr>
         <p:spPr>
           <a:xfrm>
-            <a:off x="5628131" y="4078224"/>
-            <a:ext cx="950976" cy="1463040"/>
+            <a:off x="2011680" y="3264408"/>
+            <a:ext cx="3246120" cy="32004"/>
+          </a:xfrm>
+          <a:prstGeom prst="rect">
+            <a:avLst/>
+          </a:prstGeom>
+          <a:solidFill>
+            <a:srgbClr val="CBD5E1"/>
+          </a:solidFill>
+          <a:ln>
+            <a:noFill/>
+          </a:ln>
+        </p:spPr>
+        <p:style>
+          <a:lnRef idx="1">
+            <a:schemeClr val="accent1"/>
+          </a:lnRef>
+          <a:fillRef idx="3">
+            <a:schemeClr val="accent1"/>
+          </a:fillRef>
+          <a:effectRef idx="2">
+            <a:schemeClr val="accent1"/>
+          </a:effectRef>
+          <a:fontRef idx="minor">
+            <a:schemeClr val="lt1"/>
+          </a:fontRef>
+        </p:style>
+        <p:txBody>
+          <a:bodyPr rtlCol="0" anchor="ctr"/>
+          <a:lstStyle/>
+          <a:p>
+            <a:pPr algn="ctr"/>
+          </a:p>
+        </p:txBody>
+      </p:sp>
+      <p:sp>
+        <p:nvSpPr>
+          <p:cNvPr id="15" name="TextBox 14"/>
+          <p:cNvSpPr txBox="1"/>
+          <p:nvPr/>
+        </p:nvSpPr>
+        <p:spPr>
+          <a:xfrm>
+            <a:off x="2103120" y="3054096"/>
+            <a:ext cx="1325880" cy="201168"/>
+          </a:xfrm>
+          <a:prstGeom prst="rect">
+            <a:avLst/>
+          </a:prstGeom>
+          <a:noFill/>
+        </p:spPr>
+        <p:txBody>
+          <a:bodyPr wrap="square" lIns="0" rIns="0" tIns="0" bIns="0">
+            <a:spAutoFit/>
+          </a:bodyPr>
+          <a:lstStyle/>
+          <a:p>
+            <a:r>
+              <a:rPr sz="1000" b="1">
+                <a:solidFill>
+                  <a:srgbClr val="D97706"/>
+                </a:solidFill>
+                <a:latin typeface="Arial"/>
+              </a:rPr>
+              <a:t>Title/Aim</a:t>
+            </a:r>
+          </a:p>
+        </p:txBody>
+      </p:sp>
+      <p:sp>
+        <p:nvSpPr>
+          <p:cNvPr id="16" name="Rectangle 15"/>
+          <p:cNvSpPr/>
+          <p:nvPr/>
+        </p:nvSpPr>
+        <p:spPr>
+          <a:xfrm>
+            <a:off x="2011680" y="3831335"/>
+            <a:ext cx="3246120" cy="32004"/>
+          </a:xfrm>
+          <a:prstGeom prst="rect">
+            <a:avLst/>
+          </a:prstGeom>
+          <a:solidFill>
+            <a:srgbClr val="CBD5E1"/>
+          </a:solidFill>
+          <a:ln>
+            <a:noFill/>
+          </a:ln>
+        </p:spPr>
+        <p:style>
+          <a:lnRef idx="1">
+            <a:schemeClr val="accent1"/>
+          </a:lnRef>
+          <a:fillRef idx="3">
+            <a:schemeClr val="accent1"/>
+          </a:fillRef>
+          <a:effectRef idx="2">
+            <a:schemeClr val="accent1"/>
+          </a:effectRef>
+          <a:fontRef idx="minor">
+            <a:schemeClr val="lt1"/>
+          </a:fontRef>
+        </p:style>
+        <p:txBody>
+          <a:bodyPr rtlCol="0" anchor="ctr"/>
+          <a:lstStyle/>
+          <a:p>
+            <a:pPr algn="ctr"/>
+          </a:p>
+        </p:txBody>
+      </p:sp>
+      <p:sp>
+        <p:nvSpPr>
+          <p:cNvPr id="17" name="TextBox 16"/>
+          <p:cNvSpPr txBox="1"/>
+          <p:nvPr/>
+        </p:nvSpPr>
+        <p:spPr>
+          <a:xfrm>
+            <a:off x="2103120" y="3621024"/>
+            <a:ext cx="1325880" cy="201168"/>
+          </a:xfrm>
+          <a:prstGeom prst="rect">
+            <a:avLst/>
+          </a:prstGeom>
+          <a:noFill/>
+        </p:spPr>
+        <p:txBody>
+          <a:bodyPr wrap="square" lIns="0" rIns="0" tIns="0" bIns="0">
+            <a:spAutoFit/>
+          </a:bodyPr>
+          <a:lstStyle/>
+          <a:p>
+            <a:r>
+              <a:rPr sz="1000" b="1">
+                <a:solidFill>
+                  <a:srgbClr val="D97706"/>
+                </a:solidFill>
+                <a:latin typeface="Arial"/>
+              </a:rPr>
+              <a:t>Materials</a:t>
+            </a:r>
+          </a:p>
+        </p:txBody>
+      </p:sp>
+      <p:sp>
+        <p:nvSpPr>
+          <p:cNvPr id="18" name="Rectangle 17"/>
+          <p:cNvSpPr/>
+          <p:nvPr/>
+        </p:nvSpPr>
+        <p:spPr>
+          <a:xfrm>
+            <a:off x="2011680" y="4398264"/>
+            <a:ext cx="3246120" cy="32004"/>
+          </a:xfrm>
+          <a:prstGeom prst="rect">
+            <a:avLst/>
+          </a:prstGeom>
+          <a:solidFill>
+            <a:srgbClr val="CBD5E1"/>
+          </a:solidFill>
+          <a:ln>
+            <a:noFill/>
+          </a:ln>
+        </p:spPr>
+        <p:style>
+          <a:lnRef idx="1">
+            <a:schemeClr val="accent1"/>
+          </a:lnRef>
+          <a:fillRef idx="3">
+            <a:schemeClr val="accent1"/>
+          </a:fillRef>
+          <a:effectRef idx="2">
+            <a:schemeClr val="accent1"/>
+          </a:effectRef>
+          <a:fontRef idx="minor">
+            <a:schemeClr val="lt1"/>
+          </a:fontRef>
+        </p:style>
+        <p:txBody>
+          <a:bodyPr rtlCol="0" anchor="ctr"/>
+          <a:lstStyle/>
+          <a:p>
+            <a:pPr algn="ctr"/>
+          </a:p>
+        </p:txBody>
+      </p:sp>
+      <p:sp>
+        <p:nvSpPr>
+          <p:cNvPr id="19" name="TextBox 18"/>
+          <p:cNvSpPr txBox="1"/>
+          <p:nvPr/>
+        </p:nvSpPr>
+        <p:spPr>
+          <a:xfrm>
+            <a:off x="2103120" y="4187952"/>
+            <a:ext cx="1325880" cy="201168"/>
+          </a:xfrm>
+          <a:prstGeom prst="rect">
+            <a:avLst/>
+          </a:prstGeom>
+          <a:noFill/>
+        </p:spPr>
+        <p:txBody>
+          <a:bodyPr wrap="square" lIns="0" rIns="0" tIns="0" bIns="0">
+            <a:spAutoFit/>
+          </a:bodyPr>
+          <a:lstStyle/>
+          <a:p>
+            <a:r>
+              <a:rPr sz="1000" b="1">
+                <a:solidFill>
+                  <a:srgbClr val="D97706"/>
+                </a:solidFill>
+                <a:latin typeface="Arial"/>
+              </a:rPr>
+              <a:t>Procedure</a:t>
+            </a:r>
+          </a:p>
+        </p:txBody>
+      </p:sp>
+      <p:sp>
+        <p:nvSpPr>
+          <p:cNvPr id="20" name="Rectangle 19"/>
+          <p:cNvSpPr/>
+          <p:nvPr/>
+        </p:nvSpPr>
+        <p:spPr>
+          <a:xfrm>
+            <a:off x="2011680" y="4965192"/>
+            <a:ext cx="3246120" cy="32004"/>
+          </a:xfrm>
+          <a:prstGeom prst="rect">
+            <a:avLst/>
+          </a:prstGeom>
+          <a:solidFill>
+            <a:srgbClr val="CBD5E1"/>
+          </a:solidFill>
+          <a:ln>
+            <a:noFill/>
+          </a:ln>
+        </p:spPr>
+        <p:style>
+          <a:lnRef idx="1">
+            <a:schemeClr val="accent1"/>
+          </a:lnRef>
+          <a:fillRef idx="3">
+            <a:schemeClr val="accent1"/>
+          </a:fillRef>
+          <a:effectRef idx="2">
+            <a:schemeClr val="accent1"/>
+          </a:effectRef>
+          <a:fontRef idx="minor">
+            <a:schemeClr val="lt1"/>
+          </a:fontRef>
+        </p:style>
+        <p:txBody>
+          <a:bodyPr rtlCol="0" anchor="ctr"/>
+          <a:lstStyle/>
+          <a:p>
+            <a:pPr algn="ctr"/>
+          </a:p>
+        </p:txBody>
+      </p:sp>
+      <p:sp>
+        <p:nvSpPr>
+          <p:cNvPr id="21" name="TextBox 20"/>
+          <p:cNvSpPr txBox="1"/>
+          <p:nvPr/>
+        </p:nvSpPr>
+        <p:spPr>
+          <a:xfrm>
+            <a:off x="2103120" y="4754879"/>
+            <a:ext cx="1325880" cy="201168"/>
+          </a:xfrm>
+          <a:prstGeom prst="rect">
+            <a:avLst/>
+          </a:prstGeom>
+          <a:noFill/>
+        </p:spPr>
+        <p:txBody>
+          <a:bodyPr wrap="square" lIns="0" rIns="0" tIns="0" bIns="0">
+            <a:spAutoFit/>
+          </a:bodyPr>
+          <a:lstStyle/>
+          <a:p>
+            <a:r>
+              <a:rPr sz="1000" b="1">
+                <a:solidFill>
+                  <a:srgbClr val="D97706"/>
+                </a:solidFill>
+                <a:latin typeface="Arial"/>
+              </a:rPr>
+              <a:t>Result</a:t>
+            </a:r>
+          </a:p>
+        </p:txBody>
+      </p:sp>
+      <p:sp>
+        <p:nvSpPr>
+          <p:cNvPr id="22" name="Rounded Rectangle 21"/>
+          <p:cNvSpPr/>
+          <p:nvPr/>
+        </p:nvSpPr>
+        <p:spPr>
+          <a:xfrm>
+            <a:off x="6492240" y="3172968"/>
+            <a:ext cx="1627632" cy="960120"/>
           </a:xfrm>
           <a:prstGeom prst="roundRect">
             <a:avLst/>
           </a:prstGeom>
           <a:solidFill>
-            <a:srgbClr val="ECFDF5"/>
-          </a:solidFill>
-          <a:ln w="17780">
+            <a:srgbClr val="FFFFFF"/>
+          </a:solidFill>
+          <a:ln w="12700">
+            <a:solidFill>
+              <a:srgbClr val="1B7F3A"/>
+            </a:solidFill>
+          </a:ln>
+        </p:spPr>
+        <p:style>
+          <a:lnRef idx="1">
+            <a:schemeClr val="accent1"/>
+          </a:lnRef>
+          <a:fillRef idx="3">
+            <a:schemeClr val="accent1"/>
+          </a:fillRef>
+          <a:effectRef idx="2">
+            <a:schemeClr val="accent1"/>
+          </a:effectRef>
+          <a:fontRef idx="minor">
+            <a:schemeClr val="lt1"/>
+          </a:fontRef>
+        </p:style>
+        <p:txBody>
+          <a:bodyPr rtlCol="0" anchor="ctr"/>
+          <a:lstStyle/>
+          <a:p>
+            <a:pPr algn="ctr"/>
+          </a:p>
+        </p:txBody>
+      </p:sp>
+      <p:sp>
+        <p:nvSpPr>
+          <p:cNvPr id="23" name="TextBox 22"/>
+          <p:cNvSpPr txBox="1"/>
+          <p:nvPr/>
+        </p:nvSpPr>
+        <p:spPr>
+          <a:xfrm>
+            <a:off x="6629400" y="3520439"/>
+            <a:ext cx="1353312" cy="201168"/>
+          </a:xfrm>
+          <a:prstGeom prst="rect">
+            <a:avLst/>
+          </a:prstGeom>
+          <a:noFill/>
+        </p:spPr>
+        <p:txBody>
+          <a:bodyPr wrap="square" lIns="0" rIns="0" tIns="0" bIns="0">
+            <a:spAutoFit/>
+          </a:bodyPr>
+          <a:lstStyle/>
+          <a:p>
+            <a:pPr algn="ctr"/>
+            <a:r>
+              <a:rPr sz="1000" b="1">
+                <a:solidFill>
+                  <a:srgbClr val="111827"/>
+                </a:solidFill>
+                <a:latin typeface="Arial"/>
+              </a:rPr>
+              <a:t>skeleton</a:t>
+            </a:r>
+          </a:p>
+        </p:txBody>
+      </p:sp>
+      <p:sp>
+        <p:nvSpPr>
+          <p:cNvPr id="24" name="Rounded Rectangle 23"/>
+          <p:cNvSpPr/>
+          <p:nvPr/>
+        </p:nvSpPr>
+        <p:spPr>
+          <a:xfrm>
+            <a:off x="8595359" y="3172968"/>
+            <a:ext cx="1627632" cy="960120"/>
+          </a:xfrm>
+          <a:prstGeom prst="roundRect">
+            <a:avLst/>
+          </a:prstGeom>
+          <a:solidFill>
+            <a:srgbClr val="FFFFFF"/>
+          </a:solidFill>
+          <a:ln w="12700">
+            <a:solidFill>
+              <a:srgbClr val="1D4ED8"/>
+            </a:solidFill>
+          </a:ln>
+        </p:spPr>
+        <p:style>
+          <a:lnRef idx="1">
+            <a:schemeClr val="accent1"/>
+          </a:lnRef>
+          <a:fillRef idx="3">
+            <a:schemeClr val="accent1"/>
+          </a:fillRef>
+          <a:effectRef idx="2">
+            <a:schemeClr val="accent1"/>
+          </a:effectRef>
+          <a:fontRef idx="minor">
+            <a:schemeClr val="lt1"/>
+          </a:fontRef>
+        </p:style>
+        <p:txBody>
+          <a:bodyPr rtlCol="0" anchor="ctr"/>
+          <a:lstStyle/>
+          <a:p>
+            <a:pPr algn="ctr"/>
+          </a:p>
+        </p:txBody>
+      </p:sp>
+      <p:sp>
+        <p:nvSpPr>
+          <p:cNvPr id="25" name="TextBox 24"/>
+          <p:cNvSpPr txBox="1"/>
+          <p:nvPr/>
+        </p:nvSpPr>
+        <p:spPr>
+          <a:xfrm>
+            <a:off x="8732519" y="3520439"/>
+            <a:ext cx="1353312" cy="201168"/>
+          </a:xfrm>
+          <a:prstGeom prst="rect">
+            <a:avLst/>
+          </a:prstGeom>
+          <a:noFill/>
+        </p:spPr>
+        <p:txBody>
+          <a:bodyPr wrap="square" lIns="0" rIns="0" tIns="0" bIns="0">
+            <a:spAutoFit/>
+          </a:bodyPr>
+          <a:lstStyle/>
+          <a:p>
+            <a:pPr algn="ctr"/>
+            <a:r>
+              <a:rPr sz="1000" b="1">
+                <a:solidFill>
+                  <a:srgbClr val="111827"/>
+                </a:solidFill>
+                <a:latin typeface="Arial"/>
+              </a:rPr>
+              <a:t>circuit</a:t>
+            </a:r>
+          </a:p>
+        </p:txBody>
+      </p:sp>
+      <p:sp>
+        <p:nvSpPr>
+          <p:cNvPr id="26" name="Rounded Rectangle 25"/>
+          <p:cNvSpPr/>
+          <p:nvPr/>
+        </p:nvSpPr>
+        <p:spPr>
+          <a:xfrm>
+            <a:off x="6492240" y="4590288"/>
+            <a:ext cx="1627632" cy="960120"/>
+          </a:xfrm>
+          <a:prstGeom prst="roundRect">
+            <a:avLst/>
+          </a:prstGeom>
+          <a:solidFill>
+            <a:srgbClr val="FFF7E0"/>
+          </a:solidFill>
+          <a:ln w="12700">
+            <a:solidFill>
+              <a:srgbClr val="FCD116"/>
+            </a:solidFill>
+          </a:ln>
+        </p:spPr>
+        <p:style>
+          <a:lnRef idx="1">
+            <a:schemeClr val="accent1"/>
+          </a:lnRef>
+          <a:fillRef idx="3">
+            <a:schemeClr val="accent1"/>
+          </a:fillRef>
+          <a:effectRef idx="2">
+            <a:schemeClr val="accent1"/>
+          </a:effectRef>
+          <a:fontRef idx="minor">
+            <a:schemeClr val="lt1"/>
+          </a:fontRef>
+        </p:style>
+        <p:txBody>
+          <a:bodyPr rtlCol="0" anchor="ctr"/>
+          <a:lstStyle/>
+          <a:p>
+            <a:pPr algn="ctr"/>
+          </a:p>
+        </p:txBody>
+      </p:sp>
+      <p:sp>
+        <p:nvSpPr>
+          <p:cNvPr id="27" name="TextBox 26"/>
+          <p:cNvSpPr txBox="1"/>
+          <p:nvPr/>
+        </p:nvSpPr>
+        <p:spPr>
+          <a:xfrm>
+            <a:off x="6629400" y="4937759"/>
+            <a:ext cx="1353312" cy="201168"/>
+          </a:xfrm>
+          <a:prstGeom prst="rect">
+            <a:avLst/>
+          </a:prstGeom>
+          <a:noFill/>
+        </p:spPr>
+        <p:txBody>
+          <a:bodyPr wrap="square" lIns="0" rIns="0" tIns="0" bIns="0">
+            <a:spAutoFit/>
+          </a:bodyPr>
+          <a:lstStyle/>
+          <a:p>
+            <a:pPr algn="ctr"/>
+            <a:r>
+              <a:rPr sz="1000" b="1">
+                <a:solidFill>
+                  <a:srgbClr val="111827"/>
+                </a:solidFill>
+                <a:latin typeface="Arial"/>
+              </a:rPr>
+              <a:t>solar</a:t>
+            </a:r>
+          </a:p>
+        </p:txBody>
+      </p:sp>
+      <p:sp>
+        <p:nvSpPr>
+          <p:cNvPr id="28" name="Rounded Rectangle 27"/>
+          <p:cNvSpPr/>
+          <p:nvPr/>
+        </p:nvSpPr>
+        <p:spPr>
+          <a:xfrm>
+            <a:off x="8595359" y="4590288"/>
+            <a:ext cx="1627632" cy="960120"/>
+          </a:xfrm>
+          <a:prstGeom prst="roundRect">
+            <a:avLst/>
+          </a:prstGeom>
+          <a:solidFill>
+            <a:srgbClr val="FFFFFF"/>
+          </a:solidFill>
+          <a:ln w="12700">
+            <a:solidFill>
+              <a:srgbClr val="D90000"/>
+            </a:solidFill>
+          </a:ln>
+        </p:spPr>
+        <p:style>
+          <a:lnRef idx="1">
+            <a:schemeClr val="accent1"/>
+          </a:lnRef>
+          <a:fillRef idx="3">
+            <a:schemeClr val="accent1"/>
+          </a:fillRef>
+          <a:effectRef idx="2">
+            <a:schemeClr val="accent1"/>
+          </a:effectRef>
+          <a:fontRef idx="minor">
+            <a:schemeClr val="lt1"/>
+          </a:fontRef>
+        </p:style>
+        <p:txBody>
+          <a:bodyPr rtlCol="0" anchor="ctr"/>
+          <a:lstStyle/>
+          <a:p>
+            <a:pPr algn="ctr"/>
+          </a:p>
+        </p:txBody>
+      </p:sp>
+      <p:sp>
+        <p:nvSpPr>
+          <p:cNvPr id="29" name="TextBox 28"/>
+          <p:cNvSpPr txBox="1"/>
+          <p:nvPr/>
+        </p:nvSpPr>
+        <p:spPr>
+          <a:xfrm>
+            <a:off x="8732519" y="4937759"/>
+            <a:ext cx="1353312" cy="201168"/>
+          </a:xfrm>
+          <a:prstGeom prst="rect">
+            <a:avLst/>
+          </a:prstGeom>
+          <a:noFill/>
+        </p:spPr>
+        <p:txBody>
+          <a:bodyPr wrap="square" lIns="0" rIns="0" tIns="0" bIns="0">
+            <a:spAutoFit/>
+          </a:bodyPr>
+          <a:lstStyle/>
+          <a:p>
+            <a:pPr algn="ctr"/>
+            <a:r>
+              <a:rPr sz="1000" b="1">
+                <a:solidFill>
+                  <a:srgbClr val="111827"/>
+                </a:solidFill>
+                <a:latin typeface="Arial"/>
+              </a:rPr>
+              <a:t>biogas</a:t>
+            </a:r>
+          </a:p>
+        </p:txBody>
+      </p:sp>
+      <p:sp>
+        <p:nvSpPr>
+          <p:cNvPr id="30" name="Rounded Rectangle 29"/>
+          <p:cNvSpPr/>
+          <p:nvPr/>
+        </p:nvSpPr>
+        <p:spPr>
+          <a:xfrm>
+            <a:off x="1691640" y="6071616"/>
+            <a:ext cx="2727960" cy="713232"/>
+          </a:xfrm>
+          <a:prstGeom prst="roundRect">
+            <a:avLst/>
+          </a:prstGeom>
+          <a:solidFill>
+            <a:srgbClr val="FFFFFF"/>
+          </a:solidFill>
+          <a:ln w="11430">
             <a:solidFill>
               <a:srgbClr val="D97706"/>
             </a:solidFill>
@@ -7813,65 +9397,65 @@
           </a:p>
         </p:txBody>
       </p:sp>
-      <p:cxnSp>
-        <p:nvCxnSpPr>
-          <p:cNvPr id="15" name="Connector 14"/>
-          <p:cNvCxnSpPr/>
-          <p:nvPr/>
-        </p:nvCxnSpPr>
-        <p:spPr>
-          <a:xfrm flipH="1" flipV="1">
-            <a:off x="2697480" y="3611880"/>
-            <a:ext cx="3406140" cy="704088"/>
-          </a:xfrm>
-          <a:prstGeom prst="line">
-            <a:avLst/>
-          </a:prstGeom>
-          <a:ln w="20320">
+      <p:sp>
+        <p:nvSpPr>
+          <p:cNvPr id="31" name="TextBox 30"/>
+          <p:cNvSpPr txBox="1"/>
+          <p:nvPr/>
+        </p:nvSpPr>
+        <p:spPr>
+          <a:xfrm>
+            <a:off x="1801368" y="6208776"/>
+            <a:ext cx="2508504" cy="329184"/>
+          </a:xfrm>
+          <a:prstGeom prst="rect">
+            <a:avLst/>
+          </a:prstGeom>
+          <a:noFill/>
+        </p:spPr>
+        <p:txBody>
+          <a:bodyPr wrap="square" lIns="0" rIns="0" tIns="0" bIns="0">
+            <a:spAutoFit/>
+          </a:bodyPr>
+          <a:lstStyle/>
+          <a:p>
+            <a:pPr algn="ctr"/>
+            <a:r>
+              <a:rPr sz="1100" b="1">
+                <a:solidFill>
+                  <a:srgbClr val="111827"/>
+                </a:solidFill>
+                <a:latin typeface="Arial"/>
+              </a:rPr>
+              <a:t>Title and Aim (What and Why)</a:t>
+            </a:r>
+          </a:p>
+        </p:txBody>
+      </p:sp>
+      <p:sp>
+        <p:nvSpPr>
+          <p:cNvPr id="32" name="Rounded Rectangle 31"/>
+          <p:cNvSpPr/>
+          <p:nvPr/>
+        </p:nvSpPr>
+        <p:spPr>
+          <a:xfrm>
+            <a:off x="4739640" y="6071616"/>
+            <a:ext cx="2727960" cy="713232"/>
+          </a:xfrm>
+          <a:prstGeom prst="roundRect">
+            <a:avLst/>
+          </a:prstGeom>
+          <a:solidFill>
+            <a:srgbClr val="FFFFFF"/>
+          </a:solidFill>
+          <a:ln w="11430">
             <a:solidFill>
               <a:srgbClr val="D97706"/>
             </a:solidFill>
           </a:ln>
         </p:spPr>
         <p:style>
-          <a:lnRef idx="2">
-            <a:schemeClr val="accent1"/>
-          </a:lnRef>
-          <a:fillRef idx="0">
-            <a:schemeClr val="accent1"/>
-          </a:fillRef>
-          <a:effectRef idx="1">
-            <a:schemeClr val="accent1"/>
-          </a:effectRef>
-          <a:fontRef idx="minor">
-            <a:schemeClr val="tx1"/>
-          </a:fontRef>
-        </p:style>
-      </p:cxnSp>
-      <p:sp>
-        <p:nvSpPr>
-          <p:cNvPr id="16" name="Rounded Rectangle 15"/>
-          <p:cNvSpPr/>
-          <p:nvPr/>
-        </p:nvSpPr>
-        <p:spPr>
-          <a:xfrm>
-            <a:off x="1463040" y="3218688"/>
-            <a:ext cx="2468880" cy="786384"/>
-          </a:xfrm>
-          <a:prstGeom prst="roundRect">
-            <a:avLst/>
-          </a:prstGeom>
-          <a:solidFill>
-            <a:srgbClr val="FFFFFF"/>
-          </a:solidFill>
-          <a:ln w="11430">
-            <a:solidFill>
-              <a:srgbClr val="CBD5E1"/>
-            </a:solidFill>
-          </a:ln>
-        </p:spPr>
-        <p:style>
           <a:lnRef idx="1">
             <a:schemeClr val="accent1"/>
           </a:lnRef>
@@ -7895,14 +9479,14 @@
       </p:sp>
       <p:sp>
         <p:nvSpPr>
-          <p:cNvPr id="17" name="TextBox 16"/>
+          <p:cNvPr id="33" name="TextBox 32"/>
           <p:cNvSpPr txBox="1"/>
           <p:nvPr/>
         </p:nvSpPr>
         <p:spPr>
           <a:xfrm>
-            <a:off x="1609344" y="3392424"/>
-            <a:ext cx="2176272" cy="347472"/>
+            <a:off x="4849368" y="6208776"/>
+            <a:ext cx="2508504" cy="329184"/>
           </a:xfrm>
           <a:prstGeom prst="rect">
             <a:avLst/>
@@ -7917,76 +9501,41 @@
           <a:p>
             <a:pPr algn="ctr"/>
             <a:r>
-              <a:rPr sz="1200" b="1">
+              <a:rPr sz="1100" b="1">
                 <a:solidFill>
                   <a:srgbClr val="111827"/>
                 </a:solidFill>
                 <a:latin typeface="Arial"/>
               </a:rPr>
-              <a:t>Title and Aim (What and Why)</a:t>
-            </a:r>
-          </a:p>
-        </p:txBody>
-      </p:sp>
-      <p:cxnSp>
-        <p:nvCxnSpPr>
-          <p:cNvPr id="18" name="Connector 17"/>
-          <p:cNvCxnSpPr/>
-          <p:nvPr/>
-        </p:nvCxnSpPr>
-        <p:spPr>
-          <a:xfrm flipV="1">
-            <a:off x="6103620" y="3611880"/>
-            <a:ext cx="3497580" cy="704088"/>
-          </a:xfrm>
-          <a:prstGeom prst="line">
-            <a:avLst/>
-          </a:prstGeom>
-          <a:ln w="20320">
+              <a:t>Apparatus/Materials (The tools)</a:t>
+            </a:r>
+          </a:p>
+        </p:txBody>
+      </p:sp>
+      <p:sp>
+        <p:nvSpPr>
+          <p:cNvPr id="34" name="Rounded Rectangle 33"/>
+          <p:cNvSpPr/>
+          <p:nvPr/>
+        </p:nvSpPr>
+        <p:spPr>
+          <a:xfrm>
+            <a:off x="7787640" y="6071616"/>
+            <a:ext cx="2727960" cy="713232"/>
+          </a:xfrm>
+          <a:prstGeom prst="roundRect">
+            <a:avLst/>
+          </a:prstGeom>
+          <a:solidFill>
+            <a:srgbClr val="FFFFFF"/>
+          </a:solidFill>
+          <a:ln w="11430">
             <a:solidFill>
               <a:srgbClr val="D97706"/>
             </a:solidFill>
           </a:ln>
         </p:spPr>
         <p:style>
-          <a:lnRef idx="2">
-            <a:schemeClr val="accent1"/>
-          </a:lnRef>
-          <a:fillRef idx="0">
-            <a:schemeClr val="accent1"/>
-          </a:fillRef>
-          <a:effectRef idx="1">
-            <a:schemeClr val="accent1"/>
-          </a:effectRef>
-          <a:fontRef idx="minor">
-            <a:schemeClr val="tx1"/>
-          </a:fontRef>
-        </p:style>
-      </p:cxnSp>
-      <p:sp>
-        <p:nvSpPr>
-          <p:cNvPr id="19" name="Rounded Rectangle 18"/>
-          <p:cNvSpPr/>
-          <p:nvPr/>
-        </p:nvSpPr>
-        <p:spPr>
-          <a:xfrm>
-            <a:off x="8366760" y="3218688"/>
-            <a:ext cx="2468880" cy="786384"/>
-          </a:xfrm>
-          <a:prstGeom prst="roundRect">
-            <a:avLst/>
-          </a:prstGeom>
-          <a:solidFill>
-            <a:srgbClr val="FFFFFF"/>
-          </a:solidFill>
-          <a:ln w="11430">
-            <a:solidFill>
-              <a:srgbClr val="CBD5E1"/>
-            </a:solidFill>
-          </a:ln>
-        </p:spPr>
-        <p:style>
           <a:lnRef idx="1">
             <a:schemeClr val="accent1"/>
           </a:lnRef>
@@ -8010,14 +9559,14 @@
       </p:sp>
       <p:sp>
         <p:nvSpPr>
-          <p:cNvPr id="20" name="TextBox 19"/>
+          <p:cNvPr id="35" name="TextBox 34"/>
           <p:cNvSpPr txBox="1"/>
           <p:nvPr/>
         </p:nvSpPr>
         <p:spPr>
           <a:xfrm>
-            <a:off x="8513064" y="3392424"/>
-            <a:ext cx="2176272" cy="347472"/>
+            <a:off x="7897368" y="6208776"/>
+            <a:ext cx="2508504" cy="329184"/>
           </a:xfrm>
           <a:prstGeom prst="rect">
             <a:avLst/>
@@ -8032,122 +9581,7 @@
           <a:p>
             <a:pPr algn="ctr"/>
             <a:r>
-              <a:rPr sz="1200" b="1">
-                <a:solidFill>
-                  <a:srgbClr val="111827"/>
-                </a:solidFill>
-                <a:latin typeface="Arial"/>
-              </a:rPr>
-              <a:t>Apparatus/Materials (The tools)</a:t>
-            </a:r>
-          </a:p>
-        </p:txBody>
-      </p:sp>
-      <p:cxnSp>
-        <p:nvCxnSpPr>
-          <p:cNvPr id="21" name="Connector 20"/>
-          <p:cNvCxnSpPr/>
-          <p:nvPr/>
-        </p:nvCxnSpPr>
-        <p:spPr>
-          <a:xfrm flipH="1">
-            <a:off x="2697480" y="4315968"/>
-            <a:ext cx="3406140" cy="1170432"/>
-          </a:xfrm>
-          <a:prstGeom prst="line">
-            <a:avLst/>
-          </a:prstGeom>
-          <a:ln w="20320">
-            <a:solidFill>
-              <a:srgbClr val="D97706"/>
-            </a:solidFill>
-          </a:ln>
-        </p:spPr>
-        <p:style>
-          <a:lnRef idx="2">
-            <a:schemeClr val="accent1"/>
-          </a:lnRef>
-          <a:fillRef idx="0">
-            <a:schemeClr val="accent1"/>
-          </a:fillRef>
-          <a:effectRef idx="1">
-            <a:schemeClr val="accent1"/>
-          </a:effectRef>
-          <a:fontRef idx="minor">
-            <a:schemeClr val="tx1"/>
-          </a:fontRef>
-        </p:style>
-      </p:cxnSp>
-      <p:sp>
-        <p:nvSpPr>
-          <p:cNvPr id="22" name="Rounded Rectangle 21"/>
-          <p:cNvSpPr/>
-          <p:nvPr/>
-        </p:nvSpPr>
-        <p:spPr>
-          <a:xfrm>
-            <a:off x="1463040" y="5093208"/>
-            <a:ext cx="2468880" cy="786384"/>
-          </a:xfrm>
-          <a:prstGeom prst="roundRect">
-            <a:avLst/>
-          </a:prstGeom>
-          <a:solidFill>
-            <a:srgbClr val="FFFFFF"/>
-          </a:solidFill>
-          <a:ln w="11430">
-            <a:solidFill>
-              <a:srgbClr val="CBD5E1"/>
-            </a:solidFill>
-          </a:ln>
-        </p:spPr>
-        <p:style>
-          <a:lnRef idx="1">
-            <a:schemeClr val="accent1"/>
-          </a:lnRef>
-          <a:fillRef idx="3">
-            <a:schemeClr val="accent1"/>
-          </a:fillRef>
-          <a:effectRef idx="2">
-            <a:schemeClr val="accent1"/>
-          </a:effectRef>
-          <a:fontRef idx="minor">
-            <a:schemeClr val="lt1"/>
-          </a:fontRef>
-        </p:style>
-        <p:txBody>
-          <a:bodyPr rtlCol="0" anchor="ctr"/>
-          <a:lstStyle/>
-          <a:p>
-            <a:pPr algn="ctr"/>
-          </a:p>
-        </p:txBody>
-      </p:sp>
-      <p:sp>
-        <p:nvSpPr>
-          <p:cNvPr id="23" name="TextBox 22"/>
-          <p:cNvSpPr txBox="1"/>
-          <p:nvPr/>
-        </p:nvSpPr>
-        <p:spPr>
-          <a:xfrm>
-            <a:off x="1609344" y="5266944"/>
-            <a:ext cx="2176272" cy="347472"/>
-          </a:xfrm>
-          <a:prstGeom prst="rect">
-            <a:avLst/>
-          </a:prstGeom>
-          <a:noFill/>
-        </p:spPr>
-        <p:txBody>
-          <a:bodyPr wrap="square" lIns="0" rIns="0" tIns="0" bIns="0">
-            <a:spAutoFit/>
-          </a:bodyPr>
-          <a:lstStyle/>
-          <a:p>
-            <a:pPr algn="ctr"/>
-            <a:r>
-              <a:rPr sz="1200" b="1">
+              <a:rPr sz="1100" b="1">
                 <a:solidFill>
                   <a:srgbClr val="111827"/>
                 </a:solidFill>
@@ -8160,7 +9594,7 @@
       </p:sp>
       <p:sp>
         <p:nvSpPr>
-          <p:cNvPr id="24" name="TextBox 23"/>
+          <p:cNvPr id="36" name="TextBox 35"/>
           <p:cNvSpPr txBox="1"/>
           <p:nvPr/>
         </p:nvSpPr>
@@ -9932,8 +11366,8 @@
         </p:nvSpPr>
         <p:spPr>
           <a:xfrm>
-            <a:off x="1417319" y="2322576"/>
-            <a:ext cx="9372600" cy="411480"/>
+            <a:off x="1417319" y="2286000"/>
+            <a:ext cx="9372600" cy="310896"/>
           </a:xfrm>
           <a:prstGeom prst="rect">
             <a:avLst/>
@@ -9948,7 +11382,7 @@
           <a:p>
             <a:pPr algn="ctr"/>
             <a:r>
-              <a:rPr sz="1800" b="1">
+              <a:rPr sz="1700" b="1">
                 <a:solidFill>
                   <a:srgbClr val="111827"/>
                 </a:solidFill>
@@ -9961,22 +11395,22 @@
       </p:sp>
       <p:sp>
         <p:nvSpPr>
-          <p:cNvPr id="13" name="Oval 12"/>
+          <p:cNvPr id="13" name="Rounded Rectangle 12"/>
           <p:cNvSpPr/>
           <p:nvPr/>
         </p:nvSpPr>
         <p:spPr>
           <a:xfrm>
-            <a:off x="5756148" y="3355848"/>
-            <a:ext cx="694944" cy="694944"/>
-          </a:xfrm>
-          <a:prstGeom prst="ellipse">
-            <a:avLst/>
-          </a:prstGeom>
-          <a:solidFill>
-            <a:srgbClr val="FCD116"/>
-          </a:solidFill>
-          <a:ln w="15240">
+            <a:off x="1691640" y="2834639"/>
+            <a:ext cx="3931920" cy="3063240"/>
+          </a:xfrm>
+          <a:prstGeom prst="roundRect">
+            <a:avLst/>
+          </a:prstGeom>
+          <a:solidFill>
+            <a:srgbClr val="FFFFFF"/>
+          </a:solidFill>
+          <a:ln w="13970">
             <a:solidFill>
               <a:srgbClr val="111827"/>
             </a:solidFill>
@@ -10006,22 +11440,330 @@
       </p:sp>
       <p:sp>
         <p:nvSpPr>
-          <p:cNvPr id="14" name="Rounded Rectangle 13"/>
+          <p:cNvPr id="14" name="Rectangle 13"/>
           <p:cNvSpPr/>
           <p:nvPr/>
         </p:nvSpPr>
         <p:spPr>
           <a:xfrm>
-            <a:off x="5628131" y="4078224"/>
-            <a:ext cx="950976" cy="1463040"/>
+            <a:off x="2011680" y="3264408"/>
+            <a:ext cx="3246120" cy="32004"/>
+          </a:xfrm>
+          <a:prstGeom prst="rect">
+            <a:avLst/>
+          </a:prstGeom>
+          <a:solidFill>
+            <a:srgbClr val="CBD5E1"/>
+          </a:solidFill>
+          <a:ln>
+            <a:noFill/>
+          </a:ln>
+        </p:spPr>
+        <p:style>
+          <a:lnRef idx="1">
+            <a:schemeClr val="accent1"/>
+          </a:lnRef>
+          <a:fillRef idx="3">
+            <a:schemeClr val="accent1"/>
+          </a:fillRef>
+          <a:effectRef idx="2">
+            <a:schemeClr val="accent1"/>
+          </a:effectRef>
+          <a:fontRef idx="minor">
+            <a:schemeClr val="lt1"/>
+          </a:fontRef>
+        </p:style>
+        <p:txBody>
+          <a:bodyPr rtlCol="0" anchor="ctr"/>
+          <a:lstStyle/>
+          <a:p>
+            <a:pPr algn="ctr"/>
+          </a:p>
+        </p:txBody>
+      </p:sp>
+      <p:sp>
+        <p:nvSpPr>
+          <p:cNvPr id="15" name="TextBox 14"/>
+          <p:cNvSpPr txBox="1"/>
+          <p:nvPr/>
+        </p:nvSpPr>
+        <p:spPr>
+          <a:xfrm>
+            <a:off x="2103120" y="3054096"/>
+            <a:ext cx="1325880" cy="201168"/>
+          </a:xfrm>
+          <a:prstGeom prst="rect">
+            <a:avLst/>
+          </a:prstGeom>
+          <a:noFill/>
+        </p:spPr>
+        <p:txBody>
+          <a:bodyPr wrap="square" lIns="0" rIns="0" tIns="0" bIns="0">
+            <a:spAutoFit/>
+          </a:bodyPr>
+          <a:lstStyle/>
+          <a:p>
+            <a:r>
+              <a:rPr sz="1000" b="1">
+                <a:solidFill>
+                  <a:srgbClr val="1B7F3A"/>
+                </a:solidFill>
+                <a:latin typeface="Arial"/>
+              </a:rPr>
+              <a:t>Title/Aim</a:t>
+            </a:r>
+          </a:p>
+        </p:txBody>
+      </p:sp>
+      <p:sp>
+        <p:nvSpPr>
+          <p:cNvPr id="16" name="Rectangle 15"/>
+          <p:cNvSpPr/>
+          <p:nvPr/>
+        </p:nvSpPr>
+        <p:spPr>
+          <a:xfrm>
+            <a:off x="2011680" y="3831335"/>
+            <a:ext cx="3246120" cy="32004"/>
+          </a:xfrm>
+          <a:prstGeom prst="rect">
+            <a:avLst/>
+          </a:prstGeom>
+          <a:solidFill>
+            <a:srgbClr val="CBD5E1"/>
+          </a:solidFill>
+          <a:ln>
+            <a:noFill/>
+          </a:ln>
+        </p:spPr>
+        <p:style>
+          <a:lnRef idx="1">
+            <a:schemeClr val="accent1"/>
+          </a:lnRef>
+          <a:fillRef idx="3">
+            <a:schemeClr val="accent1"/>
+          </a:fillRef>
+          <a:effectRef idx="2">
+            <a:schemeClr val="accent1"/>
+          </a:effectRef>
+          <a:fontRef idx="minor">
+            <a:schemeClr val="lt1"/>
+          </a:fontRef>
+        </p:style>
+        <p:txBody>
+          <a:bodyPr rtlCol="0" anchor="ctr"/>
+          <a:lstStyle/>
+          <a:p>
+            <a:pPr algn="ctr"/>
+          </a:p>
+        </p:txBody>
+      </p:sp>
+      <p:sp>
+        <p:nvSpPr>
+          <p:cNvPr id="17" name="TextBox 16"/>
+          <p:cNvSpPr txBox="1"/>
+          <p:nvPr/>
+        </p:nvSpPr>
+        <p:spPr>
+          <a:xfrm>
+            <a:off x="2103120" y="3621024"/>
+            <a:ext cx="1325880" cy="201168"/>
+          </a:xfrm>
+          <a:prstGeom prst="rect">
+            <a:avLst/>
+          </a:prstGeom>
+          <a:noFill/>
+        </p:spPr>
+        <p:txBody>
+          <a:bodyPr wrap="square" lIns="0" rIns="0" tIns="0" bIns="0">
+            <a:spAutoFit/>
+          </a:bodyPr>
+          <a:lstStyle/>
+          <a:p>
+            <a:r>
+              <a:rPr sz="1000" b="1">
+                <a:solidFill>
+                  <a:srgbClr val="1B7F3A"/>
+                </a:solidFill>
+                <a:latin typeface="Arial"/>
+              </a:rPr>
+              <a:t>Materials</a:t>
+            </a:r>
+          </a:p>
+        </p:txBody>
+      </p:sp>
+      <p:sp>
+        <p:nvSpPr>
+          <p:cNvPr id="18" name="Rectangle 17"/>
+          <p:cNvSpPr/>
+          <p:nvPr/>
+        </p:nvSpPr>
+        <p:spPr>
+          <a:xfrm>
+            <a:off x="2011680" y="4398264"/>
+            <a:ext cx="3246120" cy="32004"/>
+          </a:xfrm>
+          <a:prstGeom prst="rect">
+            <a:avLst/>
+          </a:prstGeom>
+          <a:solidFill>
+            <a:srgbClr val="CBD5E1"/>
+          </a:solidFill>
+          <a:ln>
+            <a:noFill/>
+          </a:ln>
+        </p:spPr>
+        <p:style>
+          <a:lnRef idx="1">
+            <a:schemeClr val="accent1"/>
+          </a:lnRef>
+          <a:fillRef idx="3">
+            <a:schemeClr val="accent1"/>
+          </a:fillRef>
+          <a:effectRef idx="2">
+            <a:schemeClr val="accent1"/>
+          </a:effectRef>
+          <a:fontRef idx="minor">
+            <a:schemeClr val="lt1"/>
+          </a:fontRef>
+        </p:style>
+        <p:txBody>
+          <a:bodyPr rtlCol="0" anchor="ctr"/>
+          <a:lstStyle/>
+          <a:p>
+            <a:pPr algn="ctr"/>
+          </a:p>
+        </p:txBody>
+      </p:sp>
+      <p:sp>
+        <p:nvSpPr>
+          <p:cNvPr id="19" name="TextBox 18"/>
+          <p:cNvSpPr txBox="1"/>
+          <p:nvPr/>
+        </p:nvSpPr>
+        <p:spPr>
+          <a:xfrm>
+            <a:off x="2103120" y="4187952"/>
+            <a:ext cx="1325880" cy="201168"/>
+          </a:xfrm>
+          <a:prstGeom prst="rect">
+            <a:avLst/>
+          </a:prstGeom>
+          <a:noFill/>
+        </p:spPr>
+        <p:txBody>
+          <a:bodyPr wrap="square" lIns="0" rIns="0" tIns="0" bIns="0">
+            <a:spAutoFit/>
+          </a:bodyPr>
+          <a:lstStyle/>
+          <a:p>
+            <a:r>
+              <a:rPr sz="1000" b="1">
+                <a:solidFill>
+                  <a:srgbClr val="1B7F3A"/>
+                </a:solidFill>
+                <a:latin typeface="Arial"/>
+              </a:rPr>
+              <a:t>Procedure</a:t>
+            </a:r>
+          </a:p>
+        </p:txBody>
+      </p:sp>
+      <p:sp>
+        <p:nvSpPr>
+          <p:cNvPr id="20" name="Rectangle 19"/>
+          <p:cNvSpPr/>
+          <p:nvPr/>
+        </p:nvSpPr>
+        <p:spPr>
+          <a:xfrm>
+            <a:off x="2011680" y="4965192"/>
+            <a:ext cx="3246120" cy="32004"/>
+          </a:xfrm>
+          <a:prstGeom prst="rect">
+            <a:avLst/>
+          </a:prstGeom>
+          <a:solidFill>
+            <a:srgbClr val="CBD5E1"/>
+          </a:solidFill>
+          <a:ln>
+            <a:noFill/>
+          </a:ln>
+        </p:spPr>
+        <p:style>
+          <a:lnRef idx="1">
+            <a:schemeClr val="accent1"/>
+          </a:lnRef>
+          <a:fillRef idx="3">
+            <a:schemeClr val="accent1"/>
+          </a:fillRef>
+          <a:effectRef idx="2">
+            <a:schemeClr val="accent1"/>
+          </a:effectRef>
+          <a:fontRef idx="minor">
+            <a:schemeClr val="lt1"/>
+          </a:fontRef>
+        </p:style>
+        <p:txBody>
+          <a:bodyPr rtlCol="0" anchor="ctr"/>
+          <a:lstStyle/>
+          <a:p>
+            <a:pPr algn="ctr"/>
+          </a:p>
+        </p:txBody>
+      </p:sp>
+      <p:sp>
+        <p:nvSpPr>
+          <p:cNvPr id="21" name="TextBox 20"/>
+          <p:cNvSpPr txBox="1"/>
+          <p:nvPr/>
+        </p:nvSpPr>
+        <p:spPr>
+          <a:xfrm>
+            <a:off x="2103120" y="4754879"/>
+            <a:ext cx="1325880" cy="201168"/>
+          </a:xfrm>
+          <a:prstGeom prst="rect">
+            <a:avLst/>
+          </a:prstGeom>
+          <a:noFill/>
+        </p:spPr>
+        <p:txBody>
+          <a:bodyPr wrap="square" lIns="0" rIns="0" tIns="0" bIns="0">
+            <a:spAutoFit/>
+          </a:bodyPr>
+          <a:lstStyle/>
+          <a:p>
+            <a:r>
+              <a:rPr sz="1000" b="1">
+                <a:solidFill>
+                  <a:srgbClr val="1B7F3A"/>
+                </a:solidFill>
+                <a:latin typeface="Arial"/>
+              </a:rPr>
+              <a:t>Result</a:t>
+            </a:r>
+          </a:p>
+        </p:txBody>
+      </p:sp>
+      <p:sp>
+        <p:nvSpPr>
+          <p:cNvPr id="22" name="Rounded Rectangle 21"/>
+          <p:cNvSpPr/>
+          <p:nvPr/>
+        </p:nvSpPr>
+        <p:spPr>
+          <a:xfrm>
+            <a:off x="6492240" y="3172968"/>
+            <a:ext cx="1627632" cy="960120"/>
           </a:xfrm>
           <a:prstGeom prst="roundRect">
             <a:avLst/>
           </a:prstGeom>
           <a:solidFill>
-            <a:srgbClr val="ECFDF5"/>
-          </a:solidFill>
-          <a:ln w="17780">
+            <a:srgbClr val="FFFFFF"/>
+          </a:solidFill>
+          <a:ln w="12700">
             <a:solidFill>
               <a:srgbClr val="1B7F3A"/>
             </a:solidFill>
@@ -10049,96 +11791,16 @@
           </a:p>
         </p:txBody>
       </p:sp>
-      <p:cxnSp>
-        <p:nvCxnSpPr>
-          <p:cNvPr id="15" name="Connector 14"/>
-          <p:cNvCxnSpPr/>
-          <p:nvPr/>
-        </p:nvCxnSpPr>
-        <p:spPr>
-          <a:xfrm flipH="1" flipV="1">
-            <a:off x="2697480" y="3611880"/>
-            <a:ext cx="3406140" cy="704088"/>
-          </a:xfrm>
-          <a:prstGeom prst="line">
-            <a:avLst/>
-          </a:prstGeom>
-          <a:ln w="20320">
-            <a:solidFill>
-              <a:srgbClr val="1B7F3A"/>
-            </a:solidFill>
-          </a:ln>
-        </p:spPr>
-        <p:style>
-          <a:lnRef idx="2">
-            <a:schemeClr val="accent1"/>
-          </a:lnRef>
-          <a:fillRef idx="0">
-            <a:schemeClr val="accent1"/>
-          </a:fillRef>
-          <a:effectRef idx="1">
-            <a:schemeClr val="accent1"/>
-          </a:effectRef>
-          <a:fontRef idx="minor">
-            <a:schemeClr val="tx1"/>
-          </a:fontRef>
-        </p:style>
-      </p:cxnSp>
-      <p:sp>
-        <p:nvSpPr>
-          <p:cNvPr id="16" name="Rounded Rectangle 15"/>
-          <p:cNvSpPr/>
-          <p:nvPr/>
-        </p:nvSpPr>
-        <p:spPr>
-          <a:xfrm>
-            <a:off x="1463040" y="3218688"/>
-            <a:ext cx="2468880" cy="786384"/>
-          </a:xfrm>
-          <a:prstGeom prst="roundRect">
-            <a:avLst/>
-          </a:prstGeom>
-          <a:solidFill>
-            <a:srgbClr val="FFFFFF"/>
-          </a:solidFill>
-          <a:ln w="11430">
-            <a:solidFill>
-              <a:srgbClr val="CBD5E1"/>
-            </a:solidFill>
-          </a:ln>
-        </p:spPr>
-        <p:style>
-          <a:lnRef idx="1">
-            <a:schemeClr val="accent1"/>
-          </a:lnRef>
-          <a:fillRef idx="3">
-            <a:schemeClr val="accent1"/>
-          </a:fillRef>
-          <a:effectRef idx="2">
-            <a:schemeClr val="accent1"/>
-          </a:effectRef>
-          <a:fontRef idx="minor">
-            <a:schemeClr val="lt1"/>
-          </a:fontRef>
-        </p:style>
-        <p:txBody>
-          <a:bodyPr rtlCol="0" anchor="ctr"/>
-          <a:lstStyle/>
-          <a:p>
-            <a:pPr algn="ctr"/>
-          </a:p>
-        </p:txBody>
-      </p:sp>
-      <p:sp>
-        <p:nvSpPr>
-          <p:cNvPr id="17" name="TextBox 16"/>
+      <p:sp>
+        <p:nvSpPr>
+          <p:cNvPr id="23" name="TextBox 22"/>
           <p:cNvSpPr txBox="1"/>
           <p:nvPr/>
         </p:nvSpPr>
         <p:spPr>
           <a:xfrm>
-            <a:off x="1609344" y="3392424"/>
-            <a:ext cx="2176272" cy="347472"/>
+            <a:off x="6629400" y="3520439"/>
+            <a:ext cx="1353312" cy="201168"/>
           </a:xfrm>
           <a:prstGeom prst="rect">
             <a:avLst/>
@@ -10153,76 +11815,41 @@
           <a:p>
             <a:pPr algn="ctr"/>
             <a:r>
-              <a:rPr sz="1200" b="1">
+              <a:rPr sz="1000" b="1">
                 <a:solidFill>
                   <a:srgbClr val="111827"/>
                 </a:solidFill>
                 <a:latin typeface="Arial"/>
               </a:rPr>
-              <a:t>Brainstorm in pairs and list all the</a:t>
-            </a:r>
-          </a:p>
-        </p:txBody>
-      </p:sp>
-      <p:cxnSp>
-        <p:nvCxnSpPr>
-          <p:cNvPr id="18" name="Connector 17"/>
-          <p:cNvCxnSpPr/>
-          <p:nvPr/>
-        </p:nvCxnSpPr>
-        <p:spPr>
-          <a:xfrm flipV="1">
-            <a:off x="6103620" y="3611880"/>
-            <a:ext cx="3497580" cy="704088"/>
-          </a:xfrm>
-          <a:prstGeom prst="line">
-            <a:avLst/>
-          </a:prstGeom>
-          <a:ln w="20320">
+              <a:t>skeleton</a:t>
+            </a:r>
+          </a:p>
+        </p:txBody>
+      </p:sp>
+      <p:sp>
+        <p:nvSpPr>
+          <p:cNvPr id="24" name="Rounded Rectangle 23"/>
+          <p:cNvSpPr/>
+          <p:nvPr/>
+        </p:nvSpPr>
+        <p:spPr>
+          <a:xfrm>
+            <a:off x="8595359" y="3172968"/>
+            <a:ext cx="1627632" cy="960120"/>
+          </a:xfrm>
+          <a:prstGeom prst="roundRect">
+            <a:avLst/>
+          </a:prstGeom>
+          <a:solidFill>
+            <a:srgbClr val="FFFFFF"/>
+          </a:solidFill>
+          <a:ln w="12700">
             <a:solidFill>
-              <a:srgbClr val="1B7F3A"/>
+              <a:srgbClr val="1D4ED8"/>
             </a:solidFill>
           </a:ln>
         </p:spPr>
         <p:style>
-          <a:lnRef idx="2">
-            <a:schemeClr val="accent1"/>
-          </a:lnRef>
-          <a:fillRef idx="0">
-            <a:schemeClr val="accent1"/>
-          </a:fillRef>
-          <a:effectRef idx="1">
-            <a:schemeClr val="accent1"/>
-          </a:effectRef>
-          <a:fontRef idx="minor">
-            <a:schemeClr val="tx1"/>
-          </a:fontRef>
-        </p:style>
-      </p:cxnSp>
-      <p:sp>
-        <p:nvSpPr>
-          <p:cNvPr id="19" name="Rounded Rectangle 18"/>
-          <p:cNvSpPr/>
-          <p:nvPr/>
-        </p:nvSpPr>
-        <p:spPr>
-          <a:xfrm>
-            <a:off x="8366760" y="3218688"/>
-            <a:ext cx="2468880" cy="786384"/>
-          </a:xfrm>
-          <a:prstGeom prst="roundRect">
-            <a:avLst/>
-          </a:prstGeom>
-          <a:solidFill>
-            <a:srgbClr val="FFFFFF"/>
-          </a:solidFill>
-          <a:ln w="11430">
-            <a:solidFill>
-              <a:srgbClr val="CBD5E1"/>
-            </a:solidFill>
-          </a:ln>
-        </p:spPr>
-        <p:style>
           <a:lnRef idx="1">
             <a:schemeClr val="accent1"/>
           </a:lnRef>
@@ -10246,14 +11873,14 @@
       </p:sp>
       <p:sp>
         <p:nvSpPr>
-          <p:cNvPr id="20" name="TextBox 19"/>
+          <p:cNvPr id="25" name="TextBox 24"/>
           <p:cNvSpPr txBox="1"/>
           <p:nvPr/>
         </p:nvSpPr>
         <p:spPr>
           <a:xfrm>
-            <a:off x="8513064" y="3392424"/>
-            <a:ext cx="2176272" cy="347472"/>
+            <a:off x="8732519" y="3520439"/>
+            <a:ext cx="1353312" cy="201168"/>
           </a:xfrm>
           <a:prstGeom prst="rect">
             <a:avLst/>
@@ -10268,76 +11895,41 @@
           <a:p>
             <a:pPr algn="ctr"/>
             <a:r>
-              <a:rPr sz="1200" b="1">
+              <a:rPr sz="1000" b="1">
                 <a:solidFill>
                   <a:srgbClr val="111827"/>
                 </a:solidFill>
                 <a:latin typeface="Arial"/>
               </a:rPr>
-              <a:t>Copy the report structure into their notebooks</a:t>
-            </a:r>
-          </a:p>
-        </p:txBody>
-      </p:sp>
-      <p:cxnSp>
-        <p:nvCxnSpPr>
-          <p:cNvPr id="21" name="Connector 20"/>
-          <p:cNvCxnSpPr/>
-          <p:nvPr/>
-        </p:nvCxnSpPr>
-        <p:spPr>
-          <a:xfrm flipH="1">
-            <a:off x="2697480" y="4315968"/>
-            <a:ext cx="3406140" cy="1170432"/>
-          </a:xfrm>
-          <a:prstGeom prst="line">
-            <a:avLst/>
-          </a:prstGeom>
-          <a:ln w="20320">
+              <a:t>circuit</a:t>
+            </a:r>
+          </a:p>
+        </p:txBody>
+      </p:sp>
+      <p:sp>
+        <p:nvSpPr>
+          <p:cNvPr id="26" name="Rounded Rectangle 25"/>
+          <p:cNvSpPr/>
+          <p:nvPr/>
+        </p:nvSpPr>
+        <p:spPr>
+          <a:xfrm>
+            <a:off x="6492240" y="4590288"/>
+            <a:ext cx="1627632" cy="960120"/>
+          </a:xfrm>
+          <a:prstGeom prst="roundRect">
+            <a:avLst/>
+          </a:prstGeom>
+          <a:solidFill>
+            <a:srgbClr val="FFF7E0"/>
+          </a:solidFill>
+          <a:ln w="12700">
             <a:solidFill>
-              <a:srgbClr val="1B7F3A"/>
+              <a:srgbClr val="FCD116"/>
             </a:solidFill>
           </a:ln>
         </p:spPr>
         <p:style>
-          <a:lnRef idx="2">
-            <a:schemeClr val="accent1"/>
-          </a:lnRef>
-          <a:fillRef idx="0">
-            <a:schemeClr val="accent1"/>
-          </a:fillRef>
-          <a:effectRef idx="1">
-            <a:schemeClr val="accent1"/>
-          </a:effectRef>
-          <a:fontRef idx="minor">
-            <a:schemeClr val="tx1"/>
-          </a:fontRef>
-        </p:style>
-      </p:cxnSp>
-      <p:sp>
-        <p:nvSpPr>
-          <p:cNvPr id="22" name="Rounded Rectangle 21"/>
-          <p:cNvSpPr/>
-          <p:nvPr/>
-        </p:nvSpPr>
-        <p:spPr>
-          <a:xfrm>
-            <a:off x="1463040" y="5093208"/>
-            <a:ext cx="2468880" cy="786384"/>
-          </a:xfrm>
-          <a:prstGeom prst="roundRect">
-            <a:avLst/>
-          </a:prstGeom>
-          <a:solidFill>
-            <a:srgbClr val="FFFFFF"/>
-          </a:solidFill>
-          <a:ln w="11430">
-            <a:solidFill>
-              <a:srgbClr val="CBD5E1"/>
-            </a:solidFill>
-          </a:ln>
-        </p:spPr>
-        <p:style>
           <a:lnRef idx="1">
             <a:schemeClr val="accent1"/>
           </a:lnRef>
@@ -10361,14 +11953,14 @@
       </p:sp>
       <p:sp>
         <p:nvSpPr>
-          <p:cNvPr id="23" name="TextBox 22"/>
+          <p:cNvPr id="27" name="TextBox 26"/>
           <p:cNvSpPr txBox="1"/>
           <p:nvPr/>
         </p:nvSpPr>
         <p:spPr>
           <a:xfrm>
-            <a:off x="1609344" y="5266944"/>
-            <a:ext cx="2176272" cy="347472"/>
+            <a:off x="6629400" y="4937759"/>
+            <a:ext cx="1353312" cy="201168"/>
           </a:xfrm>
           <a:prstGeom prst="rect">
             <a:avLst/>
@@ -10383,27 +11975,27 @@
           <a:p>
             <a:pPr algn="ctr"/>
             <a:r>
-              <a:rPr sz="1200" b="1">
+              <a:rPr sz="1000" b="1">
                 <a:solidFill>
                   <a:srgbClr val="111827"/>
                 </a:solidFill>
                 <a:latin typeface="Arial"/>
               </a:rPr>
-              <a:t>Participate in a whole-class exercise to</a:t>
-            </a:r>
-          </a:p>
-        </p:txBody>
-      </p:sp>
-      <p:sp>
-        <p:nvSpPr>
-          <p:cNvPr id="24" name="Rounded Rectangle 23"/>
+              <a:t>solar</a:t>
+            </a:r>
+          </a:p>
+        </p:txBody>
+      </p:sp>
+      <p:sp>
+        <p:nvSpPr>
+          <p:cNvPr id="28" name="Rounded Rectangle 27"/>
           <p:cNvSpPr/>
           <p:nvPr/>
         </p:nvSpPr>
         <p:spPr>
           <a:xfrm>
-            <a:off x="3703320" y="5650992"/>
-            <a:ext cx="5440680" cy="457200"/>
+            <a:off x="8595359" y="4590288"/>
+            <a:ext cx="1627632" cy="960120"/>
           </a:xfrm>
           <a:prstGeom prst="roundRect">
             <a:avLst/>
@@ -10441,14 +12033,14 @@
       </p:sp>
       <p:sp>
         <p:nvSpPr>
-          <p:cNvPr id="25" name="TextBox 24"/>
+          <p:cNvPr id="29" name="TextBox 28"/>
           <p:cNvSpPr txBox="1"/>
           <p:nvPr/>
         </p:nvSpPr>
         <p:spPr>
           <a:xfrm>
-            <a:off x="3886200" y="5769864"/>
-            <a:ext cx="5074920" cy="164592"/>
+            <a:off x="8732519" y="4937759"/>
+            <a:ext cx="1353312" cy="201168"/>
           </a:xfrm>
           <a:prstGeom prst="rect">
             <a:avLst/>
@@ -10463,6 +12055,326 @@
           <a:p>
             <a:pPr algn="ctr"/>
             <a:r>
+              <a:rPr sz="1000" b="1">
+                <a:solidFill>
+                  <a:srgbClr val="111827"/>
+                </a:solidFill>
+                <a:latin typeface="Arial"/>
+              </a:rPr>
+              <a:t>biogas</a:t>
+            </a:r>
+          </a:p>
+        </p:txBody>
+      </p:sp>
+      <p:sp>
+        <p:nvSpPr>
+          <p:cNvPr id="30" name="Rounded Rectangle 29"/>
+          <p:cNvSpPr/>
+          <p:nvPr/>
+        </p:nvSpPr>
+        <p:spPr>
+          <a:xfrm>
+            <a:off x="1691640" y="6071616"/>
+            <a:ext cx="2727960" cy="713232"/>
+          </a:xfrm>
+          <a:prstGeom prst="roundRect">
+            <a:avLst/>
+          </a:prstGeom>
+          <a:solidFill>
+            <a:srgbClr val="FFFFFF"/>
+          </a:solidFill>
+          <a:ln w="11430">
+            <a:solidFill>
+              <a:srgbClr val="1B7F3A"/>
+            </a:solidFill>
+          </a:ln>
+        </p:spPr>
+        <p:style>
+          <a:lnRef idx="1">
+            <a:schemeClr val="accent1"/>
+          </a:lnRef>
+          <a:fillRef idx="3">
+            <a:schemeClr val="accent1"/>
+          </a:fillRef>
+          <a:effectRef idx="2">
+            <a:schemeClr val="accent1"/>
+          </a:effectRef>
+          <a:fontRef idx="minor">
+            <a:schemeClr val="lt1"/>
+          </a:fontRef>
+        </p:style>
+        <p:txBody>
+          <a:bodyPr rtlCol="0" anchor="ctr"/>
+          <a:lstStyle/>
+          <a:p>
+            <a:pPr algn="ctr"/>
+          </a:p>
+        </p:txBody>
+      </p:sp>
+      <p:sp>
+        <p:nvSpPr>
+          <p:cNvPr id="31" name="TextBox 30"/>
+          <p:cNvSpPr txBox="1"/>
+          <p:nvPr/>
+        </p:nvSpPr>
+        <p:spPr>
+          <a:xfrm>
+            <a:off x="1801368" y="6208776"/>
+            <a:ext cx="2508504" cy="329184"/>
+          </a:xfrm>
+          <a:prstGeom prst="rect">
+            <a:avLst/>
+          </a:prstGeom>
+          <a:noFill/>
+        </p:spPr>
+        <p:txBody>
+          <a:bodyPr wrap="square" lIns="0" rIns="0" tIns="0" bIns="0">
+            <a:spAutoFit/>
+          </a:bodyPr>
+          <a:lstStyle/>
+          <a:p>
+            <a:pPr algn="ctr"/>
+            <a:r>
+              <a:rPr sz="1100" b="1">
+                <a:solidFill>
+                  <a:srgbClr val="111827"/>
+                </a:solidFill>
+                <a:latin typeface="Arial"/>
+              </a:rPr>
+              <a:t>Brainstorm in pairs and list all the</a:t>
+            </a:r>
+          </a:p>
+        </p:txBody>
+      </p:sp>
+      <p:sp>
+        <p:nvSpPr>
+          <p:cNvPr id="32" name="Rounded Rectangle 31"/>
+          <p:cNvSpPr/>
+          <p:nvPr/>
+        </p:nvSpPr>
+        <p:spPr>
+          <a:xfrm>
+            <a:off x="4739640" y="6071616"/>
+            <a:ext cx="2727960" cy="713232"/>
+          </a:xfrm>
+          <a:prstGeom prst="roundRect">
+            <a:avLst/>
+          </a:prstGeom>
+          <a:solidFill>
+            <a:srgbClr val="FFFFFF"/>
+          </a:solidFill>
+          <a:ln w="11430">
+            <a:solidFill>
+              <a:srgbClr val="1B7F3A"/>
+            </a:solidFill>
+          </a:ln>
+        </p:spPr>
+        <p:style>
+          <a:lnRef idx="1">
+            <a:schemeClr val="accent1"/>
+          </a:lnRef>
+          <a:fillRef idx="3">
+            <a:schemeClr val="accent1"/>
+          </a:fillRef>
+          <a:effectRef idx="2">
+            <a:schemeClr val="accent1"/>
+          </a:effectRef>
+          <a:fontRef idx="minor">
+            <a:schemeClr val="lt1"/>
+          </a:fontRef>
+        </p:style>
+        <p:txBody>
+          <a:bodyPr rtlCol="0" anchor="ctr"/>
+          <a:lstStyle/>
+          <a:p>
+            <a:pPr algn="ctr"/>
+          </a:p>
+        </p:txBody>
+      </p:sp>
+      <p:sp>
+        <p:nvSpPr>
+          <p:cNvPr id="33" name="TextBox 32"/>
+          <p:cNvSpPr txBox="1"/>
+          <p:nvPr/>
+        </p:nvSpPr>
+        <p:spPr>
+          <a:xfrm>
+            <a:off x="4849368" y="6208776"/>
+            <a:ext cx="2508504" cy="329184"/>
+          </a:xfrm>
+          <a:prstGeom prst="rect">
+            <a:avLst/>
+          </a:prstGeom>
+          <a:noFill/>
+        </p:spPr>
+        <p:txBody>
+          <a:bodyPr wrap="square" lIns="0" rIns="0" tIns="0" bIns="0">
+            <a:spAutoFit/>
+          </a:bodyPr>
+          <a:lstStyle/>
+          <a:p>
+            <a:pPr algn="ctr"/>
+            <a:r>
+              <a:rPr sz="1100" b="1">
+                <a:solidFill>
+                  <a:srgbClr val="111827"/>
+                </a:solidFill>
+                <a:latin typeface="Arial"/>
+              </a:rPr>
+              <a:t>Copy the report structure into their notebooks</a:t>
+            </a:r>
+          </a:p>
+        </p:txBody>
+      </p:sp>
+      <p:sp>
+        <p:nvSpPr>
+          <p:cNvPr id="34" name="Rounded Rectangle 33"/>
+          <p:cNvSpPr/>
+          <p:nvPr/>
+        </p:nvSpPr>
+        <p:spPr>
+          <a:xfrm>
+            <a:off x="7787640" y="6071616"/>
+            <a:ext cx="2727960" cy="713232"/>
+          </a:xfrm>
+          <a:prstGeom prst="roundRect">
+            <a:avLst/>
+          </a:prstGeom>
+          <a:solidFill>
+            <a:srgbClr val="FFFFFF"/>
+          </a:solidFill>
+          <a:ln w="11430">
+            <a:solidFill>
+              <a:srgbClr val="1B7F3A"/>
+            </a:solidFill>
+          </a:ln>
+        </p:spPr>
+        <p:style>
+          <a:lnRef idx="1">
+            <a:schemeClr val="accent1"/>
+          </a:lnRef>
+          <a:fillRef idx="3">
+            <a:schemeClr val="accent1"/>
+          </a:fillRef>
+          <a:effectRef idx="2">
+            <a:schemeClr val="accent1"/>
+          </a:effectRef>
+          <a:fontRef idx="minor">
+            <a:schemeClr val="lt1"/>
+          </a:fontRef>
+        </p:style>
+        <p:txBody>
+          <a:bodyPr rtlCol="0" anchor="ctr"/>
+          <a:lstStyle/>
+          <a:p>
+            <a:pPr algn="ctr"/>
+          </a:p>
+        </p:txBody>
+      </p:sp>
+      <p:sp>
+        <p:nvSpPr>
+          <p:cNvPr id="35" name="TextBox 34"/>
+          <p:cNvSpPr txBox="1"/>
+          <p:nvPr/>
+        </p:nvSpPr>
+        <p:spPr>
+          <a:xfrm>
+            <a:off x="7897368" y="6208776"/>
+            <a:ext cx="2508504" cy="329184"/>
+          </a:xfrm>
+          <a:prstGeom prst="rect">
+            <a:avLst/>
+          </a:prstGeom>
+          <a:noFill/>
+        </p:spPr>
+        <p:txBody>
+          <a:bodyPr wrap="square" lIns="0" rIns="0" tIns="0" bIns="0">
+            <a:spAutoFit/>
+          </a:bodyPr>
+          <a:lstStyle/>
+          <a:p>
+            <a:pPr algn="ctr"/>
+            <a:r>
+              <a:rPr sz="1100" b="1">
+                <a:solidFill>
+                  <a:srgbClr val="111827"/>
+                </a:solidFill>
+                <a:latin typeface="Arial"/>
+              </a:rPr>
+              <a:t>Participate in a whole-class exercise to</a:t>
+            </a:r>
+          </a:p>
+        </p:txBody>
+      </p:sp>
+      <p:sp>
+        <p:nvSpPr>
+          <p:cNvPr id="36" name="Rounded Rectangle 35"/>
+          <p:cNvSpPr/>
+          <p:nvPr/>
+        </p:nvSpPr>
+        <p:spPr>
+          <a:xfrm>
+            <a:off x="3703320" y="5650992"/>
+            <a:ext cx="5440680" cy="457200"/>
+          </a:xfrm>
+          <a:prstGeom prst="roundRect">
+            <a:avLst/>
+          </a:prstGeom>
+          <a:solidFill>
+            <a:srgbClr val="FFFFFF"/>
+          </a:solidFill>
+          <a:ln w="12700">
+            <a:solidFill>
+              <a:srgbClr val="D90000"/>
+            </a:solidFill>
+          </a:ln>
+        </p:spPr>
+        <p:style>
+          <a:lnRef idx="1">
+            <a:schemeClr val="accent1"/>
+          </a:lnRef>
+          <a:fillRef idx="3">
+            <a:schemeClr val="accent1"/>
+          </a:fillRef>
+          <a:effectRef idx="2">
+            <a:schemeClr val="accent1"/>
+          </a:effectRef>
+          <a:fontRef idx="minor">
+            <a:schemeClr val="lt1"/>
+          </a:fontRef>
+        </p:style>
+        <p:txBody>
+          <a:bodyPr rtlCol="0" anchor="ctr"/>
+          <a:lstStyle/>
+          <a:p>
+            <a:pPr algn="ctr"/>
+          </a:p>
+        </p:txBody>
+      </p:sp>
+      <p:sp>
+        <p:nvSpPr>
+          <p:cNvPr id="37" name="TextBox 36"/>
+          <p:cNvSpPr txBox="1"/>
+          <p:nvPr/>
+        </p:nvSpPr>
+        <p:spPr>
+          <a:xfrm>
+            <a:off x="3886200" y="5769864"/>
+            <a:ext cx="5074920" cy="164592"/>
+          </a:xfrm>
+          <a:prstGeom prst="rect">
+            <a:avLst/>
+          </a:prstGeom>
+          <a:noFill/>
+        </p:spPr>
+        <p:txBody>
+          <a:bodyPr wrap="square" lIns="0" rIns="0" tIns="0" bIns="0">
+            <a:spAutoFit/>
+          </a:bodyPr>
+          <a:lstStyle/>
+          <a:p>
+            <a:pPr algn="ctr"/>
+            <a:r>
               <a:rPr sz="1100" b="1">
                 <a:solidFill>
                   <a:srgbClr val="D90000"/>
@@ -10476,7 +12388,7 @@
       </p:sp>
       <p:sp>
         <p:nvSpPr>
-          <p:cNvPr id="26" name="TextBox 25"/>
+          <p:cNvPr id="38" name="TextBox 37"/>
           <p:cNvSpPr txBox="1"/>
           <p:nvPr/>
         </p:nvSpPr>
